--- a/presentations/finops-gaining-visibility.pptx
+++ b/presentations/finops-gaining-visibility.pptx
@@ -3483,8 +3483,8 @@
         </p:nvSpPr>
         <p:spPr>
           <a:xfrm>
-            <a:off x="548640" y="777240"/>
-            <a:ext cx="10881360" cy="777240"/>
+            <a:off x="548640" y="768096"/>
+            <a:ext cx="11091672" cy="804672"/>
           </a:xfrm>
           <a:prstGeom prst="rect">
             <a:avLst/>
@@ -3500,7 +3500,7 @@
               <a:buNone/>
             </a:pPr>
             <a:r>
-              <a:rPr lang="en-US" sz="3400" b="1" dirty="0">
+              <a:rPr lang="en-US" sz="3100" b="1" dirty="0">
                 <a:solidFill>
                   <a:srgbClr val="1B2430"/>
                 </a:solidFill>
@@ -3510,7 +3510,7 @@
               </a:rPr>
               <a:t>One view across every provider</a:t>
             </a:r>
-            <a:endParaRPr lang="en-US" sz="3400" dirty="0"/>
+            <a:endParaRPr lang="en-US" sz="3100" dirty="0"/>
           </a:p>
         </p:txBody>
       </p:sp>
@@ -4144,8 +4144,8 @@
         </p:nvSpPr>
         <p:spPr>
           <a:xfrm>
-            <a:off x="548640" y="777240"/>
-            <a:ext cx="10881360" cy="777240"/>
+            <a:off x="548640" y="768096"/>
+            <a:ext cx="11091672" cy="804672"/>
           </a:xfrm>
           <a:prstGeom prst="rect">
             <a:avLst/>
@@ -4161,7 +4161,7 @@
               <a:buNone/>
             </a:pPr>
             <a:r>
-              <a:rPr lang="en-US" sz="3400" b="1" dirty="0">
+              <a:rPr lang="en-US" sz="3100" b="1" dirty="0">
                 <a:solidFill>
                   <a:srgbClr val="1B2430"/>
                 </a:solidFill>
@@ -4171,7 +4171,7 @@
               </a:rPr>
               <a:t>Showback, then chargeback</a:t>
             </a:r>
-            <a:endParaRPr lang="en-US" sz="3400" dirty="0"/>
+            <a:endParaRPr lang="en-US" sz="3100" dirty="0"/>
           </a:p>
         </p:txBody>
       </p:sp>
@@ -4250,7 +4250,7 @@
         <p:spPr>
           <a:xfrm>
             <a:off x="1572768" y="2029968"/>
-            <a:ext cx="1828800" cy="585216"/>
+            <a:ext cx="2377440" cy="585216"/>
           </a:xfrm>
           <a:prstGeom prst="rect">
             <a:avLst/>
@@ -4266,7 +4266,7 @@
               <a:buNone/>
             </a:pPr>
             <a:r>
-              <a:rPr lang="en-US" sz="2400" b="1" dirty="0">
+              <a:rPr lang="en-US" sz="2100" b="1" dirty="0">
                 <a:solidFill>
                   <a:srgbClr val="1B2430"/>
                 </a:solidFill>
@@ -4276,7 +4276,7 @@
               </a:rPr>
               <a:t>Showback</a:t>
             </a:r>
-            <a:endParaRPr lang="en-US" sz="2400" dirty="0"/>
+            <a:endParaRPr lang="en-US" sz="2100" dirty="0"/>
           </a:p>
         </p:txBody>
       </p:sp>
@@ -4288,8 +4288,8 @@
         </p:nvSpPr>
         <p:spPr>
           <a:xfrm>
-            <a:off x="3474720" y="2029968"/>
-            <a:ext cx="2157984" cy="585216"/>
+            <a:off x="3977640" y="2029968"/>
+            <a:ext cx="1655064" cy="585216"/>
           </a:xfrm>
           <a:prstGeom prst="rect">
             <a:avLst/>
@@ -4560,7 +4560,7 @@
         <p:spPr>
           <a:xfrm>
             <a:off x="7269480" y="2029968"/>
-            <a:ext cx="1828800" cy="585216"/>
+            <a:ext cx="2377440" cy="585216"/>
           </a:xfrm>
           <a:prstGeom prst="rect">
             <a:avLst/>
@@ -4576,7 +4576,7 @@
               <a:buNone/>
             </a:pPr>
             <a:r>
-              <a:rPr lang="en-US" sz="2400" b="1" dirty="0">
+              <a:rPr lang="en-US" sz="2100" b="1" dirty="0">
                 <a:solidFill>
                   <a:srgbClr val="1B2430"/>
                 </a:solidFill>
@@ -4586,7 +4586,7 @@
               </a:rPr>
               <a:t>Chargeback</a:t>
             </a:r>
-            <a:endParaRPr lang="en-US" sz="2400" dirty="0"/>
+            <a:endParaRPr lang="en-US" sz="2100" dirty="0"/>
           </a:p>
         </p:txBody>
       </p:sp>
@@ -4598,8 +4598,8 @@
         </p:nvSpPr>
         <p:spPr>
           <a:xfrm>
-            <a:off x="9171432" y="2029968"/>
-            <a:ext cx="2157984" cy="585216"/>
+            <a:off x="9674352" y="2029968"/>
+            <a:ext cx="1655064" cy="585216"/>
           </a:xfrm>
           <a:prstGeom prst="rect">
             <a:avLst/>
@@ -4995,8 +4995,8 @@
         </p:nvSpPr>
         <p:spPr>
           <a:xfrm>
-            <a:off x="548640" y="777240"/>
-            <a:ext cx="10881360" cy="777240"/>
+            <a:off x="548640" y="768096"/>
+            <a:ext cx="11091672" cy="804672"/>
           </a:xfrm>
           <a:prstGeom prst="rect">
             <a:avLst/>
@@ -5012,7 +5012,7 @@
               <a:buNone/>
             </a:pPr>
             <a:r>
-              <a:rPr lang="en-US" sz="3400" b="1" dirty="0">
+              <a:rPr lang="en-US" sz="3100" b="1" dirty="0">
                 <a:solidFill>
                   <a:srgbClr val="1B2430"/>
                 </a:solidFill>
@@ -5022,7 +5022,7 @@
               </a:rPr>
               <a:t>What high-performing FinOps teams do</a:t>
             </a:r>
-            <a:endParaRPr lang="en-US" sz="3400" dirty="0"/>
+            <a:endParaRPr lang="en-US" sz="3100" dirty="0"/>
           </a:p>
         </p:txBody>
       </p:sp>
@@ -6026,8 +6026,8 @@
         </p:nvSpPr>
         <p:spPr>
           <a:xfrm>
-            <a:off x="548640" y="777240"/>
-            <a:ext cx="10881360" cy="777240"/>
+            <a:off x="548640" y="768096"/>
+            <a:ext cx="11091672" cy="804672"/>
           </a:xfrm>
           <a:prstGeom prst="rect">
             <a:avLst/>
@@ -6043,7 +6043,7 @@
               <a:buNone/>
             </a:pPr>
             <a:r>
-              <a:rPr lang="en-US" sz="3400" b="1" dirty="0">
+              <a:rPr lang="en-US" sz="3100" b="1" dirty="0">
                 <a:solidFill>
                   <a:srgbClr val="1B2430"/>
                 </a:solidFill>
@@ -6053,7 +6053,7 @@
               </a:rPr>
               <a:t>Where to start</a:t>
             </a:r>
-            <a:endParaRPr lang="en-US" sz="3400" dirty="0"/>
+            <a:endParaRPr lang="en-US" sz="3100" dirty="0"/>
           </a:p>
         </p:txBody>
       </p:sp>
@@ -7011,8 +7011,8 @@
         </p:nvSpPr>
         <p:spPr>
           <a:xfrm>
-            <a:off x="548640" y="777240"/>
-            <a:ext cx="10881360" cy="777240"/>
+            <a:off x="548640" y="768096"/>
+            <a:ext cx="11091672" cy="804672"/>
           </a:xfrm>
           <a:prstGeom prst="rect">
             <a:avLst/>
@@ -7028,7 +7028,7 @@
               <a:buNone/>
             </a:pPr>
             <a:r>
-              <a:rPr lang="en-US" sz="3400" b="1" dirty="0">
+              <a:rPr lang="en-US" sz="3100" b="1" dirty="0">
                 <a:solidFill>
                   <a:srgbClr val="FFFFFF"/>
                 </a:solidFill>
@@ -7036,9 +7036,9 @@
                 <a:ea typeface="Cambria" pitchFamily="34" charset="-122"/>
                 <a:cs typeface="Cambria" pitchFamily="34" charset="-120"/>
               </a:rPr>
-              <a:t>Visibility is not the goal — it is the foundation</a:t>
-            </a:r>
-            <a:endParaRPr lang="en-US" sz="3400" dirty="0"/>
+              <a:t>Visibility is the foundation, not the goal</a:t>
+            </a:r>
+            <a:endParaRPr lang="en-US" sz="3100" dirty="0"/>
           </a:p>
         </p:txBody>
       </p:sp>
@@ -7051,11 +7051,11 @@
         <p:spPr>
           <a:xfrm>
             <a:off x="548640" y="1965960"/>
-            <a:ext cx="2587752" cy="2148840"/>
+            <a:ext cx="2587752" cy="2286000"/>
           </a:xfrm>
           <a:prstGeom prst="roundRect">
             <a:avLst>
-              <a:gd name="adj" fmla="val 3830"/>
+              <a:gd name="adj" fmla="val 3600"/>
             </a:avLst>
           </a:prstGeom>
           <a:solidFill>
@@ -7072,8 +7072,8 @@
         </p:nvSpPr>
         <p:spPr>
           <a:xfrm>
-            <a:off x="804672" y="2212848"/>
-            <a:ext cx="2103120" cy="411480"/>
+            <a:off x="786384" y="2194560"/>
+            <a:ext cx="2121408" cy="384048"/>
           </a:xfrm>
           <a:prstGeom prst="rect">
             <a:avLst/>
@@ -7089,7 +7089,7 @@
               <a:buNone/>
             </a:pPr>
             <a:r>
-              <a:rPr lang="en-US" sz="2100" b="1" dirty="0">
+              <a:rPr lang="en-US" sz="1800" b="1" dirty="0">
                 <a:solidFill>
                   <a:srgbClr val="E39B2C"/>
                 </a:solidFill>
@@ -7099,7 +7099,7 @@
               </a:rPr>
               <a:t>Visibility</a:t>
             </a:r>
-            <a:endParaRPr lang="en-US" sz="2100" dirty="0"/>
+            <a:endParaRPr lang="en-US" sz="1800" dirty="0"/>
           </a:p>
         </p:txBody>
       </p:sp>
@@ -7111,8 +7111,8 @@
         </p:nvSpPr>
         <p:spPr>
           <a:xfrm>
-            <a:off x="804672" y="2651760"/>
-            <a:ext cx="2103120" cy="365760"/>
+            <a:off x="786384" y="2615184"/>
+            <a:ext cx="2121408" cy="457200"/>
           </a:xfrm>
           <a:prstGeom prst="rect">
             <a:avLst/>
@@ -7128,7 +7128,7 @@
               <a:buNone/>
             </a:pPr>
             <a:r>
-              <a:rPr lang="en-US" sz="1350" b="1" dirty="0">
+              <a:rPr lang="en-US" sz="1300" b="1" dirty="0">
                 <a:solidFill>
                   <a:srgbClr val="FFFFFF"/>
                 </a:solidFill>
@@ -7138,7 +7138,7 @@
               </a:rPr>
               <a:t>enables accountability</a:t>
             </a:r>
-            <a:endParaRPr lang="en-US" sz="1350" dirty="0"/>
+            <a:endParaRPr lang="en-US" sz="1300" dirty="0"/>
           </a:p>
         </p:txBody>
       </p:sp>
@@ -7150,8 +7150,8 @@
         </p:nvSpPr>
         <p:spPr>
           <a:xfrm>
-            <a:off x="804672" y="3108960"/>
-            <a:ext cx="2103120" cy="960120"/>
+            <a:off x="786384" y="3154680"/>
+            <a:ext cx="2121408" cy="1005840"/>
           </a:xfrm>
           <a:prstGeom prst="rect">
             <a:avLst/>
@@ -7192,7 +7192,7 @@
         </p:nvSpPr>
         <p:spPr>
           <a:xfrm>
-            <a:off x="3182112" y="2944368"/>
+            <a:off x="3182112" y="2999232"/>
             <a:ext cx="192024" cy="182880"/>
           </a:xfrm>
           <a:prstGeom prst="rightArrow">
@@ -7213,11 +7213,11 @@
         <p:spPr>
           <a:xfrm>
             <a:off x="3383280" y="1965960"/>
-            <a:ext cx="2587752" cy="2148840"/>
+            <a:ext cx="2587752" cy="2286000"/>
           </a:xfrm>
           <a:prstGeom prst="roundRect">
             <a:avLst>
-              <a:gd name="adj" fmla="val 3830"/>
+              <a:gd name="adj" fmla="val 3600"/>
             </a:avLst>
           </a:prstGeom>
           <a:solidFill>
@@ -7234,8 +7234,8 @@
         </p:nvSpPr>
         <p:spPr>
           <a:xfrm>
-            <a:off x="3639312" y="2212848"/>
-            <a:ext cx="2103120" cy="411480"/>
+            <a:off x="3621024" y="2194560"/>
+            <a:ext cx="2121408" cy="384048"/>
           </a:xfrm>
           <a:prstGeom prst="rect">
             <a:avLst/>
@@ -7251,7 +7251,7 @@
               <a:buNone/>
             </a:pPr>
             <a:r>
-              <a:rPr lang="en-US" sz="2100" b="1" dirty="0">
+              <a:rPr lang="en-US" sz="1800" b="1" dirty="0">
                 <a:solidFill>
                   <a:srgbClr val="E39B2C"/>
                 </a:solidFill>
@@ -7261,7 +7261,7 @@
               </a:rPr>
               <a:t>Accountability</a:t>
             </a:r>
-            <a:endParaRPr lang="en-US" sz="2100" dirty="0"/>
+            <a:endParaRPr lang="en-US" sz="1800" dirty="0"/>
           </a:p>
         </p:txBody>
       </p:sp>
@@ -7273,8 +7273,8 @@
         </p:nvSpPr>
         <p:spPr>
           <a:xfrm>
-            <a:off x="3639312" y="2651760"/>
-            <a:ext cx="2103120" cy="365760"/>
+            <a:off x="3621024" y="2615184"/>
+            <a:ext cx="2121408" cy="457200"/>
           </a:xfrm>
           <a:prstGeom prst="rect">
             <a:avLst/>
@@ -7290,7 +7290,7 @@
               <a:buNone/>
             </a:pPr>
             <a:r>
-              <a:rPr lang="en-US" sz="1350" b="1" dirty="0">
+              <a:rPr lang="en-US" sz="1300" b="1" dirty="0">
                 <a:solidFill>
                   <a:srgbClr val="FFFFFF"/>
                 </a:solidFill>
@@ -7300,7 +7300,7 @@
               </a:rPr>
               <a:t>drives behaviour</a:t>
             </a:r>
-            <a:endParaRPr lang="en-US" sz="1350" dirty="0"/>
+            <a:endParaRPr lang="en-US" sz="1300" dirty="0"/>
           </a:p>
         </p:txBody>
       </p:sp>
@@ -7312,8 +7312,8 @@
         </p:nvSpPr>
         <p:spPr>
           <a:xfrm>
-            <a:off x="3639312" y="3108960"/>
-            <a:ext cx="2103120" cy="960120"/>
+            <a:off x="3621024" y="3154680"/>
+            <a:ext cx="2121408" cy="1005840"/>
           </a:xfrm>
           <a:prstGeom prst="rect">
             <a:avLst/>
@@ -7354,7 +7354,7 @@
         </p:nvSpPr>
         <p:spPr>
           <a:xfrm>
-            <a:off x="6016752" y="2944368"/>
+            <a:off x="6016752" y="2999232"/>
             <a:ext cx="192024" cy="182880"/>
           </a:xfrm>
           <a:prstGeom prst="rightArrow">
@@ -7375,11 +7375,11 @@
         <p:spPr>
           <a:xfrm>
             <a:off x="6217920" y="1965960"/>
-            <a:ext cx="2587752" cy="2148840"/>
+            <a:ext cx="2587752" cy="2286000"/>
           </a:xfrm>
           <a:prstGeom prst="roundRect">
             <a:avLst>
-              <a:gd name="adj" fmla="val 3830"/>
+              <a:gd name="adj" fmla="val 3600"/>
             </a:avLst>
           </a:prstGeom>
           <a:solidFill>
@@ -7396,8 +7396,8 @@
         </p:nvSpPr>
         <p:spPr>
           <a:xfrm>
-            <a:off x="6473952" y="2212848"/>
-            <a:ext cx="2103120" cy="411480"/>
+            <a:off x="6455664" y="2194560"/>
+            <a:ext cx="2121408" cy="384048"/>
           </a:xfrm>
           <a:prstGeom prst="rect">
             <a:avLst/>
@@ -7413,7 +7413,7 @@
               <a:buNone/>
             </a:pPr>
             <a:r>
-              <a:rPr lang="en-US" sz="2100" b="1" dirty="0">
+              <a:rPr lang="en-US" sz="1800" b="1" dirty="0">
                 <a:solidFill>
                   <a:srgbClr val="E39B2C"/>
                 </a:solidFill>
@@ -7423,7 +7423,7 @@
               </a:rPr>
               <a:t>Behaviour</a:t>
             </a:r>
-            <a:endParaRPr lang="en-US" sz="2100" dirty="0"/>
+            <a:endParaRPr lang="en-US" sz="1800" dirty="0"/>
           </a:p>
         </p:txBody>
       </p:sp>
@@ -7435,8 +7435,8 @@
         </p:nvSpPr>
         <p:spPr>
           <a:xfrm>
-            <a:off x="6473952" y="2651760"/>
-            <a:ext cx="2103120" cy="365760"/>
+            <a:off x="6455664" y="2615184"/>
+            <a:ext cx="2121408" cy="457200"/>
           </a:xfrm>
           <a:prstGeom prst="rect">
             <a:avLst/>
@@ -7452,7 +7452,7 @@
               <a:buNone/>
             </a:pPr>
             <a:r>
-              <a:rPr lang="en-US" sz="1350" b="1" dirty="0">
+              <a:rPr lang="en-US" sz="1300" b="1" dirty="0">
                 <a:solidFill>
                   <a:srgbClr val="FFFFFF"/>
                 </a:solidFill>
@@ -7462,7 +7462,7 @@
               </a:rPr>
               <a:t>creates culture</a:t>
             </a:r>
-            <a:endParaRPr lang="en-US" sz="1350" dirty="0"/>
+            <a:endParaRPr lang="en-US" sz="1300" dirty="0"/>
           </a:p>
         </p:txBody>
       </p:sp>
@@ -7474,8 +7474,8 @@
         </p:nvSpPr>
         <p:spPr>
           <a:xfrm>
-            <a:off x="6473952" y="3108960"/>
-            <a:ext cx="2103120" cy="960120"/>
+            <a:off x="6455664" y="3154680"/>
+            <a:ext cx="2121408" cy="1005840"/>
           </a:xfrm>
           <a:prstGeom prst="rect">
             <a:avLst/>
@@ -7516,7 +7516,7 @@
         </p:nvSpPr>
         <p:spPr>
           <a:xfrm>
-            <a:off x="8851392" y="2944368"/>
+            <a:off x="8851392" y="2999232"/>
             <a:ext cx="192024" cy="182880"/>
           </a:xfrm>
           <a:prstGeom prst="rightArrow">
@@ -7537,11 +7537,11 @@
         <p:spPr>
           <a:xfrm>
             <a:off x="9052560" y="1965960"/>
-            <a:ext cx="2587752" cy="2148840"/>
+            <a:ext cx="2587752" cy="2286000"/>
           </a:xfrm>
           <a:prstGeom prst="roundRect">
             <a:avLst>
-              <a:gd name="adj" fmla="val 3830"/>
+              <a:gd name="adj" fmla="val 3600"/>
             </a:avLst>
           </a:prstGeom>
           <a:solidFill>
@@ -7558,8 +7558,8 @@
         </p:nvSpPr>
         <p:spPr>
           <a:xfrm>
-            <a:off x="9308592" y="2212848"/>
-            <a:ext cx="2103120" cy="411480"/>
+            <a:off x="9290304" y="2194560"/>
+            <a:ext cx="2121408" cy="384048"/>
           </a:xfrm>
           <a:prstGeom prst="rect">
             <a:avLst/>
@@ -7575,7 +7575,7 @@
               <a:buNone/>
             </a:pPr>
             <a:r>
-              <a:rPr lang="en-US" sz="2100" b="1" dirty="0">
+              <a:rPr lang="en-US" sz="1800" b="1" dirty="0">
                 <a:solidFill>
                   <a:srgbClr val="E39B2C"/>
                 </a:solidFill>
@@ -7585,7 +7585,7 @@
               </a:rPr>
               <a:t>Culture</a:t>
             </a:r>
-            <a:endParaRPr lang="en-US" sz="2100" dirty="0"/>
+            <a:endParaRPr lang="en-US" sz="1800" dirty="0"/>
           </a:p>
         </p:txBody>
       </p:sp>
@@ -7597,8 +7597,8 @@
         </p:nvSpPr>
         <p:spPr>
           <a:xfrm>
-            <a:off x="9308592" y="2651760"/>
-            <a:ext cx="2103120" cy="365760"/>
+            <a:off x="9290304" y="2615184"/>
+            <a:ext cx="2121408" cy="457200"/>
           </a:xfrm>
           <a:prstGeom prst="rect">
             <a:avLst/>
@@ -7614,7 +7614,7 @@
               <a:buNone/>
             </a:pPr>
             <a:r>
-              <a:rPr lang="en-US" sz="1350" b="1" dirty="0">
+              <a:rPr lang="en-US" sz="1300" b="1" dirty="0">
                 <a:solidFill>
                   <a:srgbClr val="FFFFFF"/>
                 </a:solidFill>
@@ -7624,7 +7624,7 @@
               </a:rPr>
               <a:t>sustains savings</a:t>
             </a:r>
-            <a:endParaRPr lang="en-US" sz="1350" dirty="0"/>
+            <a:endParaRPr lang="en-US" sz="1300" dirty="0"/>
           </a:p>
         </p:txBody>
       </p:sp>
@@ -7636,8 +7636,8 @@
         </p:nvSpPr>
         <p:spPr>
           <a:xfrm>
-            <a:off x="9308592" y="3108960"/>
-            <a:ext cx="2103120" cy="960120"/>
+            <a:off x="9290304" y="3154680"/>
+            <a:ext cx="2121408" cy="1005840"/>
           </a:xfrm>
           <a:prstGeom prst="rect">
             <a:avLst/>
@@ -9105,8 +9105,8 @@
         </p:nvSpPr>
         <p:spPr>
           <a:xfrm>
-            <a:off x="548640" y="777240"/>
-            <a:ext cx="10881360" cy="777240"/>
+            <a:off x="548640" y="768096"/>
+            <a:ext cx="11091672" cy="804672"/>
           </a:xfrm>
           <a:prstGeom prst="rect">
             <a:avLst/>
@@ -9122,7 +9122,7 @@
               <a:buNone/>
             </a:pPr>
             <a:r>
-              <a:rPr lang="en-US" sz="3400" b="1" dirty="0">
+              <a:rPr lang="en-US" sz="3100" b="1" dirty="0">
                 <a:solidFill>
                   <a:srgbClr val="1B2430"/>
                 </a:solidFill>
@@ -9132,7 +9132,7 @@
               </a:rPr>
               <a:t>Cloud spend is dynamic, distributed and opaque</a:t>
             </a:r>
-            <a:endParaRPr lang="en-US" sz="3400" dirty="0"/>
+            <a:endParaRPr lang="en-US" sz="3100" dirty="0"/>
           </a:p>
         </p:txBody>
       </p:sp>
@@ -9801,8 +9801,8 @@
         </p:nvSpPr>
         <p:spPr>
           <a:xfrm>
-            <a:off x="548640" y="777240"/>
-            <a:ext cx="10881360" cy="777240"/>
+            <a:off x="548640" y="768096"/>
+            <a:ext cx="11091672" cy="804672"/>
           </a:xfrm>
           <a:prstGeom prst="rect">
             <a:avLst/>
@@ -9818,7 +9818,7 @@
               <a:buNone/>
             </a:pPr>
             <a:r>
-              <a:rPr lang="en-US" sz="3400" b="1" dirty="0">
+              <a:rPr lang="en-US" sz="3100" b="1" dirty="0">
                 <a:solidFill>
                   <a:srgbClr val="1B2430"/>
                 </a:solidFill>
@@ -9828,7 +9828,7 @@
               </a:rPr>
               <a:t>FinOps = Finance + DevOps</a:t>
             </a:r>
-            <a:endParaRPr lang="en-US" sz="3400" dirty="0"/>
+            <a:endParaRPr lang="en-US" sz="3100" dirty="0"/>
           </a:p>
         </p:txBody>
       </p:sp>
@@ -10639,8 +10639,8 @@
         </p:nvSpPr>
         <p:spPr>
           <a:xfrm>
-            <a:off x="548640" y="777240"/>
-            <a:ext cx="10881360" cy="777240"/>
+            <a:off x="548640" y="768096"/>
+            <a:ext cx="11091672" cy="804672"/>
           </a:xfrm>
           <a:prstGeom prst="rect">
             <a:avLst/>
@@ -10656,7 +10656,7 @@
               <a:buNone/>
             </a:pPr>
             <a:r>
-              <a:rPr lang="en-US" sz="3400" b="1" dirty="0">
+              <a:rPr lang="en-US" sz="3100" b="1" dirty="0">
                 <a:solidFill>
                   <a:srgbClr val="1B2430"/>
                 </a:solidFill>
@@ -10666,7 +10666,7 @@
               </a:rPr>
               <a:t>You cannot optimize what you cannot see</a:t>
             </a:r>
-            <a:endParaRPr lang="en-US" sz="3400" dirty="0"/>
+            <a:endParaRPr lang="en-US" sz="3100" dirty="0"/>
           </a:p>
         </p:txBody>
       </p:sp>
@@ -11270,8 +11270,8 @@
         </p:nvSpPr>
         <p:spPr>
           <a:xfrm>
-            <a:off x="548640" y="777240"/>
-            <a:ext cx="10881360" cy="777240"/>
+            <a:off x="548640" y="768096"/>
+            <a:ext cx="11091672" cy="804672"/>
           </a:xfrm>
           <a:prstGeom prst="rect">
             <a:avLst/>
@@ -11287,7 +11287,7 @@
               <a:buNone/>
             </a:pPr>
             <a:r>
-              <a:rPr lang="en-US" sz="3400" b="1" dirty="0">
+              <a:rPr lang="en-US" sz="3100" b="1" dirty="0">
                 <a:solidFill>
                   <a:srgbClr val="1B2430"/>
                 </a:solidFill>
@@ -11297,7 +11297,7 @@
               </a:rPr>
               <a:t>What “good visibility” looks like</a:t>
             </a:r>
-            <a:endParaRPr lang="en-US" sz="3400" dirty="0"/>
+            <a:endParaRPr lang="en-US" sz="3100" dirty="0"/>
           </a:p>
         </p:txBody>
       </p:sp>
@@ -12117,8 +12117,8 @@
         </p:nvSpPr>
         <p:spPr>
           <a:xfrm>
-            <a:off x="548640" y="777240"/>
-            <a:ext cx="10881360" cy="777240"/>
+            <a:off x="548640" y="768096"/>
+            <a:ext cx="11091672" cy="804672"/>
           </a:xfrm>
           <a:prstGeom prst="rect">
             <a:avLst/>
@@ -12134,7 +12134,7 @@
               <a:buNone/>
             </a:pPr>
             <a:r>
-              <a:rPr lang="en-US" sz="3400" b="1" dirty="0">
+              <a:rPr lang="en-US" sz="3100" b="1" dirty="0">
                 <a:solidFill>
                   <a:srgbClr val="FFFFFF"/>
                 </a:solidFill>
@@ -12144,7 +12144,7 @@
               </a:rPr>
               <a:t>Five filters between us and a clear view</a:t>
             </a:r>
-            <a:endParaRPr lang="en-US" sz="3400" dirty="0"/>
+            <a:endParaRPr lang="en-US" sz="3100" dirty="0"/>
           </a:p>
         </p:txBody>
       </p:sp>
@@ -12986,8 +12986,8 @@
         </p:nvSpPr>
         <p:spPr>
           <a:xfrm>
-            <a:off x="548640" y="777240"/>
-            <a:ext cx="10881360" cy="777240"/>
+            <a:off x="548640" y="768096"/>
+            <a:ext cx="11091672" cy="804672"/>
           </a:xfrm>
           <a:prstGeom prst="rect">
             <a:avLst/>
@@ -13003,7 +13003,7 @@
               <a:buNone/>
             </a:pPr>
             <a:r>
-              <a:rPr lang="en-US" sz="3400" b="1" dirty="0">
+              <a:rPr lang="en-US" sz="3100" b="1" dirty="0">
                 <a:solidFill>
                   <a:srgbClr val="1B2430"/>
                 </a:solidFill>
@@ -13013,7 +13013,7 @@
               </a:rPr>
               <a:t>The foundation of all visibility</a:t>
             </a:r>
-            <a:endParaRPr lang="en-US" sz="3400" dirty="0"/>
+            <a:endParaRPr lang="en-US" sz="3100" dirty="0"/>
           </a:p>
         </p:txBody>
       </p:sp>
@@ -14018,8 +14018,8 @@
         </p:nvSpPr>
         <p:spPr>
           <a:xfrm>
-            <a:off x="548640" y="777240"/>
-            <a:ext cx="10881360" cy="777240"/>
+            <a:off x="548640" y="768096"/>
+            <a:ext cx="11091672" cy="804672"/>
           </a:xfrm>
           <a:prstGeom prst="rect">
             <a:avLst/>
@@ -14035,7 +14035,7 @@
               <a:buNone/>
             </a:pPr>
             <a:r>
-              <a:rPr lang="en-US" sz="3400" b="1" dirty="0">
+              <a:rPr lang="en-US" sz="3100" b="1" dirty="0">
                 <a:solidFill>
                   <a:srgbClr val="1B2430"/>
                 </a:solidFill>
@@ -14045,7 +14045,7 @@
               </a:rPr>
               <a:t>Attributing costs that belong to everyone</a:t>
             </a:r>
-            <a:endParaRPr lang="en-US" sz="3400" dirty="0"/>
+            <a:endParaRPr lang="en-US" sz="3100" dirty="0"/>
           </a:p>
         </p:txBody>
       </p:sp>
@@ -14826,8 +14826,8 @@
         </p:nvSpPr>
         <p:spPr>
           <a:xfrm>
-            <a:off x="548640" y="777240"/>
-            <a:ext cx="10881360" cy="777240"/>
+            <a:off x="548640" y="768096"/>
+            <a:ext cx="11091672" cy="804672"/>
           </a:xfrm>
           <a:prstGeom prst="rect">
             <a:avLst/>
@@ -14843,7 +14843,7 @@
               <a:buNone/>
             </a:pPr>
             <a:r>
-              <a:rPr lang="en-US" sz="3400" b="1" dirty="0">
+              <a:rPr lang="en-US" sz="3100" b="1" dirty="0">
                 <a:solidFill>
                   <a:srgbClr val="1B2430"/>
                 </a:solidFill>
@@ -14851,9 +14851,9 @@
                 <a:ea typeface="Cambria" pitchFamily="34" charset="-122"/>
                 <a:cs typeface="Cambria" pitchFamily="34" charset="-120"/>
               </a:rPr>
-              <a:t>Making Reserved Instances and Savings Plans visible</a:t>
-            </a:r>
-            <a:endParaRPr lang="en-US" sz="3400" dirty="0"/>
+              <a:t>Making the price we actually pay visible</a:t>
+            </a:r>
+            <a:endParaRPr lang="en-US" sz="3100" dirty="0"/>
           </a:p>
         </p:txBody>
       </p:sp>
@@ -14933,8 +14933,8 @@
         </p:nvSpPr>
         <p:spPr>
           <a:xfrm>
-            <a:off x="822960" y="2651760"/>
-            <a:ext cx="2971800" cy="960120"/>
+            <a:off x="804672" y="2615184"/>
+            <a:ext cx="3017520" cy="960120"/>
           </a:xfrm>
           <a:prstGeom prst="rect">
             <a:avLst/>
@@ -14950,7 +14950,7 @@
               <a:buNone/>
             </a:pPr>
             <a:r>
-              <a:rPr lang="en-US" sz="5600" b="1" dirty="0">
+              <a:rPr lang="en-US" sz="4600" b="1" dirty="0">
                 <a:solidFill>
                   <a:srgbClr val="E39B2C"/>
                 </a:solidFill>
@@ -14960,7 +14960,7 @@
               </a:rPr>
               <a:t>60–80%</a:t>
             </a:r>
-            <a:endParaRPr lang="en-US" sz="5600" dirty="0"/>
+            <a:endParaRPr lang="en-US" sz="4600" dirty="0"/>
           </a:p>
         </p:txBody>
       </p:sp>

--- a/presentations/finops-gaining-visibility.pptx
+++ b/presentations/finops-gaining-visibility.pptx
@@ -6066,11 +6066,11 @@
         <p:spPr>
           <a:xfrm>
             <a:off x="548640" y="1783080"/>
-            <a:ext cx="2587752" cy="2377440"/>
+            <a:ext cx="2587752" cy="2423160"/>
           </a:xfrm>
           <a:prstGeom prst="roundRect">
             <a:avLst>
-              <a:gd name="adj" fmla="val 3462"/>
+              <a:gd name="adj" fmla="val 3396"/>
             </a:avLst>
           </a:prstGeom>
           <a:solidFill>
@@ -6126,8 +6126,8 @@
         </p:nvSpPr>
         <p:spPr>
           <a:xfrm>
-            <a:off x="804672" y="2542032"/>
-            <a:ext cx="2103120" cy="658368"/>
+            <a:off x="786384" y="2523744"/>
+            <a:ext cx="2139696" cy="786384"/>
           </a:xfrm>
           <a:prstGeom prst="rect">
             <a:avLst/>
@@ -6146,7 +6146,7 @@
               <a:buNone/>
             </a:pPr>
             <a:r>
-              <a:rPr lang="en-US" sz="1600" b="1" dirty="0">
+              <a:rPr lang="en-US" sz="1500" b="1" dirty="0">
                 <a:solidFill>
                   <a:srgbClr val="FFFFFF"/>
                 </a:solidFill>
@@ -6156,7 +6156,7 @@
               </a:rPr>
               <a:t>Set the tagging standard</a:t>
             </a:r>
-            <a:endParaRPr lang="en-US" sz="1600" dirty="0"/>
+            <a:endParaRPr lang="en-US" sz="1500" dirty="0"/>
           </a:p>
         </p:txBody>
       </p:sp>
@@ -6168,8 +6168,8 @@
         </p:nvSpPr>
         <p:spPr>
           <a:xfrm>
-            <a:off x="804672" y="3218688"/>
-            <a:ext cx="2103120" cy="822960"/>
+            <a:off x="786384" y="3346704"/>
+            <a:ext cx="2139696" cy="749808"/>
           </a:xfrm>
           <a:prstGeom prst="rect">
             <a:avLst/>
@@ -6211,11 +6211,11 @@
         <p:spPr>
           <a:xfrm>
             <a:off x="3383280" y="1783080"/>
-            <a:ext cx="2587752" cy="2377440"/>
+            <a:ext cx="2587752" cy="2423160"/>
           </a:xfrm>
           <a:prstGeom prst="roundRect">
             <a:avLst>
-              <a:gd name="adj" fmla="val 3462"/>
+              <a:gd name="adj" fmla="val 3396"/>
             </a:avLst>
           </a:prstGeom>
           <a:solidFill>
@@ -6271,8 +6271,8 @@
         </p:nvSpPr>
         <p:spPr>
           <a:xfrm>
-            <a:off x="3639312" y="2542032"/>
-            <a:ext cx="2103120" cy="658368"/>
+            <a:off x="3621024" y="2523744"/>
+            <a:ext cx="2139696" cy="786384"/>
           </a:xfrm>
           <a:prstGeom prst="rect">
             <a:avLst/>
@@ -6291,7 +6291,7 @@
               <a:buNone/>
             </a:pPr>
             <a:r>
-              <a:rPr lang="en-US" sz="1600" b="1" dirty="0">
+              <a:rPr lang="en-US" sz="1500" b="1" dirty="0">
                 <a:solidFill>
                   <a:srgbClr val="1B2430"/>
                 </a:solidFill>
@@ -6301,7 +6301,7 @@
               </a:rPr>
               <a:t>Start with the biggest spend</a:t>
             </a:r>
-            <a:endParaRPr lang="en-US" sz="1600" dirty="0"/>
+            <a:endParaRPr lang="en-US" sz="1500" dirty="0"/>
           </a:p>
         </p:txBody>
       </p:sp>
@@ -6313,8 +6313,8 @@
         </p:nvSpPr>
         <p:spPr>
           <a:xfrm>
-            <a:off x="3639312" y="3218688"/>
-            <a:ext cx="2103120" cy="822960"/>
+            <a:off x="3621024" y="3346704"/>
+            <a:ext cx="2139696" cy="749808"/>
           </a:xfrm>
           <a:prstGeom prst="rect">
             <a:avLst/>
@@ -6356,11 +6356,11 @@
         <p:spPr>
           <a:xfrm>
             <a:off x="6217920" y="1783080"/>
-            <a:ext cx="2587752" cy="2377440"/>
+            <a:ext cx="2587752" cy="2423160"/>
           </a:xfrm>
           <a:prstGeom prst="roundRect">
             <a:avLst>
-              <a:gd name="adj" fmla="val 3462"/>
+              <a:gd name="adj" fmla="val 3396"/>
             </a:avLst>
           </a:prstGeom>
           <a:solidFill>
@@ -6416,8 +6416,8 @@
         </p:nvSpPr>
         <p:spPr>
           <a:xfrm>
-            <a:off x="6473952" y="2542032"/>
-            <a:ext cx="2103120" cy="658368"/>
+            <a:off x="6455664" y="2523744"/>
+            <a:ext cx="2139696" cy="786384"/>
           </a:xfrm>
           <a:prstGeom prst="rect">
             <a:avLst/>
@@ -6436,7 +6436,7 @@
               <a:buNone/>
             </a:pPr>
             <a:r>
-              <a:rPr lang="en-US" sz="1600" b="1" dirty="0">
+              <a:rPr lang="en-US" sz="1500" b="1" dirty="0">
                 <a:solidFill>
                   <a:srgbClr val="1B2430"/>
                 </a:solidFill>
@@ -6446,7 +6446,7 @@
               </a:rPr>
               <a:t>Get finance and engineering talking</a:t>
             </a:r>
-            <a:endParaRPr lang="en-US" sz="1600" dirty="0"/>
+            <a:endParaRPr lang="en-US" sz="1500" dirty="0"/>
           </a:p>
         </p:txBody>
       </p:sp>
@@ -6458,8 +6458,8 @@
         </p:nvSpPr>
         <p:spPr>
           <a:xfrm>
-            <a:off x="6473952" y="3218688"/>
-            <a:ext cx="2103120" cy="822960"/>
+            <a:off x="6455664" y="3346704"/>
+            <a:ext cx="2139696" cy="749808"/>
           </a:xfrm>
           <a:prstGeom prst="rect">
             <a:avLst/>
@@ -6486,7 +6486,7 @@
                 <a:ea typeface="Calibri" pitchFamily="34" charset="-122"/>
                 <a:cs typeface="Calibri" pitchFamily="34" charset="-120"/>
               </a:rPr>
-              <a:t>Bring both into the same conversation early, not as an afterthought.</a:t>
+              <a:t>Bring both into the conversation early, not as an afterthought.</a:t>
             </a:r>
             <a:endParaRPr lang="en-US" sz="1200" dirty="0"/>
           </a:p>
@@ -6501,11 +6501,11 @@
         <p:spPr>
           <a:xfrm>
             <a:off x="9052560" y="1783080"/>
-            <a:ext cx="2587752" cy="2377440"/>
+            <a:ext cx="2587752" cy="2423160"/>
           </a:xfrm>
           <a:prstGeom prst="roundRect">
             <a:avLst>
-              <a:gd name="adj" fmla="val 3462"/>
+              <a:gd name="adj" fmla="val 3396"/>
             </a:avLst>
           </a:prstGeom>
           <a:solidFill>
@@ -6561,8 +6561,8 @@
         </p:nvSpPr>
         <p:spPr>
           <a:xfrm>
-            <a:off x="9308592" y="2542032"/>
-            <a:ext cx="2103120" cy="658368"/>
+            <a:off x="9290304" y="2523744"/>
+            <a:ext cx="2139696" cy="786384"/>
           </a:xfrm>
           <a:prstGeom prst="rect">
             <a:avLst/>
@@ -6581,7 +6581,7 @@
               <a:buNone/>
             </a:pPr>
             <a:r>
-              <a:rPr lang="en-US" sz="1600" b="1" dirty="0">
+              <a:rPr lang="en-US" sz="1500" b="1" dirty="0">
                 <a:solidFill>
                   <a:srgbClr val="1B2430"/>
                 </a:solidFill>
@@ -6591,7 +6591,7 @@
               </a:rPr>
               <a:t>Choose tools that fit the footprint</a:t>
             </a:r>
-            <a:endParaRPr lang="en-US" sz="1600" dirty="0"/>
+            <a:endParaRPr lang="en-US" sz="1500" dirty="0"/>
           </a:p>
         </p:txBody>
       </p:sp>
@@ -6603,8 +6603,8 @@
         </p:nvSpPr>
         <p:spPr>
           <a:xfrm>
-            <a:off x="9308592" y="3218688"/>
-            <a:ext cx="2103120" cy="822960"/>
+            <a:off x="9290304" y="3346704"/>
+            <a:ext cx="2139696" cy="749808"/>
           </a:xfrm>
           <a:prstGeom prst="rect">
             <a:avLst/>

--- a/presentations/finops-gaining-visibility.pptx
+++ b/presentations/finops-gaining-visibility.pptx
@@ -26,9 +26,10 @@
     <p:sldId id="274" r:id="rId20"/>
     <p:sldId id="275" r:id="rId21"/>
     <p:sldId id="276" r:id="rId22"/>
+    <p:sldId id="277" r:id="rId23"/>
   </p:sldIdLst>
   <p:notesMasterIdLst>
-    <p:notesMasterId r:id="rId23"/>
+    <p:notesMasterId r:id="rId24"/>
   </p:notesMasterIdLst>
   <p:sldSz cx="12192000" cy="6858000"/>
   <p:notesSz cx="6858000" cy="12192000"/>
@@ -1402,7 +1403,7 @@
           <a:p>
             <a:r>
               <a:rPr lang="en-US" dirty="0"/>
-              <a:t>This is the ask. Step 1 is highlighted because it is the only one that cannot be parallelized — everything downstream degrades if the taxonomy is still in flux. Steps 2 and 4 are both arguments against over-engineering: pick the top spend categories and the tooling that matches the estate we actually have, not the one we might have in three years.</a:t>
+              <a:t>The payoff slide for both halves of the deck, and the one to use if someone asks what all this buys. Walk the timeline left to right: the same overrun, found at four different moments, and only the first three leave anyone a decision to make. The fourth point is the status quo — it is not that the invoice is wrong, it is that by the time it arrives the only available action is explaining it. Land the closing line deliberately: we are not promising a smaller bill, and anyone who promises that before seeing the data is guessing. We are promising a bill with nothing surprising in it, which is a different and more defensible commitment.</a:t>
             </a:r>
             <a:endParaRPr lang="en-US" dirty="0"/>
           </a:p>
@@ -1578,7 +1579,7 @@
           <a:p>
             <a:r>
               <a:rPr lang="en-US" dirty="0"/>
-              <a:t>Close on the causal chain rather than a summary of slides. Each link is a separate management commitment: allocation data, published ownership, cost surfaced in the engineering workflow, and a review cadence that keeps it alive. Ask for the first two today; the rest follow from them.</a:t>
+              <a:t>This is the ask. Step 1 is highlighted because it is the only one that cannot be parallelized — everything downstream degrades if the taxonomy is still in flux. Steps 2 and 4 are both arguments against over-engineering: pick the top spend categories and the tooling that matches the estate we actually have, not the one we might have in three years.</a:t>
             </a:r>
             <a:endParaRPr lang="en-US" dirty="0"/>
           </a:p>
@@ -1666,7 +1667,7 @@
           <a:p>
             <a:r>
               <a:rPr lang="en-US" dirty="0"/>
-              <a:t>Anticipate three questions. What will this cost — mostly effort, not licences, if we stay on native tooling. How long until we see savings — allocation coverage improves in weeks, targeted savings follow the first full month of clean data. Who owns it — name the tagging owner and the review cadence before leaving the room, or nothing on the previous slides happens.</a:t>
+              <a:t>Close on the causal chain rather than a summary of slides. Each link is a separate management commitment: allocation data, published ownership, cost surfaced in the engineering workflow, and a review cadence that keeps it alive. Ask for the first two today; the rest follow from them.</a:t>
             </a:r>
             <a:endParaRPr lang="en-US" dirty="0"/>
           </a:p>
@@ -1690,6 +1691,94 @@
             <a:fld id="{F7021451-1387-4CA6-816F-3879F97B5CBC}" type="slidenum">
               <a:rPr lang="en-US"/>
               <a:t>21</a:t>
+            </a:fld>
+            <a:endParaRPr lang="en-US"/>
+          </a:p>
+        </p:txBody>
+      </p:sp>
+    </p:spTree>
+    <p:extLst>
+      <p:ext uri="{BB962C8B-B14F-4D97-AF65-F5344CB8AC3E}">
+        <p14:creationId xmlns:p14="http://schemas.microsoft.com/office/powerpoint/2010/main" val="1024086991"/>
+      </p:ext>
+    </p:extLst>
+  </p:cSld>
+  <p:clrMapOvr>
+    <a:masterClrMapping/>
+  </p:clrMapOvr>
+</p:notes>
+</file>
+
+<file path=ppt/notesSlides/notesSlide22.xml><?xml version="1.0" encoding="utf-8"?>
+<p:notes xmlns:a="http://schemas.openxmlformats.org/drawingml/2006/main" xmlns:r="http://schemas.openxmlformats.org/officeDocument/2006/relationships" xmlns:p="http://schemas.openxmlformats.org/presentationml/2006/main">
+  <p:cSld>
+    <p:spTree>
+      <p:nvGrpSpPr>
+        <p:cNvPr id="1" name=""/>
+        <p:cNvGrpSpPr/>
+        <p:nvPr/>
+      </p:nvGrpSpPr>
+      <p:grpSpPr>
+        <a:xfrm>
+          <a:off x="0" y="0"/>
+          <a:ext cx="0" cy="0"/>
+          <a:chOff x="0" y="0"/>
+          <a:chExt cx="0" cy="0"/>
+        </a:xfrm>
+      </p:grpSpPr>
+      <p:sp>
+        <p:nvSpPr>
+          <p:cNvPr id="2" name="Slide Image Placeholder 1"/>
+          <p:cNvSpPr>
+            <a:spLocks noGrp="1" noRot="1" noChangeAspect="1"/>
+          </p:cNvSpPr>
+          <p:nvPr>
+            <p:ph type="sldImg"/>
+          </p:nvPr>
+        </p:nvSpPr>
+        <p:spPr/>
+      </p:sp>
+      <p:sp>
+        <p:nvSpPr>
+          <p:cNvPr id="3" name="Notes Placeholder 2"/>
+          <p:cNvSpPr>
+            <a:spLocks noGrp="1"/>
+          </p:cNvSpPr>
+          <p:nvPr>
+            <p:ph type="body" idx="1"/>
+          </p:nvPr>
+        </p:nvSpPr>
+        <p:spPr/>
+        <p:txBody>
+          <a:bodyPr/>
+          <a:lstStyle/>
+          <a:p>
+            <a:r>
+              <a:rPr lang="en-US" dirty="0"/>
+              <a:t>Anticipate three questions. What will this cost — mostly effort, not licences, if we stay on native tooling. How long until we see savings — allocation coverage improves in weeks, targeted savings follow the first full month of clean data. Who owns it — name the tagging owner and the review cadence before leaving the room, or nothing on the previous slides happens.</a:t>
+            </a:r>
+            <a:endParaRPr lang="en-US" dirty="0"/>
+          </a:p>
+        </p:txBody>
+      </p:sp>
+      <p:sp>
+        <p:nvSpPr>
+          <p:cNvPr id="4" name="Slide Number Placeholder 3"/>
+          <p:cNvSpPr>
+            <a:spLocks noGrp="1"/>
+          </p:cNvSpPr>
+          <p:nvPr>
+            <p:ph type="sldNum" sz="quarter" idx="10"/>
+          </p:nvPr>
+        </p:nvSpPr>
+        <p:spPr/>
+        <p:txBody>
+          <a:bodyPr/>
+          <a:lstStyle/>
+          <a:p>
+            <a:fld id="{F7021451-1387-4CA6-816F-3879F97B5CBC}" type="slidenum">
+              <a:rPr lang="en-US"/>
+              <a:t>22</a:t>
             </a:fld>
             <a:endParaRPr lang="en-US"/>
           </a:p>
@@ -12157,7 +12246,7 @@
                 <a:ea typeface="Calibri" pitchFamily="34" charset="-122"/>
                 <a:cs typeface="Calibri" pitchFamily="34" charset="-120"/>
               </a:rPr>
-              <a:t>THE PATH FORWARD</a:t>
+              <a:t>GOVERNANCE — PUTTING IT TOGETHER</a:t>
             </a:r>
             <a:endParaRPr lang="en-US" sz="1100" dirty="0"/>
           </a:p>
@@ -12196,7 +12285,7 @@
                 <a:ea typeface="Cambria" pitchFamily="34" charset="-122"/>
                 <a:cs typeface="Cambria" pitchFamily="34" charset="-120"/>
               </a:rPr>
-              <a:t>Where to start</a:t>
+              <a:t>Nobody should learn it from the invoice</a:t>
             </a:r>
             <a:endParaRPr lang="en-US" sz="3100" dirty="0"/>
           </a:p>
@@ -12204,876 +12293,1145 @@
       </p:sp>
       <p:sp>
         <p:nvSpPr>
-          <p:cNvPr id="4" name="Shape 2"/>
-          <p:cNvSpPr/>
-          <p:nvPr/>
-        </p:nvSpPr>
-        <p:spPr>
-          <a:xfrm>
-            <a:off x="548640" y="1783080"/>
-            <a:ext cx="2587752" cy="2423160"/>
+          <p:cNvPr id="4" name="Text 2"/>
+          <p:cNvSpPr/>
+          <p:nvPr/>
+        </p:nvSpPr>
+        <p:spPr>
+          <a:xfrm>
+            <a:off x="548640" y="1536192"/>
+            <a:ext cx="10607040" cy="365760"/>
+          </a:xfrm>
+          <a:prstGeom prst="rect">
+            <a:avLst/>
+          </a:prstGeom>
+          <a:noFill/>
+          <a:ln/>
+        </p:spPr>
+        <p:txBody>
+          <a:bodyPr wrap="square" lIns="0" tIns="0" rIns="0" bIns="0" rtlCol="0" anchor="ctr"/>
+          <a:lstStyle/>
+          <a:p>
+            <a:pPr indent="0" marL="0">
+              <a:buNone/>
+            </a:pPr>
+            <a:r>
+              <a:rPr lang="en-US" sz="1500" dirty="0">
+                <a:solidFill>
+                  <a:srgbClr val="5C6675"/>
+                </a:solidFill>
+                <a:latin typeface="Calibri" pitchFamily="34" charset="0"/>
+                <a:ea typeface="Calibri" pitchFamily="34" charset="-122"/>
+                <a:cs typeface="Calibri" pitchFamily="34" charset="-120"/>
+              </a:rPr>
+              <a:t>The same overrun, found at four different moments. Only the first three leave you anything to do about it.</a:t>
+            </a:r>
+            <a:endParaRPr lang="en-US" sz="1500" dirty="0"/>
+          </a:p>
+        </p:txBody>
+      </p:sp>
+      <p:sp>
+        <p:nvSpPr>
+          <p:cNvPr id="5" name="Shape 3"/>
+          <p:cNvSpPr/>
+          <p:nvPr/>
+        </p:nvSpPr>
+        <p:spPr>
+          <a:xfrm>
+            <a:off x="1737360" y="3127248"/>
+            <a:ext cx="8714232" cy="45720"/>
           </a:xfrm>
           <a:prstGeom prst="roundRect">
             <a:avLst>
-              <a:gd name="adj" fmla="val 3396"/>
+              <a:gd name="adj" fmla="val 40000"/>
             </a:avLst>
           </a:prstGeom>
           <a:solidFill>
+            <a:srgbClr val="DFE4EA"/>
+          </a:solidFill>
+          <a:ln/>
+        </p:spPr>
+      </p:sp>
+      <p:sp>
+        <p:nvSpPr>
+          <p:cNvPr id="6" name="Text 4"/>
+          <p:cNvSpPr/>
+          <p:nvPr/>
+        </p:nvSpPr>
+        <p:spPr>
+          <a:xfrm>
+            <a:off x="548640" y="2212848"/>
+            <a:ext cx="2377440" cy="310896"/>
+          </a:xfrm>
+          <a:prstGeom prst="rect">
+            <a:avLst/>
+          </a:prstGeom>
+          <a:noFill/>
+          <a:ln/>
+        </p:spPr>
+        <p:txBody>
+          <a:bodyPr wrap="square" lIns="0" tIns="0" rIns="0" bIns="0" rtlCol="0" anchor="ctr"/>
+          <a:lstStyle/>
+          <a:p>
+            <a:pPr algn="ctr" indent="0" marL="0">
+              <a:buNone/>
+            </a:pPr>
+            <a:r>
+              <a:rPr lang="en-US" sz="1400" b="1" dirty="0">
+                <a:solidFill>
+                  <a:srgbClr val="1B2430"/>
+                </a:solidFill>
+                <a:latin typeface="Calibri" pitchFamily="34" charset="0"/>
+                <a:ea typeface="Calibri" pitchFamily="34" charset="-122"/>
+                <a:cs typeface="Calibri" pitchFamily="34" charset="-120"/>
+              </a:rPr>
+              <a:t>Usage burn alert</a:t>
+            </a:r>
+            <a:endParaRPr lang="en-US" sz="1400" dirty="0"/>
+          </a:p>
+        </p:txBody>
+      </p:sp>
+      <p:sp>
+        <p:nvSpPr>
+          <p:cNvPr id="7" name="Text 5"/>
+          <p:cNvSpPr/>
+          <p:nvPr/>
+        </p:nvSpPr>
+        <p:spPr>
+          <a:xfrm>
+            <a:off x="548640" y="2542032"/>
+            <a:ext cx="2377440" cy="292608"/>
+          </a:xfrm>
+          <a:prstGeom prst="rect">
+            <a:avLst/>
+          </a:prstGeom>
+          <a:noFill/>
+          <a:ln/>
+        </p:spPr>
+        <p:txBody>
+          <a:bodyPr wrap="square" lIns="0" tIns="0" rIns="0" bIns="0" rtlCol="0" anchor="ctr"/>
+          <a:lstStyle/>
+          <a:p>
+            <a:pPr algn="ctr" indent="0" marL="0">
+              <a:buNone/>
+            </a:pPr>
+            <a:r>
+              <a:rPr lang="en-US" sz="1250" b="1" spc="60" kern="0" dirty="0">
+                <a:solidFill>
+                  <a:srgbClr val="B87B18"/>
+                </a:solidFill>
+                <a:latin typeface="Calibri" pitchFamily="34" charset="0"/>
+                <a:ea typeface="Calibri" pitchFamily="34" charset="-122"/>
+                <a:cs typeface="Calibri" pitchFamily="34" charset="-120"/>
+              </a:rPr>
+              <a:t>~10 minutes</a:t>
+            </a:r>
+            <a:endParaRPr lang="en-US" sz="1250" dirty="0"/>
+          </a:p>
+        </p:txBody>
+      </p:sp>
+      <p:sp>
+        <p:nvSpPr>
+          <p:cNvPr id="8" name="Shape 6"/>
+          <p:cNvSpPr/>
+          <p:nvPr/>
+        </p:nvSpPr>
+        <p:spPr>
+          <a:xfrm>
+            <a:off x="1618488" y="3031236"/>
+            <a:ext cx="237744" cy="237744"/>
+          </a:xfrm>
+          <a:prstGeom prst="ellipse">
+            <a:avLst/>
+          </a:prstGeom>
+          <a:solidFill>
+            <a:srgbClr val="E39B2C"/>
+          </a:solidFill>
+          <a:ln w="25400">
+            <a:solidFill>
+              <a:srgbClr val="FFFFFF"/>
+            </a:solidFill>
+            <a:prstDash val="solid"/>
+          </a:ln>
+        </p:spPr>
+      </p:sp>
+      <p:sp>
+        <p:nvSpPr>
+          <p:cNvPr id="9" name="Text 7"/>
+          <p:cNvSpPr/>
+          <p:nvPr/>
+        </p:nvSpPr>
+        <p:spPr>
+          <a:xfrm>
+            <a:off x="548640" y="3401568"/>
+            <a:ext cx="2377440" cy="566928"/>
+          </a:xfrm>
+          <a:prstGeom prst="rect">
+            <a:avLst/>
+          </a:prstGeom>
+          <a:noFill/>
+          <a:ln/>
+        </p:spPr>
+        <p:txBody>
+          <a:bodyPr wrap="square" lIns="0" tIns="0" rIns="0" bIns="0" rtlCol="0" anchor="t"/>
+          <a:lstStyle/>
+          <a:p>
+            <a:pPr algn="ctr" indent="0" marL="0">
+              <a:lnSpc>
+                <a:spcPts val="1600"/>
+              </a:lnSpc>
+              <a:buNone/>
+            </a:pPr>
+            <a:r>
+              <a:rPr lang="en-US" sz="1200" dirty="0">
+                <a:solidFill>
+                  <a:srgbClr val="5C6675"/>
+                </a:solidFill>
+                <a:latin typeface="Calibri" pitchFamily="34" charset="0"/>
+                <a:ea typeface="Calibri" pitchFamily="34" charset="-122"/>
+                <a:cs typeface="Calibri" pitchFamily="34" charset="-120"/>
+              </a:rPr>
+              <a:t>Throttle it, or confirm it was intended.</a:t>
+            </a:r>
+            <a:endParaRPr lang="en-US" sz="1200" dirty="0"/>
+          </a:p>
+        </p:txBody>
+      </p:sp>
+      <p:sp>
+        <p:nvSpPr>
+          <p:cNvPr id="10" name="Text 8"/>
+          <p:cNvSpPr/>
+          <p:nvPr/>
+        </p:nvSpPr>
+        <p:spPr>
+          <a:xfrm>
+            <a:off x="3566160" y="2212848"/>
+            <a:ext cx="2377440" cy="310896"/>
+          </a:xfrm>
+          <a:prstGeom prst="rect">
+            <a:avLst/>
+          </a:prstGeom>
+          <a:noFill/>
+          <a:ln/>
+        </p:spPr>
+        <p:txBody>
+          <a:bodyPr wrap="square" lIns="0" tIns="0" rIns="0" bIns="0" rtlCol="0" anchor="ctr"/>
+          <a:lstStyle/>
+          <a:p>
+            <a:pPr algn="ctr" indent="0" marL="0">
+              <a:buNone/>
+            </a:pPr>
+            <a:r>
+              <a:rPr lang="en-US" sz="1400" b="1" dirty="0">
+                <a:solidFill>
+                  <a:srgbClr val="1B2430"/>
+                </a:solidFill>
+                <a:latin typeface="Calibri" pitchFamily="34" charset="0"/>
+                <a:ea typeface="Calibri" pitchFamily="34" charset="-122"/>
+                <a:cs typeface="Calibri" pitchFamily="34" charset="-120"/>
+              </a:rPr>
+              <a:t>Daily spend threshold</a:t>
+            </a:r>
+            <a:endParaRPr lang="en-US" sz="1400" dirty="0"/>
+          </a:p>
+        </p:txBody>
+      </p:sp>
+      <p:sp>
+        <p:nvSpPr>
+          <p:cNvPr id="11" name="Text 9"/>
+          <p:cNvSpPr/>
+          <p:nvPr/>
+        </p:nvSpPr>
+        <p:spPr>
+          <a:xfrm>
+            <a:off x="3566160" y="2542032"/>
+            <a:ext cx="2377440" cy="292608"/>
+          </a:xfrm>
+          <a:prstGeom prst="rect">
+            <a:avLst/>
+          </a:prstGeom>
+          <a:noFill/>
+          <a:ln/>
+        </p:spPr>
+        <p:txBody>
+          <a:bodyPr wrap="square" lIns="0" tIns="0" rIns="0" bIns="0" rtlCol="0" anchor="ctr"/>
+          <a:lstStyle/>
+          <a:p>
+            <a:pPr algn="ctr" indent="0" marL="0">
+              <a:buNone/>
+            </a:pPr>
+            <a:r>
+              <a:rPr lang="en-US" sz="1250" b="1" spc="60" kern="0" dirty="0">
+                <a:solidFill>
+                  <a:srgbClr val="1F6B5C"/>
+                </a:solidFill>
+                <a:latin typeface="Calibri" pitchFamily="34" charset="0"/>
+                <a:ea typeface="Calibri" pitchFamily="34" charset="-122"/>
+                <a:cs typeface="Calibri" pitchFamily="34" charset="-120"/>
+              </a:rPr>
+              <a:t>next morning</a:t>
+            </a:r>
+            <a:endParaRPr lang="en-US" sz="1250" dirty="0"/>
+          </a:p>
+        </p:txBody>
+      </p:sp>
+      <p:sp>
+        <p:nvSpPr>
+          <p:cNvPr id="12" name="Shape 10"/>
+          <p:cNvSpPr/>
+          <p:nvPr/>
+        </p:nvSpPr>
+        <p:spPr>
+          <a:xfrm>
+            <a:off x="4636008" y="3031236"/>
+            <a:ext cx="237744" cy="237744"/>
+          </a:xfrm>
+          <a:prstGeom prst="ellipse">
+            <a:avLst/>
+          </a:prstGeom>
+          <a:solidFill>
+            <a:srgbClr val="2E8B7A"/>
+          </a:solidFill>
+          <a:ln w="25400">
+            <a:solidFill>
+              <a:srgbClr val="FFFFFF"/>
+            </a:solidFill>
+            <a:prstDash val="solid"/>
+          </a:ln>
+        </p:spPr>
+      </p:sp>
+      <p:sp>
+        <p:nvSpPr>
+          <p:cNvPr id="13" name="Text 11"/>
+          <p:cNvSpPr/>
+          <p:nvPr/>
+        </p:nvSpPr>
+        <p:spPr>
+          <a:xfrm>
+            <a:off x="3566160" y="3401568"/>
+            <a:ext cx="2377440" cy="566928"/>
+          </a:xfrm>
+          <a:prstGeom prst="rect">
+            <a:avLst/>
+          </a:prstGeom>
+          <a:noFill/>
+          <a:ln/>
+        </p:spPr>
+        <p:txBody>
+          <a:bodyPr wrap="square" lIns="0" tIns="0" rIns="0" bIns="0" rtlCol="0" anchor="t"/>
+          <a:lstStyle/>
+          <a:p>
+            <a:pPr algn="ctr" indent="0" marL="0">
+              <a:lnSpc>
+                <a:spcPts val="1600"/>
+              </a:lnSpc>
+              <a:buNone/>
+            </a:pPr>
+            <a:r>
+              <a:rPr lang="en-US" sz="1200" dirty="0">
+                <a:solidFill>
+                  <a:srgbClr val="5C6675"/>
+                </a:solidFill>
+                <a:latin typeface="Calibri" pitchFamily="34" charset="0"/>
+                <a:ea typeface="Calibri" pitchFamily="34" charset="-122"/>
+                <a:cs typeface="Calibri" pitchFamily="34" charset="-120"/>
+              </a:rPr>
+              <a:t>One team, one number, one owner to ask.</a:t>
+            </a:r>
+            <a:endParaRPr lang="en-US" sz="1200" dirty="0"/>
+          </a:p>
+        </p:txBody>
+      </p:sp>
+      <p:sp>
+        <p:nvSpPr>
+          <p:cNvPr id="14" name="Text 12"/>
+          <p:cNvSpPr/>
+          <p:nvPr/>
+        </p:nvSpPr>
+        <p:spPr>
+          <a:xfrm>
+            <a:off x="6583680" y="2212848"/>
+            <a:ext cx="2377440" cy="310896"/>
+          </a:xfrm>
+          <a:prstGeom prst="rect">
+            <a:avLst/>
+          </a:prstGeom>
+          <a:noFill/>
+          <a:ln/>
+        </p:spPr>
+        <p:txBody>
+          <a:bodyPr wrap="square" lIns="0" tIns="0" rIns="0" bIns="0" rtlCol="0" anchor="ctr"/>
+          <a:lstStyle/>
+          <a:p>
+            <a:pPr algn="ctr" indent="0" marL="0">
+              <a:buNone/>
+            </a:pPr>
+            <a:r>
+              <a:rPr lang="en-US" sz="1400" b="1" dirty="0">
+                <a:solidFill>
+                  <a:srgbClr val="1B2430"/>
+                </a:solidFill>
+                <a:latin typeface="Calibri" pitchFamily="34" charset="0"/>
+                <a:ea typeface="Calibri" pitchFamily="34" charset="-122"/>
+                <a:cs typeface="Calibri" pitchFamily="34" charset="-120"/>
+              </a:rPr>
+              <a:t>Forecast overrun</a:t>
+            </a:r>
+            <a:endParaRPr lang="en-US" sz="1400" dirty="0"/>
+          </a:p>
+        </p:txBody>
+      </p:sp>
+      <p:sp>
+        <p:nvSpPr>
+          <p:cNvPr id="15" name="Text 13"/>
+          <p:cNvSpPr/>
+          <p:nvPr/>
+        </p:nvSpPr>
+        <p:spPr>
+          <a:xfrm>
+            <a:off x="6583680" y="2542032"/>
+            <a:ext cx="2377440" cy="292608"/>
+          </a:xfrm>
+          <a:prstGeom prst="rect">
+            <a:avLst/>
+          </a:prstGeom>
+          <a:noFill/>
+          <a:ln/>
+        </p:spPr>
+        <p:txBody>
+          <a:bodyPr wrap="square" lIns="0" tIns="0" rIns="0" bIns="0" rtlCol="0" anchor="ctr"/>
+          <a:lstStyle/>
+          <a:p>
+            <a:pPr algn="ctr" indent="0" marL="0">
+              <a:buNone/>
+            </a:pPr>
+            <a:r>
+              <a:rPr lang="en-US" sz="1250" b="1" spc="60" kern="0" dirty="0">
+                <a:solidFill>
+                  <a:srgbClr val="1F6B5C"/>
+                </a:solidFill>
+                <a:latin typeface="Calibri" pitchFamily="34" charset="0"/>
+                <a:ea typeface="Calibri" pitchFamily="34" charset="-122"/>
+                <a:cs typeface="Calibri" pitchFamily="34" charset="-120"/>
+              </a:rPr>
+              <a:t>~2 weeks out</a:t>
+            </a:r>
+            <a:endParaRPr lang="en-US" sz="1250" dirty="0"/>
+          </a:p>
+        </p:txBody>
+      </p:sp>
+      <p:sp>
+        <p:nvSpPr>
+          <p:cNvPr id="16" name="Shape 14"/>
+          <p:cNvSpPr/>
+          <p:nvPr/>
+        </p:nvSpPr>
+        <p:spPr>
+          <a:xfrm>
+            <a:off x="7653528" y="3031236"/>
+            <a:ext cx="237744" cy="237744"/>
+          </a:xfrm>
+          <a:prstGeom prst="ellipse">
+            <a:avLst/>
+          </a:prstGeom>
+          <a:solidFill>
+            <a:srgbClr val="2E8B7A"/>
+          </a:solidFill>
+          <a:ln w="25400">
+            <a:solidFill>
+              <a:srgbClr val="FFFFFF"/>
+            </a:solidFill>
+            <a:prstDash val="solid"/>
+          </a:ln>
+        </p:spPr>
+      </p:sp>
+      <p:sp>
+        <p:nvSpPr>
+          <p:cNvPr id="17" name="Text 15"/>
+          <p:cNvSpPr/>
+          <p:nvPr/>
+        </p:nvSpPr>
+        <p:spPr>
+          <a:xfrm>
+            <a:off x="6583680" y="3401568"/>
+            <a:ext cx="2377440" cy="566928"/>
+          </a:xfrm>
+          <a:prstGeom prst="rect">
+            <a:avLst/>
+          </a:prstGeom>
+          <a:noFill/>
+          <a:ln/>
+        </p:spPr>
+        <p:txBody>
+          <a:bodyPr wrap="square" lIns="0" tIns="0" rIns="0" bIns="0" rtlCol="0" anchor="t"/>
+          <a:lstStyle/>
+          <a:p>
+            <a:pPr algn="ctr" indent="0" marL="0">
+              <a:lnSpc>
+                <a:spcPts val="1600"/>
+              </a:lnSpc>
+              <a:buNone/>
+            </a:pPr>
+            <a:r>
+              <a:rPr lang="en-US" sz="1200" dirty="0">
+                <a:solidFill>
+                  <a:srgbClr val="5C6675"/>
+                </a:solidFill>
+                <a:latin typeface="Calibri" pitchFamily="34" charset="0"/>
+                <a:ea typeface="Calibri" pitchFamily="34" charset="-122"/>
+                <a:cs typeface="Calibri" pitchFamily="34" charset="-120"/>
+              </a:rPr>
+              <a:t>Still time to change the month's outcome.</a:t>
+            </a:r>
+            <a:endParaRPr lang="en-US" sz="1200" dirty="0"/>
+          </a:p>
+        </p:txBody>
+      </p:sp>
+      <p:sp>
+        <p:nvSpPr>
+          <p:cNvPr id="18" name="Text 16"/>
+          <p:cNvSpPr/>
+          <p:nvPr/>
+        </p:nvSpPr>
+        <p:spPr>
+          <a:xfrm>
+            <a:off x="9262872" y="2212848"/>
+            <a:ext cx="2377440" cy="310896"/>
+          </a:xfrm>
+          <a:prstGeom prst="rect">
+            <a:avLst/>
+          </a:prstGeom>
+          <a:noFill/>
+          <a:ln/>
+        </p:spPr>
+        <p:txBody>
+          <a:bodyPr wrap="square" lIns="0" tIns="0" rIns="0" bIns="0" rtlCol="0" anchor="ctr"/>
+          <a:lstStyle/>
+          <a:p>
+            <a:pPr algn="ctr" indent="0" marL="0">
+              <a:buNone/>
+            </a:pPr>
+            <a:r>
+              <a:rPr lang="en-US" sz="1400" b="1" dirty="0">
+                <a:solidFill>
+                  <a:srgbClr val="5C6675"/>
+                </a:solidFill>
+                <a:latin typeface="Calibri" pitchFamily="34" charset="0"/>
+                <a:ea typeface="Calibri" pitchFamily="34" charset="-122"/>
+                <a:cs typeface="Calibri" pitchFamily="34" charset="-120"/>
+              </a:rPr>
+              <a:t>The invoice</a:t>
+            </a:r>
+            <a:endParaRPr lang="en-US" sz="1400" dirty="0"/>
+          </a:p>
+        </p:txBody>
+      </p:sp>
+      <p:sp>
+        <p:nvSpPr>
+          <p:cNvPr id="19" name="Text 17"/>
+          <p:cNvSpPr/>
+          <p:nvPr/>
+        </p:nvSpPr>
+        <p:spPr>
+          <a:xfrm>
+            <a:off x="9262872" y="2542032"/>
+            <a:ext cx="2377440" cy="292608"/>
+          </a:xfrm>
+          <a:prstGeom prst="rect">
+            <a:avLst/>
+          </a:prstGeom>
+          <a:noFill/>
+          <a:ln/>
+        </p:spPr>
+        <p:txBody>
+          <a:bodyPr wrap="square" lIns="0" tIns="0" rIns="0" bIns="0" rtlCol="0" anchor="ctr"/>
+          <a:lstStyle/>
+          <a:p>
+            <a:pPr algn="ctr" indent="0" marL="0">
+              <a:buNone/>
+            </a:pPr>
+            <a:r>
+              <a:rPr lang="en-US" sz="1250" b="1" spc="60" kern="0" dirty="0">
+                <a:solidFill>
+                  <a:srgbClr val="5C6675"/>
+                </a:solidFill>
+                <a:latin typeface="Calibri" pitchFamily="34" charset="0"/>
+                <a:ea typeface="Calibri" pitchFamily="34" charset="-122"/>
+                <a:cs typeface="Calibri" pitchFamily="34" charset="-120"/>
+              </a:rPr>
+              <a:t>30–45 days later</a:t>
+            </a:r>
+            <a:endParaRPr lang="en-US" sz="1250" dirty="0"/>
+          </a:p>
+        </p:txBody>
+      </p:sp>
+      <p:sp>
+        <p:nvSpPr>
+          <p:cNvPr id="20" name="Shape 18"/>
+          <p:cNvSpPr/>
+          <p:nvPr/>
+        </p:nvSpPr>
+        <p:spPr>
+          <a:xfrm>
+            <a:off x="10332720" y="3031236"/>
+            <a:ext cx="237744" cy="237744"/>
+          </a:xfrm>
+          <a:prstGeom prst="ellipse">
+            <a:avLst/>
+          </a:prstGeom>
+          <a:solidFill>
+            <a:srgbClr val="AEB8C4"/>
+          </a:solidFill>
+          <a:ln w="25400">
+            <a:solidFill>
+              <a:srgbClr val="FFFFFF"/>
+            </a:solidFill>
+            <a:prstDash val="solid"/>
+          </a:ln>
+        </p:spPr>
+      </p:sp>
+      <p:sp>
+        <p:nvSpPr>
+          <p:cNvPr id="21" name="Text 19"/>
+          <p:cNvSpPr/>
+          <p:nvPr/>
+        </p:nvSpPr>
+        <p:spPr>
+          <a:xfrm>
+            <a:off x="9262872" y="3401568"/>
+            <a:ext cx="2377440" cy="566928"/>
+          </a:xfrm>
+          <a:prstGeom prst="rect">
+            <a:avLst/>
+          </a:prstGeom>
+          <a:noFill/>
+          <a:ln/>
+        </p:spPr>
+        <p:txBody>
+          <a:bodyPr wrap="square" lIns="0" tIns="0" rIns="0" bIns="0" rtlCol="0" anchor="t"/>
+          <a:lstStyle/>
+          <a:p>
+            <a:pPr algn="ctr" indent="0" marL="0">
+              <a:lnSpc>
+                <a:spcPts val="1600"/>
+              </a:lnSpc>
+              <a:buNone/>
+            </a:pPr>
+            <a:r>
+              <a:rPr lang="en-US" sz="1200" dirty="0">
+                <a:solidFill>
+                  <a:srgbClr val="5C6675"/>
+                </a:solidFill>
+                <a:latin typeface="Calibri" pitchFamily="34" charset="0"/>
+                <a:ea typeface="Calibri" pitchFamily="34" charset="-122"/>
+                <a:cs typeface="Calibri" pitchFamily="34" charset="-120"/>
+              </a:rPr>
+              <a:t>Nothing left to decide. Only to explain.</a:t>
+            </a:r>
+            <a:endParaRPr lang="en-US" sz="1200" dirty="0"/>
+          </a:p>
+        </p:txBody>
+      </p:sp>
+      <p:sp>
+        <p:nvSpPr>
+          <p:cNvPr id="22" name="Shape 20"/>
+          <p:cNvSpPr/>
+          <p:nvPr/>
+        </p:nvSpPr>
+        <p:spPr>
+          <a:xfrm>
+            <a:off x="548640" y="4297680"/>
+            <a:ext cx="6675120" cy="2011680"/>
+          </a:xfrm>
+          <a:prstGeom prst="roundRect">
+            <a:avLst>
+              <a:gd name="adj" fmla="val 4091"/>
+            </a:avLst>
+          </a:prstGeom>
+          <a:solidFill>
+            <a:srgbClr val="F1F3F6"/>
+          </a:solidFill>
+          <a:ln/>
+        </p:spPr>
+      </p:sp>
+      <p:sp>
+        <p:nvSpPr>
+          <p:cNvPr id="23" name="Text 21"/>
+          <p:cNvSpPr/>
+          <p:nvPr/>
+        </p:nvSpPr>
+        <p:spPr>
+          <a:xfrm>
+            <a:off x="877824" y="4443984"/>
+            <a:ext cx="3657600" cy="292608"/>
+          </a:xfrm>
+          <a:prstGeom prst="rect">
+            <a:avLst/>
+          </a:prstGeom>
+          <a:noFill/>
+          <a:ln/>
+        </p:spPr>
+        <p:txBody>
+          <a:bodyPr wrap="square" lIns="0" tIns="0" rIns="0" bIns="0" rtlCol="0" anchor="ctr"/>
+          <a:lstStyle/>
+          <a:p>
+            <a:pPr indent="0" marL="0">
+              <a:buNone/>
+            </a:pPr>
+            <a:r>
+              <a:rPr lang="en-US" sz="1200" b="1" spc="180" kern="0" dirty="0">
+                <a:solidFill>
+                  <a:srgbClr val="5C6675"/>
+                </a:solidFill>
+                <a:latin typeface="Calibri" pitchFamily="34" charset="0"/>
+                <a:ea typeface="Calibri" pitchFamily="34" charset="-122"/>
+                <a:cs typeface="Calibri" pitchFamily="34" charset="-120"/>
+              </a:rPr>
+              <a:t>What has to be true</a:t>
+            </a:r>
+            <a:endParaRPr lang="en-US" sz="1200" dirty="0"/>
+          </a:p>
+        </p:txBody>
+      </p:sp>
+      <p:sp>
+        <p:nvSpPr>
+          <p:cNvPr id="24" name="Shape 22"/>
+          <p:cNvSpPr/>
+          <p:nvPr/>
+        </p:nvSpPr>
+        <p:spPr>
+          <a:xfrm>
+            <a:off x="877824" y="4809744"/>
+            <a:ext cx="274320" cy="274320"/>
+          </a:xfrm>
+          <a:prstGeom prst="ellipse">
+            <a:avLst/>
+          </a:prstGeom>
+          <a:solidFill>
+            <a:srgbClr val="FFFFFF"/>
+          </a:solidFill>
+          <a:ln/>
+        </p:spPr>
+      </p:sp>
+      <p:pic>
+        <p:nvPicPr>
+          <p:cNvPr id="25" name="Image 0" descr="preencoded.png">    </p:cNvPr>
+          <p:cNvPicPr>
+            <a:picLocks noChangeAspect="1"/>
+          </p:cNvPicPr>
+          <p:nvPr/>
+        </p:nvPicPr>
+        <p:blipFill>
+          <a:blip r:embed="rId1"/>
+          <a:stretch>
+            <a:fillRect/>
+          </a:stretch>
+        </p:blipFill>
+        <p:spPr>
+          <a:xfrm>
+            <a:off x="946404" y="4878324"/>
+            <a:ext cx="137160" cy="137160"/>
+          </a:xfrm>
+          <a:prstGeom prst="rect">
+            <a:avLst/>
+          </a:prstGeom>
+        </p:spPr>
+      </p:pic>
+      <p:sp>
+        <p:nvSpPr>
+          <p:cNvPr id="26" name="Text 23"/>
+          <p:cNvSpPr/>
+          <p:nvPr/>
+        </p:nvSpPr>
+        <p:spPr>
+          <a:xfrm>
+            <a:off x="1298448" y="4754880"/>
+            <a:ext cx="5669280" cy="384048"/>
+          </a:xfrm>
+          <a:prstGeom prst="rect">
+            <a:avLst/>
+          </a:prstGeom>
+          <a:noFill/>
+          <a:ln/>
+        </p:spPr>
+        <p:txBody>
+          <a:bodyPr wrap="square" lIns="0" tIns="0" rIns="0" bIns="0" rtlCol="0" anchor="ctr"/>
+          <a:lstStyle/>
+          <a:p>
+            <a:pPr indent="0" marL="0">
+              <a:buNone/>
+            </a:pPr>
+            <a:r>
+              <a:rPr lang="en-US" sz="1300" dirty="0">
+                <a:solidFill>
+                  <a:srgbClr val="1B2430"/>
+                </a:solidFill>
+                <a:latin typeface="Calibri" pitchFamily="34" charset="0"/>
+                <a:ea typeface="Calibri" pitchFamily="34" charset="-122"/>
+                <a:cs typeface="Calibri" pitchFamily="34" charset="-120"/>
+              </a:rPr>
+              <a:t>Protective alerts run on usage data, not on billing data</a:t>
+            </a:r>
+            <a:endParaRPr lang="en-US" sz="1300" dirty="0"/>
+          </a:p>
+        </p:txBody>
+      </p:sp>
+      <p:sp>
+        <p:nvSpPr>
+          <p:cNvPr id="27" name="Shape 24"/>
+          <p:cNvSpPr/>
+          <p:nvPr/>
+        </p:nvSpPr>
+        <p:spPr>
+          <a:xfrm>
+            <a:off x="877824" y="5193792"/>
+            <a:ext cx="274320" cy="274320"/>
+          </a:xfrm>
+          <a:prstGeom prst="ellipse">
+            <a:avLst/>
+          </a:prstGeom>
+          <a:solidFill>
+            <a:srgbClr val="FFFFFF"/>
+          </a:solidFill>
+          <a:ln/>
+        </p:spPr>
+      </p:sp>
+      <p:pic>
+        <p:nvPicPr>
+          <p:cNvPr id="28" name="Image 1" descr="preencoded.png">    </p:cNvPr>
+          <p:cNvPicPr>
+            <a:picLocks noChangeAspect="1"/>
+          </p:cNvPicPr>
+          <p:nvPr/>
+        </p:nvPicPr>
+        <p:blipFill>
+          <a:blip r:embed="rId2"/>
+          <a:stretch>
+            <a:fillRect/>
+          </a:stretch>
+        </p:blipFill>
+        <p:spPr>
+          <a:xfrm>
+            <a:off x="946404" y="5262372"/>
+            <a:ext cx="137160" cy="137160"/>
+          </a:xfrm>
+          <a:prstGeom prst="rect">
+            <a:avLst/>
+          </a:prstGeom>
+        </p:spPr>
+      </p:pic>
+      <p:sp>
+        <p:nvSpPr>
+          <p:cNvPr id="29" name="Text 25"/>
+          <p:cNvSpPr/>
+          <p:nvPr/>
+        </p:nvSpPr>
+        <p:spPr>
+          <a:xfrm>
+            <a:off x="1298448" y="5138928"/>
+            <a:ext cx="5669280" cy="384048"/>
+          </a:xfrm>
+          <a:prstGeom prst="rect">
+            <a:avLst/>
+          </a:prstGeom>
+          <a:noFill/>
+          <a:ln/>
+        </p:spPr>
+        <p:txBody>
+          <a:bodyPr wrap="square" lIns="0" tIns="0" rIns="0" bIns="0" rtlCol="0" anchor="ctr"/>
+          <a:lstStyle/>
+          <a:p>
+            <a:pPr indent="0" marL="0">
+              <a:buNone/>
+            </a:pPr>
+            <a:r>
+              <a:rPr lang="en-US" sz="1300" dirty="0">
+                <a:solidFill>
+                  <a:srgbClr val="1B2430"/>
+                </a:solidFill>
+                <a:latin typeface="Calibri" pitchFamily="34" charset="0"/>
+                <a:ea typeface="Calibri" pitchFamily="34" charset="-122"/>
+                <a:cs typeface="Calibri" pitchFamily="34" charset="-120"/>
+              </a:rPr>
+              <a:t>Every alert has a named owner to route to</a:t>
+            </a:r>
+            <a:endParaRPr lang="en-US" sz="1300" dirty="0"/>
+          </a:p>
+        </p:txBody>
+      </p:sp>
+      <p:sp>
+        <p:nvSpPr>
+          <p:cNvPr id="30" name="Shape 26"/>
+          <p:cNvSpPr/>
+          <p:nvPr/>
+        </p:nvSpPr>
+        <p:spPr>
+          <a:xfrm>
+            <a:off x="877824" y="5577840"/>
+            <a:ext cx="274320" cy="274320"/>
+          </a:xfrm>
+          <a:prstGeom prst="ellipse">
+            <a:avLst/>
+          </a:prstGeom>
+          <a:solidFill>
+            <a:srgbClr val="FFFFFF"/>
+          </a:solidFill>
+          <a:ln/>
+        </p:spPr>
+      </p:sp>
+      <p:pic>
+        <p:nvPicPr>
+          <p:cNvPr id="31" name="Image 2" descr="preencoded.png">    </p:cNvPr>
+          <p:cNvPicPr>
+            <a:picLocks noChangeAspect="1"/>
+          </p:cNvPicPr>
+          <p:nvPr/>
+        </p:nvPicPr>
+        <p:blipFill>
+          <a:blip r:embed="rId3"/>
+          <a:stretch>
+            <a:fillRect/>
+          </a:stretch>
+        </p:blipFill>
+        <p:spPr>
+          <a:xfrm>
+            <a:off x="946404" y="5646420"/>
+            <a:ext cx="137160" cy="137160"/>
+          </a:xfrm>
+          <a:prstGeom prst="rect">
+            <a:avLst/>
+          </a:prstGeom>
+        </p:spPr>
+      </p:pic>
+      <p:sp>
+        <p:nvSpPr>
+          <p:cNvPr id="32" name="Text 27"/>
+          <p:cNvSpPr/>
+          <p:nvPr/>
+        </p:nvSpPr>
+        <p:spPr>
+          <a:xfrm>
+            <a:off x="1298448" y="5522976"/>
+            <a:ext cx="5669280" cy="384048"/>
+          </a:xfrm>
+          <a:prstGeom prst="rect">
+            <a:avLst/>
+          </a:prstGeom>
+          <a:noFill/>
+          <a:ln/>
+        </p:spPr>
+        <p:txBody>
+          <a:bodyPr wrap="square" lIns="0" tIns="0" rIns="0" bIns="0" rtlCol="0" anchor="ctr"/>
+          <a:lstStyle/>
+          <a:p>
+            <a:pPr indent="0" marL="0">
+              <a:buNone/>
+            </a:pPr>
+            <a:r>
+              <a:rPr lang="en-US" sz="1300" dirty="0">
+                <a:solidFill>
+                  <a:srgbClr val="1B2430"/>
+                </a:solidFill>
+                <a:latin typeface="Calibri" pitchFamily="34" charset="0"/>
+                <a:ea typeface="Calibri" pitchFamily="34" charset="-122"/>
+                <a:cs typeface="Calibri" pitchFamily="34" charset="-120"/>
+              </a:rPr>
+              <a:t>Budgets are phased, so drift shows up in week one</a:t>
+            </a:r>
+            <a:endParaRPr lang="en-US" sz="1300" dirty="0"/>
+          </a:p>
+        </p:txBody>
+      </p:sp>
+      <p:sp>
+        <p:nvSpPr>
+          <p:cNvPr id="33" name="Shape 28"/>
+          <p:cNvSpPr/>
+          <p:nvPr/>
+        </p:nvSpPr>
+        <p:spPr>
+          <a:xfrm>
+            <a:off x="877824" y="5961888"/>
+            <a:ext cx="274320" cy="274320"/>
+          </a:xfrm>
+          <a:prstGeom prst="ellipse">
+            <a:avLst/>
+          </a:prstGeom>
+          <a:solidFill>
+            <a:srgbClr val="FFFFFF"/>
+          </a:solidFill>
+          <a:ln/>
+        </p:spPr>
+      </p:sp>
+      <p:pic>
+        <p:nvPicPr>
+          <p:cNvPr id="34" name="Image 3" descr="preencoded.png">    </p:cNvPr>
+          <p:cNvPicPr>
+            <a:picLocks noChangeAspect="1"/>
+          </p:cNvPicPr>
+          <p:nvPr/>
+        </p:nvPicPr>
+        <p:blipFill>
+          <a:blip r:embed="rId4"/>
+          <a:stretch>
+            <a:fillRect/>
+          </a:stretch>
+        </p:blipFill>
+        <p:spPr>
+          <a:xfrm>
+            <a:off x="946404" y="6030468"/>
+            <a:ext cx="137160" cy="137160"/>
+          </a:xfrm>
+          <a:prstGeom prst="rect">
+            <a:avLst/>
+          </a:prstGeom>
+        </p:spPr>
+      </p:pic>
+      <p:sp>
+        <p:nvSpPr>
+          <p:cNvPr id="35" name="Text 29"/>
+          <p:cNvSpPr/>
+          <p:nvPr/>
+        </p:nvSpPr>
+        <p:spPr>
+          <a:xfrm>
+            <a:off x="1298448" y="5907024"/>
+            <a:ext cx="5669280" cy="384048"/>
+          </a:xfrm>
+          <a:prstGeom prst="rect">
+            <a:avLst/>
+          </a:prstGeom>
+          <a:noFill/>
+          <a:ln/>
+        </p:spPr>
+        <p:txBody>
+          <a:bodyPr wrap="square" lIns="0" tIns="0" rIns="0" bIns="0" rtlCol="0" anchor="ctr"/>
+          <a:lstStyle/>
+          <a:p>
+            <a:pPr indent="0" marL="0">
+              <a:buNone/>
+            </a:pPr>
+            <a:r>
+              <a:rPr lang="en-US" sz="1300" dirty="0">
+                <a:solidFill>
+                  <a:srgbClr val="1B2430"/>
+                </a:solidFill>
+                <a:latin typeface="Calibri" pitchFamily="34" charset="0"/>
+                <a:ea typeface="Calibri" pitchFamily="34" charset="-122"/>
+                <a:cs typeface="Calibri" pitchFamily="34" charset="-120"/>
+              </a:rPr>
+              <a:t>Quotas cap the worst case while someone investigates</a:t>
+            </a:r>
+            <a:endParaRPr lang="en-US" sz="1300" dirty="0"/>
+          </a:p>
+        </p:txBody>
+      </p:sp>
+      <p:sp>
+        <p:nvSpPr>
+          <p:cNvPr id="36" name="Shape 30"/>
+          <p:cNvSpPr/>
+          <p:nvPr/>
+        </p:nvSpPr>
+        <p:spPr>
+          <a:xfrm>
+            <a:off x="7525512" y="4297680"/>
+            <a:ext cx="4114800" cy="2011680"/>
+          </a:xfrm>
+          <a:prstGeom prst="roundRect">
+            <a:avLst>
+              <a:gd name="adj" fmla="val 4091"/>
+            </a:avLst>
+          </a:prstGeom>
+          <a:solidFill>
             <a:srgbClr val="1F2936"/>
           </a:solidFill>
           <a:ln/>
-        </p:spPr>
-      </p:sp>
-      <p:sp>
-        <p:nvSpPr>
-          <p:cNvPr id="5" name="Text 3"/>
-          <p:cNvSpPr/>
-          <p:nvPr/>
-        </p:nvSpPr>
-        <p:spPr>
-          <a:xfrm>
-            <a:off x="804672" y="1965960"/>
-            <a:ext cx="1097280" cy="502920"/>
-          </a:xfrm>
-          <a:prstGeom prst="rect">
-            <a:avLst/>
-          </a:prstGeom>
-          <a:noFill/>
-          <a:ln/>
-        </p:spPr>
-        <p:txBody>
-          <a:bodyPr wrap="square" lIns="0" tIns="0" rIns="0" bIns="0" rtlCol="0" anchor="ctr"/>
-          <a:lstStyle/>
-          <a:p>
-            <a:pPr indent="0" marL="0">
-              <a:buNone/>
-            </a:pPr>
-            <a:r>
-              <a:rPr lang="en-US" sz="2800" b="1" dirty="0">
+          <a:effectLst>
+            <a:outerShdw sx="100000" sy="100000" kx="0" ky="0" algn="bl" rotWithShape="0" blurRad="127000" dist="25400" dir="5400000">
+              <a:srgbClr val="8C99A8">
+                <a:alpha val="16000"/>
+              </a:srgbClr>
+            </a:outerShdw>
+          </a:effectLst>
+        </p:spPr>
+      </p:sp>
+      <p:sp>
+        <p:nvSpPr>
+          <p:cNvPr id="37" name="Text 31"/>
+          <p:cNvSpPr/>
+          <p:nvPr/>
+        </p:nvSpPr>
+        <p:spPr>
+          <a:xfrm>
+            <a:off x="7818120" y="4462272"/>
+            <a:ext cx="3200400" cy="292608"/>
+          </a:xfrm>
+          <a:prstGeom prst="rect">
+            <a:avLst/>
+          </a:prstGeom>
+          <a:noFill/>
+          <a:ln/>
+        </p:spPr>
+        <p:txBody>
+          <a:bodyPr wrap="square" lIns="0" tIns="0" rIns="0" bIns="0" rtlCol="0" anchor="ctr"/>
+          <a:lstStyle/>
+          <a:p>
+            <a:pPr indent="0" marL="0">
+              <a:buNone/>
+            </a:pPr>
+            <a:r>
+              <a:rPr lang="en-US" sz="1200" b="1" spc="180" kern="0" dirty="0">
                 <a:solidFill>
                   <a:srgbClr val="E39B2C"/>
+                </a:solidFill>
+                <a:latin typeface="Calibri" pitchFamily="34" charset="0"/>
+                <a:ea typeface="Calibri" pitchFamily="34" charset="-122"/>
+                <a:cs typeface="Calibri" pitchFamily="34" charset="-120"/>
+              </a:rPr>
+              <a:t>The point</a:t>
+            </a:r>
+            <a:endParaRPr lang="en-US" sz="1200" dirty="0"/>
+          </a:p>
+        </p:txBody>
+      </p:sp>
+      <p:sp>
+        <p:nvSpPr>
+          <p:cNvPr id="38" name="Text 32"/>
+          <p:cNvSpPr/>
+          <p:nvPr/>
+        </p:nvSpPr>
+        <p:spPr>
+          <a:xfrm>
+            <a:off x="7818120" y="4828032"/>
+            <a:ext cx="3529584" cy="1280160"/>
+          </a:xfrm>
+          <a:prstGeom prst="rect">
+            <a:avLst/>
+          </a:prstGeom>
+          <a:noFill/>
+          <a:ln/>
+        </p:spPr>
+        <p:txBody>
+          <a:bodyPr wrap="square" lIns="0" tIns="0" rIns="0" bIns="0" rtlCol="0" anchor="t"/>
+          <a:lstStyle/>
+          <a:p>
+            <a:pPr indent="0" marL="0">
+              <a:lnSpc>
+                <a:spcPts val="2200"/>
+              </a:lnSpc>
+              <a:buNone/>
+            </a:pPr>
+            <a:r>
+              <a:rPr lang="en-US" sz="1550" i="1" dirty="0">
+                <a:solidFill>
+                  <a:srgbClr val="FFFFFF"/>
                 </a:solidFill>
                 <a:latin typeface="Cambria" pitchFamily="34" charset="0"/>
                 <a:ea typeface="Cambria" pitchFamily="34" charset="-122"/>
                 <a:cs typeface="Cambria" pitchFamily="34" charset="-120"/>
               </a:rPr>
-              <a:t>01</a:t>
-            </a:r>
-            <a:endParaRPr lang="en-US" sz="2800" dirty="0"/>
-          </a:p>
-        </p:txBody>
-      </p:sp>
-      <p:sp>
-        <p:nvSpPr>
-          <p:cNvPr id="6" name="Text 4"/>
-          <p:cNvSpPr/>
-          <p:nvPr/>
-        </p:nvSpPr>
-        <p:spPr>
-          <a:xfrm>
-            <a:off x="786384" y="2523744"/>
-            <a:ext cx="2139696" cy="786384"/>
-          </a:xfrm>
-          <a:prstGeom prst="rect">
-            <a:avLst/>
-          </a:prstGeom>
-          <a:noFill/>
-          <a:ln/>
-        </p:spPr>
-        <p:txBody>
-          <a:bodyPr wrap="square" lIns="0" tIns="0" rIns="0" bIns="0" rtlCol="0" anchor="t"/>
-          <a:lstStyle/>
-          <a:p>
-            <a:pPr indent="0" marL="0">
-              <a:lnSpc>
-                <a:spcPts val="2000"/>
-              </a:lnSpc>
-              <a:buNone/>
-            </a:pPr>
-            <a:r>
-              <a:rPr lang="en-US" sz="1500" b="1" dirty="0">
-                <a:solidFill>
-                  <a:srgbClr val="FFFFFF"/>
-                </a:solidFill>
-                <a:latin typeface="Cambria" pitchFamily="34" charset="0"/>
-                <a:ea typeface="Cambria" pitchFamily="34" charset="-122"/>
-                <a:cs typeface="Cambria" pitchFamily="34" charset="-120"/>
-              </a:rPr>
-              <a:t>Set the tagging standard</a:t>
-            </a:r>
-            <a:endParaRPr lang="en-US" sz="1500" dirty="0"/>
-          </a:p>
-        </p:txBody>
-      </p:sp>
-      <p:sp>
-        <p:nvSpPr>
-          <p:cNvPr id="7" name="Text 5"/>
-          <p:cNvSpPr/>
-          <p:nvPr/>
-        </p:nvSpPr>
-        <p:spPr>
-          <a:xfrm>
-            <a:off x="786384" y="3346704"/>
-            <a:ext cx="2139696" cy="749808"/>
-          </a:xfrm>
-          <a:prstGeom prst="rect">
-            <a:avLst/>
-          </a:prstGeom>
-          <a:noFill/>
-          <a:ln/>
-        </p:spPr>
-        <p:txBody>
-          <a:bodyPr wrap="square" lIns="0" tIns="0" rIns="0" bIns="0" rtlCol="0" anchor="t"/>
-          <a:lstStyle/>
-          <a:p>
-            <a:pPr indent="0" marL="0">
-              <a:lnSpc>
-                <a:spcPts val="1500"/>
-              </a:lnSpc>
-              <a:buNone/>
-            </a:pPr>
-            <a:r>
-              <a:rPr lang="en-US" sz="1200" dirty="0">
-                <a:solidFill>
-                  <a:srgbClr val="9EABBA"/>
-                </a:solidFill>
-                <a:latin typeface="Calibri" pitchFamily="34" charset="0"/>
-                <a:ea typeface="Calibri" pitchFamily="34" charset="-122"/>
-                <a:cs typeface="Calibri" pitchFamily="34" charset="-120"/>
-              </a:rPr>
-              <a:t>Agree a consistent taxonomy before investing in dashboards.</a:t>
-            </a:r>
-            <a:endParaRPr lang="en-US" sz="1200" dirty="0"/>
-          </a:p>
-        </p:txBody>
-      </p:sp>
-      <p:sp>
-        <p:nvSpPr>
-          <p:cNvPr id="8" name="Shape 6"/>
-          <p:cNvSpPr/>
-          <p:nvPr/>
-        </p:nvSpPr>
-        <p:spPr>
-          <a:xfrm>
-            <a:off x="3383280" y="1783080"/>
-            <a:ext cx="2587752" cy="2423160"/>
-          </a:xfrm>
-          <a:prstGeom prst="roundRect">
-            <a:avLst>
-              <a:gd name="adj" fmla="val 3396"/>
-            </a:avLst>
-          </a:prstGeom>
-          <a:solidFill>
-            <a:srgbClr val="F1F3F6"/>
-          </a:solidFill>
-          <a:ln/>
-        </p:spPr>
-      </p:sp>
-      <p:sp>
-        <p:nvSpPr>
-          <p:cNvPr id="9" name="Text 7"/>
-          <p:cNvSpPr/>
-          <p:nvPr/>
-        </p:nvSpPr>
-        <p:spPr>
-          <a:xfrm>
-            <a:off x="3639312" y="1965960"/>
-            <a:ext cx="1097280" cy="502920"/>
-          </a:xfrm>
-          <a:prstGeom prst="rect">
-            <a:avLst/>
-          </a:prstGeom>
-          <a:noFill/>
-          <a:ln/>
-        </p:spPr>
-        <p:txBody>
-          <a:bodyPr wrap="square" lIns="0" tIns="0" rIns="0" bIns="0" rtlCol="0" anchor="ctr"/>
-          <a:lstStyle/>
-          <a:p>
-            <a:pPr indent="0" marL="0">
-              <a:buNone/>
-            </a:pPr>
-            <a:r>
-              <a:rPr lang="en-US" sz="2800" b="1" dirty="0">
-                <a:solidFill>
-                  <a:srgbClr val="B9C2CD"/>
-                </a:solidFill>
-                <a:latin typeface="Cambria" pitchFamily="34" charset="0"/>
-                <a:ea typeface="Cambria" pitchFamily="34" charset="-122"/>
-                <a:cs typeface="Cambria" pitchFamily="34" charset="-120"/>
-              </a:rPr>
-              <a:t>02</a:t>
-            </a:r>
-            <a:endParaRPr lang="en-US" sz="2800" dirty="0"/>
-          </a:p>
-        </p:txBody>
-      </p:sp>
-      <p:sp>
-        <p:nvSpPr>
-          <p:cNvPr id="10" name="Text 8"/>
-          <p:cNvSpPr/>
-          <p:nvPr/>
-        </p:nvSpPr>
-        <p:spPr>
-          <a:xfrm>
-            <a:off x="3621024" y="2523744"/>
-            <a:ext cx="2139696" cy="786384"/>
-          </a:xfrm>
-          <a:prstGeom prst="rect">
-            <a:avLst/>
-          </a:prstGeom>
-          <a:noFill/>
-          <a:ln/>
-        </p:spPr>
-        <p:txBody>
-          <a:bodyPr wrap="square" lIns="0" tIns="0" rIns="0" bIns="0" rtlCol="0" anchor="t"/>
-          <a:lstStyle/>
-          <a:p>
-            <a:pPr indent="0" marL="0">
-              <a:lnSpc>
-                <a:spcPts val="2000"/>
-              </a:lnSpc>
-              <a:buNone/>
-            </a:pPr>
-            <a:r>
-              <a:rPr lang="en-US" sz="1500" b="1" dirty="0">
-                <a:solidFill>
-                  <a:srgbClr val="1B2430"/>
-                </a:solidFill>
-                <a:latin typeface="Cambria" pitchFamily="34" charset="0"/>
-                <a:ea typeface="Cambria" pitchFamily="34" charset="-122"/>
-                <a:cs typeface="Cambria" pitchFamily="34" charset="-120"/>
-              </a:rPr>
-              <a:t>Start with the biggest spend</a:t>
-            </a:r>
-            <a:endParaRPr lang="en-US" sz="1500" dirty="0"/>
-          </a:p>
-        </p:txBody>
-      </p:sp>
-      <p:sp>
-        <p:nvSpPr>
-          <p:cNvPr id="11" name="Text 9"/>
-          <p:cNvSpPr/>
-          <p:nvPr/>
-        </p:nvSpPr>
-        <p:spPr>
-          <a:xfrm>
-            <a:off x="3621024" y="3346704"/>
-            <a:ext cx="2139696" cy="749808"/>
-          </a:xfrm>
-          <a:prstGeom prst="rect">
-            <a:avLst/>
-          </a:prstGeom>
-          <a:noFill/>
-          <a:ln/>
-        </p:spPr>
-        <p:txBody>
-          <a:bodyPr wrap="square" lIns="0" tIns="0" rIns="0" bIns="0" rtlCol="0" anchor="t"/>
-          <a:lstStyle/>
-          <a:p>
-            <a:pPr indent="0" marL="0">
-              <a:lnSpc>
-                <a:spcPts val="1500"/>
-              </a:lnSpc>
-              <a:buNone/>
-            </a:pPr>
-            <a:r>
-              <a:rPr lang="en-US" sz="1200" dirty="0">
-                <a:solidFill>
-                  <a:srgbClr val="5C6675"/>
-                </a:solidFill>
-                <a:latin typeface="Calibri" pitchFamily="34" charset="0"/>
-                <a:ea typeface="Calibri" pitchFamily="34" charset="-122"/>
-                <a:cs typeface="Calibri" pitchFamily="34" charset="-120"/>
-              </a:rPr>
-              <a:t>Attack the largest categories first. Don't chase perfect granularity everywhere.</a:t>
-            </a:r>
-            <a:endParaRPr lang="en-US" sz="1200" dirty="0"/>
-          </a:p>
-        </p:txBody>
-      </p:sp>
-      <p:sp>
-        <p:nvSpPr>
-          <p:cNvPr id="12" name="Shape 10"/>
-          <p:cNvSpPr/>
-          <p:nvPr/>
-        </p:nvSpPr>
-        <p:spPr>
-          <a:xfrm>
-            <a:off x="6217920" y="1783080"/>
-            <a:ext cx="2587752" cy="2423160"/>
-          </a:xfrm>
-          <a:prstGeom prst="roundRect">
-            <a:avLst>
-              <a:gd name="adj" fmla="val 3396"/>
-            </a:avLst>
-          </a:prstGeom>
-          <a:solidFill>
-            <a:srgbClr val="F1F3F6"/>
-          </a:solidFill>
-          <a:ln/>
-        </p:spPr>
-      </p:sp>
-      <p:sp>
-        <p:nvSpPr>
-          <p:cNvPr id="13" name="Text 11"/>
-          <p:cNvSpPr/>
-          <p:nvPr/>
-        </p:nvSpPr>
-        <p:spPr>
-          <a:xfrm>
-            <a:off x="6473952" y="1965960"/>
-            <a:ext cx="1097280" cy="502920"/>
-          </a:xfrm>
-          <a:prstGeom prst="rect">
-            <a:avLst/>
-          </a:prstGeom>
-          <a:noFill/>
-          <a:ln/>
-        </p:spPr>
-        <p:txBody>
-          <a:bodyPr wrap="square" lIns="0" tIns="0" rIns="0" bIns="0" rtlCol="0" anchor="ctr"/>
-          <a:lstStyle/>
-          <a:p>
-            <a:pPr indent="0" marL="0">
-              <a:buNone/>
-            </a:pPr>
-            <a:r>
-              <a:rPr lang="en-US" sz="2800" b="1" dirty="0">
-                <a:solidFill>
-                  <a:srgbClr val="B9C2CD"/>
-                </a:solidFill>
-                <a:latin typeface="Cambria" pitchFamily="34" charset="0"/>
-                <a:ea typeface="Cambria" pitchFamily="34" charset="-122"/>
-                <a:cs typeface="Cambria" pitchFamily="34" charset="-120"/>
-              </a:rPr>
-              <a:t>03</a:t>
-            </a:r>
-            <a:endParaRPr lang="en-US" sz="2800" dirty="0"/>
-          </a:p>
-        </p:txBody>
-      </p:sp>
-      <p:sp>
-        <p:nvSpPr>
-          <p:cNvPr id="14" name="Text 12"/>
-          <p:cNvSpPr/>
-          <p:nvPr/>
-        </p:nvSpPr>
-        <p:spPr>
-          <a:xfrm>
-            <a:off x="6455664" y="2523744"/>
-            <a:ext cx="2139696" cy="786384"/>
-          </a:xfrm>
-          <a:prstGeom prst="rect">
-            <a:avLst/>
-          </a:prstGeom>
-          <a:noFill/>
-          <a:ln/>
-        </p:spPr>
-        <p:txBody>
-          <a:bodyPr wrap="square" lIns="0" tIns="0" rIns="0" bIns="0" rtlCol="0" anchor="t"/>
-          <a:lstStyle/>
-          <a:p>
-            <a:pPr indent="0" marL="0">
-              <a:lnSpc>
-                <a:spcPts val="2000"/>
-              </a:lnSpc>
-              <a:buNone/>
-            </a:pPr>
-            <a:r>
-              <a:rPr lang="en-US" sz="1500" b="1" dirty="0">
-                <a:solidFill>
-                  <a:srgbClr val="1B2430"/>
-                </a:solidFill>
-                <a:latin typeface="Cambria" pitchFamily="34" charset="0"/>
-                <a:ea typeface="Cambria" pitchFamily="34" charset="-122"/>
-                <a:cs typeface="Cambria" pitchFamily="34" charset="-120"/>
-              </a:rPr>
-              <a:t>Get finance and engineering talking</a:t>
-            </a:r>
-            <a:endParaRPr lang="en-US" sz="1500" dirty="0"/>
-          </a:p>
-        </p:txBody>
-      </p:sp>
-      <p:sp>
-        <p:nvSpPr>
-          <p:cNvPr id="15" name="Text 13"/>
-          <p:cNvSpPr/>
-          <p:nvPr/>
-        </p:nvSpPr>
-        <p:spPr>
-          <a:xfrm>
-            <a:off x="6455664" y="3346704"/>
-            <a:ext cx="2139696" cy="749808"/>
-          </a:xfrm>
-          <a:prstGeom prst="rect">
-            <a:avLst/>
-          </a:prstGeom>
-          <a:noFill/>
-          <a:ln/>
-        </p:spPr>
-        <p:txBody>
-          <a:bodyPr wrap="square" lIns="0" tIns="0" rIns="0" bIns="0" rtlCol="0" anchor="t"/>
-          <a:lstStyle/>
-          <a:p>
-            <a:pPr indent="0" marL="0">
-              <a:lnSpc>
-                <a:spcPts val="1500"/>
-              </a:lnSpc>
-              <a:buNone/>
-            </a:pPr>
-            <a:r>
-              <a:rPr lang="en-US" sz="1200" dirty="0">
-                <a:solidFill>
-                  <a:srgbClr val="5C6675"/>
-                </a:solidFill>
-                <a:latin typeface="Calibri" pitchFamily="34" charset="0"/>
-                <a:ea typeface="Calibri" pitchFamily="34" charset="-122"/>
-                <a:cs typeface="Calibri" pitchFamily="34" charset="-120"/>
-              </a:rPr>
-              <a:t>Bring both into the conversation early, not as an afterthought.</a:t>
-            </a:r>
-            <a:endParaRPr lang="en-US" sz="1200" dirty="0"/>
-          </a:p>
-        </p:txBody>
-      </p:sp>
-      <p:sp>
-        <p:nvSpPr>
-          <p:cNvPr id="16" name="Shape 14"/>
-          <p:cNvSpPr/>
-          <p:nvPr/>
-        </p:nvSpPr>
-        <p:spPr>
-          <a:xfrm>
-            <a:off x="9052560" y="1783080"/>
-            <a:ext cx="2587752" cy="2423160"/>
-          </a:xfrm>
-          <a:prstGeom prst="roundRect">
-            <a:avLst>
-              <a:gd name="adj" fmla="val 3396"/>
-            </a:avLst>
-          </a:prstGeom>
-          <a:solidFill>
-            <a:srgbClr val="F1F3F6"/>
-          </a:solidFill>
-          <a:ln/>
-        </p:spPr>
-      </p:sp>
-      <p:sp>
-        <p:nvSpPr>
-          <p:cNvPr id="17" name="Text 15"/>
-          <p:cNvSpPr/>
-          <p:nvPr/>
-        </p:nvSpPr>
-        <p:spPr>
-          <a:xfrm>
-            <a:off x="9308592" y="1965960"/>
-            <a:ext cx="1097280" cy="502920"/>
-          </a:xfrm>
-          <a:prstGeom prst="rect">
-            <a:avLst/>
-          </a:prstGeom>
-          <a:noFill/>
-          <a:ln/>
-        </p:spPr>
-        <p:txBody>
-          <a:bodyPr wrap="square" lIns="0" tIns="0" rIns="0" bIns="0" rtlCol="0" anchor="ctr"/>
-          <a:lstStyle/>
-          <a:p>
-            <a:pPr indent="0" marL="0">
-              <a:buNone/>
-            </a:pPr>
-            <a:r>
-              <a:rPr lang="en-US" sz="2800" b="1" dirty="0">
-                <a:solidFill>
-                  <a:srgbClr val="B9C2CD"/>
-                </a:solidFill>
-                <a:latin typeface="Cambria" pitchFamily="34" charset="0"/>
-                <a:ea typeface="Cambria" pitchFamily="34" charset="-122"/>
-                <a:cs typeface="Cambria" pitchFamily="34" charset="-120"/>
-              </a:rPr>
-              <a:t>04</a:t>
-            </a:r>
-            <a:endParaRPr lang="en-US" sz="2800" dirty="0"/>
-          </a:p>
-        </p:txBody>
-      </p:sp>
-      <p:sp>
-        <p:nvSpPr>
-          <p:cNvPr id="18" name="Text 16"/>
-          <p:cNvSpPr/>
-          <p:nvPr/>
-        </p:nvSpPr>
-        <p:spPr>
-          <a:xfrm>
-            <a:off x="9290304" y="2523744"/>
-            <a:ext cx="2139696" cy="786384"/>
-          </a:xfrm>
-          <a:prstGeom prst="rect">
-            <a:avLst/>
-          </a:prstGeom>
-          <a:noFill/>
-          <a:ln/>
-        </p:spPr>
-        <p:txBody>
-          <a:bodyPr wrap="square" lIns="0" tIns="0" rIns="0" bIns="0" rtlCol="0" anchor="t"/>
-          <a:lstStyle/>
-          <a:p>
-            <a:pPr indent="0" marL="0">
-              <a:lnSpc>
-                <a:spcPts val="2000"/>
-              </a:lnSpc>
-              <a:buNone/>
-            </a:pPr>
-            <a:r>
-              <a:rPr lang="en-US" sz="1500" b="1" dirty="0">
-                <a:solidFill>
-                  <a:srgbClr val="1B2430"/>
-                </a:solidFill>
-                <a:latin typeface="Cambria" pitchFamily="34" charset="0"/>
-                <a:ea typeface="Cambria" pitchFamily="34" charset="-122"/>
-                <a:cs typeface="Cambria" pitchFamily="34" charset="-120"/>
-              </a:rPr>
-              <a:t>Set guardrails early</a:t>
-            </a:r>
-            <a:endParaRPr lang="en-US" sz="1500" dirty="0"/>
-          </a:p>
-        </p:txBody>
-      </p:sp>
-      <p:sp>
-        <p:nvSpPr>
-          <p:cNvPr id="19" name="Text 17"/>
-          <p:cNvSpPr/>
-          <p:nvPr/>
-        </p:nvSpPr>
-        <p:spPr>
-          <a:xfrm>
-            <a:off x="9290304" y="3346704"/>
-            <a:ext cx="2139696" cy="749808"/>
-          </a:xfrm>
-          <a:prstGeom prst="rect">
-            <a:avLst/>
-          </a:prstGeom>
-          <a:noFill/>
-          <a:ln/>
-        </p:spPr>
-        <p:txBody>
-          <a:bodyPr wrap="square" lIns="0" tIns="0" rIns="0" bIns="0" rtlCol="0" anchor="t"/>
-          <a:lstStyle/>
-          <a:p>
-            <a:pPr indent="0" marL="0">
-              <a:lnSpc>
-                <a:spcPts val="1500"/>
-              </a:lnSpc>
-              <a:buNone/>
-            </a:pPr>
-            <a:r>
-              <a:rPr lang="en-US" sz="1200" dirty="0">
-                <a:solidFill>
-                  <a:srgbClr val="5C6675"/>
-                </a:solidFill>
-                <a:latin typeface="Calibri" pitchFamily="34" charset="0"/>
-                <a:ea typeface="Calibri" pitchFamily="34" charset="-122"/>
-                <a:cs typeface="Calibri" pitchFamily="34" charset="-120"/>
-              </a:rPr>
-              <a:t>Owners, budget thresholds and quotas cost little to add — and stop the expensive surprises.</a:t>
-            </a:r>
-            <a:endParaRPr lang="en-US" sz="1200" dirty="0"/>
-          </a:p>
-        </p:txBody>
-      </p:sp>
-      <p:sp>
-        <p:nvSpPr>
-          <p:cNvPr id="20" name="Shape 18"/>
-          <p:cNvSpPr/>
-          <p:nvPr/>
-        </p:nvSpPr>
-        <p:spPr>
-          <a:xfrm>
-            <a:off x="548640" y="4434840"/>
-            <a:ext cx="11091672" cy="1874520"/>
-          </a:xfrm>
-          <a:prstGeom prst="roundRect">
-            <a:avLst>
-              <a:gd name="adj" fmla="val 4390"/>
-            </a:avLst>
-          </a:prstGeom>
-          <a:solidFill>
-            <a:srgbClr val="F1F3F6"/>
-          </a:solidFill>
-          <a:ln/>
-        </p:spPr>
-      </p:sp>
-      <p:sp>
-        <p:nvSpPr>
-          <p:cNvPr id="21" name="Text 19"/>
-          <p:cNvSpPr/>
-          <p:nvPr/>
-        </p:nvSpPr>
-        <p:spPr>
-          <a:xfrm>
-            <a:off x="877824" y="4572000"/>
-            <a:ext cx="6035040" cy="292608"/>
-          </a:xfrm>
-          <a:prstGeom prst="rect">
-            <a:avLst/>
-          </a:prstGeom>
-          <a:noFill/>
-          <a:ln/>
-        </p:spPr>
-        <p:txBody>
-          <a:bodyPr wrap="square" lIns="0" tIns="0" rIns="0" bIns="0" rtlCol="0" anchor="ctr"/>
-          <a:lstStyle/>
-          <a:p>
-            <a:pPr indent="0" marL="0">
-              <a:buNone/>
-            </a:pPr>
-            <a:r>
-              <a:rPr lang="en-US" sz="1200" b="1" spc="180" kern="0" dirty="0">
-                <a:solidFill>
-                  <a:srgbClr val="5C6675"/>
-                </a:solidFill>
-                <a:latin typeface="Calibri" pitchFamily="34" charset="0"/>
-                <a:ea typeface="Calibri" pitchFamily="34" charset="-122"/>
-                <a:cs typeface="Calibri" pitchFamily="34" charset="-120"/>
-              </a:rPr>
-              <a:t>Tooling — match the footprint, not the ambition</a:t>
-            </a:r>
-            <a:endParaRPr lang="en-US" sz="1200" dirty="0"/>
-          </a:p>
-        </p:txBody>
-      </p:sp>
-      <p:sp>
-        <p:nvSpPr>
-          <p:cNvPr id="22" name="Text 20"/>
-          <p:cNvSpPr/>
-          <p:nvPr/>
-        </p:nvSpPr>
-        <p:spPr>
-          <a:xfrm>
-            <a:off x="877824" y="4937760"/>
-            <a:ext cx="1737360" cy="384048"/>
-          </a:xfrm>
-          <a:prstGeom prst="rect">
-            <a:avLst/>
-          </a:prstGeom>
-          <a:noFill/>
-          <a:ln/>
-        </p:spPr>
-        <p:txBody>
-          <a:bodyPr wrap="square" lIns="0" tIns="0" rIns="0" bIns="0" rtlCol="0" anchor="ctr"/>
-          <a:lstStyle/>
-          <a:p>
-            <a:pPr indent="0" marL="0">
-              <a:buNone/>
-            </a:pPr>
-            <a:r>
-              <a:rPr lang="en-US" sz="1350" b="1" dirty="0">
-                <a:solidFill>
-                  <a:srgbClr val="2E8B7A"/>
-                </a:solidFill>
-                <a:latin typeface="Calibri" pitchFamily="34" charset="0"/>
-                <a:ea typeface="Calibri" pitchFamily="34" charset="-122"/>
-                <a:cs typeface="Calibri" pitchFamily="34" charset="-120"/>
-              </a:rPr>
-              <a:t>Native</a:t>
-            </a:r>
-            <a:endParaRPr lang="en-US" sz="1350" dirty="0"/>
-          </a:p>
-        </p:txBody>
-      </p:sp>
-      <p:sp>
-        <p:nvSpPr>
-          <p:cNvPr id="23" name="Text 21"/>
-          <p:cNvSpPr/>
-          <p:nvPr/>
-        </p:nvSpPr>
-        <p:spPr>
-          <a:xfrm>
-            <a:off x="2651760" y="4937760"/>
-            <a:ext cx="8595360" cy="384048"/>
-          </a:xfrm>
-          <a:prstGeom prst="rect">
-            <a:avLst/>
-          </a:prstGeom>
-          <a:noFill/>
-          <a:ln/>
-        </p:spPr>
-        <p:txBody>
-          <a:bodyPr wrap="square" lIns="0" tIns="0" rIns="0" bIns="0" rtlCol="0" anchor="ctr"/>
-          <a:lstStyle/>
-          <a:p>
-            <a:pPr indent="0" marL="0">
-              <a:buNone/>
-            </a:pPr>
-            <a:r>
-              <a:rPr lang="en-US" sz="1350" dirty="0">
-                <a:solidFill>
-                  <a:srgbClr val="5C6675"/>
-                </a:solidFill>
-                <a:latin typeface="Calibri" pitchFamily="34" charset="0"/>
-                <a:ea typeface="Calibri" pitchFamily="34" charset="-122"/>
-                <a:cs typeface="Calibri" pitchFamily="34" charset="-120"/>
-              </a:rPr>
-              <a:t>AWS Cost Explorer  ·  Azure Cost Management  ·  GCP Billing</a:t>
-            </a:r>
-            <a:endParaRPr lang="en-US" sz="1350" dirty="0"/>
-          </a:p>
-        </p:txBody>
-      </p:sp>
-      <p:sp>
-        <p:nvSpPr>
-          <p:cNvPr id="24" name="Text 22"/>
-          <p:cNvSpPr/>
-          <p:nvPr/>
-        </p:nvSpPr>
-        <p:spPr>
-          <a:xfrm>
-            <a:off x="877824" y="5349240"/>
-            <a:ext cx="1737360" cy="384048"/>
-          </a:xfrm>
-          <a:prstGeom prst="rect">
-            <a:avLst/>
-          </a:prstGeom>
-          <a:noFill/>
-          <a:ln/>
-        </p:spPr>
-        <p:txBody>
-          <a:bodyPr wrap="square" lIns="0" tIns="0" rIns="0" bIns="0" rtlCol="0" anchor="ctr"/>
-          <a:lstStyle/>
-          <a:p>
-            <a:pPr indent="0" marL="0">
-              <a:buNone/>
-            </a:pPr>
-            <a:r>
-              <a:rPr lang="en-US" sz="1350" b="1" dirty="0">
-                <a:solidFill>
-                  <a:srgbClr val="B87B18"/>
-                </a:solidFill>
-                <a:latin typeface="Calibri" pitchFamily="34" charset="0"/>
-                <a:ea typeface="Calibri" pitchFamily="34" charset="-122"/>
-                <a:cs typeface="Calibri" pitchFamily="34" charset="-120"/>
-              </a:rPr>
-              <a:t>Third-party</a:t>
-            </a:r>
-            <a:endParaRPr lang="en-US" sz="1350" dirty="0"/>
-          </a:p>
-        </p:txBody>
-      </p:sp>
-      <p:sp>
-        <p:nvSpPr>
-          <p:cNvPr id="25" name="Text 23"/>
-          <p:cNvSpPr/>
-          <p:nvPr/>
-        </p:nvSpPr>
-        <p:spPr>
-          <a:xfrm>
-            <a:off x="2651760" y="5349240"/>
-            <a:ext cx="8595360" cy="384048"/>
-          </a:xfrm>
-          <a:prstGeom prst="rect">
-            <a:avLst/>
-          </a:prstGeom>
-          <a:noFill/>
-          <a:ln/>
-        </p:spPr>
-        <p:txBody>
-          <a:bodyPr wrap="square" lIns="0" tIns="0" rIns="0" bIns="0" rtlCol="0" anchor="ctr"/>
-          <a:lstStyle/>
-          <a:p>
-            <a:pPr indent="0" marL="0">
-              <a:buNone/>
-            </a:pPr>
-            <a:r>
-              <a:rPr lang="en-US" sz="1350" dirty="0">
-                <a:solidFill>
-                  <a:srgbClr val="5C6675"/>
-                </a:solidFill>
-                <a:latin typeface="Calibri" pitchFamily="34" charset="0"/>
-                <a:ea typeface="Calibri" pitchFamily="34" charset="-122"/>
-                <a:cs typeface="Calibri" pitchFamily="34" charset="-120"/>
-              </a:rPr>
-              <a:t>CloudHealth  ·  Apptio  ·  Vantage  ·  nOps  ·  Finout  ·  CoreStack</a:t>
-            </a:r>
-            <a:endParaRPr lang="en-US" sz="1350" dirty="0"/>
-          </a:p>
-        </p:txBody>
-      </p:sp>
-      <p:sp>
-        <p:nvSpPr>
-          <p:cNvPr id="26" name="Text 24"/>
-          <p:cNvSpPr/>
-          <p:nvPr/>
-        </p:nvSpPr>
-        <p:spPr>
-          <a:xfrm>
-            <a:off x="877824" y="5760720"/>
-            <a:ext cx="1737360" cy="384048"/>
-          </a:xfrm>
-          <a:prstGeom prst="rect">
-            <a:avLst/>
-          </a:prstGeom>
-          <a:noFill/>
-          <a:ln/>
-        </p:spPr>
-        <p:txBody>
-          <a:bodyPr wrap="square" lIns="0" tIns="0" rIns="0" bIns="0" rtlCol="0" anchor="ctr"/>
-          <a:lstStyle/>
-          <a:p>
-            <a:pPr indent="0" marL="0">
-              <a:buNone/>
-            </a:pPr>
-            <a:r>
-              <a:rPr lang="en-US" sz="1350" b="1" dirty="0">
-                <a:solidFill>
-                  <a:srgbClr val="1B2430"/>
-                </a:solidFill>
-                <a:latin typeface="Calibri" pitchFamily="34" charset="0"/>
-                <a:ea typeface="Calibri" pitchFamily="34" charset="-122"/>
-                <a:cs typeface="Calibri" pitchFamily="34" charset="-120"/>
-              </a:rPr>
-              <a:t>Standard</a:t>
-            </a:r>
-            <a:endParaRPr lang="en-US" sz="1350" dirty="0"/>
-          </a:p>
-        </p:txBody>
-      </p:sp>
-      <p:sp>
-        <p:nvSpPr>
-          <p:cNvPr id="27" name="Text 25"/>
-          <p:cNvSpPr/>
-          <p:nvPr/>
-        </p:nvSpPr>
-        <p:spPr>
-          <a:xfrm>
-            <a:off x="2651760" y="5760720"/>
-            <a:ext cx="8595360" cy="384048"/>
-          </a:xfrm>
-          <a:prstGeom prst="rect">
-            <a:avLst/>
-          </a:prstGeom>
-          <a:noFill/>
-          <a:ln/>
-        </p:spPr>
-        <p:txBody>
-          <a:bodyPr wrap="square" lIns="0" tIns="0" rIns="0" bIns="0" rtlCol="0" anchor="ctr"/>
-          <a:lstStyle/>
-          <a:p>
-            <a:pPr indent="0" marL="0">
-              <a:buNone/>
-            </a:pPr>
-            <a:r>
-              <a:rPr lang="en-US" sz="1350" dirty="0">
-                <a:solidFill>
-                  <a:srgbClr val="5C6675"/>
-                </a:solidFill>
-                <a:latin typeface="Calibri" pitchFamily="34" charset="0"/>
-                <a:ea typeface="Calibri" pitchFamily="34" charset="-122"/>
-                <a:cs typeface="Calibri" pitchFamily="34" charset="-120"/>
-              </a:rPr>
-              <a:t>FOCUS-compliant platforms for multi-cloud reporting</a:t>
-            </a:r>
-            <a:endParaRPr lang="en-US" sz="1350" dirty="0"/>
+              <a:t>The goal is not a smaller invoice. It is an invoice with nothing in it you have not already seen, explained and decided about.</a:t>
+            </a:r>
+            <a:endParaRPr lang="en-US" sz="1550" dirty="0"/>
           </a:p>
         </p:txBody>
       </p:sp>
@@ -13787,6 +14145,991 @@
     <p:bg>
       <p:bgPr>
         <a:solidFill>
+          <a:srgbClr val="FFFFFF"/>
+        </a:solidFill>
+      </p:bgPr>
+    </p:bg>
+    <p:spTree>
+      <p:nvGrpSpPr>
+        <p:cNvPr id="1" name=""/>
+        <p:cNvGrpSpPr/>
+        <p:nvPr/>
+      </p:nvGrpSpPr>
+      <p:grpSpPr>
+        <a:xfrm>
+          <a:off x="0" y="0"/>
+          <a:ext cx="0" cy="0"/>
+          <a:chOff x="0" y="0"/>
+          <a:chExt cx="0" cy="0"/>
+        </a:xfrm>
+      </p:grpSpPr>
+      <p:sp>
+        <p:nvSpPr>
+          <p:cNvPr id="2" name="Text 0"/>
+          <p:cNvSpPr/>
+          <p:nvPr/>
+        </p:nvSpPr>
+        <p:spPr>
+          <a:xfrm>
+            <a:off x="548640" y="475488"/>
+            <a:ext cx="7315200" cy="256032"/>
+          </a:xfrm>
+          <a:prstGeom prst="rect">
+            <a:avLst/>
+          </a:prstGeom>
+          <a:noFill/>
+          <a:ln/>
+        </p:spPr>
+        <p:txBody>
+          <a:bodyPr wrap="square" lIns="0" tIns="0" rIns="0" bIns="0" rtlCol="0" anchor="ctr"/>
+          <a:lstStyle/>
+          <a:p>
+            <a:pPr indent="0" marL="0">
+              <a:buNone/>
+            </a:pPr>
+            <a:r>
+              <a:rPr lang="en-US" sz="1100" b="1" spc="220" kern="0" dirty="0">
+                <a:solidFill>
+                  <a:srgbClr val="E39B2C"/>
+                </a:solidFill>
+                <a:latin typeface="Calibri" pitchFamily="34" charset="0"/>
+                <a:ea typeface="Calibri" pitchFamily="34" charset="-122"/>
+                <a:cs typeface="Calibri" pitchFamily="34" charset="-120"/>
+              </a:rPr>
+              <a:t>THE PATH FORWARD</a:t>
+            </a:r>
+            <a:endParaRPr lang="en-US" sz="1100" dirty="0"/>
+          </a:p>
+        </p:txBody>
+      </p:sp>
+      <p:sp>
+        <p:nvSpPr>
+          <p:cNvPr id="3" name="Text 1"/>
+          <p:cNvSpPr/>
+          <p:nvPr/>
+        </p:nvSpPr>
+        <p:spPr>
+          <a:xfrm>
+            <a:off x="548640" y="768096"/>
+            <a:ext cx="11091672" cy="804672"/>
+          </a:xfrm>
+          <a:prstGeom prst="rect">
+            <a:avLst/>
+          </a:prstGeom>
+          <a:noFill/>
+          <a:ln/>
+        </p:spPr>
+        <p:txBody>
+          <a:bodyPr wrap="square" lIns="0" tIns="0" rIns="0" bIns="0" rtlCol="0" anchor="ctr"/>
+          <a:lstStyle/>
+          <a:p>
+            <a:pPr indent="0" marL="0">
+              <a:buNone/>
+            </a:pPr>
+            <a:r>
+              <a:rPr lang="en-US" sz="3100" b="1" dirty="0">
+                <a:solidFill>
+                  <a:srgbClr val="1B2430"/>
+                </a:solidFill>
+                <a:latin typeface="Cambria" pitchFamily="34" charset="0"/>
+                <a:ea typeface="Cambria" pitchFamily="34" charset="-122"/>
+                <a:cs typeface="Cambria" pitchFamily="34" charset="-120"/>
+              </a:rPr>
+              <a:t>Where to start</a:t>
+            </a:r>
+            <a:endParaRPr lang="en-US" sz="3100" dirty="0"/>
+          </a:p>
+        </p:txBody>
+      </p:sp>
+      <p:sp>
+        <p:nvSpPr>
+          <p:cNvPr id="4" name="Shape 2"/>
+          <p:cNvSpPr/>
+          <p:nvPr/>
+        </p:nvSpPr>
+        <p:spPr>
+          <a:xfrm>
+            <a:off x="548640" y="1783080"/>
+            <a:ext cx="2587752" cy="2423160"/>
+          </a:xfrm>
+          <a:prstGeom prst="roundRect">
+            <a:avLst>
+              <a:gd name="adj" fmla="val 3396"/>
+            </a:avLst>
+          </a:prstGeom>
+          <a:solidFill>
+            <a:srgbClr val="1F2936"/>
+          </a:solidFill>
+          <a:ln/>
+        </p:spPr>
+      </p:sp>
+      <p:sp>
+        <p:nvSpPr>
+          <p:cNvPr id="5" name="Text 3"/>
+          <p:cNvSpPr/>
+          <p:nvPr/>
+        </p:nvSpPr>
+        <p:spPr>
+          <a:xfrm>
+            <a:off x="804672" y="1965960"/>
+            <a:ext cx="1097280" cy="502920"/>
+          </a:xfrm>
+          <a:prstGeom prst="rect">
+            <a:avLst/>
+          </a:prstGeom>
+          <a:noFill/>
+          <a:ln/>
+        </p:spPr>
+        <p:txBody>
+          <a:bodyPr wrap="square" lIns="0" tIns="0" rIns="0" bIns="0" rtlCol="0" anchor="ctr"/>
+          <a:lstStyle/>
+          <a:p>
+            <a:pPr indent="0" marL="0">
+              <a:buNone/>
+            </a:pPr>
+            <a:r>
+              <a:rPr lang="en-US" sz="2800" b="1" dirty="0">
+                <a:solidFill>
+                  <a:srgbClr val="E39B2C"/>
+                </a:solidFill>
+                <a:latin typeface="Cambria" pitchFamily="34" charset="0"/>
+                <a:ea typeface="Cambria" pitchFamily="34" charset="-122"/>
+                <a:cs typeface="Cambria" pitchFamily="34" charset="-120"/>
+              </a:rPr>
+              <a:t>01</a:t>
+            </a:r>
+            <a:endParaRPr lang="en-US" sz="2800" dirty="0"/>
+          </a:p>
+        </p:txBody>
+      </p:sp>
+      <p:sp>
+        <p:nvSpPr>
+          <p:cNvPr id="6" name="Text 4"/>
+          <p:cNvSpPr/>
+          <p:nvPr/>
+        </p:nvSpPr>
+        <p:spPr>
+          <a:xfrm>
+            <a:off x="786384" y="2523744"/>
+            <a:ext cx="2139696" cy="786384"/>
+          </a:xfrm>
+          <a:prstGeom prst="rect">
+            <a:avLst/>
+          </a:prstGeom>
+          <a:noFill/>
+          <a:ln/>
+        </p:spPr>
+        <p:txBody>
+          <a:bodyPr wrap="square" lIns="0" tIns="0" rIns="0" bIns="0" rtlCol="0" anchor="t"/>
+          <a:lstStyle/>
+          <a:p>
+            <a:pPr indent="0" marL="0">
+              <a:lnSpc>
+                <a:spcPts val="2000"/>
+              </a:lnSpc>
+              <a:buNone/>
+            </a:pPr>
+            <a:r>
+              <a:rPr lang="en-US" sz="1500" b="1" dirty="0">
+                <a:solidFill>
+                  <a:srgbClr val="FFFFFF"/>
+                </a:solidFill>
+                <a:latin typeface="Cambria" pitchFamily="34" charset="0"/>
+                <a:ea typeface="Cambria" pitchFamily="34" charset="-122"/>
+                <a:cs typeface="Cambria" pitchFamily="34" charset="-120"/>
+              </a:rPr>
+              <a:t>Set the tagging standard</a:t>
+            </a:r>
+            <a:endParaRPr lang="en-US" sz="1500" dirty="0"/>
+          </a:p>
+        </p:txBody>
+      </p:sp>
+      <p:sp>
+        <p:nvSpPr>
+          <p:cNvPr id="7" name="Text 5"/>
+          <p:cNvSpPr/>
+          <p:nvPr/>
+        </p:nvSpPr>
+        <p:spPr>
+          <a:xfrm>
+            <a:off x="786384" y="3346704"/>
+            <a:ext cx="2139696" cy="749808"/>
+          </a:xfrm>
+          <a:prstGeom prst="rect">
+            <a:avLst/>
+          </a:prstGeom>
+          <a:noFill/>
+          <a:ln/>
+        </p:spPr>
+        <p:txBody>
+          <a:bodyPr wrap="square" lIns="0" tIns="0" rIns="0" bIns="0" rtlCol="0" anchor="t"/>
+          <a:lstStyle/>
+          <a:p>
+            <a:pPr indent="0" marL="0">
+              <a:lnSpc>
+                <a:spcPts val="1500"/>
+              </a:lnSpc>
+              <a:buNone/>
+            </a:pPr>
+            <a:r>
+              <a:rPr lang="en-US" sz="1200" dirty="0">
+                <a:solidFill>
+                  <a:srgbClr val="9EABBA"/>
+                </a:solidFill>
+                <a:latin typeface="Calibri" pitchFamily="34" charset="0"/>
+                <a:ea typeface="Calibri" pitchFamily="34" charset="-122"/>
+                <a:cs typeface="Calibri" pitchFamily="34" charset="-120"/>
+              </a:rPr>
+              <a:t>Agree a consistent taxonomy before investing in dashboards.</a:t>
+            </a:r>
+            <a:endParaRPr lang="en-US" sz="1200" dirty="0"/>
+          </a:p>
+        </p:txBody>
+      </p:sp>
+      <p:sp>
+        <p:nvSpPr>
+          <p:cNvPr id="8" name="Shape 6"/>
+          <p:cNvSpPr/>
+          <p:nvPr/>
+        </p:nvSpPr>
+        <p:spPr>
+          <a:xfrm>
+            <a:off x="3383280" y="1783080"/>
+            <a:ext cx="2587752" cy="2423160"/>
+          </a:xfrm>
+          <a:prstGeom prst="roundRect">
+            <a:avLst>
+              <a:gd name="adj" fmla="val 3396"/>
+            </a:avLst>
+          </a:prstGeom>
+          <a:solidFill>
+            <a:srgbClr val="F1F3F6"/>
+          </a:solidFill>
+          <a:ln/>
+        </p:spPr>
+      </p:sp>
+      <p:sp>
+        <p:nvSpPr>
+          <p:cNvPr id="9" name="Text 7"/>
+          <p:cNvSpPr/>
+          <p:nvPr/>
+        </p:nvSpPr>
+        <p:spPr>
+          <a:xfrm>
+            <a:off x="3639312" y="1965960"/>
+            <a:ext cx="1097280" cy="502920"/>
+          </a:xfrm>
+          <a:prstGeom prst="rect">
+            <a:avLst/>
+          </a:prstGeom>
+          <a:noFill/>
+          <a:ln/>
+        </p:spPr>
+        <p:txBody>
+          <a:bodyPr wrap="square" lIns="0" tIns="0" rIns="0" bIns="0" rtlCol="0" anchor="ctr"/>
+          <a:lstStyle/>
+          <a:p>
+            <a:pPr indent="0" marL="0">
+              <a:buNone/>
+            </a:pPr>
+            <a:r>
+              <a:rPr lang="en-US" sz="2800" b="1" dirty="0">
+                <a:solidFill>
+                  <a:srgbClr val="B9C2CD"/>
+                </a:solidFill>
+                <a:latin typeface="Cambria" pitchFamily="34" charset="0"/>
+                <a:ea typeface="Cambria" pitchFamily="34" charset="-122"/>
+                <a:cs typeface="Cambria" pitchFamily="34" charset="-120"/>
+              </a:rPr>
+              <a:t>02</a:t>
+            </a:r>
+            <a:endParaRPr lang="en-US" sz="2800" dirty="0"/>
+          </a:p>
+        </p:txBody>
+      </p:sp>
+      <p:sp>
+        <p:nvSpPr>
+          <p:cNvPr id="10" name="Text 8"/>
+          <p:cNvSpPr/>
+          <p:nvPr/>
+        </p:nvSpPr>
+        <p:spPr>
+          <a:xfrm>
+            <a:off x="3621024" y="2523744"/>
+            <a:ext cx="2139696" cy="786384"/>
+          </a:xfrm>
+          <a:prstGeom prst="rect">
+            <a:avLst/>
+          </a:prstGeom>
+          <a:noFill/>
+          <a:ln/>
+        </p:spPr>
+        <p:txBody>
+          <a:bodyPr wrap="square" lIns="0" tIns="0" rIns="0" bIns="0" rtlCol="0" anchor="t"/>
+          <a:lstStyle/>
+          <a:p>
+            <a:pPr indent="0" marL="0">
+              <a:lnSpc>
+                <a:spcPts val="2000"/>
+              </a:lnSpc>
+              <a:buNone/>
+            </a:pPr>
+            <a:r>
+              <a:rPr lang="en-US" sz="1500" b="1" dirty="0">
+                <a:solidFill>
+                  <a:srgbClr val="1B2430"/>
+                </a:solidFill>
+                <a:latin typeface="Cambria" pitchFamily="34" charset="0"/>
+                <a:ea typeface="Cambria" pitchFamily="34" charset="-122"/>
+                <a:cs typeface="Cambria" pitchFamily="34" charset="-120"/>
+              </a:rPr>
+              <a:t>Start with the biggest spend</a:t>
+            </a:r>
+            <a:endParaRPr lang="en-US" sz="1500" dirty="0"/>
+          </a:p>
+        </p:txBody>
+      </p:sp>
+      <p:sp>
+        <p:nvSpPr>
+          <p:cNvPr id="11" name="Text 9"/>
+          <p:cNvSpPr/>
+          <p:nvPr/>
+        </p:nvSpPr>
+        <p:spPr>
+          <a:xfrm>
+            <a:off x="3621024" y="3346704"/>
+            <a:ext cx="2139696" cy="749808"/>
+          </a:xfrm>
+          <a:prstGeom prst="rect">
+            <a:avLst/>
+          </a:prstGeom>
+          <a:noFill/>
+          <a:ln/>
+        </p:spPr>
+        <p:txBody>
+          <a:bodyPr wrap="square" lIns="0" tIns="0" rIns="0" bIns="0" rtlCol="0" anchor="t"/>
+          <a:lstStyle/>
+          <a:p>
+            <a:pPr indent="0" marL="0">
+              <a:lnSpc>
+                <a:spcPts val="1500"/>
+              </a:lnSpc>
+              <a:buNone/>
+            </a:pPr>
+            <a:r>
+              <a:rPr lang="en-US" sz="1200" dirty="0">
+                <a:solidFill>
+                  <a:srgbClr val="5C6675"/>
+                </a:solidFill>
+                <a:latin typeface="Calibri" pitchFamily="34" charset="0"/>
+                <a:ea typeface="Calibri" pitchFamily="34" charset="-122"/>
+                <a:cs typeface="Calibri" pitchFamily="34" charset="-120"/>
+              </a:rPr>
+              <a:t>Attack the largest categories first. Don't chase perfect granularity everywhere.</a:t>
+            </a:r>
+            <a:endParaRPr lang="en-US" sz="1200" dirty="0"/>
+          </a:p>
+        </p:txBody>
+      </p:sp>
+      <p:sp>
+        <p:nvSpPr>
+          <p:cNvPr id="12" name="Shape 10"/>
+          <p:cNvSpPr/>
+          <p:nvPr/>
+        </p:nvSpPr>
+        <p:spPr>
+          <a:xfrm>
+            <a:off x="6217920" y="1783080"/>
+            <a:ext cx="2587752" cy="2423160"/>
+          </a:xfrm>
+          <a:prstGeom prst="roundRect">
+            <a:avLst>
+              <a:gd name="adj" fmla="val 3396"/>
+            </a:avLst>
+          </a:prstGeom>
+          <a:solidFill>
+            <a:srgbClr val="F1F3F6"/>
+          </a:solidFill>
+          <a:ln/>
+        </p:spPr>
+      </p:sp>
+      <p:sp>
+        <p:nvSpPr>
+          <p:cNvPr id="13" name="Text 11"/>
+          <p:cNvSpPr/>
+          <p:nvPr/>
+        </p:nvSpPr>
+        <p:spPr>
+          <a:xfrm>
+            <a:off x="6473952" y="1965960"/>
+            <a:ext cx="1097280" cy="502920"/>
+          </a:xfrm>
+          <a:prstGeom prst="rect">
+            <a:avLst/>
+          </a:prstGeom>
+          <a:noFill/>
+          <a:ln/>
+        </p:spPr>
+        <p:txBody>
+          <a:bodyPr wrap="square" lIns="0" tIns="0" rIns="0" bIns="0" rtlCol="0" anchor="ctr"/>
+          <a:lstStyle/>
+          <a:p>
+            <a:pPr indent="0" marL="0">
+              <a:buNone/>
+            </a:pPr>
+            <a:r>
+              <a:rPr lang="en-US" sz="2800" b="1" dirty="0">
+                <a:solidFill>
+                  <a:srgbClr val="B9C2CD"/>
+                </a:solidFill>
+                <a:latin typeface="Cambria" pitchFamily="34" charset="0"/>
+                <a:ea typeface="Cambria" pitchFamily="34" charset="-122"/>
+                <a:cs typeface="Cambria" pitchFamily="34" charset="-120"/>
+              </a:rPr>
+              <a:t>03</a:t>
+            </a:r>
+            <a:endParaRPr lang="en-US" sz="2800" dirty="0"/>
+          </a:p>
+        </p:txBody>
+      </p:sp>
+      <p:sp>
+        <p:nvSpPr>
+          <p:cNvPr id="14" name="Text 12"/>
+          <p:cNvSpPr/>
+          <p:nvPr/>
+        </p:nvSpPr>
+        <p:spPr>
+          <a:xfrm>
+            <a:off x="6455664" y="2523744"/>
+            <a:ext cx="2139696" cy="786384"/>
+          </a:xfrm>
+          <a:prstGeom prst="rect">
+            <a:avLst/>
+          </a:prstGeom>
+          <a:noFill/>
+          <a:ln/>
+        </p:spPr>
+        <p:txBody>
+          <a:bodyPr wrap="square" lIns="0" tIns="0" rIns="0" bIns="0" rtlCol="0" anchor="t"/>
+          <a:lstStyle/>
+          <a:p>
+            <a:pPr indent="0" marL="0">
+              <a:lnSpc>
+                <a:spcPts val="2000"/>
+              </a:lnSpc>
+              <a:buNone/>
+            </a:pPr>
+            <a:r>
+              <a:rPr lang="en-US" sz="1500" b="1" dirty="0">
+                <a:solidFill>
+                  <a:srgbClr val="1B2430"/>
+                </a:solidFill>
+                <a:latin typeface="Cambria" pitchFamily="34" charset="0"/>
+                <a:ea typeface="Cambria" pitchFamily="34" charset="-122"/>
+                <a:cs typeface="Cambria" pitchFamily="34" charset="-120"/>
+              </a:rPr>
+              <a:t>Get finance and engineering talking</a:t>
+            </a:r>
+            <a:endParaRPr lang="en-US" sz="1500" dirty="0"/>
+          </a:p>
+        </p:txBody>
+      </p:sp>
+      <p:sp>
+        <p:nvSpPr>
+          <p:cNvPr id="15" name="Text 13"/>
+          <p:cNvSpPr/>
+          <p:nvPr/>
+        </p:nvSpPr>
+        <p:spPr>
+          <a:xfrm>
+            <a:off x="6455664" y="3346704"/>
+            <a:ext cx="2139696" cy="749808"/>
+          </a:xfrm>
+          <a:prstGeom prst="rect">
+            <a:avLst/>
+          </a:prstGeom>
+          <a:noFill/>
+          <a:ln/>
+        </p:spPr>
+        <p:txBody>
+          <a:bodyPr wrap="square" lIns="0" tIns="0" rIns="0" bIns="0" rtlCol="0" anchor="t"/>
+          <a:lstStyle/>
+          <a:p>
+            <a:pPr indent="0" marL="0">
+              <a:lnSpc>
+                <a:spcPts val="1500"/>
+              </a:lnSpc>
+              <a:buNone/>
+            </a:pPr>
+            <a:r>
+              <a:rPr lang="en-US" sz="1200" dirty="0">
+                <a:solidFill>
+                  <a:srgbClr val="5C6675"/>
+                </a:solidFill>
+                <a:latin typeface="Calibri" pitchFamily="34" charset="0"/>
+                <a:ea typeface="Calibri" pitchFamily="34" charset="-122"/>
+                <a:cs typeface="Calibri" pitchFamily="34" charset="-120"/>
+              </a:rPr>
+              <a:t>Bring both into the conversation early, not as an afterthought.</a:t>
+            </a:r>
+            <a:endParaRPr lang="en-US" sz="1200" dirty="0"/>
+          </a:p>
+        </p:txBody>
+      </p:sp>
+      <p:sp>
+        <p:nvSpPr>
+          <p:cNvPr id="16" name="Shape 14"/>
+          <p:cNvSpPr/>
+          <p:nvPr/>
+        </p:nvSpPr>
+        <p:spPr>
+          <a:xfrm>
+            <a:off x="9052560" y="1783080"/>
+            <a:ext cx="2587752" cy="2423160"/>
+          </a:xfrm>
+          <a:prstGeom prst="roundRect">
+            <a:avLst>
+              <a:gd name="adj" fmla="val 3396"/>
+            </a:avLst>
+          </a:prstGeom>
+          <a:solidFill>
+            <a:srgbClr val="F1F3F6"/>
+          </a:solidFill>
+          <a:ln/>
+        </p:spPr>
+      </p:sp>
+      <p:sp>
+        <p:nvSpPr>
+          <p:cNvPr id="17" name="Text 15"/>
+          <p:cNvSpPr/>
+          <p:nvPr/>
+        </p:nvSpPr>
+        <p:spPr>
+          <a:xfrm>
+            <a:off x="9308592" y="1965960"/>
+            <a:ext cx="1097280" cy="502920"/>
+          </a:xfrm>
+          <a:prstGeom prst="rect">
+            <a:avLst/>
+          </a:prstGeom>
+          <a:noFill/>
+          <a:ln/>
+        </p:spPr>
+        <p:txBody>
+          <a:bodyPr wrap="square" lIns="0" tIns="0" rIns="0" bIns="0" rtlCol="0" anchor="ctr"/>
+          <a:lstStyle/>
+          <a:p>
+            <a:pPr indent="0" marL="0">
+              <a:buNone/>
+            </a:pPr>
+            <a:r>
+              <a:rPr lang="en-US" sz="2800" b="1" dirty="0">
+                <a:solidFill>
+                  <a:srgbClr val="B9C2CD"/>
+                </a:solidFill>
+                <a:latin typeface="Cambria" pitchFamily="34" charset="0"/>
+                <a:ea typeface="Cambria" pitchFamily="34" charset="-122"/>
+                <a:cs typeface="Cambria" pitchFamily="34" charset="-120"/>
+              </a:rPr>
+              <a:t>04</a:t>
+            </a:r>
+            <a:endParaRPr lang="en-US" sz="2800" dirty="0"/>
+          </a:p>
+        </p:txBody>
+      </p:sp>
+      <p:sp>
+        <p:nvSpPr>
+          <p:cNvPr id="18" name="Text 16"/>
+          <p:cNvSpPr/>
+          <p:nvPr/>
+        </p:nvSpPr>
+        <p:spPr>
+          <a:xfrm>
+            <a:off x="9290304" y="2523744"/>
+            <a:ext cx="2139696" cy="786384"/>
+          </a:xfrm>
+          <a:prstGeom prst="rect">
+            <a:avLst/>
+          </a:prstGeom>
+          <a:noFill/>
+          <a:ln/>
+        </p:spPr>
+        <p:txBody>
+          <a:bodyPr wrap="square" lIns="0" tIns="0" rIns="0" bIns="0" rtlCol="0" anchor="t"/>
+          <a:lstStyle/>
+          <a:p>
+            <a:pPr indent="0" marL="0">
+              <a:lnSpc>
+                <a:spcPts val="2000"/>
+              </a:lnSpc>
+              <a:buNone/>
+            </a:pPr>
+            <a:r>
+              <a:rPr lang="en-US" sz="1500" b="1" dirty="0">
+                <a:solidFill>
+                  <a:srgbClr val="1B2430"/>
+                </a:solidFill>
+                <a:latin typeface="Cambria" pitchFamily="34" charset="0"/>
+                <a:ea typeface="Cambria" pitchFamily="34" charset="-122"/>
+                <a:cs typeface="Cambria" pitchFamily="34" charset="-120"/>
+              </a:rPr>
+              <a:t>Set guardrails early</a:t>
+            </a:r>
+            <a:endParaRPr lang="en-US" sz="1500" dirty="0"/>
+          </a:p>
+        </p:txBody>
+      </p:sp>
+      <p:sp>
+        <p:nvSpPr>
+          <p:cNvPr id="19" name="Text 17"/>
+          <p:cNvSpPr/>
+          <p:nvPr/>
+        </p:nvSpPr>
+        <p:spPr>
+          <a:xfrm>
+            <a:off x="9290304" y="3346704"/>
+            <a:ext cx="2139696" cy="749808"/>
+          </a:xfrm>
+          <a:prstGeom prst="rect">
+            <a:avLst/>
+          </a:prstGeom>
+          <a:noFill/>
+          <a:ln/>
+        </p:spPr>
+        <p:txBody>
+          <a:bodyPr wrap="square" lIns="0" tIns="0" rIns="0" bIns="0" rtlCol="0" anchor="t"/>
+          <a:lstStyle/>
+          <a:p>
+            <a:pPr indent="0" marL="0">
+              <a:lnSpc>
+                <a:spcPts val="1500"/>
+              </a:lnSpc>
+              <a:buNone/>
+            </a:pPr>
+            <a:r>
+              <a:rPr lang="en-US" sz="1200" dirty="0">
+                <a:solidFill>
+                  <a:srgbClr val="5C6675"/>
+                </a:solidFill>
+                <a:latin typeface="Calibri" pitchFamily="34" charset="0"/>
+                <a:ea typeface="Calibri" pitchFamily="34" charset="-122"/>
+                <a:cs typeface="Calibri" pitchFamily="34" charset="-120"/>
+              </a:rPr>
+              <a:t>Owners, budget thresholds and quotas cost little to add — and stop the expensive surprises.</a:t>
+            </a:r>
+            <a:endParaRPr lang="en-US" sz="1200" dirty="0"/>
+          </a:p>
+        </p:txBody>
+      </p:sp>
+      <p:sp>
+        <p:nvSpPr>
+          <p:cNvPr id="20" name="Shape 18"/>
+          <p:cNvSpPr/>
+          <p:nvPr/>
+        </p:nvSpPr>
+        <p:spPr>
+          <a:xfrm>
+            <a:off x="548640" y="4434840"/>
+            <a:ext cx="11091672" cy="1874520"/>
+          </a:xfrm>
+          <a:prstGeom prst="roundRect">
+            <a:avLst>
+              <a:gd name="adj" fmla="val 4390"/>
+            </a:avLst>
+          </a:prstGeom>
+          <a:solidFill>
+            <a:srgbClr val="F1F3F6"/>
+          </a:solidFill>
+          <a:ln/>
+        </p:spPr>
+      </p:sp>
+      <p:sp>
+        <p:nvSpPr>
+          <p:cNvPr id="21" name="Text 19"/>
+          <p:cNvSpPr/>
+          <p:nvPr/>
+        </p:nvSpPr>
+        <p:spPr>
+          <a:xfrm>
+            <a:off x="877824" y="4572000"/>
+            <a:ext cx="6035040" cy="292608"/>
+          </a:xfrm>
+          <a:prstGeom prst="rect">
+            <a:avLst/>
+          </a:prstGeom>
+          <a:noFill/>
+          <a:ln/>
+        </p:spPr>
+        <p:txBody>
+          <a:bodyPr wrap="square" lIns="0" tIns="0" rIns="0" bIns="0" rtlCol="0" anchor="ctr"/>
+          <a:lstStyle/>
+          <a:p>
+            <a:pPr indent="0" marL="0">
+              <a:buNone/>
+            </a:pPr>
+            <a:r>
+              <a:rPr lang="en-US" sz="1200" b="1" spc="180" kern="0" dirty="0">
+                <a:solidFill>
+                  <a:srgbClr val="5C6675"/>
+                </a:solidFill>
+                <a:latin typeface="Calibri" pitchFamily="34" charset="0"/>
+                <a:ea typeface="Calibri" pitchFamily="34" charset="-122"/>
+                <a:cs typeface="Calibri" pitchFamily="34" charset="-120"/>
+              </a:rPr>
+              <a:t>Tooling — match the footprint, not the ambition</a:t>
+            </a:r>
+            <a:endParaRPr lang="en-US" sz="1200" dirty="0"/>
+          </a:p>
+        </p:txBody>
+      </p:sp>
+      <p:sp>
+        <p:nvSpPr>
+          <p:cNvPr id="22" name="Text 20"/>
+          <p:cNvSpPr/>
+          <p:nvPr/>
+        </p:nvSpPr>
+        <p:spPr>
+          <a:xfrm>
+            <a:off x="877824" y="4937760"/>
+            <a:ext cx="1737360" cy="384048"/>
+          </a:xfrm>
+          <a:prstGeom prst="rect">
+            <a:avLst/>
+          </a:prstGeom>
+          <a:noFill/>
+          <a:ln/>
+        </p:spPr>
+        <p:txBody>
+          <a:bodyPr wrap="square" lIns="0" tIns="0" rIns="0" bIns="0" rtlCol="0" anchor="ctr"/>
+          <a:lstStyle/>
+          <a:p>
+            <a:pPr indent="0" marL="0">
+              <a:buNone/>
+            </a:pPr>
+            <a:r>
+              <a:rPr lang="en-US" sz="1350" b="1" dirty="0">
+                <a:solidFill>
+                  <a:srgbClr val="2E8B7A"/>
+                </a:solidFill>
+                <a:latin typeface="Calibri" pitchFamily="34" charset="0"/>
+                <a:ea typeface="Calibri" pitchFamily="34" charset="-122"/>
+                <a:cs typeface="Calibri" pitchFamily="34" charset="-120"/>
+              </a:rPr>
+              <a:t>Native</a:t>
+            </a:r>
+            <a:endParaRPr lang="en-US" sz="1350" dirty="0"/>
+          </a:p>
+        </p:txBody>
+      </p:sp>
+      <p:sp>
+        <p:nvSpPr>
+          <p:cNvPr id="23" name="Text 21"/>
+          <p:cNvSpPr/>
+          <p:nvPr/>
+        </p:nvSpPr>
+        <p:spPr>
+          <a:xfrm>
+            <a:off x="2651760" y="4937760"/>
+            <a:ext cx="8595360" cy="384048"/>
+          </a:xfrm>
+          <a:prstGeom prst="rect">
+            <a:avLst/>
+          </a:prstGeom>
+          <a:noFill/>
+          <a:ln/>
+        </p:spPr>
+        <p:txBody>
+          <a:bodyPr wrap="square" lIns="0" tIns="0" rIns="0" bIns="0" rtlCol="0" anchor="ctr"/>
+          <a:lstStyle/>
+          <a:p>
+            <a:pPr indent="0" marL="0">
+              <a:buNone/>
+            </a:pPr>
+            <a:r>
+              <a:rPr lang="en-US" sz="1350" dirty="0">
+                <a:solidFill>
+                  <a:srgbClr val="5C6675"/>
+                </a:solidFill>
+                <a:latin typeface="Calibri" pitchFamily="34" charset="0"/>
+                <a:ea typeface="Calibri" pitchFamily="34" charset="-122"/>
+                <a:cs typeface="Calibri" pitchFamily="34" charset="-120"/>
+              </a:rPr>
+              <a:t>AWS Cost Explorer  ·  Azure Cost Management  ·  GCP Billing</a:t>
+            </a:r>
+            <a:endParaRPr lang="en-US" sz="1350" dirty="0"/>
+          </a:p>
+        </p:txBody>
+      </p:sp>
+      <p:sp>
+        <p:nvSpPr>
+          <p:cNvPr id="24" name="Text 22"/>
+          <p:cNvSpPr/>
+          <p:nvPr/>
+        </p:nvSpPr>
+        <p:spPr>
+          <a:xfrm>
+            <a:off x="877824" y="5349240"/>
+            <a:ext cx="1737360" cy="384048"/>
+          </a:xfrm>
+          <a:prstGeom prst="rect">
+            <a:avLst/>
+          </a:prstGeom>
+          <a:noFill/>
+          <a:ln/>
+        </p:spPr>
+        <p:txBody>
+          <a:bodyPr wrap="square" lIns="0" tIns="0" rIns="0" bIns="0" rtlCol="0" anchor="ctr"/>
+          <a:lstStyle/>
+          <a:p>
+            <a:pPr indent="0" marL="0">
+              <a:buNone/>
+            </a:pPr>
+            <a:r>
+              <a:rPr lang="en-US" sz="1350" b="1" dirty="0">
+                <a:solidFill>
+                  <a:srgbClr val="B87B18"/>
+                </a:solidFill>
+                <a:latin typeface="Calibri" pitchFamily="34" charset="0"/>
+                <a:ea typeface="Calibri" pitchFamily="34" charset="-122"/>
+                <a:cs typeface="Calibri" pitchFamily="34" charset="-120"/>
+              </a:rPr>
+              <a:t>Third-party</a:t>
+            </a:r>
+            <a:endParaRPr lang="en-US" sz="1350" dirty="0"/>
+          </a:p>
+        </p:txBody>
+      </p:sp>
+      <p:sp>
+        <p:nvSpPr>
+          <p:cNvPr id="25" name="Text 23"/>
+          <p:cNvSpPr/>
+          <p:nvPr/>
+        </p:nvSpPr>
+        <p:spPr>
+          <a:xfrm>
+            <a:off x="2651760" y="5349240"/>
+            <a:ext cx="8595360" cy="384048"/>
+          </a:xfrm>
+          <a:prstGeom prst="rect">
+            <a:avLst/>
+          </a:prstGeom>
+          <a:noFill/>
+          <a:ln/>
+        </p:spPr>
+        <p:txBody>
+          <a:bodyPr wrap="square" lIns="0" tIns="0" rIns="0" bIns="0" rtlCol="0" anchor="ctr"/>
+          <a:lstStyle/>
+          <a:p>
+            <a:pPr indent="0" marL="0">
+              <a:buNone/>
+            </a:pPr>
+            <a:r>
+              <a:rPr lang="en-US" sz="1350" dirty="0">
+                <a:solidFill>
+                  <a:srgbClr val="5C6675"/>
+                </a:solidFill>
+                <a:latin typeface="Calibri" pitchFamily="34" charset="0"/>
+                <a:ea typeface="Calibri" pitchFamily="34" charset="-122"/>
+                <a:cs typeface="Calibri" pitchFamily="34" charset="-120"/>
+              </a:rPr>
+              <a:t>CloudHealth  ·  Apptio  ·  Vantage  ·  nOps  ·  Finout  ·  CoreStack</a:t>
+            </a:r>
+            <a:endParaRPr lang="en-US" sz="1350" dirty="0"/>
+          </a:p>
+        </p:txBody>
+      </p:sp>
+      <p:sp>
+        <p:nvSpPr>
+          <p:cNvPr id="26" name="Text 24"/>
+          <p:cNvSpPr/>
+          <p:nvPr/>
+        </p:nvSpPr>
+        <p:spPr>
+          <a:xfrm>
+            <a:off x="877824" y="5760720"/>
+            <a:ext cx="1737360" cy="384048"/>
+          </a:xfrm>
+          <a:prstGeom prst="rect">
+            <a:avLst/>
+          </a:prstGeom>
+          <a:noFill/>
+          <a:ln/>
+        </p:spPr>
+        <p:txBody>
+          <a:bodyPr wrap="square" lIns="0" tIns="0" rIns="0" bIns="0" rtlCol="0" anchor="ctr"/>
+          <a:lstStyle/>
+          <a:p>
+            <a:pPr indent="0" marL="0">
+              <a:buNone/>
+            </a:pPr>
+            <a:r>
+              <a:rPr lang="en-US" sz="1350" b="1" dirty="0">
+                <a:solidFill>
+                  <a:srgbClr val="1B2430"/>
+                </a:solidFill>
+                <a:latin typeface="Calibri" pitchFamily="34" charset="0"/>
+                <a:ea typeface="Calibri" pitchFamily="34" charset="-122"/>
+                <a:cs typeface="Calibri" pitchFamily="34" charset="-120"/>
+              </a:rPr>
+              <a:t>Standard</a:t>
+            </a:r>
+            <a:endParaRPr lang="en-US" sz="1350" dirty="0"/>
+          </a:p>
+        </p:txBody>
+      </p:sp>
+      <p:sp>
+        <p:nvSpPr>
+          <p:cNvPr id="27" name="Text 25"/>
+          <p:cNvSpPr/>
+          <p:nvPr/>
+        </p:nvSpPr>
+        <p:spPr>
+          <a:xfrm>
+            <a:off x="2651760" y="5760720"/>
+            <a:ext cx="8595360" cy="384048"/>
+          </a:xfrm>
+          <a:prstGeom prst="rect">
+            <a:avLst/>
+          </a:prstGeom>
+          <a:noFill/>
+          <a:ln/>
+        </p:spPr>
+        <p:txBody>
+          <a:bodyPr wrap="square" lIns="0" tIns="0" rIns="0" bIns="0" rtlCol="0" anchor="ctr"/>
+          <a:lstStyle/>
+          <a:p>
+            <a:pPr indent="0" marL="0">
+              <a:buNone/>
+            </a:pPr>
+            <a:r>
+              <a:rPr lang="en-US" sz="1350" dirty="0">
+                <a:solidFill>
+                  <a:srgbClr val="5C6675"/>
+                </a:solidFill>
+                <a:latin typeface="Calibri" pitchFamily="34" charset="0"/>
+                <a:ea typeface="Calibri" pitchFamily="34" charset="-122"/>
+                <a:cs typeface="Calibri" pitchFamily="34" charset="-120"/>
+              </a:rPr>
+              <a:t>FOCUS-compliant platforms for multi-cloud reporting</a:t>
+            </a:r>
+            <a:endParaRPr lang="en-US" sz="1350" dirty="0"/>
+          </a:p>
+        </p:txBody>
+      </p:sp>
+    </p:spTree>
+  </p:cSld>
+  <p:clrMapOvr>
+    <a:masterClrMapping/>
+  </p:clrMapOvr>
+</p:sld>
+</file>
+
+<file path=ppt/slides/slide21.xml><?xml version="1.0" encoding="utf-8"?>
+<p:sld xmlns:a="http://schemas.openxmlformats.org/drawingml/2006/main" xmlns:r="http://schemas.openxmlformats.org/officeDocument/2006/relationships" xmlns:p="http://schemas.openxmlformats.org/presentationml/2006/main">
+  <p:cSld name="Slide 21">
+    <p:bg>
+      <p:bgPr>
+        <a:solidFill>
           <a:srgbClr val="141A22"/>
         </a:solidFill>
       </p:bgPr>
@@ -14583,9 +15926,9 @@
 </p:sld>
 </file>
 
-<file path=ppt/slides/slide21.xml><?xml version="1.0" encoding="utf-8"?>
+<file path=ppt/slides/slide22.xml><?xml version="1.0" encoding="utf-8"?>
 <p:sld xmlns:a="http://schemas.openxmlformats.org/drawingml/2006/main" xmlns:r="http://schemas.openxmlformats.org/officeDocument/2006/relationships" xmlns:p="http://schemas.openxmlformats.org/presentationml/2006/main">
-  <p:cSld name="Slide 21">
+  <p:cSld name="Slide 22">
     <p:bg>
       <p:bgPr>
         <a:solidFill>

--- a/presentations/finops-gaining-visibility.pptx
+++ b/presentations/finops-gaining-visibility.pptx
@@ -27,9 +27,10 @@
     <p:sldId id="275" r:id="rId21"/>
     <p:sldId id="276" r:id="rId22"/>
     <p:sldId id="277" r:id="rId23"/>
+    <p:sldId id="278" r:id="rId24"/>
   </p:sldIdLst>
   <p:notesMasterIdLst>
-    <p:notesMasterId r:id="rId24"/>
+    <p:notesMasterId r:id="rId25"/>
   </p:notesMasterIdLst>
   <p:sldSz cx="12192000" cy="6858000"/>
   <p:notesSz cx="6858000" cy="12192000"/>
@@ -1403,7 +1404,7 @@
           <a:p>
             <a:r>
               <a:rPr lang="en-US" dirty="0"/>
-              <a:t>The payoff slide for both halves of the deck, and the one to use if someone asks what all this buys. Walk the timeline left to right: the same overrun, found at four different moments, and only the first three leave anyone a decision to make. The fourth point is the status quo — it is not that the invoice is wrong, it is that by the time it arrives the only available action is explaining it. Land the closing line deliberately: we are not promising a smaller bill, and anyone who promises that before seeing the data is guessing. We are promising a bill with nothing surprising in it, which is a different and more defensible commitment.</a:t>
+              <a:t>The slide that answers 'so what do you actually want engineering to do differently', and the chart is the argument: the same decision costs a conversation at design, an edit at pull request, a migration once deployed and a negotiation once it is on a contract. Nothing about the decision changed — only the cost of revisiting it. The three insertion points are deliberately small. None of them asks an engineer to learn cloud pricing; they put the number in front of the person at the moment they are already making the choice. The pull-request cost diff is the one to push for first, because it lands inside a ritual teams already have. Say the last line out loud, because it is the difference between this working and this being resented: the practices that succeed describe FinOps as partnering with engineers rather than policing them. A cost review that only ever says no gets routed around within a quarter.</a:t>
             </a:r>
             <a:endParaRPr lang="en-US" dirty="0"/>
           </a:p>
@@ -1579,7 +1580,7 @@
           <a:p>
             <a:r>
               <a:rPr lang="en-US" dirty="0"/>
-              <a:t>This is the ask. Step 1 is highlighted because it is the only one that cannot be parallelized — everything downstream degrades if the taxonomy is still in flux. Steps 2 and 4 are both arguments against over-engineering: pick the top spend categories and the tooling that matches the estate we actually have, not the one we might have in three years.</a:t>
+              <a:t>The payoff slide for both halves of the deck, and the one to use if someone asks what all this buys. Walk the timeline left to right: the same overrun, found at four different moments, and only the first three leave anyone a decision to make. The fourth point is the status quo — it is not that the invoice is wrong, it is that by the time it arrives the only available action is explaining it. Land the closing line deliberately: we are not promising a smaller bill, and anyone who promises that before seeing the data is guessing. We are promising a bill with nothing surprising in it, which is a different and more defensible commitment.</a:t>
             </a:r>
             <a:endParaRPr lang="en-US" dirty="0"/>
           </a:p>
@@ -1667,7 +1668,7 @@
           <a:p>
             <a:r>
               <a:rPr lang="en-US" dirty="0"/>
-              <a:t>Close on the causal chain rather than a summary of slides. Each link is a separate management commitment: allocation data, published ownership, cost surfaced in the engineering workflow, and a review cadence that keeps it alive. Ask for the first two today; the rest follow from them.</a:t>
+              <a:t>This is the ask. Step 1 is highlighted because it is the only one that cannot be parallelized — everything downstream degrades if the taxonomy is still in flux. Steps 2 and 4 are both arguments against over-engineering: pick the top spend categories and the tooling that matches the estate we actually have, not the one we might have in three years.</a:t>
             </a:r>
             <a:endParaRPr lang="en-US" dirty="0"/>
           </a:p>
@@ -1755,7 +1756,7 @@
           <a:p>
             <a:r>
               <a:rPr lang="en-US" dirty="0"/>
-              <a:t>Anticipate three questions. What will this cost — mostly effort, not licences, if we stay on native tooling. How long until we see savings — allocation coverage improves in weeks, targeted savings follow the first full month of clean data. Who owns it — name the tagging owner and the review cadence before leaving the room, or nothing on the previous slides happens.</a:t>
+              <a:t>Close on the causal chain rather than a summary of slides. Each link is a separate management commitment: allocation data, published ownership, cost surfaced in the engineering workflow, and a review cadence that keeps it alive. Ask for the first two today; the rest follow from them.</a:t>
             </a:r>
             <a:endParaRPr lang="en-US" dirty="0"/>
           </a:p>
@@ -1779,6 +1780,94 @@
             <a:fld id="{F7021451-1387-4CA6-816F-3879F97B5CBC}" type="slidenum">
               <a:rPr lang="en-US"/>
               <a:t>22</a:t>
+            </a:fld>
+            <a:endParaRPr lang="en-US"/>
+          </a:p>
+        </p:txBody>
+      </p:sp>
+    </p:spTree>
+    <p:extLst>
+      <p:ext uri="{BB962C8B-B14F-4D97-AF65-F5344CB8AC3E}">
+        <p14:creationId xmlns:p14="http://schemas.microsoft.com/office/powerpoint/2010/main" val="1024086991"/>
+      </p:ext>
+    </p:extLst>
+  </p:cSld>
+  <p:clrMapOvr>
+    <a:masterClrMapping/>
+  </p:clrMapOvr>
+</p:notes>
+</file>
+
+<file path=ppt/notesSlides/notesSlide23.xml><?xml version="1.0" encoding="utf-8"?>
+<p:notes xmlns:a="http://schemas.openxmlformats.org/drawingml/2006/main" xmlns:r="http://schemas.openxmlformats.org/officeDocument/2006/relationships" xmlns:p="http://schemas.openxmlformats.org/presentationml/2006/main">
+  <p:cSld>
+    <p:spTree>
+      <p:nvGrpSpPr>
+        <p:cNvPr id="1" name=""/>
+        <p:cNvGrpSpPr/>
+        <p:nvPr/>
+      </p:nvGrpSpPr>
+      <p:grpSpPr>
+        <a:xfrm>
+          <a:off x="0" y="0"/>
+          <a:ext cx="0" cy="0"/>
+          <a:chOff x="0" y="0"/>
+          <a:chExt cx="0" cy="0"/>
+        </a:xfrm>
+      </p:grpSpPr>
+      <p:sp>
+        <p:nvSpPr>
+          <p:cNvPr id="2" name="Slide Image Placeholder 1"/>
+          <p:cNvSpPr>
+            <a:spLocks noGrp="1" noRot="1" noChangeAspect="1"/>
+          </p:cNvSpPr>
+          <p:nvPr>
+            <p:ph type="sldImg"/>
+          </p:nvPr>
+        </p:nvSpPr>
+        <p:spPr/>
+      </p:sp>
+      <p:sp>
+        <p:nvSpPr>
+          <p:cNvPr id="3" name="Notes Placeholder 2"/>
+          <p:cNvSpPr>
+            <a:spLocks noGrp="1"/>
+          </p:cNvSpPr>
+          <p:nvPr>
+            <p:ph type="body" idx="1"/>
+          </p:nvPr>
+        </p:nvSpPr>
+        <p:spPr/>
+        <p:txBody>
+          <a:bodyPr/>
+          <a:lstStyle/>
+          <a:p>
+            <a:r>
+              <a:rPr lang="en-US" dirty="0"/>
+              <a:t>Anticipate three questions. What will this cost — mostly effort, not licences, if we stay on native tooling. How long until we see savings — allocation coverage improves in weeks, targeted savings follow the first full month of clean data. Who owns it — name the tagging owner and the review cadence before leaving the room, or nothing on the previous slides happens.</a:t>
+            </a:r>
+            <a:endParaRPr lang="en-US" dirty="0"/>
+          </a:p>
+        </p:txBody>
+      </p:sp>
+      <p:sp>
+        <p:nvSpPr>
+          <p:cNvPr id="4" name="Slide Number Placeholder 3"/>
+          <p:cNvSpPr>
+            <a:spLocks noGrp="1"/>
+          </p:cNvSpPr>
+          <p:nvPr>
+            <p:ph type="sldNum" sz="quarter" idx="10"/>
+          </p:nvPr>
+        </p:nvSpPr>
+        <p:spPr/>
+        <p:txBody>
+          <a:bodyPr/>
+          <a:lstStyle/>
+          <a:p>
+            <a:fld id="{F7021451-1387-4CA6-816F-3879F97B5CBC}" type="slidenum">
+              <a:rPr lang="en-US"/>
+              <a:t>23</a:t>
             </a:fld>
             <a:endParaRPr lang="en-US"/>
           </a:p>
@@ -12246,7 +12335,7 @@
                 <a:ea typeface="Calibri" pitchFamily="34" charset="-122"/>
                 <a:cs typeface="Calibri" pitchFamily="34" charset="-120"/>
               </a:rPr>
-              <a:t>GOVERNANCE — PUTTING IT TOGETHER</a:t>
+              <a:t>GOVERNANCE — SHIFT LEFT</a:t>
             </a:r>
             <a:endParaRPr lang="en-US" sz="1100" dirty="0"/>
           </a:p>
@@ -12285,7 +12374,7 @@
                 <a:ea typeface="Cambria" pitchFamily="34" charset="-122"/>
                 <a:cs typeface="Cambria" pitchFamily="34" charset="-120"/>
               </a:rPr>
-              <a:t>Nobody should learn it from the invoice</a:t>
+              <a:t>Catch it at design, not on the invoice</a:t>
             </a:r>
             <a:endParaRPr lang="en-US" sz="3100" dirty="0"/>
           </a:p>
@@ -12324,7 +12413,7 @@
                 <a:ea typeface="Calibri" pitchFamily="34" charset="-122"/>
                 <a:cs typeface="Calibri" pitchFamily="34" charset="-120"/>
               </a:rPr>
-              <a:t>The same overrun, found at four different moments. Only the first three leave you anything to do about it.</a:t>
+              <a:t>Cost is a design constraint, reviewed alongside security and reliability — not a report that arrives afterwards.</a:t>
             </a:r>
             <a:endParaRPr lang="en-US" sz="1500" dirty="0"/>
           </a:p>
@@ -12332,36 +12421,75 @@
       </p:sp>
       <p:sp>
         <p:nvSpPr>
-          <p:cNvPr id="5" name="Shape 3"/>
-          <p:cNvSpPr/>
-          <p:nvPr/>
-        </p:nvSpPr>
-        <p:spPr>
-          <a:xfrm>
-            <a:off x="1737360" y="3127248"/>
-            <a:ext cx="8714232" cy="45720"/>
+          <p:cNvPr id="5" name="Text 3"/>
+          <p:cNvSpPr/>
+          <p:nvPr/>
+        </p:nvSpPr>
+        <p:spPr>
+          <a:xfrm>
+            <a:off x="548640" y="2194560"/>
+            <a:ext cx="4114800" cy="274320"/>
+          </a:xfrm>
+          <a:prstGeom prst="rect">
+            <a:avLst/>
+          </a:prstGeom>
+          <a:noFill/>
+          <a:ln/>
+        </p:spPr>
+        <p:txBody>
+          <a:bodyPr wrap="square" lIns="0" tIns="0" rIns="0" bIns="0" rtlCol="0" anchor="ctr"/>
+          <a:lstStyle/>
+          <a:p>
+            <a:pPr indent="0" marL="0">
+              <a:buNone/>
+            </a:pPr>
+            <a:r>
+              <a:rPr lang="en-US" sz="1200" b="1" spc="180" kern="0" dirty="0">
+                <a:solidFill>
+                  <a:srgbClr val="5C6675"/>
+                </a:solidFill>
+                <a:latin typeface="Calibri" pitchFamily="34" charset="0"/>
+                <a:ea typeface="Calibri" pitchFamily="34" charset="-122"/>
+                <a:cs typeface="Calibri" pitchFamily="34" charset="-120"/>
+              </a:rPr>
+              <a:t>Effort to change the decision</a:t>
+            </a:r>
+            <a:endParaRPr lang="en-US" sz="1200" dirty="0"/>
+          </a:p>
+        </p:txBody>
+      </p:sp>
+      <p:sp>
+        <p:nvSpPr>
+          <p:cNvPr id="6" name="Shape 4"/>
+          <p:cNvSpPr/>
+          <p:nvPr/>
+        </p:nvSpPr>
+        <p:spPr>
+          <a:xfrm>
+            <a:off x="685800" y="4572000"/>
+            <a:ext cx="1188720" cy="457200"/>
           </a:xfrm>
           <a:prstGeom prst="roundRect">
             <a:avLst>
-              <a:gd name="adj" fmla="val 40000"/>
+              <a:gd name="adj" fmla="val 12000"/>
             </a:avLst>
           </a:prstGeom>
           <a:solidFill>
-            <a:srgbClr val="DFE4EA"/>
-          </a:solidFill>
-          <a:ln/>
-        </p:spPr>
-      </p:sp>
-      <p:sp>
-        <p:nvSpPr>
-          <p:cNvPr id="6" name="Text 4"/>
-          <p:cNvSpPr/>
-          <p:nvPr/>
-        </p:nvSpPr>
-        <p:spPr>
-          <a:xfrm>
-            <a:off x="548640" y="2212848"/>
-            <a:ext cx="2377440" cy="310896"/>
+            <a:srgbClr val="2E8B7A"/>
+          </a:solidFill>
+          <a:ln/>
+        </p:spPr>
+      </p:sp>
+      <p:sp>
+        <p:nvSpPr>
+          <p:cNvPr id="7" name="Text 5"/>
+          <p:cNvSpPr/>
+          <p:nvPr/>
+        </p:nvSpPr>
+        <p:spPr>
+          <a:xfrm>
+            <a:off x="548640" y="5102352"/>
+            <a:ext cx="1463040" cy="274320"/>
           </a:xfrm>
           <a:prstGeom prst="rect">
             <a:avLst/>
@@ -12377,7 +12505,7 @@
               <a:buNone/>
             </a:pPr>
             <a:r>
-              <a:rPr lang="en-US" sz="1400" b="1" dirty="0">
+              <a:rPr lang="en-US" sz="1250" b="1" dirty="0">
                 <a:solidFill>
                   <a:srgbClr val="1B2430"/>
                 </a:solidFill>
@@ -12385,22 +12513,22 @@
                 <a:ea typeface="Calibri" pitchFamily="34" charset="-122"/>
                 <a:cs typeface="Calibri" pitchFamily="34" charset="-120"/>
               </a:rPr>
-              <a:t>Usage burn alert</a:t>
-            </a:r>
-            <a:endParaRPr lang="en-US" sz="1400" dirty="0"/>
-          </a:p>
-        </p:txBody>
-      </p:sp>
-      <p:sp>
-        <p:nvSpPr>
-          <p:cNvPr id="7" name="Text 5"/>
-          <p:cNvSpPr/>
-          <p:nvPr/>
-        </p:nvSpPr>
-        <p:spPr>
-          <a:xfrm>
-            <a:off x="548640" y="2542032"/>
-            <a:ext cx="2377440" cy="292608"/>
+              <a:t>Design</a:t>
+            </a:r>
+            <a:endParaRPr lang="en-US" sz="1250" dirty="0"/>
+          </a:p>
+        </p:txBody>
+      </p:sp>
+      <p:sp>
+        <p:nvSpPr>
+          <p:cNvPr id="8" name="Text 6"/>
+          <p:cNvSpPr/>
+          <p:nvPr/>
+        </p:nvSpPr>
+        <p:spPr>
+          <a:xfrm>
+            <a:off x="548640" y="5376672"/>
+            <a:ext cx="1463040" cy="256032"/>
           </a:xfrm>
           <a:prstGeom prst="rect">
             <a:avLst/>
@@ -12416,74 +12544,7 @@
               <a:buNone/>
             </a:pPr>
             <a:r>
-              <a:rPr lang="en-US" sz="1250" b="1" spc="60" kern="0" dirty="0">
-                <a:solidFill>
-                  <a:srgbClr val="B87B18"/>
-                </a:solidFill>
-                <a:latin typeface="Calibri" pitchFamily="34" charset="0"/>
-                <a:ea typeface="Calibri" pitchFamily="34" charset="-122"/>
-                <a:cs typeface="Calibri" pitchFamily="34" charset="-120"/>
-              </a:rPr>
-              <a:t>~10 minutes</a:t>
-            </a:r>
-            <a:endParaRPr lang="en-US" sz="1250" dirty="0"/>
-          </a:p>
-        </p:txBody>
-      </p:sp>
-      <p:sp>
-        <p:nvSpPr>
-          <p:cNvPr id="8" name="Shape 6"/>
-          <p:cNvSpPr/>
-          <p:nvPr/>
-        </p:nvSpPr>
-        <p:spPr>
-          <a:xfrm>
-            <a:off x="1618488" y="3031236"/>
-            <a:ext cx="237744" cy="237744"/>
-          </a:xfrm>
-          <a:prstGeom prst="ellipse">
-            <a:avLst/>
-          </a:prstGeom>
-          <a:solidFill>
-            <a:srgbClr val="E39B2C"/>
-          </a:solidFill>
-          <a:ln w="25400">
-            <a:solidFill>
-              <a:srgbClr val="FFFFFF"/>
-            </a:solidFill>
-            <a:prstDash val="solid"/>
-          </a:ln>
-        </p:spPr>
-      </p:sp>
-      <p:sp>
-        <p:nvSpPr>
-          <p:cNvPr id="9" name="Text 7"/>
-          <p:cNvSpPr/>
-          <p:nvPr/>
-        </p:nvSpPr>
-        <p:spPr>
-          <a:xfrm>
-            <a:off x="548640" y="3401568"/>
-            <a:ext cx="2377440" cy="566928"/>
-          </a:xfrm>
-          <a:prstGeom prst="rect">
-            <a:avLst/>
-          </a:prstGeom>
-          <a:noFill/>
-          <a:ln/>
-        </p:spPr>
-        <p:txBody>
-          <a:bodyPr wrap="square" lIns="0" tIns="0" rIns="0" bIns="0" rtlCol="0" anchor="t"/>
-          <a:lstStyle/>
-          <a:p>
-            <a:pPr algn="ctr" indent="0" marL="0">
-              <a:lnSpc>
-                <a:spcPts val="1600"/>
-              </a:lnSpc>
-              <a:buNone/>
-            </a:pPr>
-            <a:r>
-              <a:rPr lang="en-US" sz="1200" dirty="0">
+              <a:rPr lang="en-US" sz="1150" dirty="0">
                 <a:solidFill>
                   <a:srgbClr val="5C6675"/>
                 </a:solidFill>
@@ -12491,479 +12552,373 @@
                 <a:ea typeface="Calibri" pitchFamily="34" charset="-122"/>
                 <a:cs typeface="Calibri" pitchFamily="34" charset="-120"/>
               </a:rPr>
-              <a:t>Throttle it, or confirm it was intended.</a:t>
-            </a:r>
-            <a:endParaRPr lang="en-US" sz="1200" dirty="0"/>
-          </a:p>
-        </p:txBody>
-      </p:sp>
-      <p:sp>
-        <p:nvSpPr>
-          <p:cNvPr id="10" name="Text 8"/>
-          <p:cNvSpPr/>
-          <p:nvPr/>
-        </p:nvSpPr>
-        <p:spPr>
-          <a:xfrm>
-            <a:off x="3566160" y="2212848"/>
-            <a:ext cx="2377440" cy="310896"/>
-          </a:xfrm>
-          <a:prstGeom prst="rect">
-            <a:avLst/>
-          </a:prstGeom>
-          <a:noFill/>
-          <a:ln/>
-        </p:spPr>
-        <p:txBody>
-          <a:bodyPr wrap="square" lIns="0" tIns="0" rIns="0" bIns="0" rtlCol="0" anchor="ctr"/>
-          <a:lstStyle/>
-          <a:p>
-            <a:pPr algn="ctr" indent="0" marL="0">
-              <a:buNone/>
-            </a:pPr>
-            <a:r>
-              <a:rPr lang="en-US" sz="1400" b="1" dirty="0">
-                <a:solidFill>
-                  <a:srgbClr val="1B2430"/>
-                </a:solidFill>
-                <a:latin typeface="Calibri" pitchFamily="34" charset="0"/>
-                <a:ea typeface="Calibri" pitchFamily="34" charset="-122"/>
-                <a:cs typeface="Calibri" pitchFamily="34" charset="-120"/>
-              </a:rPr>
-              <a:t>Daily spend threshold</a:t>
-            </a:r>
-            <a:endParaRPr lang="en-US" sz="1400" dirty="0"/>
-          </a:p>
-        </p:txBody>
-      </p:sp>
-      <p:sp>
-        <p:nvSpPr>
-          <p:cNvPr id="11" name="Text 9"/>
-          <p:cNvSpPr/>
-          <p:nvPr/>
-        </p:nvSpPr>
-        <p:spPr>
-          <a:xfrm>
-            <a:off x="3566160" y="2542032"/>
-            <a:ext cx="2377440" cy="292608"/>
-          </a:xfrm>
-          <a:prstGeom prst="rect">
-            <a:avLst/>
-          </a:prstGeom>
-          <a:noFill/>
-          <a:ln/>
-        </p:spPr>
-        <p:txBody>
-          <a:bodyPr wrap="square" lIns="0" tIns="0" rIns="0" bIns="0" rtlCol="0" anchor="ctr"/>
-          <a:lstStyle/>
-          <a:p>
-            <a:pPr algn="ctr" indent="0" marL="0">
-              <a:buNone/>
-            </a:pPr>
-            <a:r>
-              <a:rPr lang="en-US" sz="1250" b="1" spc="60" kern="0" dirty="0">
-                <a:solidFill>
-                  <a:srgbClr val="1F6B5C"/>
-                </a:solidFill>
-                <a:latin typeface="Calibri" pitchFamily="34" charset="0"/>
-                <a:ea typeface="Calibri" pitchFamily="34" charset="-122"/>
-                <a:cs typeface="Calibri" pitchFamily="34" charset="-120"/>
-              </a:rPr>
-              <a:t>next morning</a:t>
-            </a:r>
-            <a:endParaRPr lang="en-US" sz="1250" dirty="0"/>
-          </a:p>
-        </p:txBody>
-      </p:sp>
-      <p:sp>
-        <p:nvSpPr>
-          <p:cNvPr id="12" name="Shape 10"/>
-          <p:cNvSpPr/>
-          <p:nvPr/>
-        </p:nvSpPr>
-        <p:spPr>
-          <a:xfrm>
-            <a:off x="4636008" y="3031236"/>
-            <a:ext cx="237744" cy="237744"/>
-          </a:xfrm>
-          <a:prstGeom prst="ellipse">
-            <a:avLst/>
-          </a:prstGeom>
-          <a:solidFill>
-            <a:srgbClr val="2E8B7A"/>
-          </a:solidFill>
-          <a:ln w="25400">
-            <a:solidFill>
-              <a:srgbClr val="FFFFFF"/>
-            </a:solidFill>
-            <a:prstDash val="solid"/>
-          </a:ln>
-        </p:spPr>
-      </p:sp>
-      <p:sp>
-        <p:nvSpPr>
-          <p:cNvPr id="13" name="Text 11"/>
-          <p:cNvSpPr/>
-          <p:nvPr/>
-        </p:nvSpPr>
-        <p:spPr>
-          <a:xfrm>
-            <a:off x="3566160" y="3401568"/>
-            <a:ext cx="2377440" cy="566928"/>
-          </a:xfrm>
-          <a:prstGeom prst="rect">
-            <a:avLst/>
-          </a:prstGeom>
-          <a:noFill/>
-          <a:ln/>
-        </p:spPr>
-        <p:txBody>
-          <a:bodyPr wrap="square" lIns="0" tIns="0" rIns="0" bIns="0" rtlCol="0" anchor="t"/>
-          <a:lstStyle/>
-          <a:p>
-            <a:pPr algn="ctr" indent="0" marL="0">
-              <a:lnSpc>
-                <a:spcPts val="1600"/>
-              </a:lnSpc>
-              <a:buNone/>
-            </a:pPr>
-            <a:r>
-              <a:rPr lang="en-US" sz="1200" dirty="0">
-                <a:solidFill>
-                  <a:srgbClr val="5C6675"/>
-                </a:solidFill>
-                <a:latin typeface="Calibri" pitchFamily="34" charset="0"/>
-                <a:ea typeface="Calibri" pitchFamily="34" charset="-122"/>
-                <a:cs typeface="Calibri" pitchFamily="34" charset="-120"/>
-              </a:rPr>
-              <a:t>One team, one number, one owner to ask.</a:t>
-            </a:r>
-            <a:endParaRPr lang="en-US" sz="1200" dirty="0"/>
-          </a:p>
-        </p:txBody>
-      </p:sp>
-      <p:sp>
-        <p:nvSpPr>
-          <p:cNvPr id="14" name="Text 12"/>
-          <p:cNvSpPr/>
-          <p:nvPr/>
-        </p:nvSpPr>
-        <p:spPr>
-          <a:xfrm>
-            <a:off x="6583680" y="2212848"/>
-            <a:ext cx="2377440" cy="310896"/>
-          </a:xfrm>
-          <a:prstGeom prst="rect">
-            <a:avLst/>
-          </a:prstGeom>
-          <a:noFill/>
-          <a:ln/>
-        </p:spPr>
-        <p:txBody>
-          <a:bodyPr wrap="square" lIns="0" tIns="0" rIns="0" bIns="0" rtlCol="0" anchor="ctr"/>
-          <a:lstStyle/>
-          <a:p>
-            <a:pPr algn="ctr" indent="0" marL="0">
-              <a:buNone/>
-            </a:pPr>
-            <a:r>
-              <a:rPr lang="en-US" sz="1400" b="1" dirty="0">
-                <a:solidFill>
-                  <a:srgbClr val="1B2430"/>
-                </a:solidFill>
-                <a:latin typeface="Calibri" pitchFamily="34" charset="0"/>
-                <a:ea typeface="Calibri" pitchFamily="34" charset="-122"/>
-                <a:cs typeface="Calibri" pitchFamily="34" charset="-120"/>
-              </a:rPr>
-              <a:t>Forecast overrun</a:t>
-            </a:r>
-            <a:endParaRPr lang="en-US" sz="1400" dirty="0"/>
-          </a:p>
-        </p:txBody>
-      </p:sp>
-      <p:sp>
-        <p:nvSpPr>
-          <p:cNvPr id="15" name="Text 13"/>
-          <p:cNvSpPr/>
-          <p:nvPr/>
-        </p:nvSpPr>
-        <p:spPr>
-          <a:xfrm>
-            <a:off x="6583680" y="2542032"/>
-            <a:ext cx="2377440" cy="292608"/>
-          </a:xfrm>
-          <a:prstGeom prst="rect">
-            <a:avLst/>
-          </a:prstGeom>
-          <a:noFill/>
-          <a:ln/>
-        </p:spPr>
-        <p:txBody>
-          <a:bodyPr wrap="square" lIns="0" tIns="0" rIns="0" bIns="0" rtlCol="0" anchor="ctr"/>
-          <a:lstStyle/>
-          <a:p>
-            <a:pPr algn="ctr" indent="0" marL="0">
-              <a:buNone/>
-            </a:pPr>
-            <a:r>
-              <a:rPr lang="en-US" sz="1250" b="1" spc="60" kern="0" dirty="0">
-                <a:solidFill>
-                  <a:srgbClr val="1F6B5C"/>
-                </a:solidFill>
-                <a:latin typeface="Calibri" pitchFamily="34" charset="0"/>
-                <a:ea typeface="Calibri" pitchFamily="34" charset="-122"/>
-                <a:cs typeface="Calibri" pitchFamily="34" charset="-120"/>
-              </a:rPr>
-              <a:t>~2 weeks out</a:t>
-            </a:r>
-            <a:endParaRPr lang="en-US" sz="1250" dirty="0"/>
-          </a:p>
-        </p:txBody>
-      </p:sp>
-      <p:sp>
-        <p:nvSpPr>
-          <p:cNvPr id="16" name="Shape 14"/>
-          <p:cNvSpPr/>
-          <p:nvPr/>
-        </p:nvSpPr>
-        <p:spPr>
-          <a:xfrm>
-            <a:off x="7653528" y="3031236"/>
-            <a:ext cx="237744" cy="237744"/>
-          </a:xfrm>
-          <a:prstGeom prst="ellipse">
-            <a:avLst/>
-          </a:prstGeom>
-          <a:solidFill>
-            <a:srgbClr val="2E8B7A"/>
-          </a:solidFill>
-          <a:ln w="25400">
-            <a:solidFill>
-              <a:srgbClr val="FFFFFF"/>
-            </a:solidFill>
-            <a:prstDash val="solid"/>
-          </a:ln>
-        </p:spPr>
-      </p:sp>
-      <p:sp>
-        <p:nvSpPr>
-          <p:cNvPr id="17" name="Text 15"/>
-          <p:cNvSpPr/>
-          <p:nvPr/>
-        </p:nvSpPr>
-        <p:spPr>
-          <a:xfrm>
-            <a:off x="6583680" y="3401568"/>
-            <a:ext cx="2377440" cy="566928"/>
-          </a:xfrm>
-          <a:prstGeom prst="rect">
-            <a:avLst/>
-          </a:prstGeom>
-          <a:noFill/>
-          <a:ln/>
-        </p:spPr>
-        <p:txBody>
-          <a:bodyPr wrap="square" lIns="0" tIns="0" rIns="0" bIns="0" rtlCol="0" anchor="t"/>
-          <a:lstStyle/>
-          <a:p>
-            <a:pPr algn="ctr" indent="0" marL="0">
-              <a:lnSpc>
-                <a:spcPts val="1600"/>
-              </a:lnSpc>
-              <a:buNone/>
-            </a:pPr>
-            <a:r>
-              <a:rPr lang="en-US" sz="1200" dirty="0">
-                <a:solidFill>
-                  <a:srgbClr val="5C6675"/>
-                </a:solidFill>
-                <a:latin typeface="Calibri" pitchFamily="34" charset="0"/>
-                <a:ea typeface="Calibri" pitchFamily="34" charset="-122"/>
-                <a:cs typeface="Calibri" pitchFamily="34" charset="-120"/>
-              </a:rPr>
-              <a:t>Still time to change the month's outcome.</a:t>
-            </a:r>
-            <a:endParaRPr lang="en-US" sz="1200" dirty="0"/>
-          </a:p>
-        </p:txBody>
-      </p:sp>
-      <p:sp>
-        <p:nvSpPr>
-          <p:cNvPr id="18" name="Text 16"/>
-          <p:cNvSpPr/>
-          <p:nvPr/>
-        </p:nvSpPr>
-        <p:spPr>
-          <a:xfrm>
-            <a:off x="9262872" y="2212848"/>
-            <a:ext cx="2377440" cy="310896"/>
-          </a:xfrm>
-          <a:prstGeom prst="rect">
-            <a:avLst/>
-          </a:prstGeom>
-          <a:noFill/>
-          <a:ln/>
-        </p:spPr>
-        <p:txBody>
-          <a:bodyPr wrap="square" lIns="0" tIns="0" rIns="0" bIns="0" rtlCol="0" anchor="ctr"/>
-          <a:lstStyle/>
-          <a:p>
-            <a:pPr algn="ctr" indent="0" marL="0">
-              <a:buNone/>
-            </a:pPr>
-            <a:r>
-              <a:rPr lang="en-US" sz="1400" b="1" dirty="0">
-                <a:solidFill>
-                  <a:srgbClr val="5C6675"/>
-                </a:solidFill>
-                <a:latin typeface="Calibri" pitchFamily="34" charset="0"/>
-                <a:ea typeface="Calibri" pitchFamily="34" charset="-122"/>
-                <a:cs typeface="Calibri" pitchFamily="34" charset="-120"/>
-              </a:rPr>
-              <a:t>The invoice</a:t>
-            </a:r>
-            <a:endParaRPr lang="en-US" sz="1400" dirty="0"/>
-          </a:p>
-        </p:txBody>
-      </p:sp>
-      <p:sp>
-        <p:nvSpPr>
-          <p:cNvPr id="19" name="Text 17"/>
-          <p:cNvSpPr/>
-          <p:nvPr/>
-        </p:nvSpPr>
-        <p:spPr>
-          <a:xfrm>
-            <a:off x="9262872" y="2542032"/>
-            <a:ext cx="2377440" cy="292608"/>
-          </a:xfrm>
-          <a:prstGeom prst="rect">
-            <a:avLst/>
-          </a:prstGeom>
-          <a:noFill/>
-          <a:ln/>
-        </p:spPr>
-        <p:txBody>
-          <a:bodyPr wrap="square" lIns="0" tIns="0" rIns="0" bIns="0" rtlCol="0" anchor="ctr"/>
-          <a:lstStyle/>
-          <a:p>
-            <a:pPr algn="ctr" indent="0" marL="0">
-              <a:buNone/>
-            </a:pPr>
-            <a:r>
-              <a:rPr lang="en-US" sz="1250" b="1" spc="60" kern="0" dirty="0">
-                <a:solidFill>
-                  <a:srgbClr val="5C6675"/>
-                </a:solidFill>
-                <a:latin typeface="Calibri" pitchFamily="34" charset="0"/>
-                <a:ea typeface="Calibri" pitchFamily="34" charset="-122"/>
-                <a:cs typeface="Calibri" pitchFamily="34" charset="-120"/>
-              </a:rPr>
-              <a:t>30–45 days later</a:t>
-            </a:r>
-            <a:endParaRPr lang="en-US" sz="1250" dirty="0"/>
-          </a:p>
-        </p:txBody>
-      </p:sp>
-      <p:sp>
-        <p:nvSpPr>
-          <p:cNvPr id="20" name="Shape 18"/>
-          <p:cNvSpPr/>
-          <p:nvPr/>
-        </p:nvSpPr>
-        <p:spPr>
-          <a:xfrm>
-            <a:off x="10332720" y="3031236"/>
-            <a:ext cx="237744" cy="237744"/>
-          </a:xfrm>
-          <a:prstGeom prst="ellipse">
-            <a:avLst/>
-          </a:prstGeom>
-          <a:solidFill>
-            <a:srgbClr val="AEB8C4"/>
-          </a:solidFill>
-          <a:ln w="25400">
-            <a:solidFill>
-              <a:srgbClr val="FFFFFF"/>
-            </a:solidFill>
-            <a:prstDash val="solid"/>
-          </a:ln>
-        </p:spPr>
-      </p:sp>
-      <p:sp>
-        <p:nvSpPr>
-          <p:cNvPr id="21" name="Text 19"/>
-          <p:cNvSpPr/>
-          <p:nvPr/>
-        </p:nvSpPr>
-        <p:spPr>
-          <a:xfrm>
-            <a:off x="9262872" y="3401568"/>
-            <a:ext cx="2377440" cy="566928"/>
-          </a:xfrm>
-          <a:prstGeom prst="rect">
-            <a:avLst/>
-          </a:prstGeom>
-          <a:noFill/>
-          <a:ln/>
-        </p:spPr>
-        <p:txBody>
-          <a:bodyPr wrap="square" lIns="0" tIns="0" rIns="0" bIns="0" rtlCol="0" anchor="t"/>
-          <a:lstStyle/>
-          <a:p>
-            <a:pPr algn="ctr" indent="0" marL="0">
-              <a:lnSpc>
-                <a:spcPts val="1600"/>
-              </a:lnSpc>
-              <a:buNone/>
-            </a:pPr>
-            <a:r>
-              <a:rPr lang="en-US" sz="1200" dirty="0">
-                <a:solidFill>
-                  <a:srgbClr val="5C6675"/>
-                </a:solidFill>
-                <a:latin typeface="Calibri" pitchFamily="34" charset="0"/>
-                <a:ea typeface="Calibri" pitchFamily="34" charset="-122"/>
-                <a:cs typeface="Calibri" pitchFamily="34" charset="-120"/>
-              </a:rPr>
-              <a:t>Nothing left to decide. Only to explain.</a:t>
-            </a:r>
-            <a:endParaRPr lang="en-US" sz="1200" dirty="0"/>
-          </a:p>
-        </p:txBody>
-      </p:sp>
-      <p:sp>
-        <p:nvSpPr>
-          <p:cNvPr id="22" name="Shape 20"/>
-          <p:cNvSpPr/>
-          <p:nvPr/>
-        </p:nvSpPr>
-        <p:spPr>
-          <a:xfrm>
-            <a:off x="548640" y="4297680"/>
-            <a:ext cx="6675120" cy="2011680"/>
+              <a:t>a conversation</a:t>
+            </a:r>
+            <a:endParaRPr lang="en-US" sz="1150" dirty="0"/>
+          </a:p>
+        </p:txBody>
+      </p:sp>
+      <p:sp>
+        <p:nvSpPr>
+          <p:cNvPr id="9" name="Shape 7"/>
+          <p:cNvSpPr/>
+          <p:nvPr/>
+        </p:nvSpPr>
+        <p:spPr>
+          <a:xfrm>
+            <a:off x="2148840" y="4114800"/>
+            <a:ext cx="1188720" cy="914400"/>
           </a:xfrm>
           <a:prstGeom prst="roundRect">
             <a:avLst>
-              <a:gd name="adj" fmla="val 4091"/>
+              <a:gd name="adj" fmla="val 6000"/>
             </a:avLst>
           </a:prstGeom>
           <a:solidFill>
-            <a:srgbClr val="F1F3F6"/>
-          </a:solidFill>
-          <a:ln/>
-        </p:spPr>
-      </p:sp>
-      <p:sp>
-        <p:nvSpPr>
-          <p:cNvPr id="23" name="Text 21"/>
-          <p:cNvSpPr/>
-          <p:nvPr/>
-        </p:nvSpPr>
-        <p:spPr>
-          <a:xfrm>
-            <a:off x="877824" y="4443984"/>
-            <a:ext cx="3657600" cy="292608"/>
+            <a:srgbClr val="2E8B7A"/>
+          </a:solidFill>
+          <a:ln/>
+        </p:spPr>
+      </p:sp>
+      <p:sp>
+        <p:nvSpPr>
+          <p:cNvPr id="10" name="Text 8"/>
+          <p:cNvSpPr/>
+          <p:nvPr/>
+        </p:nvSpPr>
+        <p:spPr>
+          <a:xfrm>
+            <a:off x="2011680" y="5102352"/>
+            <a:ext cx="1463040" cy="274320"/>
+          </a:xfrm>
+          <a:prstGeom prst="rect">
+            <a:avLst/>
+          </a:prstGeom>
+          <a:noFill/>
+          <a:ln/>
+        </p:spPr>
+        <p:txBody>
+          <a:bodyPr wrap="square" lIns="0" tIns="0" rIns="0" bIns="0" rtlCol="0" anchor="ctr"/>
+          <a:lstStyle/>
+          <a:p>
+            <a:pPr algn="ctr" indent="0" marL="0">
+              <a:buNone/>
+            </a:pPr>
+            <a:r>
+              <a:rPr lang="en-US" sz="1250" b="1" dirty="0">
+                <a:solidFill>
+                  <a:srgbClr val="1B2430"/>
+                </a:solidFill>
+                <a:latin typeface="Calibri" pitchFamily="34" charset="0"/>
+                <a:ea typeface="Calibri" pitchFamily="34" charset="-122"/>
+                <a:cs typeface="Calibri" pitchFamily="34" charset="-120"/>
+              </a:rPr>
+              <a:t>Pull request</a:t>
+            </a:r>
+            <a:endParaRPr lang="en-US" sz="1250" dirty="0"/>
+          </a:p>
+        </p:txBody>
+      </p:sp>
+      <p:sp>
+        <p:nvSpPr>
+          <p:cNvPr id="11" name="Text 9"/>
+          <p:cNvSpPr/>
+          <p:nvPr/>
+        </p:nvSpPr>
+        <p:spPr>
+          <a:xfrm>
+            <a:off x="2011680" y="5376672"/>
+            <a:ext cx="1463040" cy="256032"/>
+          </a:xfrm>
+          <a:prstGeom prst="rect">
+            <a:avLst/>
+          </a:prstGeom>
+          <a:noFill/>
+          <a:ln/>
+        </p:spPr>
+        <p:txBody>
+          <a:bodyPr wrap="square" lIns="0" tIns="0" rIns="0" bIns="0" rtlCol="0" anchor="ctr"/>
+          <a:lstStyle/>
+          <a:p>
+            <a:pPr algn="ctr" indent="0" marL="0">
+              <a:buNone/>
+            </a:pPr>
+            <a:r>
+              <a:rPr lang="en-US" sz="1150" dirty="0">
+                <a:solidFill>
+                  <a:srgbClr val="5C6675"/>
+                </a:solidFill>
+                <a:latin typeface="Calibri" pitchFamily="34" charset="0"/>
+                <a:ea typeface="Calibri" pitchFamily="34" charset="-122"/>
+                <a:cs typeface="Calibri" pitchFamily="34" charset="-120"/>
+              </a:rPr>
+              <a:t>an edit</a:t>
+            </a:r>
+            <a:endParaRPr lang="en-US" sz="1150" dirty="0"/>
+          </a:p>
+        </p:txBody>
+      </p:sp>
+      <p:sp>
+        <p:nvSpPr>
+          <p:cNvPr id="12" name="Shape 10"/>
+          <p:cNvSpPr/>
+          <p:nvPr/>
+        </p:nvSpPr>
+        <p:spPr>
+          <a:xfrm>
+            <a:off x="3611880" y="3337560"/>
+            <a:ext cx="1188720" cy="1691640"/>
+          </a:xfrm>
+          <a:prstGeom prst="roundRect">
+            <a:avLst>
+              <a:gd name="adj" fmla="val 4615"/>
+            </a:avLst>
+          </a:prstGeom>
+          <a:solidFill>
+            <a:srgbClr val="E39B2C"/>
+          </a:solidFill>
+          <a:ln/>
+        </p:spPr>
+      </p:sp>
+      <p:sp>
+        <p:nvSpPr>
+          <p:cNvPr id="13" name="Text 11"/>
+          <p:cNvSpPr/>
+          <p:nvPr/>
+        </p:nvSpPr>
+        <p:spPr>
+          <a:xfrm>
+            <a:off x="3474720" y="5102352"/>
+            <a:ext cx="1463040" cy="274320"/>
+          </a:xfrm>
+          <a:prstGeom prst="rect">
+            <a:avLst/>
+          </a:prstGeom>
+          <a:noFill/>
+          <a:ln/>
+        </p:spPr>
+        <p:txBody>
+          <a:bodyPr wrap="square" lIns="0" tIns="0" rIns="0" bIns="0" rtlCol="0" anchor="ctr"/>
+          <a:lstStyle/>
+          <a:p>
+            <a:pPr algn="ctr" indent="0" marL="0">
+              <a:buNone/>
+            </a:pPr>
+            <a:r>
+              <a:rPr lang="en-US" sz="1250" b="1" dirty="0">
+                <a:solidFill>
+                  <a:srgbClr val="1B2430"/>
+                </a:solidFill>
+                <a:latin typeface="Calibri" pitchFamily="34" charset="0"/>
+                <a:ea typeface="Calibri" pitchFamily="34" charset="-122"/>
+                <a:cs typeface="Calibri" pitchFamily="34" charset="-120"/>
+              </a:rPr>
+              <a:t>Deployed</a:t>
+            </a:r>
+            <a:endParaRPr lang="en-US" sz="1250" dirty="0"/>
+          </a:p>
+        </p:txBody>
+      </p:sp>
+      <p:sp>
+        <p:nvSpPr>
+          <p:cNvPr id="14" name="Text 12"/>
+          <p:cNvSpPr/>
+          <p:nvPr/>
+        </p:nvSpPr>
+        <p:spPr>
+          <a:xfrm>
+            <a:off x="3474720" y="5376672"/>
+            <a:ext cx="1463040" cy="256032"/>
+          </a:xfrm>
+          <a:prstGeom prst="rect">
+            <a:avLst/>
+          </a:prstGeom>
+          <a:noFill/>
+          <a:ln/>
+        </p:spPr>
+        <p:txBody>
+          <a:bodyPr wrap="square" lIns="0" tIns="0" rIns="0" bIns="0" rtlCol="0" anchor="ctr"/>
+          <a:lstStyle/>
+          <a:p>
+            <a:pPr algn="ctr" indent="0" marL="0">
+              <a:buNone/>
+            </a:pPr>
+            <a:r>
+              <a:rPr lang="en-US" sz="1150" dirty="0">
+                <a:solidFill>
+                  <a:srgbClr val="5C6675"/>
+                </a:solidFill>
+                <a:latin typeface="Calibri" pitchFamily="34" charset="0"/>
+                <a:ea typeface="Calibri" pitchFamily="34" charset="-122"/>
+                <a:cs typeface="Calibri" pitchFamily="34" charset="-120"/>
+              </a:rPr>
+              <a:t>a migration</a:t>
+            </a:r>
+            <a:endParaRPr lang="en-US" sz="1150" dirty="0"/>
+          </a:p>
+        </p:txBody>
+      </p:sp>
+      <p:sp>
+        <p:nvSpPr>
+          <p:cNvPr id="15" name="Shape 13"/>
+          <p:cNvSpPr/>
+          <p:nvPr/>
+        </p:nvSpPr>
+        <p:spPr>
+          <a:xfrm>
+            <a:off x="5074920" y="2651760"/>
+            <a:ext cx="1188720" cy="2377440"/>
+          </a:xfrm>
+          <a:prstGeom prst="roundRect">
+            <a:avLst>
+              <a:gd name="adj" fmla="val 4615"/>
+            </a:avLst>
+          </a:prstGeom>
+          <a:solidFill>
+            <a:srgbClr val="A6432F"/>
+          </a:solidFill>
+          <a:ln/>
+        </p:spPr>
+      </p:sp>
+      <p:sp>
+        <p:nvSpPr>
+          <p:cNvPr id="16" name="Text 14"/>
+          <p:cNvSpPr/>
+          <p:nvPr/>
+        </p:nvSpPr>
+        <p:spPr>
+          <a:xfrm>
+            <a:off x="4937760" y="5102352"/>
+            <a:ext cx="1463040" cy="274320"/>
+          </a:xfrm>
+          <a:prstGeom prst="rect">
+            <a:avLst/>
+          </a:prstGeom>
+          <a:noFill/>
+          <a:ln/>
+        </p:spPr>
+        <p:txBody>
+          <a:bodyPr wrap="square" lIns="0" tIns="0" rIns="0" bIns="0" rtlCol="0" anchor="ctr"/>
+          <a:lstStyle/>
+          <a:p>
+            <a:pPr algn="ctr" indent="0" marL="0">
+              <a:buNone/>
+            </a:pPr>
+            <a:r>
+              <a:rPr lang="en-US" sz="1250" b="1" dirty="0">
+                <a:solidFill>
+                  <a:srgbClr val="1B2430"/>
+                </a:solidFill>
+                <a:latin typeface="Calibri" pitchFamily="34" charset="0"/>
+                <a:ea typeface="Calibri" pitchFamily="34" charset="-122"/>
+                <a:cs typeface="Calibri" pitchFamily="34" charset="-120"/>
+              </a:rPr>
+              <a:t>Invoiced</a:t>
+            </a:r>
+            <a:endParaRPr lang="en-US" sz="1250" dirty="0"/>
+          </a:p>
+        </p:txBody>
+      </p:sp>
+      <p:sp>
+        <p:nvSpPr>
+          <p:cNvPr id="17" name="Text 15"/>
+          <p:cNvSpPr/>
+          <p:nvPr/>
+        </p:nvSpPr>
+        <p:spPr>
+          <a:xfrm>
+            <a:off x="4937760" y="5376672"/>
+            <a:ext cx="1463040" cy="256032"/>
+          </a:xfrm>
+          <a:prstGeom prst="rect">
+            <a:avLst/>
+          </a:prstGeom>
+          <a:noFill/>
+          <a:ln/>
+        </p:spPr>
+        <p:txBody>
+          <a:bodyPr wrap="square" lIns="0" tIns="0" rIns="0" bIns="0" rtlCol="0" anchor="ctr"/>
+          <a:lstStyle/>
+          <a:p>
+            <a:pPr algn="ctr" indent="0" marL="0">
+              <a:buNone/>
+            </a:pPr>
+            <a:r>
+              <a:rPr lang="en-US" sz="1150" dirty="0">
+                <a:solidFill>
+                  <a:srgbClr val="5C6675"/>
+                </a:solidFill>
+                <a:latin typeface="Calibri" pitchFamily="34" charset="0"/>
+                <a:ea typeface="Calibri" pitchFamily="34" charset="-122"/>
+                <a:cs typeface="Calibri" pitchFamily="34" charset="-120"/>
+              </a:rPr>
+              <a:t>a negotiation</a:t>
+            </a:r>
+            <a:endParaRPr lang="en-US" sz="1150" dirty="0"/>
+          </a:p>
+        </p:txBody>
+      </p:sp>
+      <p:sp>
+        <p:nvSpPr>
+          <p:cNvPr id="18" name="Shape 16"/>
+          <p:cNvSpPr/>
+          <p:nvPr/>
+        </p:nvSpPr>
+        <p:spPr>
+          <a:xfrm>
+            <a:off x="548640" y="5029200"/>
+            <a:ext cx="5989320" cy="36576"/>
+          </a:xfrm>
+          <a:prstGeom prst="roundRect">
+            <a:avLst>
+              <a:gd name="adj" fmla="val 50000"/>
+            </a:avLst>
+          </a:prstGeom>
+          <a:solidFill>
+            <a:srgbClr val="DFE4EA"/>
+          </a:solidFill>
+          <a:ln/>
+        </p:spPr>
+      </p:sp>
+      <p:sp>
+        <p:nvSpPr>
+          <p:cNvPr id="19" name="Shape 17"/>
+          <p:cNvSpPr/>
+          <p:nvPr/>
+        </p:nvSpPr>
+        <p:spPr>
+          <a:xfrm>
+            <a:off x="6858000" y="2084832"/>
+            <a:ext cx="4782312" cy="3602736"/>
+          </a:xfrm>
+          <a:prstGeom prst="roundRect">
+            <a:avLst>
+              <a:gd name="adj" fmla="val 2284"/>
+            </a:avLst>
+          </a:prstGeom>
+          <a:solidFill>
+            <a:srgbClr val="1F2936"/>
+          </a:solidFill>
+          <a:ln/>
+          <a:effectLst>
+            <a:outerShdw sx="100000" sy="100000" kx="0" ky="0" algn="bl" rotWithShape="0" blurRad="127000" dist="25400" dir="5400000">
+              <a:srgbClr val="8C99A8">
+                <a:alpha val="16000"/>
+              </a:srgbClr>
+            </a:outerShdw>
+          </a:effectLst>
+        </p:spPr>
+      </p:sp>
+      <p:sp>
+        <p:nvSpPr>
+          <p:cNvPr id="20" name="Text 18"/>
+          <p:cNvSpPr/>
+          <p:nvPr/>
+        </p:nvSpPr>
+        <p:spPr>
+          <a:xfrm>
+            <a:off x="7168896" y="2267712"/>
+            <a:ext cx="4114800" cy="292608"/>
           </a:xfrm>
           <a:prstGeom prst="rect">
             <a:avLst/>
@@ -12981,13 +12936,13 @@
             <a:r>
               <a:rPr lang="en-US" sz="1200" b="1" spc="180" kern="0" dirty="0">
                 <a:solidFill>
-                  <a:srgbClr val="5C6675"/>
-                </a:solidFill>
-                <a:latin typeface="Calibri" pitchFamily="34" charset="0"/>
-                <a:ea typeface="Calibri" pitchFamily="34" charset="-122"/>
-                <a:cs typeface="Calibri" pitchFamily="34" charset="-120"/>
-              </a:rPr>
-              <a:t>What has to be true</a:t>
+                  <a:srgbClr val="E39B2C"/>
+                </a:solidFill>
+                <a:latin typeface="Calibri" pitchFamily="34" charset="0"/>
+                <a:ea typeface="Calibri" pitchFamily="34" charset="-122"/>
+                <a:cs typeface="Calibri" pitchFamily="34" charset="-120"/>
+              </a:rPr>
+              <a:t>Where cost enters the workflow</a:t>
             </a:r>
             <a:endParaRPr lang="en-US" sz="1200" dirty="0"/>
           </a:p>
@@ -12995,27 +12950,27 @@
       </p:sp>
       <p:sp>
         <p:nvSpPr>
-          <p:cNvPr id="24" name="Shape 22"/>
-          <p:cNvSpPr/>
-          <p:nvPr/>
-        </p:nvSpPr>
-        <p:spPr>
-          <a:xfrm>
-            <a:off x="877824" y="4809744"/>
-            <a:ext cx="274320" cy="274320"/>
+          <p:cNvPr id="21" name="Shape 19"/>
+          <p:cNvSpPr/>
+          <p:nvPr/>
+        </p:nvSpPr>
+        <p:spPr>
+          <a:xfrm>
+            <a:off x="7168896" y="2743200"/>
+            <a:ext cx="420624" cy="420624"/>
           </a:xfrm>
           <a:prstGeom prst="ellipse">
             <a:avLst/>
           </a:prstGeom>
           <a:solidFill>
-            <a:srgbClr val="FFFFFF"/>
+            <a:srgbClr val="2E3A48"/>
           </a:solidFill>
           <a:ln/>
         </p:spPr>
       </p:sp>
       <p:pic>
         <p:nvPicPr>
-          <p:cNvPr id="25" name="Image 0" descr="preencoded.png">    </p:cNvPr>
+          <p:cNvPr id="22" name="Image 0" descr="preencoded.png">    </p:cNvPr>
           <p:cNvPicPr>
             <a:picLocks noChangeAspect="1"/>
           </p:cNvPicPr>
@@ -13029,8 +12984,8 @@
         </p:blipFill>
         <p:spPr>
           <a:xfrm>
-            <a:off x="946404" y="4878324"/>
-            <a:ext cx="137160" cy="137160"/>
+            <a:off x="7274052" y="2848356"/>
+            <a:ext cx="210312" cy="210312"/>
           </a:xfrm>
           <a:prstGeom prst="rect">
             <a:avLst/>
@@ -13039,66 +12994,89 @@
       </p:pic>
       <p:sp>
         <p:nvSpPr>
-          <p:cNvPr id="26" name="Text 23"/>
-          <p:cNvSpPr/>
-          <p:nvPr/>
-        </p:nvSpPr>
-        <p:spPr>
-          <a:xfrm>
-            <a:off x="1298448" y="4754880"/>
-            <a:ext cx="5669280" cy="384048"/>
-          </a:xfrm>
-          <a:prstGeom prst="rect">
-            <a:avLst/>
-          </a:prstGeom>
-          <a:noFill/>
-          <a:ln/>
-        </p:spPr>
-        <p:txBody>
-          <a:bodyPr wrap="square" lIns="0" tIns="0" rIns="0" bIns="0" rtlCol="0" anchor="ctr"/>
-          <a:lstStyle/>
-          <a:p>
-            <a:pPr indent="0" marL="0">
-              <a:buNone/>
-            </a:pPr>
-            <a:r>
-              <a:rPr lang="en-US" sz="1300" dirty="0">
-                <a:solidFill>
-                  <a:srgbClr val="1B2430"/>
-                </a:solidFill>
-                <a:latin typeface="Calibri" pitchFamily="34" charset="0"/>
-                <a:ea typeface="Calibri" pitchFamily="34" charset="-122"/>
-                <a:cs typeface="Calibri" pitchFamily="34" charset="-120"/>
-              </a:rPr>
-              <a:t>Protective alerts run on usage data, not on billing data</a:t>
-            </a:r>
-            <a:endParaRPr lang="en-US" sz="1300" dirty="0"/>
-          </a:p>
-        </p:txBody>
-      </p:sp>
-      <p:sp>
-        <p:nvSpPr>
-          <p:cNvPr id="27" name="Shape 24"/>
-          <p:cNvSpPr/>
-          <p:nvPr/>
-        </p:nvSpPr>
-        <p:spPr>
-          <a:xfrm>
-            <a:off x="877824" y="5193792"/>
-            <a:ext cx="274320" cy="274320"/>
+          <p:cNvPr id="23" name="Text 20"/>
+          <p:cNvSpPr/>
+          <p:nvPr/>
+        </p:nvSpPr>
+        <p:spPr>
+          <a:xfrm>
+            <a:off x="7735824" y="2670048"/>
+            <a:ext cx="3602736" cy="914400"/>
+          </a:xfrm>
+          <a:prstGeom prst="rect">
+            <a:avLst/>
+          </a:prstGeom>
+          <a:noFill/>
+          <a:ln/>
+        </p:spPr>
+        <p:txBody>
+          <a:bodyPr wrap="square" lIns="0" tIns="0" rIns="0" bIns="0" rtlCol="0" anchor="ctr"/>
+          <a:lstStyle/>
+          <a:p>
+            <a:pPr indent="0" marL="0">
+              <a:lnSpc>
+                <a:spcPts val="1600"/>
+              </a:lnSpc>
+              <a:buNone/>
+            </a:pPr>
+            <a:r>
+              <a:rPr lang="en-US" sz="1350" b="1" dirty="0">
+                <a:solidFill>
+                  <a:srgbClr val="FFFFFF"/>
+                </a:solidFill>
+                <a:latin typeface="Calibri" pitchFamily="34" charset="0"/>
+                <a:ea typeface="Calibri" pitchFamily="34" charset="-122"/>
+                <a:cs typeface="Calibri" pitchFamily="34" charset="-120"/>
+              </a:rPr>
+              <a:t>Architecture review</a:t>
+            </a:r>
+            <a:endParaRPr lang="en-US" sz="1350" dirty="0"/>
+          </a:p>
+          <a:p>
+            <a:pPr indent="0" marL="0">
+              <a:lnSpc>
+                <a:spcPts val="1600"/>
+              </a:lnSpc>
+              <a:buNone/>
+            </a:pPr>
+            <a:r>
+              <a:rPr lang="en-US" sz="1200" dirty="0">
+                <a:solidFill>
+                  <a:srgbClr val="9EABBA"/>
+                </a:solidFill>
+                <a:latin typeface="Calibri" pitchFamily="34" charset="0"/>
+                <a:ea typeface="Calibri" pitchFamily="34" charset="-122"/>
+                <a:cs typeface="Calibri" pitchFamily="34" charset="-120"/>
+              </a:rPr>
+              <a:t>Price two or three options before choosing one. Multi-AZ or single, this SKU or that.</a:t>
+            </a:r>
+            <a:endParaRPr lang="en-US" sz="1350" dirty="0"/>
+          </a:p>
+        </p:txBody>
+      </p:sp>
+      <p:sp>
+        <p:nvSpPr>
+          <p:cNvPr id="24" name="Shape 21"/>
+          <p:cNvSpPr/>
+          <p:nvPr/>
+        </p:nvSpPr>
+        <p:spPr>
+          <a:xfrm>
+            <a:off x="7168896" y="3730752"/>
+            <a:ext cx="420624" cy="420624"/>
           </a:xfrm>
           <a:prstGeom prst="ellipse">
             <a:avLst/>
           </a:prstGeom>
           <a:solidFill>
-            <a:srgbClr val="FFFFFF"/>
+            <a:srgbClr val="2E3A48"/>
           </a:solidFill>
           <a:ln/>
         </p:spPr>
       </p:sp>
       <p:pic>
         <p:nvPicPr>
-          <p:cNvPr id="28" name="Image 1" descr="preencoded.png">    </p:cNvPr>
+          <p:cNvPr id="25" name="Image 1" descr="preencoded.png">    </p:cNvPr>
           <p:cNvPicPr>
             <a:picLocks noChangeAspect="1"/>
           </p:cNvPicPr>
@@ -13112,8 +13090,8 @@
         </p:blipFill>
         <p:spPr>
           <a:xfrm>
-            <a:off x="946404" y="5262372"/>
-            <a:ext cx="137160" cy="137160"/>
+            <a:off x="7274052" y="3835908"/>
+            <a:ext cx="210312" cy="210312"/>
           </a:xfrm>
           <a:prstGeom prst="rect">
             <a:avLst/>
@@ -13122,66 +13100,89 @@
       </p:pic>
       <p:sp>
         <p:nvSpPr>
-          <p:cNvPr id="29" name="Text 25"/>
-          <p:cNvSpPr/>
-          <p:nvPr/>
-        </p:nvSpPr>
-        <p:spPr>
-          <a:xfrm>
-            <a:off x="1298448" y="5138928"/>
-            <a:ext cx="5669280" cy="384048"/>
-          </a:xfrm>
-          <a:prstGeom prst="rect">
-            <a:avLst/>
-          </a:prstGeom>
-          <a:noFill/>
-          <a:ln/>
-        </p:spPr>
-        <p:txBody>
-          <a:bodyPr wrap="square" lIns="0" tIns="0" rIns="0" bIns="0" rtlCol="0" anchor="ctr"/>
-          <a:lstStyle/>
-          <a:p>
-            <a:pPr indent="0" marL="0">
-              <a:buNone/>
-            </a:pPr>
-            <a:r>
-              <a:rPr lang="en-US" sz="1300" dirty="0">
-                <a:solidFill>
-                  <a:srgbClr val="1B2430"/>
-                </a:solidFill>
-                <a:latin typeface="Calibri" pitchFamily="34" charset="0"/>
-                <a:ea typeface="Calibri" pitchFamily="34" charset="-122"/>
-                <a:cs typeface="Calibri" pitchFamily="34" charset="-120"/>
-              </a:rPr>
-              <a:t>Every alert has a named owner to route to</a:t>
-            </a:r>
-            <a:endParaRPr lang="en-US" sz="1300" dirty="0"/>
-          </a:p>
-        </p:txBody>
-      </p:sp>
-      <p:sp>
-        <p:nvSpPr>
-          <p:cNvPr id="30" name="Shape 26"/>
-          <p:cNvSpPr/>
-          <p:nvPr/>
-        </p:nvSpPr>
-        <p:spPr>
-          <a:xfrm>
-            <a:off x="877824" y="5577840"/>
-            <a:ext cx="274320" cy="274320"/>
+          <p:cNvPr id="26" name="Text 22"/>
+          <p:cNvSpPr/>
+          <p:nvPr/>
+        </p:nvSpPr>
+        <p:spPr>
+          <a:xfrm>
+            <a:off x="7735824" y="3657600"/>
+            <a:ext cx="3602736" cy="914400"/>
+          </a:xfrm>
+          <a:prstGeom prst="rect">
+            <a:avLst/>
+          </a:prstGeom>
+          <a:noFill/>
+          <a:ln/>
+        </p:spPr>
+        <p:txBody>
+          <a:bodyPr wrap="square" lIns="0" tIns="0" rIns="0" bIns="0" rtlCol="0" anchor="ctr"/>
+          <a:lstStyle/>
+          <a:p>
+            <a:pPr indent="0" marL="0">
+              <a:lnSpc>
+                <a:spcPts val="1600"/>
+              </a:lnSpc>
+              <a:buNone/>
+            </a:pPr>
+            <a:r>
+              <a:rPr lang="en-US" sz="1350" b="1" dirty="0">
+                <a:solidFill>
+                  <a:srgbClr val="FFFFFF"/>
+                </a:solidFill>
+                <a:latin typeface="Calibri" pitchFamily="34" charset="0"/>
+                <a:ea typeface="Calibri" pitchFamily="34" charset="-122"/>
+                <a:cs typeface="Calibri" pitchFamily="34" charset="-120"/>
+              </a:rPr>
+              <a:t>Cost diff on the pull request</a:t>
+            </a:r>
+            <a:endParaRPr lang="en-US" sz="1350" dirty="0"/>
+          </a:p>
+          <a:p>
+            <a:pPr indent="0" marL="0">
+              <a:lnSpc>
+                <a:spcPts val="1600"/>
+              </a:lnSpc>
+              <a:buNone/>
+            </a:pPr>
+            <a:r>
+              <a:rPr lang="en-US" sz="1200" dirty="0">
+                <a:solidFill>
+                  <a:srgbClr val="9EABBA"/>
+                </a:solidFill>
+                <a:latin typeface="Calibri" pitchFamily="34" charset="0"/>
+                <a:ea typeface="Calibri" pitchFamily="34" charset="-122"/>
+                <a:cs typeface="Calibri" pitchFamily="34" charset="-120"/>
+              </a:rPr>
+              <a:t>Every infrastructure change shows its monthly delta, so cost is part of code review.</a:t>
+            </a:r>
+            <a:endParaRPr lang="en-US" sz="1350" dirty="0"/>
+          </a:p>
+        </p:txBody>
+      </p:sp>
+      <p:sp>
+        <p:nvSpPr>
+          <p:cNvPr id="27" name="Shape 23"/>
+          <p:cNvSpPr/>
+          <p:nvPr/>
+        </p:nvSpPr>
+        <p:spPr>
+          <a:xfrm>
+            <a:off x="7168896" y="4718304"/>
+            <a:ext cx="420624" cy="420624"/>
           </a:xfrm>
           <a:prstGeom prst="ellipse">
             <a:avLst/>
           </a:prstGeom>
           <a:solidFill>
-            <a:srgbClr val="FFFFFF"/>
+            <a:srgbClr val="2E3A48"/>
           </a:solidFill>
           <a:ln/>
         </p:spPr>
       </p:sp>
       <p:pic>
         <p:nvPicPr>
-          <p:cNvPr id="31" name="Image 2" descr="preencoded.png">    </p:cNvPr>
+          <p:cNvPr id="28" name="Image 2" descr="preencoded.png">    </p:cNvPr>
           <p:cNvPicPr>
             <a:picLocks noChangeAspect="1"/>
           </p:cNvPicPr>
@@ -13195,8 +13196,8 @@
         </p:blipFill>
         <p:spPr>
           <a:xfrm>
-            <a:off x="946404" y="5646420"/>
-            <a:ext cx="137160" cy="137160"/>
+            <a:off x="7274052" y="4823460"/>
+            <a:ext cx="210312" cy="210312"/>
           </a:xfrm>
           <a:prstGeom prst="rect">
             <a:avLst/>
@@ -13205,233 +13206,144 @@
       </p:pic>
       <p:sp>
         <p:nvSpPr>
-          <p:cNvPr id="32" name="Text 27"/>
-          <p:cNvSpPr/>
-          <p:nvPr/>
-        </p:nvSpPr>
-        <p:spPr>
-          <a:xfrm>
-            <a:off x="1298448" y="5522976"/>
-            <a:ext cx="5669280" cy="384048"/>
-          </a:xfrm>
-          <a:prstGeom prst="rect">
-            <a:avLst/>
-          </a:prstGeom>
-          <a:noFill/>
-          <a:ln/>
-        </p:spPr>
-        <p:txBody>
-          <a:bodyPr wrap="square" lIns="0" tIns="0" rIns="0" bIns="0" rtlCol="0" anchor="ctr"/>
-          <a:lstStyle/>
-          <a:p>
-            <a:pPr indent="0" marL="0">
-              <a:buNone/>
-            </a:pPr>
-            <a:r>
-              <a:rPr lang="en-US" sz="1300" dirty="0">
-                <a:solidFill>
-                  <a:srgbClr val="1B2430"/>
-                </a:solidFill>
-                <a:latin typeface="Calibri" pitchFamily="34" charset="0"/>
-                <a:ea typeface="Calibri" pitchFamily="34" charset="-122"/>
-                <a:cs typeface="Calibri" pitchFamily="34" charset="-120"/>
-              </a:rPr>
-              <a:t>Budgets are phased, so drift shows up in week one</a:t>
-            </a:r>
-            <a:endParaRPr lang="en-US" sz="1300" dirty="0"/>
-          </a:p>
-        </p:txBody>
-      </p:sp>
-      <p:sp>
-        <p:nvSpPr>
-          <p:cNvPr id="33" name="Shape 28"/>
-          <p:cNvSpPr/>
-          <p:nvPr/>
-        </p:nvSpPr>
-        <p:spPr>
-          <a:xfrm>
-            <a:off x="877824" y="5961888"/>
-            <a:ext cx="274320" cy="274320"/>
-          </a:xfrm>
-          <a:prstGeom prst="ellipse">
-            <a:avLst/>
-          </a:prstGeom>
-          <a:solidFill>
-            <a:srgbClr val="FFFFFF"/>
-          </a:solidFill>
-          <a:ln/>
-        </p:spPr>
-      </p:sp>
-      <p:pic>
-        <p:nvPicPr>
-          <p:cNvPr id="34" name="Image 3" descr="preencoded.png">    </p:cNvPr>
-          <p:cNvPicPr>
-            <a:picLocks noChangeAspect="1"/>
-          </p:cNvPicPr>
-          <p:nvPr/>
-        </p:nvPicPr>
-        <p:blipFill>
-          <a:blip r:embed="rId4"/>
-          <a:stretch>
-            <a:fillRect/>
-          </a:stretch>
-        </p:blipFill>
-        <p:spPr>
-          <a:xfrm>
-            <a:off x="946404" y="6030468"/>
-            <a:ext cx="137160" cy="137160"/>
-          </a:xfrm>
-          <a:prstGeom prst="rect">
-            <a:avLst/>
-          </a:prstGeom>
-        </p:spPr>
-      </p:pic>
-      <p:sp>
-        <p:nvSpPr>
-          <p:cNvPr id="35" name="Text 29"/>
-          <p:cNvSpPr/>
-          <p:nvPr/>
-        </p:nvSpPr>
-        <p:spPr>
-          <a:xfrm>
-            <a:off x="1298448" y="5907024"/>
-            <a:ext cx="5669280" cy="384048"/>
-          </a:xfrm>
-          <a:prstGeom prst="rect">
-            <a:avLst/>
-          </a:prstGeom>
-          <a:noFill/>
-          <a:ln/>
-        </p:spPr>
-        <p:txBody>
-          <a:bodyPr wrap="square" lIns="0" tIns="0" rIns="0" bIns="0" rtlCol="0" anchor="ctr"/>
-          <a:lstStyle/>
-          <a:p>
-            <a:pPr indent="0" marL="0">
-              <a:buNone/>
-            </a:pPr>
-            <a:r>
-              <a:rPr lang="en-US" sz="1300" dirty="0">
-                <a:solidFill>
-                  <a:srgbClr val="1B2430"/>
-                </a:solidFill>
-                <a:latin typeface="Calibri" pitchFamily="34" charset="0"/>
-                <a:ea typeface="Calibri" pitchFamily="34" charset="-122"/>
-                <a:cs typeface="Calibri" pitchFamily="34" charset="-120"/>
-              </a:rPr>
-              <a:t>Quotas cap the worst case while someone investigates</a:t>
-            </a:r>
-            <a:endParaRPr lang="en-US" sz="1300" dirty="0"/>
-          </a:p>
-        </p:txBody>
-      </p:sp>
-      <p:sp>
-        <p:nvSpPr>
-          <p:cNvPr id="36" name="Shape 30"/>
-          <p:cNvSpPr/>
-          <p:nvPr/>
-        </p:nvSpPr>
-        <p:spPr>
-          <a:xfrm>
-            <a:off x="7525512" y="4297680"/>
-            <a:ext cx="4114800" cy="2011680"/>
+          <p:cNvPr id="29" name="Text 24"/>
+          <p:cNvSpPr/>
+          <p:nvPr/>
+        </p:nvSpPr>
+        <p:spPr>
+          <a:xfrm>
+            <a:off x="7735824" y="4645152"/>
+            <a:ext cx="3602736" cy="914400"/>
+          </a:xfrm>
+          <a:prstGeom prst="rect">
+            <a:avLst/>
+          </a:prstGeom>
+          <a:noFill/>
+          <a:ln/>
+        </p:spPr>
+        <p:txBody>
+          <a:bodyPr wrap="square" lIns="0" tIns="0" rIns="0" bIns="0" rtlCol="0" anchor="ctr"/>
+          <a:lstStyle/>
+          <a:p>
+            <a:pPr indent="0" marL="0">
+              <a:lnSpc>
+                <a:spcPts val="1600"/>
+              </a:lnSpc>
+              <a:buNone/>
+            </a:pPr>
+            <a:r>
+              <a:rPr lang="en-US" sz="1350" b="1" dirty="0">
+                <a:solidFill>
+                  <a:srgbClr val="FFFFFF"/>
+                </a:solidFill>
+                <a:latin typeface="Calibri" pitchFamily="34" charset="0"/>
+                <a:ea typeface="Calibri" pitchFamily="34" charset="-122"/>
+                <a:cs typeface="Calibri" pitchFamily="34" charset="-120"/>
+              </a:rPr>
+              <a:t>Policy as code</a:t>
+            </a:r>
+            <a:endParaRPr lang="en-US" sz="1350" dirty="0"/>
+          </a:p>
+          <a:p>
+            <a:pPr indent="0" marL="0">
+              <a:lnSpc>
+                <a:spcPts val="1600"/>
+              </a:lnSpc>
+              <a:buNone/>
+            </a:pPr>
+            <a:r>
+              <a:rPr lang="en-US" sz="1200" dirty="0">
+                <a:solidFill>
+                  <a:srgbClr val="9EABBA"/>
+                </a:solidFill>
+                <a:latin typeface="Calibri" pitchFamily="34" charset="0"/>
+                <a:ea typeface="Calibri" pitchFamily="34" charset="-122"/>
+                <a:cs typeface="Calibri" pitchFamily="34" charset="-120"/>
+              </a:rPr>
+              <a:t>Tagging and budget rules enforced in the pipeline — the expensive change never merges.</a:t>
+            </a:r>
+            <a:endParaRPr lang="en-US" sz="1350" dirty="0"/>
+          </a:p>
+        </p:txBody>
+      </p:sp>
+      <p:sp>
+        <p:nvSpPr>
+          <p:cNvPr id="30" name="Shape 25"/>
+          <p:cNvSpPr/>
+          <p:nvPr/>
+        </p:nvSpPr>
+        <p:spPr>
+          <a:xfrm>
+            <a:off x="548640" y="5742432"/>
+            <a:ext cx="11091672" cy="841248"/>
           </a:xfrm>
           <a:prstGeom prst="roundRect">
             <a:avLst>
-              <a:gd name="adj" fmla="val 4091"/>
+              <a:gd name="adj" fmla="val 9783"/>
             </a:avLst>
           </a:prstGeom>
           <a:solidFill>
-            <a:srgbClr val="1F2936"/>
-          </a:solidFill>
-          <a:ln/>
-          <a:effectLst>
-            <a:outerShdw sx="100000" sy="100000" kx="0" ky="0" algn="bl" rotWithShape="0" blurRad="127000" dist="25400" dir="5400000">
-              <a:srgbClr val="8C99A8">
-                <a:alpha val="16000"/>
-              </a:srgbClr>
-            </a:outerShdw>
-          </a:effectLst>
-        </p:spPr>
-      </p:sp>
-      <p:sp>
-        <p:nvSpPr>
-          <p:cNvPr id="37" name="Text 31"/>
-          <p:cNvSpPr/>
-          <p:nvPr/>
-        </p:nvSpPr>
-        <p:spPr>
-          <a:xfrm>
-            <a:off x="7818120" y="4462272"/>
-            <a:ext cx="3200400" cy="292608"/>
-          </a:xfrm>
-          <a:prstGeom prst="rect">
-            <a:avLst/>
-          </a:prstGeom>
-          <a:noFill/>
-          <a:ln/>
-        </p:spPr>
-        <p:txBody>
-          <a:bodyPr wrap="square" lIns="0" tIns="0" rIns="0" bIns="0" rtlCol="0" anchor="ctr"/>
-          <a:lstStyle/>
-          <a:p>
-            <a:pPr indent="0" marL="0">
-              <a:buNone/>
-            </a:pPr>
-            <a:r>
-              <a:rPr lang="en-US" sz="1200" b="1" spc="180" kern="0" dirty="0">
-                <a:solidFill>
-                  <a:srgbClr val="E39B2C"/>
-                </a:solidFill>
-                <a:latin typeface="Calibri" pitchFamily="34" charset="0"/>
-                <a:ea typeface="Calibri" pitchFamily="34" charset="-122"/>
-                <a:cs typeface="Calibri" pitchFamily="34" charset="-120"/>
-              </a:rPr>
-              <a:t>The point</a:t>
-            </a:r>
-            <a:endParaRPr lang="en-US" sz="1200" dirty="0"/>
-          </a:p>
-        </p:txBody>
-      </p:sp>
-      <p:sp>
-        <p:nvSpPr>
-          <p:cNvPr id="38" name="Text 32"/>
-          <p:cNvSpPr/>
-          <p:nvPr/>
-        </p:nvSpPr>
-        <p:spPr>
-          <a:xfrm>
-            <a:off x="7818120" y="4828032"/>
-            <a:ext cx="3529584" cy="1280160"/>
-          </a:xfrm>
-          <a:prstGeom prst="rect">
-            <a:avLst/>
-          </a:prstGeom>
-          <a:noFill/>
-          <a:ln/>
-        </p:spPr>
-        <p:txBody>
-          <a:bodyPr wrap="square" lIns="0" tIns="0" rIns="0" bIns="0" rtlCol="0" anchor="t"/>
+            <a:srgbClr val="FBEFD8"/>
+          </a:solidFill>
+          <a:ln/>
+        </p:spPr>
+      </p:sp>
+      <p:sp>
+        <p:nvSpPr>
+          <p:cNvPr id="31" name="Text 26"/>
+          <p:cNvSpPr/>
+          <p:nvPr/>
+        </p:nvSpPr>
+        <p:spPr>
+          <a:xfrm>
+            <a:off x="877824" y="5742432"/>
+            <a:ext cx="10424160" cy="841248"/>
+          </a:xfrm>
+          <a:prstGeom prst="rect">
+            <a:avLst/>
+          </a:prstGeom>
+          <a:noFill/>
+          <a:ln/>
+        </p:spPr>
+        <p:txBody>
+          <a:bodyPr wrap="square" lIns="0" tIns="0" rIns="0" bIns="0" rtlCol="0" anchor="ctr"/>
           <a:lstStyle/>
           <a:p>
             <a:pPr indent="0" marL="0">
               <a:lnSpc>
-                <a:spcPts val="2200"/>
+                <a:spcPts val="1800"/>
               </a:lnSpc>
               <a:buNone/>
             </a:pPr>
             <a:r>
-              <a:rPr lang="en-US" sz="1550" i="1" dirty="0">
-                <a:solidFill>
-                  <a:srgbClr val="FFFFFF"/>
-                </a:solidFill>
-                <a:latin typeface="Cambria" pitchFamily="34" charset="0"/>
-                <a:ea typeface="Cambria" pitchFamily="34" charset="-122"/>
-                <a:cs typeface="Cambria" pitchFamily="34" charset="-120"/>
-              </a:rPr>
-              <a:t>The goal is not a smaller invoice. It is an invoice with nothing in it you have not already seen, explained and decided about.</a:t>
-            </a:r>
-            <a:endParaRPr lang="en-US" sz="1550" dirty="0"/>
+              <a:rPr lang="en-US" sz="1300" b="1" dirty="0">
+                <a:solidFill>
+                  <a:srgbClr val="6B4A0E"/>
+                </a:solidFill>
+                <a:latin typeface="Calibri" pitchFamily="34" charset="0"/>
+                <a:ea typeface="Calibri" pitchFamily="34" charset="-122"/>
+                <a:cs typeface="Calibri" pitchFamily="34" charset="-120"/>
+              </a:rPr>
+              <a:t>Pre-deployment architecture costing is the most requested capability in the State of FinOps 2026 — </a:t>
+            </a:r>
+            <a:pPr indent="0" marL="0">
+              <a:lnSpc>
+                <a:spcPts val="1800"/>
+              </a:lnSpc>
+              <a:buNone/>
+            </a:pPr>
+            <a:r>
+              <a:rPr lang="en-US" sz="1300" dirty="0">
+                <a:solidFill>
+                  <a:srgbClr val="6B4A0E"/>
+                </a:solidFill>
+                <a:latin typeface="Calibri" pitchFamily="34" charset="0"/>
+                <a:ea typeface="Calibri" pitchFamily="34" charset="-122"/>
+                <a:cs typeface="Calibri" pitchFamily="34" charset="-120"/>
+              </a:rPr>
+              <a:t>and the practices that get it working describe FinOps as partnering with engineers, not policing them. Give teams the cost of a choice at the moment they make it; nobody has to become a pricing expert.</a:t>
+            </a:r>
+            <a:endParaRPr lang="en-US" sz="1300" dirty="0"/>
           </a:p>
         </p:txBody>
       </p:sp>
@@ -14196,7 +14108,7 @@
                 <a:ea typeface="Calibri" pitchFamily="34" charset="-122"/>
                 <a:cs typeface="Calibri" pitchFamily="34" charset="-120"/>
               </a:rPr>
-              <a:t>THE PATH FORWARD</a:t>
+              <a:t>GOVERNANCE — PUTTING IT TOGETHER</a:t>
             </a:r>
             <a:endParaRPr lang="en-US" sz="1100" dirty="0"/>
           </a:p>
@@ -14235,7 +14147,7 @@
                 <a:ea typeface="Cambria" pitchFamily="34" charset="-122"/>
                 <a:cs typeface="Cambria" pitchFamily="34" charset="-120"/>
               </a:rPr>
-              <a:t>Where to start</a:t>
+              <a:t>Nobody should learn it from the invoice</a:t>
             </a:r>
             <a:endParaRPr lang="en-US" sz="3100" dirty="0"/>
           </a:p>
@@ -14243,876 +14155,1145 @@
       </p:sp>
       <p:sp>
         <p:nvSpPr>
-          <p:cNvPr id="4" name="Shape 2"/>
-          <p:cNvSpPr/>
-          <p:nvPr/>
-        </p:nvSpPr>
-        <p:spPr>
-          <a:xfrm>
-            <a:off x="548640" y="1783080"/>
-            <a:ext cx="2587752" cy="2423160"/>
+          <p:cNvPr id="4" name="Text 2"/>
+          <p:cNvSpPr/>
+          <p:nvPr/>
+        </p:nvSpPr>
+        <p:spPr>
+          <a:xfrm>
+            <a:off x="548640" y="1536192"/>
+            <a:ext cx="10607040" cy="365760"/>
+          </a:xfrm>
+          <a:prstGeom prst="rect">
+            <a:avLst/>
+          </a:prstGeom>
+          <a:noFill/>
+          <a:ln/>
+        </p:spPr>
+        <p:txBody>
+          <a:bodyPr wrap="square" lIns="0" tIns="0" rIns="0" bIns="0" rtlCol="0" anchor="ctr"/>
+          <a:lstStyle/>
+          <a:p>
+            <a:pPr indent="0" marL="0">
+              <a:buNone/>
+            </a:pPr>
+            <a:r>
+              <a:rPr lang="en-US" sz="1500" dirty="0">
+                <a:solidFill>
+                  <a:srgbClr val="5C6675"/>
+                </a:solidFill>
+                <a:latin typeface="Calibri" pitchFamily="34" charset="0"/>
+                <a:ea typeface="Calibri" pitchFamily="34" charset="-122"/>
+                <a:cs typeface="Calibri" pitchFamily="34" charset="-120"/>
+              </a:rPr>
+              <a:t>The same overrun, found at four different moments. Only the first three leave you anything to do about it.</a:t>
+            </a:r>
+            <a:endParaRPr lang="en-US" sz="1500" dirty="0"/>
+          </a:p>
+        </p:txBody>
+      </p:sp>
+      <p:sp>
+        <p:nvSpPr>
+          <p:cNvPr id="5" name="Shape 3"/>
+          <p:cNvSpPr/>
+          <p:nvPr/>
+        </p:nvSpPr>
+        <p:spPr>
+          <a:xfrm>
+            <a:off x="1737360" y="3127248"/>
+            <a:ext cx="8714232" cy="45720"/>
           </a:xfrm>
           <a:prstGeom prst="roundRect">
             <a:avLst>
-              <a:gd name="adj" fmla="val 3396"/>
+              <a:gd name="adj" fmla="val 40000"/>
             </a:avLst>
           </a:prstGeom>
           <a:solidFill>
+            <a:srgbClr val="DFE4EA"/>
+          </a:solidFill>
+          <a:ln/>
+        </p:spPr>
+      </p:sp>
+      <p:sp>
+        <p:nvSpPr>
+          <p:cNvPr id="6" name="Text 4"/>
+          <p:cNvSpPr/>
+          <p:nvPr/>
+        </p:nvSpPr>
+        <p:spPr>
+          <a:xfrm>
+            <a:off x="548640" y="2212848"/>
+            <a:ext cx="2377440" cy="310896"/>
+          </a:xfrm>
+          <a:prstGeom prst="rect">
+            <a:avLst/>
+          </a:prstGeom>
+          <a:noFill/>
+          <a:ln/>
+        </p:spPr>
+        <p:txBody>
+          <a:bodyPr wrap="square" lIns="0" tIns="0" rIns="0" bIns="0" rtlCol="0" anchor="ctr"/>
+          <a:lstStyle/>
+          <a:p>
+            <a:pPr algn="ctr" indent="0" marL="0">
+              <a:buNone/>
+            </a:pPr>
+            <a:r>
+              <a:rPr lang="en-US" sz="1400" b="1" dirty="0">
+                <a:solidFill>
+                  <a:srgbClr val="1B2430"/>
+                </a:solidFill>
+                <a:latin typeface="Calibri" pitchFamily="34" charset="0"/>
+                <a:ea typeface="Calibri" pitchFamily="34" charset="-122"/>
+                <a:cs typeface="Calibri" pitchFamily="34" charset="-120"/>
+              </a:rPr>
+              <a:t>Usage burn alert</a:t>
+            </a:r>
+            <a:endParaRPr lang="en-US" sz="1400" dirty="0"/>
+          </a:p>
+        </p:txBody>
+      </p:sp>
+      <p:sp>
+        <p:nvSpPr>
+          <p:cNvPr id="7" name="Text 5"/>
+          <p:cNvSpPr/>
+          <p:nvPr/>
+        </p:nvSpPr>
+        <p:spPr>
+          <a:xfrm>
+            <a:off x="548640" y="2542032"/>
+            <a:ext cx="2377440" cy="292608"/>
+          </a:xfrm>
+          <a:prstGeom prst="rect">
+            <a:avLst/>
+          </a:prstGeom>
+          <a:noFill/>
+          <a:ln/>
+        </p:spPr>
+        <p:txBody>
+          <a:bodyPr wrap="square" lIns="0" tIns="0" rIns="0" bIns="0" rtlCol="0" anchor="ctr"/>
+          <a:lstStyle/>
+          <a:p>
+            <a:pPr algn="ctr" indent="0" marL="0">
+              <a:buNone/>
+            </a:pPr>
+            <a:r>
+              <a:rPr lang="en-US" sz="1250" b="1" spc="60" kern="0" dirty="0">
+                <a:solidFill>
+                  <a:srgbClr val="B87B18"/>
+                </a:solidFill>
+                <a:latin typeface="Calibri" pitchFamily="34" charset="0"/>
+                <a:ea typeface="Calibri" pitchFamily="34" charset="-122"/>
+                <a:cs typeface="Calibri" pitchFamily="34" charset="-120"/>
+              </a:rPr>
+              <a:t>~10 minutes</a:t>
+            </a:r>
+            <a:endParaRPr lang="en-US" sz="1250" dirty="0"/>
+          </a:p>
+        </p:txBody>
+      </p:sp>
+      <p:sp>
+        <p:nvSpPr>
+          <p:cNvPr id="8" name="Shape 6"/>
+          <p:cNvSpPr/>
+          <p:nvPr/>
+        </p:nvSpPr>
+        <p:spPr>
+          <a:xfrm>
+            <a:off x="1618488" y="3031236"/>
+            <a:ext cx="237744" cy="237744"/>
+          </a:xfrm>
+          <a:prstGeom prst="ellipse">
+            <a:avLst/>
+          </a:prstGeom>
+          <a:solidFill>
+            <a:srgbClr val="E39B2C"/>
+          </a:solidFill>
+          <a:ln w="25400">
+            <a:solidFill>
+              <a:srgbClr val="FFFFFF"/>
+            </a:solidFill>
+            <a:prstDash val="solid"/>
+          </a:ln>
+        </p:spPr>
+      </p:sp>
+      <p:sp>
+        <p:nvSpPr>
+          <p:cNvPr id="9" name="Text 7"/>
+          <p:cNvSpPr/>
+          <p:nvPr/>
+        </p:nvSpPr>
+        <p:spPr>
+          <a:xfrm>
+            <a:off x="548640" y="3401568"/>
+            <a:ext cx="2377440" cy="566928"/>
+          </a:xfrm>
+          <a:prstGeom prst="rect">
+            <a:avLst/>
+          </a:prstGeom>
+          <a:noFill/>
+          <a:ln/>
+        </p:spPr>
+        <p:txBody>
+          <a:bodyPr wrap="square" lIns="0" tIns="0" rIns="0" bIns="0" rtlCol="0" anchor="t"/>
+          <a:lstStyle/>
+          <a:p>
+            <a:pPr algn="ctr" indent="0" marL="0">
+              <a:lnSpc>
+                <a:spcPts val="1600"/>
+              </a:lnSpc>
+              <a:buNone/>
+            </a:pPr>
+            <a:r>
+              <a:rPr lang="en-US" sz="1200" dirty="0">
+                <a:solidFill>
+                  <a:srgbClr val="5C6675"/>
+                </a:solidFill>
+                <a:latin typeface="Calibri" pitchFamily="34" charset="0"/>
+                <a:ea typeface="Calibri" pitchFamily="34" charset="-122"/>
+                <a:cs typeface="Calibri" pitchFamily="34" charset="-120"/>
+              </a:rPr>
+              <a:t>Throttle it, or confirm it was intended.</a:t>
+            </a:r>
+            <a:endParaRPr lang="en-US" sz="1200" dirty="0"/>
+          </a:p>
+        </p:txBody>
+      </p:sp>
+      <p:sp>
+        <p:nvSpPr>
+          <p:cNvPr id="10" name="Text 8"/>
+          <p:cNvSpPr/>
+          <p:nvPr/>
+        </p:nvSpPr>
+        <p:spPr>
+          <a:xfrm>
+            <a:off x="3566160" y="2212848"/>
+            <a:ext cx="2377440" cy="310896"/>
+          </a:xfrm>
+          <a:prstGeom prst="rect">
+            <a:avLst/>
+          </a:prstGeom>
+          <a:noFill/>
+          <a:ln/>
+        </p:spPr>
+        <p:txBody>
+          <a:bodyPr wrap="square" lIns="0" tIns="0" rIns="0" bIns="0" rtlCol="0" anchor="ctr"/>
+          <a:lstStyle/>
+          <a:p>
+            <a:pPr algn="ctr" indent="0" marL="0">
+              <a:buNone/>
+            </a:pPr>
+            <a:r>
+              <a:rPr lang="en-US" sz="1400" b="1" dirty="0">
+                <a:solidFill>
+                  <a:srgbClr val="1B2430"/>
+                </a:solidFill>
+                <a:latin typeface="Calibri" pitchFamily="34" charset="0"/>
+                <a:ea typeface="Calibri" pitchFamily="34" charset="-122"/>
+                <a:cs typeface="Calibri" pitchFamily="34" charset="-120"/>
+              </a:rPr>
+              <a:t>Daily spend threshold</a:t>
+            </a:r>
+            <a:endParaRPr lang="en-US" sz="1400" dirty="0"/>
+          </a:p>
+        </p:txBody>
+      </p:sp>
+      <p:sp>
+        <p:nvSpPr>
+          <p:cNvPr id="11" name="Text 9"/>
+          <p:cNvSpPr/>
+          <p:nvPr/>
+        </p:nvSpPr>
+        <p:spPr>
+          <a:xfrm>
+            <a:off x="3566160" y="2542032"/>
+            <a:ext cx="2377440" cy="292608"/>
+          </a:xfrm>
+          <a:prstGeom prst="rect">
+            <a:avLst/>
+          </a:prstGeom>
+          <a:noFill/>
+          <a:ln/>
+        </p:spPr>
+        <p:txBody>
+          <a:bodyPr wrap="square" lIns="0" tIns="0" rIns="0" bIns="0" rtlCol="0" anchor="ctr"/>
+          <a:lstStyle/>
+          <a:p>
+            <a:pPr algn="ctr" indent="0" marL="0">
+              <a:buNone/>
+            </a:pPr>
+            <a:r>
+              <a:rPr lang="en-US" sz="1250" b="1" spc="60" kern="0" dirty="0">
+                <a:solidFill>
+                  <a:srgbClr val="1F6B5C"/>
+                </a:solidFill>
+                <a:latin typeface="Calibri" pitchFamily="34" charset="0"/>
+                <a:ea typeface="Calibri" pitchFamily="34" charset="-122"/>
+                <a:cs typeface="Calibri" pitchFamily="34" charset="-120"/>
+              </a:rPr>
+              <a:t>next morning</a:t>
+            </a:r>
+            <a:endParaRPr lang="en-US" sz="1250" dirty="0"/>
+          </a:p>
+        </p:txBody>
+      </p:sp>
+      <p:sp>
+        <p:nvSpPr>
+          <p:cNvPr id="12" name="Shape 10"/>
+          <p:cNvSpPr/>
+          <p:nvPr/>
+        </p:nvSpPr>
+        <p:spPr>
+          <a:xfrm>
+            <a:off x="4636008" y="3031236"/>
+            <a:ext cx="237744" cy="237744"/>
+          </a:xfrm>
+          <a:prstGeom prst="ellipse">
+            <a:avLst/>
+          </a:prstGeom>
+          <a:solidFill>
+            <a:srgbClr val="2E8B7A"/>
+          </a:solidFill>
+          <a:ln w="25400">
+            <a:solidFill>
+              <a:srgbClr val="FFFFFF"/>
+            </a:solidFill>
+            <a:prstDash val="solid"/>
+          </a:ln>
+        </p:spPr>
+      </p:sp>
+      <p:sp>
+        <p:nvSpPr>
+          <p:cNvPr id="13" name="Text 11"/>
+          <p:cNvSpPr/>
+          <p:nvPr/>
+        </p:nvSpPr>
+        <p:spPr>
+          <a:xfrm>
+            <a:off x="3566160" y="3401568"/>
+            <a:ext cx="2377440" cy="566928"/>
+          </a:xfrm>
+          <a:prstGeom prst="rect">
+            <a:avLst/>
+          </a:prstGeom>
+          <a:noFill/>
+          <a:ln/>
+        </p:spPr>
+        <p:txBody>
+          <a:bodyPr wrap="square" lIns="0" tIns="0" rIns="0" bIns="0" rtlCol="0" anchor="t"/>
+          <a:lstStyle/>
+          <a:p>
+            <a:pPr algn="ctr" indent="0" marL="0">
+              <a:lnSpc>
+                <a:spcPts val="1600"/>
+              </a:lnSpc>
+              <a:buNone/>
+            </a:pPr>
+            <a:r>
+              <a:rPr lang="en-US" sz="1200" dirty="0">
+                <a:solidFill>
+                  <a:srgbClr val="5C6675"/>
+                </a:solidFill>
+                <a:latin typeface="Calibri" pitchFamily="34" charset="0"/>
+                <a:ea typeface="Calibri" pitchFamily="34" charset="-122"/>
+                <a:cs typeface="Calibri" pitchFamily="34" charset="-120"/>
+              </a:rPr>
+              <a:t>One team, one number, one owner to ask.</a:t>
+            </a:r>
+            <a:endParaRPr lang="en-US" sz="1200" dirty="0"/>
+          </a:p>
+        </p:txBody>
+      </p:sp>
+      <p:sp>
+        <p:nvSpPr>
+          <p:cNvPr id="14" name="Text 12"/>
+          <p:cNvSpPr/>
+          <p:nvPr/>
+        </p:nvSpPr>
+        <p:spPr>
+          <a:xfrm>
+            <a:off x="6583680" y="2212848"/>
+            <a:ext cx="2377440" cy="310896"/>
+          </a:xfrm>
+          <a:prstGeom prst="rect">
+            <a:avLst/>
+          </a:prstGeom>
+          <a:noFill/>
+          <a:ln/>
+        </p:spPr>
+        <p:txBody>
+          <a:bodyPr wrap="square" lIns="0" tIns="0" rIns="0" bIns="0" rtlCol="0" anchor="ctr"/>
+          <a:lstStyle/>
+          <a:p>
+            <a:pPr algn="ctr" indent="0" marL="0">
+              <a:buNone/>
+            </a:pPr>
+            <a:r>
+              <a:rPr lang="en-US" sz="1400" b="1" dirty="0">
+                <a:solidFill>
+                  <a:srgbClr val="1B2430"/>
+                </a:solidFill>
+                <a:latin typeface="Calibri" pitchFamily="34" charset="0"/>
+                <a:ea typeface="Calibri" pitchFamily="34" charset="-122"/>
+                <a:cs typeface="Calibri" pitchFamily="34" charset="-120"/>
+              </a:rPr>
+              <a:t>Forecast overrun</a:t>
+            </a:r>
+            <a:endParaRPr lang="en-US" sz="1400" dirty="0"/>
+          </a:p>
+        </p:txBody>
+      </p:sp>
+      <p:sp>
+        <p:nvSpPr>
+          <p:cNvPr id="15" name="Text 13"/>
+          <p:cNvSpPr/>
+          <p:nvPr/>
+        </p:nvSpPr>
+        <p:spPr>
+          <a:xfrm>
+            <a:off x="6583680" y="2542032"/>
+            <a:ext cx="2377440" cy="292608"/>
+          </a:xfrm>
+          <a:prstGeom prst="rect">
+            <a:avLst/>
+          </a:prstGeom>
+          <a:noFill/>
+          <a:ln/>
+        </p:spPr>
+        <p:txBody>
+          <a:bodyPr wrap="square" lIns="0" tIns="0" rIns="0" bIns="0" rtlCol="0" anchor="ctr"/>
+          <a:lstStyle/>
+          <a:p>
+            <a:pPr algn="ctr" indent="0" marL="0">
+              <a:buNone/>
+            </a:pPr>
+            <a:r>
+              <a:rPr lang="en-US" sz="1250" b="1" spc="60" kern="0" dirty="0">
+                <a:solidFill>
+                  <a:srgbClr val="1F6B5C"/>
+                </a:solidFill>
+                <a:latin typeface="Calibri" pitchFamily="34" charset="0"/>
+                <a:ea typeface="Calibri" pitchFamily="34" charset="-122"/>
+                <a:cs typeface="Calibri" pitchFamily="34" charset="-120"/>
+              </a:rPr>
+              <a:t>~2 weeks out</a:t>
+            </a:r>
+            <a:endParaRPr lang="en-US" sz="1250" dirty="0"/>
+          </a:p>
+        </p:txBody>
+      </p:sp>
+      <p:sp>
+        <p:nvSpPr>
+          <p:cNvPr id="16" name="Shape 14"/>
+          <p:cNvSpPr/>
+          <p:nvPr/>
+        </p:nvSpPr>
+        <p:spPr>
+          <a:xfrm>
+            <a:off x="7653528" y="3031236"/>
+            <a:ext cx="237744" cy="237744"/>
+          </a:xfrm>
+          <a:prstGeom prst="ellipse">
+            <a:avLst/>
+          </a:prstGeom>
+          <a:solidFill>
+            <a:srgbClr val="2E8B7A"/>
+          </a:solidFill>
+          <a:ln w="25400">
+            <a:solidFill>
+              <a:srgbClr val="FFFFFF"/>
+            </a:solidFill>
+            <a:prstDash val="solid"/>
+          </a:ln>
+        </p:spPr>
+      </p:sp>
+      <p:sp>
+        <p:nvSpPr>
+          <p:cNvPr id="17" name="Text 15"/>
+          <p:cNvSpPr/>
+          <p:nvPr/>
+        </p:nvSpPr>
+        <p:spPr>
+          <a:xfrm>
+            <a:off x="6583680" y="3401568"/>
+            <a:ext cx="2377440" cy="566928"/>
+          </a:xfrm>
+          <a:prstGeom prst="rect">
+            <a:avLst/>
+          </a:prstGeom>
+          <a:noFill/>
+          <a:ln/>
+        </p:spPr>
+        <p:txBody>
+          <a:bodyPr wrap="square" lIns="0" tIns="0" rIns="0" bIns="0" rtlCol="0" anchor="t"/>
+          <a:lstStyle/>
+          <a:p>
+            <a:pPr algn="ctr" indent="0" marL="0">
+              <a:lnSpc>
+                <a:spcPts val="1600"/>
+              </a:lnSpc>
+              <a:buNone/>
+            </a:pPr>
+            <a:r>
+              <a:rPr lang="en-US" sz="1200" dirty="0">
+                <a:solidFill>
+                  <a:srgbClr val="5C6675"/>
+                </a:solidFill>
+                <a:latin typeface="Calibri" pitchFamily="34" charset="0"/>
+                <a:ea typeface="Calibri" pitchFamily="34" charset="-122"/>
+                <a:cs typeface="Calibri" pitchFamily="34" charset="-120"/>
+              </a:rPr>
+              <a:t>Still time to change the month's outcome.</a:t>
+            </a:r>
+            <a:endParaRPr lang="en-US" sz="1200" dirty="0"/>
+          </a:p>
+        </p:txBody>
+      </p:sp>
+      <p:sp>
+        <p:nvSpPr>
+          <p:cNvPr id="18" name="Text 16"/>
+          <p:cNvSpPr/>
+          <p:nvPr/>
+        </p:nvSpPr>
+        <p:spPr>
+          <a:xfrm>
+            <a:off x="9262872" y="2212848"/>
+            <a:ext cx="2377440" cy="310896"/>
+          </a:xfrm>
+          <a:prstGeom prst="rect">
+            <a:avLst/>
+          </a:prstGeom>
+          <a:noFill/>
+          <a:ln/>
+        </p:spPr>
+        <p:txBody>
+          <a:bodyPr wrap="square" lIns="0" tIns="0" rIns="0" bIns="0" rtlCol="0" anchor="ctr"/>
+          <a:lstStyle/>
+          <a:p>
+            <a:pPr algn="ctr" indent="0" marL="0">
+              <a:buNone/>
+            </a:pPr>
+            <a:r>
+              <a:rPr lang="en-US" sz="1400" b="1" dirty="0">
+                <a:solidFill>
+                  <a:srgbClr val="5C6675"/>
+                </a:solidFill>
+                <a:latin typeface="Calibri" pitchFamily="34" charset="0"/>
+                <a:ea typeface="Calibri" pitchFamily="34" charset="-122"/>
+                <a:cs typeface="Calibri" pitchFamily="34" charset="-120"/>
+              </a:rPr>
+              <a:t>The invoice</a:t>
+            </a:r>
+            <a:endParaRPr lang="en-US" sz="1400" dirty="0"/>
+          </a:p>
+        </p:txBody>
+      </p:sp>
+      <p:sp>
+        <p:nvSpPr>
+          <p:cNvPr id="19" name="Text 17"/>
+          <p:cNvSpPr/>
+          <p:nvPr/>
+        </p:nvSpPr>
+        <p:spPr>
+          <a:xfrm>
+            <a:off x="9262872" y="2542032"/>
+            <a:ext cx="2377440" cy="292608"/>
+          </a:xfrm>
+          <a:prstGeom prst="rect">
+            <a:avLst/>
+          </a:prstGeom>
+          <a:noFill/>
+          <a:ln/>
+        </p:spPr>
+        <p:txBody>
+          <a:bodyPr wrap="square" lIns="0" tIns="0" rIns="0" bIns="0" rtlCol="0" anchor="ctr"/>
+          <a:lstStyle/>
+          <a:p>
+            <a:pPr algn="ctr" indent="0" marL="0">
+              <a:buNone/>
+            </a:pPr>
+            <a:r>
+              <a:rPr lang="en-US" sz="1250" b="1" spc="60" kern="0" dirty="0">
+                <a:solidFill>
+                  <a:srgbClr val="5C6675"/>
+                </a:solidFill>
+                <a:latin typeface="Calibri" pitchFamily="34" charset="0"/>
+                <a:ea typeface="Calibri" pitchFamily="34" charset="-122"/>
+                <a:cs typeface="Calibri" pitchFamily="34" charset="-120"/>
+              </a:rPr>
+              <a:t>30–45 days later</a:t>
+            </a:r>
+            <a:endParaRPr lang="en-US" sz="1250" dirty="0"/>
+          </a:p>
+        </p:txBody>
+      </p:sp>
+      <p:sp>
+        <p:nvSpPr>
+          <p:cNvPr id="20" name="Shape 18"/>
+          <p:cNvSpPr/>
+          <p:nvPr/>
+        </p:nvSpPr>
+        <p:spPr>
+          <a:xfrm>
+            <a:off x="10332720" y="3031236"/>
+            <a:ext cx="237744" cy="237744"/>
+          </a:xfrm>
+          <a:prstGeom prst="ellipse">
+            <a:avLst/>
+          </a:prstGeom>
+          <a:solidFill>
+            <a:srgbClr val="AEB8C4"/>
+          </a:solidFill>
+          <a:ln w="25400">
+            <a:solidFill>
+              <a:srgbClr val="FFFFFF"/>
+            </a:solidFill>
+            <a:prstDash val="solid"/>
+          </a:ln>
+        </p:spPr>
+      </p:sp>
+      <p:sp>
+        <p:nvSpPr>
+          <p:cNvPr id="21" name="Text 19"/>
+          <p:cNvSpPr/>
+          <p:nvPr/>
+        </p:nvSpPr>
+        <p:spPr>
+          <a:xfrm>
+            <a:off x="9262872" y="3401568"/>
+            <a:ext cx="2377440" cy="566928"/>
+          </a:xfrm>
+          <a:prstGeom prst="rect">
+            <a:avLst/>
+          </a:prstGeom>
+          <a:noFill/>
+          <a:ln/>
+        </p:spPr>
+        <p:txBody>
+          <a:bodyPr wrap="square" lIns="0" tIns="0" rIns="0" bIns="0" rtlCol="0" anchor="t"/>
+          <a:lstStyle/>
+          <a:p>
+            <a:pPr algn="ctr" indent="0" marL="0">
+              <a:lnSpc>
+                <a:spcPts val="1600"/>
+              </a:lnSpc>
+              <a:buNone/>
+            </a:pPr>
+            <a:r>
+              <a:rPr lang="en-US" sz="1200" dirty="0">
+                <a:solidFill>
+                  <a:srgbClr val="5C6675"/>
+                </a:solidFill>
+                <a:latin typeface="Calibri" pitchFamily="34" charset="0"/>
+                <a:ea typeface="Calibri" pitchFamily="34" charset="-122"/>
+                <a:cs typeface="Calibri" pitchFamily="34" charset="-120"/>
+              </a:rPr>
+              <a:t>Nothing left to decide. Only to explain.</a:t>
+            </a:r>
+            <a:endParaRPr lang="en-US" sz="1200" dirty="0"/>
+          </a:p>
+        </p:txBody>
+      </p:sp>
+      <p:sp>
+        <p:nvSpPr>
+          <p:cNvPr id="22" name="Shape 20"/>
+          <p:cNvSpPr/>
+          <p:nvPr/>
+        </p:nvSpPr>
+        <p:spPr>
+          <a:xfrm>
+            <a:off x="548640" y="4297680"/>
+            <a:ext cx="6675120" cy="2011680"/>
+          </a:xfrm>
+          <a:prstGeom prst="roundRect">
+            <a:avLst>
+              <a:gd name="adj" fmla="val 4091"/>
+            </a:avLst>
+          </a:prstGeom>
+          <a:solidFill>
+            <a:srgbClr val="F1F3F6"/>
+          </a:solidFill>
+          <a:ln/>
+        </p:spPr>
+      </p:sp>
+      <p:sp>
+        <p:nvSpPr>
+          <p:cNvPr id="23" name="Text 21"/>
+          <p:cNvSpPr/>
+          <p:nvPr/>
+        </p:nvSpPr>
+        <p:spPr>
+          <a:xfrm>
+            <a:off x="877824" y="4443984"/>
+            <a:ext cx="3657600" cy="292608"/>
+          </a:xfrm>
+          <a:prstGeom prst="rect">
+            <a:avLst/>
+          </a:prstGeom>
+          <a:noFill/>
+          <a:ln/>
+        </p:spPr>
+        <p:txBody>
+          <a:bodyPr wrap="square" lIns="0" tIns="0" rIns="0" bIns="0" rtlCol="0" anchor="ctr"/>
+          <a:lstStyle/>
+          <a:p>
+            <a:pPr indent="0" marL="0">
+              <a:buNone/>
+            </a:pPr>
+            <a:r>
+              <a:rPr lang="en-US" sz="1200" b="1" spc="180" kern="0" dirty="0">
+                <a:solidFill>
+                  <a:srgbClr val="5C6675"/>
+                </a:solidFill>
+                <a:latin typeface="Calibri" pitchFamily="34" charset="0"/>
+                <a:ea typeface="Calibri" pitchFamily="34" charset="-122"/>
+                <a:cs typeface="Calibri" pitchFamily="34" charset="-120"/>
+              </a:rPr>
+              <a:t>What has to be true</a:t>
+            </a:r>
+            <a:endParaRPr lang="en-US" sz="1200" dirty="0"/>
+          </a:p>
+        </p:txBody>
+      </p:sp>
+      <p:sp>
+        <p:nvSpPr>
+          <p:cNvPr id="24" name="Shape 22"/>
+          <p:cNvSpPr/>
+          <p:nvPr/>
+        </p:nvSpPr>
+        <p:spPr>
+          <a:xfrm>
+            <a:off x="877824" y="4809744"/>
+            <a:ext cx="274320" cy="274320"/>
+          </a:xfrm>
+          <a:prstGeom prst="ellipse">
+            <a:avLst/>
+          </a:prstGeom>
+          <a:solidFill>
+            <a:srgbClr val="FFFFFF"/>
+          </a:solidFill>
+          <a:ln/>
+        </p:spPr>
+      </p:sp>
+      <p:pic>
+        <p:nvPicPr>
+          <p:cNvPr id="25" name="Image 0" descr="preencoded.png">    </p:cNvPr>
+          <p:cNvPicPr>
+            <a:picLocks noChangeAspect="1"/>
+          </p:cNvPicPr>
+          <p:nvPr/>
+        </p:nvPicPr>
+        <p:blipFill>
+          <a:blip r:embed="rId1"/>
+          <a:stretch>
+            <a:fillRect/>
+          </a:stretch>
+        </p:blipFill>
+        <p:spPr>
+          <a:xfrm>
+            <a:off x="946404" y="4878324"/>
+            <a:ext cx="137160" cy="137160"/>
+          </a:xfrm>
+          <a:prstGeom prst="rect">
+            <a:avLst/>
+          </a:prstGeom>
+        </p:spPr>
+      </p:pic>
+      <p:sp>
+        <p:nvSpPr>
+          <p:cNvPr id="26" name="Text 23"/>
+          <p:cNvSpPr/>
+          <p:nvPr/>
+        </p:nvSpPr>
+        <p:spPr>
+          <a:xfrm>
+            <a:off x="1298448" y="4754880"/>
+            <a:ext cx="5669280" cy="384048"/>
+          </a:xfrm>
+          <a:prstGeom prst="rect">
+            <a:avLst/>
+          </a:prstGeom>
+          <a:noFill/>
+          <a:ln/>
+        </p:spPr>
+        <p:txBody>
+          <a:bodyPr wrap="square" lIns="0" tIns="0" rIns="0" bIns="0" rtlCol="0" anchor="ctr"/>
+          <a:lstStyle/>
+          <a:p>
+            <a:pPr indent="0" marL="0">
+              <a:buNone/>
+            </a:pPr>
+            <a:r>
+              <a:rPr lang="en-US" sz="1300" dirty="0">
+                <a:solidFill>
+                  <a:srgbClr val="1B2430"/>
+                </a:solidFill>
+                <a:latin typeface="Calibri" pitchFamily="34" charset="0"/>
+                <a:ea typeface="Calibri" pitchFamily="34" charset="-122"/>
+                <a:cs typeface="Calibri" pitchFamily="34" charset="-120"/>
+              </a:rPr>
+              <a:t>Protective alerts run on usage data, not on billing data</a:t>
+            </a:r>
+            <a:endParaRPr lang="en-US" sz="1300" dirty="0"/>
+          </a:p>
+        </p:txBody>
+      </p:sp>
+      <p:sp>
+        <p:nvSpPr>
+          <p:cNvPr id="27" name="Shape 24"/>
+          <p:cNvSpPr/>
+          <p:nvPr/>
+        </p:nvSpPr>
+        <p:spPr>
+          <a:xfrm>
+            <a:off x="877824" y="5193792"/>
+            <a:ext cx="274320" cy="274320"/>
+          </a:xfrm>
+          <a:prstGeom prst="ellipse">
+            <a:avLst/>
+          </a:prstGeom>
+          <a:solidFill>
+            <a:srgbClr val="FFFFFF"/>
+          </a:solidFill>
+          <a:ln/>
+        </p:spPr>
+      </p:sp>
+      <p:pic>
+        <p:nvPicPr>
+          <p:cNvPr id="28" name="Image 1" descr="preencoded.png">    </p:cNvPr>
+          <p:cNvPicPr>
+            <a:picLocks noChangeAspect="1"/>
+          </p:cNvPicPr>
+          <p:nvPr/>
+        </p:nvPicPr>
+        <p:blipFill>
+          <a:blip r:embed="rId2"/>
+          <a:stretch>
+            <a:fillRect/>
+          </a:stretch>
+        </p:blipFill>
+        <p:spPr>
+          <a:xfrm>
+            <a:off x="946404" y="5262372"/>
+            <a:ext cx="137160" cy="137160"/>
+          </a:xfrm>
+          <a:prstGeom prst="rect">
+            <a:avLst/>
+          </a:prstGeom>
+        </p:spPr>
+      </p:pic>
+      <p:sp>
+        <p:nvSpPr>
+          <p:cNvPr id="29" name="Text 25"/>
+          <p:cNvSpPr/>
+          <p:nvPr/>
+        </p:nvSpPr>
+        <p:spPr>
+          <a:xfrm>
+            <a:off x="1298448" y="5138928"/>
+            <a:ext cx="5669280" cy="384048"/>
+          </a:xfrm>
+          <a:prstGeom prst="rect">
+            <a:avLst/>
+          </a:prstGeom>
+          <a:noFill/>
+          <a:ln/>
+        </p:spPr>
+        <p:txBody>
+          <a:bodyPr wrap="square" lIns="0" tIns="0" rIns="0" bIns="0" rtlCol="0" anchor="ctr"/>
+          <a:lstStyle/>
+          <a:p>
+            <a:pPr indent="0" marL="0">
+              <a:buNone/>
+            </a:pPr>
+            <a:r>
+              <a:rPr lang="en-US" sz="1300" dirty="0">
+                <a:solidFill>
+                  <a:srgbClr val="1B2430"/>
+                </a:solidFill>
+                <a:latin typeface="Calibri" pitchFamily="34" charset="0"/>
+                <a:ea typeface="Calibri" pitchFamily="34" charset="-122"/>
+                <a:cs typeface="Calibri" pitchFamily="34" charset="-120"/>
+              </a:rPr>
+              <a:t>Every alert has a named owner to route to</a:t>
+            </a:r>
+            <a:endParaRPr lang="en-US" sz="1300" dirty="0"/>
+          </a:p>
+        </p:txBody>
+      </p:sp>
+      <p:sp>
+        <p:nvSpPr>
+          <p:cNvPr id="30" name="Shape 26"/>
+          <p:cNvSpPr/>
+          <p:nvPr/>
+        </p:nvSpPr>
+        <p:spPr>
+          <a:xfrm>
+            <a:off x="877824" y="5577840"/>
+            <a:ext cx="274320" cy="274320"/>
+          </a:xfrm>
+          <a:prstGeom prst="ellipse">
+            <a:avLst/>
+          </a:prstGeom>
+          <a:solidFill>
+            <a:srgbClr val="FFFFFF"/>
+          </a:solidFill>
+          <a:ln/>
+        </p:spPr>
+      </p:sp>
+      <p:pic>
+        <p:nvPicPr>
+          <p:cNvPr id="31" name="Image 2" descr="preencoded.png">    </p:cNvPr>
+          <p:cNvPicPr>
+            <a:picLocks noChangeAspect="1"/>
+          </p:cNvPicPr>
+          <p:nvPr/>
+        </p:nvPicPr>
+        <p:blipFill>
+          <a:blip r:embed="rId3"/>
+          <a:stretch>
+            <a:fillRect/>
+          </a:stretch>
+        </p:blipFill>
+        <p:spPr>
+          <a:xfrm>
+            <a:off x="946404" y="5646420"/>
+            <a:ext cx="137160" cy="137160"/>
+          </a:xfrm>
+          <a:prstGeom prst="rect">
+            <a:avLst/>
+          </a:prstGeom>
+        </p:spPr>
+      </p:pic>
+      <p:sp>
+        <p:nvSpPr>
+          <p:cNvPr id="32" name="Text 27"/>
+          <p:cNvSpPr/>
+          <p:nvPr/>
+        </p:nvSpPr>
+        <p:spPr>
+          <a:xfrm>
+            <a:off x="1298448" y="5522976"/>
+            <a:ext cx="5669280" cy="384048"/>
+          </a:xfrm>
+          <a:prstGeom prst="rect">
+            <a:avLst/>
+          </a:prstGeom>
+          <a:noFill/>
+          <a:ln/>
+        </p:spPr>
+        <p:txBody>
+          <a:bodyPr wrap="square" lIns="0" tIns="0" rIns="0" bIns="0" rtlCol="0" anchor="ctr"/>
+          <a:lstStyle/>
+          <a:p>
+            <a:pPr indent="0" marL="0">
+              <a:buNone/>
+            </a:pPr>
+            <a:r>
+              <a:rPr lang="en-US" sz="1300" dirty="0">
+                <a:solidFill>
+                  <a:srgbClr val="1B2430"/>
+                </a:solidFill>
+                <a:latin typeface="Calibri" pitchFamily="34" charset="0"/>
+                <a:ea typeface="Calibri" pitchFamily="34" charset="-122"/>
+                <a:cs typeface="Calibri" pitchFamily="34" charset="-120"/>
+              </a:rPr>
+              <a:t>Budgets are phased, so drift shows up in week one</a:t>
+            </a:r>
+            <a:endParaRPr lang="en-US" sz="1300" dirty="0"/>
+          </a:p>
+        </p:txBody>
+      </p:sp>
+      <p:sp>
+        <p:nvSpPr>
+          <p:cNvPr id="33" name="Shape 28"/>
+          <p:cNvSpPr/>
+          <p:nvPr/>
+        </p:nvSpPr>
+        <p:spPr>
+          <a:xfrm>
+            <a:off x="877824" y="5961888"/>
+            <a:ext cx="274320" cy="274320"/>
+          </a:xfrm>
+          <a:prstGeom prst="ellipse">
+            <a:avLst/>
+          </a:prstGeom>
+          <a:solidFill>
+            <a:srgbClr val="FFFFFF"/>
+          </a:solidFill>
+          <a:ln/>
+        </p:spPr>
+      </p:sp>
+      <p:pic>
+        <p:nvPicPr>
+          <p:cNvPr id="34" name="Image 3" descr="preencoded.png">    </p:cNvPr>
+          <p:cNvPicPr>
+            <a:picLocks noChangeAspect="1"/>
+          </p:cNvPicPr>
+          <p:nvPr/>
+        </p:nvPicPr>
+        <p:blipFill>
+          <a:blip r:embed="rId4"/>
+          <a:stretch>
+            <a:fillRect/>
+          </a:stretch>
+        </p:blipFill>
+        <p:spPr>
+          <a:xfrm>
+            <a:off x="946404" y="6030468"/>
+            <a:ext cx="137160" cy="137160"/>
+          </a:xfrm>
+          <a:prstGeom prst="rect">
+            <a:avLst/>
+          </a:prstGeom>
+        </p:spPr>
+      </p:pic>
+      <p:sp>
+        <p:nvSpPr>
+          <p:cNvPr id="35" name="Text 29"/>
+          <p:cNvSpPr/>
+          <p:nvPr/>
+        </p:nvSpPr>
+        <p:spPr>
+          <a:xfrm>
+            <a:off x="1298448" y="5907024"/>
+            <a:ext cx="5669280" cy="384048"/>
+          </a:xfrm>
+          <a:prstGeom prst="rect">
+            <a:avLst/>
+          </a:prstGeom>
+          <a:noFill/>
+          <a:ln/>
+        </p:spPr>
+        <p:txBody>
+          <a:bodyPr wrap="square" lIns="0" tIns="0" rIns="0" bIns="0" rtlCol="0" anchor="ctr"/>
+          <a:lstStyle/>
+          <a:p>
+            <a:pPr indent="0" marL="0">
+              <a:buNone/>
+            </a:pPr>
+            <a:r>
+              <a:rPr lang="en-US" sz="1300" dirty="0">
+                <a:solidFill>
+                  <a:srgbClr val="1B2430"/>
+                </a:solidFill>
+                <a:latin typeface="Calibri" pitchFamily="34" charset="0"/>
+                <a:ea typeface="Calibri" pitchFamily="34" charset="-122"/>
+                <a:cs typeface="Calibri" pitchFamily="34" charset="-120"/>
+              </a:rPr>
+              <a:t>Quotas cap the worst case while someone investigates</a:t>
+            </a:r>
+            <a:endParaRPr lang="en-US" sz="1300" dirty="0"/>
+          </a:p>
+        </p:txBody>
+      </p:sp>
+      <p:sp>
+        <p:nvSpPr>
+          <p:cNvPr id="36" name="Shape 30"/>
+          <p:cNvSpPr/>
+          <p:nvPr/>
+        </p:nvSpPr>
+        <p:spPr>
+          <a:xfrm>
+            <a:off x="7525512" y="4297680"/>
+            <a:ext cx="4114800" cy="2011680"/>
+          </a:xfrm>
+          <a:prstGeom prst="roundRect">
+            <a:avLst>
+              <a:gd name="adj" fmla="val 4091"/>
+            </a:avLst>
+          </a:prstGeom>
+          <a:solidFill>
             <a:srgbClr val="1F2936"/>
           </a:solidFill>
           <a:ln/>
-        </p:spPr>
-      </p:sp>
-      <p:sp>
-        <p:nvSpPr>
-          <p:cNvPr id="5" name="Text 3"/>
-          <p:cNvSpPr/>
-          <p:nvPr/>
-        </p:nvSpPr>
-        <p:spPr>
-          <a:xfrm>
-            <a:off x="804672" y="1965960"/>
-            <a:ext cx="1097280" cy="502920"/>
-          </a:xfrm>
-          <a:prstGeom prst="rect">
-            <a:avLst/>
-          </a:prstGeom>
-          <a:noFill/>
-          <a:ln/>
-        </p:spPr>
-        <p:txBody>
-          <a:bodyPr wrap="square" lIns="0" tIns="0" rIns="0" bIns="0" rtlCol="0" anchor="ctr"/>
-          <a:lstStyle/>
-          <a:p>
-            <a:pPr indent="0" marL="0">
-              <a:buNone/>
-            </a:pPr>
-            <a:r>
-              <a:rPr lang="en-US" sz="2800" b="1" dirty="0">
+          <a:effectLst>
+            <a:outerShdw sx="100000" sy="100000" kx="0" ky="0" algn="bl" rotWithShape="0" blurRad="127000" dist="25400" dir="5400000">
+              <a:srgbClr val="8C99A8">
+                <a:alpha val="16000"/>
+              </a:srgbClr>
+            </a:outerShdw>
+          </a:effectLst>
+        </p:spPr>
+      </p:sp>
+      <p:sp>
+        <p:nvSpPr>
+          <p:cNvPr id="37" name="Text 31"/>
+          <p:cNvSpPr/>
+          <p:nvPr/>
+        </p:nvSpPr>
+        <p:spPr>
+          <a:xfrm>
+            <a:off x="7818120" y="4462272"/>
+            <a:ext cx="3200400" cy="292608"/>
+          </a:xfrm>
+          <a:prstGeom prst="rect">
+            <a:avLst/>
+          </a:prstGeom>
+          <a:noFill/>
+          <a:ln/>
+        </p:spPr>
+        <p:txBody>
+          <a:bodyPr wrap="square" lIns="0" tIns="0" rIns="0" bIns="0" rtlCol="0" anchor="ctr"/>
+          <a:lstStyle/>
+          <a:p>
+            <a:pPr indent="0" marL="0">
+              <a:buNone/>
+            </a:pPr>
+            <a:r>
+              <a:rPr lang="en-US" sz="1200" b="1" spc="180" kern="0" dirty="0">
                 <a:solidFill>
                   <a:srgbClr val="E39B2C"/>
+                </a:solidFill>
+                <a:latin typeface="Calibri" pitchFamily="34" charset="0"/>
+                <a:ea typeface="Calibri" pitchFamily="34" charset="-122"/>
+                <a:cs typeface="Calibri" pitchFamily="34" charset="-120"/>
+              </a:rPr>
+              <a:t>The point</a:t>
+            </a:r>
+            <a:endParaRPr lang="en-US" sz="1200" dirty="0"/>
+          </a:p>
+        </p:txBody>
+      </p:sp>
+      <p:sp>
+        <p:nvSpPr>
+          <p:cNvPr id="38" name="Text 32"/>
+          <p:cNvSpPr/>
+          <p:nvPr/>
+        </p:nvSpPr>
+        <p:spPr>
+          <a:xfrm>
+            <a:off x="7818120" y="4828032"/>
+            <a:ext cx="3529584" cy="1280160"/>
+          </a:xfrm>
+          <a:prstGeom prst="rect">
+            <a:avLst/>
+          </a:prstGeom>
+          <a:noFill/>
+          <a:ln/>
+        </p:spPr>
+        <p:txBody>
+          <a:bodyPr wrap="square" lIns="0" tIns="0" rIns="0" bIns="0" rtlCol="0" anchor="t"/>
+          <a:lstStyle/>
+          <a:p>
+            <a:pPr indent="0" marL="0">
+              <a:lnSpc>
+                <a:spcPts val="2200"/>
+              </a:lnSpc>
+              <a:buNone/>
+            </a:pPr>
+            <a:r>
+              <a:rPr lang="en-US" sz="1550" i="1" dirty="0">
+                <a:solidFill>
+                  <a:srgbClr val="FFFFFF"/>
                 </a:solidFill>
                 <a:latin typeface="Cambria" pitchFamily="34" charset="0"/>
                 <a:ea typeface="Cambria" pitchFamily="34" charset="-122"/>
                 <a:cs typeface="Cambria" pitchFamily="34" charset="-120"/>
               </a:rPr>
-              <a:t>01</a:t>
-            </a:r>
-            <a:endParaRPr lang="en-US" sz="2800" dirty="0"/>
-          </a:p>
-        </p:txBody>
-      </p:sp>
-      <p:sp>
-        <p:nvSpPr>
-          <p:cNvPr id="6" name="Text 4"/>
-          <p:cNvSpPr/>
-          <p:nvPr/>
-        </p:nvSpPr>
-        <p:spPr>
-          <a:xfrm>
-            <a:off x="786384" y="2523744"/>
-            <a:ext cx="2139696" cy="786384"/>
-          </a:xfrm>
-          <a:prstGeom prst="rect">
-            <a:avLst/>
-          </a:prstGeom>
-          <a:noFill/>
-          <a:ln/>
-        </p:spPr>
-        <p:txBody>
-          <a:bodyPr wrap="square" lIns="0" tIns="0" rIns="0" bIns="0" rtlCol="0" anchor="t"/>
-          <a:lstStyle/>
-          <a:p>
-            <a:pPr indent="0" marL="0">
-              <a:lnSpc>
-                <a:spcPts val="2000"/>
-              </a:lnSpc>
-              <a:buNone/>
-            </a:pPr>
-            <a:r>
-              <a:rPr lang="en-US" sz="1500" b="1" dirty="0">
-                <a:solidFill>
-                  <a:srgbClr val="FFFFFF"/>
-                </a:solidFill>
-                <a:latin typeface="Cambria" pitchFamily="34" charset="0"/>
-                <a:ea typeface="Cambria" pitchFamily="34" charset="-122"/>
-                <a:cs typeface="Cambria" pitchFamily="34" charset="-120"/>
-              </a:rPr>
-              <a:t>Set the tagging standard</a:t>
-            </a:r>
-            <a:endParaRPr lang="en-US" sz="1500" dirty="0"/>
-          </a:p>
-        </p:txBody>
-      </p:sp>
-      <p:sp>
-        <p:nvSpPr>
-          <p:cNvPr id="7" name="Text 5"/>
-          <p:cNvSpPr/>
-          <p:nvPr/>
-        </p:nvSpPr>
-        <p:spPr>
-          <a:xfrm>
-            <a:off x="786384" y="3346704"/>
-            <a:ext cx="2139696" cy="749808"/>
-          </a:xfrm>
-          <a:prstGeom prst="rect">
-            <a:avLst/>
-          </a:prstGeom>
-          <a:noFill/>
-          <a:ln/>
-        </p:spPr>
-        <p:txBody>
-          <a:bodyPr wrap="square" lIns="0" tIns="0" rIns="0" bIns="0" rtlCol="0" anchor="t"/>
-          <a:lstStyle/>
-          <a:p>
-            <a:pPr indent="0" marL="0">
-              <a:lnSpc>
-                <a:spcPts val="1500"/>
-              </a:lnSpc>
-              <a:buNone/>
-            </a:pPr>
-            <a:r>
-              <a:rPr lang="en-US" sz="1200" dirty="0">
-                <a:solidFill>
-                  <a:srgbClr val="9EABBA"/>
-                </a:solidFill>
-                <a:latin typeface="Calibri" pitchFamily="34" charset="0"/>
-                <a:ea typeface="Calibri" pitchFamily="34" charset="-122"/>
-                <a:cs typeface="Calibri" pitchFamily="34" charset="-120"/>
-              </a:rPr>
-              <a:t>Agree a consistent taxonomy before investing in dashboards.</a:t>
-            </a:r>
-            <a:endParaRPr lang="en-US" sz="1200" dirty="0"/>
-          </a:p>
-        </p:txBody>
-      </p:sp>
-      <p:sp>
-        <p:nvSpPr>
-          <p:cNvPr id="8" name="Shape 6"/>
-          <p:cNvSpPr/>
-          <p:nvPr/>
-        </p:nvSpPr>
-        <p:spPr>
-          <a:xfrm>
-            <a:off x="3383280" y="1783080"/>
-            <a:ext cx="2587752" cy="2423160"/>
-          </a:xfrm>
-          <a:prstGeom prst="roundRect">
-            <a:avLst>
-              <a:gd name="adj" fmla="val 3396"/>
-            </a:avLst>
-          </a:prstGeom>
-          <a:solidFill>
-            <a:srgbClr val="F1F3F6"/>
-          </a:solidFill>
-          <a:ln/>
-        </p:spPr>
-      </p:sp>
-      <p:sp>
-        <p:nvSpPr>
-          <p:cNvPr id="9" name="Text 7"/>
-          <p:cNvSpPr/>
-          <p:nvPr/>
-        </p:nvSpPr>
-        <p:spPr>
-          <a:xfrm>
-            <a:off x="3639312" y="1965960"/>
-            <a:ext cx="1097280" cy="502920"/>
-          </a:xfrm>
-          <a:prstGeom prst="rect">
-            <a:avLst/>
-          </a:prstGeom>
-          <a:noFill/>
-          <a:ln/>
-        </p:spPr>
-        <p:txBody>
-          <a:bodyPr wrap="square" lIns="0" tIns="0" rIns="0" bIns="0" rtlCol="0" anchor="ctr"/>
-          <a:lstStyle/>
-          <a:p>
-            <a:pPr indent="0" marL="0">
-              <a:buNone/>
-            </a:pPr>
-            <a:r>
-              <a:rPr lang="en-US" sz="2800" b="1" dirty="0">
-                <a:solidFill>
-                  <a:srgbClr val="B9C2CD"/>
-                </a:solidFill>
-                <a:latin typeface="Cambria" pitchFamily="34" charset="0"/>
-                <a:ea typeface="Cambria" pitchFamily="34" charset="-122"/>
-                <a:cs typeface="Cambria" pitchFamily="34" charset="-120"/>
-              </a:rPr>
-              <a:t>02</a:t>
-            </a:r>
-            <a:endParaRPr lang="en-US" sz="2800" dirty="0"/>
-          </a:p>
-        </p:txBody>
-      </p:sp>
-      <p:sp>
-        <p:nvSpPr>
-          <p:cNvPr id="10" name="Text 8"/>
-          <p:cNvSpPr/>
-          <p:nvPr/>
-        </p:nvSpPr>
-        <p:spPr>
-          <a:xfrm>
-            <a:off x="3621024" y="2523744"/>
-            <a:ext cx="2139696" cy="786384"/>
-          </a:xfrm>
-          <a:prstGeom prst="rect">
-            <a:avLst/>
-          </a:prstGeom>
-          <a:noFill/>
-          <a:ln/>
-        </p:spPr>
-        <p:txBody>
-          <a:bodyPr wrap="square" lIns="0" tIns="0" rIns="0" bIns="0" rtlCol="0" anchor="t"/>
-          <a:lstStyle/>
-          <a:p>
-            <a:pPr indent="0" marL="0">
-              <a:lnSpc>
-                <a:spcPts val="2000"/>
-              </a:lnSpc>
-              <a:buNone/>
-            </a:pPr>
-            <a:r>
-              <a:rPr lang="en-US" sz="1500" b="1" dirty="0">
-                <a:solidFill>
-                  <a:srgbClr val="1B2430"/>
-                </a:solidFill>
-                <a:latin typeface="Cambria" pitchFamily="34" charset="0"/>
-                <a:ea typeface="Cambria" pitchFamily="34" charset="-122"/>
-                <a:cs typeface="Cambria" pitchFamily="34" charset="-120"/>
-              </a:rPr>
-              <a:t>Start with the biggest spend</a:t>
-            </a:r>
-            <a:endParaRPr lang="en-US" sz="1500" dirty="0"/>
-          </a:p>
-        </p:txBody>
-      </p:sp>
-      <p:sp>
-        <p:nvSpPr>
-          <p:cNvPr id="11" name="Text 9"/>
-          <p:cNvSpPr/>
-          <p:nvPr/>
-        </p:nvSpPr>
-        <p:spPr>
-          <a:xfrm>
-            <a:off x="3621024" y="3346704"/>
-            <a:ext cx="2139696" cy="749808"/>
-          </a:xfrm>
-          <a:prstGeom prst="rect">
-            <a:avLst/>
-          </a:prstGeom>
-          <a:noFill/>
-          <a:ln/>
-        </p:spPr>
-        <p:txBody>
-          <a:bodyPr wrap="square" lIns="0" tIns="0" rIns="0" bIns="0" rtlCol="0" anchor="t"/>
-          <a:lstStyle/>
-          <a:p>
-            <a:pPr indent="0" marL="0">
-              <a:lnSpc>
-                <a:spcPts val="1500"/>
-              </a:lnSpc>
-              <a:buNone/>
-            </a:pPr>
-            <a:r>
-              <a:rPr lang="en-US" sz="1200" dirty="0">
-                <a:solidFill>
-                  <a:srgbClr val="5C6675"/>
-                </a:solidFill>
-                <a:latin typeface="Calibri" pitchFamily="34" charset="0"/>
-                <a:ea typeface="Calibri" pitchFamily="34" charset="-122"/>
-                <a:cs typeface="Calibri" pitchFamily="34" charset="-120"/>
-              </a:rPr>
-              <a:t>Attack the largest categories first. Don't chase perfect granularity everywhere.</a:t>
-            </a:r>
-            <a:endParaRPr lang="en-US" sz="1200" dirty="0"/>
-          </a:p>
-        </p:txBody>
-      </p:sp>
-      <p:sp>
-        <p:nvSpPr>
-          <p:cNvPr id="12" name="Shape 10"/>
-          <p:cNvSpPr/>
-          <p:nvPr/>
-        </p:nvSpPr>
-        <p:spPr>
-          <a:xfrm>
-            <a:off x="6217920" y="1783080"/>
-            <a:ext cx="2587752" cy="2423160"/>
-          </a:xfrm>
-          <a:prstGeom prst="roundRect">
-            <a:avLst>
-              <a:gd name="adj" fmla="val 3396"/>
-            </a:avLst>
-          </a:prstGeom>
-          <a:solidFill>
-            <a:srgbClr val="F1F3F6"/>
-          </a:solidFill>
-          <a:ln/>
-        </p:spPr>
-      </p:sp>
-      <p:sp>
-        <p:nvSpPr>
-          <p:cNvPr id="13" name="Text 11"/>
-          <p:cNvSpPr/>
-          <p:nvPr/>
-        </p:nvSpPr>
-        <p:spPr>
-          <a:xfrm>
-            <a:off x="6473952" y="1965960"/>
-            <a:ext cx="1097280" cy="502920"/>
-          </a:xfrm>
-          <a:prstGeom prst="rect">
-            <a:avLst/>
-          </a:prstGeom>
-          <a:noFill/>
-          <a:ln/>
-        </p:spPr>
-        <p:txBody>
-          <a:bodyPr wrap="square" lIns="0" tIns="0" rIns="0" bIns="0" rtlCol="0" anchor="ctr"/>
-          <a:lstStyle/>
-          <a:p>
-            <a:pPr indent="0" marL="0">
-              <a:buNone/>
-            </a:pPr>
-            <a:r>
-              <a:rPr lang="en-US" sz="2800" b="1" dirty="0">
-                <a:solidFill>
-                  <a:srgbClr val="B9C2CD"/>
-                </a:solidFill>
-                <a:latin typeface="Cambria" pitchFamily="34" charset="0"/>
-                <a:ea typeface="Cambria" pitchFamily="34" charset="-122"/>
-                <a:cs typeface="Cambria" pitchFamily="34" charset="-120"/>
-              </a:rPr>
-              <a:t>03</a:t>
-            </a:r>
-            <a:endParaRPr lang="en-US" sz="2800" dirty="0"/>
-          </a:p>
-        </p:txBody>
-      </p:sp>
-      <p:sp>
-        <p:nvSpPr>
-          <p:cNvPr id="14" name="Text 12"/>
-          <p:cNvSpPr/>
-          <p:nvPr/>
-        </p:nvSpPr>
-        <p:spPr>
-          <a:xfrm>
-            <a:off x="6455664" y="2523744"/>
-            <a:ext cx="2139696" cy="786384"/>
-          </a:xfrm>
-          <a:prstGeom prst="rect">
-            <a:avLst/>
-          </a:prstGeom>
-          <a:noFill/>
-          <a:ln/>
-        </p:spPr>
-        <p:txBody>
-          <a:bodyPr wrap="square" lIns="0" tIns="0" rIns="0" bIns="0" rtlCol="0" anchor="t"/>
-          <a:lstStyle/>
-          <a:p>
-            <a:pPr indent="0" marL="0">
-              <a:lnSpc>
-                <a:spcPts val="2000"/>
-              </a:lnSpc>
-              <a:buNone/>
-            </a:pPr>
-            <a:r>
-              <a:rPr lang="en-US" sz="1500" b="1" dirty="0">
-                <a:solidFill>
-                  <a:srgbClr val="1B2430"/>
-                </a:solidFill>
-                <a:latin typeface="Cambria" pitchFamily="34" charset="0"/>
-                <a:ea typeface="Cambria" pitchFamily="34" charset="-122"/>
-                <a:cs typeface="Cambria" pitchFamily="34" charset="-120"/>
-              </a:rPr>
-              <a:t>Get finance and engineering talking</a:t>
-            </a:r>
-            <a:endParaRPr lang="en-US" sz="1500" dirty="0"/>
-          </a:p>
-        </p:txBody>
-      </p:sp>
-      <p:sp>
-        <p:nvSpPr>
-          <p:cNvPr id="15" name="Text 13"/>
-          <p:cNvSpPr/>
-          <p:nvPr/>
-        </p:nvSpPr>
-        <p:spPr>
-          <a:xfrm>
-            <a:off x="6455664" y="3346704"/>
-            <a:ext cx="2139696" cy="749808"/>
-          </a:xfrm>
-          <a:prstGeom prst="rect">
-            <a:avLst/>
-          </a:prstGeom>
-          <a:noFill/>
-          <a:ln/>
-        </p:spPr>
-        <p:txBody>
-          <a:bodyPr wrap="square" lIns="0" tIns="0" rIns="0" bIns="0" rtlCol="0" anchor="t"/>
-          <a:lstStyle/>
-          <a:p>
-            <a:pPr indent="0" marL="0">
-              <a:lnSpc>
-                <a:spcPts val="1500"/>
-              </a:lnSpc>
-              <a:buNone/>
-            </a:pPr>
-            <a:r>
-              <a:rPr lang="en-US" sz="1200" dirty="0">
-                <a:solidFill>
-                  <a:srgbClr val="5C6675"/>
-                </a:solidFill>
-                <a:latin typeface="Calibri" pitchFamily="34" charset="0"/>
-                <a:ea typeface="Calibri" pitchFamily="34" charset="-122"/>
-                <a:cs typeface="Calibri" pitchFamily="34" charset="-120"/>
-              </a:rPr>
-              <a:t>Bring both into the conversation early, not as an afterthought.</a:t>
-            </a:r>
-            <a:endParaRPr lang="en-US" sz="1200" dirty="0"/>
-          </a:p>
-        </p:txBody>
-      </p:sp>
-      <p:sp>
-        <p:nvSpPr>
-          <p:cNvPr id="16" name="Shape 14"/>
-          <p:cNvSpPr/>
-          <p:nvPr/>
-        </p:nvSpPr>
-        <p:spPr>
-          <a:xfrm>
-            <a:off x="9052560" y="1783080"/>
-            <a:ext cx="2587752" cy="2423160"/>
-          </a:xfrm>
-          <a:prstGeom prst="roundRect">
-            <a:avLst>
-              <a:gd name="adj" fmla="val 3396"/>
-            </a:avLst>
-          </a:prstGeom>
-          <a:solidFill>
-            <a:srgbClr val="F1F3F6"/>
-          </a:solidFill>
-          <a:ln/>
-        </p:spPr>
-      </p:sp>
-      <p:sp>
-        <p:nvSpPr>
-          <p:cNvPr id="17" name="Text 15"/>
-          <p:cNvSpPr/>
-          <p:nvPr/>
-        </p:nvSpPr>
-        <p:spPr>
-          <a:xfrm>
-            <a:off x="9308592" y="1965960"/>
-            <a:ext cx="1097280" cy="502920"/>
-          </a:xfrm>
-          <a:prstGeom prst="rect">
-            <a:avLst/>
-          </a:prstGeom>
-          <a:noFill/>
-          <a:ln/>
-        </p:spPr>
-        <p:txBody>
-          <a:bodyPr wrap="square" lIns="0" tIns="0" rIns="0" bIns="0" rtlCol="0" anchor="ctr"/>
-          <a:lstStyle/>
-          <a:p>
-            <a:pPr indent="0" marL="0">
-              <a:buNone/>
-            </a:pPr>
-            <a:r>
-              <a:rPr lang="en-US" sz="2800" b="1" dirty="0">
-                <a:solidFill>
-                  <a:srgbClr val="B9C2CD"/>
-                </a:solidFill>
-                <a:latin typeface="Cambria" pitchFamily="34" charset="0"/>
-                <a:ea typeface="Cambria" pitchFamily="34" charset="-122"/>
-                <a:cs typeface="Cambria" pitchFamily="34" charset="-120"/>
-              </a:rPr>
-              <a:t>04</a:t>
-            </a:r>
-            <a:endParaRPr lang="en-US" sz="2800" dirty="0"/>
-          </a:p>
-        </p:txBody>
-      </p:sp>
-      <p:sp>
-        <p:nvSpPr>
-          <p:cNvPr id="18" name="Text 16"/>
-          <p:cNvSpPr/>
-          <p:nvPr/>
-        </p:nvSpPr>
-        <p:spPr>
-          <a:xfrm>
-            <a:off x="9290304" y="2523744"/>
-            <a:ext cx="2139696" cy="786384"/>
-          </a:xfrm>
-          <a:prstGeom prst="rect">
-            <a:avLst/>
-          </a:prstGeom>
-          <a:noFill/>
-          <a:ln/>
-        </p:spPr>
-        <p:txBody>
-          <a:bodyPr wrap="square" lIns="0" tIns="0" rIns="0" bIns="0" rtlCol="0" anchor="t"/>
-          <a:lstStyle/>
-          <a:p>
-            <a:pPr indent="0" marL="0">
-              <a:lnSpc>
-                <a:spcPts val="2000"/>
-              </a:lnSpc>
-              <a:buNone/>
-            </a:pPr>
-            <a:r>
-              <a:rPr lang="en-US" sz="1500" b="1" dirty="0">
-                <a:solidFill>
-                  <a:srgbClr val="1B2430"/>
-                </a:solidFill>
-                <a:latin typeface="Cambria" pitchFamily="34" charset="0"/>
-                <a:ea typeface="Cambria" pitchFamily="34" charset="-122"/>
-                <a:cs typeface="Cambria" pitchFamily="34" charset="-120"/>
-              </a:rPr>
-              <a:t>Set guardrails early</a:t>
-            </a:r>
-            <a:endParaRPr lang="en-US" sz="1500" dirty="0"/>
-          </a:p>
-        </p:txBody>
-      </p:sp>
-      <p:sp>
-        <p:nvSpPr>
-          <p:cNvPr id="19" name="Text 17"/>
-          <p:cNvSpPr/>
-          <p:nvPr/>
-        </p:nvSpPr>
-        <p:spPr>
-          <a:xfrm>
-            <a:off x="9290304" y="3346704"/>
-            <a:ext cx="2139696" cy="749808"/>
-          </a:xfrm>
-          <a:prstGeom prst="rect">
-            <a:avLst/>
-          </a:prstGeom>
-          <a:noFill/>
-          <a:ln/>
-        </p:spPr>
-        <p:txBody>
-          <a:bodyPr wrap="square" lIns="0" tIns="0" rIns="0" bIns="0" rtlCol="0" anchor="t"/>
-          <a:lstStyle/>
-          <a:p>
-            <a:pPr indent="0" marL="0">
-              <a:lnSpc>
-                <a:spcPts val="1500"/>
-              </a:lnSpc>
-              <a:buNone/>
-            </a:pPr>
-            <a:r>
-              <a:rPr lang="en-US" sz="1200" dirty="0">
-                <a:solidFill>
-                  <a:srgbClr val="5C6675"/>
-                </a:solidFill>
-                <a:latin typeface="Calibri" pitchFamily="34" charset="0"/>
-                <a:ea typeface="Calibri" pitchFamily="34" charset="-122"/>
-                <a:cs typeface="Calibri" pitchFamily="34" charset="-120"/>
-              </a:rPr>
-              <a:t>Owners, budget thresholds and quotas cost little to add — and stop the expensive surprises.</a:t>
-            </a:r>
-            <a:endParaRPr lang="en-US" sz="1200" dirty="0"/>
-          </a:p>
-        </p:txBody>
-      </p:sp>
-      <p:sp>
-        <p:nvSpPr>
-          <p:cNvPr id="20" name="Shape 18"/>
-          <p:cNvSpPr/>
-          <p:nvPr/>
-        </p:nvSpPr>
-        <p:spPr>
-          <a:xfrm>
-            <a:off x="548640" y="4434840"/>
-            <a:ext cx="11091672" cy="1874520"/>
-          </a:xfrm>
-          <a:prstGeom prst="roundRect">
-            <a:avLst>
-              <a:gd name="adj" fmla="val 4390"/>
-            </a:avLst>
-          </a:prstGeom>
-          <a:solidFill>
-            <a:srgbClr val="F1F3F6"/>
-          </a:solidFill>
-          <a:ln/>
-        </p:spPr>
-      </p:sp>
-      <p:sp>
-        <p:nvSpPr>
-          <p:cNvPr id="21" name="Text 19"/>
-          <p:cNvSpPr/>
-          <p:nvPr/>
-        </p:nvSpPr>
-        <p:spPr>
-          <a:xfrm>
-            <a:off x="877824" y="4572000"/>
-            <a:ext cx="6035040" cy="292608"/>
-          </a:xfrm>
-          <a:prstGeom prst="rect">
-            <a:avLst/>
-          </a:prstGeom>
-          <a:noFill/>
-          <a:ln/>
-        </p:spPr>
-        <p:txBody>
-          <a:bodyPr wrap="square" lIns="0" tIns="0" rIns="0" bIns="0" rtlCol="0" anchor="ctr"/>
-          <a:lstStyle/>
-          <a:p>
-            <a:pPr indent="0" marL="0">
-              <a:buNone/>
-            </a:pPr>
-            <a:r>
-              <a:rPr lang="en-US" sz="1200" b="1" spc="180" kern="0" dirty="0">
-                <a:solidFill>
-                  <a:srgbClr val="5C6675"/>
-                </a:solidFill>
-                <a:latin typeface="Calibri" pitchFamily="34" charset="0"/>
-                <a:ea typeface="Calibri" pitchFamily="34" charset="-122"/>
-                <a:cs typeface="Calibri" pitchFamily="34" charset="-120"/>
-              </a:rPr>
-              <a:t>Tooling — match the footprint, not the ambition</a:t>
-            </a:r>
-            <a:endParaRPr lang="en-US" sz="1200" dirty="0"/>
-          </a:p>
-        </p:txBody>
-      </p:sp>
-      <p:sp>
-        <p:nvSpPr>
-          <p:cNvPr id="22" name="Text 20"/>
-          <p:cNvSpPr/>
-          <p:nvPr/>
-        </p:nvSpPr>
-        <p:spPr>
-          <a:xfrm>
-            <a:off x="877824" y="4937760"/>
-            <a:ext cx="1737360" cy="384048"/>
-          </a:xfrm>
-          <a:prstGeom prst="rect">
-            <a:avLst/>
-          </a:prstGeom>
-          <a:noFill/>
-          <a:ln/>
-        </p:spPr>
-        <p:txBody>
-          <a:bodyPr wrap="square" lIns="0" tIns="0" rIns="0" bIns="0" rtlCol="0" anchor="ctr"/>
-          <a:lstStyle/>
-          <a:p>
-            <a:pPr indent="0" marL="0">
-              <a:buNone/>
-            </a:pPr>
-            <a:r>
-              <a:rPr lang="en-US" sz="1350" b="1" dirty="0">
-                <a:solidFill>
-                  <a:srgbClr val="2E8B7A"/>
-                </a:solidFill>
-                <a:latin typeface="Calibri" pitchFamily="34" charset="0"/>
-                <a:ea typeface="Calibri" pitchFamily="34" charset="-122"/>
-                <a:cs typeface="Calibri" pitchFamily="34" charset="-120"/>
-              </a:rPr>
-              <a:t>Native</a:t>
-            </a:r>
-            <a:endParaRPr lang="en-US" sz="1350" dirty="0"/>
-          </a:p>
-        </p:txBody>
-      </p:sp>
-      <p:sp>
-        <p:nvSpPr>
-          <p:cNvPr id="23" name="Text 21"/>
-          <p:cNvSpPr/>
-          <p:nvPr/>
-        </p:nvSpPr>
-        <p:spPr>
-          <a:xfrm>
-            <a:off x="2651760" y="4937760"/>
-            <a:ext cx="8595360" cy="384048"/>
-          </a:xfrm>
-          <a:prstGeom prst="rect">
-            <a:avLst/>
-          </a:prstGeom>
-          <a:noFill/>
-          <a:ln/>
-        </p:spPr>
-        <p:txBody>
-          <a:bodyPr wrap="square" lIns="0" tIns="0" rIns="0" bIns="0" rtlCol="0" anchor="ctr"/>
-          <a:lstStyle/>
-          <a:p>
-            <a:pPr indent="0" marL="0">
-              <a:buNone/>
-            </a:pPr>
-            <a:r>
-              <a:rPr lang="en-US" sz="1350" dirty="0">
-                <a:solidFill>
-                  <a:srgbClr val="5C6675"/>
-                </a:solidFill>
-                <a:latin typeface="Calibri" pitchFamily="34" charset="0"/>
-                <a:ea typeface="Calibri" pitchFamily="34" charset="-122"/>
-                <a:cs typeface="Calibri" pitchFamily="34" charset="-120"/>
-              </a:rPr>
-              <a:t>AWS Cost Explorer  ·  Azure Cost Management  ·  GCP Billing</a:t>
-            </a:r>
-            <a:endParaRPr lang="en-US" sz="1350" dirty="0"/>
-          </a:p>
-        </p:txBody>
-      </p:sp>
-      <p:sp>
-        <p:nvSpPr>
-          <p:cNvPr id="24" name="Text 22"/>
-          <p:cNvSpPr/>
-          <p:nvPr/>
-        </p:nvSpPr>
-        <p:spPr>
-          <a:xfrm>
-            <a:off x="877824" y="5349240"/>
-            <a:ext cx="1737360" cy="384048"/>
-          </a:xfrm>
-          <a:prstGeom prst="rect">
-            <a:avLst/>
-          </a:prstGeom>
-          <a:noFill/>
-          <a:ln/>
-        </p:spPr>
-        <p:txBody>
-          <a:bodyPr wrap="square" lIns="0" tIns="0" rIns="0" bIns="0" rtlCol="0" anchor="ctr"/>
-          <a:lstStyle/>
-          <a:p>
-            <a:pPr indent="0" marL="0">
-              <a:buNone/>
-            </a:pPr>
-            <a:r>
-              <a:rPr lang="en-US" sz="1350" b="1" dirty="0">
-                <a:solidFill>
-                  <a:srgbClr val="B87B18"/>
-                </a:solidFill>
-                <a:latin typeface="Calibri" pitchFamily="34" charset="0"/>
-                <a:ea typeface="Calibri" pitchFamily="34" charset="-122"/>
-                <a:cs typeface="Calibri" pitchFamily="34" charset="-120"/>
-              </a:rPr>
-              <a:t>Third-party</a:t>
-            </a:r>
-            <a:endParaRPr lang="en-US" sz="1350" dirty="0"/>
-          </a:p>
-        </p:txBody>
-      </p:sp>
-      <p:sp>
-        <p:nvSpPr>
-          <p:cNvPr id="25" name="Text 23"/>
-          <p:cNvSpPr/>
-          <p:nvPr/>
-        </p:nvSpPr>
-        <p:spPr>
-          <a:xfrm>
-            <a:off x="2651760" y="5349240"/>
-            <a:ext cx="8595360" cy="384048"/>
-          </a:xfrm>
-          <a:prstGeom prst="rect">
-            <a:avLst/>
-          </a:prstGeom>
-          <a:noFill/>
-          <a:ln/>
-        </p:spPr>
-        <p:txBody>
-          <a:bodyPr wrap="square" lIns="0" tIns="0" rIns="0" bIns="0" rtlCol="0" anchor="ctr"/>
-          <a:lstStyle/>
-          <a:p>
-            <a:pPr indent="0" marL="0">
-              <a:buNone/>
-            </a:pPr>
-            <a:r>
-              <a:rPr lang="en-US" sz="1350" dirty="0">
-                <a:solidFill>
-                  <a:srgbClr val="5C6675"/>
-                </a:solidFill>
-                <a:latin typeface="Calibri" pitchFamily="34" charset="0"/>
-                <a:ea typeface="Calibri" pitchFamily="34" charset="-122"/>
-                <a:cs typeface="Calibri" pitchFamily="34" charset="-120"/>
-              </a:rPr>
-              <a:t>CloudHealth  ·  Apptio  ·  Vantage  ·  nOps  ·  Finout  ·  CoreStack</a:t>
-            </a:r>
-            <a:endParaRPr lang="en-US" sz="1350" dirty="0"/>
-          </a:p>
-        </p:txBody>
-      </p:sp>
-      <p:sp>
-        <p:nvSpPr>
-          <p:cNvPr id="26" name="Text 24"/>
-          <p:cNvSpPr/>
-          <p:nvPr/>
-        </p:nvSpPr>
-        <p:spPr>
-          <a:xfrm>
-            <a:off x="877824" y="5760720"/>
-            <a:ext cx="1737360" cy="384048"/>
-          </a:xfrm>
-          <a:prstGeom prst="rect">
-            <a:avLst/>
-          </a:prstGeom>
-          <a:noFill/>
-          <a:ln/>
-        </p:spPr>
-        <p:txBody>
-          <a:bodyPr wrap="square" lIns="0" tIns="0" rIns="0" bIns="0" rtlCol="0" anchor="ctr"/>
-          <a:lstStyle/>
-          <a:p>
-            <a:pPr indent="0" marL="0">
-              <a:buNone/>
-            </a:pPr>
-            <a:r>
-              <a:rPr lang="en-US" sz="1350" b="1" dirty="0">
-                <a:solidFill>
-                  <a:srgbClr val="1B2430"/>
-                </a:solidFill>
-                <a:latin typeface="Calibri" pitchFamily="34" charset="0"/>
-                <a:ea typeface="Calibri" pitchFamily="34" charset="-122"/>
-                <a:cs typeface="Calibri" pitchFamily="34" charset="-120"/>
-              </a:rPr>
-              <a:t>Standard</a:t>
-            </a:r>
-            <a:endParaRPr lang="en-US" sz="1350" dirty="0"/>
-          </a:p>
-        </p:txBody>
-      </p:sp>
-      <p:sp>
-        <p:nvSpPr>
-          <p:cNvPr id="27" name="Text 25"/>
-          <p:cNvSpPr/>
-          <p:nvPr/>
-        </p:nvSpPr>
-        <p:spPr>
-          <a:xfrm>
-            <a:off x="2651760" y="5760720"/>
-            <a:ext cx="8595360" cy="384048"/>
-          </a:xfrm>
-          <a:prstGeom prst="rect">
-            <a:avLst/>
-          </a:prstGeom>
-          <a:noFill/>
-          <a:ln/>
-        </p:spPr>
-        <p:txBody>
-          <a:bodyPr wrap="square" lIns="0" tIns="0" rIns="0" bIns="0" rtlCol="0" anchor="ctr"/>
-          <a:lstStyle/>
-          <a:p>
-            <a:pPr indent="0" marL="0">
-              <a:buNone/>
-            </a:pPr>
-            <a:r>
-              <a:rPr lang="en-US" sz="1350" dirty="0">
-                <a:solidFill>
-                  <a:srgbClr val="5C6675"/>
-                </a:solidFill>
-                <a:latin typeface="Calibri" pitchFamily="34" charset="0"/>
-                <a:ea typeface="Calibri" pitchFamily="34" charset="-122"/>
-                <a:cs typeface="Calibri" pitchFamily="34" charset="-120"/>
-              </a:rPr>
-              <a:t>FOCUS-compliant platforms for multi-cloud reporting</a:t>
-            </a:r>
-            <a:endParaRPr lang="en-US" sz="1350" dirty="0"/>
+              <a:t>The goal is not a smaller invoice. It is an invoice with nothing in it you have not already seen, explained and decided about.</a:t>
+            </a:r>
+            <a:endParaRPr lang="en-US" sz="1550" dirty="0"/>
           </a:p>
         </p:txBody>
       </p:sp>
@@ -15127,6 +15308,991 @@
 <file path=ppt/slides/slide21.xml><?xml version="1.0" encoding="utf-8"?>
 <p:sld xmlns:a="http://schemas.openxmlformats.org/drawingml/2006/main" xmlns:r="http://schemas.openxmlformats.org/officeDocument/2006/relationships" xmlns:p="http://schemas.openxmlformats.org/presentationml/2006/main">
   <p:cSld name="Slide 21">
+    <p:bg>
+      <p:bgPr>
+        <a:solidFill>
+          <a:srgbClr val="FFFFFF"/>
+        </a:solidFill>
+      </p:bgPr>
+    </p:bg>
+    <p:spTree>
+      <p:nvGrpSpPr>
+        <p:cNvPr id="1" name=""/>
+        <p:cNvGrpSpPr/>
+        <p:nvPr/>
+      </p:nvGrpSpPr>
+      <p:grpSpPr>
+        <a:xfrm>
+          <a:off x="0" y="0"/>
+          <a:ext cx="0" cy="0"/>
+          <a:chOff x="0" y="0"/>
+          <a:chExt cx="0" cy="0"/>
+        </a:xfrm>
+      </p:grpSpPr>
+      <p:sp>
+        <p:nvSpPr>
+          <p:cNvPr id="2" name="Text 0"/>
+          <p:cNvSpPr/>
+          <p:nvPr/>
+        </p:nvSpPr>
+        <p:spPr>
+          <a:xfrm>
+            <a:off x="548640" y="475488"/>
+            <a:ext cx="7315200" cy="256032"/>
+          </a:xfrm>
+          <a:prstGeom prst="rect">
+            <a:avLst/>
+          </a:prstGeom>
+          <a:noFill/>
+          <a:ln/>
+        </p:spPr>
+        <p:txBody>
+          <a:bodyPr wrap="square" lIns="0" tIns="0" rIns="0" bIns="0" rtlCol="0" anchor="ctr"/>
+          <a:lstStyle/>
+          <a:p>
+            <a:pPr indent="0" marL="0">
+              <a:buNone/>
+            </a:pPr>
+            <a:r>
+              <a:rPr lang="en-US" sz="1100" b="1" spc="220" kern="0" dirty="0">
+                <a:solidFill>
+                  <a:srgbClr val="E39B2C"/>
+                </a:solidFill>
+                <a:latin typeface="Calibri" pitchFamily="34" charset="0"/>
+                <a:ea typeface="Calibri" pitchFamily="34" charset="-122"/>
+                <a:cs typeface="Calibri" pitchFamily="34" charset="-120"/>
+              </a:rPr>
+              <a:t>THE PATH FORWARD</a:t>
+            </a:r>
+            <a:endParaRPr lang="en-US" sz="1100" dirty="0"/>
+          </a:p>
+        </p:txBody>
+      </p:sp>
+      <p:sp>
+        <p:nvSpPr>
+          <p:cNvPr id="3" name="Text 1"/>
+          <p:cNvSpPr/>
+          <p:nvPr/>
+        </p:nvSpPr>
+        <p:spPr>
+          <a:xfrm>
+            <a:off x="548640" y="768096"/>
+            <a:ext cx="11091672" cy="804672"/>
+          </a:xfrm>
+          <a:prstGeom prst="rect">
+            <a:avLst/>
+          </a:prstGeom>
+          <a:noFill/>
+          <a:ln/>
+        </p:spPr>
+        <p:txBody>
+          <a:bodyPr wrap="square" lIns="0" tIns="0" rIns="0" bIns="0" rtlCol="0" anchor="ctr"/>
+          <a:lstStyle/>
+          <a:p>
+            <a:pPr indent="0" marL="0">
+              <a:buNone/>
+            </a:pPr>
+            <a:r>
+              <a:rPr lang="en-US" sz="3100" b="1" dirty="0">
+                <a:solidFill>
+                  <a:srgbClr val="1B2430"/>
+                </a:solidFill>
+                <a:latin typeface="Cambria" pitchFamily="34" charset="0"/>
+                <a:ea typeface="Cambria" pitchFamily="34" charset="-122"/>
+                <a:cs typeface="Cambria" pitchFamily="34" charset="-120"/>
+              </a:rPr>
+              <a:t>Where to start</a:t>
+            </a:r>
+            <a:endParaRPr lang="en-US" sz="3100" dirty="0"/>
+          </a:p>
+        </p:txBody>
+      </p:sp>
+      <p:sp>
+        <p:nvSpPr>
+          <p:cNvPr id="4" name="Shape 2"/>
+          <p:cNvSpPr/>
+          <p:nvPr/>
+        </p:nvSpPr>
+        <p:spPr>
+          <a:xfrm>
+            <a:off x="548640" y="1783080"/>
+            <a:ext cx="2587752" cy="2423160"/>
+          </a:xfrm>
+          <a:prstGeom prst="roundRect">
+            <a:avLst>
+              <a:gd name="adj" fmla="val 3396"/>
+            </a:avLst>
+          </a:prstGeom>
+          <a:solidFill>
+            <a:srgbClr val="1F2936"/>
+          </a:solidFill>
+          <a:ln/>
+        </p:spPr>
+      </p:sp>
+      <p:sp>
+        <p:nvSpPr>
+          <p:cNvPr id="5" name="Text 3"/>
+          <p:cNvSpPr/>
+          <p:nvPr/>
+        </p:nvSpPr>
+        <p:spPr>
+          <a:xfrm>
+            <a:off x="804672" y="1965960"/>
+            <a:ext cx="1097280" cy="502920"/>
+          </a:xfrm>
+          <a:prstGeom prst="rect">
+            <a:avLst/>
+          </a:prstGeom>
+          <a:noFill/>
+          <a:ln/>
+        </p:spPr>
+        <p:txBody>
+          <a:bodyPr wrap="square" lIns="0" tIns="0" rIns="0" bIns="0" rtlCol="0" anchor="ctr"/>
+          <a:lstStyle/>
+          <a:p>
+            <a:pPr indent="0" marL="0">
+              <a:buNone/>
+            </a:pPr>
+            <a:r>
+              <a:rPr lang="en-US" sz="2800" b="1" dirty="0">
+                <a:solidFill>
+                  <a:srgbClr val="E39B2C"/>
+                </a:solidFill>
+                <a:latin typeface="Cambria" pitchFamily="34" charset="0"/>
+                <a:ea typeface="Cambria" pitchFamily="34" charset="-122"/>
+                <a:cs typeface="Cambria" pitchFamily="34" charset="-120"/>
+              </a:rPr>
+              <a:t>01</a:t>
+            </a:r>
+            <a:endParaRPr lang="en-US" sz="2800" dirty="0"/>
+          </a:p>
+        </p:txBody>
+      </p:sp>
+      <p:sp>
+        <p:nvSpPr>
+          <p:cNvPr id="6" name="Text 4"/>
+          <p:cNvSpPr/>
+          <p:nvPr/>
+        </p:nvSpPr>
+        <p:spPr>
+          <a:xfrm>
+            <a:off x="786384" y="2523744"/>
+            <a:ext cx="2139696" cy="786384"/>
+          </a:xfrm>
+          <a:prstGeom prst="rect">
+            <a:avLst/>
+          </a:prstGeom>
+          <a:noFill/>
+          <a:ln/>
+        </p:spPr>
+        <p:txBody>
+          <a:bodyPr wrap="square" lIns="0" tIns="0" rIns="0" bIns="0" rtlCol="0" anchor="t"/>
+          <a:lstStyle/>
+          <a:p>
+            <a:pPr indent="0" marL="0">
+              <a:lnSpc>
+                <a:spcPts val="2000"/>
+              </a:lnSpc>
+              <a:buNone/>
+            </a:pPr>
+            <a:r>
+              <a:rPr lang="en-US" sz="1500" b="1" dirty="0">
+                <a:solidFill>
+                  <a:srgbClr val="FFFFFF"/>
+                </a:solidFill>
+                <a:latin typeface="Cambria" pitchFamily="34" charset="0"/>
+                <a:ea typeface="Cambria" pitchFamily="34" charset="-122"/>
+                <a:cs typeface="Cambria" pitchFamily="34" charset="-120"/>
+              </a:rPr>
+              <a:t>Set the tagging standard</a:t>
+            </a:r>
+            <a:endParaRPr lang="en-US" sz="1500" dirty="0"/>
+          </a:p>
+        </p:txBody>
+      </p:sp>
+      <p:sp>
+        <p:nvSpPr>
+          <p:cNvPr id="7" name="Text 5"/>
+          <p:cNvSpPr/>
+          <p:nvPr/>
+        </p:nvSpPr>
+        <p:spPr>
+          <a:xfrm>
+            <a:off x="786384" y="3346704"/>
+            <a:ext cx="2139696" cy="749808"/>
+          </a:xfrm>
+          <a:prstGeom prst="rect">
+            <a:avLst/>
+          </a:prstGeom>
+          <a:noFill/>
+          <a:ln/>
+        </p:spPr>
+        <p:txBody>
+          <a:bodyPr wrap="square" lIns="0" tIns="0" rIns="0" bIns="0" rtlCol="0" anchor="t"/>
+          <a:lstStyle/>
+          <a:p>
+            <a:pPr indent="0" marL="0">
+              <a:lnSpc>
+                <a:spcPts val="1500"/>
+              </a:lnSpc>
+              <a:buNone/>
+            </a:pPr>
+            <a:r>
+              <a:rPr lang="en-US" sz="1200" dirty="0">
+                <a:solidFill>
+                  <a:srgbClr val="9EABBA"/>
+                </a:solidFill>
+                <a:latin typeface="Calibri" pitchFamily="34" charset="0"/>
+                <a:ea typeface="Calibri" pitchFamily="34" charset="-122"/>
+                <a:cs typeface="Calibri" pitchFamily="34" charset="-120"/>
+              </a:rPr>
+              <a:t>Agree a consistent taxonomy before investing in dashboards.</a:t>
+            </a:r>
+            <a:endParaRPr lang="en-US" sz="1200" dirty="0"/>
+          </a:p>
+        </p:txBody>
+      </p:sp>
+      <p:sp>
+        <p:nvSpPr>
+          <p:cNvPr id="8" name="Shape 6"/>
+          <p:cNvSpPr/>
+          <p:nvPr/>
+        </p:nvSpPr>
+        <p:spPr>
+          <a:xfrm>
+            <a:off x="3383280" y="1783080"/>
+            <a:ext cx="2587752" cy="2423160"/>
+          </a:xfrm>
+          <a:prstGeom prst="roundRect">
+            <a:avLst>
+              <a:gd name="adj" fmla="val 3396"/>
+            </a:avLst>
+          </a:prstGeom>
+          <a:solidFill>
+            <a:srgbClr val="F1F3F6"/>
+          </a:solidFill>
+          <a:ln/>
+        </p:spPr>
+      </p:sp>
+      <p:sp>
+        <p:nvSpPr>
+          <p:cNvPr id="9" name="Text 7"/>
+          <p:cNvSpPr/>
+          <p:nvPr/>
+        </p:nvSpPr>
+        <p:spPr>
+          <a:xfrm>
+            <a:off x="3639312" y="1965960"/>
+            <a:ext cx="1097280" cy="502920"/>
+          </a:xfrm>
+          <a:prstGeom prst="rect">
+            <a:avLst/>
+          </a:prstGeom>
+          <a:noFill/>
+          <a:ln/>
+        </p:spPr>
+        <p:txBody>
+          <a:bodyPr wrap="square" lIns="0" tIns="0" rIns="0" bIns="0" rtlCol="0" anchor="ctr"/>
+          <a:lstStyle/>
+          <a:p>
+            <a:pPr indent="0" marL="0">
+              <a:buNone/>
+            </a:pPr>
+            <a:r>
+              <a:rPr lang="en-US" sz="2800" b="1" dirty="0">
+                <a:solidFill>
+                  <a:srgbClr val="B9C2CD"/>
+                </a:solidFill>
+                <a:latin typeface="Cambria" pitchFamily="34" charset="0"/>
+                <a:ea typeface="Cambria" pitchFamily="34" charset="-122"/>
+                <a:cs typeface="Cambria" pitchFamily="34" charset="-120"/>
+              </a:rPr>
+              <a:t>02</a:t>
+            </a:r>
+            <a:endParaRPr lang="en-US" sz="2800" dirty="0"/>
+          </a:p>
+        </p:txBody>
+      </p:sp>
+      <p:sp>
+        <p:nvSpPr>
+          <p:cNvPr id="10" name="Text 8"/>
+          <p:cNvSpPr/>
+          <p:nvPr/>
+        </p:nvSpPr>
+        <p:spPr>
+          <a:xfrm>
+            <a:off x="3621024" y="2523744"/>
+            <a:ext cx="2139696" cy="786384"/>
+          </a:xfrm>
+          <a:prstGeom prst="rect">
+            <a:avLst/>
+          </a:prstGeom>
+          <a:noFill/>
+          <a:ln/>
+        </p:spPr>
+        <p:txBody>
+          <a:bodyPr wrap="square" lIns="0" tIns="0" rIns="0" bIns="0" rtlCol="0" anchor="t"/>
+          <a:lstStyle/>
+          <a:p>
+            <a:pPr indent="0" marL="0">
+              <a:lnSpc>
+                <a:spcPts val="2000"/>
+              </a:lnSpc>
+              <a:buNone/>
+            </a:pPr>
+            <a:r>
+              <a:rPr lang="en-US" sz="1500" b="1" dirty="0">
+                <a:solidFill>
+                  <a:srgbClr val="1B2430"/>
+                </a:solidFill>
+                <a:latin typeface="Cambria" pitchFamily="34" charset="0"/>
+                <a:ea typeface="Cambria" pitchFamily="34" charset="-122"/>
+                <a:cs typeface="Cambria" pitchFamily="34" charset="-120"/>
+              </a:rPr>
+              <a:t>Start with the biggest spend</a:t>
+            </a:r>
+            <a:endParaRPr lang="en-US" sz="1500" dirty="0"/>
+          </a:p>
+        </p:txBody>
+      </p:sp>
+      <p:sp>
+        <p:nvSpPr>
+          <p:cNvPr id="11" name="Text 9"/>
+          <p:cNvSpPr/>
+          <p:nvPr/>
+        </p:nvSpPr>
+        <p:spPr>
+          <a:xfrm>
+            <a:off x="3621024" y="3346704"/>
+            <a:ext cx="2139696" cy="749808"/>
+          </a:xfrm>
+          <a:prstGeom prst="rect">
+            <a:avLst/>
+          </a:prstGeom>
+          <a:noFill/>
+          <a:ln/>
+        </p:spPr>
+        <p:txBody>
+          <a:bodyPr wrap="square" lIns="0" tIns="0" rIns="0" bIns="0" rtlCol="0" anchor="t"/>
+          <a:lstStyle/>
+          <a:p>
+            <a:pPr indent="0" marL="0">
+              <a:lnSpc>
+                <a:spcPts val="1500"/>
+              </a:lnSpc>
+              <a:buNone/>
+            </a:pPr>
+            <a:r>
+              <a:rPr lang="en-US" sz="1200" dirty="0">
+                <a:solidFill>
+                  <a:srgbClr val="5C6675"/>
+                </a:solidFill>
+                <a:latin typeface="Calibri" pitchFamily="34" charset="0"/>
+                <a:ea typeface="Calibri" pitchFamily="34" charset="-122"/>
+                <a:cs typeface="Calibri" pitchFamily="34" charset="-120"/>
+              </a:rPr>
+              <a:t>Attack the largest categories first. Don't chase perfect granularity everywhere.</a:t>
+            </a:r>
+            <a:endParaRPr lang="en-US" sz="1200" dirty="0"/>
+          </a:p>
+        </p:txBody>
+      </p:sp>
+      <p:sp>
+        <p:nvSpPr>
+          <p:cNvPr id="12" name="Shape 10"/>
+          <p:cNvSpPr/>
+          <p:nvPr/>
+        </p:nvSpPr>
+        <p:spPr>
+          <a:xfrm>
+            <a:off x="6217920" y="1783080"/>
+            <a:ext cx="2587752" cy="2423160"/>
+          </a:xfrm>
+          <a:prstGeom prst="roundRect">
+            <a:avLst>
+              <a:gd name="adj" fmla="val 3396"/>
+            </a:avLst>
+          </a:prstGeom>
+          <a:solidFill>
+            <a:srgbClr val="F1F3F6"/>
+          </a:solidFill>
+          <a:ln/>
+        </p:spPr>
+      </p:sp>
+      <p:sp>
+        <p:nvSpPr>
+          <p:cNvPr id="13" name="Text 11"/>
+          <p:cNvSpPr/>
+          <p:nvPr/>
+        </p:nvSpPr>
+        <p:spPr>
+          <a:xfrm>
+            <a:off x="6473952" y="1965960"/>
+            <a:ext cx="1097280" cy="502920"/>
+          </a:xfrm>
+          <a:prstGeom prst="rect">
+            <a:avLst/>
+          </a:prstGeom>
+          <a:noFill/>
+          <a:ln/>
+        </p:spPr>
+        <p:txBody>
+          <a:bodyPr wrap="square" lIns="0" tIns="0" rIns="0" bIns="0" rtlCol="0" anchor="ctr"/>
+          <a:lstStyle/>
+          <a:p>
+            <a:pPr indent="0" marL="0">
+              <a:buNone/>
+            </a:pPr>
+            <a:r>
+              <a:rPr lang="en-US" sz="2800" b="1" dirty="0">
+                <a:solidFill>
+                  <a:srgbClr val="B9C2CD"/>
+                </a:solidFill>
+                <a:latin typeface="Cambria" pitchFamily="34" charset="0"/>
+                <a:ea typeface="Cambria" pitchFamily="34" charset="-122"/>
+                <a:cs typeface="Cambria" pitchFamily="34" charset="-120"/>
+              </a:rPr>
+              <a:t>03</a:t>
+            </a:r>
+            <a:endParaRPr lang="en-US" sz="2800" dirty="0"/>
+          </a:p>
+        </p:txBody>
+      </p:sp>
+      <p:sp>
+        <p:nvSpPr>
+          <p:cNvPr id="14" name="Text 12"/>
+          <p:cNvSpPr/>
+          <p:nvPr/>
+        </p:nvSpPr>
+        <p:spPr>
+          <a:xfrm>
+            <a:off x="6455664" y="2523744"/>
+            <a:ext cx="2139696" cy="786384"/>
+          </a:xfrm>
+          <a:prstGeom prst="rect">
+            <a:avLst/>
+          </a:prstGeom>
+          <a:noFill/>
+          <a:ln/>
+        </p:spPr>
+        <p:txBody>
+          <a:bodyPr wrap="square" lIns="0" tIns="0" rIns="0" bIns="0" rtlCol="0" anchor="t"/>
+          <a:lstStyle/>
+          <a:p>
+            <a:pPr indent="0" marL="0">
+              <a:lnSpc>
+                <a:spcPts val="2000"/>
+              </a:lnSpc>
+              <a:buNone/>
+            </a:pPr>
+            <a:r>
+              <a:rPr lang="en-US" sz="1500" b="1" dirty="0">
+                <a:solidFill>
+                  <a:srgbClr val="1B2430"/>
+                </a:solidFill>
+                <a:latin typeface="Cambria" pitchFamily="34" charset="0"/>
+                <a:ea typeface="Cambria" pitchFamily="34" charset="-122"/>
+                <a:cs typeface="Cambria" pitchFamily="34" charset="-120"/>
+              </a:rPr>
+              <a:t>Get finance and engineering talking</a:t>
+            </a:r>
+            <a:endParaRPr lang="en-US" sz="1500" dirty="0"/>
+          </a:p>
+        </p:txBody>
+      </p:sp>
+      <p:sp>
+        <p:nvSpPr>
+          <p:cNvPr id="15" name="Text 13"/>
+          <p:cNvSpPr/>
+          <p:nvPr/>
+        </p:nvSpPr>
+        <p:spPr>
+          <a:xfrm>
+            <a:off x="6455664" y="3346704"/>
+            <a:ext cx="2139696" cy="749808"/>
+          </a:xfrm>
+          <a:prstGeom prst="rect">
+            <a:avLst/>
+          </a:prstGeom>
+          <a:noFill/>
+          <a:ln/>
+        </p:spPr>
+        <p:txBody>
+          <a:bodyPr wrap="square" lIns="0" tIns="0" rIns="0" bIns="0" rtlCol="0" anchor="t"/>
+          <a:lstStyle/>
+          <a:p>
+            <a:pPr indent="0" marL="0">
+              <a:lnSpc>
+                <a:spcPts val="1500"/>
+              </a:lnSpc>
+              <a:buNone/>
+            </a:pPr>
+            <a:r>
+              <a:rPr lang="en-US" sz="1200" dirty="0">
+                <a:solidFill>
+                  <a:srgbClr val="5C6675"/>
+                </a:solidFill>
+                <a:latin typeface="Calibri" pitchFamily="34" charset="0"/>
+                <a:ea typeface="Calibri" pitchFamily="34" charset="-122"/>
+                <a:cs typeface="Calibri" pitchFamily="34" charset="-120"/>
+              </a:rPr>
+              <a:t>Bring both into the conversation early, not as an afterthought.</a:t>
+            </a:r>
+            <a:endParaRPr lang="en-US" sz="1200" dirty="0"/>
+          </a:p>
+        </p:txBody>
+      </p:sp>
+      <p:sp>
+        <p:nvSpPr>
+          <p:cNvPr id="16" name="Shape 14"/>
+          <p:cNvSpPr/>
+          <p:nvPr/>
+        </p:nvSpPr>
+        <p:spPr>
+          <a:xfrm>
+            <a:off x="9052560" y="1783080"/>
+            <a:ext cx="2587752" cy="2423160"/>
+          </a:xfrm>
+          <a:prstGeom prst="roundRect">
+            <a:avLst>
+              <a:gd name="adj" fmla="val 3396"/>
+            </a:avLst>
+          </a:prstGeom>
+          <a:solidFill>
+            <a:srgbClr val="F1F3F6"/>
+          </a:solidFill>
+          <a:ln/>
+        </p:spPr>
+      </p:sp>
+      <p:sp>
+        <p:nvSpPr>
+          <p:cNvPr id="17" name="Text 15"/>
+          <p:cNvSpPr/>
+          <p:nvPr/>
+        </p:nvSpPr>
+        <p:spPr>
+          <a:xfrm>
+            <a:off x="9308592" y="1965960"/>
+            <a:ext cx="1097280" cy="502920"/>
+          </a:xfrm>
+          <a:prstGeom prst="rect">
+            <a:avLst/>
+          </a:prstGeom>
+          <a:noFill/>
+          <a:ln/>
+        </p:spPr>
+        <p:txBody>
+          <a:bodyPr wrap="square" lIns="0" tIns="0" rIns="0" bIns="0" rtlCol="0" anchor="ctr"/>
+          <a:lstStyle/>
+          <a:p>
+            <a:pPr indent="0" marL="0">
+              <a:buNone/>
+            </a:pPr>
+            <a:r>
+              <a:rPr lang="en-US" sz="2800" b="1" dirty="0">
+                <a:solidFill>
+                  <a:srgbClr val="B9C2CD"/>
+                </a:solidFill>
+                <a:latin typeface="Cambria" pitchFamily="34" charset="0"/>
+                <a:ea typeface="Cambria" pitchFamily="34" charset="-122"/>
+                <a:cs typeface="Cambria" pitchFamily="34" charset="-120"/>
+              </a:rPr>
+              <a:t>04</a:t>
+            </a:r>
+            <a:endParaRPr lang="en-US" sz="2800" dirty="0"/>
+          </a:p>
+        </p:txBody>
+      </p:sp>
+      <p:sp>
+        <p:nvSpPr>
+          <p:cNvPr id="18" name="Text 16"/>
+          <p:cNvSpPr/>
+          <p:nvPr/>
+        </p:nvSpPr>
+        <p:spPr>
+          <a:xfrm>
+            <a:off x="9290304" y="2523744"/>
+            <a:ext cx="2139696" cy="786384"/>
+          </a:xfrm>
+          <a:prstGeom prst="rect">
+            <a:avLst/>
+          </a:prstGeom>
+          <a:noFill/>
+          <a:ln/>
+        </p:spPr>
+        <p:txBody>
+          <a:bodyPr wrap="square" lIns="0" tIns="0" rIns="0" bIns="0" rtlCol="0" anchor="t"/>
+          <a:lstStyle/>
+          <a:p>
+            <a:pPr indent="0" marL="0">
+              <a:lnSpc>
+                <a:spcPts val="2000"/>
+              </a:lnSpc>
+              <a:buNone/>
+            </a:pPr>
+            <a:r>
+              <a:rPr lang="en-US" sz="1500" b="1" dirty="0">
+                <a:solidFill>
+                  <a:srgbClr val="1B2430"/>
+                </a:solidFill>
+                <a:latin typeface="Cambria" pitchFamily="34" charset="0"/>
+                <a:ea typeface="Cambria" pitchFamily="34" charset="-122"/>
+                <a:cs typeface="Cambria" pitchFamily="34" charset="-120"/>
+              </a:rPr>
+              <a:t>Set guardrails early</a:t>
+            </a:r>
+            <a:endParaRPr lang="en-US" sz="1500" dirty="0"/>
+          </a:p>
+        </p:txBody>
+      </p:sp>
+      <p:sp>
+        <p:nvSpPr>
+          <p:cNvPr id="19" name="Text 17"/>
+          <p:cNvSpPr/>
+          <p:nvPr/>
+        </p:nvSpPr>
+        <p:spPr>
+          <a:xfrm>
+            <a:off x="9290304" y="3346704"/>
+            <a:ext cx="2139696" cy="749808"/>
+          </a:xfrm>
+          <a:prstGeom prst="rect">
+            <a:avLst/>
+          </a:prstGeom>
+          <a:noFill/>
+          <a:ln/>
+        </p:spPr>
+        <p:txBody>
+          <a:bodyPr wrap="square" lIns="0" tIns="0" rIns="0" bIns="0" rtlCol="0" anchor="t"/>
+          <a:lstStyle/>
+          <a:p>
+            <a:pPr indent="0" marL="0">
+              <a:lnSpc>
+                <a:spcPts val="1500"/>
+              </a:lnSpc>
+              <a:buNone/>
+            </a:pPr>
+            <a:r>
+              <a:rPr lang="en-US" sz="1200" dirty="0">
+                <a:solidFill>
+                  <a:srgbClr val="5C6675"/>
+                </a:solidFill>
+                <a:latin typeface="Calibri" pitchFamily="34" charset="0"/>
+                <a:ea typeface="Calibri" pitchFamily="34" charset="-122"/>
+                <a:cs typeface="Calibri" pitchFamily="34" charset="-120"/>
+              </a:rPr>
+              <a:t>Owners, budget thresholds and quotas cost little to add — and stop the expensive surprises.</a:t>
+            </a:r>
+            <a:endParaRPr lang="en-US" sz="1200" dirty="0"/>
+          </a:p>
+        </p:txBody>
+      </p:sp>
+      <p:sp>
+        <p:nvSpPr>
+          <p:cNvPr id="20" name="Shape 18"/>
+          <p:cNvSpPr/>
+          <p:nvPr/>
+        </p:nvSpPr>
+        <p:spPr>
+          <a:xfrm>
+            <a:off x="548640" y="4434840"/>
+            <a:ext cx="11091672" cy="1874520"/>
+          </a:xfrm>
+          <a:prstGeom prst="roundRect">
+            <a:avLst>
+              <a:gd name="adj" fmla="val 4390"/>
+            </a:avLst>
+          </a:prstGeom>
+          <a:solidFill>
+            <a:srgbClr val="F1F3F6"/>
+          </a:solidFill>
+          <a:ln/>
+        </p:spPr>
+      </p:sp>
+      <p:sp>
+        <p:nvSpPr>
+          <p:cNvPr id="21" name="Text 19"/>
+          <p:cNvSpPr/>
+          <p:nvPr/>
+        </p:nvSpPr>
+        <p:spPr>
+          <a:xfrm>
+            <a:off x="877824" y="4572000"/>
+            <a:ext cx="6035040" cy="292608"/>
+          </a:xfrm>
+          <a:prstGeom prst="rect">
+            <a:avLst/>
+          </a:prstGeom>
+          <a:noFill/>
+          <a:ln/>
+        </p:spPr>
+        <p:txBody>
+          <a:bodyPr wrap="square" lIns="0" tIns="0" rIns="0" bIns="0" rtlCol="0" anchor="ctr"/>
+          <a:lstStyle/>
+          <a:p>
+            <a:pPr indent="0" marL="0">
+              <a:buNone/>
+            </a:pPr>
+            <a:r>
+              <a:rPr lang="en-US" sz="1200" b="1" spc="180" kern="0" dirty="0">
+                <a:solidFill>
+                  <a:srgbClr val="5C6675"/>
+                </a:solidFill>
+                <a:latin typeface="Calibri" pitchFamily="34" charset="0"/>
+                <a:ea typeface="Calibri" pitchFamily="34" charset="-122"/>
+                <a:cs typeface="Calibri" pitchFamily="34" charset="-120"/>
+              </a:rPr>
+              <a:t>Tooling — match the footprint, not the ambition</a:t>
+            </a:r>
+            <a:endParaRPr lang="en-US" sz="1200" dirty="0"/>
+          </a:p>
+        </p:txBody>
+      </p:sp>
+      <p:sp>
+        <p:nvSpPr>
+          <p:cNvPr id="22" name="Text 20"/>
+          <p:cNvSpPr/>
+          <p:nvPr/>
+        </p:nvSpPr>
+        <p:spPr>
+          <a:xfrm>
+            <a:off x="877824" y="4937760"/>
+            <a:ext cx="1737360" cy="384048"/>
+          </a:xfrm>
+          <a:prstGeom prst="rect">
+            <a:avLst/>
+          </a:prstGeom>
+          <a:noFill/>
+          <a:ln/>
+        </p:spPr>
+        <p:txBody>
+          <a:bodyPr wrap="square" lIns="0" tIns="0" rIns="0" bIns="0" rtlCol="0" anchor="ctr"/>
+          <a:lstStyle/>
+          <a:p>
+            <a:pPr indent="0" marL="0">
+              <a:buNone/>
+            </a:pPr>
+            <a:r>
+              <a:rPr lang="en-US" sz="1350" b="1" dirty="0">
+                <a:solidFill>
+                  <a:srgbClr val="2E8B7A"/>
+                </a:solidFill>
+                <a:latin typeface="Calibri" pitchFamily="34" charset="0"/>
+                <a:ea typeface="Calibri" pitchFamily="34" charset="-122"/>
+                <a:cs typeface="Calibri" pitchFamily="34" charset="-120"/>
+              </a:rPr>
+              <a:t>Native</a:t>
+            </a:r>
+            <a:endParaRPr lang="en-US" sz="1350" dirty="0"/>
+          </a:p>
+        </p:txBody>
+      </p:sp>
+      <p:sp>
+        <p:nvSpPr>
+          <p:cNvPr id="23" name="Text 21"/>
+          <p:cNvSpPr/>
+          <p:nvPr/>
+        </p:nvSpPr>
+        <p:spPr>
+          <a:xfrm>
+            <a:off x="2651760" y="4937760"/>
+            <a:ext cx="8595360" cy="384048"/>
+          </a:xfrm>
+          <a:prstGeom prst="rect">
+            <a:avLst/>
+          </a:prstGeom>
+          <a:noFill/>
+          <a:ln/>
+        </p:spPr>
+        <p:txBody>
+          <a:bodyPr wrap="square" lIns="0" tIns="0" rIns="0" bIns="0" rtlCol="0" anchor="ctr"/>
+          <a:lstStyle/>
+          <a:p>
+            <a:pPr indent="0" marL="0">
+              <a:buNone/>
+            </a:pPr>
+            <a:r>
+              <a:rPr lang="en-US" sz="1350" dirty="0">
+                <a:solidFill>
+                  <a:srgbClr val="5C6675"/>
+                </a:solidFill>
+                <a:latin typeface="Calibri" pitchFamily="34" charset="0"/>
+                <a:ea typeface="Calibri" pitchFamily="34" charset="-122"/>
+                <a:cs typeface="Calibri" pitchFamily="34" charset="-120"/>
+              </a:rPr>
+              <a:t>AWS Cost Explorer  ·  Azure Cost Management  ·  GCP Billing</a:t>
+            </a:r>
+            <a:endParaRPr lang="en-US" sz="1350" dirty="0"/>
+          </a:p>
+        </p:txBody>
+      </p:sp>
+      <p:sp>
+        <p:nvSpPr>
+          <p:cNvPr id="24" name="Text 22"/>
+          <p:cNvSpPr/>
+          <p:nvPr/>
+        </p:nvSpPr>
+        <p:spPr>
+          <a:xfrm>
+            <a:off x="877824" y="5349240"/>
+            <a:ext cx="1737360" cy="384048"/>
+          </a:xfrm>
+          <a:prstGeom prst="rect">
+            <a:avLst/>
+          </a:prstGeom>
+          <a:noFill/>
+          <a:ln/>
+        </p:spPr>
+        <p:txBody>
+          <a:bodyPr wrap="square" lIns="0" tIns="0" rIns="0" bIns="0" rtlCol="0" anchor="ctr"/>
+          <a:lstStyle/>
+          <a:p>
+            <a:pPr indent="0" marL="0">
+              <a:buNone/>
+            </a:pPr>
+            <a:r>
+              <a:rPr lang="en-US" sz="1350" b="1" dirty="0">
+                <a:solidFill>
+                  <a:srgbClr val="B87B18"/>
+                </a:solidFill>
+                <a:latin typeface="Calibri" pitchFamily="34" charset="0"/>
+                <a:ea typeface="Calibri" pitchFamily="34" charset="-122"/>
+                <a:cs typeface="Calibri" pitchFamily="34" charset="-120"/>
+              </a:rPr>
+              <a:t>Third-party</a:t>
+            </a:r>
+            <a:endParaRPr lang="en-US" sz="1350" dirty="0"/>
+          </a:p>
+        </p:txBody>
+      </p:sp>
+      <p:sp>
+        <p:nvSpPr>
+          <p:cNvPr id="25" name="Text 23"/>
+          <p:cNvSpPr/>
+          <p:nvPr/>
+        </p:nvSpPr>
+        <p:spPr>
+          <a:xfrm>
+            <a:off x="2651760" y="5349240"/>
+            <a:ext cx="8595360" cy="384048"/>
+          </a:xfrm>
+          <a:prstGeom prst="rect">
+            <a:avLst/>
+          </a:prstGeom>
+          <a:noFill/>
+          <a:ln/>
+        </p:spPr>
+        <p:txBody>
+          <a:bodyPr wrap="square" lIns="0" tIns="0" rIns="0" bIns="0" rtlCol="0" anchor="ctr"/>
+          <a:lstStyle/>
+          <a:p>
+            <a:pPr indent="0" marL="0">
+              <a:buNone/>
+            </a:pPr>
+            <a:r>
+              <a:rPr lang="en-US" sz="1350" dirty="0">
+                <a:solidFill>
+                  <a:srgbClr val="5C6675"/>
+                </a:solidFill>
+                <a:latin typeface="Calibri" pitchFamily="34" charset="0"/>
+                <a:ea typeface="Calibri" pitchFamily="34" charset="-122"/>
+                <a:cs typeface="Calibri" pitchFamily="34" charset="-120"/>
+              </a:rPr>
+              <a:t>CloudHealth  ·  Apptio  ·  Vantage  ·  nOps  ·  Finout  ·  CoreStack</a:t>
+            </a:r>
+            <a:endParaRPr lang="en-US" sz="1350" dirty="0"/>
+          </a:p>
+        </p:txBody>
+      </p:sp>
+      <p:sp>
+        <p:nvSpPr>
+          <p:cNvPr id="26" name="Text 24"/>
+          <p:cNvSpPr/>
+          <p:nvPr/>
+        </p:nvSpPr>
+        <p:spPr>
+          <a:xfrm>
+            <a:off x="877824" y="5760720"/>
+            <a:ext cx="1737360" cy="384048"/>
+          </a:xfrm>
+          <a:prstGeom prst="rect">
+            <a:avLst/>
+          </a:prstGeom>
+          <a:noFill/>
+          <a:ln/>
+        </p:spPr>
+        <p:txBody>
+          <a:bodyPr wrap="square" lIns="0" tIns="0" rIns="0" bIns="0" rtlCol="0" anchor="ctr"/>
+          <a:lstStyle/>
+          <a:p>
+            <a:pPr indent="0" marL="0">
+              <a:buNone/>
+            </a:pPr>
+            <a:r>
+              <a:rPr lang="en-US" sz="1350" b="1" dirty="0">
+                <a:solidFill>
+                  <a:srgbClr val="1B2430"/>
+                </a:solidFill>
+                <a:latin typeface="Calibri" pitchFamily="34" charset="0"/>
+                <a:ea typeface="Calibri" pitchFamily="34" charset="-122"/>
+                <a:cs typeface="Calibri" pitchFamily="34" charset="-120"/>
+              </a:rPr>
+              <a:t>Standard</a:t>
+            </a:r>
+            <a:endParaRPr lang="en-US" sz="1350" dirty="0"/>
+          </a:p>
+        </p:txBody>
+      </p:sp>
+      <p:sp>
+        <p:nvSpPr>
+          <p:cNvPr id="27" name="Text 25"/>
+          <p:cNvSpPr/>
+          <p:nvPr/>
+        </p:nvSpPr>
+        <p:spPr>
+          <a:xfrm>
+            <a:off x="2651760" y="5760720"/>
+            <a:ext cx="8595360" cy="384048"/>
+          </a:xfrm>
+          <a:prstGeom prst="rect">
+            <a:avLst/>
+          </a:prstGeom>
+          <a:noFill/>
+          <a:ln/>
+        </p:spPr>
+        <p:txBody>
+          <a:bodyPr wrap="square" lIns="0" tIns="0" rIns="0" bIns="0" rtlCol="0" anchor="ctr"/>
+          <a:lstStyle/>
+          <a:p>
+            <a:pPr indent="0" marL="0">
+              <a:buNone/>
+            </a:pPr>
+            <a:r>
+              <a:rPr lang="en-US" sz="1350" dirty="0">
+                <a:solidFill>
+                  <a:srgbClr val="5C6675"/>
+                </a:solidFill>
+                <a:latin typeface="Calibri" pitchFamily="34" charset="0"/>
+                <a:ea typeface="Calibri" pitchFamily="34" charset="-122"/>
+                <a:cs typeface="Calibri" pitchFamily="34" charset="-120"/>
+              </a:rPr>
+              <a:t>FOCUS-compliant platforms for multi-cloud reporting</a:t>
+            </a:r>
+            <a:endParaRPr lang="en-US" sz="1350" dirty="0"/>
+          </a:p>
+        </p:txBody>
+      </p:sp>
+    </p:spTree>
+  </p:cSld>
+  <p:clrMapOvr>
+    <a:masterClrMapping/>
+  </p:clrMapOvr>
+</p:sld>
+</file>
+
+<file path=ppt/slides/slide22.xml><?xml version="1.0" encoding="utf-8"?>
+<p:sld xmlns:a="http://schemas.openxmlformats.org/drawingml/2006/main" xmlns:r="http://schemas.openxmlformats.org/officeDocument/2006/relationships" xmlns:p="http://schemas.openxmlformats.org/presentationml/2006/main">
+  <p:cSld name="Slide 22">
     <p:bg>
       <p:bgPr>
         <a:solidFill>
@@ -15926,9 +17092,9 @@
 </p:sld>
 </file>
 
-<file path=ppt/slides/slide22.xml><?xml version="1.0" encoding="utf-8"?>
+<file path=ppt/slides/slide23.xml><?xml version="1.0" encoding="utf-8"?>
 <p:sld xmlns:a="http://schemas.openxmlformats.org/drawingml/2006/main" xmlns:r="http://schemas.openxmlformats.org/officeDocument/2006/relationships" xmlns:p="http://schemas.openxmlformats.org/presentationml/2006/main">
-  <p:cSld name="Slide 22">
+  <p:cSld name="Slide 23">
     <p:bg>
       <p:bgPr>
         <a:solidFill>

--- a/presentations/finops-gaining-visibility.pptx
+++ b/presentations/finops-gaining-visibility.pptx
@@ -28,9 +28,10 @@
     <p:sldId id="276" r:id="rId22"/>
     <p:sldId id="277" r:id="rId23"/>
     <p:sldId id="278" r:id="rId24"/>
+    <p:sldId id="279" r:id="rId25"/>
   </p:sldIdLst>
   <p:notesMasterIdLst>
-    <p:notesMasterId r:id="rId25"/>
+    <p:notesMasterId r:id="rId26"/>
   </p:notesMasterIdLst>
   <p:sldSz cx="12192000" cy="6858000"/>
   <p:notesSz cx="6858000" cy="12192000"/>
@@ -1404,7 +1405,7 @@
           <a:p>
             <a:r>
               <a:rPr lang="en-US" dirty="0"/>
-              <a:t>The slide that answers 'so what do you actually want engineering to do differently', and the chart is the argument: the same decision costs a conversation at design, an edit at pull request, a migration once deployed and a negotiation once it is on a contract. Nothing about the decision changed — only the cost of revisiting it. The three insertion points are deliberately small. None of them asks an engineer to learn cloud pricing; they put the number in front of the person at the moment they are already making the choice. The pull-request cost diff is the one to push for first, because it lands inside a ritual teams already have. Say the last line out loud, because it is the difference between this working and this being resented: the practices that succeed describe FinOps as partnering with engineers rather than policing them. A cost review that only ever says no gets routed around within a quarter.</a:t>
+              <a:t>This is the slide that defines shift left properly, so do not let it be heard as a tooling pitch. Shift left is a change in when the FinOps conversation happens: today it starts when the invoice arrives, and it belongs at requirements and design, where the decisions that commit the money are actually made. Walk the band left to right and make the point under it — by the time the design is agreed, most of the lifetime cost of that workload is already determined. Rightsizing afterwards trims the margin; the architecture set the base. The two cards are the exchange, and the right one matters more than the left. FinOps arrives with priced options and a cost target, but it leaves with an understanding of what the project actually needs — the real SLO, what is temporary, where the business value sits. That is why a named person has to be in the room rather than a report being circulated. Cite the Framework line at the bottom: this is a defined capability, not an invented process.</a:t>
             </a:r>
             <a:endParaRPr lang="en-US" dirty="0"/>
           </a:p>
@@ -1580,7 +1581,7 @@
           <a:p>
             <a:r>
               <a:rPr lang="en-US" dirty="0"/>
-              <a:t>The payoff slide for both halves of the deck, and the one to use if someone asks what all this buys. Walk the timeline left to right: the same overrun, found at four different moments, and only the first three leave anyone a decision to make. The fourth point is the status quo — it is not that the invoice is wrong, it is that by the time it arrives the only available action is explaining it. Land the closing line deliberately: we are not promising a smaller bill, and anyone who promises that before seeing the data is guessing. We are promising a bill with nothing surprising in it, which is a different and more defensible commitment.</a:t>
+              <a:t>The practical companion to the previous slide, and the one to hand to an architect. None of the six is a finance question — every one is a design question the team can answer in the room, and every one moves the bill by a large factor. Pick two to talk through rather than reading all six. The shape-of-load question is the highest-yield: sizing for a weekly peak is the most common and most expensive habit. The temporary question is the cheapest win, because an expiry date set on day one costs nothing and removing an environment two years later is a project nobody volunteers for. The bottom line is what makes the meeting real: the output is a number attached to the design and a cost target recorded next to the latency and availability targets, so cost becomes a non-functional requirement rather than a preference. Automation enforces it afterwards — the cost diff on the pull request and policy as code — but the number comes from this conversation, not from the tool.</a:t>
             </a:r>
             <a:endParaRPr lang="en-US" dirty="0"/>
           </a:p>
@@ -1668,7 +1669,7 @@
           <a:p>
             <a:r>
               <a:rPr lang="en-US" dirty="0"/>
-              <a:t>This is the ask. Step 1 is highlighted because it is the only one that cannot be parallelized — everything downstream degrades if the taxonomy is still in flux. Steps 2 and 4 are both arguments against over-engineering: pick the top spend categories and the tooling that matches the estate we actually have, not the one we might have in three years.</a:t>
+              <a:t>The payoff slide for both halves of the deck, and the one to use if someone asks what all this buys. Walk the timeline left to right: the same overrun, found at four different moments, and only the first three leave anyone a decision to make. The fourth point is the status quo — it is not that the invoice is wrong, it is that by the time it arrives the only available action is explaining it. Land the closing line deliberately: we are not promising a smaller bill, and anyone who promises that before seeing the data is guessing. We are promising a bill with nothing surprising in it, which is a different and more defensible commitment.</a:t>
             </a:r>
             <a:endParaRPr lang="en-US" dirty="0"/>
           </a:p>
@@ -1756,7 +1757,7 @@
           <a:p>
             <a:r>
               <a:rPr lang="en-US" dirty="0"/>
-              <a:t>Close on the causal chain rather than a summary of slides. Each link is a separate management commitment: allocation data, published ownership, cost surfaced in the engineering workflow, and a review cadence that keeps it alive. Ask for the first two today; the rest follow from them.</a:t>
+              <a:t>This is the ask. Step 1 is highlighted because it is the only one that cannot be parallelized — everything downstream degrades if the taxonomy is still in flux. Steps 2 and 4 are both arguments against over-engineering: pick the top spend categories and the tooling that matches the estate we actually have, not the one we might have in three years.</a:t>
             </a:r>
             <a:endParaRPr lang="en-US" dirty="0"/>
           </a:p>
@@ -1844,7 +1845,7 @@
           <a:p>
             <a:r>
               <a:rPr lang="en-US" dirty="0"/>
-              <a:t>Anticipate three questions. What will this cost — mostly effort, not licences, if we stay on native tooling. How long until we see savings — allocation coverage improves in weeks, targeted savings follow the first full month of clean data. Who owns it — name the tagging owner and the review cadence before leaving the room, or nothing on the previous slides happens.</a:t>
+              <a:t>Close on the causal chain rather than a summary of slides. Each link is a separate management commitment: allocation data, published ownership, cost surfaced in the engineering workflow, and a review cadence that keeps it alive. Ask for the first two today; the rest follow from them.</a:t>
             </a:r>
             <a:endParaRPr lang="en-US" dirty="0"/>
           </a:p>
@@ -1868,6 +1869,94 @@
             <a:fld id="{F7021451-1387-4CA6-816F-3879F97B5CBC}" type="slidenum">
               <a:rPr lang="en-US"/>
               <a:t>23</a:t>
+            </a:fld>
+            <a:endParaRPr lang="en-US"/>
+          </a:p>
+        </p:txBody>
+      </p:sp>
+    </p:spTree>
+    <p:extLst>
+      <p:ext uri="{BB962C8B-B14F-4D97-AF65-F5344CB8AC3E}">
+        <p14:creationId xmlns:p14="http://schemas.microsoft.com/office/powerpoint/2010/main" val="1024086991"/>
+      </p:ext>
+    </p:extLst>
+  </p:cSld>
+  <p:clrMapOvr>
+    <a:masterClrMapping/>
+  </p:clrMapOvr>
+</p:notes>
+</file>
+
+<file path=ppt/notesSlides/notesSlide24.xml><?xml version="1.0" encoding="utf-8"?>
+<p:notes xmlns:a="http://schemas.openxmlformats.org/drawingml/2006/main" xmlns:r="http://schemas.openxmlformats.org/officeDocument/2006/relationships" xmlns:p="http://schemas.openxmlformats.org/presentationml/2006/main">
+  <p:cSld>
+    <p:spTree>
+      <p:nvGrpSpPr>
+        <p:cNvPr id="1" name=""/>
+        <p:cNvGrpSpPr/>
+        <p:nvPr/>
+      </p:nvGrpSpPr>
+      <p:grpSpPr>
+        <a:xfrm>
+          <a:off x="0" y="0"/>
+          <a:ext cx="0" cy="0"/>
+          <a:chOff x="0" y="0"/>
+          <a:chExt cx="0" cy="0"/>
+        </a:xfrm>
+      </p:grpSpPr>
+      <p:sp>
+        <p:nvSpPr>
+          <p:cNvPr id="2" name="Slide Image Placeholder 1"/>
+          <p:cNvSpPr>
+            <a:spLocks noGrp="1" noRot="1" noChangeAspect="1"/>
+          </p:cNvSpPr>
+          <p:nvPr>
+            <p:ph type="sldImg"/>
+          </p:nvPr>
+        </p:nvSpPr>
+        <p:spPr/>
+      </p:sp>
+      <p:sp>
+        <p:nvSpPr>
+          <p:cNvPr id="3" name="Notes Placeholder 2"/>
+          <p:cNvSpPr>
+            <a:spLocks noGrp="1"/>
+          </p:cNvSpPr>
+          <p:nvPr>
+            <p:ph type="body" idx="1"/>
+          </p:nvPr>
+        </p:nvSpPr>
+        <p:spPr/>
+        <p:txBody>
+          <a:bodyPr/>
+          <a:lstStyle/>
+          <a:p>
+            <a:r>
+              <a:rPr lang="en-US" dirty="0"/>
+              <a:t>Anticipate three questions. What will this cost — mostly effort, not licences, if we stay on native tooling. How long until we see savings — allocation coverage improves in weeks, targeted savings follow the first full month of clean data. Who owns it — name the tagging owner and the review cadence before leaving the room, or nothing on the previous slides happens.</a:t>
+            </a:r>
+            <a:endParaRPr lang="en-US" dirty="0"/>
+          </a:p>
+        </p:txBody>
+      </p:sp>
+      <p:sp>
+        <p:nvSpPr>
+          <p:cNvPr id="4" name="Slide Number Placeholder 3"/>
+          <p:cNvSpPr>
+            <a:spLocks noGrp="1"/>
+          </p:cNvSpPr>
+          <p:nvPr>
+            <p:ph type="sldNum" sz="quarter" idx="10"/>
+          </p:nvPr>
+        </p:nvSpPr>
+        <p:spPr/>
+        <p:txBody>
+          <a:bodyPr/>
+          <a:lstStyle/>
+          <a:p>
+            <a:fld id="{F7021451-1387-4CA6-816F-3879F97B5CBC}" type="slidenum">
+              <a:rPr lang="en-US"/>
+              <a:t>24</a:t>
             </a:fld>
             <a:endParaRPr lang="en-US"/>
           </a:p>
@@ -12374,7 +12463,7 @@
                 <a:ea typeface="Cambria" pitchFamily="34" charset="-122"/>
                 <a:cs typeface="Cambria" pitchFamily="34" charset="-120"/>
               </a:rPr>
-              <a:t>Catch it at design, not on the invoice</a:t>
+              <a:t>Shift left is a seat at the design table</a:t>
             </a:r>
             <a:endParaRPr lang="en-US" sz="3100" dirty="0"/>
           </a:p>
@@ -12413,7 +12502,7 @@
                 <a:ea typeface="Calibri" pitchFamily="34" charset="-122"/>
                 <a:cs typeface="Calibri" pitchFamily="34" charset="-120"/>
               </a:rPr>
-              <a:t>Cost is a design constraint, reviewed alongside security and reliability — not a report that arrives afterwards.</a:t>
+              <a:t>Not a tool. A change in when FinOps shows up — and the earlier it is, the less of the bill is already decided.</a:t>
             </a:r>
             <a:endParaRPr lang="en-US" sz="1500" dirty="0"/>
           </a:p>
@@ -12421,75 +12510,36 @@
       </p:sp>
       <p:sp>
         <p:nvSpPr>
-          <p:cNvPr id="5" name="Text 3"/>
-          <p:cNvSpPr/>
-          <p:nvPr/>
-        </p:nvSpPr>
-        <p:spPr>
-          <a:xfrm>
-            <a:off x="548640" y="2194560"/>
-            <a:ext cx="4114800" cy="274320"/>
-          </a:xfrm>
-          <a:prstGeom prst="rect">
-            <a:avLst/>
-          </a:prstGeom>
-          <a:noFill/>
-          <a:ln/>
-        </p:spPr>
-        <p:txBody>
-          <a:bodyPr wrap="square" lIns="0" tIns="0" rIns="0" bIns="0" rtlCol="0" anchor="ctr"/>
-          <a:lstStyle/>
-          <a:p>
-            <a:pPr indent="0" marL="0">
-              <a:buNone/>
-            </a:pPr>
-            <a:r>
-              <a:rPr lang="en-US" sz="1200" b="1" spc="180" kern="0" dirty="0">
-                <a:solidFill>
-                  <a:srgbClr val="5C6675"/>
-                </a:solidFill>
-                <a:latin typeface="Calibri" pitchFamily="34" charset="0"/>
-                <a:ea typeface="Calibri" pitchFamily="34" charset="-122"/>
-                <a:cs typeface="Calibri" pitchFamily="34" charset="-120"/>
-              </a:rPr>
-              <a:t>Effort to change the decision</a:t>
-            </a:r>
-            <a:endParaRPr lang="en-US" sz="1200" dirty="0"/>
-          </a:p>
-        </p:txBody>
-      </p:sp>
-      <p:sp>
-        <p:nvSpPr>
-          <p:cNvPr id="6" name="Shape 4"/>
-          <p:cNvSpPr/>
-          <p:nvPr/>
-        </p:nvSpPr>
-        <p:spPr>
-          <a:xfrm>
-            <a:off x="685800" y="4572000"/>
-            <a:ext cx="1188720" cy="457200"/>
+          <p:cNvPr id="5" name="Shape 3"/>
+          <p:cNvSpPr/>
+          <p:nvPr/>
+        </p:nvSpPr>
+        <p:spPr>
+          <a:xfrm>
+            <a:off x="548640" y="2651760"/>
+            <a:ext cx="1773936" cy="566928"/>
           </a:xfrm>
           <a:prstGeom prst="roundRect">
             <a:avLst>
-              <a:gd name="adj" fmla="val 12000"/>
+              <a:gd name="adj" fmla="val 12903"/>
             </a:avLst>
           </a:prstGeom>
           <a:solidFill>
-            <a:srgbClr val="2E8B7A"/>
-          </a:solidFill>
-          <a:ln/>
-        </p:spPr>
-      </p:sp>
-      <p:sp>
-        <p:nvSpPr>
-          <p:cNvPr id="7" name="Text 5"/>
-          <p:cNvSpPr/>
-          <p:nvPr/>
-        </p:nvSpPr>
-        <p:spPr>
-          <a:xfrm>
-            <a:off x="548640" y="5102352"/>
-            <a:ext cx="1463040" cy="274320"/>
+            <a:srgbClr val="FBEFD8"/>
+          </a:solidFill>
+          <a:ln/>
+        </p:spPr>
+      </p:sp>
+      <p:sp>
+        <p:nvSpPr>
+          <p:cNvPr id="6" name="Text 4"/>
+          <p:cNvSpPr/>
+          <p:nvPr/>
+        </p:nvSpPr>
+        <p:spPr>
+          <a:xfrm>
+            <a:off x="548640" y="2651760"/>
+            <a:ext cx="1773936" cy="566928"/>
           </a:xfrm>
           <a:prstGeom prst="rect">
             <a:avLst/>
@@ -12505,91 +12555,52 @@
               <a:buNone/>
             </a:pPr>
             <a:r>
-              <a:rPr lang="en-US" sz="1250" b="1" dirty="0">
-                <a:solidFill>
-                  <a:srgbClr val="1B2430"/>
-                </a:solidFill>
-                <a:latin typeface="Calibri" pitchFamily="34" charset="0"/>
-                <a:ea typeface="Calibri" pitchFamily="34" charset="-122"/>
-                <a:cs typeface="Calibri" pitchFamily="34" charset="-120"/>
-              </a:rPr>
-              <a:t>Design</a:t>
-            </a:r>
-            <a:endParaRPr lang="en-US" sz="1250" dirty="0"/>
-          </a:p>
-        </p:txBody>
-      </p:sp>
-      <p:sp>
-        <p:nvSpPr>
-          <p:cNvPr id="8" name="Text 6"/>
-          <p:cNvSpPr/>
-          <p:nvPr/>
-        </p:nvSpPr>
-        <p:spPr>
-          <a:xfrm>
-            <a:off x="548640" y="5376672"/>
-            <a:ext cx="1463040" cy="256032"/>
-          </a:xfrm>
-          <a:prstGeom prst="rect">
-            <a:avLst/>
-          </a:prstGeom>
-          <a:noFill/>
-          <a:ln/>
-        </p:spPr>
-        <p:txBody>
-          <a:bodyPr wrap="square" lIns="0" tIns="0" rIns="0" bIns="0" rtlCol="0" anchor="ctr"/>
-          <a:lstStyle/>
-          <a:p>
-            <a:pPr algn="ctr" indent="0" marL="0">
-              <a:buNone/>
-            </a:pPr>
-            <a:r>
-              <a:rPr lang="en-US" sz="1150" dirty="0">
-                <a:solidFill>
-                  <a:srgbClr val="5C6675"/>
-                </a:solidFill>
-                <a:latin typeface="Calibri" pitchFamily="34" charset="0"/>
-                <a:ea typeface="Calibri" pitchFamily="34" charset="-122"/>
-                <a:cs typeface="Calibri" pitchFamily="34" charset="-120"/>
-              </a:rPr>
-              <a:t>a conversation</a:t>
-            </a:r>
-            <a:endParaRPr lang="en-US" sz="1150" dirty="0"/>
-          </a:p>
-        </p:txBody>
-      </p:sp>
-      <p:sp>
-        <p:nvSpPr>
-          <p:cNvPr id="9" name="Shape 7"/>
-          <p:cNvSpPr/>
-          <p:nvPr/>
-        </p:nvSpPr>
-        <p:spPr>
-          <a:xfrm>
-            <a:off x="2148840" y="4114800"/>
-            <a:ext cx="1188720" cy="914400"/>
+              <a:rPr lang="en-US" sz="1300" b="1" dirty="0">
+                <a:solidFill>
+                  <a:srgbClr val="6B4A0E"/>
+                </a:solidFill>
+                <a:latin typeface="Calibri" pitchFamily="34" charset="0"/>
+                <a:ea typeface="Calibri" pitchFamily="34" charset="-122"/>
+                <a:cs typeface="Calibri" pitchFamily="34" charset="-120"/>
+              </a:rPr>
+              <a:t>Requirements</a:t>
+            </a:r>
+            <a:endParaRPr lang="en-US" sz="1300" dirty="0"/>
+          </a:p>
+        </p:txBody>
+      </p:sp>
+      <p:sp>
+        <p:nvSpPr>
+          <p:cNvPr id="7" name="Shape 5"/>
+          <p:cNvSpPr/>
+          <p:nvPr/>
+        </p:nvSpPr>
+        <p:spPr>
+          <a:xfrm>
+            <a:off x="2423160" y="2651760"/>
+            <a:ext cx="1773936" cy="566928"/>
           </a:xfrm>
           <a:prstGeom prst="roundRect">
             <a:avLst>
-              <a:gd name="adj" fmla="val 6000"/>
+              <a:gd name="adj" fmla="val 12903"/>
             </a:avLst>
           </a:prstGeom>
           <a:solidFill>
-            <a:srgbClr val="2E8B7A"/>
-          </a:solidFill>
-          <a:ln/>
-        </p:spPr>
-      </p:sp>
-      <p:sp>
-        <p:nvSpPr>
-          <p:cNvPr id="10" name="Text 8"/>
-          <p:cNvSpPr/>
-          <p:nvPr/>
-        </p:nvSpPr>
-        <p:spPr>
-          <a:xfrm>
-            <a:off x="2011680" y="5102352"/>
-            <a:ext cx="1463040" cy="274320"/>
+            <a:srgbClr val="FBEFD8"/>
+          </a:solidFill>
+          <a:ln/>
+        </p:spPr>
+      </p:sp>
+      <p:sp>
+        <p:nvSpPr>
+          <p:cNvPr id="8" name="Text 6"/>
+          <p:cNvSpPr/>
+          <p:nvPr/>
+        </p:nvSpPr>
+        <p:spPr>
+          <a:xfrm>
+            <a:off x="2423160" y="2651760"/>
+            <a:ext cx="1773936" cy="566928"/>
           </a:xfrm>
           <a:prstGeom prst="rect">
             <a:avLst/>
@@ -12605,91 +12616,52 @@
               <a:buNone/>
             </a:pPr>
             <a:r>
-              <a:rPr lang="en-US" sz="1250" b="1" dirty="0">
-                <a:solidFill>
-                  <a:srgbClr val="1B2430"/>
-                </a:solidFill>
-                <a:latin typeface="Calibri" pitchFamily="34" charset="0"/>
-                <a:ea typeface="Calibri" pitchFamily="34" charset="-122"/>
-                <a:cs typeface="Calibri" pitchFamily="34" charset="-120"/>
-              </a:rPr>
-              <a:t>Pull request</a:t>
-            </a:r>
-            <a:endParaRPr lang="en-US" sz="1250" dirty="0"/>
-          </a:p>
-        </p:txBody>
-      </p:sp>
-      <p:sp>
-        <p:nvSpPr>
-          <p:cNvPr id="11" name="Text 9"/>
-          <p:cNvSpPr/>
-          <p:nvPr/>
-        </p:nvSpPr>
-        <p:spPr>
-          <a:xfrm>
-            <a:off x="2011680" y="5376672"/>
-            <a:ext cx="1463040" cy="256032"/>
-          </a:xfrm>
-          <a:prstGeom prst="rect">
-            <a:avLst/>
-          </a:prstGeom>
-          <a:noFill/>
-          <a:ln/>
-        </p:spPr>
-        <p:txBody>
-          <a:bodyPr wrap="square" lIns="0" tIns="0" rIns="0" bIns="0" rtlCol="0" anchor="ctr"/>
-          <a:lstStyle/>
-          <a:p>
-            <a:pPr algn="ctr" indent="0" marL="0">
-              <a:buNone/>
-            </a:pPr>
-            <a:r>
-              <a:rPr lang="en-US" sz="1150" dirty="0">
-                <a:solidFill>
-                  <a:srgbClr val="5C6675"/>
-                </a:solidFill>
-                <a:latin typeface="Calibri" pitchFamily="34" charset="0"/>
-                <a:ea typeface="Calibri" pitchFamily="34" charset="-122"/>
-                <a:cs typeface="Calibri" pitchFamily="34" charset="-120"/>
-              </a:rPr>
-              <a:t>an edit</a:t>
-            </a:r>
-            <a:endParaRPr lang="en-US" sz="1150" dirty="0"/>
-          </a:p>
-        </p:txBody>
-      </p:sp>
-      <p:sp>
-        <p:nvSpPr>
-          <p:cNvPr id="12" name="Shape 10"/>
-          <p:cNvSpPr/>
-          <p:nvPr/>
-        </p:nvSpPr>
-        <p:spPr>
-          <a:xfrm>
-            <a:off x="3611880" y="3337560"/>
-            <a:ext cx="1188720" cy="1691640"/>
+              <a:rPr lang="en-US" sz="1300" b="1" dirty="0">
+                <a:solidFill>
+                  <a:srgbClr val="6B4A0E"/>
+                </a:solidFill>
+                <a:latin typeface="Calibri" pitchFamily="34" charset="0"/>
+                <a:ea typeface="Calibri" pitchFamily="34" charset="-122"/>
+                <a:cs typeface="Calibri" pitchFamily="34" charset="-120"/>
+              </a:rPr>
+              <a:t>Design</a:t>
+            </a:r>
+            <a:endParaRPr lang="en-US" sz="1300" dirty="0"/>
+          </a:p>
+        </p:txBody>
+      </p:sp>
+      <p:sp>
+        <p:nvSpPr>
+          <p:cNvPr id="9" name="Shape 7"/>
+          <p:cNvSpPr/>
+          <p:nvPr/>
+        </p:nvSpPr>
+        <p:spPr>
+          <a:xfrm>
+            <a:off x="4297680" y="2651760"/>
+            <a:ext cx="1773936" cy="566928"/>
           </a:xfrm>
           <a:prstGeom prst="roundRect">
             <a:avLst>
-              <a:gd name="adj" fmla="val 4615"/>
+              <a:gd name="adj" fmla="val 12903"/>
             </a:avLst>
           </a:prstGeom>
           <a:solidFill>
-            <a:srgbClr val="E39B2C"/>
-          </a:solidFill>
-          <a:ln/>
-        </p:spPr>
-      </p:sp>
-      <p:sp>
-        <p:nvSpPr>
-          <p:cNvPr id="13" name="Text 11"/>
-          <p:cNvSpPr/>
-          <p:nvPr/>
-        </p:nvSpPr>
-        <p:spPr>
-          <a:xfrm>
-            <a:off x="3474720" y="5102352"/>
-            <a:ext cx="1463040" cy="274320"/>
+            <a:srgbClr val="F1F3F6"/>
+          </a:solidFill>
+          <a:ln/>
+        </p:spPr>
+      </p:sp>
+      <p:sp>
+        <p:nvSpPr>
+          <p:cNvPr id="10" name="Text 8"/>
+          <p:cNvSpPr/>
+          <p:nvPr/>
+        </p:nvSpPr>
+        <p:spPr>
+          <a:xfrm>
+            <a:off x="4297680" y="2651760"/>
+            <a:ext cx="1773936" cy="566928"/>
           </a:xfrm>
           <a:prstGeom prst="rect">
             <a:avLst/>
@@ -12705,46 +12677,7 @@
               <a:buNone/>
             </a:pPr>
             <a:r>
-              <a:rPr lang="en-US" sz="1250" b="1" dirty="0">
-                <a:solidFill>
-                  <a:srgbClr val="1B2430"/>
-                </a:solidFill>
-                <a:latin typeface="Calibri" pitchFamily="34" charset="0"/>
-                <a:ea typeface="Calibri" pitchFamily="34" charset="-122"/>
-                <a:cs typeface="Calibri" pitchFamily="34" charset="-120"/>
-              </a:rPr>
-              <a:t>Deployed</a:t>
-            </a:r>
-            <a:endParaRPr lang="en-US" sz="1250" dirty="0"/>
-          </a:p>
-        </p:txBody>
-      </p:sp>
-      <p:sp>
-        <p:nvSpPr>
-          <p:cNvPr id="14" name="Text 12"/>
-          <p:cNvSpPr/>
-          <p:nvPr/>
-        </p:nvSpPr>
-        <p:spPr>
-          <a:xfrm>
-            <a:off x="3474720" y="5376672"/>
-            <a:ext cx="1463040" cy="256032"/>
-          </a:xfrm>
-          <a:prstGeom prst="rect">
-            <a:avLst/>
-          </a:prstGeom>
-          <a:noFill/>
-          <a:ln/>
-        </p:spPr>
-        <p:txBody>
-          <a:bodyPr wrap="square" lIns="0" tIns="0" rIns="0" bIns="0" rtlCol="0" anchor="ctr"/>
-          <a:lstStyle/>
-          <a:p>
-            <a:pPr algn="ctr" indent="0" marL="0">
-              <a:buNone/>
-            </a:pPr>
-            <a:r>
-              <a:rPr lang="en-US" sz="1150" dirty="0">
+              <a:rPr lang="en-US" sz="1300" dirty="0">
                 <a:solidFill>
                   <a:srgbClr val="5C6675"/>
                 </a:solidFill>
@@ -12752,44 +12685,44 @@
                 <a:ea typeface="Calibri" pitchFamily="34" charset="-122"/>
                 <a:cs typeface="Calibri" pitchFamily="34" charset="-120"/>
               </a:rPr>
-              <a:t>a migration</a:t>
-            </a:r>
-            <a:endParaRPr lang="en-US" sz="1150" dirty="0"/>
-          </a:p>
-        </p:txBody>
-      </p:sp>
-      <p:sp>
-        <p:nvSpPr>
-          <p:cNvPr id="15" name="Shape 13"/>
-          <p:cNvSpPr/>
-          <p:nvPr/>
-        </p:nvSpPr>
-        <p:spPr>
-          <a:xfrm>
-            <a:off x="5074920" y="2651760"/>
-            <a:ext cx="1188720" cy="2377440"/>
+              <a:t>Build</a:t>
+            </a:r>
+            <a:endParaRPr lang="en-US" sz="1300" dirty="0"/>
+          </a:p>
+        </p:txBody>
+      </p:sp>
+      <p:sp>
+        <p:nvSpPr>
+          <p:cNvPr id="11" name="Shape 9"/>
+          <p:cNvSpPr/>
+          <p:nvPr/>
+        </p:nvSpPr>
+        <p:spPr>
+          <a:xfrm>
+            <a:off x="6172200" y="2651760"/>
+            <a:ext cx="1773936" cy="566928"/>
           </a:xfrm>
           <a:prstGeom prst="roundRect">
             <a:avLst>
-              <a:gd name="adj" fmla="val 4615"/>
+              <a:gd name="adj" fmla="val 12903"/>
             </a:avLst>
           </a:prstGeom>
           <a:solidFill>
-            <a:srgbClr val="A6432F"/>
-          </a:solidFill>
-          <a:ln/>
-        </p:spPr>
-      </p:sp>
-      <p:sp>
-        <p:nvSpPr>
-          <p:cNvPr id="16" name="Text 14"/>
-          <p:cNvSpPr/>
-          <p:nvPr/>
-        </p:nvSpPr>
-        <p:spPr>
-          <a:xfrm>
-            <a:off x="4937760" y="5102352"/>
-            <a:ext cx="1463040" cy="274320"/>
+            <a:srgbClr val="F1F3F6"/>
+          </a:solidFill>
+          <a:ln/>
+        </p:spPr>
+      </p:sp>
+      <p:sp>
+        <p:nvSpPr>
+          <p:cNvPr id="12" name="Text 10"/>
+          <p:cNvSpPr/>
+          <p:nvPr/>
+        </p:nvSpPr>
+        <p:spPr>
+          <a:xfrm>
+            <a:off x="6172200" y="2651760"/>
+            <a:ext cx="1773936" cy="566928"/>
           </a:xfrm>
           <a:prstGeom prst="rect">
             <a:avLst/>
@@ -12805,46 +12738,7 @@
               <a:buNone/>
             </a:pPr>
             <a:r>
-              <a:rPr lang="en-US" sz="1250" b="1" dirty="0">
-                <a:solidFill>
-                  <a:srgbClr val="1B2430"/>
-                </a:solidFill>
-                <a:latin typeface="Calibri" pitchFamily="34" charset="0"/>
-                <a:ea typeface="Calibri" pitchFamily="34" charset="-122"/>
-                <a:cs typeface="Calibri" pitchFamily="34" charset="-120"/>
-              </a:rPr>
-              <a:t>Invoiced</a:t>
-            </a:r>
-            <a:endParaRPr lang="en-US" sz="1250" dirty="0"/>
-          </a:p>
-        </p:txBody>
-      </p:sp>
-      <p:sp>
-        <p:nvSpPr>
-          <p:cNvPr id="17" name="Text 15"/>
-          <p:cNvSpPr/>
-          <p:nvPr/>
-        </p:nvSpPr>
-        <p:spPr>
-          <a:xfrm>
-            <a:off x="4937760" y="5376672"/>
-            <a:ext cx="1463040" cy="256032"/>
-          </a:xfrm>
-          <a:prstGeom prst="rect">
-            <a:avLst/>
-          </a:prstGeom>
-          <a:noFill/>
-          <a:ln/>
-        </p:spPr>
-        <p:txBody>
-          <a:bodyPr wrap="square" lIns="0" tIns="0" rIns="0" bIns="0" rtlCol="0" anchor="ctr"/>
-          <a:lstStyle/>
-          <a:p>
-            <a:pPr algn="ctr" indent="0" marL="0">
-              <a:buNone/>
-            </a:pPr>
-            <a:r>
-              <a:rPr lang="en-US" sz="1150" dirty="0">
+              <a:rPr lang="en-US" sz="1300" dirty="0">
                 <a:solidFill>
                   <a:srgbClr val="5C6675"/>
                 </a:solidFill>
@@ -12852,89 +12746,299 @@
                 <a:ea typeface="Calibri" pitchFamily="34" charset="-122"/>
                 <a:cs typeface="Calibri" pitchFamily="34" charset="-120"/>
               </a:rPr>
-              <a:t>a negotiation</a:t>
-            </a:r>
-            <a:endParaRPr lang="en-US" sz="1150" dirty="0"/>
-          </a:p>
-        </p:txBody>
-      </p:sp>
-      <p:sp>
-        <p:nvSpPr>
-          <p:cNvPr id="18" name="Shape 16"/>
-          <p:cNvSpPr/>
-          <p:nvPr/>
-        </p:nvSpPr>
-        <p:spPr>
-          <a:xfrm>
-            <a:off x="548640" y="5029200"/>
-            <a:ext cx="5989320" cy="36576"/>
+              <a:t>Deploy</a:t>
+            </a:r>
+            <a:endParaRPr lang="en-US" sz="1300" dirty="0"/>
+          </a:p>
+        </p:txBody>
+      </p:sp>
+      <p:sp>
+        <p:nvSpPr>
+          <p:cNvPr id="13" name="Shape 11"/>
+          <p:cNvSpPr/>
+          <p:nvPr/>
+        </p:nvSpPr>
+        <p:spPr>
+          <a:xfrm>
+            <a:off x="8046720" y="2651760"/>
+            <a:ext cx="1773936" cy="566928"/>
           </a:xfrm>
           <a:prstGeom prst="roundRect">
             <a:avLst>
-              <a:gd name="adj" fmla="val 50000"/>
+              <a:gd name="adj" fmla="val 12903"/>
             </a:avLst>
           </a:prstGeom>
           <a:solidFill>
-            <a:srgbClr val="DFE4EA"/>
-          </a:solidFill>
-          <a:ln/>
-        </p:spPr>
-      </p:sp>
-      <p:sp>
-        <p:nvSpPr>
-          <p:cNvPr id="19" name="Shape 17"/>
-          <p:cNvSpPr/>
-          <p:nvPr/>
-        </p:nvSpPr>
-        <p:spPr>
-          <a:xfrm>
-            <a:off x="6858000" y="2084832"/>
-            <a:ext cx="4782312" cy="3602736"/>
+            <a:srgbClr val="F1F3F6"/>
+          </a:solidFill>
+          <a:ln/>
+        </p:spPr>
+      </p:sp>
+      <p:sp>
+        <p:nvSpPr>
+          <p:cNvPr id="14" name="Text 12"/>
+          <p:cNvSpPr/>
+          <p:nvPr/>
+        </p:nvSpPr>
+        <p:spPr>
+          <a:xfrm>
+            <a:off x="8046720" y="2651760"/>
+            <a:ext cx="1773936" cy="566928"/>
+          </a:xfrm>
+          <a:prstGeom prst="rect">
+            <a:avLst/>
+          </a:prstGeom>
+          <a:noFill/>
+          <a:ln/>
+        </p:spPr>
+        <p:txBody>
+          <a:bodyPr wrap="square" lIns="0" tIns="0" rIns="0" bIns="0" rtlCol="0" anchor="ctr"/>
+          <a:lstStyle/>
+          <a:p>
+            <a:pPr algn="ctr" indent="0" marL="0">
+              <a:buNone/>
+            </a:pPr>
+            <a:r>
+              <a:rPr lang="en-US" sz="1300" dirty="0">
+                <a:solidFill>
+                  <a:srgbClr val="5C6675"/>
+                </a:solidFill>
+                <a:latin typeface="Calibri" pitchFamily="34" charset="0"/>
+                <a:ea typeface="Calibri" pitchFamily="34" charset="-122"/>
+                <a:cs typeface="Calibri" pitchFamily="34" charset="-120"/>
+              </a:rPr>
+              <a:t>Run</a:t>
+            </a:r>
+            <a:endParaRPr lang="en-US" sz="1300" dirty="0"/>
+          </a:p>
+        </p:txBody>
+      </p:sp>
+      <p:sp>
+        <p:nvSpPr>
+          <p:cNvPr id="15" name="Shape 13"/>
+          <p:cNvSpPr/>
+          <p:nvPr/>
+        </p:nvSpPr>
+        <p:spPr>
+          <a:xfrm>
+            <a:off x="9921240" y="2651760"/>
+            <a:ext cx="1773936" cy="566928"/>
           </a:xfrm>
           <a:prstGeom prst="roundRect">
             <a:avLst>
-              <a:gd name="adj" fmla="val 2284"/>
+              <a:gd name="adj" fmla="val 12903"/>
             </a:avLst>
           </a:prstGeom>
           <a:solidFill>
+            <a:srgbClr val="F1F3F6"/>
+          </a:solidFill>
+          <a:ln/>
+        </p:spPr>
+      </p:sp>
+      <p:sp>
+        <p:nvSpPr>
+          <p:cNvPr id="16" name="Text 14"/>
+          <p:cNvSpPr/>
+          <p:nvPr/>
+        </p:nvSpPr>
+        <p:spPr>
+          <a:xfrm>
+            <a:off x="9921240" y="2651760"/>
+            <a:ext cx="1773936" cy="566928"/>
+          </a:xfrm>
+          <a:prstGeom prst="rect">
+            <a:avLst/>
+          </a:prstGeom>
+          <a:noFill/>
+          <a:ln/>
+        </p:spPr>
+        <p:txBody>
+          <a:bodyPr wrap="square" lIns="0" tIns="0" rIns="0" bIns="0" rtlCol="0" anchor="ctr"/>
+          <a:lstStyle/>
+          <a:p>
+            <a:pPr algn="ctr" indent="0" marL="0">
+              <a:buNone/>
+            </a:pPr>
+            <a:r>
+              <a:rPr lang="en-US" sz="1300" dirty="0">
+                <a:solidFill>
+                  <a:srgbClr val="5C6675"/>
+                </a:solidFill>
+                <a:latin typeface="Calibri" pitchFamily="34" charset="0"/>
+                <a:ea typeface="Calibri" pitchFamily="34" charset="-122"/>
+                <a:cs typeface="Calibri" pitchFamily="34" charset="-120"/>
+              </a:rPr>
+              <a:t>Invoice</a:t>
+            </a:r>
+            <a:endParaRPr lang="en-US" sz="1300" dirty="0"/>
+          </a:p>
+        </p:txBody>
+      </p:sp>
+      <p:sp>
+        <p:nvSpPr>
+          <p:cNvPr id="17" name="Text 15"/>
+          <p:cNvSpPr/>
+          <p:nvPr/>
+        </p:nvSpPr>
+        <p:spPr>
+          <a:xfrm>
+            <a:off x="548640" y="2267712"/>
+            <a:ext cx="3749040" cy="310896"/>
+          </a:xfrm>
+          <a:prstGeom prst="rect">
+            <a:avLst/>
+          </a:prstGeom>
+          <a:noFill/>
+          <a:ln/>
+        </p:spPr>
+        <p:txBody>
+          <a:bodyPr wrap="square" lIns="0" tIns="0" rIns="0" bIns="0" rtlCol="0" anchor="ctr"/>
+          <a:lstStyle/>
+          <a:p>
+            <a:pPr indent="0" marL="0">
+              <a:buNone/>
+            </a:pPr>
+            <a:r>
+              <a:rPr lang="en-US" sz="1200" b="1" spc="140" kern="0" dirty="0">
+                <a:solidFill>
+                  <a:srgbClr val="B87B18"/>
+                </a:solidFill>
+                <a:latin typeface="Calibri" pitchFamily="34" charset="0"/>
+                <a:ea typeface="Calibri" pitchFamily="34" charset="-122"/>
+                <a:cs typeface="Calibri" pitchFamily="34" charset="-120"/>
+              </a:rPr>
+              <a:t>Where FinOps belongs</a:t>
+            </a:r>
+            <a:endParaRPr lang="en-US" sz="1200" dirty="0"/>
+          </a:p>
+        </p:txBody>
+      </p:sp>
+      <p:sp>
+        <p:nvSpPr>
+          <p:cNvPr id="18" name="Text 16"/>
+          <p:cNvSpPr/>
+          <p:nvPr/>
+        </p:nvSpPr>
+        <p:spPr>
+          <a:xfrm>
+            <a:off x="8046720" y="3310128"/>
+            <a:ext cx="3593592" cy="310896"/>
+          </a:xfrm>
+          <a:prstGeom prst="rect">
+            <a:avLst/>
+          </a:prstGeom>
+          <a:noFill/>
+          <a:ln/>
+        </p:spPr>
+        <p:txBody>
+          <a:bodyPr wrap="square" lIns="0" tIns="0" rIns="0" bIns="0" rtlCol="0" anchor="ctr"/>
+          <a:lstStyle/>
+          <a:p>
+            <a:pPr algn="r" indent="0" marL="0">
+              <a:buNone/>
+            </a:pPr>
+            <a:r>
+              <a:rPr lang="en-US" sz="1200" b="1" spc="140" kern="0" dirty="0">
+                <a:solidFill>
+                  <a:srgbClr val="5C6675"/>
+                </a:solidFill>
+                <a:latin typeface="Calibri" pitchFamily="34" charset="0"/>
+                <a:ea typeface="Calibri" pitchFamily="34" charset="-122"/>
+                <a:cs typeface="Calibri" pitchFamily="34" charset="-120"/>
+              </a:rPr>
+              <a:t>Where FinOps usually arrives</a:t>
+            </a:r>
+            <a:endParaRPr lang="en-US" sz="1200" dirty="0"/>
+          </a:p>
+        </p:txBody>
+      </p:sp>
+      <p:sp>
+        <p:nvSpPr>
+          <p:cNvPr id="19" name="Text 17"/>
+          <p:cNvSpPr/>
+          <p:nvPr/>
+        </p:nvSpPr>
+        <p:spPr>
+          <a:xfrm>
+            <a:off x="548640" y="3310128"/>
+            <a:ext cx="5486400" cy="310896"/>
+          </a:xfrm>
+          <a:prstGeom prst="rect">
+            <a:avLst/>
+          </a:prstGeom>
+          <a:noFill/>
+          <a:ln/>
+        </p:spPr>
+        <p:txBody>
+          <a:bodyPr wrap="square" lIns="0" tIns="0" rIns="0" bIns="0" rtlCol="0" anchor="ctr"/>
+          <a:lstStyle/>
+          <a:p>
+            <a:pPr indent="0" marL="0">
+              <a:buNone/>
+            </a:pPr>
+            <a:r>
+              <a:rPr lang="en-US" sz="1250" dirty="0">
+                <a:solidFill>
+                  <a:srgbClr val="1B2430"/>
+                </a:solidFill>
+                <a:latin typeface="Calibri" pitchFamily="34" charset="0"/>
+                <a:ea typeface="Calibri" pitchFamily="34" charset="-122"/>
+                <a:cs typeface="Calibri" pitchFamily="34" charset="-120"/>
+              </a:rPr>
+              <a:t>Most of the lifetime cost is committed here.</a:t>
+            </a:r>
+            <a:endParaRPr lang="en-US" sz="1250" dirty="0"/>
+          </a:p>
+        </p:txBody>
+      </p:sp>
+      <p:sp>
+        <p:nvSpPr>
+          <p:cNvPr id="20" name="Shape 18"/>
+          <p:cNvSpPr/>
+          <p:nvPr/>
+        </p:nvSpPr>
+        <p:spPr>
+          <a:xfrm>
+            <a:off x="548640" y="3913632"/>
+            <a:ext cx="5394960" cy="2121408"/>
+          </a:xfrm>
+          <a:prstGeom prst="roundRect">
+            <a:avLst>
+              <a:gd name="adj" fmla="val 3879"/>
+            </a:avLst>
+          </a:prstGeom>
+          <a:solidFill>
             <a:srgbClr val="1F2936"/>
           </a:solidFill>
           <a:ln/>
-          <a:effectLst>
-            <a:outerShdw sx="100000" sy="100000" kx="0" ky="0" algn="bl" rotWithShape="0" blurRad="127000" dist="25400" dir="5400000">
-              <a:srgbClr val="8C99A8">
-                <a:alpha val="16000"/>
-              </a:srgbClr>
-            </a:outerShdw>
-          </a:effectLst>
-        </p:spPr>
-      </p:sp>
-      <p:sp>
-        <p:nvSpPr>
-          <p:cNvPr id="20" name="Text 18"/>
-          <p:cNvSpPr/>
-          <p:nvPr/>
-        </p:nvSpPr>
-        <p:spPr>
-          <a:xfrm>
-            <a:off x="7168896" y="2267712"/>
-            <a:ext cx="4114800" cy="292608"/>
-          </a:xfrm>
-          <a:prstGeom prst="rect">
-            <a:avLst/>
-          </a:prstGeom>
-          <a:noFill/>
-          <a:ln/>
-        </p:spPr>
-        <p:txBody>
-          <a:bodyPr wrap="square" lIns="0" tIns="0" rIns="0" bIns="0" rtlCol="0" anchor="ctr"/>
-          <a:lstStyle/>
-          <a:p>
-            <a:pPr indent="0" marL="0">
-              <a:buNone/>
-            </a:pPr>
-            <a:r>
-              <a:rPr lang="en-US" sz="1200" b="1" spc="180" kern="0" dirty="0">
+        </p:spPr>
+      </p:sp>
+      <p:sp>
+        <p:nvSpPr>
+          <p:cNvPr id="21" name="Text 19"/>
+          <p:cNvSpPr/>
+          <p:nvPr/>
+        </p:nvSpPr>
+        <p:spPr>
+          <a:xfrm>
+            <a:off x="859536" y="4078224"/>
+            <a:ext cx="4754880" cy="274320"/>
+          </a:xfrm>
+          <a:prstGeom prst="rect">
+            <a:avLst/>
+          </a:prstGeom>
+          <a:noFill/>
+          <a:ln/>
+        </p:spPr>
+        <p:txBody>
+          <a:bodyPr wrap="square" lIns="0" tIns="0" rIns="0" bIns="0" rtlCol="0" anchor="ctr"/>
+          <a:lstStyle/>
+          <a:p>
+            <a:pPr indent="0" marL="0">
+              <a:buNone/>
+            </a:pPr>
+            <a:r>
+              <a:rPr lang="en-US" sz="1100" b="1" spc="140" kern="0" dirty="0">
                 <a:solidFill>
                   <a:srgbClr val="E39B2C"/>
                 </a:solidFill>
@@ -12942,75 +13046,51 @@
                 <a:ea typeface="Calibri" pitchFamily="34" charset="-122"/>
                 <a:cs typeface="Calibri" pitchFamily="34" charset="-120"/>
               </a:rPr>
-              <a:t>Where cost enters the workflow</a:t>
-            </a:r>
-            <a:endParaRPr lang="en-US" sz="1200" dirty="0"/>
-          </a:p>
-        </p:txBody>
-      </p:sp>
-      <p:sp>
-        <p:nvSpPr>
-          <p:cNvPr id="21" name="Shape 19"/>
-          <p:cNvSpPr/>
-          <p:nvPr/>
-        </p:nvSpPr>
-        <p:spPr>
-          <a:xfrm>
-            <a:off x="7168896" y="2743200"/>
-            <a:ext cx="420624" cy="420624"/>
+              <a:t>WHAT FINOPS BRINGS TO THE ROOM</a:t>
+            </a:r>
+            <a:endParaRPr lang="en-US" sz="1100" dirty="0"/>
+          </a:p>
+        </p:txBody>
+      </p:sp>
+      <p:sp>
+        <p:nvSpPr>
+          <p:cNvPr id="22" name="Shape 20"/>
+          <p:cNvSpPr/>
+          <p:nvPr/>
+        </p:nvSpPr>
+        <p:spPr>
+          <a:xfrm>
+            <a:off x="877824" y="4590288"/>
+            <a:ext cx="100584" cy="100584"/>
           </a:xfrm>
           <a:prstGeom prst="ellipse">
             <a:avLst/>
           </a:prstGeom>
           <a:solidFill>
-            <a:srgbClr val="2E3A48"/>
-          </a:solidFill>
-          <a:ln/>
-        </p:spPr>
-      </p:sp>
-      <p:pic>
-        <p:nvPicPr>
-          <p:cNvPr id="22" name="Image 0" descr="preencoded.png">    </p:cNvPr>
-          <p:cNvPicPr>
-            <a:picLocks noChangeAspect="1"/>
-          </p:cNvPicPr>
-          <p:nvPr/>
-        </p:nvPicPr>
-        <p:blipFill>
-          <a:blip r:embed="rId1"/>
-          <a:stretch>
-            <a:fillRect/>
-          </a:stretch>
-        </p:blipFill>
-        <p:spPr>
-          <a:xfrm>
-            <a:off x="7274052" y="2848356"/>
-            <a:ext cx="210312" cy="210312"/>
-          </a:xfrm>
-          <a:prstGeom prst="rect">
-            <a:avLst/>
-          </a:prstGeom>
-        </p:spPr>
-      </p:pic>
-      <p:sp>
-        <p:nvSpPr>
-          <p:cNvPr id="23" name="Text 20"/>
-          <p:cNvSpPr/>
-          <p:nvPr/>
-        </p:nvSpPr>
-        <p:spPr>
-          <a:xfrm>
-            <a:off x="7735824" y="2670048"/>
-            <a:ext cx="3602736" cy="914400"/>
-          </a:xfrm>
-          <a:prstGeom prst="rect">
-            <a:avLst/>
-          </a:prstGeom>
-          <a:noFill/>
-          <a:ln/>
-        </p:spPr>
-        <p:txBody>
-          <a:bodyPr wrap="square" lIns="0" tIns="0" rIns="0" bIns="0" rtlCol="0" anchor="ctr"/>
+            <a:srgbClr val="E39B2C"/>
+          </a:solidFill>
+          <a:ln/>
+        </p:spPr>
+      </p:sp>
+      <p:sp>
+        <p:nvSpPr>
+          <p:cNvPr id="23" name="Text 21"/>
+          <p:cNvSpPr/>
+          <p:nvPr/>
+        </p:nvSpPr>
+        <p:spPr>
+          <a:xfrm>
+            <a:off x="1115568" y="4443984"/>
+            <a:ext cx="4517136" cy="512064"/>
+          </a:xfrm>
+          <a:prstGeom prst="rect">
+            <a:avLst/>
+          </a:prstGeom>
+          <a:noFill/>
+          <a:ln/>
+        </p:spPr>
+        <p:txBody>
+          <a:bodyPr wrap="square" lIns="0" tIns="0" rIns="0" bIns="0" rtlCol="0" anchor="t"/>
           <a:lstStyle/>
           <a:p>
             <a:pPr indent="0" marL="0">
@@ -13020,7 +13100,7 @@
               <a:buNone/>
             </a:pPr>
             <a:r>
-              <a:rPr lang="en-US" sz="1350" b="1" dirty="0">
+              <a:rPr lang="en-US" sz="1250" b="1" dirty="0">
                 <a:solidFill>
                   <a:srgbClr val="FFFFFF"/>
                 </a:solidFill>
@@ -13028,11 +13108,8 @@
                 <a:ea typeface="Calibri" pitchFamily="34" charset="-122"/>
                 <a:cs typeface="Calibri" pitchFamily="34" charset="-120"/>
               </a:rPr>
-              <a:t>Architecture review</a:t>
-            </a:r>
-            <a:endParaRPr lang="en-US" sz="1350" dirty="0"/>
-          </a:p>
-          <a:p>
+              <a:t>Two or three options, priced  </a:t>
+            </a:r>
             <a:pPr indent="0" marL="0">
               <a:lnSpc>
                 <a:spcPts val="1600"/>
@@ -13040,7 +13117,7 @@
               <a:buNone/>
             </a:pPr>
             <a:r>
-              <a:rPr lang="en-US" sz="1200" dirty="0">
+              <a:rPr lang="en-US" sz="1250" dirty="0">
                 <a:solidFill>
                   <a:srgbClr val="9EABBA"/>
                 </a:solidFill>
@@ -13048,75 +13125,51 @@
                 <a:ea typeface="Calibri" pitchFamily="34" charset="-122"/>
                 <a:cs typeface="Calibri" pitchFamily="34" charset="-120"/>
               </a:rPr>
-              <a:t>Price two or three options before choosing one. Multi-AZ or single, this SKU or that.</a:t>
-            </a:r>
-            <a:endParaRPr lang="en-US" sz="1350" dirty="0"/>
-          </a:p>
-        </p:txBody>
-      </p:sp>
-      <p:sp>
-        <p:nvSpPr>
-          <p:cNvPr id="24" name="Shape 21"/>
-          <p:cNvSpPr/>
-          <p:nvPr/>
-        </p:nvSpPr>
-        <p:spPr>
-          <a:xfrm>
-            <a:off x="7168896" y="3730752"/>
-            <a:ext cx="420624" cy="420624"/>
+              <a:t>The choice gets made with the number visible.</a:t>
+            </a:r>
+            <a:endParaRPr lang="en-US" sz="1250" dirty="0"/>
+          </a:p>
+        </p:txBody>
+      </p:sp>
+      <p:sp>
+        <p:nvSpPr>
+          <p:cNvPr id="24" name="Shape 22"/>
+          <p:cNvSpPr/>
+          <p:nvPr/>
+        </p:nvSpPr>
+        <p:spPr>
+          <a:xfrm>
+            <a:off x="877824" y="5120640"/>
+            <a:ext cx="100584" cy="100584"/>
           </a:xfrm>
           <a:prstGeom prst="ellipse">
             <a:avLst/>
           </a:prstGeom>
           <a:solidFill>
-            <a:srgbClr val="2E3A48"/>
-          </a:solidFill>
-          <a:ln/>
-        </p:spPr>
-      </p:sp>
-      <p:pic>
-        <p:nvPicPr>
-          <p:cNvPr id="25" name="Image 1" descr="preencoded.png">    </p:cNvPr>
-          <p:cNvPicPr>
-            <a:picLocks noChangeAspect="1"/>
-          </p:cNvPicPr>
-          <p:nvPr/>
-        </p:nvPicPr>
-        <p:blipFill>
-          <a:blip r:embed="rId2"/>
-          <a:stretch>
-            <a:fillRect/>
-          </a:stretch>
-        </p:blipFill>
-        <p:spPr>
-          <a:xfrm>
-            <a:off x="7274052" y="3835908"/>
-            <a:ext cx="210312" cy="210312"/>
-          </a:xfrm>
-          <a:prstGeom prst="rect">
-            <a:avLst/>
-          </a:prstGeom>
-        </p:spPr>
-      </p:pic>
-      <p:sp>
-        <p:nvSpPr>
-          <p:cNvPr id="26" name="Text 22"/>
-          <p:cNvSpPr/>
-          <p:nvPr/>
-        </p:nvSpPr>
-        <p:spPr>
-          <a:xfrm>
-            <a:off x="7735824" y="3657600"/>
-            <a:ext cx="3602736" cy="914400"/>
-          </a:xfrm>
-          <a:prstGeom prst="rect">
-            <a:avLst/>
-          </a:prstGeom>
-          <a:noFill/>
-          <a:ln/>
-        </p:spPr>
-        <p:txBody>
-          <a:bodyPr wrap="square" lIns="0" tIns="0" rIns="0" bIns="0" rtlCol="0" anchor="ctr"/>
+            <a:srgbClr val="E39B2C"/>
+          </a:solidFill>
+          <a:ln/>
+        </p:spPr>
+      </p:sp>
+      <p:sp>
+        <p:nvSpPr>
+          <p:cNvPr id="25" name="Text 23"/>
+          <p:cNvSpPr/>
+          <p:nvPr/>
+        </p:nvSpPr>
+        <p:spPr>
+          <a:xfrm>
+            <a:off x="1115568" y="4974336"/>
+            <a:ext cx="4517136" cy="512064"/>
+          </a:xfrm>
+          <a:prstGeom prst="rect">
+            <a:avLst/>
+          </a:prstGeom>
+          <a:noFill/>
+          <a:ln/>
+        </p:spPr>
+        <p:txBody>
+          <a:bodyPr wrap="square" lIns="0" tIns="0" rIns="0" bIns="0" rtlCol="0" anchor="t"/>
           <a:lstStyle/>
           <a:p>
             <a:pPr indent="0" marL="0">
@@ -13126,7 +13179,7 @@
               <a:buNone/>
             </a:pPr>
             <a:r>
-              <a:rPr lang="en-US" sz="1350" b="1" dirty="0">
+              <a:rPr lang="en-US" sz="1250" b="1" dirty="0">
                 <a:solidFill>
                   <a:srgbClr val="FFFFFF"/>
                 </a:solidFill>
@@ -13134,11 +13187,8 @@
                 <a:ea typeface="Calibri" pitchFamily="34" charset="-122"/>
                 <a:cs typeface="Calibri" pitchFamily="34" charset="-120"/>
               </a:rPr>
-              <a:t>Cost diff on the pull request</a:t>
-            </a:r>
-            <a:endParaRPr lang="en-US" sz="1350" dirty="0"/>
-          </a:p>
-          <a:p>
+              <a:t>A cost target for the workload  </a:t>
+            </a:r>
             <a:pPr indent="0" marL="0">
               <a:lnSpc>
                 <a:spcPts val="1600"/>
@@ -13146,7 +13196,7 @@
               <a:buNone/>
             </a:pPr>
             <a:r>
-              <a:rPr lang="en-US" sz="1200" dirty="0">
+              <a:rPr lang="en-US" sz="1250" dirty="0">
                 <a:solidFill>
                   <a:srgbClr val="9EABBA"/>
                 </a:solidFill>
@@ -13154,75 +13204,51 @@
                 <a:ea typeface="Calibri" pitchFamily="34" charset="-122"/>
                 <a:cs typeface="Calibri" pitchFamily="34" charset="-120"/>
               </a:rPr>
-              <a:t>Every infrastructure change shows its monthly delta, so cost is part of code review.</a:t>
-            </a:r>
-            <a:endParaRPr lang="en-US" sz="1350" dirty="0"/>
-          </a:p>
-        </p:txBody>
-      </p:sp>
-      <p:sp>
-        <p:nvSpPr>
-          <p:cNvPr id="27" name="Shape 23"/>
-          <p:cNvSpPr/>
-          <p:nvPr/>
-        </p:nvSpPr>
-        <p:spPr>
-          <a:xfrm>
-            <a:off x="7168896" y="4718304"/>
-            <a:ext cx="420624" cy="420624"/>
+              <a:t>Recorded beside latency and availability.</a:t>
+            </a:r>
+            <a:endParaRPr lang="en-US" sz="1250" dirty="0"/>
+          </a:p>
+        </p:txBody>
+      </p:sp>
+      <p:sp>
+        <p:nvSpPr>
+          <p:cNvPr id="26" name="Shape 24"/>
+          <p:cNvSpPr/>
+          <p:nvPr/>
+        </p:nvSpPr>
+        <p:spPr>
+          <a:xfrm>
+            <a:off x="877824" y="5650992"/>
+            <a:ext cx="100584" cy="100584"/>
           </a:xfrm>
           <a:prstGeom prst="ellipse">
             <a:avLst/>
           </a:prstGeom>
           <a:solidFill>
-            <a:srgbClr val="2E3A48"/>
-          </a:solidFill>
-          <a:ln/>
-        </p:spPr>
-      </p:sp>
-      <p:pic>
-        <p:nvPicPr>
-          <p:cNvPr id="28" name="Image 2" descr="preencoded.png">    </p:cNvPr>
-          <p:cNvPicPr>
-            <a:picLocks noChangeAspect="1"/>
-          </p:cNvPicPr>
-          <p:nvPr/>
-        </p:nvPicPr>
-        <p:blipFill>
-          <a:blip r:embed="rId3"/>
-          <a:stretch>
-            <a:fillRect/>
-          </a:stretch>
-        </p:blipFill>
-        <p:spPr>
-          <a:xfrm>
-            <a:off x="7274052" y="4823460"/>
-            <a:ext cx="210312" cy="210312"/>
-          </a:xfrm>
-          <a:prstGeom prst="rect">
-            <a:avLst/>
-          </a:prstGeom>
-        </p:spPr>
-      </p:pic>
-      <p:sp>
-        <p:nvSpPr>
-          <p:cNvPr id="29" name="Text 24"/>
-          <p:cNvSpPr/>
-          <p:nvPr/>
-        </p:nvSpPr>
-        <p:spPr>
-          <a:xfrm>
-            <a:off x="7735824" y="4645152"/>
-            <a:ext cx="3602736" cy="914400"/>
-          </a:xfrm>
-          <a:prstGeom prst="rect">
-            <a:avLst/>
-          </a:prstGeom>
-          <a:noFill/>
-          <a:ln/>
-        </p:spPr>
-        <p:txBody>
-          <a:bodyPr wrap="square" lIns="0" tIns="0" rIns="0" bIns="0" rtlCol="0" anchor="ctr"/>
+            <a:srgbClr val="E39B2C"/>
+          </a:solidFill>
+          <a:ln/>
+        </p:spPr>
+      </p:sp>
+      <p:sp>
+        <p:nvSpPr>
+          <p:cNvPr id="27" name="Text 25"/>
+          <p:cNvSpPr/>
+          <p:nvPr/>
+        </p:nvSpPr>
+        <p:spPr>
+          <a:xfrm>
+            <a:off x="1115568" y="5504688"/>
+            <a:ext cx="4517136" cy="512064"/>
+          </a:xfrm>
+          <a:prstGeom prst="rect">
+            <a:avLst/>
+          </a:prstGeom>
+          <a:noFill/>
+          <a:ln/>
+        </p:spPr>
+        <p:txBody>
+          <a:bodyPr wrap="square" lIns="0" tIns="0" rIns="0" bIns="0" rtlCol="0" anchor="t"/>
           <a:lstStyle/>
           <a:p>
             <a:pPr indent="0" marL="0">
@@ -13232,7 +13258,7 @@
               <a:buNone/>
             </a:pPr>
             <a:r>
-              <a:rPr lang="en-US" sz="1350" b="1" dirty="0">
+              <a:rPr lang="en-US" sz="1250" b="1" dirty="0">
                 <a:solidFill>
                   <a:srgbClr val="FFFFFF"/>
                 </a:solidFill>
@@ -13240,11 +13266,8 @@
                 <a:ea typeface="Calibri" pitchFamily="34" charset="-122"/>
                 <a:cs typeface="Calibri" pitchFamily="34" charset="-120"/>
               </a:rPr>
-              <a:t>Policy as code</a:t>
-            </a:r>
-            <a:endParaRPr lang="en-US" sz="1350" dirty="0"/>
-          </a:p>
-          <a:p>
+              <a:t>The allocation plan  </a:t>
+            </a:r>
             <a:pPr indent="0" marL="0">
               <a:lnSpc>
                 <a:spcPts val="1600"/>
@@ -13252,7 +13275,7 @@
               <a:buNone/>
             </a:pPr>
             <a:r>
-              <a:rPr lang="en-US" sz="1200" dirty="0">
+              <a:rPr lang="en-US" sz="1250" dirty="0">
                 <a:solidFill>
                   <a:srgbClr val="9EABBA"/>
                 </a:solidFill>
@@ -13260,90 +13283,346 @@
                 <a:ea typeface="Calibri" pitchFamily="34" charset="-122"/>
                 <a:cs typeface="Calibri" pitchFamily="34" charset="-120"/>
               </a:rPr>
-              <a:t>Tagging and budget rules enforced in the pipeline — the expensive change never merges.</a:t>
-            </a:r>
-            <a:endParaRPr lang="en-US" sz="1350" dirty="0"/>
-          </a:p>
-        </p:txBody>
-      </p:sp>
-      <p:sp>
-        <p:nvSpPr>
-          <p:cNvPr id="30" name="Shape 25"/>
-          <p:cNvSpPr/>
-          <p:nvPr/>
-        </p:nvSpPr>
-        <p:spPr>
-          <a:xfrm>
-            <a:off x="548640" y="5742432"/>
-            <a:ext cx="11091672" cy="841248"/>
+              <a:t>Which tags, which cost centre, which unit.</a:t>
+            </a:r>
+            <a:endParaRPr lang="en-US" sz="1250" dirty="0"/>
+          </a:p>
+        </p:txBody>
+      </p:sp>
+      <p:sp>
+        <p:nvSpPr>
+          <p:cNvPr id="28" name="Shape 26"/>
+          <p:cNvSpPr/>
+          <p:nvPr/>
+        </p:nvSpPr>
+        <p:spPr>
+          <a:xfrm>
+            <a:off x="6245352" y="3913632"/>
+            <a:ext cx="5394960" cy="2121408"/>
           </a:xfrm>
           <a:prstGeom prst="roundRect">
             <a:avLst>
-              <a:gd name="adj" fmla="val 9783"/>
+              <a:gd name="adj" fmla="val 3879"/>
             </a:avLst>
           </a:prstGeom>
           <a:solidFill>
-            <a:srgbClr val="FBEFD8"/>
-          </a:solidFill>
-          <a:ln/>
-        </p:spPr>
-      </p:sp>
-      <p:sp>
-        <p:nvSpPr>
-          <p:cNvPr id="31" name="Text 26"/>
-          <p:cNvSpPr/>
-          <p:nvPr/>
-        </p:nvSpPr>
-        <p:spPr>
-          <a:xfrm>
-            <a:off x="877824" y="5742432"/>
-            <a:ext cx="10424160" cy="841248"/>
-          </a:xfrm>
-          <a:prstGeom prst="rect">
-            <a:avLst/>
-          </a:prstGeom>
-          <a:noFill/>
-          <a:ln/>
-        </p:spPr>
-        <p:txBody>
-          <a:bodyPr wrap="square" lIns="0" tIns="0" rIns="0" bIns="0" rtlCol="0" anchor="ctr"/>
+            <a:srgbClr val="F1F3F6"/>
+          </a:solidFill>
+          <a:ln/>
+        </p:spPr>
+      </p:sp>
+      <p:sp>
+        <p:nvSpPr>
+          <p:cNvPr id="29" name="Text 27"/>
+          <p:cNvSpPr/>
+          <p:nvPr/>
+        </p:nvSpPr>
+        <p:spPr>
+          <a:xfrm>
+            <a:off x="6556248" y="4078224"/>
+            <a:ext cx="4754880" cy="274320"/>
+          </a:xfrm>
+          <a:prstGeom prst="rect">
+            <a:avLst/>
+          </a:prstGeom>
+          <a:noFill/>
+          <a:ln/>
+        </p:spPr>
+        <p:txBody>
+          <a:bodyPr wrap="square" lIns="0" tIns="0" rIns="0" bIns="0" rtlCol="0" anchor="ctr"/>
+          <a:lstStyle/>
+          <a:p>
+            <a:pPr indent="0" marL="0">
+              <a:buNone/>
+            </a:pPr>
+            <a:r>
+              <a:rPr lang="en-US" sz="1100" b="1" spc="140" kern="0" dirty="0">
+                <a:solidFill>
+                  <a:srgbClr val="1F6B5C"/>
+                </a:solidFill>
+                <a:latin typeface="Calibri" pitchFamily="34" charset="0"/>
+                <a:ea typeface="Calibri" pitchFamily="34" charset="-122"/>
+                <a:cs typeface="Calibri" pitchFamily="34" charset="-120"/>
+              </a:rPr>
+              <a:t>WHAT FINOPS NEEDS TO LEARN FROM THE TEAM</a:t>
+            </a:r>
+            <a:endParaRPr lang="en-US" sz="1100" dirty="0"/>
+          </a:p>
+        </p:txBody>
+      </p:sp>
+      <p:sp>
+        <p:nvSpPr>
+          <p:cNvPr id="30" name="Shape 28"/>
+          <p:cNvSpPr/>
+          <p:nvPr/>
+        </p:nvSpPr>
+        <p:spPr>
+          <a:xfrm>
+            <a:off x="6574536" y="4590288"/>
+            <a:ext cx="100584" cy="100584"/>
+          </a:xfrm>
+          <a:prstGeom prst="ellipse">
+            <a:avLst/>
+          </a:prstGeom>
+          <a:solidFill>
+            <a:srgbClr val="1F6B5C"/>
+          </a:solidFill>
+          <a:ln/>
+        </p:spPr>
+      </p:sp>
+      <p:sp>
+        <p:nvSpPr>
+          <p:cNvPr id="31" name="Text 29"/>
+          <p:cNvSpPr/>
+          <p:nvPr/>
+        </p:nvSpPr>
+        <p:spPr>
+          <a:xfrm>
+            <a:off x="6812280" y="4443984"/>
+            <a:ext cx="4517136" cy="512064"/>
+          </a:xfrm>
+          <a:prstGeom prst="rect">
+            <a:avLst/>
+          </a:prstGeom>
+          <a:noFill/>
+          <a:ln/>
+        </p:spPr>
+        <p:txBody>
+          <a:bodyPr wrap="square" lIns="0" tIns="0" rIns="0" bIns="0" rtlCol="0" anchor="t"/>
           <a:lstStyle/>
           <a:p>
             <a:pPr indent="0" marL="0">
               <a:lnSpc>
-                <a:spcPts val="1800"/>
+                <a:spcPts val="1600"/>
               </a:lnSpc>
               <a:buNone/>
             </a:pPr>
             <a:r>
-              <a:rPr lang="en-US" sz="1300" b="1" dirty="0">
-                <a:solidFill>
-                  <a:srgbClr val="6B4A0E"/>
-                </a:solidFill>
-                <a:latin typeface="Calibri" pitchFamily="34" charset="0"/>
-                <a:ea typeface="Calibri" pitchFamily="34" charset="-122"/>
-                <a:cs typeface="Calibri" pitchFamily="34" charset="-120"/>
-              </a:rPr>
-              <a:t>Pre-deployment architecture costing is the most requested capability in the State of FinOps 2026 — </a:t>
+              <a:rPr lang="en-US" sz="1250" b="1" dirty="0">
+                <a:solidFill>
+                  <a:srgbClr val="1B2430"/>
+                </a:solidFill>
+                <a:latin typeface="Calibri" pitchFamily="34" charset="0"/>
+                <a:ea typeface="Calibri" pitchFamily="34" charset="-122"/>
+                <a:cs typeface="Calibri" pitchFamily="34" charset="-120"/>
+              </a:rPr>
+              <a:t>What the project actually needs  </a:t>
             </a:r>
             <a:pPr indent="0" marL="0">
               <a:lnSpc>
-                <a:spcPts val="1800"/>
+                <a:spcPts val="1600"/>
               </a:lnSpc>
               <a:buNone/>
             </a:pPr>
             <a:r>
-              <a:rPr lang="en-US" sz="1300" dirty="0">
-                <a:solidFill>
-                  <a:srgbClr val="6B4A0E"/>
-                </a:solidFill>
-                <a:latin typeface="Calibri" pitchFamily="34" charset="0"/>
-                <a:ea typeface="Calibri" pitchFamily="34" charset="-122"/>
-                <a:cs typeface="Calibri" pitchFamily="34" charset="-120"/>
-              </a:rPr>
-              <a:t>and the practices that get it working describe FinOps as partnering with engineers, not policing them. Give teams the cost of a choice at the moment they make it; nobody has to become a pricing expert.</a:t>
-            </a:r>
-            <a:endParaRPr lang="en-US" sz="1300" dirty="0"/>
+              <a:rPr lang="en-US" sz="1250" dirty="0">
+                <a:solidFill>
+                  <a:srgbClr val="5C6675"/>
+                </a:solidFill>
+                <a:latin typeface="Calibri" pitchFamily="34" charset="0"/>
+                <a:ea typeface="Calibri" pitchFamily="34" charset="-122"/>
+                <a:cs typeface="Calibri" pitchFamily="34" charset="-120"/>
+              </a:rPr>
+              <a:t>Scale, growth, retention, and the real SLO.</a:t>
+            </a:r>
+            <a:endParaRPr lang="en-US" sz="1250" dirty="0"/>
+          </a:p>
+        </p:txBody>
+      </p:sp>
+      <p:sp>
+        <p:nvSpPr>
+          <p:cNvPr id="32" name="Shape 30"/>
+          <p:cNvSpPr/>
+          <p:nvPr/>
+        </p:nvSpPr>
+        <p:spPr>
+          <a:xfrm>
+            <a:off x="6574536" y="5120640"/>
+            <a:ext cx="100584" cy="100584"/>
+          </a:xfrm>
+          <a:prstGeom prst="ellipse">
+            <a:avLst/>
+          </a:prstGeom>
+          <a:solidFill>
+            <a:srgbClr val="1F6B5C"/>
+          </a:solidFill>
+          <a:ln/>
+        </p:spPr>
+      </p:sp>
+      <p:sp>
+        <p:nvSpPr>
+          <p:cNvPr id="33" name="Text 31"/>
+          <p:cNvSpPr/>
+          <p:nvPr/>
+        </p:nvSpPr>
+        <p:spPr>
+          <a:xfrm>
+            <a:off x="6812280" y="4974336"/>
+            <a:ext cx="4517136" cy="512064"/>
+          </a:xfrm>
+          <a:prstGeom prst="rect">
+            <a:avLst/>
+          </a:prstGeom>
+          <a:noFill/>
+          <a:ln/>
+        </p:spPr>
+        <p:txBody>
+          <a:bodyPr wrap="square" lIns="0" tIns="0" rIns="0" bIns="0" rtlCol="0" anchor="t"/>
+          <a:lstStyle/>
+          <a:p>
+            <a:pPr indent="0" marL="0">
+              <a:lnSpc>
+                <a:spcPts val="1600"/>
+              </a:lnSpc>
+              <a:buNone/>
+            </a:pPr>
+            <a:r>
+              <a:rPr lang="en-US" sz="1250" b="1" dirty="0">
+                <a:solidFill>
+                  <a:srgbClr val="1B2430"/>
+                </a:solidFill>
+                <a:latin typeface="Calibri" pitchFamily="34" charset="0"/>
+                <a:ea typeface="Calibri" pitchFamily="34" charset="-122"/>
+                <a:cs typeface="Calibri" pitchFamily="34" charset="-120"/>
+              </a:rPr>
+              <a:t>What is temporary  </a:t>
+            </a:r>
+            <a:pPr indent="0" marL="0">
+              <a:lnSpc>
+                <a:spcPts val="1600"/>
+              </a:lnSpc>
+              <a:buNone/>
+            </a:pPr>
+            <a:r>
+              <a:rPr lang="en-US" sz="1250" dirty="0">
+                <a:solidFill>
+                  <a:srgbClr val="5C6675"/>
+                </a:solidFill>
+                <a:latin typeface="Calibri" pitchFamily="34" charset="0"/>
+                <a:ea typeface="Calibri" pitchFamily="34" charset="-122"/>
+                <a:cs typeface="Calibri" pitchFamily="34" charset="-120"/>
+              </a:rPr>
+              <a:t>An end date set now costs nothing to honour later.</a:t>
+            </a:r>
+            <a:endParaRPr lang="en-US" sz="1250" dirty="0"/>
+          </a:p>
+        </p:txBody>
+      </p:sp>
+      <p:sp>
+        <p:nvSpPr>
+          <p:cNvPr id="34" name="Shape 32"/>
+          <p:cNvSpPr/>
+          <p:nvPr/>
+        </p:nvSpPr>
+        <p:spPr>
+          <a:xfrm>
+            <a:off x="6574536" y="5650992"/>
+            <a:ext cx="100584" cy="100584"/>
+          </a:xfrm>
+          <a:prstGeom prst="ellipse">
+            <a:avLst/>
+          </a:prstGeom>
+          <a:solidFill>
+            <a:srgbClr val="1F6B5C"/>
+          </a:solidFill>
+          <a:ln/>
+        </p:spPr>
+      </p:sp>
+      <p:sp>
+        <p:nvSpPr>
+          <p:cNvPr id="35" name="Text 33"/>
+          <p:cNvSpPr/>
+          <p:nvPr/>
+        </p:nvSpPr>
+        <p:spPr>
+          <a:xfrm>
+            <a:off x="6812280" y="5504688"/>
+            <a:ext cx="4517136" cy="512064"/>
+          </a:xfrm>
+          <a:prstGeom prst="rect">
+            <a:avLst/>
+          </a:prstGeom>
+          <a:noFill/>
+          <a:ln/>
+        </p:spPr>
+        <p:txBody>
+          <a:bodyPr wrap="square" lIns="0" tIns="0" rIns="0" bIns="0" rtlCol="0" anchor="t"/>
+          <a:lstStyle/>
+          <a:p>
+            <a:pPr indent="0" marL="0">
+              <a:lnSpc>
+                <a:spcPts val="1600"/>
+              </a:lnSpc>
+              <a:buNone/>
+            </a:pPr>
+            <a:r>
+              <a:rPr lang="en-US" sz="1250" b="1" dirty="0">
+                <a:solidFill>
+                  <a:srgbClr val="1B2430"/>
+                </a:solidFill>
+                <a:latin typeface="Calibri" pitchFamily="34" charset="0"/>
+                <a:ea typeface="Calibri" pitchFamily="34" charset="-122"/>
+                <a:cs typeface="Calibri" pitchFamily="34" charset="-120"/>
+              </a:rPr>
+              <a:t>Where the business value sits  </a:t>
+            </a:r>
+            <a:pPr indent="0" marL="0">
+              <a:lnSpc>
+                <a:spcPts val="1600"/>
+              </a:lnSpc>
+              <a:buNone/>
+            </a:pPr>
+            <a:r>
+              <a:rPr lang="en-US" sz="1250" dirty="0">
+                <a:solidFill>
+                  <a:srgbClr val="5C6675"/>
+                </a:solidFill>
+                <a:latin typeface="Calibri" pitchFamily="34" charset="0"/>
+                <a:ea typeface="Calibri" pitchFamily="34" charset="-122"/>
+                <a:cs typeface="Calibri" pitchFamily="34" charset="-120"/>
+              </a:rPr>
+              <a:t>Per customer, per order, per model call.</a:t>
+            </a:r>
+            <a:endParaRPr lang="en-US" sz="1250" dirty="0"/>
+          </a:p>
+        </p:txBody>
+      </p:sp>
+      <p:sp>
+        <p:nvSpPr>
+          <p:cNvPr id="36" name="Text 34"/>
+          <p:cNvSpPr/>
+          <p:nvPr/>
+        </p:nvSpPr>
+        <p:spPr>
+          <a:xfrm>
+            <a:off x="548640" y="6144768"/>
+            <a:ext cx="11091672" cy="457200"/>
+          </a:xfrm>
+          <a:prstGeom prst="rect">
+            <a:avLst/>
+          </a:prstGeom>
+          <a:noFill/>
+          <a:ln/>
+        </p:spPr>
+        <p:txBody>
+          <a:bodyPr wrap="square" lIns="0" tIns="0" rIns="0" bIns="0" rtlCol="0" anchor="ctr"/>
+          <a:lstStyle/>
+          <a:p>
+            <a:pPr indent="0" marL="0">
+              <a:buNone/>
+            </a:pPr>
+            <a:r>
+              <a:rPr lang="en-US" sz="1250" dirty="0">
+                <a:solidFill>
+                  <a:srgbClr val="5C6675"/>
+                </a:solidFill>
+                <a:latin typeface="Calibri" pitchFamily="34" charset="0"/>
+                <a:ea typeface="Calibri" pitchFamily="34" charset="-122"/>
+                <a:cs typeface="Calibri" pitchFamily="34" charset="-120"/>
+              </a:rPr>
+              <a:t>The FinOps Framework names this: Architecting &amp; Workload Placement, and Onboarding Workloads — cost, usage and impact decision support during design and intake.</a:t>
+            </a:r>
+            <a:endParaRPr lang="en-US" sz="1250" dirty="0"/>
           </a:p>
         </p:txBody>
       </p:sp>
@@ -14057,7 +14336,7 @@
     <p:bg>
       <p:bgPr>
         <a:solidFill>
-          <a:srgbClr val="FFFFFF"/>
+          <a:srgbClr val="141A22"/>
         </a:solidFill>
       </p:bgPr>
     </p:bg>
@@ -14108,7 +14387,7 @@
                 <a:ea typeface="Calibri" pitchFamily="34" charset="-122"/>
                 <a:cs typeface="Calibri" pitchFamily="34" charset="-120"/>
               </a:rPr>
-              <a:t>GOVERNANCE — PUTTING IT TOGETHER</a:t>
+              <a:t>GOVERNANCE — SHIFT LEFT IN PRACTICE</a:t>
             </a:r>
             <a:endParaRPr lang="en-US" sz="1100" dirty="0"/>
           </a:p>
@@ -14141,13 +14420,13 @@
             <a:r>
               <a:rPr lang="en-US" sz="3100" b="1" dirty="0">
                 <a:solidFill>
-                  <a:srgbClr val="1B2430"/>
+                  <a:srgbClr val="FFFFFF"/>
                 </a:solidFill>
                 <a:latin typeface="Cambria" pitchFamily="34" charset="0"/>
                 <a:ea typeface="Cambria" pitchFamily="34" charset="-122"/>
                 <a:cs typeface="Cambria" pitchFamily="34" charset="-120"/>
               </a:rPr>
-              <a:t>Nobody should learn it from the invoice</a:t>
+              <a:t>Six questions, asked before the build starts</a:t>
             </a:r>
             <a:endParaRPr lang="en-US" sz="3100" dirty="0"/>
           </a:p>
@@ -14180,13 +14459,13 @@
             <a:r>
               <a:rPr lang="en-US" sz="1500" dirty="0">
                 <a:solidFill>
-                  <a:srgbClr val="5C6675"/>
-                </a:solidFill>
-                <a:latin typeface="Calibri" pitchFamily="34" charset="0"/>
-                <a:ea typeface="Calibri" pitchFamily="34" charset="-122"/>
-                <a:cs typeface="Calibri" pitchFamily="34" charset="-120"/>
-              </a:rPr>
-              <a:t>The same overrun, found at four different moments. Only the first three leave you anything to do about it.</a:t>
+                  <a:srgbClr val="9EABBA"/>
+                </a:solidFill>
+                <a:latin typeface="Calibri" pitchFamily="34" charset="0"/>
+                <a:ea typeface="Calibri" pitchFamily="34" charset="-122"/>
+                <a:cs typeface="Calibri" pitchFamily="34" charset="-120"/>
+              </a:rPr>
+              <a:t>None of them is a finance question. All of them decide the bill.</a:t>
             </a:r>
             <a:endParaRPr lang="en-US" sz="1500" dirty="0"/>
           </a:p>
@@ -14200,684 +14479,43 @@
         </p:nvSpPr>
         <p:spPr>
           <a:xfrm>
-            <a:off x="1737360" y="3127248"/>
-            <a:ext cx="8714232" cy="45720"/>
+            <a:off x="548640" y="2121408"/>
+            <a:ext cx="3511296" cy="1874520"/>
           </a:xfrm>
           <a:prstGeom prst="roundRect">
             <a:avLst>
-              <a:gd name="adj" fmla="val 40000"/>
+              <a:gd name="adj" fmla="val 4390"/>
             </a:avLst>
           </a:prstGeom>
           <a:solidFill>
-            <a:srgbClr val="DFE4EA"/>
-          </a:solidFill>
-          <a:ln/>
-        </p:spPr>
-      </p:sp>
-      <p:sp>
-        <p:nvSpPr>
-          <p:cNvPr id="6" name="Text 4"/>
-          <p:cNvSpPr/>
-          <p:nvPr/>
-        </p:nvSpPr>
-        <p:spPr>
-          <a:xfrm>
-            <a:off x="548640" y="2212848"/>
-            <a:ext cx="2377440" cy="310896"/>
-          </a:xfrm>
-          <a:prstGeom prst="rect">
-            <a:avLst/>
-          </a:prstGeom>
-          <a:noFill/>
-          <a:ln/>
-        </p:spPr>
-        <p:txBody>
-          <a:bodyPr wrap="square" lIns="0" tIns="0" rIns="0" bIns="0" rtlCol="0" anchor="ctr"/>
-          <a:lstStyle/>
-          <a:p>
-            <a:pPr algn="ctr" indent="0" marL="0">
-              <a:buNone/>
-            </a:pPr>
-            <a:r>
-              <a:rPr lang="en-US" sz="1400" b="1" dirty="0">
-                <a:solidFill>
-                  <a:srgbClr val="1B2430"/>
-                </a:solidFill>
-                <a:latin typeface="Calibri" pitchFamily="34" charset="0"/>
-                <a:ea typeface="Calibri" pitchFamily="34" charset="-122"/>
-                <a:cs typeface="Calibri" pitchFamily="34" charset="-120"/>
-              </a:rPr>
-              <a:t>Usage burn alert</a:t>
-            </a:r>
-            <a:endParaRPr lang="en-US" sz="1400" dirty="0"/>
-          </a:p>
-        </p:txBody>
-      </p:sp>
-      <p:sp>
-        <p:nvSpPr>
-          <p:cNvPr id="7" name="Text 5"/>
-          <p:cNvSpPr/>
-          <p:nvPr/>
-        </p:nvSpPr>
-        <p:spPr>
-          <a:xfrm>
-            <a:off x="548640" y="2542032"/>
-            <a:ext cx="2377440" cy="292608"/>
-          </a:xfrm>
-          <a:prstGeom prst="rect">
-            <a:avLst/>
-          </a:prstGeom>
-          <a:noFill/>
-          <a:ln/>
-        </p:spPr>
-        <p:txBody>
-          <a:bodyPr wrap="square" lIns="0" tIns="0" rIns="0" bIns="0" rtlCol="0" anchor="ctr"/>
-          <a:lstStyle/>
-          <a:p>
-            <a:pPr algn="ctr" indent="0" marL="0">
-              <a:buNone/>
-            </a:pPr>
-            <a:r>
-              <a:rPr lang="en-US" sz="1250" b="1" spc="60" kern="0" dirty="0">
-                <a:solidFill>
-                  <a:srgbClr val="B87B18"/>
-                </a:solidFill>
-                <a:latin typeface="Calibri" pitchFamily="34" charset="0"/>
-                <a:ea typeface="Calibri" pitchFamily="34" charset="-122"/>
-                <a:cs typeface="Calibri" pitchFamily="34" charset="-120"/>
-              </a:rPr>
-              <a:t>~10 minutes</a:t>
-            </a:r>
-            <a:endParaRPr lang="en-US" sz="1250" dirty="0"/>
-          </a:p>
-        </p:txBody>
-      </p:sp>
-      <p:sp>
-        <p:nvSpPr>
-          <p:cNvPr id="8" name="Shape 6"/>
-          <p:cNvSpPr/>
-          <p:nvPr/>
-        </p:nvSpPr>
-        <p:spPr>
-          <a:xfrm>
-            <a:off x="1618488" y="3031236"/>
-            <a:ext cx="237744" cy="237744"/>
+            <a:srgbClr val="1F2936"/>
+          </a:solidFill>
+          <a:ln/>
+        </p:spPr>
+      </p:sp>
+      <p:sp>
+        <p:nvSpPr>
+          <p:cNvPr id="6" name="Shape 4"/>
+          <p:cNvSpPr/>
+          <p:nvPr/>
+        </p:nvSpPr>
+        <p:spPr>
+          <a:xfrm>
+            <a:off x="841248" y="2377440"/>
+            <a:ext cx="457200" cy="457200"/>
           </a:xfrm>
           <a:prstGeom prst="ellipse">
             <a:avLst/>
           </a:prstGeom>
           <a:solidFill>
-            <a:srgbClr val="E39B2C"/>
-          </a:solidFill>
-          <a:ln w="25400">
-            <a:solidFill>
-              <a:srgbClr val="FFFFFF"/>
-            </a:solidFill>
-            <a:prstDash val="solid"/>
-          </a:ln>
-        </p:spPr>
-      </p:sp>
-      <p:sp>
-        <p:nvSpPr>
-          <p:cNvPr id="9" name="Text 7"/>
-          <p:cNvSpPr/>
-          <p:nvPr/>
-        </p:nvSpPr>
-        <p:spPr>
-          <a:xfrm>
-            <a:off x="548640" y="3401568"/>
-            <a:ext cx="2377440" cy="566928"/>
-          </a:xfrm>
-          <a:prstGeom prst="rect">
-            <a:avLst/>
-          </a:prstGeom>
-          <a:noFill/>
-          <a:ln/>
-        </p:spPr>
-        <p:txBody>
-          <a:bodyPr wrap="square" lIns="0" tIns="0" rIns="0" bIns="0" rtlCol="0" anchor="t"/>
-          <a:lstStyle/>
-          <a:p>
-            <a:pPr algn="ctr" indent="0" marL="0">
-              <a:lnSpc>
-                <a:spcPts val="1600"/>
-              </a:lnSpc>
-              <a:buNone/>
-            </a:pPr>
-            <a:r>
-              <a:rPr lang="en-US" sz="1200" dirty="0">
-                <a:solidFill>
-                  <a:srgbClr val="5C6675"/>
-                </a:solidFill>
-                <a:latin typeface="Calibri" pitchFamily="34" charset="0"/>
-                <a:ea typeface="Calibri" pitchFamily="34" charset="-122"/>
-                <a:cs typeface="Calibri" pitchFamily="34" charset="-120"/>
-              </a:rPr>
-              <a:t>Throttle it, or confirm it was intended.</a:t>
-            </a:r>
-            <a:endParaRPr lang="en-US" sz="1200" dirty="0"/>
-          </a:p>
-        </p:txBody>
-      </p:sp>
-      <p:sp>
-        <p:nvSpPr>
-          <p:cNvPr id="10" name="Text 8"/>
-          <p:cNvSpPr/>
-          <p:nvPr/>
-        </p:nvSpPr>
-        <p:spPr>
-          <a:xfrm>
-            <a:off x="3566160" y="2212848"/>
-            <a:ext cx="2377440" cy="310896"/>
-          </a:xfrm>
-          <a:prstGeom prst="rect">
-            <a:avLst/>
-          </a:prstGeom>
-          <a:noFill/>
-          <a:ln/>
-        </p:spPr>
-        <p:txBody>
-          <a:bodyPr wrap="square" lIns="0" tIns="0" rIns="0" bIns="0" rtlCol="0" anchor="ctr"/>
-          <a:lstStyle/>
-          <a:p>
-            <a:pPr algn="ctr" indent="0" marL="0">
-              <a:buNone/>
-            </a:pPr>
-            <a:r>
-              <a:rPr lang="en-US" sz="1400" b="1" dirty="0">
-                <a:solidFill>
-                  <a:srgbClr val="1B2430"/>
-                </a:solidFill>
-                <a:latin typeface="Calibri" pitchFamily="34" charset="0"/>
-                <a:ea typeface="Calibri" pitchFamily="34" charset="-122"/>
-                <a:cs typeface="Calibri" pitchFamily="34" charset="-120"/>
-              </a:rPr>
-              <a:t>Daily spend threshold</a:t>
-            </a:r>
-            <a:endParaRPr lang="en-US" sz="1400" dirty="0"/>
-          </a:p>
-        </p:txBody>
-      </p:sp>
-      <p:sp>
-        <p:nvSpPr>
-          <p:cNvPr id="11" name="Text 9"/>
-          <p:cNvSpPr/>
-          <p:nvPr/>
-        </p:nvSpPr>
-        <p:spPr>
-          <a:xfrm>
-            <a:off x="3566160" y="2542032"/>
-            <a:ext cx="2377440" cy="292608"/>
-          </a:xfrm>
-          <a:prstGeom prst="rect">
-            <a:avLst/>
-          </a:prstGeom>
-          <a:noFill/>
-          <a:ln/>
-        </p:spPr>
-        <p:txBody>
-          <a:bodyPr wrap="square" lIns="0" tIns="0" rIns="0" bIns="0" rtlCol="0" anchor="ctr"/>
-          <a:lstStyle/>
-          <a:p>
-            <a:pPr algn="ctr" indent="0" marL="0">
-              <a:buNone/>
-            </a:pPr>
-            <a:r>
-              <a:rPr lang="en-US" sz="1250" b="1" spc="60" kern="0" dirty="0">
-                <a:solidFill>
-                  <a:srgbClr val="1F6B5C"/>
-                </a:solidFill>
-                <a:latin typeface="Calibri" pitchFamily="34" charset="0"/>
-                <a:ea typeface="Calibri" pitchFamily="34" charset="-122"/>
-                <a:cs typeface="Calibri" pitchFamily="34" charset="-120"/>
-              </a:rPr>
-              <a:t>next morning</a:t>
-            </a:r>
-            <a:endParaRPr lang="en-US" sz="1250" dirty="0"/>
-          </a:p>
-        </p:txBody>
-      </p:sp>
-      <p:sp>
-        <p:nvSpPr>
-          <p:cNvPr id="12" name="Shape 10"/>
-          <p:cNvSpPr/>
-          <p:nvPr/>
-        </p:nvSpPr>
-        <p:spPr>
-          <a:xfrm>
-            <a:off x="4636008" y="3031236"/>
-            <a:ext cx="237744" cy="237744"/>
-          </a:xfrm>
-          <a:prstGeom prst="ellipse">
-            <a:avLst/>
-          </a:prstGeom>
-          <a:solidFill>
-            <a:srgbClr val="2E8B7A"/>
-          </a:solidFill>
-          <a:ln w="25400">
-            <a:solidFill>
-              <a:srgbClr val="FFFFFF"/>
-            </a:solidFill>
-            <a:prstDash val="solid"/>
-          </a:ln>
-        </p:spPr>
-      </p:sp>
-      <p:sp>
-        <p:nvSpPr>
-          <p:cNvPr id="13" name="Text 11"/>
-          <p:cNvSpPr/>
-          <p:nvPr/>
-        </p:nvSpPr>
-        <p:spPr>
-          <a:xfrm>
-            <a:off x="3566160" y="3401568"/>
-            <a:ext cx="2377440" cy="566928"/>
-          </a:xfrm>
-          <a:prstGeom prst="rect">
-            <a:avLst/>
-          </a:prstGeom>
-          <a:noFill/>
-          <a:ln/>
-        </p:spPr>
-        <p:txBody>
-          <a:bodyPr wrap="square" lIns="0" tIns="0" rIns="0" bIns="0" rtlCol="0" anchor="t"/>
-          <a:lstStyle/>
-          <a:p>
-            <a:pPr algn="ctr" indent="0" marL="0">
-              <a:lnSpc>
-                <a:spcPts val="1600"/>
-              </a:lnSpc>
-              <a:buNone/>
-            </a:pPr>
-            <a:r>
-              <a:rPr lang="en-US" sz="1200" dirty="0">
-                <a:solidFill>
-                  <a:srgbClr val="5C6675"/>
-                </a:solidFill>
-                <a:latin typeface="Calibri" pitchFamily="34" charset="0"/>
-                <a:ea typeface="Calibri" pitchFamily="34" charset="-122"/>
-                <a:cs typeface="Calibri" pitchFamily="34" charset="-120"/>
-              </a:rPr>
-              <a:t>One team, one number, one owner to ask.</a:t>
-            </a:r>
-            <a:endParaRPr lang="en-US" sz="1200" dirty="0"/>
-          </a:p>
-        </p:txBody>
-      </p:sp>
-      <p:sp>
-        <p:nvSpPr>
-          <p:cNvPr id="14" name="Text 12"/>
-          <p:cNvSpPr/>
-          <p:nvPr/>
-        </p:nvSpPr>
-        <p:spPr>
-          <a:xfrm>
-            <a:off x="6583680" y="2212848"/>
-            <a:ext cx="2377440" cy="310896"/>
-          </a:xfrm>
-          <a:prstGeom prst="rect">
-            <a:avLst/>
-          </a:prstGeom>
-          <a:noFill/>
-          <a:ln/>
-        </p:spPr>
-        <p:txBody>
-          <a:bodyPr wrap="square" lIns="0" tIns="0" rIns="0" bIns="0" rtlCol="0" anchor="ctr"/>
-          <a:lstStyle/>
-          <a:p>
-            <a:pPr algn="ctr" indent="0" marL="0">
-              <a:buNone/>
-            </a:pPr>
-            <a:r>
-              <a:rPr lang="en-US" sz="1400" b="1" dirty="0">
-                <a:solidFill>
-                  <a:srgbClr val="1B2430"/>
-                </a:solidFill>
-                <a:latin typeface="Calibri" pitchFamily="34" charset="0"/>
-                <a:ea typeface="Calibri" pitchFamily="34" charset="-122"/>
-                <a:cs typeface="Calibri" pitchFamily="34" charset="-120"/>
-              </a:rPr>
-              <a:t>Forecast overrun</a:t>
-            </a:r>
-            <a:endParaRPr lang="en-US" sz="1400" dirty="0"/>
-          </a:p>
-        </p:txBody>
-      </p:sp>
-      <p:sp>
-        <p:nvSpPr>
-          <p:cNvPr id="15" name="Text 13"/>
-          <p:cNvSpPr/>
-          <p:nvPr/>
-        </p:nvSpPr>
-        <p:spPr>
-          <a:xfrm>
-            <a:off x="6583680" y="2542032"/>
-            <a:ext cx="2377440" cy="292608"/>
-          </a:xfrm>
-          <a:prstGeom prst="rect">
-            <a:avLst/>
-          </a:prstGeom>
-          <a:noFill/>
-          <a:ln/>
-        </p:spPr>
-        <p:txBody>
-          <a:bodyPr wrap="square" lIns="0" tIns="0" rIns="0" bIns="0" rtlCol="0" anchor="ctr"/>
-          <a:lstStyle/>
-          <a:p>
-            <a:pPr algn="ctr" indent="0" marL="0">
-              <a:buNone/>
-            </a:pPr>
-            <a:r>
-              <a:rPr lang="en-US" sz="1250" b="1" spc="60" kern="0" dirty="0">
-                <a:solidFill>
-                  <a:srgbClr val="1F6B5C"/>
-                </a:solidFill>
-                <a:latin typeface="Calibri" pitchFamily="34" charset="0"/>
-                <a:ea typeface="Calibri" pitchFamily="34" charset="-122"/>
-                <a:cs typeface="Calibri" pitchFamily="34" charset="-120"/>
-              </a:rPr>
-              <a:t>~2 weeks out</a:t>
-            </a:r>
-            <a:endParaRPr lang="en-US" sz="1250" dirty="0"/>
-          </a:p>
-        </p:txBody>
-      </p:sp>
-      <p:sp>
-        <p:nvSpPr>
-          <p:cNvPr id="16" name="Shape 14"/>
-          <p:cNvSpPr/>
-          <p:nvPr/>
-        </p:nvSpPr>
-        <p:spPr>
-          <a:xfrm>
-            <a:off x="7653528" y="3031236"/>
-            <a:ext cx="237744" cy="237744"/>
-          </a:xfrm>
-          <a:prstGeom prst="ellipse">
-            <a:avLst/>
-          </a:prstGeom>
-          <a:solidFill>
-            <a:srgbClr val="2E8B7A"/>
-          </a:solidFill>
-          <a:ln w="25400">
-            <a:solidFill>
-              <a:srgbClr val="FFFFFF"/>
-            </a:solidFill>
-            <a:prstDash val="solid"/>
-          </a:ln>
-        </p:spPr>
-      </p:sp>
-      <p:sp>
-        <p:nvSpPr>
-          <p:cNvPr id="17" name="Text 15"/>
-          <p:cNvSpPr/>
-          <p:nvPr/>
-        </p:nvSpPr>
-        <p:spPr>
-          <a:xfrm>
-            <a:off x="6583680" y="3401568"/>
-            <a:ext cx="2377440" cy="566928"/>
-          </a:xfrm>
-          <a:prstGeom prst="rect">
-            <a:avLst/>
-          </a:prstGeom>
-          <a:noFill/>
-          <a:ln/>
-        </p:spPr>
-        <p:txBody>
-          <a:bodyPr wrap="square" lIns="0" tIns="0" rIns="0" bIns="0" rtlCol="0" anchor="t"/>
-          <a:lstStyle/>
-          <a:p>
-            <a:pPr algn="ctr" indent="0" marL="0">
-              <a:lnSpc>
-                <a:spcPts val="1600"/>
-              </a:lnSpc>
-              <a:buNone/>
-            </a:pPr>
-            <a:r>
-              <a:rPr lang="en-US" sz="1200" dirty="0">
-                <a:solidFill>
-                  <a:srgbClr val="5C6675"/>
-                </a:solidFill>
-                <a:latin typeface="Calibri" pitchFamily="34" charset="0"/>
-                <a:ea typeface="Calibri" pitchFamily="34" charset="-122"/>
-                <a:cs typeface="Calibri" pitchFamily="34" charset="-120"/>
-              </a:rPr>
-              <a:t>Still time to change the month's outcome.</a:t>
-            </a:r>
-            <a:endParaRPr lang="en-US" sz="1200" dirty="0"/>
-          </a:p>
-        </p:txBody>
-      </p:sp>
-      <p:sp>
-        <p:nvSpPr>
-          <p:cNvPr id="18" name="Text 16"/>
-          <p:cNvSpPr/>
-          <p:nvPr/>
-        </p:nvSpPr>
-        <p:spPr>
-          <a:xfrm>
-            <a:off x="9262872" y="2212848"/>
-            <a:ext cx="2377440" cy="310896"/>
-          </a:xfrm>
-          <a:prstGeom prst="rect">
-            <a:avLst/>
-          </a:prstGeom>
-          <a:noFill/>
-          <a:ln/>
-        </p:spPr>
-        <p:txBody>
-          <a:bodyPr wrap="square" lIns="0" tIns="0" rIns="0" bIns="0" rtlCol="0" anchor="ctr"/>
-          <a:lstStyle/>
-          <a:p>
-            <a:pPr algn="ctr" indent="0" marL="0">
-              <a:buNone/>
-            </a:pPr>
-            <a:r>
-              <a:rPr lang="en-US" sz="1400" b="1" dirty="0">
-                <a:solidFill>
-                  <a:srgbClr val="5C6675"/>
-                </a:solidFill>
-                <a:latin typeface="Calibri" pitchFamily="34" charset="0"/>
-                <a:ea typeface="Calibri" pitchFamily="34" charset="-122"/>
-                <a:cs typeface="Calibri" pitchFamily="34" charset="-120"/>
-              </a:rPr>
-              <a:t>The invoice</a:t>
-            </a:r>
-            <a:endParaRPr lang="en-US" sz="1400" dirty="0"/>
-          </a:p>
-        </p:txBody>
-      </p:sp>
-      <p:sp>
-        <p:nvSpPr>
-          <p:cNvPr id="19" name="Text 17"/>
-          <p:cNvSpPr/>
-          <p:nvPr/>
-        </p:nvSpPr>
-        <p:spPr>
-          <a:xfrm>
-            <a:off x="9262872" y="2542032"/>
-            <a:ext cx="2377440" cy="292608"/>
-          </a:xfrm>
-          <a:prstGeom prst="rect">
-            <a:avLst/>
-          </a:prstGeom>
-          <a:noFill/>
-          <a:ln/>
-        </p:spPr>
-        <p:txBody>
-          <a:bodyPr wrap="square" lIns="0" tIns="0" rIns="0" bIns="0" rtlCol="0" anchor="ctr"/>
-          <a:lstStyle/>
-          <a:p>
-            <a:pPr algn="ctr" indent="0" marL="0">
-              <a:buNone/>
-            </a:pPr>
-            <a:r>
-              <a:rPr lang="en-US" sz="1250" b="1" spc="60" kern="0" dirty="0">
-                <a:solidFill>
-                  <a:srgbClr val="5C6675"/>
-                </a:solidFill>
-                <a:latin typeface="Calibri" pitchFamily="34" charset="0"/>
-                <a:ea typeface="Calibri" pitchFamily="34" charset="-122"/>
-                <a:cs typeface="Calibri" pitchFamily="34" charset="-120"/>
-              </a:rPr>
-              <a:t>30–45 days later</a:t>
-            </a:r>
-            <a:endParaRPr lang="en-US" sz="1250" dirty="0"/>
-          </a:p>
-        </p:txBody>
-      </p:sp>
-      <p:sp>
-        <p:nvSpPr>
-          <p:cNvPr id="20" name="Shape 18"/>
-          <p:cNvSpPr/>
-          <p:nvPr/>
-        </p:nvSpPr>
-        <p:spPr>
-          <a:xfrm>
-            <a:off x="10332720" y="3031236"/>
-            <a:ext cx="237744" cy="237744"/>
-          </a:xfrm>
-          <a:prstGeom prst="ellipse">
-            <a:avLst/>
-          </a:prstGeom>
-          <a:solidFill>
-            <a:srgbClr val="AEB8C4"/>
-          </a:solidFill>
-          <a:ln w="25400">
-            <a:solidFill>
-              <a:srgbClr val="FFFFFF"/>
-            </a:solidFill>
-            <a:prstDash val="solid"/>
-          </a:ln>
-        </p:spPr>
-      </p:sp>
-      <p:sp>
-        <p:nvSpPr>
-          <p:cNvPr id="21" name="Text 19"/>
-          <p:cNvSpPr/>
-          <p:nvPr/>
-        </p:nvSpPr>
-        <p:spPr>
-          <a:xfrm>
-            <a:off x="9262872" y="3401568"/>
-            <a:ext cx="2377440" cy="566928"/>
-          </a:xfrm>
-          <a:prstGeom prst="rect">
-            <a:avLst/>
-          </a:prstGeom>
-          <a:noFill/>
-          <a:ln/>
-        </p:spPr>
-        <p:txBody>
-          <a:bodyPr wrap="square" lIns="0" tIns="0" rIns="0" bIns="0" rtlCol="0" anchor="t"/>
-          <a:lstStyle/>
-          <a:p>
-            <a:pPr algn="ctr" indent="0" marL="0">
-              <a:lnSpc>
-                <a:spcPts val="1600"/>
-              </a:lnSpc>
-              <a:buNone/>
-            </a:pPr>
-            <a:r>
-              <a:rPr lang="en-US" sz="1200" dirty="0">
-                <a:solidFill>
-                  <a:srgbClr val="5C6675"/>
-                </a:solidFill>
-                <a:latin typeface="Calibri" pitchFamily="34" charset="0"/>
-                <a:ea typeface="Calibri" pitchFamily="34" charset="-122"/>
-                <a:cs typeface="Calibri" pitchFamily="34" charset="-120"/>
-              </a:rPr>
-              <a:t>Nothing left to decide. Only to explain.</a:t>
-            </a:r>
-            <a:endParaRPr lang="en-US" sz="1200" dirty="0"/>
-          </a:p>
-        </p:txBody>
-      </p:sp>
-      <p:sp>
-        <p:nvSpPr>
-          <p:cNvPr id="22" name="Shape 20"/>
-          <p:cNvSpPr/>
-          <p:nvPr/>
-        </p:nvSpPr>
-        <p:spPr>
-          <a:xfrm>
-            <a:off x="548640" y="4297680"/>
-            <a:ext cx="6675120" cy="2011680"/>
-          </a:xfrm>
-          <a:prstGeom prst="roundRect">
-            <a:avLst>
-              <a:gd name="adj" fmla="val 4091"/>
-            </a:avLst>
-          </a:prstGeom>
-          <a:solidFill>
-            <a:srgbClr val="F1F3F6"/>
-          </a:solidFill>
-          <a:ln/>
-        </p:spPr>
-      </p:sp>
-      <p:sp>
-        <p:nvSpPr>
-          <p:cNvPr id="23" name="Text 21"/>
-          <p:cNvSpPr/>
-          <p:nvPr/>
-        </p:nvSpPr>
-        <p:spPr>
-          <a:xfrm>
-            <a:off x="877824" y="4443984"/>
-            <a:ext cx="3657600" cy="292608"/>
-          </a:xfrm>
-          <a:prstGeom prst="rect">
-            <a:avLst/>
-          </a:prstGeom>
-          <a:noFill/>
-          <a:ln/>
-        </p:spPr>
-        <p:txBody>
-          <a:bodyPr wrap="square" lIns="0" tIns="0" rIns="0" bIns="0" rtlCol="0" anchor="ctr"/>
-          <a:lstStyle/>
-          <a:p>
-            <a:pPr indent="0" marL="0">
-              <a:buNone/>
-            </a:pPr>
-            <a:r>
-              <a:rPr lang="en-US" sz="1200" b="1" spc="180" kern="0" dirty="0">
-                <a:solidFill>
-                  <a:srgbClr val="5C6675"/>
-                </a:solidFill>
-                <a:latin typeface="Calibri" pitchFamily="34" charset="0"/>
-                <a:ea typeface="Calibri" pitchFamily="34" charset="-122"/>
-                <a:cs typeface="Calibri" pitchFamily="34" charset="-120"/>
-              </a:rPr>
-              <a:t>What has to be true</a:t>
-            </a:r>
-            <a:endParaRPr lang="en-US" sz="1200" dirty="0"/>
-          </a:p>
-        </p:txBody>
-      </p:sp>
-      <p:sp>
-        <p:nvSpPr>
-          <p:cNvPr id="24" name="Shape 22"/>
-          <p:cNvSpPr/>
-          <p:nvPr/>
-        </p:nvSpPr>
-        <p:spPr>
-          <a:xfrm>
-            <a:off x="877824" y="4809744"/>
-            <a:ext cx="274320" cy="274320"/>
-          </a:xfrm>
-          <a:prstGeom prst="ellipse">
-            <a:avLst/>
-          </a:prstGeom>
-          <a:solidFill>
-            <a:srgbClr val="FFFFFF"/>
+            <a:srgbClr val="2E3A48"/>
           </a:solidFill>
           <a:ln/>
         </p:spPr>
       </p:sp>
       <p:pic>
         <p:nvPicPr>
-          <p:cNvPr id="25" name="Image 0" descr="preencoded.png">    </p:cNvPr>
+          <p:cNvPr id="7" name="Image 0" descr="preencoded.png">    </p:cNvPr>
           <p:cNvPicPr>
             <a:picLocks noChangeAspect="1"/>
           </p:cNvPicPr>
@@ -14891,8 +14529,8 @@
         </p:blipFill>
         <p:spPr>
           <a:xfrm>
-            <a:off x="946404" y="4878324"/>
-            <a:ext cx="137160" cy="137160"/>
+            <a:off x="955548" y="2491740"/>
+            <a:ext cx="228600" cy="228600"/>
           </a:xfrm>
           <a:prstGeom prst="rect">
             <a:avLst/>
@@ -14901,66 +14539,130 @@
       </p:pic>
       <p:sp>
         <p:nvSpPr>
-          <p:cNvPr id="26" name="Text 23"/>
-          <p:cNvSpPr/>
-          <p:nvPr/>
-        </p:nvSpPr>
-        <p:spPr>
-          <a:xfrm>
-            <a:off x="1298448" y="4754880"/>
-            <a:ext cx="5669280" cy="384048"/>
-          </a:xfrm>
-          <a:prstGeom prst="rect">
-            <a:avLst/>
-          </a:prstGeom>
-          <a:noFill/>
-          <a:ln/>
-        </p:spPr>
-        <p:txBody>
-          <a:bodyPr wrap="square" lIns="0" tIns="0" rIns="0" bIns="0" rtlCol="0" anchor="ctr"/>
-          <a:lstStyle/>
-          <a:p>
-            <a:pPr indent="0" marL="0">
-              <a:buNone/>
-            </a:pPr>
-            <a:r>
-              <a:rPr lang="en-US" sz="1300" dirty="0">
-                <a:solidFill>
-                  <a:srgbClr val="1B2430"/>
-                </a:solidFill>
-                <a:latin typeface="Calibri" pitchFamily="34" charset="0"/>
-                <a:ea typeface="Calibri" pitchFamily="34" charset="-122"/>
-                <a:cs typeface="Calibri" pitchFamily="34" charset="-120"/>
-              </a:rPr>
-              <a:t>Protective alerts run on usage data, not on billing data</a:t>
-            </a:r>
-            <a:endParaRPr lang="en-US" sz="1300" dirty="0"/>
-          </a:p>
-        </p:txBody>
-      </p:sp>
-      <p:sp>
-        <p:nvSpPr>
-          <p:cNvPr id="27" name="Shape 24"/>
-          <p:cNvSpPr/>
-          <p:nvPr/>
-        </p:nvSpPr>
-        <p:spPr>
-          <a:xfrm>
-            <a:off x="877824" y="5193792"/>
-            <a:ext cx="274320" cy="274320"/>
+          <p:cNvPr id="8" name="Text 5"/>
+          <p:cNvSpPr/>
+          <p:nvPr/>
+        </p:nvSpPr>
+        <p:spPr>
+          <a:xfrm>
+            <a:off x="1426464" y="2359152"/>
+            <a:ext cx="2468880" cy="493776"/>
+          </a:xfrm>
+          <a:prstGeom prst="rect">
+            <a:avLst/>
+          </a:prstGeom>
+          <a:noFill/>
+          <a:ln/>
+        </p:spPr>
+        <p:txBody>
+          <a:bodyPr wrap="square" lIns="0" tIns="0" rIns="0" bIns="0" rtlCol="0" anchor="ctr"/>
+          <a:lstStyle/>
+          <a:p>
+            <a:pPr indent="0" marL="0">
+              <a:buNone/>
+            </a:pPr>
+            <a:r>
+              <a:rPr lang="en-US" sz="1500" b="1" dirty="0">
+                <a:solidFill>
+                  <a:srgbClr val="FFFFFF"/>
+                </a:solidFill>
+                <a:latin typeface="Cambria" pitchFamily="34" charset="0"/>
+                <a:ea typeface="Cambria" pitchFamily="34" charset="-122"/>
+                <a:cs typeface="Cambria" pitchFamily="34" charset="-120"/>
+              </a:rPr>
+              <a:t>Shape of the load</a:t>
+            </a:r>
+            <a:endParaRPr lang="en-US" sz="1500" dirty="0"/>
+          </a:p>
+        </p:txBody>
+      </p:sp>
+      <p:sp>
+        <p:nvSpPr>
+          <p:cNvPr id="9" name="Text 6"/>
+          <p:cNvSpPr/>
+          <p:nvPr/>
+        </p:nvSpPr>
+        <p:spPr>
+          <a:xfrm>
+            <a:off x="841248" y="2962656"/>
+            <a:ext cx="2926080" cy="960120"/>
+          </a:xfrm>
+          <a:prstGeom prst="rect">
+            <a:avLst/>
+          </a:prstGeom>
+          <a:noFill/>
+          <a:ln/>
+        </p:spPr>
+        <p:txBody>
+          <a:bodyPr wrap="square" lIns="0" tIns="0" rIns="0" bIns="0" rtlCol="0" anchor="t"/>
+          <a:lstStyle/>
+          <a:p>
+            <a:pPr indent="0" marL="0">
+              <a:lnSpc>
+                <a:spcPts val="1600"/>
+              </a:lnSpc>
+              <a:buNone/>
+            </a:pPr>
+            <a:r>
+              <a:rPr lang="en-US" sz="1200" dirty="0">
+                <a:solidFill>
+                  <a:srgbClr val="9EABBA"/>
+                </a:solidFill>
+                <a:latin typeface="Calibri" pitchFamily="34" charset="0"/>
+                <a:ea typeface="Calibri" pitchFamily="34" charset="-122"/>
+                <a:cs typeface="Calibri" pitchFamily="34" charset="-120"/>
+              </a:rPr>
+              <a:t>Peak versus average, and how spiky? Sizing for a peak that lasts an hour a week is the most common overspend.</a:t>
+            </a:r>
+            <a:endParaRPr lang="en-US" sz="1200" dirty="0"/>
+          </a:p>
+        </p:txBody>
+      </p:sp>
+      <p:sp>
+        <p:nvSpPr>
+          <p:cNvPr id="10" name="Shape 7"/>
+          <p:cNvSpPr/>
+          <p:nvPr/>
+        </p:nvSpPr>
+        <p:spPr>
+          <a:xfrm>
+            <a:off x="4334256" y="2121408"/>
+            <a:ext cx="3511296" cy="1874520"/>
+          </a:xfrm>
+          <a:prstGeom prst="roundRect">
+            <a:avLst>
+              <a:gd name="adj" fmla="val 4390"/>
+            </a:avLst>
+          </a:prstGeom>
+          <a:solidFill>
+            <a:srgbClr val="1F2936"/>
+          </a:solidFill>
+          <a:ln/>
+        </p:spPr>
+      </p:sp>
+      <p:sp>
+        <p:nvSpPr>
+          <p:cNvPr id="11" name="Shape 8"/>
+          <p:cNvSpPr/>
+          <p:nvPr/>
+        </p:nvSpPr>
+        <p:spPr>
+          <a:xfrm>
+            <a:off x="4626864" y="2377440"/>
+            <a:ext cx="457200" cy="457200"/>
           </a:xfrm>
           <a:prstGeom prst="ellipse">
             <a:avLst/>
           </a:prstGeom>
           <a:solidFill>
-            <a:srgbClr val="FFFFFF"/>
+            <a:srgbClr val="2E3A48"/>
           </a:solidFill>
           <a:ln/>
         </p:spPr>
       </p:sp>
       <p:pic>
         <p:nvPicPr>
-          <p:cNvPr id="28" name="Image 1" descr="preencoded.png">    </p:cNvPr>
+          <p:cNvPr id="12" name="Image 1" descr="preencoded.png">    </p:cNvPr>
           <p:cNvPicPr>
             <a:picLocks noChangeAspect="1"/>
           </p:cNvPicPr>
@@ -14974,8 +14676,8 @@
         </p:blipFill>
         <p:spPr>
           <a:xfrm>
-            <a:off x="946404" y="5262372"/>
-            <a:ext cx="137160" cy="137160"/>
+            <a:off x="4741164" y="2491740"/>
+            <a:ext cx="228600" cy="228600"/>
           </a:xfrm>
           <a:prstGeom prst="rect">
             <a:avLst/>
@@ -14984,66 +14686,130 @@
       </p:pic>
       <p:sp>
         <p:nvSpPr>
-          <p:cNvPr id="29" name="Text 25"/>
-          <p:cNvSpPr/>
-          <p:nvPr/>
-        </p:nvSpPr>
-        <p:spPr>
-          <a:xfrm>
-            <a:off x="1298448" y="5138928"/>
-            <a:ext cx="5669280" cy="384048"/>
-          </a:xfrm>
-          <a:prstGeom prst="rect">
-            <a:avLst/>
-          </a:prstGeom>
-          <a:noFill/>
-          <a:ln/>
-        </p:spPr>
-        <p:txBody>
-          <a:bodyPr wrap="square" lIns="0" tIns="0" rIns="0" bIns="0" rtlCol="0" anchor="ctr"/>
-          <a:lstStyle/>
-          <a:p>
-            <a:pPr indent="0" marL="0">
-              <a:buNone/>
-            </a:pPr>
-            <a:r>
-              <a:rPr lang="en-US" sz="1300" dirty="0">
-                <a:solidFill>
-                  <a:srgbClr val="1B2430"/>
-                </a:solidFill>
-                <a:latin typeface="Calibri" pitchFamily="34" charset="0"/>
-                <a:ea typeface="Calibri" pitchFamily="34" charset="-122"/>
-                <a:cs typeface="Calibri" pitchFamily="34" charset="-120"/>
-              </a:rPr>
-              <a:t>Every alert has a named owner to route to</a:t>
-            </a:r>
-            <a:endParaRPr lang="en-US" sz="1300" dirty="0"/>
-          </a:p>
-        </p:txBody>
-      </p:sp>
-      <p:sp>
-        <p:nvSpPr>
-          <p:cNvPr id="30" name="Shape 26"/>
-          <p:cNvSpPr/>
-          <p:nvPr/>
-        </p:nvSpPr>
-        <p:spPr>
-          <a:xfrm>
-            <a:off x="877824" y="5577840"/>
-            <a:ext cx="274320" cy="274320"/>
+          <p:cNvPr id="13" name="Text 9"/>
+          <p:cNvSpPr/>
+          <p:nvPr/>
+        </p:nvSpPr>
+        <p:spPr>
+          <a:xfrm>
+            <a:off x="5212080" y="2359152"/>
+            <a:ext cx="2468880" cy="493776"/>
+          </a:xfrm>
+          <a:prstGeom prst="rect">
+            <a:avLst/>
+          </a:prstGeom>
+          <a:noFill/>
+          <a:ln/>
+        </p:spPr>
+        <p:txBody>
+          <a:bodyPr wrap="square" lIns="0" tIns="0" rIns="0" bIns="0" rtlCol="0" anchor="ctr"/>
+          <a:lstStyle/>
+          <a:p>
+            <a:pPr indent="0" marL="0">
+              <a:buNone/>
+            </a:pPr>
+            <a:r>
+              <a:rPr lang="en-US" sz="1500" b="1" dirty="0">
+                <a:solidFill>
+                  <a:srgbClr val="FFFFFF"/>
+                </a:solidFill>
+                <a:latin typeface="Cambria" pitchFamily="34" charset="0"/>
+                <a:ea typeface="Cambria" pitchFamily="34" charset="-122"/>
+                <a:cs typeface="Cambria" pitchFamily="34" charset="-120"/>
+              </a:rPr>
+              <a:t>Data volume and retention</a:t>
+            </a:r>
+            <a:endParaRPr lang="en-US" sz="1500" dirty="0"/>
+          </a:p>
+        </p:txBody>
+      </p:sp>
+      <p:sp>
+        <p:nvSpPr>
+          <p:cNvPr id="14" name="Text 10"/>
+          <p:cNvSpPr/>
+          <p:nvPr/>
+        </p:nvSpPr>
+        <p:spPr>
+          <a:xfrm>
+            <a:off x="4626864" y="2962656"/>
+            <a:ext cx="2926080" cy="960120"/>
+          </a:xfrm>
+          <a:prstGeom prst="rect">
+            <a:avLst/>
+          </a:prstGeom>
+          <a:noFill/>
+          <a:ln/>
+        </p:spPr>
+        <p:txBody>
+          <a:bodyPr wrap="square" lIns="0" tIns="0" rIns="0" bIns="0" rtlCol="0" anchor="t"/>
+          <a:lstStyle/>
+          <a:p>
+            <a:pPr indent="0" marL="0">
+              <a:lnSpc>
+                <a:spcPts val="1600"/>
+              </a:lnSpc>
+              <a:buNone/>
+            </a:pPr>
+            <a:r>
+              <a:rPr lang="en-US" sz="1200" dirty="0">
+                <a:solidFill>
+                  <a:srgbClr val="9EABBA"/>
+                </a:solidFill>
+                <a:latin typeface="Calibri" pitchFamily="34" charset="0"/>
+                <a:ea typeface="Calibri" pitchFamily="34" charset="-122"/>
+                <a:cs typeface="Calibri" pitchFamily="34" charset="-120"/>
+              </a:rPr>
+              <a:t>How much is stored, for how long, and how much leaves the region? Egress and retention rarely appear in the estimate.</a:t>
+            </a:r>
+            <a:endParaRPr lang="en-US" sz="1200" dirty="0"/>
+          </a:p>
+        </p:txBody>
+      </p:sp>
+      <p:sp>
+        <p:nvSpPr>
+          <p:cNvPr id="15" name="Shape 11"/>
+          <p:cNvSpPr/>
+          <p:nvPr/>
+        </p:nvSpPr>
+        <p:spPr>
+          <a:xfrm>
+            <a:off x="8119872" y="2121408"/>
+            <a:ext cx="3511296" cy="1874520"/>
+          </a:xfrm>
+          <a:prstGeom prst="roundRect">
+            <a:avLst>
+              <a:gd name="adj" fmla="val 4390"/>
+            </a:avLst>
+          </a:prstGeom>
+          <a:solidFill>
+            <a:srgbClr val="1F2936"/>
+          </a:solidFill>
+          <a:ln/>
+        </p:spPr>
+      </p:sp>
+      <p:sp>
+        <p:nvSpPr>
+          <p:cNvPr id="16" name="Shape 12"/>
+          <p:cNvSpPr/>
+          <p:nvPr/>
+        </p:nvSpPr>
+        <p:spPr>
+          <a:xfrm>
+            <a:off x="8412480" y="2377440"/>
+            <a:ext cx="457200" cy="457200"/>
           </a:xfrm>
           <a:prstGeom prst="ellipse">
             <a:avLst/>
           </a:prstGeom>
           <a:solidFill>
-            <a:srgbClr val="FFFFFF"/>
+            <a:srgbClr val="2E3A48"/>
           </a:solidFill>
           <a:ln/>
         </p:spPr>
       </p:sp>
       <p:pic>
         <p:nvPicPr>
-          <p:cNvPr id="31" name="Image 2" descr="preencoded.png">    </p:cNvPr>
+          <p:cNvPr id="17" name="Image 2" descr="preencoded.png">    </p:cNvPr>
           <p:cNvPicPr>
             <a:picLocks noChangeAspect="1"/>
           </p:cNvPicPr>
@@ -15057,8 +14823,8 @@
         </p:blipFill>
         <p:spPr>
           <a:xfrm>
-            <a:off x="946404" y="5646420"/>
-            <a:ext cx="137160" cy="137160"/>
+            <a:off x="8526780" y="2491740"/>
+            <a:ext cx="228600" cy="228600"/>
           </a:xfrm>
           <a:prstGeom prst="rect">
             <a:avLst/>
@@ -15067,66 +14833,130 @@
       </p:pic>
       <p:sp>
         <p:nvSpPr>
-          <p:cNvPr id="32" name="Text 27"/>
-          <p:cNvSpPr/>
-          <p:nvPr/>
-        </p:nvSpPr>
-        <p:spPr>
-          <a:xfrm>
-            <a:off x="1298448" y="5522976"/>
-            <a:ext cx="5669280" cy="384048"/>
-          </a:xfrm>
-          <a:prstGeom prst="rect">
-            <a:avLst/>
-          </a:prstGeom>
-          <a:noFill/>
-          <a:ln/>
-        </p:spPr>
-        <p:txBody>
-          <a:bodyPr wrap="square" lIns="0" tIns="0" rIns="0" bIns="0" rtlCol="0" anchor="ctr"/>
-          <a:lstStyle/>
-          <a:p>
-            <a:pPr indent="0" marL="0">
-              <a:buNone/>
-            </a:pPr>
-            <a:r>
-              <a:rPr lang="en-US" sz="1300" dirty="0">
-                <a:solidFill>
-                  <a:srgbClr val="1B2430"/>
-                </a:solidFill>
-                <a:latin typeface="Calibri" pitchFamily="34" charset="0"/>
-                <a:ea typeface="Calibri" pitchFamily="34" charset="-122"/>
-                <a:cs typeface="Calibri" pitchFamily="34" charset="-120"/>
-              </a:rPr>
-              <a:t>Budgets are phased, so drift shows up in week one</a:t>
-            </a:r>
-            <a:endParaRPr lang="en-US" sz="1300" dirty="0"/>
-          </a:p>
-        </p:txBody>
-      </p:sp>
-      <p:sp>
-        <p:nvSpPr>
-          <p:cNvPr id="33" name="Shape 28"/>
-          <p:cNvSpPr/>
-          <p:nvPr/>
-        </p:nvSpPr>
-        <p:spPr>
-          <a:xfrm>
-            <a:off x="877824" y="5961888"/>
-            <a:ext cx="274320" cy="274320"/>
+          <p:cNvPr id="18" name="Text 13"/>
+          <p:cNvSpPr/>
+          <p:nvPr/>
+        </p:nvSpPr>
+        <p:spPr>
+          <a:xfrm>
+            <a:off x="8997696" y="2359152"/>
+            <a:ext cx="2468880" cy="493776"/>
+          </a:xfrm>
+          <a:prstGeom prst="rect">
+            <a:avLst/>
+          </a:prstGeom>
+          <a:noFill/>
+          <a:ln/>
+        </p:spPr>
+        <p:txBody>
+          <a:bodyPr wrap="square" lIns="0" tIns="0" rIns="0" bIns="0" rtlCol="0" anchor="ctr"/>
+          <a:lstStyle/>
+          <a:p>
+            <a:pPr indent="0" marL="0">
+              <a:buNone/>
+            </a:pPr>
+            <a:r>
+              <a:rPr lang="en-US" sz="1500" b="1" dirty="0">
+                <a:solidFill>
+                  <a:srgbClr val="FFFFFF"/>
+                </a:solidFill>
+                <a:latin typeface="Cambria" pitchFamily="34" charset="0"/>
+                <a:ea typeface="Cambria" pitchFamily="34" charset="-122"/>
+                <a:cs typeface="Cambria" pitchFamily="34" charset="-120"/>
+              </a:rPr>
+              <a:t>What the SLO actually requires</a:t>
+            </a:r>
+            <a:endParaRPr lang="en-US" sz="1500" dirty="0"/>
+          </a:p>
+        </p:txBody>
+      </p:sp>
+      <p:sp>
+        <p:nvSpPr>
+          <p:cNvPr id="19" name="Text 14"/>
+          <p:cNvSpPr/>
+          <p:nvPr/>
+        </p:nvSpPr>
+        <p:spPr>
+          <a:xfrm>
+            <a:off x="8412480" y="2962656"/>
+            <a:ext cx="2926080" cy="960120"/>
+          </a:xfrm>
+          <a:prstGeom prst="rect">
+            <a:avLst/>
+          </a:prstGeom>
+          <a:noFill/>
+          <a:ln/>
+        </p:spPr>
+        <p:txBody>
+          <a:bodyPr wrap="square" lIns="0" tIns="0" rIns="0" bIns="0" rtlCol="0" anchor="t"/>
+          <a:lstStyle/>
+          <a:p>
+            <a:pPr indent="0" marL="0">
+              <a:lnSpc>
+                <a:spcPts val="1600"/>
+              </a:lnSpc>
+              <a:buNone/>
+            </a:pPr>
+            <a:r>
+              <a:rPr lang="en-US" sz="1200" dirty="0">
+                <a:solidFill>
+                  <a:srgbClr val="9EABBA"/>
+                </a:solidFill>
+                <a:latin typeface="Calibri" pitchFamily="34" charset="0"/>
+                <a:ea typeface="Calibri" pitchFamily="34" charset="-122"/>
+                <a:cs typeface="Calibri" pitchFamily="34" charset="-120"/>
+              </a:rPr>
+              <a:t>Multi-region and multi-AZ are priced choices. Ask which one the business will genuinely pay for.</a:t>
+            </a:r>
+            <a:endParaRPr lang="en-US" sz="1200" dirty="0"/>
+          </a:p>
+        </p:txBody>
+      </p:sp>
+      <p:sp>
+        <p:nvSpPr>
+          <p:cNvPr id="20" name="Shape 15"/>
+          <p:cNvSpPr/>
+          <p:nvPr/>
+        </p:nvSpPr>
+        <p:spPr>
+          <a:xfrm>
+            <a:off x="548640" y="4133088"/>
+            <a:ext cx="3511296" cy="1874520"/>
+          </a:xfrm>
+          <a:prstGeom prst="roundRect">
+            <a:avLst>
+              <a:gd name="adj" fmla="val 4390"/>
+            </a:avLst>
+          </a:prstGeom>
+          <a:solidFill>
+            <a:srgbClr val="1F2936"/>
+          </a:solidFill>
+          <a:ln/>
+        </p:spPr>
+      </p:sp>
+      <p:sp>
+        <p:nvSpPr>
+          <p:cNvPr id="21" name="Shape 16"/>
+          <p:cNvSpPr/>
+          <p:nvPr/>
+        </p:nvSpPr>
+        <p:spPr>
+          <a:xfrm>
+            <a:off x="841248" y="4389120"/>
+            <a:ext cx="457200" cy="457200"/>
           </a:xfrm>
           <a:prstGeom prst="ellipse">
             <a:avLst/>
           </a:prstGeom>
           <a:solidFill>
-            <a:srgbClr val="FFFFFF"/>
+            <a:srgbClr val="2E3A48"/>
           </a:solidFill>
           <a:ln/>
         </p:spPr>
       </p:sp>
       <p:pic>
         <p:nvPicPr>
-          <p:cNvPr id="34" name="Image 3" descr="preencoded.png">    </p:cNvPr>
+          <p:cNvPr id="22" name="Image 3" descr="preencoded.png">    </p:cNvPr>
           <p:cNvPicPr>
             <a:picLocks noChangeAspect="1"/>
           </p:cNvPicPr>
@@ -15140,8 +14970,8 @@
         </p:blipFill>
         <p:spPr>
           <a:xfrm>
-            <a:off x="946404" y="6030468"/>
-            <a:ext cx="137160" cy="137160"/>
+            <a:off x="955548" y="4503420"/>
+            <a:ext cx="228600" cy="228600"/>
           </a:xfrm>
           <a:prstGeom prst="rect">
             <a:avLst/>
@@ -15150,140 +14980,30 @@
       </p:pic>
       <p:sp>
         <p:nvSpPr>
-          <p:cNvPr id="35" name="Text 29"/>
-          <p:cNvSpPr/>
-          <p:nvPr/>
-        </p:nvSpPr>
-        <p:spPr>
-          <a:xfrm>
-            <a:off x="1298448" y="5907024"/>
-            <a:ext cx="5669280" cy="384048"/>
-          </a:xfrm>
-          <a:prstGeom prst="rect">
-            <a:avLst/>
-          </a:prstGeom>
-          <a:noFill/>
-          <a:ln/>
-        </p:spPr>
-        <p:txBody>
-          <a:bodyPr wrap="square" lIns="0" tIns="0" rIns="0" bIns="0" rtlCol="0" anchor="ctr"/>
-          <a:lstStyle/>
-          <a:p>
-            <a:pPr indent="0" marL="0">
-              <a:buNone/>
-            </a:pPr>
-            <a:r>
-              <a:rPr lang="en-US" sz="1300" dirty="0">
-                <a:solidFill>
-                  <a:srgbClr val="1B2430"/>
-                </a:solidFill>
-                <a:latin typeface="Calibri" pitchFamily="34" charset="0"/>
-                <a:ea typeface="Calibri" pitchFamily="34" charset="-122"/>
-                <a:cs typeface="Calibri" pitchFamily="34" charset="-120"/>
-              </a:rPr>
-              <a:t>Quotas cap the worst case while someone investigates</a:t>
-            </a:r>
-            <a:endParaRPr lang="en-US" sz="1300" dirty="0"/>
-          </a:p>
-        </p:txBody>
-      </p:sp>
-      <p:sp>
-        <p:nvSpPr>
-          <p:cNvPr id="36" name="Shape 30"/>
-          <p:cNvSpPr/>
-          <p:nvPr/>
-        </p:nvSpPr>
-        <p:spPr>
-          <a:xfrm>
-            <a:off x="7525512" y="4297680"/>
-            <a:ext cx="4114800" cy="2011680"/>
-          </a:xfrm>
-          <a:prstGeom prst="roundRect">
-            <a:avLst>
-              <a:gd name="adj" fmla="val 4091"/>
-            </a:avLst>
-          </a:prstGeom>
-          <a:solidFill>
-            <a:srgbClr val="1F2936"/>
-          </a:solidFill>
-          <a:ln/>
-          <a:effectLst>
-            <a:outerShdw sx="100000" sy="100000" kx="0" ky="0" algn="bl" rotWithShape="0" blurRad="127000" dist="25400" dir="5400000">
-              <a:srgbClr val="8C99A8">
-                <a:alpha val="16000"/>
-              </a:srgbClr>
-            </a:outerShdw>
-          </a:effectLst>
-        </p:spPr>
-      </p:sp>
-      <p:sp>
-        <p:nvSpPr>
-          <p:cNvPr id="37" name="Text 31"/>
-          <p:cNvSpPr/>
-          <p:nvPr/>
-        </p:nvSpPr>
-        <p:spPr>
-          <a:xfrm>
-            <a:off x="7818120" y="4462272"/>
-            <a:ext cx="3200400" cy="292608"/>
-          </a:xfrm>
-          <a:prstGeom prst="rect">
-            <a:avLst/>
-          </a:prstGeom>
-          <a:noFill/>
-          <a:ln/>
-        </p:spPr>
-        <p:txBody>
-          <a:bodyPr wrap="square" lIns="0" tIns="0" rIns="0" bIns="0" rtlCol="0" anchor="ctr"/>
-          <a:lstStyle/>
-          <a:p>
-            <a:pPr indent="0" marL="0">
-              <a:buNone/>
-            </a:pPr>
-            <a:r>
-              <a:rPr lang="en-US" sz="1200" b="1" spc="180" kern="0" dirty="0">
-                <a:solidFill>
-                  <a:srgbClr val="E39B2C"/>
-                </a:solidFill>
-                <a:latin typeface="Calibri" pitchFamily="34" charset="0"/>
-                <a:ea typeface="Calibri" pitchFamily="34" charset="-122"/>
-                <a:cs typeface="Calibri" pitchFamily="34" charset="-120"/>
-              </a:rPr>
-              <a:t>The point</a:t>
-            </a:r>
-            <a:endParaRPr lang="en-US" sz="1200" dirty="0"/>
-          </a:p>
-        </p:txBody>
-      </p:sp>
-      <p:sp>
-        <p:nvSpPr>
-          <p:cNvPr id="38" name="Text 32"/>
-          <p:cNvSpPr/>
-          <p:nvPr/>
-        </p:nvSpPr>
-        <p:spPr>
-          <a:xfrm>
-            <a:off x="7818120" y="4828032"/>
-            <a:ext cx="3529584" cy="1280160"/>
-          </a:xfrm>
-          <a:prstGeom prst="rect">
-            <a:avLst/>
-          </a:prstGeom>
-          <a:noFill/>
-          <a:ln/>
-        </p:spPr>
-        <p:txBody>
-          <a:bodyPr wrap="square" lIns="0" tIns="0" rIns="0" bIns="0" rtlCol="0" anchor="t"/>
-          <a:lstStyle/>
-          <a:p>
-            <a:pPr indent="0" marL="0">
-              <a:lnSpc>
-                <a:spcPts val="2200"/>
-              </a:lnSpc>
-              <a:buNone/>
-            </a:pPr>
-            <a:r>
-              <a:rPr lang="en-US" sz="1550" i="1" dirty="0">
+          <p:cNvPr id="23" name="Text 17"/>
+          <p:cNvSpPr/>
+          <p:nvPr/>
+        </p:nvSpPr>
+        <p:spPr>
+          <a:xfrm>
+            <a:off x="1426464" y="4370832"/>
+            <a:ext cx="2468880" cy="493776"/>
+          </a:xfrm>
+          <a:prstGeom prst="rect">
+            <a:avLst/>
+          </a:prstGeom>
+          <a:noFill/>
+          <a:ln/>
+        </p:spPr>
+        <p:txBody>
+          <a:bodyPr wrap="square" lIns="0" tIns="0" rIns="0" bIns="0" rtlCol="0" anchor="ctr"/>
+          <a:lstStyle/>
+          <a:p>
+            <a:pPr indent="0" marL="0">
+              <a:buNone/>
+            </a:pPr>
+            <a:r>
+              <a:rPr lang="en-US" sz="1500" b="1" dirty="0">
                 <a:solidFill>
                   <a:srgbClr val="FFFFFF"/>
                 </a:solidFill>
@@ -15291,9 +15011,404 @@
                 <a:ea typeface="Cambria" pitchFamily="34" charset="-122"/>
                 <a:cs typeface="Cambria" pitchFamily="34" charset="-120"/>
               </a:rPr>
-              <a:t>The goal is not a smaller invoice. It is an invoice with nothing in it you have not already seen, explained and decided about.</a:t>
-            </a:r>
-            <a:endParaRPr lang="en-US" sz="1550" dirty="0"/>
+              <a:t>What is temporary</a:t>
+            </a:r>
+            <a:endParaRPr lang="en-US" sz="1500" dirty="0"/>
+          </a:p>
+        </p:txBody>
+      </p:sp>
+      <p:sp>
+        <p:nvSpPr>
+          <p:cNvPr id="24" name="Text 18"/>
+          <p:cNvSpPr/>
+          <p:nvPr/>
+        </p:nvSpPr>
+        <p:spPr>
+          <a:xfrm>
+            <a:off x="841248" y="4974336"/>
+            <a:ext cx="2926080" cy="960120"/>
+          </a:xfrm>
+          <a:prstGeom prst="rect">
+            <a:avLst/>
+          </a:prstGeom>
+          <a:noFill/>
+          <a:ln/>
+        </p:spPr>
+        <p:txBody>
+          <a:bodyPr wrap="square" lIns="0" tIns="0" rIns="0" bIns="0" rtlCol="0" anchor="t"/>
+          <a:lstStyle/>
+          <a:p>
+            <a:pPr indent="0" marL="0">
+              <a:lnSpc>
+                <a:spcPts val="1600"/>
+              </a:lnSpc>
+              <a:buNone/>
+            </a:pPr>
+            <a:r>
+              <a:rPr lang="en-US" sz="1200" dirty="0">
+                <a:solidFill>
+                  <a:srgbClr val="9EABBA"/>
+                </a:solidFill>
+                <a:latin typeface="Calibri" pitchFamily="34" charset="0"/>
+                <a:ea typeface="Calibri" pitchFamily="34" charset="-122"/>
+                <a:cs typeface="Calibri" pitchFamily="34" charset="-120"/>
+              </a:rPr>
+              <a:t>Non-production with no end date becomes permanent. An expiry set on day one is free; removing it later is a project.</a:t>
+            </a:r>
+            <a:endParaRPr lang="en-US" sz="1200" dirty="0"/>
+          </a:p>
+        </p:txBody>
+      </p:sp>
+      <p:sp>
+        <p:nvSpPr>
+          <p:cNvPr id="25" name="Shape 19"/>
+          <p:cNvSpPr/>
+          <p:nvPr/>
+        </p:nvSpPr>
+        <p:spPr>
+          <a:xfrm>
+            <a:off x="4334256" y="4133088"/>
+            <a:ext cx="3511296" cy="1874520"/>
+          </a:xfrm>
+          <a:prstGeom prst="roundRect">
+            <a:avLst>
+              <a:gd name="adj" fmla="val 4390"/>
+            </a:avLst>
+          </a:prstGeom>
+          <a:solidFill>
+            <a:srgbClr val="1F2936"/>
+          </a:solidFill>
+          <a:ln/>
+        </p:spPr>
+      </p:sp>
+      <p:sp>
+        <p:nvSpPr>
+          <p:cNvPr id="26" name="Shape 20"/>
+          <p:cNvSpPr/>
+          <p:nvPr/>
+        </p:nvSpPr>
+        <p:spPr>
+          <a:xfrm>
+            <a:off x="4626864" y="4389120"/>
+            <a:ext cx="457200" cy="457200"/>
+          </a:xfrm>
+          <a:prstGeom prst="ellipse">
+            <a:avLst/>
+          </a:prstGeom>
+          <a:solidFill>
+            <a:srgbClr val="2E3A48"/>
+          </a:solidFill>
+          <a:ln/>
+        </p:spPr>
+      </p:sp>
+      <p:pic>
+        <p:nvPicPr>
+          <p:cNvPr id="27" name="Image 4" descr="preencoded.png">    </p:cNvPr>
+          <p:cNvPicPr>
+            <a:picLocks noChangeAspect="1"/>
+          </p:cNvPicPr>
+          <p:nvPr/>
+        </p:nvPicPr>
+        <p:blipFill>
+          <a:blip r:embed="rId5"/>
+          <a:stretch>
+            <a:fillRect/>
+          </a:stretch>
+        </p:blipFill>
+        <p:spPr>
+          <a:xfrm>
+            <a:off x="4741164" y="4503420"/>
+            <a:ext cx="228600" cy="228600"/>
+          </a:xfrm>
+          <a:prstGeom prst="rect">
+            <a:avLst/>
+          </a:prstGeom>
+        </p:spPr>
+      </p:pic>
+      <p:sp>
+        <p:nvSpPr>
+          <p:cNvPr id="28" name="Text 21"/>
+          <p:cNvSpPr/>
+          <p:nvPr/>
+        </p:nvSpPr>
+        <p:spPr>
+          <a:xfrm>
+            <a:off x="5212080" y="4370832"/>
+            <a:ext cx="2468880" cy="493776"/>
+          </a:xfrm>
+          <a:prstGeom prst="rect">
+            <a:avLst/>
+          </a:prstGeom>
+          <a:noFill/>
+          <a:ln/>
+        </p:spPr>
+        <p:txBody>
+          <a:bodyPr wrap="square" lIns="0" tIns="0" rIns="0" bIns="0" rtlCol="0" anchor="ctr"/>
+          <a:lstStyle/>
+          <a:p>
+            <a:pPr indent="0" marL="0">
+              <a:buNone/>
+            </a:pPr>
+            <a:r>
+              <a:rPr lang="en-US" sz="1500" b="1" dirty="0">
+                <a:solidFill>
+                  <a:srgbClr val="FFFFFF"/>
+                </a:solidFill>
+                <a:latin typeface="Cambria" pitchFamily="34" charset="0"/>
+                <a:ea typeface="Cambria" pitchFamily="34" charset="-122"/>
+                <a:cs typeface="Cambria" pitchFamily="34" charset="-120"/>
+              </a:rPr>
+              <a:t>For AI workloads</a:t>
+            </a:r>
+            <a:endParaRPr lang="en-US" sz="1500" dirty="0"/>
+          </a:p>
+        </p:txBody>
+      </p:sp>
+      <p:sp>
+        <p:nvSpPr>
+          <p:cNvPr id="29" name="Text 22"/>
+          <p:cNvSpPr/>
+          <p:nvPr/>
+        </p:nvSpPr>
+        <p:spPr>
+          <a:xfrm>
+            <a:off x="4626864" y="4974336"/>
+            <a:ext cx="2926080" cy="960120"/>
+          </a:xfrm>
+          <a:prstGeom prst="rect">
+            <a:avLst/>
+          </a:prstGeom>
+          <a:noFill/>
+          <a:ln/>
+        </p:spPr>
+        <p:txBody>
+          <a:bodyPr wrap="square" lIns="0" tIns="0" rIns="0" bIns="0" rtlCol="0" anchor="t"/>
+          <a:lstStyle/>
+          <a:p>
+            <a:pPr indent="0" marL="0">
+              <a:lnSpc>
+                <a:spcPts val="1600"/>
+              </a:lnSpc>
+              <a:buNone/>
+            </a:pPr>
+            <a:r>
+              <a:rPr lang="en-US" sz="1200" dirty="0">
+                <a:solidFill>
+                  <a:srgbClr val="9EABBA"/>
+                </a:solidFill>
+                <a:latin typeface="Calibri" pitchFamily="34" charset="0"/>
+                <a:ea typeface="Calibri" pitchFamily="34" charset="-122"/>
+                <a:cs typeface="Calibri" pitchFamily="34" charset="-120"/>
+              </a:rPr>
+              <a:t>Tokens per request, cache hit rate, model tier, and whether provisioned throughput is justified by the traffic.</a:t>
+            </a:r>
+            <a:endParaRPr lang="en-US" sz="1200" dirty="0"/>
+          </a:p>
+        </p:txBody>
+      </p:sp>
+      <p:sp>
+        <p:nvSpPr>
+          <p:cNvPr id="30" name="Shape 23"/>
+          <p:cNvSpPr/>
+          <p:nvPr/>
+        </p:nvSpPr>
+        <p:spPr>
+          <a:xfrm>
+            <a:off x="8119872" y="4133088"/>
+            <a:ext cx="3511296" cy="1874520"/>
+          </a:xfrm>
+          <a:prstGeom prst="roundRect">
+            <a:avLst>
+              <a:gd name="adj" fmla="val 4390"/>
+            </a:avLst>
+          </a:prstGeom>
+          <a:solidFill>
+            <a:srgbClr val="1F2936"/>
+          </a:solidFill>
+          <a:ln/>
+        </p:spPr>
+      </p:sp>
+      <p:sp>
+        <p:nvSpPr>
+          <p:cNvPr id="31" name="Shape 24"/>
+          <p:cNvSpPr/>
+          <p:nvPr/>
+        </p:nvSpPr>
+        <p:spPr>
+          <a:xfrm>
+            <a:off x="8412480" y="4389120"/>
+            <a:ext cx="457200" cy="457200"/>
+          </a:xfrm>
+          <a:prstGeom prst="ellipse">
+            <a:avLst/>
+          </a:prstGeom>
+          <a:solidFill>
+            <a:srgbClr val="2E3A48"/>
+          </a:solidFill>
+          <a:ln/>
+        </p:spPr>
+      </p:sp>
+      <p:pic>
+        <p:nvPicPr>
+          <p:cNvPr id="32" name="Image 5" descr="preencoded.png">    </p:cNvPr>
+          <p:cNvPicPr>
+            <a:picLocks noChangeAspect="1"/>
+          </p:cNvPicPr>
+          <p:nvPr/>
+        </p:nvPicPr>
+        <p:blipFill>
+          <a:blip r:embed="rId6"/>
+          <a:stretch>
+            <a:fillRect/>
+          </a:stretch>
+        </p:blipFill>
+        <p:spPr>
+          <a:xfrm>
+            <a:off x="8526780" y="4503420"/>
+            <a:ext cx="228600" cy="228600"/>
+          </a:xfrm>
+          <a:prstGeom prst="rect">
+            <a:avLst/>
+          </a:prstGeom>
+        </p:spPr>
+      </p:pic>
+      <p:sp>
+        <p:nvSpPr>
+          <p:cNvPr id="33" name="Text 25"/>
+          <p:cNvSpPr/>
+          <p:nvPr/>
+        </p:nvSpPr>
+        <p:spPr>
+          <a:xfrm>
+            <a:off x="8997696" y="4370832"/>
+            <a:ext cx="2468880" cy="493776"/>
+          </a:xfrm>
+          <a:prstGeom prst="rect">
+            <a:avLst/>
+          </a:prstGeom>
+          <a:noFill/>
+          <a:ln/>
+        </p:spPr>
+        <p:txBody>
+          <a:bodyPr wrap="square" lIns="0" tIns="0" rIns="0" bIns="0" rtlCol="0" anchor="ctr"/>
+          <a:lstStyle/>
+          <a:p>
+            <a:pPr indent="0" marL="0">
+              <a:buNone/>
+            </a:pPr>
+            <a:r>
+              <a:rPr lang="en-US" sz="1500" b="1" dirty="0">
+                <a:solidFill>
+                  <a:srgbClr val="FFFFFF"/>
+                </a:solidFill>
+                <a:latin typeface="Cambria" pitchFamily="34" charset="0"/>
+                <a:ea typeface="Cambria" pitchFamily="34" charset="-122"/>
+                <a:cs typeface="Cambria" pitchFamily="34" charset="-120"/>
+              </a:rPr>
+              <a:t>Owner and unit</a:t>
+            </a:r>
+            <a:endParaRPr lang="en-US" sz="1500" dirty="0"/>
+          </a:p>
+        </p:txBody>
+      </p:sp>
+      <p:sp>
+        <p:nvSpPr>
+          <p:cNvPr id="34" name="Text 26"/>
+          <p:cNvSpPr/>
+          <p:nvPr/>
+        </p:nvSpPr>
+        <p:spPr>
+          <a:xfrm>
+            <a:off x="8412480" y="4974336"/>
+            <a:ext cx="2926080" cy="960120"/>
+          </a:xfrm>
+          <a:prstGeom prst="rect">
+            <a:avLst/>
+          </a:prstGeom>
+          <a:noFill/>
+          <a:ln/>
+        </p:spPr>
+        <p:txBody>
+          <a:bodyPr wrap="square" lIns="0" tIns="0" rIns="0" bIns="0" rtlCol="0" anchor="t"/>
+          <a:lstStyle/>
+          <a:p>
+            <a:pPr indent="0" marL="0">
+              <a:lnSpc>
+                <a:spcPts val="1600"/>
+              </a:lnSpc>
+              <a:buNone/>
+            </a:pPr>
+            <a:r>
+              <a:rPr lang="en-US" sz="1200" dirty="0">
+                <a:solidFill>
+                  <a:srgbClr val="9EABBA"/>
+                </a:solidFill>
+                <a:latin typeface="Calibri" pitchFamily="34" charset="0"/>
+                <a:ea typeface="Calibri" pitchFamily="34" charset="-122"/>
+                <a:cs typeface="Calibri" pitchFamily="34" charset="-120"/>
+              </a:rPr>
+              <a:t>Which cost centre carries it, and what unit we will divide the cost by once it is live.</a:t>
+            </a:r>
+            <a:endParaRPr lang="en-US" sz="1200" dirty="0"/>
+          </a:p>
+        </p:txBody>
+      </p:sp>
+      <p:sp>
+        <p:nvSpPr>
+          <p:cNvPr id="35" name="Text 27"/>
+          <p:cNvSpPr/>
+          <p:nvPr/>
+        </p:nvSpPr>
+        <p:spPr>
+          <a:xfrm>
+            <a:off x="548640" y="6163056"/>
+            <a:ext cx="11091672" cy="548640"/>
+          </a:xfrm>
+          <a:prstGeom prst="rect">
+            <a:avLst/>
+          </a:prstGeom>
+          <a:noFill/>
+          <a:ln/>
+        </p:spPr>
+        <p:txBody>
+          <a:bodyPr wrap="square" lIns="0" tIns="0" rIns="0" bIns="0" rtlCol="0" anchor="t"/>
+          <a:lstStyle/>
+          <a:p>
+            <a:pPr indent="0" marL="0">
+              <a:lnSpc>
+                <a:spcPts val="1800"/>
+              </a:lnSpc>
+              <a:buNone/>
+            </a:pPr>
+            <a:r>
+              <a:rPr lang="en-US" sz="1250" b="1" dirty="0">
+                <a:solidFill>
+                  <a:srgbClr val="E39B2C"/>
+                </a:solidFill>
+                <a:latin typeface="Calibri" pitchFamily="34" charset="0"/>
+                <a:ea typeface="Calibri" pitchFamily="34" charset="-122"/>
+                <a:cs typeface="Calibri" pitchFamily="34" charset="-120"/>
+              </a:rPr>
+              <a:t>The output is a number attached to the design: </a:t>
+            </a:r>
+            <a:pPr indent="0" marL="0">
+              <a:lnSpc>
+                <a:spcPts val="1800"/>
+              </a:lnSpc>
+              <a:buNone/>
+            </a:pPr>
+            <a:r>
+              <a:rPr lang="en-US" sz="1250" dirty="0">
+                <a:solidFill>
+                  <a:srgbClr val="9EABBA"/>
+                </a:solidFill>
+                <a:latin typeface="Calibri" pitchFamily="34" charset="0"/>
+                <a:ea typeface="Calibri" pitchFamily="34" charset="-122"/>
+                <a:cs typeface="Calibri" pitchFamily="34" charset="-120"/>
+              </a:rPr>
+              <a:t>an estimate, and a cost target recorded beside the latency and availability targets. A cost diff on the pull request and policy as code keep it honest afterwards.</a:t>
+            </a:r>
+            <a:endParaRPr lang="en-US" sz="1250" dirty="0"/>
           </a:p>
         </p:txBody>
       </p:sp>
@@ -15362,7 +15477,7 @@
                 <a:ea typeface="Calibri" pitchFamily="34" charset="-122"/>
                 <a:cs typeface="Calibri" pitchFamily="34" charset="-120"/>
               </a:rPr>
-              <a:t>THE PATH FORWARD</a:t>
+              <a:t>GOVERNANCE — PUTTING IT TOGETHER</a:t>
             </a:r>
             <a:endParaRPr lang="en-US" sz="1100" dirty="0"/>
           </a:p>
@@ -15401,7 +15516,7 @@
                 <a:ea typeface="Cambria" pitchFamily="34" charset="-122"/>
                 <a:cs typeface="Cambria" pitchFamily="34" charset="-120"/>
               </a:rPr>
-              <a:t>Where to start</a:t>
+              <a:t>Nobody should learn it from the invoice</a:t>
             </a:r>
             <a:endParaRPr lang="en-US" sz="3100" dirty="0"/>
           </a:p>
@@ -15409,876 +15524,1145 @@
       </p:sp>
       <p:sp>
         <p:nvSpPr>
-          <p:cNvPr id="4" name="Shape 2"/>
-          <p:cNvSpPr/>
-          <p:nvPr/>
-        </p:nvSpPr>
-        <p:spPr>
-          <a:xfrm>
-            <a:off x="548640" y="1783080"/>
-            <a:ext cx="2587752" cy="2423160"/>
+          <p:cNvPr id="4" name="Text 2"/>
+          <p:cNvSpPr/>
+          <p:nvPr/>
+        </p:nvSpPr>
+        <p:spPr>
+          <a:xfrm>
+            <a:off x="548640" y="1536192"/>
+            <a:ext cx="10607040" cy="365760"/>
+          </a:xfrm>
+          <a:prstGeom prst="rect">
+            <a:avLst/>
+          </a:prstGeom>
+          <a:noFill/>
+          <a:ln/>
+        </p:spPr>
+        <p:txBody>
+          <a:bodyPr wrap="square" lIns="0" tIns="0" rIns="0" bIns="0" rtlCol="0" anchor="ctr"/>
+          <a:lstStyle/>
+          <a:p>
+            <a:pPr indent="0" marL="0">
+              <a:buNone/>
+            </a:pPr>
+            <a:r>
+              <a:rPr lang="en-US" sz="1500" dirty="0">
+                <a:solidFill>
+                  <a:srgbClr val="5C6675"/>
+                </a:solidFill>
+                <a:latin typeface="Calibri" pitchFamily="34" charset="0"/>
+                <a:ea typeface="Calibri" pitchFamily="34" charset="-122"/>
+                <a:cs typeface="Calibri" pitchFamily="34" charset="-120"/>
+              </a:rPr>
+              <a:t>The same overrun, found at four different moments. Only the first three leave you anything to do about it.</a:t>
+            </a:r>
+            <a:endParaRPr lang="en-US" sz="1500" dirty="0"/>
+          </a:p>
+        </p:txBody>
+      </p:sp>
+      <p:sp>
+        <p:nvSpPr>
+          <p:cNvPr id="5" name="Shape 3"/>
+          <p:cNvSpPr/>
+          <p:nvPr/>
+        </p:nvSpPr>
+        <p:spPr>
+          <a:xfrm>
+            <a:off x="1737360" y="3127248"/>
+            <a:ext cx="8714232" cy="45720"/>
           </a:xfrm>
           <a:prstGeom prst="roundRect">
             <a:avLst>
-              <a:gd name="adj" fmla="val 3396"/>
+              <a:gd name="adj" fmla="val 40000"/>
             </a:avLst>
           </a:prstGeom>
           <a:solidFill>
+            <a:srgbClr val="DFE4EA"/>
+          </a:solidFill>
+          <a:ln/>
+        </p:spPr>
+      </p:sp>
+      <p:sp>
+        <p:nvSpPr>
+          <p:cNvPr id="6" name="Text 4"/>
+          <p:cNvSpPr/>
+          <p:nvPr/>
+        </p:nvSpPr>
+        <p:spPr>
+          <a:xfrm>
+            <a:off x="548640" y="2212848"/>
+            <a:ext cx="2377440" cy="310896"/>
+          </a:xfrm>
+          <a:prstGeom prst="rect">
+            <a:avLst/>
+          </a:prstGeom>
+          <a:noFill/>
+          <a:ln/>
+        </p:spPr>
+        <p:txBody>
+          <a:bodyPr wrap="square" lIns="0" tIns="0" rIns="0" bIns="0" rtlCol="0" anchor="ctr"/>
+          <a:lstStyle/>
+          <a:p>
+            <a:pPr algn="ctr" indent="0" marL="0">
+              <a:buNone/>
+            </a:pPr>
+            <a:r>
+              <a:rPr lang="en-US" sz="1400" b="1" dirty="0">
+                <a:solidFill>
+                  <a:srgbClr val="1B2430"/>
+                </a:solidFill>
+                <a:latin typeface="Calibri" pitchFamily="34" charset="0"/>
+                <a:ea typeface="Calibri" pitchFamily="34" charset="-122"/>
+                <a:cs typeface="Calibri" pitchFamily="34" charset="-120"/>
+              </a:rPr>
+              <a:t>Usage burn alert</a:t>
+            </a:r>
+            <a:endParaRPr lang="en-US" sz="1400" dirty="0"/>
+          </a:p>
+        </p:txBody>
+      </p:sp>
+      <p:sp>
+        <p:nvSpPr>
+          <p:cNvPr id="7" name="Text 5"/>
+          <p:cNvSpPr/>
+          <p:nvPr/>
+        </p:nvSpPr>
+        <p:spPr>
+          <a:xfrm>
+            <a:off x="548640" y="2542032"/>
+            <a:ext cx="2377440" cy="292608"/>
+          </a:xfrm>
+          <a:prstGeom prst="rect">
+            <a:avLst/>
+          </a:prstGeom>
+          <a:noFill/>
+          <a:ln/>
+        </p:spPr>
+        <p:txBody>
+          <a:bodyPr wrap="square" lIns="0" tIns="0" rIns="0" bIns="0" rtlCol="0" anchor="ctr"/>
+          <a:lstStyle/>
+          <a:p>
+            <a:pPr algn="ctr" indent="0" marL="0">
+              <a:buNone/>
+            </a:pPr>
+            <a:r>
+              <a:rPr lang="en-US" sz="1250" b="1" spc="60" kern="0" dirty="0">
+                <a:solidFill>
+                  <a:srgbClr val="B87B18"/>
+                </a:solidFill>
+                <a:latin typeface="Calibri" pitchFamily="34" charset="0"/>
+                <a:ea typeface="Calibri" pitchFamily="34" charset="-122"/>
+                <a:cs typeface="Calibri" pitchFamily="34" charset="-120"/>
+              </a:rPr>
+              <a:t>~10 minutes</a:t>
+            </a:r>
+            <a:endParaRPr lang="en-US" sz="1250" dirty="0"/>
+          </a:p>
+        </p:txBody>
+      </p:sp>
+      <p:sp>
+        <p:nvSpPr>
+          <p:cNvPr id="8" name="Shape 6"/>
+          <p:cNvSpPr/>
+          <p:nvPr/>
+        </p:nvSpPr>
+        <p:spPr>
+          <a:xfrm>
+            <a:off x="1618488" y="3031236"/>
+            <a:ext cx="237744" cy="237744"/>
+          </a:xfrm>
+          <a:prstGeom prst="ellipse">
+            <a:avLst/>
+          </a:prstGeom>
+          <a:solidFill>
+            <a:srgbClr val="E39B2C"/>
+          </a:solidFill>
+          <a:ln w="25400">
+            <a:solidFill>
+              <a:srgbClr val="FFFFFF"/>
+            </a:solidFill>
+            <a:prstDash val="solid"/>
+          </a:ln>
+        </p:spPr>
+      </p:sp>
+      <p:sp>
+        <p:nvSpPr>
+          <p:cNvPr id="9" name="Text 7"/>
+          <p:cNvSpPr/>
+          <p:nvPr/>
+        </p:nvSpPr>
+        <p:spPr>
+          <a:xfrm>
+            <a:off x="548640" y="3401568"/>
+            <a:ext cx="2377440" cy="566928"/>
+          </a:xfrm>
+          <a:prstGeom prst="rect">
+            <a:avLst/>
+          </a:prstGeom>
+          <a:noFill/>
+          <a:ln/>
+        </p:spPr>
+        <p:txBody>
+          <a:bodyPr wrap="square" lIns="0" tIns="0" rIns="0" bIns="0" rtlCol="0" anchor="t"/>
+          <a:lstStyle/>
+          <a:p>
+            <a:pPr algn="ctr" indent="0" marL="0">
+              <a:lnSpc>
+                <a:spcPts val="1600"/>
+              </a:lnSpc>
+              <a:buNone/>
+            </a:pPr>
+            <a:r>
+              <a:rPr lang="en-US" sz="1200" dirty="0">
+                <a:solidFill>
+                  <a:srgbClr val="5C6675"/>
+                </a:solidFill>
+                <a:latin typeface="Calibri" pitchFamily="34" charset="0"/>
+                <a:ea typeface="Calibri" pitchFamily="34" charset="-122"/>
+                <a:cs typeface="Calibri" pitchFamily="34" charset="-120"/>
+              </a:rPr>
+              <a:t>Throttle it, or confirm it was intended.</a:t>
+            </a:r>
+            <a:endParaRPr lang="en-US" sz="1200" dirty="0"/>
+          </a:p>
+        </p:txBody>
+      </p:sp>
+      <p:sp>
+        <p:nvSpPr>
+          <p:cNvPr id="10" name="Text 8"/>
+          <p:cNvSpPr/>
+          <p:nvPr/>
+        </p:nvSpPr>
+        <p:spPr>
+          <a:xfrm>
+            <a:off x="3566160" y="2212848"/>
+            <a:ext cx="2377440" cy="310896"/>
+          </a:xfrm>
+          <a:prstGeom prst="rect">
+            <a:avLst/>
+          </a:prstGeom>
+          <a:noFill/>
+          <a:ln/>
+        </p:spPr>
+        <p:txBody>
+          <a:bodyPr wrap="square" lIns="0" tIns="0" rIns="0" bIns="0" rtlCol="0" anchor="ctr"/>
+          <a:lstStyle/>
+          <a:p>
+            <a:pPr algn="ctr" indent="0" marL="0">
+              <a:buNone/>
+            </a:pPr>
+            <a:r>
+              <a:rPr lang="en-US" sz="1400" b="1" dirty="0">
+                <a:solidFill>
+                  <a:srgbClr val="1B2430"/>
+                </a:solidFill>
+                <a:latin typeface="Calibri" pitchFamily="34" charset="0"/>
+                <a:ea typeface="Calibri" pitchFamily="34" charset="-122"/>
+                <a:cs typeface="Calibri" pitchFamily="34" charset="-120"/>
+              </a:rPr>
+              <a:t>Daily spend threshold</a:t>
+            </a:r>
+            <a:endParaRPr lang="en-US" sz="1400" dirty="0"/>
+          </a:p>
+        </p:txBody>
+      </p:sp>
+      <p:sp>
+        <p:nvSpPr>
+          <p:cNvPr id="11" name="Text 9"/>
+          <p:cNvSpPr/>
+          <p:nvPr/>
+        </p:nvSpPr>
+        <p:spPr>
+          <a:xfrm>
+            <a:off x="3566160" y="2542032"/>
+            <a:ext cx="2377440" cy="292608"/>
+          </a:xfrm>
+          <a:prstGeom prst="rect">
+            <a:avLst/>
+          </a:prstGeom>
+          <a:noFill/>
+          <a:ln/>
+        </p:spPr>
+        <p:txBody>
+          <a:bodyPr wrap="square" lIns="0" tIns="0" rIns="0" bIns="0" rtlCol="0" anchor="ctr"/>
+          <a:lstStyle/>
+          <a:p>
+            <a:pPr algn="ctr" indent="0" marL="0">
+              <a:buNone/>
+            </a:pPr>
+            <a:r>
+              <a:rPr lang="en-US" sz="1250" b="1" spc="60" kern="0" dirty="0">
+                <a:solidFill>
+                  <a:srgbClr val="1F6B5C"/>
+                </a:solidFill>
+                <a:latin typeface="Calibri" pitchFamily="34" charset="0"/>
+                <a:ea typeface="Calibri" pitchFamily="34" charset="-122"/>
+                <a:cs typeface="Calibri" pitchFamily="34" charset="-120"/>
+              </a:rPr>
+              <a:t>next morning</a:t>
+            </a:r>
+            <a:endParaRPr lang="en-US" sz="1250" dirty="0"/>
+          </a:p>
+        </p:txBody>
+      </p:sp>
+      <p:sp>
+        <p:nvSpPr>
+          <p:cNvPr id="12" name="Shape 10"/>
+          <p:cNvSpPr/>
+          <p:nvPr/>
+        </p:nvSpPr>
+        <p:spPr>
+          <a:xfrm>
+            <a:off x="4636008" y="3031236"/>
+            <a:ext cx="237744" cy="237744"/>
+          </a:xfrm>
+          <a:prstGeom prst="ellipse">
+            <a:avLst/>
+          </a:prstGeom>
+          <a:solidFill>
+            <a:srgbClr val="2E8B7A"/>
+          </a:solidFill>
+          <a:ln w="25400">
+            <a:solidFill>
+              <a:srgbClr val="FFFFFF"/>
+            </a:solidFill>
+            <a:prstDash val="solid"/>
+          </a:ln>
+        </p:spPr>
+      </p:sp>
+      <p:sp>
+        <p:nvSpPr>
+          <p:cNvPr id="13" name="Text 11"/>
+          <p:cNvSpPr/>
+          <p:nvPr/>
+        </p:nvSpPr>
+        <p:spPr>
+          <a:xfrm>
+            <a:off x="3566160" y="3401568"/>
+            <a:ext cx="2377440" cy="566928"/>
+          </a:xfrm>
+          <a:prstGeom prst="rect">
+            <a:avLst/>
+          </a:prstGeom>
+          <a:noFill/>
+          <a:ln/>
+        </p:spPr>
+        <p:txBody>
+          <a:bodyPr wrap="square" lIns="0" tIns="0" rIns="0" bIns="0" rtlCol="0" anchor="t"/>
+          <a:lstStyle/>
+          <a:p>
+            <a:pPr algn="ctr" indent="0" marL="0">
+              <a:lnSpc>
+                <a:spcPts val="1600"/>
+              </a:lnSpc>
+              <a:buNone/>
+            </a:pPr>
+            <a:r>
+              <a:rPr lang="en-US" sz="1200" dirty="0">
+                <a:solidFill>
+                  <a:srgbClr val="5C6675"/>
+                </a:solidFill>
+                <a:latin typeface="Calibri" pitchFamily="34" charset="0"/>
+                <a:ea typeface="Calibri" pitchFamily="34" charset="-122"/>
+                <a:cs typeface="Calibri" pitchFamily="34" charset="-120"/>
+              </a:rPr>
+              <a:t>One team, one number, one owner to ask.</a:t>
+            </a:r>
+            <a:endParaRPr lang="en-US" sz="1200" dirty="0"/>
+          </a:p>
+        </p:txBody>
+      </p:sp>
+      <p:sp>
+        <p:nvSpPr>
+          <p:cNvPr id="14" name="Text 12"/>
+          <p:cNvSpPr/>
+          <p:nvPr/>
+        </p:nvSpPr>
+        <p:spPr>
+          <a:xfrm>
+            <a:off x="6583680" y="2212848"/>
+            <a:ext cx="2377440" cy="310896"/>
+          </a:xfrm>
+          <a:prstGeom prst="rect">
+            <a:avLst/>
+          </a:prstGeom>
+          <a:noFill/>
+          <a:ln/>
+        </p:spPr>
+        <p:txBody>
+          <a:bodyPr wrap="square" lIns="0" tIns="0" rIns="0" bIns="0" rtlCol="0" anchor="ctr"/>
+          <a:lstStyle/>
+          <a:p>
+            <a:pPr algn="ctr" indent="0" marL="0">
+              <a:buNone/>
+            </a:pPr>
+            <a:r>
+              <a:rPr lang="en-US" sz="1400" b="1" dirty="0">
+                <a:solidFill>
+                  <a:srgbClr val="1B2430"/>
+                </a:solidFill>
+                <a:latin typeface="Calibri" pitchFamily="34" charset="0"/>
+                <a:ea typeface="Calibri" pitchFamily="34" charset="-122"/>
+                <a:cs typeface="Calibri" pitchFamily="34" charset="-120"/>
+              </a:rPr>
+              <a:t>Forecast overrun</a:t>
+            </a:r>
+            <a:endParaRPr lang="en-US" sz="1400" dirty="0"/>
+          </a:p>
+        </p:txBody>
+      </p:sp>
+      <p:sp>
+        <p:nvSpPr>
+          <p:cNvPr id="15" name="Text 13"/>
+          <p:cNvSpPr/>
+          <p:nvPr/>
+        </p:nvSpPr>
+        <p:spPr>
+          <a:xfrm>
+            <a:off x="6583680" y="2542032"/>
+            <a:ext cx="2377440" cy="292608"/>
+          </a:xfrm>
+          <a:prstGeom prst="rect">
+            <a:avLst/>
+          </a:prstGeom>
+          <a:noFill/>
+          <a:ln/>
+        </p:spPr>
+        <p:txBody>
+          <a:bodyPr wrap="square" lIns="0" tIns="0" rIns="0" bIns="0" rtlCol="0" anchor="ctr"/>
+          <a:lstStyle/>
+          <a:p>
+            <a:pPr algn="ctr" indent="0" marL="0">
+              <a:buNone/>
+            </a:pPr>
+            <a:r>
+              <a:rPr lang="en-US" sz="1250" b="1" spc="60" kern="0" dirty="0">
+                <a:solidFill>
+                  <a:srgbClr val="1F6B5C"/>
+                </a:solidFill>
+                <a:latin typeface="Calibri" pitchFamily="34" charset="0"/>
+                <a:ea typeface="Calibri" pitchFamily="34" charset="-122"/>
+                <a:cs typeface="Calibri" pitchFamily="34" charset="-120"/>
+              </a:rPr>
+              <a:t>~2 weeks out</a:t>
+            </a:r>
+            <a:endParaRPr lang="en-US" sz="1250" dirty="0"/>
+          </a:p>
+        </p:txBody>
+      </p:sp>
+      <p:sp>
+        <p:nvSpPr>
+          <p:cNvPr id="16" name="Shape 14"/>
+          <p:cNvSpPr/>
+          <p:nvPr/>
+        </p:nvSpPr>
+        <p:spPr>
+          <a:xfrm>
+            <a:off x="7653528" y="3031236"/>
+            <a:ext cx="237744" cy="237744"/>
+          </a:xfrm>
+          <a:prstGeom prst="ellipse">
+            <a:avLst/>
+          </a:prstGeom>
+          <a:solidFill>
+            <a:srgbClr val="2E8B7A"/>
+          </a:solidFill>
+          <a:ln w="25400">
+            <a:solidFill>
+              <a:srgbClr val="FFFFFF"/>
+            </a:solidFill>
+            <a:prstDash val="solid"/>
+          </a:ln>
+        </p:spPr>
+      </p:sp>
+      <p:sp>
+        <p:nvSpPr>
+          <p:cNvPr id="17" name="Text 15"/>
+          <p:cNvSpPr/>
+          <p:nvPr/>
+        </p:nvSpPr>
+        <p:spPr>
+          <a:xfrm>
+            <a:off x="6583680" y="3401568"/>
+            <a:ext cx="2377440" cy="566928"/>
+          </a:xfrm>
+          <a:prstGeom prst="rect">
+            <a:avLst/>
+          </a:prstGeom>
+          <a:noFill/>
+          <a:ln/>
+        </p:spPr>
+        <p:txBody>
+          <a:bodyPr wrap="square" lIns="0" tIns="0" rIns="0" bIns="0" rtlCol="0" anchor="t"/>
+          <a:lstStyle/>
+          <a:p>
+            <a:pPr algn="ctr" indent="0" marL="0">
+              <a:lnSpc>
+                <a:spcPts val="1600"/>
+              </a:lnSpc>
+              <a:buNone/>
+            </a:pPr>
+            <a:r>
+              <a:rPr lang="en-US" sz="1200" dirty="0">
+                <a:solidFill>
+                  <a:srgbClr val="5C6675"/>
+                </a:solidFill>
+                <a:latin typeface="Calibri" pitchFamily="34" charset="0"/>
+                <a:ea typeface="Calibri" pitchFamily="34" charset="-122"/>
+                <a:cs typeface="Calibri" pitchFamily="34" charset="-120"/>
+              </a:rPr>
+              <a:t>Still time to change the month's outcome.</a:t>
+            </a:r>
+            <a:endParaRPr lang="en-US" sz="1200" dirty="0"/>
+          </a:p>
+        </p:txBody>
+      </p:sp>
+      <p:sp>
+        <p:nvSpPr>
+          <p:cNvPr id="18" name="Text 16"/>
+          <p:cNvSpPr/>
+          <p:nvPr/>
+        </p:nvSpPr>
+        <p:spPr>
+          <a:xfrm>
+            <a:off x="9262872" y="2212848"/>
+            <a:ext cx="2377440" cy="310896"/>
+          </a:xfrm>
+          <a:prstGeom prst="rect">
+            <a:avLst/>
+          </a:prstGeom>
+          <a:noFill/>
+          <a:ln/>
+        </p:spPr>
+        <p:txBody>
+          <a:bodyPr wrap="square" lIns="0" tIns="0" rIns="0" bIns="0" rtlCol="0" anchor="ctr"/>
+          <a:lstStyle/>
+          <a:p>
+            <a:pPr algn="ctr" indent="0" marL="0">
+              <a:buNone/>
+            </a:pPr>
+            <a:r>
+              <a:rPr lang="en-US" sz="1400" b="1" dirty="0">
+                <a:solidFill>
+                  <a:srgbClr val="5C6675"/>
+                </a:solidFill>
+                <a:latin typeface="Calibri" pitchFamily="34" charset="0"/>
+                <a:ea typeface="Calibri" pitchFamily="34" charset="-122"/>
+                <a:cs typeface="Calibri" pitchFamily="34" charset="-120"/>
+              </a:rPr>
+              <a:t>The invoice</a:t>
+            </a:r>
+            <a:endParaRPr lang="en-US" sz="1400" dirty="0"/>
+          </a:p>
+        </p:txBody>
+      </p:sp>
+      <p:sp>
+        <p:nvSpPr>
+          <p:cNvPr id="19" name="Text 17"/>
+          <p:cNvSpPr/>
+          <p:nvPr/>
+        </p:nvSpPr>
+        <p:spPr>
+          <a:xfrm>
+            <a:off x="9262872" y="2542032"/>
+            <a:ext cx="2377440" cy="292608"/>
+          </a:xfrm>
+          <a:prstGeom prst="rect">
+            <a:avLst/>
+          </a:prstGeom>
+          <a:noFill/>
+          <a:ln/>
+        </p:spPr>
+        <p:txBody>
+          <a:bodyPr wrap="square" lIns="0" tIns="0" rIns="0" bIns="0" rtlCol="0" anchor="ctr"/>
+          <a:lstStyle/>
+          <a:p>
+            <a:pPr algn="ctr" indent="0" marL="0">
+              <a:buNone/>
+            </a:pPr>
+            <a:r>
+              <a:rPr lang="en-US" sz="1250" b="1" spc="60" kern="0" dirty="0">
+                <a:solidFill>
+                  <a:srgbClr val="5C6675"/>
+                </a:solidFill>
+                <a:latin typeface="Calibri" pitchFamily="34" charset="0"/>
+                <a:ea typeface="Calibri" pitchFamily="34" charset="-122"/>
+                <a:cs typeface="Calibri" pitchFamily="34" charset="-120"/>
+              </a:rPr>
+              <a:t>30–45 days later</a:t>
+            </a:r>
+            <a:endParaRPr lang="en-US" sz="1250" dirty="0"/>
+          </a:p>
+        </p:txBody>
+      </p:sp>
+      <p:sp>
+        <p:nvSpPr>
+          <p:cNvPr id="20" name="Shape 18"/>
+          <p:cNvSpPr/>
+          <p:nvPr/>
+        </p:nvSpPr>
+        <p:spPr>
+          <a:xfrm>
+            <a:off x="10332720" y="3031236"/>
+            <a:ext cx="237744" cy="237744"/>
+          </a:xfrm>
+          <a:prstGeom prst="ellipse">
+            <a:avLst/>
+          </a:prstGeom>
+          <a:solidFill>
+            <a:srgbClr val="AEB8C4"/>
+          </a:solidFill>
+          <a:ln w="25400">
+            <a:solidFill>
+              <a:srgbClr val="FFFFFF"/>
+            </a:solidFill>
+            <a:prstDash val="solid"/>
+          </a:ln>
+        </p:spPr>
+      </p:sp>
+      <p:sp>
+        <p:nvSpPr>
+          <p:cNvPr id="21" name="Text 19"/>
+          <p:cNvSpPr/>
+          <p:nvPr/>
+        </p:nvSpPr>
+        <p:spPr>
+          <a:xfrm>
+            <a:off x="9262872" y="3401568"/>
+            <a:ext cx="2377440" cy="566928"/>
+          </a:xfrm>
+          <a:prstGeom prst="rect">
+            <a:avLst/>
+          </a:prstGeom>
+          <a:noFill/>
+          <a:ln/>
+        </p:spPr>
+        <p:txBody>
+          <a:bodyPr wrap="square" lIns="0" tIns="0" rIns="0" bIns="0" rtlCol="0" anchor="t"/>
+          <a:lstStyle/>
+          <a:p>
+            <a:pPr algn="ctr" indent="0" marL="0">
+              <a:lnSpc>
+                <a:spcPts val="1600"/>
+              </a:lnSpc>
+              <a:buNone/>
+            </a:pPr>
+            <a:r>
+              <a:rPr lang="en-US" sz="1200" dirty="0">
+                <a:solidFill>
+                  <a:srgbClr val="5C6675"/>
+                </a:solidFill>
+                <a:latin typeface="Calibri" pitchFamily="34" charset="0"/>
+                <a:ea typeface="Calibri" pitchFamily="34" charset="-122"/>
+                <a:cs typeface="Calibri" pitchFamily="34" charset="-120"/>
+              </a:rPr>
+              <a:t>Nothing left to decide. Only to explain.</a:t>
+            </a:r>
+            <a:endParaRPr lang="en-US" sz="1200" dirty="0"/>
+          </a:p>
+        </p:txBody>
+      </p:sp>
+      <p:sp>
+        <p:nvSpPr>
+          <p:cNvPr id="22" name="Shape 20"/>
+          <p:cNvSpPr/>
+          <p:nvPr/>
+        </p:nvSpPr>
+        <p:spPr>
+          <a:xfrm>
+            <a:off x="548640" y="4297680"/>
+            <a:ext cx="6675120" cy="2011680"/>
+          </a:xfrm>
+          <a:prstGeom prst="roundRect">
+            <a:avLst>
+              <a:gd name="adj" fmla="val 4091"/>
+            </a:avLst>
+          </a:prstGeom>
+          <a:solidFill>
+            <a:srgbClr val="F1F3F6"/>
+          </a:solidFill>
+          <a:ln/>
+        </p:spPr>
+      </p:sp>
+      <p:sp>
+        <p:nvSpPr>
+          <p:cNvPr id="23" name="Text 21"/>
+          <p:cNvSpPr/>
+          <p:nvPr/>
+        </p:nvSpPr>
+        <p:spPr>
+          <a:xfrm>
+            <a:off x="877824" y="4443984"/>
+            <a:ext cx="3657600" cy="292608"/>
+          </a:xfrm>
+          <a:prstGeom prst="rect">
+            <a:avLst/>
+          </a:prstGeom>
+          <a:noFill/>
+          <a:ln/>
+        </p:spPr>
+        <p:txBody>
+          <a:bodyPr wrap="square" lIns="0" tIns="0" rIns="0" bIns="0" rtlCol="0" anchor="ctr"/>
+          <a:lstStyle/>
+          <a:p>
+            <a:pPr indent="0" marL="0">
+              <a:buNone/>
+            </a:pPr>
+            <a:r>
+              <a:rPr lang="en-US" sz="1200" b="1" spc="180" kern="0" dirty="0">
+                <a:solidFill>
+                  <a:srgbClr val="5C6675"/>
+                </a:solidFill>
+                <a:latin typeface="Calibri" pitchFamily="34" charset="0"/>
+                <a:ea typeface="Calibri" pitchFamily="34" charset="-122"/>
+                <a:cs typeface="Calibri" pitchFamily="34" charset="-120"/>
+              </a:rPr>
+              <a:t>What has to be true</a:t>
+            </a:r>
+            <a:endParaRPr lang="en-US" sz="1200" dirty="0"/>
+          </a:p>
+        </p:txBody>
+      </p:sp>
+      <p:sp>
+        <p:nvSpPr>
+          <p:cNvPr id="24" name="Shape 22"/>
+          <p:cNvSpPr/>
+          <p:nvPr/>
+        </p:nvSpPr>
+        <p:spPr>
+          <a:xfrm>
+            <a:off x="877824" y="4809744"/>
+            <a:ext cx="274320" cy="274320"/>
+          </a:xfrm>
+          <a:prstGeom prst="ellipse">
+            <a:avLst/>
+          </a:prstGeom>
+          <a:solidFill>
+            <a:srgbClr val="FFFFFF"/>
+          </a:solidFill>
+          <a:ln/>
+        </p:spPr>
+      </p:sp>
+      <p:pic>
+        <p:nvPicPr>
+          <p:cNvPr id="25" name="Image 0" descr="preencoded.png">    </p:cNvPr>
+          <p:cNvPicPr>
+            <a:picLocks noChangeAspect="1"/>
+          </p:cNvPicPr>
+          <p:nvPr/>
+        </p:nvPicPr>
+        <p:blipFill>
+          <a:blip r:embed="rId1"/>
+          <a:stretch>
+            <a:fillRect/>
+          </a:stretch>
+        </p:blipFill>
+        <p:spPr>
+          <a:xfrm>
+            <a:off x="946404" y="4878324"/>
+            <a:ext cx="137160" cy="137160"/>
+          </a:xfrm>
+          <a:prstGeom prst="rect">
+            <a:avLst/>
+          </a:prstGeom>
+        </p:spPr>
+      </p:pic>
+      <p:sp>
+        <p:nvSpPr>
+          <p:cNvPr id="26" name="Text 23"/>
+          <p:cNvSpPr/>
+          <p:nvPr/>
+        </p:nvSpPr>
+        <p:spPr>
+          <a:xfrm>
+            <a:off x="1298448" y="4754880"/>
+            <a:ext cx="5669280" cy="384048"/>
+          </a:xfrm>
+          <a:prstGeom prst="rect">
+            <a:avLst/>
+          </a:prstGeom>
+          <a:noFill/>
+          <a:ln/>
+        </p:spPr>
+        <p:txBody>
+          <a:bodyPr wrap="square" lIns="0" tIns="0" rIns="0" bIns="0" rtlCol="0" anchor="ctr"/>
+          <a:lstStyle/>
+          <a:p>
+            <a:pPr indent="0" marL="0">
+              <a:buNone/>
+            </a:pPr>
+            <a:r>
+              <a:rPr lang="en-US" sz="1300" dirty="0">
+                <a:solidFill>
+                  <a:srgbClr val="1B2430"/>
+                </a:solidFill>
+                <a:latin typeface="Calibri" pitchFamily="34" charset="0"/>
+                <a:ea typeface="Calibri" pitchFamily="34" charset="-122"/>
+                <a:cs typeface="Calibri" pitchFamily="34" charset="-120"/>
+              </a:rPr>
+              <a:t>Protective alerts run on usage data, not on billing data</a:t>
+            </a:r>
+            <a:endParaRPr lang="en-US" sz="1300" dirty="0"/>
+          </a:p>
+        </p:txBody>
+      </p:sp>
+      <p:sp>
+        <p:nvSpPr>
+          <p:cNvPr id="27" name="Shape 24"/>
+          <p:cNvSpPr/>
+          <p:nvPr/>
+        </p:nvSpPr>
+        <p:spPr>
+          <a:xfrm>
+            <a:off x="877824" y="5193792"/>
+            <a:ext cx="274320" cy="274320"/>
+          </a:xfrm>
+          <a:prstGeom prst="ellipse">
+            <a:avLst/>
+          </a:prstGeom>
+          <a:solidFill>
+            <a:srgbClr val="FFFFFF"/>
+          </a:solidFill>
+          <a:ln/>
+        </p:spPr>
+      </p:sp>
+      <p:pic>
+        <p:nvPicPr>
+          <p:cNvPr id="28" name="Image 1" descr="preencoded.png">    </p:cNvPr>
+          <p:cNvPicPr>
+            <a:picLocks noChangeAspect="1"/>
+          </p:cNvPicPr>
+          <p:nvPr/>
+        </p:nvPicPr>
+        <p:blipFill>
+          <a:blip r:embed="rId2"/>
+          <a:stretch>
+            <a:fillRect/>
+          </a:stretch>
+        </p:blipFill>
+        <p:spPr>
+          <a:xfrm>
+            <a:off x="946404" y="5262372"/>
+            <a:ext cx="137160" cy="137160"/>
+          </a:xfrm>
+          <a:prstGeom prst="rect">
+            <a:avLst/>
+          </a:prstGeom>
+        </p:spPr>
+      </p:pic>
+      <p:sp>
+        <p:nvSpPr>
+          <p:cNvPr id="29" name="Text 25"/>
+          <p:cNvSpPr/>
+          <p:nvPr/>
+        </p:nvSpPr>
+        <p:spPr>
+          <a:xfrm>
+            <a:off x="1298448" y="5138928"/>
+            <a:ext cx="5669280" cy="384048"/>
+          </a:xfrm>
+          <a:prstGeom prst="rect">
+            <a:avLst/>
+          </a:prstGeom>
+          <a:noFill/>
+          <a:ln/>
+        </p:spPr>
+        <p:txBody>
+          <a:bodyPr wrap="square" lIns="0" tIns="0" rIns="0" bIns="0" rtlCol="0" anchor="ctr"/>
+          <a:lstStyle/>
+          <a:p>
+            <a:pPr indent="0" marL="0">
+              <a:buNone/>
+            </a:pPr>
+            <a:r>
+              <a:rPr lang="en-US" sz="1300" dirty="0">
+                <a:solidFill>
+                  <a:srgbClr val="1B2430"/>
+                </a:solidFill>
+                <a:latin typeface="Calibri" pitchFamily="34" charset="0"/>
+                <a:ea typeface="Calibri" pitchFamily="34" charset="-122"/>
+                <a:cs typeface="Calibri" pitchFamily="34" charset="-120"/>
+              </a:rPr>
+              <a:t>Every alert has a named owner to route to</a:t>
+            </a:r>
+            <a:endParaRPr lang="en-US" sz="1300" dirty="0"/>
+          </a:p>
+        </p:txBody>
+      </p:sp>
+      <p:sp>
+        <p:nvSpPr>
+          <p:cNvPr id="30" name="Shape 26"/>
+          <p:cNvSpPr/>
+          <p:nvPr/>
+        </p:nvSpPr>
+        <p:spPr>
+          <a:xfrm>
+            <a:off x="877824" y="5577840"/>
+            <a:ext cx="274320" cy="274320"/>
+          </a:xfrm>
+          <a:prstGeom prst="ellipse">
+            <a:avLst/>
+          </a:prstGeom>
+          <a:solidFill>
+            <a:srgbClr val="FFFFFF"/>
+          </a:solidFill>
+          <a:ln/>
+        </p:spPr>
+      </p:sp>
+      <p:pic>
+        <p:nvPicPr>
+          <p:cNvPr id="31" name="Image 2" descr="preencoded.png">    </p:cNvPr>
+          <p:cNvPicPr>
+            <a:picLocks noChangeAspect="1"/>
+          </p:cNvPicPr>
+          <p:nvPr/>
+        </p:nvPicPr>
+        <p:blipFill>
+          <a:blip r:embed="rId3"/>
+          <a:stretch>
+            <a:fillRect/>
+          </a:stretch>
+        </p:blipFill>
+        <p:spPr>
+          <a:xfrm>
+            <a:off x="946404" y="5646420"/>
+            <a:ext cx="137160" cy="137160"/>
+          </a:xfrm>
+          <a:prstGeom prst="rect">
+            <a:avLst/>
+          </a:prstGeom>
+        </p:spPr>
+      </p:pic>
+      <p:sp>
+        <p:nvSpPr>
+          <p:cNvPr id="32" name="Text 27"/>
+          <p:cNvSpPr/>
+          <p:nvPr/>
+        </p:nvSpPr>
+        <p:spPr>
+          <a:xfrm>
+            <a:off x="1298448" y="5522976"/>
+            <a:ext cx="5669280" cy="384048"/>
+          </a:xfrm>
+          <a:prstGeom prst="rect">
+            <a:avLst/>
+          </a:prstGeom>
+          <a:noFill/>
+          <a:ln/>
+        </p:spPr>
+        <p:txBody>
+          <a:bodyPr wrap="square" lIns="0" tIns="0" rIns="0" bIns="0" rtlCol="0" anchor="ctr"/>
+          <a:lstStyle/>
+          <a:p>
+            <a:pPr indent="0" marL="0">
+              <a:buNone/>
+            </a:pPr>
+            <a:r>
+              <a:rPr lang="en-US" sz="1300" dirty="0">
+                <a:solidFill>
+                  <a:srgbClr val="1B2430"/>
+                </a:solidFill>
+                <a:latin typeface="Calibri" pitchFamily="34" charset="0"/>
+                <a:ea typeface="Calibri" pitchFamily="34" charset="-122"/>
+                <a:cs typeface="Calibri" pitchFamily="34" charset="-120"/>
+              </a:rPr>
+              <a:t>Budgets are phased, so drift shows up in week one</a:t>
+            </a:r>
+            <a:endParaRPr lang="en-US" sz="1300" dirty="0"/>
+          </a:p>
+        </p:txBody>
+      </p:sp>
+      <p:sp>
+        <p:nvSpPr>
+          <p:cNvPr id="33" name="Shape 28"/>
+          <p:cNvSpPr/>
+          <p:nvPr/>
+        </p:nvSpPr>
+        <p:spPr>
+          <a:xfrm>
+            <a:off x="877824" y="5961888"/>
+            <a:ext cx="274320" cy="274320"/>
+          </a:xfrm>
+          <a:prstGeom prst="ellipse">
+            <a:avLst/>
+          </a:prstGeom>
+          <a:solidFill>
+            <a:srgbClr val="FFFFFF"/>
+          </a:solidFill>
+          <a:ln/>
+        </p:spPr>
+      </p:sp>
+      <p:pic>
+        <p:nvPicPr>
+          <p:cNvPr id="34" name="Image 3" descr="preencoded.png">    </p:cNvPr>
+          <p:cNvPicPr>
+            <a:picLocks noChangeAspect="1"/>
+          </p:cNvPicPr>
+          <p:nvPr/>
+        </p:nvPicPr>
+        <p:blipFill>
+          <a:blip r:embed="rId4"/>
+          <a:stretch>
+            <a:fillRect/>
+          </a:stretch>
+        </p:blipFill>
+        <p:spPr>
+          <a:xfrm>
+            <a:off x="946404" y="6030468"/>
+            <a:ext cx="137160" cy="137160"/>
+          </a:xfrm>
+          <a:prstGeom prst="rect">
+            <a:avLst/>
+          </a:prstGeom>
+        </p:spPr>
+      </p:pic>
+      <p:sp>
+        <p:nvSpPr>
+          <p:cNvPr id="35" name="Text 29"/>
+          <p:cNvSpPr/>
+          <p:nvPr/>
+        </p:nvSpPr>
+        <p:spPr>
+          <a:xfrm>
+            <a:off x="1298448" y="5907024"/>
+            <a:ext cx="5669280" cy="384048"/>
+          </a:xfrm>
+          <a:prstGeom prst="rect">
+            <a:avLst/>
+          </a:prstGeom>
+          <a:noFill/>
+          <a:ln/>
+        </p:spPr>
+        <p:txBody>
+          <a:bodyPr wrap="square" lIns="0" tIns="0" rIns="0" bIns="0" rtlCol="0" anchor="ctr"/>
+          <a:lstStyle/>
+          <a:p>
+            <a:pPr indent="0" marL="0">
+              <a:buNone/>
+            </a:pPr>
+            <a:r>
+              <a:rPr lang="en-US" sz="1300" dirty="0">
+                <a:solidFill>
+                  <a:srgbClr val="1B2430"/>
+                </a:solidFill>
+                <a:latin typeface="Calibri" pitchFamily="34" charset="0"/>
+                <a:ea typeface="Calibri" pitchFamily="34" charset="-122"/>
+                <a:cs typeface="Calibri" pitchFamily="34" charset="-120"/>
+              </a:rPr>
+              <a:t>Quotas cap the worst case while someone investigates</a:t>
+            </a:r>
+            <a:endParaRPr lang="en-US" sz="1300" dirty="0"/>
+          </a:p>
+        </p:txBody>
+      </p:sp>
+      <p:sp>
+        <p:nvSpPr>
+          <p:cNvPr id="36" name="Shape 30"/>
+          <p:cNvSpPr/>
+          <p:nvPr/>
+        </p:nvSpPr>
+        <p:spPr>
+          <a:xfrm>
+            <a:off x="7525512" y="4297680"/>
+            <a:ext cx="4114800" cy="2011680"/>
+          </a:xfrm>
+          <a:prstGeom prst="roundRect">
+            <a:avLst>
+              <a:gd name="adj" fmla="val 4091"/>
+            </a:avLst>
+          </a:prstGeom>
+          <a:solidFill>
             <a:srgbClr val="1F2936"/>
           </a:solidFill>
           <a:ln/>
-        </p:spPr>
-      </p:sp>
-      <p:sp>
-        <p:nvSpPr>
-          <p:cNvPr id="5" name="Text 3"/>
-          <p:cNvSpPr/>
-          <p:nvPr/>
-        </p:nvSpPr>
-        <p:spPr>
-          <a:xfrm>
-            <a:off x="804672" y="1965960"/>
-            <a:ext cx="1097280" cy="502920"/>
-          </a:xfrm>
-          <a:prstGeom prst="rect">
-            <a:avLst/>
-          </a:prstGeom>
-          <a:noFill/>
-          <a:ln/>
-        </p:spPr>
-        <p:txBody>
-          <a:bodyPr wrap="square" lIns="0" tIns="0" rIns="0" bIns="0" rtlCol="0" anchor="ctr"/>
-          <a:lstStyle/>
-          <a:p>
-            <a:pPr indent="0" marL="0">
-              <a:buNone/>
-            </a:pPr>
-            <a:r>
-              <a:rPr lang="en-US" sz="2800" b="1" dirty="0">
+          <a:effectLst>
+            <a:outerShdw sx="100000" sy="100000" kx="0" ky="0" algn="bl" rotWithShape="0" blurRad="127000" dist="25400" dir="5400000">
+              <a:srgbClr val="8C99A8">
+                <a:alpha val="16000"/>
+              </a:srgbClr>
+            </a:outerShdw>
+          </a:effectLst>
+        </p:spPr>
+      </p:sp>
+      <p:sp>
+        <p:nvSpPr>
+          <p:cNvPr id="37" name="Text 31"/>
+          <p:cNvSpPr/>
+          <p:nvPr/>
+        </p:nvSpPr>
+        <p:spPr>
+          <a:xfrm>
+            <a:off x="7818120" y="4462272"/>
+            <a:ext cx="3200400" cy="292608"/>
+          </a:xfrm>
+          <a:prstGeom prst="rect">
+            <a:avLst/>
+          </a:prstGeom>
+          <a:noFill/>
+          <a:ln/>
+        </p:spPr>
+        <p:txBody>
+          <a:bodyPr wrap="square" lIns="0" tIns="0" rIns="0" bIns="0" rtlCol="0" anchor="ctr"/>
+          <a:lstStyle/>
+          <a:p>
+            <a:pPr indent="0" marL="0">
+              <a:buNone/>
+            </a:pPr>
+            <a:r>
+              <a:rPr lang="en-US" sz="1200" b="1" spc="180" kern="0" dirty="0">
                 <a:solidFill>
                   <a:srgbClr val="E39B2C"/>
+                </a:solidFill>
+                <a:latin typeface="Calibri" pitchFamily="34" charset="0"/>
+                <a:ea typeface="Calibri" pitchFamily="34" charset="-122"/>
+                <a:cs typeface="Calibri" pitchFamily="34" charset="-120"/>
+              </a:rPr>
+              <a:t>The point</a:t>
+            </a:r>
+            <a:endParaRPr lang="en-US" sz="1200" dirty="0"/>
+          </a:p>
+        </p:txBody>
+      </p:sp>
+      <p:sp>
+        <p:nvSpPr>
+          <p:cNvPr id="38" name="Text 32"/>
+          <p:cNvSpPr/>
+          <p:nvPr/>
+        </p:nvSpPr>
+        <p:spPr>
+          <a:xfrm>
+            <a:off x="7818120" y="4828032"/>
+            <a:ext cx="3529584" cy="1280160"/>
+          </a:xfrm>
+          <a:prstGeom prst="rect">
+            <a:avLst/>
+          </a:prstGeom>
+          <a:noFill/>
+          <a:ln/>
+        </p:spPr>
+        <p:txBody>
+          <a:bodyPr wrap="square" lIns="0" tIns="0" rIns="0" bIns="0" rtlCol="0" anchor="t"/>
+          <a:lstStyle/>
+          <a:p>
+            <a:pPr indent="0" marL="0">
+              <a:lnSpc>
+                <a:spcPts val="2200"/>
+              </a:lnSpc>
+              <a:buNone/>
+            </a:pPr>
+            <a:r>
+              <a:rPr lang="en-US" sz="1550" i="1" dirty="0">
+                <a:solidFill>
+                  <a:srgbClr val="FFFFFF"/>
                 </a:solidFill>
                 <a:latin typeface="Cambria" pitchFamily="34" charset="0"/>
                 <a:ea typeface="Cambria" pitchFamily="34" charset="-122"/>
                 <a:cs typeface="Cambria" pitchFamily="34" charset="-120"/>
               </a:rPr>
-              <a:t>01</a:t>
-            </a:r>
-            <a:endParaRPr lang="en-US" sz="2800" dirty="0"/>
-          </a:p>
-        </p:txBody>
-      </p:sp>
-      <p:sp>
-        <p:nvSpPr>
-          <p:cNvPr id="6" name="Text 4"/>
-          <p:cNvSpPr/>
-          <p:nvPr/>
-        </p:nvSpPr>
-        <p:spPr>
-          <a:xfrm>
-            <a:off x="786384" y="2523744"/>
-            <a:ext cx="2139696" cy="786384"/>
-          </a:xfrm>
-          <a:prstGeom prst="rect">
-            <a:avLst/>
-          </a:prstGeom>
-          <a:noFill/>
-          <a:ln/>
-        </p:spPr>
-        <p:txBody>
-          <a:bodyPr wrap="square" lIns="0" tIns="0" rIns="0" bIns="0" rtlCol="0" anchor="t"/>
-          <a:lstStyle/>
-          <a:p>
-            <a:pPr indent="0" marL="0">
-              <a:lnSpc>
-                <a:spcPts val="2000"/>
-              </a:lnSpc>
-              <a:buNone/>
-            </a:pPr>
-            <a:r>
-              <a:rPr lang="en-US" sz="1500" b="1" dirty="0">
-                <a:solidFill>
-                  <a:srgbClr val="FFFFFF"/>
-                </a:solidFill>
-                <a:latin typeface="Cambria" pitchFamily="34" charset="0"/>
-                <a:ea typeface="Cambria" pitchFamily="34" charset="-122"/>
-                <a:cs typeface="Cambria" pitchFamily="34" charset="-120"/>
-              </a:rPr>
-              <a:t>Set the tagging standard</a:t>
-            </a:r>
-            <a:endParaRPr lang="en-US" sz="1500" dirty="0"/>
-          </a:p>
-        </p:txBody>
-      </p:sp>
-      <p:sp>
-        <p:nvSpPr>
-          <p:cNvPr id="7" name="Text 5"/>
-          <p:cNvSpPr/>
-          <p:nvPr/>
-        </p:nvSpPr>
-        <p:spPr>
-          <a:xfrm>
-            <a:off x="786384" y="3346704"/>
-            <a:ext cx="2139696" cy="749808"/>
-          </a:xfrm>
-          <a:prstGeom prst="rect">
-            <a:avLst/>
-          </a:prstGeom>
-          <a:noFill/>
-          <a:ln/>
-        </p:spPr>
-        <p:txBody>
-          <a:bodyPr wrap="square" lIns="0" tIns="0" rIns="0" bIns="0" rtlCol="0" anchor="t"/>
-          <a:lstStyle/>
-          <a:p>
-            <a:pPr indent="0" marL="0">
-              <a:lnSpc>
-                <a:spcPts val="1500"/>
-              </a:lnSpc>
-              <a:buNone/>
-            </a:pPr>
-            <a:r>
-              <a:rPr lang="en-US" sz="1200" dirty="0">
-                <a:solidFill>
-                  <a:srgbClr val="9EABBA"/>
-                </a:solidFill>
-                <a:latin typeface="Calibri" pitchFamily="34" charset="0"/>
-                <a:ea typeface="Calibri" pitchFamily="34" charset="-122"/>
-                <a:cs typeface="Calibri" pitchFamily="34" charset="-120"/>
-              </a:rPr>
-              <a:t>Agree a consistent taxonomy before investing in dashboards.</a:t>
-            </a:r>
-            <a:endParaRPr lang="en-US" sz="1200" dirty="0"/>
-          </a:p>
-        </p:txBody>
-      </p:sp>
-      <p:sp>
-        <p:nvSpPr>
-          <p:cNvPr id="8" name="Shape 6"/>
-          <p:cNvSpPr/>
-          <p:nvPr/>
-        </p:nvSpPr>
-        <p:spPr>
-          <a:xfrm>
-            <a:off x="3383280" y="1783080"/>
-            <a:ext cx="2587752" cy="2423160"/>
-          </a:xfrm>
-          <a:prstGeom prst="roundRect">
-            <a:avLst>
-              <a:gd name="adj" fmla="val 3396"/>
-            </a:avLst>
-          </a:prstGeom>
-          <a:solidFill>
-            <a:srgbClr val="F1F3F6"/>
-          </a:solidFill>
-          <a:ln/>
-        </p:spPr>
-      </p:sp>
-      <p:sp>
-        <p:nvSpPr>
-          <p:cNvPr id="9" name="Text 7"/>
-          <p:cNvSpPr/>
-          <p:nvPr/>
-        </p:nvSpPr>
-        <p:spPr>
-          <a:xfrm>
-            <a:off x="3639312" y="1965960"/>
-            <a:ext cx="1097280" cy="502920"/>
-          </a:xfrm>
-          <a:prstGeom prst="rect">
-            <a:avLst/>
-          </a:prstGeom>
-          <a:noFill/>
-          <a:ln/>
-        </p:spPr>
-        <p:txBody>
-          <a:bodyPr wrap="square" lIns="0" tIns="0" rIns="0" bIns="0" rtlCol="0" anchor="ctr"/>
-          <a:lstStyle/>
-          <a:p>
-            <a:pPr indent="0" marL="0">
-              <a:buNone/>
-            </a:pPr>
-            <a:r>
-              <a:rPr lang="en-US" sz="2800" b="1" dirty="0">
-                <a:solidFill>
-                  <a:srgbClr val="B9C2CD"/>
-                </a:solidFill>
-                <a:latin typeface="Cambria" pitchFamily="34" charset="0"/>
-                <a:ea typeface="Cambria" pitchFamily="34" charset="-122"/>
-                <a:cs typeface="Cambria" pitchFamily="34" charset="-120"/>
-              </a:rPr>
-              <a:t>02</a:t>
-            </a:r>
-            <a:endParaRPr lang="en-US" sz="2800" dirty="0"/>
-          </a:p>
-        </p:txBody>
-      </p:sp>
-      <p:sp>
-        <p:nvSpPr>
-          <p:cNvPr id="10" name="Text 8"/>
-          <p:cNvSpPr/>
-          <p:nvPr/>
-        </p:nvSpPr>
-        <p:spPr>
-          <a:xfrm>
-            <a:off x="3621024" y="2523744"/>
-            <a:ext cx="2139696" cy="786384"/>
-          </a:xfrm>
-          <a:prstGeom prst="rect">
-            <a:avLst/>
-          </a:prstGeom>
-          <a:noFill/>
-          <a:ln/>
-        </p:spPr>
-        <p:txBody>
-          <a:bodyPr wrap="square" lIns="0" tIns="0" rIns="0" bIns="0" rtlCol="0" anchor="t"/>
-          <a:lstStyle/>
-          <a:p>
-            <a:pPr indent="0" marL="0">
-              <a:lnSpc>
-                <a:spcPts val="2000"/>
-              </a:lnSpc>
-              <a:buNone/>
-            </a:pPr>
-            <a:r>
-              <a:rPr lang="en-US" sz="1500" b="1" dirty="0">
-                <a:solidFill>
-                  <a:srgbClr val="1B2430"/>
-                </a:solidFill>
-                <a:latin typeface="Cambria" pitchFamily="34" charset="0"/>
-                <a:ea typeface="Cambria" pitchFamily="34" charset="-122"/>
-                <a:cs typeface="Cambria" pitchFamily="34" charset="-120"/>
-              </a:rPr>
-              <a:t>Start with the biggest spend</a:t>
-            </a:r>
-            <a:endParaRPr lang="en-US" sz="1500" dirty="0"/>
-          </a:p>
-        </p:txBody>
-      </p:sp>
-      <p:sp>
-        <p:nvSpPr>
-          <p:cNvPr id="11" name="Text 9"/>
-          <p:cNvSpPr/>
-          <p:nvPr/>
-        </p:nvSpPr>
-        <p:spPr>
-          <a:xfrm>
-            <a:off x="3621024" y="3346704"/>
-            <a:ext cx="2139696" cy="749808"/>
-          </a:xfrm>
-          <a:prstGeom prst="rect">
-            <a:avLst/>
-          </a:prstGeom>
-          <a:noFill/>
-          <a:ln/>
-        </p:spPr>
-        <p:txBody>
-          <a:bodyPr wrap="square" lIns="0" tIns="0" rIns="0" bIns="0" rtlCol="0" anchor="t"/>
-          <a:lstStyle/>
-          <a:p>
-            <a:pPr indent="0" marL="0">
-              <a:lnSpc>
-                <a:spcPts val="1500"/>
-              </a:lnSpc>
-              <a:buNone/>
-            </a:pPr>
-            <a:r>
-              <a:rPr lang="en-US" sz="1200" dirty="0">
-                <a:solidFill>
-                  <a:srgbClr val="5C6675"/>
-                </a:solidFill>
-                <a:latin typeface="Calibri" pitchFamily="34" charset="0"/>
-                <a:ea typeface="Calibri" pitchFamily="34" charset="-122"/>
-                <a:cs typeface="Calibri" pitchFamily="34" charset="-120"/>
-              </a:rPr>
-              <a:t>Attack the largest categories first. Don't chase perfect granularity everywhere.</a:t>
-            </a:r>
-            <a:endParaRPr lang="en-US" sz="1200" dirty="0"/>
-          </a:p>
-        </p:txBody>
-      </p:sp>
-      <p:sp>
-        <p:nvSpPr>
-          <p:cNvPr id="12" name="Shape 10"/>
-          <p:cNvSpPr/>
-          <p:nvPr/>
-        </p:nvSpPr>
-        <p:spPr>
-          <a:xfrm>
-            <a:off x="6217920" y="1783080"/>
-            <a:ext cx="2587752" cy="2423160"/>
-          </a:xfrm>
-          <a:prstGeom prst="roundRect">
-            <a:avLst>
-              <a:gd name="adj" fmla="val 3396"/>
-            </a:avLst>
-          </a:prstGeom>
-          <a:solidFill>
-            <a:srgbClr val="F1F3F6"/>
-          </a:solidFill>
-          <a:ln/>
-        </p:spPr>
-      </p:sp>
-      <p:sp>
-        <p:nvSpPr>
-          <p:cNvPr id="13" name="Text 11"/>
-          <p:cNvSpPr/>
-          <p:nvPr/>
-        </p:nvSpPr>
-        <p:spPr>
-          <a:xfrm>
-            <a:off x="6473952" y="1965960"/>
-            <a:ext cx="1097280" cy="502920"/>
-          </a:xfrm>
-          <a:prstGeom prst="rect">
-            <a:avLst/>
-          </a:prstGeom>
-          <a:noFill/>
-          <a:ln/>
-        </p:spPr>
-        <p:txBody>
-          <a:bodyPr wrap="square" lIns="0" tIns="0" rIns="0" bIns="0" rtlCol="0" anchor="ctr"/>
-          <a:lstStyle/>
-          <a:p>
-            <a:pPr indent="0" marL="0">
-              <a:buNone/>
-            </a:pPr>
-            <a:r>
-              <a:rPr lang="en-US" sz="2800" b="1" dirty="0">
-                <a:solidFill>
-                  <a:srgbClr val="B9C2CD"/>
-                </a:solidFill>
-                <a:latin typeface="Cambria" pitchFamily="34" charset="0"/>
-                <a:ea typeface="Cambria" pitchFamily="34" charset="-122"/>
-                <a:cs typeface="Cambria" pitchFamily="34" charset="-120"/>
-              </a:rPr>
-              <a:t>03</a:t>
-            </a:r>
-            <a:endParaRPr lang="en-US" sz="2800" dirty="0"/>
-          </a:p>
-        </p:txBody>
-      </p:sp>
-      <p:sp>
-        <p:nvSpPr>
-          <p:cNvPr id="14" name="Text 12"/>
-          <p:cNvSpPr/>
-          <p:nvPr/>
-        </p:nvSpPr>
-        <p:spPr>
-          <a:xfrm>
-            <a:off x="6455664" y="2523744"/>
-            <a:ext cx="2139696" cy="786384"/>
-          </a:xfrm>
-          <a:prstGeom prst="rect">
-            <a:avLst/>
-          </a:prstGeom>
-          <a:noFill/>
-          <a:ln/>
-        </p:spPr>
-        <p:txBody>
-          <a:bodyPr wrap="square" lIns="0" tIns="0" rIns="0" bIns="0" rtlCol="0" anchor="t"/>
-          <a:lstStyle/>
-          <a:p>
-            <a:pPr indent="0" marL="0">
-              <a:lnSpc>
-                <a:spcPts val="2000"/>
-              </a:lnSpc>
-              <a:buNone/>
-            </a:pPr>
-            <a:r>
-              <a:rPr lang="en-US" sz="1500" b="1" dirty="0">
-                <a:solidFill>
-                  <a:srgbClr val="1B2430"/>
-                </a:solidFill>
-                <a:latin typeface="Cambria" pitchFamily="34" charset="0"/>
-                <a:ea typeface="Cambria" pitchFamily="34" charset="-122"/>
-                <a:cs typeface="Cambria" pitchFamily="34" charset="-120"/>
-              </a:rPr>
-              <a:t>Get finance and engineering talking</a:t>
-            </a:r>
-            <a:endParaRPr lang="en-US" sz="1500" dirty="0"/>
-          </a:p>
-        </p:txBody>
-      </p:sp>
-      <p:sp>
-        <p:nvSpPr>
-          <p:cNvPr id="15" name="Text 13"/>
-          <p:cNvSpPr/>
-          <p:nvPr/>
-        </p:nvSpPr>
-        <p:spPr>
-          <a:xfrm>
-            <a:off x="6455664" y="3346704"/>
-            <a:ext cx="2139696" cy="749808"/>
-          </a:xfrm>
-          <a:prstGeom prst="rect">
-            <a:avLst/>
-          </a:prstGeom>
-          <a:noFill/>
-          <a:ln/>
-        </p:spPr>
-        <p:txBody>
-          <a:bodyPr wrap="square" lIns="0" tIns="0" rIns="0" bIns="0" rtlCol="0" anchor="t"/>
-          <a:lstStyle/>
-          <a:p>
-            <a:pPr indent="0" marL="0">
-              <a:lnSpc>
-                <a:spcPts val="1500"/>
-              </a:lnSpc>
-              <a:buNone/>
-            </a:pPr>
-            <a:r>
-              <a:rPr lang="en-US" sz="1200" dirty="0">
-                <a:solidFill>
-                  <a:srgbClr val="5C6675"/>
-                </a:solidFill>
-                <a:latin typeface="Calibri" pitchFamily="34" charset="0"/>
-                <a:ea typeface="Calibri" pitchFamily="34" charset="-122"/>
-                <a:cs typeface="Calibri" pitchFamily="34" charset="-120"/>
-              </a:rPr>
-              <a:t>Bring both into the conversation early, not as an afterthought.</a:t>
-            </a:r>
-            <a:endParaRPr lang="en-US" sz="1200" dirty="0"/>
-          </a:p>
-        </p:txBody>
-      </p:sp>
-      <p:sp>
-        <p:nvSpPr>
-          <p:cNvPr id="16" name="Shape 14"/>
-          <p:cNvSpPr/>
-          <p:nvPr/>
-        </p:nvSpPr>
-        <p:spPr>
-          <a:xfrm>
-            <a:off x="9052560" y="1783080"/>
-            <a:ext cx="2587752" cy="2423160"/>
-          </a:xfrm>
-          <a:prstGeom prst="roundRect">
-            <a:avLst>
-              <a:gd name="adj" fmla="val 3396"/>
-            </a:avLst>
-          </a:prstGeom>
-          <a:solidFill>
-            <a:srgbClr val="F1F3F6"/>
-          </a:solidFill>
-          <a:ln/>
-        </p:spPr>
-      </p:sp>
-      <p:sp>
-        <p:nvSpPr>
-          <p:cNvPr id="17" name="Text 15"/>
-          <p:cNvSpPr/>
-          <p:nvPr/>
-        </p:nvSpPr>
-        <p:spPr>
-          <a:xfrm>
-            <a:off x="9308592" y="1965960"/>
-            <a:ext cx="1097280" cy="502920"/>
-          </a:xfrm>
-          <a:prstGeom prst="rect">
-            <a:avLst/>
-          </a:prstGeom>
-          <a:noFill/>
-          <a:ln/>
-        </p:spPr>
-        <p:txBody>
-          <a:bodyPr wrap="square" lIns="0" tIns="0" rIns="0" bIns="0" rtlCol="0" anchor="ctr"/>
-          <a:lstStyle/>
-          <a:p>
-            <a:pPr indent="0" marL="0">
-              <a:buNone/>
-            </a:pPr>
-            <a:r>
-              <a:rPr lang="en-US" sz="2800" b="1" dirty="0">
-                <a:solidFill>
-                  <a:srgbClr val="B9C2CD"/>
-                </a:solidFill>
-                <a:latin typeface="Cambria" pitchFamily="34" charset="0"/>
-                <a:ea typeface="Cambria" pitchFamily="34" charset="-122"/>
-                <a:cs typeface="Cambria" pitchFamily="34" charset="-120"/>
-              </a:rPr>
-              <a:t>04</a:t>
-            </a:r>
-            <a:endParaRPr lang="en-US" sz="2800" dirty="0"/>
-          </a:p>
-        </p:txBody>
-      </p:sp>
-      <p:sp>
-        <p:nvSpPr>
-          <p:cNvPr id="18" name="Text 16"/>
-          <p:cNvSpPr/>
-          <p:nvPr/>
-        </p:nvSpPr>
-        <p:spPr>
-          <a:xfrm>
-            <a:off x="9290304" y="2523744"/>
-            <a:ext cx="2139696" cy="786384"/>
-          </a:xfrm>
-          <a:prstGeom prst="rect">
-            <a:avLst/>
-          </a:prstGeom>
-          <a:noFill/>
-          <a:ln/>
-        </p:spPr>
-        <p:txBody>
-          <a:bodyPr wrap="square" lIns="0" tIns="0" rIns="0" bIns="0" rtlCol="0" anchor="t"/>
-          <a:lstStyle/>
-          <a:p>
-            <a:pPr indent="0" marL="0">
-              <a:lnSpc>
-                <a:spcPts val="2000"/>
-              </a:lnSpc>
-              <a:buNone/>
-            </a:pPr>
-            <a:r>
-              <a:rPr lang="en-US" sz="1500" b="1" dirty="0">
-                <a:solidFill>
-                  <a:srgbClr val="1B2430"/>
-                </a:solidFill>
-                <a:latin typeface="Cambria" pitchFamily="34" charset="0"/>
-                <a:ea typeface="Cambria" pitchFamily="34" charset="-122"/>
-                <a:cs typeface="Cambria" pitchFamily="34" charset="-120"/>
-              </a:rPr>
-              <a:t>Set guardrails early</a:t>
-            </a:r>
-            <a:endParaRPr lang="en-US" sz="1500" dirty="0"/>
-          </a:p>
-        </p:txBody>
-      </p:sp>
-      <p:sp>
-        <p:nvSpPr>
-          <p:cNvPr id="19" name="Text 17"/>
-          <p:cNvSpPr/>
-          <p:nvPr/>
-        </p:nvSpPr>
-        <p:spPr>
-          <a:xfrm>
-            <a:off x="9290304" y="3346704"/>
-            <a:ext cx="2139696" cy="749808"/>
-          </a:xfrm>
-          <a:prstGeom prst="rect">
-            <a:avLst/>
-          </a:prstGeom>
-          <a:noFill/>
-          <a:ln/>
-        </p:spPr>
-        <p:txBody>
-          <a:bodyPr wrap="square" lIns="0" tIns="0" rIns="0" bIns="0" rtlCol="0" anchor="t"/>
-          <a:lstStyle/>
-          <a:p>
-            <a:pPr indent="0" marL="0">
-              <a:lnSpc>
-                <a:spcPts val="1500"/>
-              </a:lnSpc>
-              <a:buNone/>
-            </a:pPr>
-            <a:r>
-              <a:rPr lang="en-US" sz="1200" dirty="0">
-                <a:solidFill>
-                  <a:srgbClr val="5C6675"/>
-                </a:solidFill>
-                <a:latin typeface="Calibri" pitchFamily="34" charset="0"/>
-                <a:ea typeface="Calibri" pitchFamily="34" charset="-122"/>
-                <a:cs typeface="Calibri" pitchFamily="34" charset="-120"/>
-              </a:rPr>
-              <a:t>Owners, budget thresholds and quotas cost little to add — and stop the expensive surprises.</a:t>
-            </a:r>
-            <a:endParaRPr lang="en-US" sz="1200" dirty="0"/>
-          </a:p>
-        </p:txBody>
-      </p:sp>
-      <p:sp>
-        <p:nvSpPr>
-          <p:cNvPr id="20" name="Shape 18"/>
-          <p:cNvSpPr/>
-          <p:nvPr/>
-        </p:nvSpPr>
-        <p:spPr>
-          <a:xfrm>
-            <a:off x="548640" y="4434840"/>
-            <a:ext cx="11091672" cy="1874520"/>
-          </a:xfrm>
-          <a:prstGeom prst="roundRect">
-            <a:avLst>
-              <a:gd name="adj" fmla="val 4390"/>
-            </a:avLst>
-          </a:prstGeom>
-          <a:solidFill>
-            <a:srgbClr val="F1F3F6"/>
-          </a:solidFill>
-          <a:ln/>
-        </p:spPr>
-      </p:sp>
-      <p:sp>
-        <p:nvSpPr>
-          <p:cNvPr id="21" name="Text 19"/>
-          <p:cNvSpPr/>
-          <p:nvPr/>
-        </p:nvSpPr>
-        <p:spPr>
-          <a:xfrm>
-            <a:off x="877824" y="4572000"/>
-            <a:ext cx="6035040" cy="292608"/>
-          </a:xfrm>
-          <a:prstGeom prst="rect">
-            <a:avLst/>
-          </a:prstGeom>
-          <a:noFill/>
-          <a:ln/>
-        </p:spPr>
-        <p:txBody>
-          <a:bodyPr wrap="square" lIns="0" tIns="0" rIns="0" bIns="0" rtlCol="0" anchor="ctr"/>
-          <a:lstStyle/>
-          <a:p>
-            <a:pPr indent="0" marL="0">
-              <a:buNone/>
-            </a:pPr>
-            <a:r>
-              <a:rPr lang="en-US" sz="1200" b="1" spc="180" kern="0" dirty="0">
-                <a:solidFill>
-                  <a:srgbClr val="5C6675"/>
-                </a:solidFill>
-                <a:latin typeface="Calibri" pitchFamily="34" charset="0"/>
-                <a:ea typeface="Calibri" pitchFamily="34" charset="-122"/>
-                <a:cs typeface="Calibri" pitchFamily="34" charset="-120"/>
-              </a:rPr>
-              <a:t>Tooling — match the footprint, not the ambition</a:t>
-            </a:r>
-            <a:endParaRPr lang="en-US" sz="1200" dirty="0"/>
-          </a:p>
-        </p:txBody>
-      </p:sp>
-      <p:sp>
-        <p:nvSpPr>
-          <p:cNvPr id="22" name="Text 20"/>
-          <p:cNvSpPr/>
-          <p:nvPr/>
-        </p:nvSpPr>
-        <p:spPr>
-          <a:xfrm>
-            <a:off x="877824" y="4937760"/>
-            <a:ext cx="1737360" cy="384048"/>
-          </a:xfrm>
-          <a:prstGeom prst="rect">
-            <a:avLst/>
-          </a:prstGeom>
-          <a:noFill/>
-          <a:ln/>
-        </p:spPr>
-        <p:txBody>
-          <a:bodyPr wrap="square" lIns="0" tIns="0" rIns="0" bIns="0" rtlCol="0" anchor="ctr"/>
-          <a:lstStyle/>
-          <a:p>
-            <a:pPr indent="0" marL="0">
-              <a:buNone/>
-            </a:pPr>
-            <a:r>
-              <a:rPr lang="en-US" sz="1350" b="1" dirty="0">
-                <a:solidFill>
-                  <a:srgbClr val="2E8B7A"/>
-                </a:solidFill>
-                <a:latin typeface="Calibri" pitchFamily="34" charset="0"/>
-                <a:ea typeface="Calibri" pitchFamily="34" charset="-122"/>
-                <a:cs typeface="Calibri" pitchFamily="34" charset="-120"/>
-              </a:rPr>
-              <a:t>Native</a:t>
-            </a:r>
-            <a:endParaRPr lang="en-US" sz="1350" dirty="0"/>
-          </a:p>
-        </p:txBody>
-      </p:sp>
-      <p:sp>
-        <p:nvSpPr>
-          <p:cNvPr id="23" name="Text 21"/>
-          <p:cNvSpPr/>
-          <p:nvPr/>
-        </p:nvSpPr>
-        <p:spPr>
-          <a:xfrm>
-            <a:off x="2651760" y="4937760"/>
-            <a:ext cx="8595360" cy="384048"/>
-          </a:xfrm>
-          <a:prstGeom prst="rect">
-            <a:avLst/>
-          </a:prstGeom>
-          <a:noFill/>
-          <a:ln/>
-        </p:spPr>
-        <p:txBody>
-          <a:bodyPr wrap="square" lIns="0" tIns="0" rIns="0" bIns="0" rtlCol="0" anchor="ctr"/>
-          <a:lstStyle/>
-          <a:p>
-            <a:pPr indent="0" marL="0">
-              <a:buNone/>
-            </a:pPr>
-            <a:r>
-              <a:rPr lang="en-US" sz="1350" dirty="0">
-                <a:solidFill>
-                  <a:srgbClr val="5C6675"/>
-                </a:solidFill>
-                <a:latin typeface="Calibri" pitchFamily="34" charset="0"/>
-                <a:ea typeface="Calibri" pitchFamily="34" charset="-122"/>
-                <a:cs typeface="Calibri" pitchFamily="34" charset="-120"/>
-              </a:rPr>
-              <a:t>AWS Cost Explorer  ·  Azure Cost Management  ·  GCP Billing</a:t>
-            </a:r>
-            <a:endParaRPr lang="en-US" sz="1350" dirty="0"/>
-          </a:p>
-        </p:txBody>
-      </p:sp>
-      <p:sp>
-        <p:nvSpPr>
-          <p:cNvPr id="24" name="Text 22"/>
-          <p:cNvSpPr/>
-          <p:nvPr/>
-        </p:nvSpPr>
-        <p:spPr>
-          <a:xfrm>
-            <a:off x="877824" y="5349240"/>
-            <a:ext cx="1737360" cy="384048"/>
-          </a:xfrm>
-          <a:prstGeom prst="rect">
-            <a:avLst/>
-          </a:prstGeom>
-          <a:noFill/>
-          <a:ln/>
-        </p:spPr>
-        <p:txBody>
-          <a:bodyPr wrap="square" lIns="0" tIns="0" rIns="0" bIns="0" rtlCol="0" anchor="ctr"/>
-          <a:lstStyle/>
-          <a:p>
-            <a:pPr indent="0" marL="0">
-              <a:buNone/>
-            </a:pPr>
-            <a:r>
-              <a:rPr lang="en-US" sz="1350" b="1" dirty="0">
-                <a:solidFill>
-                  <a:srgbClr val="B87B18"/>
-                </a:solidFill>
-                <a:latin typeface="Calibri" pitchFamily="34" charset="0"/>
-                <a:ea typeface="Calibri" pitchFamily="34" charset="-122"/>
-                <a:cs typeface="Calibri" pitchFamily="34" charset="-120"/>
-              </a:rPr>
-              <a:t>Third-party</a:t>
-            </a:r>
-            <a:endParaRPr lang="en-US" sz="1350" dirty="0"/>
-          </a:p>
-        </p:txBody>
-      </p:sp>
-      <p:sp>
-        <p:nvSpPr>
-          <p:cNvPr id="25" name="Text 23"/>
-          <p:cNvSpPr/>
-          <p:nvPr/>
-        </p:nvSpPr>
-        <p:spPr>
-          <a:xfrm>
-            <a:off x="2651760" y="5349240"/>
-            <a:ext cx="8595360" cy="384048"/>
-          </a:xfrm>
-          <a:prstGeom prst="rect">
-            <a:avLst/>
-          </a:prstGeom>
-          <a:noFill/>
-          <a:ln/>
-        </p:spPr>
-        <p:txBody>
-          <a:bodyPr wrap="square" lIns="0" tIns="0" rIns="0" bIns="0" rtlCol="0" anchor="ctr"/>
-          <a:lstStyle/>
-          <a:p>
-            <a:pPr indent="0" marL="0">
-              <a:buNone/>
-            </a:pPr>
-            <a:r>
-              <a:rPr lang="en-US" sz="1350" dirty="0">
-                <a:solidFill>
-                  <a:srgbClr val="5C6675"/>
-                </a:solidFill>
-                <a:latin typeface="Calibri" pitchFamily="34" charset="0"/>
-                <a:ea typeface="Calibri" pitchFamily="34" charset="-122"/>
-                <a:cs typeface="Calibri" pitchFamily="34" charset="-120"/>
-              </a:rPr>
-              <a:t>CloudHealth  ·  Apptio  ·  Vantage  ·  nOps  ·  Finout  ·  CoreStack</a:t>
-            </a:r>
-            <a:endParaRPr lang="en-US" sz="1350" dirty="0"/>
-          </a:p>
-        </p:txBody>
-      </p:sp>
-      <p:sp>
-        <p:nvSpPr>
-          <p:cNvPr id="26" name="Text 24"/>
-          <p:cNvSpPr/>
-          <p:nvPr/>
-        </p:nvSpPr>
-        <p:spPr>
-          <a:xfrm>
-            <a:off x="877824" y="5760720"/>
-            <a:ext cx="1737360" cy="384048"/>
-          </a:xfrm>
-          <a:prstGeom prst="rect">
-            <a:avLst/>
-          </a:prstGeom>
-          <a:noFill/>
-          <a:ln/>
-        </p:spPr>
-        <p:txBody>
-          <a:bodyPr wrap="square" lIns="0" tIns="0" rIns="0" bIns="0" rtlCol="0" anchor="ctr"/>
-          <a:lstStyle/>
-          <a:p>
-            <a:pPr indent="0" marL="0">
-              <a:buNone/>
-            </a:pPr>
-            <a:r>
-              <a:rPr lang="en-US" sz="1350" b="1" dirty="0">
-                <a:solidFill>
-                  <a:srgbClr val="1B2430"/>
-                </a:solidFill>
-                <a:latin typeface="Calibri" pitchFamily="34" charset="0"/>
-                <a:ea typeface="Calibri" pitchFamily="34" charset="-122"/>
-                <a:cs typeface="Calibri" pitchFamily="34" charset="-120"/>
-              </a:rPr>
-              <a:t>Standard</a:t>
-            </a:r>
-            <a:endParaRPr lang="en-US" sz="1350" dirty="0"/>
-          </a:p>
-        </p:txBody>
-      </p:sp>
-      <p:sp>
-        <p:nvSpPr>
-          <p:cNvPr id="27" name="Text 25"/>
-          <p:cNvSpPr/>
-          <p:nvPr/>
-        </p:nvSpPr>
-        <p:spPr>
-          <a:xfrm>
-            <a:off x="2651760" y="5760720"/>
-            <a:ext cx="8595360" cy="384048"/>
-          </a:xfrm>
-          <a:prstGeom prst="rect">
-            <a:avLst/>
-          </a:prstGeom>
-          <a:noFill/>
-          <a:ln/>
-        </p:spPr>
-        <p:txBody>
-          <a:bodyPr wrap="square" lIns="0" tIns="0" rIns="0" bIns="0" rtlCol="0" anchor="ctr"/>
-          <a:lstStyle/>
-          <a:p>
-            <a:pPr indent="0" marL="0">
-              <a:buNone/>
-            </a:pPr>
-            <a:r>
-              <a:rPr lang="en-US" sz="1350" dirty="0">
-                <a:solidFill>
-                  <a:srgbClr val="5C6675"/>
-                </a:solidFill>
-                <a:latin typeface="Calibri" pitchFamily="34" charset="0"/>
-                <a:ea typeface="Calibri" pitchFamily="34" charset="-122"/>
-                <a:cs typeface="Calibri" pitchFamily="34" charset="-120"/>
-              </a:rPr>
-              <a:t>FOCUS-compliant platforms for multi-cloud reporting</a:t>
-            </a:r>
-            <a:endParaRPr lang="en-US" sz="1350" dirty="0"/>
+              <a:t>The goal is not a smaller invoice. It is an invoice with nothing in it you have not already seen, explained and decided about.</a:t>
+            </a:r>
+            <a:endParaRPr lang="en-US" sz="1550" dirty="0"/>
           </a:p>
         </p:txBody>
       </p:sp>
@@ -16293,6 +16677,991 @@
 <file path=ppt/slides/slide22.xml><?xml version="1.0" encoding="utf-8"?>
 <p:sld xmlns:a="http://schemas.openxmlformats.org/drawingml/2006/main" xmlns:r="http://schemas.openxmlformats.org/officeDocument/2006/relationships" xmlns:p="http://schemas.openxmlformats.org/presentationml/2006/main">
   <p:cSld name="Slide 22">
+    <p:bg>
+      <p:bgPr>
+        <a:solidFill>
+          <a:srgbClr val="FFFFFF"/>
+        </a:solidFill>
+      </p:bgPr>
+    </p:bg>
+    <p:spTree>
+      <p:nvGrpSpPr>
+        <p:cNvPr id="1" name=""/>
+        <p:cNvGrpSpPr/>
+        <p:nvPr/>
+      </p:nvGrpSpPr>
+      <p:grpSpPr>
+        <a:xfrm>
+          <a:off x="0" y="0"/>
+          <a:ext cx="0" cy="0"/>
+          <a:chOff x="0" y="0"/>
+          <a:chExt cx="0" cy="0"/>
+        </a:xfrm>
+      </p:grpSpPr>
+      <p:sp>
+        <p:nvSpPr>
+          <p:cNvPr id="2" name="Text 0"/>
+          <p:cNvSpPr/>
+          <p:nvPr/>
+        </p:nvSpPr>
+        <p:spPr>
+          <a:xfrm>
+            <a:off x="548640" y="475488"/>
+            <a:ext cx="7315200" cy="256032"/>
+          </a:xfrm>
+          <a:prstGeom prst="rect">
+            <a:avLst/>
+          </a:prstGeom>
+          <a:noFill/>
+          <a:ln/>
+        </p:spPr>
+        <p:txBody>
+          <a:bodyPr wrap="square" lIns="0" tIns="0" rIns="0" bIns="0" rtlCol="0" anchor="ctr"/>
+          <a:lstStyle/>
+          <a:p>
+            <a:pPr indent="0" marL="0">
+              <a:buNone/>
+            </a:pPr>
+            <a:r>
+              <a:rPr lang="en-US" sz="1100" b="1" spc="220" kern="0" dirty="0">
+                <a:solidFill>
+                  <a:srgbClr val="E39B2C"/>
+                </a:solidFill>
+                <a:latin typeface="Calibri" pitchFamily="34" charset="0"/>
+                <a:ea typeface="Calibri" pitchFamily="34" charset="-122"/>
+                <a:cs typeface="Calibri" pitchFamily="34" charset="-120"/>
+              </a:rPr>
+              <a:t>THE PATH FORWARD</a:t>
+            </a:r>
+            <a:endParaRPr lang="en-US" sz="1100" dirty="0"/>
+          </a:p>
+        </p:txBody>
+      </p:sp>
+      <p:sp>
+        <p:nvSpPr>
+          <p:cNvPr id="3" name="Text 1"/>
+          <p:cNvSpPr/>
+          <p:nvPr/>
+        </p:nvSpPr>
+        <p:spPr>
+          <a:xfrm>
+            <a:off x="548640" y="768096"/>
+            <a:ext cx="11091672" cy="804672"/>
+          </a:xfrm>
+          <a:prstGeom prst="rect">
+            <a:avLst/>
+          </a:prstGeom>
+          <a:noFill/>
+          <a:ln/>
+        </p:spPr>
+        <p:txBody>
+          <a:bodyPr wrap="square" lIns="0" tIns="0" rIns="0" bIns="0" rtlCol="0" anchor="ctr"/>
+          <a:lstStyle/>
+          <a:p>
+            <a:pPr indent="0" marL="0">
+              <a:buNone/>
+            </a:pPr>
+            <a:r>
+              <a:rPr lang="en-US" sz="3100" b="1" dirty="0">
+                <a:solidFill>
+                  <a:srgbClr val="1B2430"/>
+                </a:solidFill>
+                <a:latin typeface="Cambria" pitchFamily="34" charset="0"/>
+                <a:ea typeface="Cambria" pitchFamily="34" charset="-122"/>
+                <a:cs typeface="Cambria" pitchFamily="34" charset="-120"/>
+              </a:rPr>
+              <a:t>Where to start</a:t>
+            </a:r>
+            <a:endParaRPr lang="en-US" sz="3100" dirty="0"/>
+          </a:p>
+        </p:txBody>
+      </p:sp>
+      <p:sp>
+        <p:nvSpPr>
+          <p:cNvPr id="4" name="Shape 2"/>
+          <p:cNvSpPr/>
+          <p:nvPr/>
+        </p:nvSpPr>
+        <p:spPr>
+          <a:xfrm>
+            <a:off x="548640" y="1783080"/>
+            <a:ext cx="2587752" cy="2423160"/>
+          </a:xfrm>
+          <a:prstGeom prst="roundRect">
+            <a:avLst>
+              <a:gd name="adj" fmla="val 3396"/>
+            </a:avLst>
+          </a:prstGeom>
+          <a:solidFill>
+            <a:srgbClr val="1F2936"/>
+          </a:solidFill>
+          <a:ln/>
+        </p:spPr>
+      </p:sp>
+      <p:sp>
+        <p:nvSpPr>
+          <p:cNvPr id="5" name="Text 3"/>
+          <p:cNvSpPr/>
+          <p:nvPr/>
+        </p:nvSpPr>
+        <p:spPr>
+          <a:xfrm>
+            <a:off x="804672" y="1965960"/>
+            <a:ext cx="1097280" cy="502920"/>
+          </a:xfrm>
+          <a:prstGeom prst="rect">
+            <a:avLst/>
+          </a:prstGeom>
+          <a:noFill/>
+          <a:ln/>
+        </p:spPr>
+        <p:txBody>
+          <a:bodyPr wrap="square" lIns="0" tIns="0" rIns="0" bIns="0" rtlCol="0" anchor="ctr"/>
+          <a:lstStyle/>
+          <a:p>
+            <a:pPr indent="0" marL="0">
+              <a:buNone/>
+            </a:pPr>
+            <a:r>
+              <a:rPr lang="en-US" sz="2800" b="1" dirty="0">
+                <a:solidFill>
+                  <a:srgbClr val="E39B2C"/>
+                </a:solidFill>
+                <a:latin typeface="Cambria" pitchFamily="34" charset="0"/>
+                <a:ea typeface="Cambria" pitchFamily="34" charset="-122"/>
+                <a:cs typeface="Cambria" pitchFamily="34" charset="-120"/>
+              </a:rPr>
+              <a:t>01</a:t>
+            </a:r>
+            <a:endParaRPr lang="en-US" sz="2800" dirty="0"/>
+          </a:p>
+        </p:txBody>
+      </p:sp>
+      <p:sp>
+        <p:nvSpPr>
+          <p:cNvPr id="6" name="Text 4"/>
+          <p:cNvSpPr/>
+          <p:nvPr/>
+        </p:nvSpPr>
+        <p:spPr>
+          <a:xfrm>
+            <a:off x="786384" y="2523744"/>
+            <a:ext cx="2139696" cy="786384"/>
+          </a:xfrm>
+          <a:prstGeom prst="rect">
+            <a:avLst/>
+          </a:prstGeom>
+          <a:noFill/>
+          <a:ln/>
+        </p:spPr>
+        <p:txBody>
+          <a:bodyPr wrap="square" lIns="0" tIns="0" rIns="0" bIns="0" rtlCol="0" anchor="t"/>
+          <a:lstStyle/>
+          <a:p>
+            <a:pPr indent="0" marL="0">
+              <a:lnSpc>
+                <a:spcPts val="2000"/>
+              </a:lnSpc>
+              <a:buNone/>
+            </a:pPr>
+            <a:r>
+              <a:rPr lang="en-US" sz="1500" b="1" dirty="0">
+                <a:solidFill>
+                  <a:srgbClr val="FFFFFF"/>
+                </a:solidFill>
+                <a:latin typeface="Cambria" pitchFamily="34" charset="0"/>
+                <a:ea typeface="Cambria" pitchFamily="34" charset="-122"/>
+                <a:cs typeface="Cambria" pitchFamily="34" charset="-120"/>
+              </a:rPr>
+              <a:t>Set the tagging standard</a:t>
+            </a:r>
+            <a:endParaRPr lang="en-US" sz="1500" dirty="0"/>
+          </a:p>
+        </p:txBody>
+      </p:sp>
+      <p:sp>
+        <p:nvSpPr>
+          <p:cNvPr id="7" name="Text 5"/>
+          <p:cNvSpPr/>
+          <p:nvPr/>
+        </p:nvSpPr>
+        <p:spPr>
+          <a:xfrm>
+            <a:off x="786384" y="3346704"/>
+            <a:ext cx="2139696" cy="749808"/>
+          </a:xfrm>
+          <a:prstGeom prst="rect">
+            <a:avLst/>
+          </a:prstGeom>
+          <a:noFill/>
+          <a:ln/>
+        </p:spPr>
+        <p:txBody>
+          <a:bodyPr wrap="square" lIns="0" tIns="0" rIns="0" bIns="0" rtlCol="0" anchor="t"/>
+          <a:lstStyle/>
+          <a:p>
+            <a:pPr indent="0" marL="0">
+              <a:lnSpc>
+                <a:spcPts val="1500"/>
+              </a:lnSpc>
+              <a:buNone/>
+            </a:pPr>
+            <a:r>
+              <a:rPr lang="en-US" sz="1200" dirty="0">
+                <a:solidFill>
+                  <a:srgbClr val="9EABBA"/>
+                </a:solidFill>
+                <a:latin typeface="Calibri" pitchFamily="34" charset="0"/>
+                <a:ea typeface="Calibri" pitchFamily="34" charset="-122"/>
+                <a:cs typeface="Calibri" pitchFamily="34" charset="-120"/>
+              </a:rPr>
+              <a:t>Agree a consistent taxonomy before investing in dashboards.</a:t>
+            </a:r>
+            <a:endParaRPr lang="en-US" sz="1200" dirty="0"/>
+          </a:p>
+        </p:txBody>
+      </p:sp>
+      <p:sp>
+        <p:nvSpPr>
+          <p:cNvPr id="8" name="Shape 6"/>
+          <p:cNvSpPr/>
+          <p:nvPr/>
+        </p:nvSpPr>
+        <p:spPr>
+          <a:xfrm>
+            <a:off x="3383280" y="1783080"/>
+            <a:ext cx="2587752" cy="2423160"/>
+          </a:xfrm>
+          <a:prstGeom prst="roundRect">
+            <a:avLst>
+              <a:gd name="adj" fmla="val 3396"/>
+            </a:avLst>
+          </a:prstGeom>
+          <a:solidFill>
+            <a:srgbClr val="F1F3F6"/>
+          </a:solidFill>
+          <a:ln/>
+        </p:spPr>
+      </p:sp>
+      <p:sp>
+        <p:nvSpPr>
+          <p:cNvPr id="9" name="Text 7"/>
+          <p:cNvSpPr/>
+          <p:nvPr/>
+        </p:nvSpPr>
+        <p:spPr>
+          <a:xfrm>
+            <a:off x="3639312" y="1965960"/>
+            <a:ext cx="1097280" cy="502920"/>
+          </a:xfrm>
+          <a:prstGeom prst="rect">
+            <a:avLst/>
+          </a:prstGeom>
+          <a:noFill/>
+          <a:ln/>
+        </p:spPr>
+        <p:txBody>
+          <a:bodyPr wrap="square" lIns="0" tIns="0" rIns="0" bIns="0" rtlCol="0" anchor="ctr"/>
+          <a:lstStyle/>
+          <a:p>
+            <a:pPr indent="0" marL="0">
+              <a:buNone/>
+            </a:pPr>
+            <a:r>
+              <a:rPr lang="en-US" sz="2800" b="1" dirty="0">
+                <a:solidFill>
+                  <a:srgbClr val="B9C2CD"/>
+                </a:solidFill>
+                <a:latin typeface="Cambria" pitchFamily="34" charset="0"/>
+                <a:ea typeface="Cambria" pitchFamily="34" charset="-122"/>
+                <a:cs typeface="Cambria" pitchFamily="34" charset="-120"/>
+              </a:rPr>
+              <a:t>02</a:t>
+            </a:r>
+            <a:endParaRPr lang="en-US" sz="2800" dirty="0"/>
+          </a:p>
+        </p:txBody>
+      </p:sp>
+      <p:sp>
+        <p:nvSpPr>
+          <p:cNvPr id="10" name="Text 8"/>
+          <p:cNvSpPr/>
+          <p:nvPr/>
+        </p:nvSpPr>
+        <p:spPr>
+          <a:xfrm>
+            <a:off x="3621024" y="2523744"/>
+            <a:ext cx="2139696" cy="786384"/>
+          </a:xfrm>
+          <a:prstGeom prst="rect">
+            <a:avLst/>
+          </a:prstGeom>
+          <a:noFill/>
+          <a:ln/>
+        </p:spPr>
+        <p:txBody>
+          <a:bodyPr wrap="square" lIns="0" tIns="0" rIns="0" bIns="0" rtlCol="0" anchor="t"/>
+          <a:lstStyle/>
+          <a:p>
+            <a:pPr indent="0" marL="0">
+              <a:lnSpc>
+                <a:spcPts val="2000"/>
+              </a:lnSpc>
+              <a:buNone/>
+            </a:pPr>
+            <a:r>
+              <a:rPr lang="en-US" sz="1500" b="1" dirty="0">
+                <a:solidFill>
+                  <a:srgbClr val="1B2430"/>
+                </a:solidFill>
+                <a:latin typeface="Cambria" pitchFamily="34" charset="0"/>
+                <a:ea typeface="Cambria" pitchFamily="34" charset="-122"/>
+                <a:cs typeface="Cambria" pitchFamily="34" charset="-120"/>
+              </a:rPr>
+              <a:t>Start with the biggest spend</a:t>
+            </a:r>
+            <a:endParaRPr lang="en-US" sz="1500" dirty="0"/>
+          </a:p>
+        </p:txBody>
+      </p:sp>
+      <p:sp>
+        <p:nvSpPr>
+          <p:cNvPr id="11" name="Text 9"/>
+          <p:cNvSpPr/>
+          <p:nvPr/>
+        </p:nvSpPr>
+        <p:spPr>
+          <a:xfrm>
+            <a:off x="3621024" y="3346704"/>
+            <a:ext cx="2139696" cy="749808"/>
+          </a:xfrm>
+          <a:prstGeom prst="rect">
+            <a:avLst/>
+          </a:prstGeom>
+          <a:noFill/>
+          <a:ln/>
+        </p:spPr>
+        <p:txBody>
+          <a:bodyPr wrap="square" lIns="0" tIns="0" rIns="0" bIns="0" rtlCol="0" anchor="t"/>
+          <a:lstStyle/>
+          <a:p>
+            <a:pPr indent="0" marL="0">
+              <a:lnSpc>
+                <a:spcPts val="1500"/>
+              </a:lnSpc>
+              <a:buNone/>
+            </a:pPr>
+            <a:r>
+              <a:rPr lang="en-US" sz="1200" dirty="0">
+                <a:solidFill>
+                  <a:srgbClr val="5C6675"/>
+                </a:solidFill>
+                <a:latin typeface="Calibri" pitchFamily="34" charset="0"/>
+                <a:ea typeface="Calibri" pitchFamily="34" charset="-122"/>
+                <a:cs typeface="Calibri" pitchFamily="34" charset="-120"/>
+              </a:rPr>
+              <a:t>Attack the largest categories first. Don't chase perfect granularity everywhere.</a:t>
+            </a:r>
+            <a:endParaRPr lang="en-US" sz="1200" dirty="0"/>
+          </a:p>
+        </p:txBody>
+      </p:sp>
+      <p:sp>
+        <p:nvSpPr>
+          <p:cNvPr id="12" name="Shape 10"/>
+          <p:cNvSpPr/>
+          <p:nvPr/>
+        </p:nvSpPr>
+        <p:spPr>
+          <a:xfrm>
+            <a:off x="6217920" y="1783080"/>
+            <a:ext cx="2587752" cy="2423160"/>
+          </a:xfrm>
+          <a:prstGeom prst="roundRect">
+            <a:avLst>
+              <a:gd name="adj" fmla="val 3396"/>
+            </a:avLst>
+          </a:prstGeom>
+          <a:solidFill>
+            <a:srgbClr val="F1F3F6"/>
+          </a:solidFill>
+          <a:ln/>
+        </p:spPr>
+      </p:sp>
+      <p:sp>
+        <p:nvSpPr>
+          <p:cNvPr id="13" name="Text 11"/>
+          <p:cNvSpPr/>
+          <p:nvPr/>
+        </p:nvSpPr>
+        <p:spPr>
+          <a:xfrm>
+            <a:off x="6473952" y="1965960"/>
+            <a:ext cx="1097280" cy="502920"/>
+          </a:xfrm>
+          <a:prstGeom prst="rect">
+            <a:avLst/>
+          </a:prstGeom>
+          <a:noFill/>
+          <a:ln/>
+        </p:spPr>
+        <p:txBody>
+          <a:bodyPr wrap="square" lIns="0" tIns="0" rIns="0" bIns="0" rtlCol="0" anchor="ctr"/>
+          <a:lstStyle/>
+          <a:p>
+            <a:pPr indent="0" marL="0">
+              <a:buNone/>
+            </a:pPr>
+            <a:r>
+              <a:rPr lang="en-US" sz="2800" b="1" dirty="0">
+                <a:solidFill>
+                  <a:srgbClr val="B9C2CD"/>
+                </a:solidFill>
+                <a:latin typeface="Cambria" pitchFamily="34" charset="0"/>
+                <a:ea typeface="Cambria" pitchFamily="34" charset="-122"/>
+                <a:cs typeface="Cambria" pitchFamily="34" charset="-120"/>
+              </a:rPr>
+              <a:t>03</a:t>
+            </a:r>
+            <a:endParaRPr lang="en-US" sz="2800" dirty="0"/>
+          </a:p>
+        </p:txBody>
+      </p:sp>
+      <p:sp>
+        <p:nvSpPr>
+          <p:cNvPr id="14" name="Text 12"/>
+          <p:cNvSpPr/>
+          <p:nvPr/>
+        </p:nvSpPr>
+        <p:spPr>
+          <a:xfrm>
+            <a:off x="6455664" y="2523744"/>
+            <a:ext cx="2139696" cy="786384"/>
+          </a:xfrm>
+          <a:prstGeom prst="rect">
+            <a:avLst/>
+          </a:prstGeom>
+          <a:noFill/>
+          <a:ln/>
+        </p:spPr>
+        <p:txBody>
+          <a:bodyPr wrap="square" lIns="0" tIns="0" rIns="0" bIns="0" rtlCol="0" anchor="t"/>
+          <a:lstStyle/>
+          <a:p>
+            <a:pPr indent="0" marL="0">
+              <a:lnSpc>
+                <a:spcPts val="2000"/>
+              </a:lnSpc>
+              <a:buNone/>
+            </a:pPr>
+            <a:r>
+              <a:rPr lang="en-US" sz="1500" b="1" dirty="0">
+                <a:solidFill>
+                  <a:srgbClr val="1B2430"/>
+                </a:solidFill>
+                <a:latin typeface="Cambria" pitchFamily="34" charset="0"/>
+                <a:ea typeface="Cambria" pitchFamily="34" charset="-122"/>
+                <a:cs typeface="Cambria" pitchFamily="34" charset="-120"/>
+              </a:rPr>
+              <a:t>Get finance and engineering talking</a:t>
+            </a:r>
+            <a:endParaRPr lang="en-US" sz="1500" dirty="0"/>
+          </a:p>
+        </p:txBody>
+      </p:sp>
+      <p:sp>
+        <p:nvSpPr>
+          <p:cNvPr id="15" name="Text 13"/>
+          <p:cNvSpPr/>
+          <p:nvPr/>
+        </p:nvSpPr>
+        <p:spPr>
+          <a:xfrm>
+            <a:off x="6455664" y="3346704"/>
+            <a:ext cx="2139696" cy="749808"/>
+          </a:xfrm>
+          <a:prstGeom prst="rect">
+            <a:avLst/>
+          </a:prstGeom>
+          <a:noFill/>
+          <a:ln/>
+        </p:spPr>
+        <p:txBody>
+          <a:bodyPr wrap="square" lIns="0" tIns="0" rIns="0" bIns="0" rtlCol="0" anchor="t"/>
+          <a:lstStyle/>
+          <a:p>
+            <a:pPr indent="0" marL="0">
+              <a:lnSpc>
+                <a:spcPts val="1500"/>
+              </a:lnSpc>
+              <a:buNone/>
+            </a:pPr>
+            <a:r>
+              <a:rPr lang="en-US" sz="1200" dirty="0">
+                <a:solidFill>
+                  <a:srgbClr val="5C6675"/>
+                </a:solidFill>
+                <a:latin typeface="Calibri" pitchFamily="34" charset="0"/>
+                <a:ea typeface="Calibri" pitchFamily="34" charset="-122"/>
+                <a:cs typeface="Calibri" pitchFamily="34" charset="-120"/>
+              </a:rPr>
+              <a:t>Bring both into the conversation early, not as an afterthought.</a:t>
+            </a:r>
+            <a:endParaRPr lang="en-US" sz="1200" dirty="0"/>
+          </a:p>
+        </p:txBody>
+      </p:sp>
+      <p:sp>
+        <p:nvSpPr>
+          <p:cNvPr id="16" name="Shape 14"/>
+          <p:cNvSpPr/>
+          <p:nvPr/>
+        </p:nvSpPr>
+        <p:spPr>
+          <a:xfrm>
+            <a:off x="9052560" y="1783080"/>
+            <a:ext cx="2587752" cy="2423160"/>
+          </a:xfrm>
+          <a:prstGeom prst="roundRect">
+            <a:avLst>
+              <a:gd name="adj" fmla="val 3396"/>
+            </a:avLst>
+          </a:prstGeom>
+          <a:solidFill>
+            <a:srgbClr val="F1F3F6"/>
+          </a:solidFill>
+          <a:ln/>
+        </p:spPr>
+      </p:sp>
+      <p:sp>
+        <p:nvSpPr>
+          <p:cNvPr id="17" name="Text 15"/>
+          <p:cNvSpPr/>
+          <p:nvPr/>
+        </p:nvSpPr>
+        <p:spPr>
+          <a:xfrm>
+            <a:off x="9308592" y="1965960"/>
+            <a:ext cx="1097280" cy="502920"/>
+          </a:xfrm>
+          <a:prstGeom prst="rect">
+            <a:avLst/>
+          </a:prstGeom>
+          <a:noFill/>
+          <a:ln/>
+        </p:spPr>
+        <p:txBody>
+          <a:bodyPr wrap="square" lIns="0" tIns="0" rIns="0" bIns="0" rtlCol="0" anchor="ctr"/>
+          <a:lstStyle/>
+          <a:p>
+            <a:pPr indent="0" marL="0">
+              <a:buNone/>
+            </a:pPr>
+            <a:r>
+              <a:rPr lang="en-US" sz="2800" b="1" dirty="0">
+                <a:solidFill>
+                  <a:srgbClr val="B9C2CD"/>
+                </a:solidFill>
+                <a:latin typeface="Cambria" pitchFamily="34" charset="0"/>
+                <a:ea typeface="Cambria" pitchFamily="34" charset="-122"/>
+                <a:cs typeface="Cambria" pitchFamily="34" charset="-120"/>
+              </a:rPr>
+              <a:t>04</a:t>
+            </a:r>
+            <a:endParaRPr lang="en-US" sz="2800" dirty="0"/>
+          </a:p>
+        </p:txBody>
+      </p:sp>
+      <p:sp>
+        <p:nvSpPr>
+          <p:cNvPr id="18" name="Text 16"/>
+          <p:cNvSpPr/>
+          <p:nvPr/>
+        </p:nvSpPr>
+        <p:spPr>
+          <a:xfrm>
+            <a:off x="9290304" y="2523744"/>
+            <a:ext cx="2139696" cy="786384"/>
+          </a:xfrm>
+          <a:prstGeom prst="rect">
+            <a:avLst/>
+          </a:prstGeom>
+          <a:noFill/>
+          <a:ln/>
+        </p:spPr>
+        <p:txBody>
+          <a:bodyPr wrap="square" lIns="0" tIns="0" rIns="0" bIns="0" rtlCol="0" anchor="t"/>
+          <a:lstStyle/>
+          <a:p>
+            <a:pPr indent="0" marL="0">
+              <a:lnSpc>
+                <a:spcPts val="2000"/>
+              </a:lnSpc>
+              <a:buNone/>
+            </a:pPr>
+            <a:r>
+              <a:rPr lang="en-US" sz="1500" b="1" dirty="0">
+                <a:solidFill>
+                  <a:srgbClr val="1B2430"/>
+                </a:solidFill>
+                <a:latin typeface="Cambria" pitchFamily="34" charset="0"/>
+                <a:ea typeface="Cambria" pitchFamily="34" charset="-122"/>
+                <a:cs typeface="Cambria" pitchFamily="34" charset="-120"/>
+              </a:rPr>
+              <a:t>Set guardrails early</a:t>
+            </a:r>
+            <a:endParaRPr lang="en-US" sz="1500" dirty="0"/>
+          </a:p>
+        </p:txBody>
+      </p:sp>
+      <p:sp>
+        <p:nvSpPr>
+          <p:cNvPr id="19" name="Text 17"/>
+          <p:cNvSpPr/>
+          <p:nvPr/>
+        </p:nvSpPr>
+        <p:spPr>
+          <a:xfrm>
+            <a:off x="9290304" y="3346704"/>
+            <a:ext cx="2139696" cy="749808"/>
+          </a:xfrm>
+          <a:prstGeom prst="rect">
+            <a:avLst/>
+          </a:prstGeom>
+          <a:noFill/>
+          <a:ln/>
+        </p:spPr>
+        <p:txBody>
+          <a:bodyPr wrap="square" lIns="0" tIns="0" rIns="0" bIns="0" rtlCol="0" anchor="t"/>
+          <a:lstStyle/>
+          <a:p>
+            <a:pPr indent="0" marL="0">
+              <a:lnSpc>
+                <a:spcPts val="1500"/>
+              </a:lnSpc>
+              <a:buNone/>
+            </a:pPr>
+            <a:r>
+              <a:rPr lang="en-US" sz="1200" dirty="0">
+                <a:solidFill>
+                  <a:srgbClr val="5C6675"/>
+                </a:solidFill>
+                <a:latin typeface="Calibri" pitchFamily="34" charset="0"/>
+                <a:ea typeface="Calibri" pitchFamily="34" charset="-122"/>
+                <a:cs typeface="Calibri" pitchFamily="34" charset="-120"/>
+              </a:rPr>
+              <a:t>Owners, budget thresholds and quotas cost little to add — and stop the expensive surprises.</a:t>
+            </a:r>
+            <a:endParaRPr lang="en-US" sz="1200" dirty="0"/>
+          </a:p>
+        </p:txBody>
+      </p:sp>
+      <p:sp>
+        <p:nvSpPr>
+          <p:cNvPr id="20" name="Shape 18"/>
+          <p:cNvSpPr/>
+          <p:nvPr/>
+        </p:nvSpPr>
+        <p:spPr>
+          <a:xfrm>
+            <a:off x="548640" y="4434840"/>
+            <a:ext cx="11091672" cy="1874520"/>
+          </a:xfrm>
+          <a:prstGeom prst="roundRect">
+            <a:avLst>
+              <a:gd name="adj" fmla="val 4390"/>
+            </a:avLst>
+          </a:prstGeom>
+          <a:solidFill>
+            <a:srgbClr val="F1F3F6"/>
+          </a:solidFill>
+          <a:ln/>
+        </p:spPr>
+      </p:sp>
+      <p:sp>
+        <p:nvSpPr>
+          <p:cNvPr id="21" name="Text 19"/>
+          <p:cNvSpPr/>
+          <p:nvPr/>
+        </p:nvSpPr>
+        <p:spPr>
+          <a:xfrm>
+            <a:off x="877824" y="4572000"/>
+            <a:ext cx="6035040" cy="292608"/>
+          </a:xfrm>
+          <a:prstGeom prst="rect">
+            <a:avLst/>
+          </a:prstGeom>
+          <a:noFill/>
+          <a:ln/>
+        </p:spPr>
+        <p:txBody>
+          <a:bodyPr wrap="square" lIns="0" tIns="0" rIns="0" bIns="0" rtlCol="0" anchor="ctr"/>
+          <a:lstStyle/>
+          <a:p>
+            <a:pPr indent="0" marL="0">
+              <a:buNone/>
+            </a:pPr>
+            <a:r>
+              <a:rPr lang="en-US" sz="1200" b="1" spc="180" kern="0" dirty="0">
+                <a:solidFill>
+                  <a:srgbClr val="5C6675"/>
+                </a:solidFill>
+                <a:latin typeface="Calibri" pitchFamily="34" charset="0"/>
+                <a:ea typeface="Calibri" pitchFamily="34" charset="-122"/>
+                <a:cs typeface="Calibri" pitchFamily="34" charset="-120"/>
+              </a:rPr>
+              <a:t>Tooling — match the footprint, not the ambition</a:t>
+            </a:r>
+            <a:endParaRPr lang="en-US" sz="1200" dirty="0"/>
+          </a:p>
+        </p:txBody>
+      </p:sp>
+      <p:sp>
+        <p:nvSpPr>
+          <p:cNvPr id="22" name="Text 20"/>
+          <p:cNvSpPr/>
+          <p:nvPr/>
+        </p:nvSpPr>
+        <p:spPr>
+          <a:xfrm>
+            <a:off x="877824" y="4937760"/>
+            <a:ext cx="1737360" cy="384048"/>
+          </a:xfrm>
+          <a:prstGeom prst="rect">
+            <a:avLst/>
+          </a:prstGeom>
+          <a:noFill/>
+          <a:ln/>
+        </p:spPr>
+        <p:txBody>
+          <a:bodyPr wrap="square" lIns="0" tIns="0" rIns="0" bIns="0" rtlCol="0" anchor="ctr"/>
+          <a:lstStyle/>
+          <a:p>
+            <a:pPr indent="0" marL="0">
+              <a:buNone/>
+            </a:pPr>
+            <a:r>
+              <a:rPr lang="en-US" sz="1350" b="1" dirty="0">
+                <a:solidFill>
+                  <a:srgbClr val="2E8B7A"/>
+                </a:solidFill>
+                <a:latin typeface="Calibri" pitchFamily="34" charset="0"/>
+                <a:ea typeface="Calibri" pitchFamily="34" charset="-122"/>
+                <a:cs typeface="Calibri" pitchFamily="34" charset="-120"/>
+              </a:rPr>
+              <a:t>Native</a:t>
+            </a:r>
+            <a:endParaRPr lang="en-US" sz="1350" dirty="0"/>
+          </a:p>
+        </p:txBody>
+      </p:sp>
+      <p:sp>
+        <p:nvSpPr>
+          <p:cNvPr id="23" name="Text 21"/>
+          <p:cNvSpPr/>
+          <p:nvPr/>
+        </p:nvSpPr>
+        <p:spPr>
+          <a:xfrm>
+            <a:off x="2651760" y="4937760"/>
+            <a:ext cx="8595360" cy="384048"/>
+          </a:xfrm>
+          <a:prstGeom prst="rect">
+            <a:avLst/>
+          </a:prstGeom>
+          <a:noFill/>
+          <a:ln/>
+        </p:spPr>
+        <p:txBody>
+          <a:bodyPr wrap="square" lIns="0" tIns="0" rIns="0" bIns="0" rtlCol="0" anchor="ctr"/>
+          <a:lstStyle/>
+          <a:p>
+            <a:pPr indent="0" marL="0">
+              <a:buNone/>
+            </a:pPr>
+            <a:r>
+              <a:rPr lang="en-US" sz="1350" dirty="0">
+                <a:solidFill>
+                  <a:srgbClr val="5C6675"/>
+                </a:solidFill>
+                <a:latin typeface="Calibri" pitchFamily="34" charset="0"/>
+                <a:ea typeface="Calibri" pitchFamily="34" charset="-122"/>
+                <a:cs typeface="Calibri" pitchFamily="34" charset="-120"/>
+              </a:rPr>
+              <a:t>AWS Cost Explorer  ·  Azure Cost Management  ·  GCP Billing</a:t>
+            </a:r>
+            <a:endParaRPr lang="en-US" sz="1350" dirty="0"/>
+          </a:p>
+        </p:txBody>
+      </p:sp>
+      <p:sp>
+        <p:nvSpPr>
+          <p:cNvPr id="24" name="Text 22"/>
+          <p:cNvSpPr/>
+          <p:nvPr/>
+        </p:nvSpPr>
+        <p:spPr>
+          <a:xfrm>
+            <a:off x="877824" y="5349240"/>
+            <a:ext cx="1737360" cy="384048"/>
+          </a:xfrm>
+          <a:prstGeom prst="rect">
+            <a:avLst/>
+          </a:prstGeom>
+          <a:noFill/>
+          <a:ln/>
+        </p:spPr>
+        <p:txBody>
+          <a:bodyPr wrap="square" lIns="0" tIns="0" rIns="0" bIns="0" rtlCol="0" anchor="ctr"/>
+          <a:lstStyle/>
+          <a:p>
+            <a:pPr indent="0" marL="0">
+              <a:buNone/>
+            </a:pPr>
+            <a:r>
+              <a:rPr lang="en-US" sz="1350" b="1" dirty="0">
+                <a:solidFill>
+                  <a:srgbClr val="B87B18"/>
+                </a:solidFill>
+                <a:latin typeface="Calibri" pitchFamily="34" charset="0"/>
+                <a:ea typeface="Calibri" pitchFamily="34" charset="-122"/>
+                <a:cs typeface="Calibri" pitchFamily="34" charset="-120"/>
+              </a:rPr>
+              <a:t>Third-party</a:t>
+            </a:r>
+            <a:endParaRPr lang="en-US" sz="1350" dirty="0"/>
+          </a:p>
+        </p:txBody>
+      </p:sp>
+      <p:sp>
+        <p:nvSpPr>
+          <p:cNvPr id="25" name="Text 23"/>
+          <p:cNvSpPr/>
+          <p:nvPr/>
+        </p:nvSpPr>
+        <p:spPr>
+          <a:xfrm>
+            <a:off x="2651760" y="5349240"/>
+            <a:ext cx="8595360" cy="384048"/>
+          </a:xfrm>
+          <a:prstGeom prst="rect">
+            <a:avLst/>
+          </a:prstGeom>
+          <a:noFill/>
+          <a:ln/>
+        </p:spPr>
+        <p:txBody>
+          <a:bodyPr wrap="square" lIns="0" tIns="0" rIns="0" bIns="0" rtlCol="0" anchor="ctr"/>
+          <a:lstStyle/>
+          <a:p>
+            <a:pPr indent="0" marL="0">
+              <a:buNone/>
+            </a:pPr>
+            <a:r>
+              <a:rPr lang="en-US" sz="1350" dirty="0">
+                <a:solidFill>
+                  <a:srgbClr val="5C6675"/>
+                </a:solidFill>
+                <a:latin typeface="Calibri" pitchFamily="34" charset="0"/>
+                <a:ea typeface="Calibri" pitchFamily="34" charset="-122"/>
+                <a:cs typeface="Calibri" pitchFamily="34" charset="-120"/>
+              </a:rPr>
+              <a:t>CloudHealth  ·  Apptio  ·  Vantage  ·  nOps  ·  Finout  ·  CoreStack</a:t>
+            </a:r>
+            <a:endParaRPr lang="en-US" sz="1350" dirty="0"/>
+          </a:p>
+        </p:txBody>
+      </p:sp>
+      <p:sp>
+        <p:nvSpPr>
+          <p:cNvPr id="26" name="Text 24"/>
+          <p:cNvSpPr/>
+          <p:nvPr/>
+        </p:nvSpPr>
+        <p:spPr>
+          <a:xfrm>
+            <a:off x="877824" y="5760720"/>
+            <a:ext cx="1737360" cy="384048"/>
+          </a:xfrm>
+          <a:prstGeom prst="rect">
+            <a:avLst/>
+          </a:prstGeom>
+          <a:noFill/>
+          <a:ln/>
+        </p:spPr>
+        <p:txBody>
+          <a:bodyPr wrap="square" lIns="0" tIns="0" rIns="0" bIns="0" rtlCol="0" anchor="ctr"/>
+          <a:lstStyle/>
+          <a:p>
+            <a:pPr indent="0" marL="0">
+              <a:buNone/>
+            </a:pPr>
+            <a:r>
+              <a:rPr lang="en-US" sz="1350" b="1" dirty="0">
+                <a:solidFill>
+                  <a:srgbClr val="1B2430"/>
+                </a:solidFill>
+                <a:latin typeface="Calibri" pitchFamily="34" charset="0"/>
+                <a:ea typeface="Calibri" pitchFamily="34" charset="-122"/>
+                <a:cs typeface="Calibri" pitchFamily="34" charset="-120"/>
+              </a:rPr>
+              <a:t>Standard</a:t>
+            </a:r>
+            <a:endParaRPr lang="en-US" sz="1350" dirty="0"/>
+          </a:p>
+        </p:txBody>
+      </p:sp>
+      <p:sp>
+        <p:nvSpPr>
+          <p:cNvPr id="27" name="Text 25"/>
+          <p:cNvSpPr/>
+          <p:nvPr/>
+        </p:nvSpPr>
+        <p:spPr>
+          <a:xfrm>
+            <a:off x="2651760" y="5760720"/>
+            <a:ext cx="8595360" cy="384048"/>
+          </a:xfrm>
+          <a:prstGeom prst="rect">
+            <a:avLst/>
+          </a:prstGeom>
+          <a:noFill/>
+          <a:ln/>
+        </p:spPr>
+        <p:txBody>
+          <a:bodyPr wrap="square" lIns="0" tIns="0" rIns="0" bIns="0" rtlCol="0" anchor="ctr"/>
+          <a:lstStyle/>
+          <a:p>
+            <a:pPr indent="0" marL="0">
+              <a:buNone/>
+            </a:pPr>
+            <a:r>
+              <a:rPr lang="en-US" sz="1350" dirty="0">
+                <a:solidFill>
+                  <a:srgbClr val="5C6675"/>
+                </a:solidFill>
+                <a:latin typeface="Calibri" pitchFamily="34" charset="0"/>
+                <a:ea typeface="Calibri" pitchFamily="34" charset="-122"/>
+                <a:cs typeface="Calibri" pitchFamily="34" charset="-120"/>
+              </a:rPr>
+              <a:t>FOCUS-compliant platforms for multi-cloud reporting</a:t>
+            </a:r>
+            <a:endParaRPr lang="en-US" sz="1350" dirty="0"/>
+          </a:p>
+        </p:txBody>
+      </p:sp>
+    </p:spTree>
+  </p:cSld>
+  <p:clrMapOvr>
+    <a:masterClrMapping/>
+  </p:clrMapOvr>
+</p:sld>
+</file>
+
+<file path=ppt/slides/slide23.xml><?xml version="1.0" encoding="utf-8"?>
+<p:sld xmlns:a="http://schemas.openxmlformats.org/drawingml/2006/main" xmlns:r="http://schemas.openxmlformats.org/officeDocument/2006/relationships" xmlns:p="http://schemas.openxmlformats.org/presentationml/2006/main">
+  <p:cSld name="Slide 23">
     <p:bg>
       <p:bgPr>
         <a:solidFill>
@@ -17092,9 +18461,9 @@
 </p:sld>
 </file>
 
-<file path=ppt/slides/slide23.xml><?xml version="1.0" encoding="utf-8"?>
+<file path=ppt/slides/slide24.xml><?xml version="1.0" encoding="utf-8"?>
 <p:sld xmlns:a="http://schemas.openxmlformats.org/drawingml/2006/main" xmlns:r="http://schemas.openxmlformats.org/officeDocument/2006/relationships" xmlns:p="http://schemas.openxmlformats.org/presentationml/2006/main">
-  <p:cSld name="Slide 23">
+  <p:cSld name="Slide 24">
     <p:bg>
       <p:bgPr>
         <a:solidFill>

--- a/presentations/finops-gaining-visibility.pptx
+++ b/presentations/finops-gaining-visibility.pptx
@@ -29,9 +29,10 @@
     <p:sldId id="277" r:id="rId23"/>
     <p:sldId id="278" r:id="rId24"/>
     <p:sldId id="279" r:id="rId25"/>
+    <p:sldId id="280" r:id="rId26"/>
   </p:sldIdLst>
   <p:notesMasterIdLst>
-    <p:notesMasterId r:id="rId26"/>
+    <p:notesMasterId r:id="rId27"/>
   </p:notesMasterIdLst>
   <p:sldSz cx="12192000" cy="6858000"/>
   <p:notesSz cx="6858000" cy="12192000"/>
@@ -1757,7 +1758,7 @@
           <a:p>
             <a:r>
               <a:rPr lang="en-US" dirty="0"/>
-              <a:t>This is the ask. Step 1 is highlighted because it is the only one that cannot be parallelized — everything downstream degrades if the taxonomy is still in flux. Steps 2 and 4 are both arguments against over-engineering: pick the top spend categories and the tooling that matches the estate we actually have, not the one we might have in three years.</a:t>
+              <a:t>The operating-model slide, and the honest self-check for whoever runs this practice. Everything earlier in the deck produces findings; this is about whether findings become changes. Walk the chain and stop on the second box. A finding with no named owner and no date does not fail loudly — it simply sits in a dashboard being accurate, which is the most common way a cost programme dies. Sizing and dating each item is what turns a report into a queue of work someone can be asked about. The measures on the right are the ones to report upward, and they are deliberately not savings numbers. Adoption — the share of findings that acquired an owner and a date — predicts savings; accuracy does not. Realized against identified is the pair that keeps everyone honest, because identified savings are a forecast and only realized savings appear on an invoice. The build-for-engineers point is worth saying plainly: an engineer wants the three things worth fixing this sprint, not a complete and beautiful cost model. Serve that, and the finance-grade report improves anyway, because the underlying data gets used and therefore gets corrected.</a:t>
             </a:r>
             <a:endParaRPr lang="en-US" dirty="0"/>
           </a:p>
@@ -1845,7 +1846,7 @@
           <a:p>
             <a:r>
               <a:rPr lang="en-US" dirty="0"/>
-              <a:t>Close on the causal chain rather than a summary of slides. Each link is a separate management commitment: allocation data, published ownership, cost surfaced in the engineering workflow, and a review cadence that keeps it alive. Ask for the first two today; the rest follow from them.</a:t>
+              <a:t>This is the ask. Step 1 is highlighted because it is the only one that cannot be parallelized — everything downstream degrades if the taxonomy is still in flux. Steps 2 and 4 are both arguments against over-engineering: pick the top spend categories and the tooling that matches the estate we actually have, not the one we might have in three years.</a:t>
             </a:r>
             <a:endParaRPr lang="en-US" dirty="0"/>
           </a:p>
@@ -1933,7 +1934,7 @@
           <a:p>
             <a:r>
               <a:rPr lang="en-US" dirty="0"/>
-              <a:t>Anticipate three questions. What will this cost — mostly effort, not licences, if we stay on native tooling. How long until we see savings — allocation coverage improves in weeks, targeted savings follow the first full month of clean data. Who owns it — name the tagging owner and the review cadence before leaving the room, or nothing on the previous slides happens.</a:t>
+              <a:t>Close on the causal chain rather than a summary of slides. Each link is a separate management commitment: allocation data, published ownership, cost surfaced in the engineering workflow, and a review cadence that keeps it alive. Ask for the first two today; the rest follow from them.</a:t>
             </a:r>
             <a:endParaRPr lang="en-US" dirty="0"/>
           </a:p>
@@ -1957,6 +1958,94 @@
             <a:fld id="{F7021451-1387-4CA6-816F-3879F97B5CBC}" type="slidenum">
               <a:rPr lang="en-US"/>
               <a:t>24</a:t>
+            </a:fld>
+            <a:endParaRPr lang="en-US"/>
+          </a:p>
+        </p:txBody>
+      </p:sp>
+    </p:spTree>
+    <p:extLst>
+      <p:ext uri="{BB962C8B-B14F-4D97-AF65-F5344CB8AC3E}">
+        <p14:creationId xmlns:p14="http://schemas.microsoft.com/office/powerpoint/2010/main" val="1024086991"/>
+      </p:ext>
+    </p:extLst>
+  </p:cSld>
+  <p:clrMapOvr>
+    <a:masterClrMapping/>
+  </p:clrMapOvr>
+</p:notes>
+</file>
+
+<file path=ppt/notesSlides/notesSlide25.xml><?xml version="1.0" encoding="utf-8"?>
+<p:notes xmlns:a="http://schemas.openxmlformats.org/drawingml/2006/main" xmlns:r="http://schemas.openxmlformats.org/officeDocument/2006/relationships" xmlns:p="http://schemas.openxmlformats.org/presentationml/2006/main">
+  <p:cSld>
+    <p:spTree>
+      <p:nvGrpSpPr>
+        <p:cNvPr id="1" name=""/>
+        <p:cNvGrpSpPr/>
+        <p:nvPr/>
+      </p:nvGrpSpPr>
+      <p:grpSpPr>
+        <a:xfrm>
+          <a:off x="0" y="0"/>
+          <a:ext cx="0" cy="0"/>
+          <a:chOff x="0" y="0"/>
+          <a:chExt cx="0" cy="0"/>
+        </a:xfrm>
+      </p:grpSpPr>
+      <p:sp>
+        <p:nvSpPr>
+          <p:cNvPr id="2" name="Slide Image Placeholder 1"/>
+          <p:cNvSpPr>
+            <a:spLocks noGrp="1" noRot="1" noChangeAspect="1"/>
+          </p:cNvSpPr>
+          <p:nvPr>
+            <p:ph type="sldImg"/>
+          </p:nvPr>
+        </p:nvSpPr>
+        <p:spPr/>
+      </p:sp>
+      <p:sp>
+        <p:nvSpPr>
+          <p:cNvPr id="3" name="Notes Placeholder 2"/>
+          <p:cNvSpPr>
+            <a:spLocks noGrp="1"/>
+          </p:cNvSpPr>
+          <p:nvPr>
+            <p:ph type="body" idx="1"/>
+          </p:nvPr>
+        </p:nvSpPr>
+        <p:spPr/>
+        <p:txBody>
+          <a:bodyPr/>
+          <a:lstStyle/>
+          <a:p>
+            <a:r>
+              <a:rPr lang="en-US" dirty="0"/>
+              <a:t>Anticipate three questions. What will this cost — mostly effort, not licences, if we stay on native tooling. How long until we see savings — allocation coverage improves in weeks, targeted savings follow the first full month of clean data. Who owns it — name the tagging owner and the review cadence before leaving the room, or nothing on the previous slides happens.</a:t>
+            </a:r>
+            <a:endParaRPr lang="en-US" dirty="0"/>
+          </a:p>
+        </p:txBody>
+      </p:sp>
+      <p:sp>
+        <p:nvSpPr>
+          <p:cNvPr id="4" name="Slide Number Placeholder 3"/>
+          <p:cNvSpPr>
+            <a:spLocks noGrp="1"/>
+          </p:cNvSpPr>
+          <p:nvPr>
+            <p:ph type="sldNum" sz="quarter" idx="10"/>
+          </p:nvPr>
+        </p:nvSpPr>
+        <p:spPr/>
+        <p:txBody>
+          <a:bodyPr/>
+          <a:lstStyle/>
+          <a:p>
+            <a:fld id="{F7021451-1387-4CA6-816F-3879F97B5CBC}" type="slidenum">
+              <a:rPr lang="en-US"/>
+              <a:t>25</a:t>
             </a:fld>
             <a:endParaRPr lang="en-US"/>
           </a:p>
@@ -16731,7 +16820,7 @@
                 <a:ea typeface="Calibri" pitchFamily="34" charset="-122"/>
                 <a:cs typeface="Calibri" pitchFamily="34" charset="-120"/>
               </a:rPr>
-              <a:t>THE PATH FORWARD</a:t>
+              <a:t>OPERATE — RUNNING THE PRACTICE</a:t>
             </a:r>
             <a:endParaRPr lang="en-US" sz="1100" dirty="0"/>
           </a:p>
@@ -16770,7 +16859,7 @@
                 <a:ea typeface="Cambria" pitchFamily="34" charset="-122"/>
                 <a:cs typeface="Cambria" pitchFamily="34" charset="-120"/>
               </a:rPr>
-              <a:t>Where to start</a:t>
+              <a:t>Ship the insight, don't just publish it</a:t>
             </a:r>
             <a:endParaRPr lang="en-US" sz="3100" dirty="0"/>
           </a:p>
@@ -16778,21 +16867,675 @@
       </p:sp>
       <p:sp>
         <p:nvSpPr>
-          <p:cNvPr id="4" name="Shape 2"/>
-          <p:cNvSpPr/>
-          <p:nvPr/>
-        </p:nvSpPr>
-        <p:spPr>
-          <a:xfrm>
-            <a:off x="548640" y="1783080"/>
-            <a:ext cx="2587752" cy="2423160"/>
+          <p:cNvPr id="4" name="Text 2"/>
+          <p:cNvSpPr/>
+          <p:nvPr/>
+        </p:nvSpPr>
+        <p:spPr>
+          <a:xfrm>
+            <a:off x="548640" y="1536192"/>
+            <a:ext cx="10607040" cy="365760"/>
+          </a:xfrm>
+          <a:prstGeom prst="rect">
+            <a:avLst/>
+          </a:prstGeom>
+          <a:noFill/>
+          <a:ln/>
+        </p:spPr>
+        <p:txBody>
+          <a:bodyPr wrap="square" lIns="0" tIns="0" rIns="0" bIns="0" rtlCol="0" anchor="ctr"/>
+          <a:lstStyle/>
+          <a:p>
+            <a:pPr indent="0" marL="0">
+              <a:buNone/>
+            </a:pPr>
+            <a:r>
+              <a:rPr lang="en-US" sz="1500" dirty="0">
+                <a:solidFill>
+                  <a:srgbClr val="5C6675"/>
+                </a:solidFill>
+                <a:latin typeface="Calibri" pitchFamily="34" charset="0"/>
+                <a:ea typeface="Calibri" pitchFamily="34" charset="-122"/>
+                <a:cs typeface="Calibri" pitchFamily="34" charset="-120"/>
+              </a:rPr>
+              <a:t>A report tells someone a number. Only a change in what they do next reaches the bill.</a:t>
+            </a:r>
+            <a:endParaRPr lang="en-US" sz="1500" dirty="0"/>
+          </a:p>
+        </p:txBody>
+      </p:sp>
+      <p:sp>
+        <p:nvSpPr>
+          <p:cNvPr id="5" name="Shape 3"/>
+          <p:cNvSpPr/>
+          <p:nvPr/>
+        </p:nvSpPr>
+        <p:spPr>
+          <a:xfrm>
+            <a:off x="548640" y="2286000"/>
+            <a:ext cx="1700784" cy="960120"/>
           </a:xfrm>
           <a:prstGeom prst="roundRect">
             <a:avLst>
-              <a:gd name="adj" fmla="val 3396"/>
+              <a:gd name="adj" fmla="val 8571"/>
             </a:avLst>
           </a:prstGeom>
           <a:solidFill>
+            <a:srgbClr val="F1F3F6"/>
+          </a:solidFill>
+          <a:ln/>
+        </p:spPr>
+      </p:sp>
+      <p:sp>
+        <p:nvSpPr>
+          <p:cNvPr id="6" name="Text 4"/>
+          <p:cNvSpPr/>
+          <p:nvPr/>
+        </p:nvSpPr>
+        <p:spPr>
+          <a:xfrm>
+            <a:off x="548640" y="2395728"/>
+            <a:ext cx="1700784" cy="329184"/>
+          </a:xfrm>
+          <a:prstGeom prst="rect">
+            <a:avLst/>
+          </a:prstGeom>
+          <a:noFill/>
+          <a:ln/>
+        </p:spPr>
+        <p:txBody>
+          <a:bodyPr wrap="square" lIns="0" tIns="0" rIns="0" bIns="0" rtlCol="0" anchor="ctr"/>
+          <a:lstStyle/>
+          <a:p>
+            <a:pPr algn="ctr" indent="0" marL="0">
+              <a:buNone/>
+            </a:pPr>
+            <a:r>
+              <a:rPr lang="en-US" sz="1350" b="1" dirty="0">
+                <a:solidFill>
+                  <a:srgbClr val="1B2430"/>
+                </a:solidFill>
+                <a:latin typeface="Calibri" pitchFamily="34" charset="0"/>
+                <a:ea typeface="Calibri" pitchFamily="34" charset="-122"/>
+                <a:cs typeface="Calibri" pitchFamily="34" charset="-120"/>
+              </a:rPr>
+              <a:t>Finding</a:t>
+            </a:r>
+            <a:endParaRPr lang="en-US" sz="1350" dirty="0"/>
+          </a:p>
+        </p:txBody>
+      </p:sp>
+      <p:sp>
+        <p:nvSpPr>
+          <p:cNvPr id="7" name="Text 5"/>
+          <p:cNvSpPr/>
+          <p:nvPr/>
+        </p:nvSpPr>
+        <p:spPr>
+          <a:xfrm>
+            <a:off x="640080" y="2724912"/>
+            <a:ext cx="1517904" cy="402336"/>
+          </a:xfrm>
+          <a:prstGeom prst="rect">
+            <a:avLst/>
+          </a:prstGeom>
+          <a:noFill/>
+          <a:ln/>
+        </p:spPr>
+        <p:txBody>
+          <a:bodyPr wrap="square" lIns="0" tIns="0" rIns="0" bIns="0" rtlCol="0" anchor="t"/>
+          <a:lstStyle/>
+          <a:p>
+            <a:pPr algn="ctr" indent="0" marL="0">
+              <a:lnSpc>
+                <a:spcPts val="1400"/>
+              </a:lnSpc>
+              <a:buNone/>
+            </a:pPr>
+            <a:r>
+              <a:rPr lang="en-US" sz="1100" dirty="0">
+                <a:solidFill>
+                  <a:srgbClr val="5C6675"/>
+                </a:solidFill>
+                <a:latin typeface="Calibri" pitchFamily="34" charset="0"/>
+                <a:ea typeface="Calibri" pitchFamily="34" charset="-122"/>
+                <a:cs typeface="Calibri" pitchFamily="34" charset="-120"/>
+              </a:rPr>
+              <a:t>the dashboard flags it</a:t>
+            </a:r>
+            <a:endParaRPr lang="en-US" sz="1100" dirty="0"/>
+          </a:p>
+        </p:txBody>
+      </p:sp>
+      <p:sp>
+        <p:nvSpPr>
+          <p:cNvPr id="8" name="Shape 6"/>
+          <p:cNvSpPr/>
+          <p:nvPr/>
+        </p:nvSpPr>
+        <p:spPr>
+          <a:xfrm>
+            <a:off x="2267712" y="2688336"/>
+            <a:ext cx="137160" cy="146304"/>
+          </a:xfrm>
+          <a:prstGeom prst="rightArrow">
+            <a:avLst/>
+          </a:prstGeom>
+          <a:solidFill>
+            <a:srgbClr val="C3CBD5"/>
+          </a:solidFill>
+          <a:ln/>
+        </p:spPr>
+      </p:sp>
+      <p:sp>
+        <p:nvSpPr>
+          <p:cNvPr id="9" name="Shape 7"/>
+          <p:cNvSpPr/>
+          <p:nvPr/>
+        </p:nvSpPr>
+        <p:spPr>
+          <a:xfrm>
+            <a:off x="2423160" y="2286000"/>
+            <a:ext cx="1700784" cy="960120"/>
+          </a:xfrm>
+          <a:prstGeom prst="roundRect">
+            <a:avLst>
+              <a:gd name="adj" fmla="val 8571"/>
+            </a:avLst>
+          </a:prstGeom>
+          <a:solidFill>
+            <a:srgbClr val="F1F3F6"/>
+          </a:solidFill>
+          <a:ln/>
+        </p:spPr>
+      </p:sp>
+      <p:sp>
+        <p:nvSpPr>
+          <p:cNvPr id="10" name="Text 8"/>
+          <p:cNvSpPr/>
+          <p:nvPr/>
+        </p:nvSpPr>
+        <p:spPr>
+          <a:xfrm>
+            <a:off x="2423160" y="2395728"/>
+            <a:ext cx="1700784" cy="329184"/>
+          </a:xfrm>
+          <a:prstGeom prst="rect">
+            <a:avLst/>
+          </a:prstGeom>
+          <a:noFill/>
+          <a:ln/>
+        </p:spPr>
+        <p:txBody>
+          <a:bodyPr wrap="square" lIns="0" tIns="0" rIns="0" bIns="0" rtlCol="0" anchor="ctr"/>
+          <a:lstStyle/>
+          <a:p>
+            <a:pPr algn="ctr" indent="0" marL="0">
+              <a:buNone/>
+            </a:pPr>
+            <a:r>
+              <a:rPr lang="en-US" sz="1350" b="1" dirty="0">
+                <a:solidFill>
+                  <a:srgbClr val="1B2430"/>
+                </a:solidFill>
+                <a:latin typeface="Calibri" pitchFamily="34" charset="0"/>
+                <a:ea typeface="Calibri" pitchFamily="34" charset="-122"/>
+                <a:cs typeface="Calibri" pitchFamily="34" charset="-120"/>
+              </a:rPr>
+              <a:t>Named owner</a:t>
+            </a:r>
+            <a:endParaRPr lang="en-US" sz="1350" dirty="0"/>
+          </a:p>
+        </p:txBody>
+      </p:sp>
+      <p:sp>
+        <p:nvSpPr>
+          <p:cNvPr id="11" name="Text 9"/>
+          <p:cNvSpPr/>
+          <p:nvPr/>
+        </p:nvSpPr>
+        <p:spPr>
+          <a:xfrm>
+            <a:off x="2514600" y="2724912"/>
+            <a:ext cx="1517904" cy="402336"/>
+          </a:xfrm>
+          <a:prstGeom prst="rect">
+            <a:avLst/>
+          </a:prstGeom>
+          <a:noFill/>
+          <a:ln/>
+        </p:spPr>
+        <p:txBody>
+          <a:bodyPr wrap="square" lIns="0" tIns="0" rIns="0" bIns="0" rtlCol="0" anchor="t"/>
+          <a:lstStyle/>
+          <a:p>
+            <a:pPr algn="ctr" indent="0" marL="0">
+              <a:lnSpc>
+                <a:spcPts val="1400"/>
+              </a:lnSpc>
+              <a:buNone/>
+            </a:pPr>
+            <a:r>
+              <a:rPr lang="en-US" sz="1100" dirty="0">
+                <a:solidFill>
+                  <a:srgbClr val="5C6675"/>
+                </a:solidFill>
+                <a:latin typeface="Calibri" pitchFamily="34" charset="0"/>
+                <a:ea typeface="Calibri" pitchFamily="34" charset="-122"/>
+                <a:cs typeface="Calibri" pitchFamily="34" charset="-120"/>
+              </a:rPr>
+              <a:t>one person, not a team</a:t>
+            </a:r>
+            <a:endParaRPr lang="en-US" sz="1100" dirty="0"/>
+          </a:p>
+        </p:txBody>
+      </p:sp>
+      <p:sp>
+        <p:nvSpPr>
+          <p:cNvPr id="12" name="Shape 10"/>
+          <p:cNvSpPr/>
+          <p:nvPr/>
+        </p:nvSpPr>
+        <p:spPr>
+          <a:xfrm>
+            <a:off x="4142232" y="2688336"/>
+            <a:ext cx="137160" cy="146304"/>
+          </a:xfrm>
+          <a:prstGeom prst="rightArrow">
+            <a:avLst/>
+          </a:prstGeom>
+          <a:solidFill>
+            <a:srgbClr val="C3CBD5"/>
+          </a:solidFill>
+          <a:ln/>
+        </p:spPr>
+      </p:sp>
+      <p:sp>
+        <p:nvSpPr>
+          <p:cNvPr id="13" name="Shape 11"/>
+          <p:cNvSpPr/>
+          <p:nvPr/>
+        </p:nvSpPr>
+        <p:spPr>
+          <a:xfrm>
+            <a:off x="4297680" y="2286000"/>
+            <a:ext cx="1700784" cy="960120"/>
+          </a:xfrm>
+          <a:prstGeom prst="roundRect">
+            <a:avLst>
+              <a:gd name="adj" fmla="val 8571"/>
+            </a:avLst>
+          </a:prstGeom>
+          <a:solidFill>
+            <a:srgbClr val="F1F3F6"/>
+          </a:solidFill>
+          <a:ln/>
+        </p:spPr>
+      </p:sp>
+      <p:sp>
+        <p:nvSpPr>
+          <p:cNvPr id="14" name="Text 12"/>
+          <p:cNvSpPr/>
+          <p:nvPr/>
+        </p:nvSpPr>
+        <p:spPr>
+          <a:xfrm>
+            <a:off x="4297680" y="2395728"/>
+            <a:ext cx="1700784" cy="329184"/>
+          </a:xfrm>
+          <a:prstGeom prst="rect">
+            <a:avLst/>
+          </a:prstGeom>
+          <a:noFill/>
+          <a:ln/>
+        </p:spPr>
+        <p:txBody>
+          <a:bodyPr wrap="square" lIns="0" tIns="0" rIns="0" bIns="0" rtlCol="0" anchor="ctr"/>
+          <a:lstStyle/>
+          <a:p>
+            <a:pPr algn="ctr" indent="0" marL="0">
+              <a:buNone/>
+            </a:pPr>
+            <a:r>
+              <a:rPr lang="en-US" sz="1350" b="1" dirty="0">
+                <a:solidFill>
+                  <a:srgbClr val="1B2430"/>
+                </a:solidFill>
+                <a:latin typeface="Calibri" pitchFamily="34" charset="0"/>
+                <a:ea typeface="Calibri" pitchFamily="34" charset="-122"/>
+                <a:cs typeface="Calibri" pitchFamily="34" charset="-120"/>
+              </a:rPr>
+              <a:t>Sized</a:t>
+            </a:r>
+            <a:endParaRPr lang="en-US" sz="1350" dirty="0"/>
+          </a:p>
+        </p:txBody>
+      </p:sp>
+      <p:sp>
+        <p:nvSpPr>
+          <p:cNvPr id="15" name="Text 13"/>
+          <p:cNvSpPr/>
+          <p:nvPr/>
+        </p:nvSpPr>
+        <p:spPr>
+          <a:xfrm>
+            <a:off x="4389120" y="2724912"/>
+            <a:ext cx="1517904" cy="402336"/>
+          </a:xfrm>
+          <a:prstGeom prst="rect">
+            <a:avLst/>
+          </a:prstGeom>
+          <a:noFill/>
+          <a:ln/>
+        </p:spPr>
+        <p:txBody>
+          <a:bodyPr wrap="square" lIns="0" tIns="0" rIns="0" bIns="0" rtlCol="0" anchor="t"/>
+          <a:lstStyle/>
+          <a:p>
+            <a:pPr algn="ctr" indent="0" marL="0">
+              <a:lnSpc>
+                <a:spcPts val="1400"/>
+              </a:lnSpc>
+              <a:buNone/>
+            </a:pPr>
+            <a:r>
+              <a:rPr lang="en-US" sz="1100" dirty="0">
+                <a:solidFill>
+                  <a:srgbClr val="5C6675"/>
+                </a:solidFill>
+                <a:latin typeface="Calibri" pitchFamily="34" charset="0"/>
+                <a:ea typeface="Calibri" pitchFamily="34" charset="-122"/>
+                <a:cs typeface="Calibri" pitchFamily="34" charset="-120"/>
+              </a:rPr>
+              <a:t>what it is worth</a:t>
+            </a:r>
+            <a:endParaRPr lang="en-US" sz="1100" dirty="0"/>
+          </a:p>
+        </p:txBody>
+      </p:sp>
+      <p:sp>
+        <p:nvSpPr>
+          <p:cNvPr id="16" name="Shape 14"/>
+          <p:cNvSpPr/>
+          <p:nvPr/>
+        </p:nvSpPr>
+        <p:spPr>
+          <a:xfrm>
+            <a:off x="6016752" y="2688336"/>
+            <a:ext cx="137160" cy="146304"/>
+          </a:xfrm>
+          <a:prstGeom prst="rightArrow">
+            <a:avLst/>
+          </a:prstGeom>
+          <a:solidFill>
+            <a:srgbClr val="C3CBD5"/>
+          </a:solidFill>
+          <a:ln/>
+        </p:spPr>
+      </p:sp>
+      <p:sp>
+        <p:nvSpPr>
+          <p:cNvPr id="17" name="Shape 15"/>
+          <p:cNvSpPr/>
+          <p:nvPr/>
+        </p:nvSpPr>
+        <p:spPr>
+          <a:xfrm>
+            <a:off x="6172200" y="2286000"/>
+            <a:ext cx="1700784" cy="960120"/>
+          </a:xfrm>
+          <a:prstGeom prst="roundRect">
+            <a:avLst>
+              <a:gd name="adj" fmla="val 8571"/>
+            </a:avLst>
+          </a:prstGeom>
+          <a:solidFill>
+            <a:srgbClr val="F1F3F6"/>
+          </a:solidFill>
+          <a:ln/>
+        </p:spPr>
+      </p:sp>
+      <p:sp>
+        <p:nvSpPr>
+          <p:cNvPr id="18" name="Text 16"/>
+          <p:cNvSpPr/>
+          <p:nvPr/>
+        </p:nvSpPr>
+        <p:spPr>
+          <a:xfrm>
+            <a:off x="6172200" y="2395728"/>
+            <a:ext cx="1700784" cy="329184"/>
+          </a:xfrm>
+          <a:prstGeom prst="rect">
+            <a:avLst/>
+          </a:prstGeom>
+          <a:noFill/>
+          <a:ln/>
+        </p:spPr>
+        <p:txBody>
+          <a:bodyPr wrap="square" lIns="0" tIns="0" rIns="0" bIns="0" rtlCol="0" anchor="ctr"/>
+          <a:lstStyle/>
+          <a:p>
+            <a:pPr algn="ctr" indent="0" marL="0">
+              <a:buNone/>
+            </a:pPr>
+            <a:r>
+              <a:rPr lang="en-US" sz="1350" b="1" dirty="0">
+                <a:solidFill>
+                  <a:srgbClr val="1B2430"/>
+                </a:solidFill>
+                <a:latin typeface="Calibri" pitchFamily="34" charset="0"/>
+                <a:ea typeface="Calibri" pitchFamily="34" charset="-122"/>
+                <a:cs typeface="Calibri" pitchFamily="34" charset="-120"/>
+              </a:rPr>
+              <a:t>Target date</a:t>
+            </a:r>
+            <a:endParaRPr lang="en-US" sz="1350" dirty="0"/>
+          </a:p>
+        </p:txBody>
+      </p:sp>
+      <p:sp>
+        <p:nvSpPr>
+          <p:cNvPr id="19" name="Text 17"/>
+          <p:cNvSpPr/>
+          <p:nvPr/>
+        </p:nvSpPr>
+        <p:spPr>
+          <a:xfrm>
+            <a:off x="6263640" y="2724912"/>
+            <a:ext cx="1517904" cy="402336"/>
+          </a:xfrm>
+          <a:prstGeom prst="rect">
+            <a:avLst/>
+          </a:prstGeom>
+          <a:noFill/>
+          <a:ln/>
+        </p:spPr>
+        <p:txBody>
+          <a:bodyPr wrap="square" lIns="0" tIns="0" rIns="0" bIns="0" rtlCol="0" anchor="t"/>
+          <a:lstStyle/>
+          <a:p>
+            <a:pPr algn="ctr" indent="0" marL="0">
+              <a:lnSpc>
+                <a:spcPts val="1400"/>
+              </a:lnSpc>
+              <a:buNone/>
+            </a:pPr>
+            <a:r>
+              <a:rPr lang="en-US" sz="1100" dirty="0">
+                <a:solidFill>
+                  <a:srgbClr val="5C6675"/>
+                </a:solidFill>
+                <a:latin typeface="Calibri" pitchFamily="34" charset="0"/>
+                <a:ea typeface="Calibri" pitchFamily="34" charset="-122"/>
+                <a:cs typeface="Calibri" pitchFamily="34" charset="-120"/>
+              </a:rPr>
+              <a:t>when, not someday</a:t>
+            </a:r>
+            <a:endParaRPr lang="en-US" sz="1100" dirty="0"/>
+          </a:p>
+        </p:txBody>
+      </p:sp>
+      <p:sp>
+        <p:nvSpPr>
+          <p:cNvPr id="20" name="Shape 18"/>
+          <p:cNvSpPr/>
+          <p:nvPr/>
+        </p:nvSpPr>
+        <p:spPr>
+          <a:xfrm>
+            <a:off x="7891272" y="2688336"/>
+            <a:ext cx="137160" cy="146304"/>
+          </a:xfrm>
+          <a:prstGeom prst="rightArrow">
+            <a:avLst/>
+          </a:prstGeom>
+          <a:solidFill>
+            <a:srgbClr val="C3CBD5"/>
+          </a:solidFill>
+          <a:ln/>
+        </p:spPr>
+      </p:sp>
+      <p:sp>
+        <p:nvSpPr>
+          <p:cNvPr id="21" name="Shape 19"/>
+          <p:cNvSpPr/>
+          <p:nvPr/>
+        </p:nvSpPr>
+        <p:spPr>
+          <a:xfrm>
+            <a:off x="8046720" y="2286000"/>
+            <a:ext cx="1700784" cy="960120"/>
+          </a:xfrm>
+          <a:prstGeom prst="roundRect">
+            <a:avLst>
+              <a:gd name="adj" fmla="val 8571"/>
+            </a:avLst>
+          </a:prstGeom>
+          <a:solidFill>
+            <a:srgbClr val="F1F3F6"/>
+          </a:solidFill>
+          <a:ln/>
+        </p:spPr>
+      </p:sp>
+      <p:sp>
+        <p:nvSpPr>
+          <p:cNvPr id="22" name="Text 20"/>
+          <p:cNvSpPr/>
+          <p:nvPr/>
+        </p:nvSpPr>
+        <p:spPr>
+          <a:xfrm>
+            <a:off x="8046720" y="2395728"/>
+            <a:ext cx="1700784" cy="329184"/>
+          </a:xfrm>
+          <a:prstGeom prst="rect">
+            <a:avLst/>
+          </a:prstGeom>
+          <a:noFill/>
+          <a:ln/>
+        </p:spPr>
+        <p:txBody>
+          <a:bodyPr wrap="square" lIns="0" tIns="0" rIns="0" bIns="0" rtlCol="0" anchor="ctr"/>
+          <a:lstStyle/>
+          <a:p>
+            <a:pPr algn="ctr" indent="0" marL="0">
+              <a:buNone/>
+            </a:pPr>
+            <a:r>
+              <a:rPr lang="en-US" sz="1350" b="1" dirty="0">
+                <a:solidFill>
+                  <a:srgbClr val="1B2430"/>
+                </a:solidFill>
+                <a:latin typeface="Calibri" pitchFamily="34" charset="0"/>
+                <a:ea typeface="Calibri" pitchFamily="34" charset="-122"/>
+                <a:cs typeface="Calibri" pitchFamily="34" charset="-120"/>
+              </a:rPr>
+              <a:t>Reviewed</a:t>
+            </a:r>
+            <a:endParaRPr lang="en-US" sz="1350" dirty="0"/>
+          </a:p>
+        </p:txBody>
+      </p:sp>
+      <p:sp>
+        <p:nvSpPr>
+          <p:cNvPr id="23" name="Text 21"/>
+          <p:cNvSpPr/>
+          <p:nvPr/>
+        </p:nvSpPr>
+        <p:spPr>
+          <a:xfrm>
+            <a:off x="8138160" y="2724912"/>
+            <a:ext cx="1517904" cy="402336"/>
+          </a:xfrm>
+          <a:prstGeom prst="rect">
+            <a:avLst/>
+          </a:prstGeom>
+          <a:noFill/>
+          <a:ln/>
+        </p:spPr>
+        <p:txBody>
+          <a:bodyPr wrap="square" lIns="0" tIns="0" rIns="0" bIns="0" rtlCol="0" anchor="t"/>
+          <a:lstStyle/>
+          <a:p>
+            <a:pPr algn="ctr" indent="0" marL="0">
+              <a:lnSpc>
+                <a:spcPts val="1400"/>
+              </a:lnSpc>
+              <a:buNone/>
+            </a:pPr>
+            <a:r>
+              <a:rPr lang="en-US" sz="1100" dirty="0">
+                <a:solidFill>
+                  <a:srgbClr val="5C6675"/>
+                </a:solidFill>
+                <a:latin typeface="Calibri" pitchFamily="34" charset="0"/>
+                <a:ea typeface="Calibri" pitchFamily="34" charset="-122"/>
+                <a:cs typeface="Calibri" pitchFamily="34" charset="-120"/>
+              </a:rPr>
+              <a:t>did it happen</a:t>
+            </a:r>
+            <a:endParaRPr lang="en-US" sz="1100" dirty="0"/>
+          </a:p>
+        </p:txBody>
+      </p:sp>
+      <p:sp>
+        <p:nvSpPr>
+          <p:cNvPr id="24" name="Shape 22"/>
+          <p:cNvSpPr/>
+          <p:nvPr/>
+        </p:nvSpPr>
+        <p:spPr>
+          <a:xfrm>
+            <a:off x="9765792" y="2688336"/>
+            <a:ext cx="137160" cy="146304"/>
+          </a:xfrm>
+          <a:prstGeom prst="rightArrow">
+            <a:avLst/>
+          </a:prstGeom>
+          <a:solidFill>
+            <a:srgbClr val="C3CBD5"/>
+          </a:solidFill>
+          <a:ln/>
+        </p:spPr>
+      </p:sp>
+      <p:sp>
+        <p:nvSpPr>
+          <p:cNvPr id="25" name="Shape 23"/>
+          <p:cNvSpPr/>
+          <p:nvPr/>
+        </p:nvSpPr>
+        <p:spPr>
+          <a:xfrm>
+            <a:off x="9921240" y="2286000"/>
+            <a:ext cx="1700784" cy="960120"/>
+          </a:xfrm>
+          <a:prstGeom prst="roundRect">
+            <a:avLst>
+              <a:gd name="adj" fmla="val 8571"/>
+            </a:avLst>
+          </a:prstGeom>
+          <a:solidFill>
             <a:srgbClr val="1F2936"/>
           </a:solidFill>
           <a:ln/>
@@ -16800,854 +17543,695 @@
       </p:sp>
       <p:sp>
         <p:nvSpPr>
-          <p:cNvPr id="5" name="Text 3"/>
-          <p:cNvSpPr/>
-          <p:nvPr/>
-        </p:nvSpPr>
-        <p:spPr>
-          <a:xfrm>
-            <a:off x="804672" y="1965960"/>
-            <a:ext cx="1097280" cy="502920"/>
-          </a:xfrm>
-          <a:prstGeom prst="rect">
-            <a:avLst/>
-          </a:prstGeom>
-          <a:noFill/>
-          <a:ln/>
-        </p:spPr>
-        <p:txBody>
-          <a:bodyPr wrap="square" lIns="0" tIns="0" rIns="0" bIns="0" rtlCol="0" anchor="ctr"/>
-          <a:lstStyle/>
-          <a:p>
-            <a:pPr indent="0" marL="0">
-              <a:buNone/>
-            </a:pPr>
-            <a:r>
-              <a:rPr lang="en-US" sz="2800" b="1" dirty="0">
+          <p:cNvPr id="26" name="Text 24"/>
+          <p:cNvSpPr/>
+          <p:nvPr/>
+        </p:nvSpPr>
+        <p:spPr>
+          <a:xfrm>
+            <a:off x="9921240" y="2395728"/>
+            <a:ext cx="1700784" cy="329184"/>
+          </a:xfrm>
+          <a:prstGeom prst="rect">
+            <a:avLst/>
+          </a:prstGeom>
+          <a:noFill/>
+          <a:ln/>
+        </p:spPr>
+        <p:txBody>
+          <a:bodyPr wrap="square" lIns="0" tIns="0" rIns="0" bIns="0" rtlCol="0" anchor="ctr"/>
+          <a:lstStyle/>
+          <a:p>
+            <a:pPr algn="ctr" indent="0" marL="0">
+              <a:buNone/>
+            </a:pPr>
+            <a:r>
+              <a:rPr lang="en-US" sz="1350" b="1" dirty="0">
                 <a:solidFill>
                   <a:srgbClr val="E39B2C"/>
+                </a:solidFill>
+                <a:latin typeface="Calibri" pitchFamily="34" charset="0"/>
+                <a:ea typeface="Calibri" pitchFamily="34" charset="-122"/>
+                <a:cs typeface="Calibri" pitchFamily="34" charset="-120"/>
+              </a:rPr>
+              <a:t>Realized</a:t>
+            </a:r>
+            <a:endParaRPr lang="en-US" sz="1350" dirty="0"/>
+          </a:p>
+        </p:txBody>
+      </p:sp>
+      <p:sp>
+        <p:nvSpPr>
+          <p:cNvPr id="27" name="Text 25"/>
+          <p:cNvSpPr/>
+          <p:nvPr/>
+        </p:nvSpPr>
+        <p:spPr>
+          <a:xfrm>
+            <a:off x="10012680" y="2724912"/>
+            <a:ext cx="1517904" cy="402336"/>
+          </a:xfrm>
+          <a:prstGeom prst="rect">
+            <a:avLst/>
+          </a:prstGeom>
+          <a:noFill/>
+          <a:ln/>
+        </p:spPr>
+        <p:txBody>
+          <a:bodyPr wrap="square" lIns="0" tIns="0" rIns="0" bIns="0" rtlCol="0" anchor="t"/>
+          <a:lstStyle/>
+          <a:p>
+            <a:pPr algn="ctr" indent="0" marL="0">
+              <a:lnSpc>
+                <a:spcPts val="1400"/>
+              </a:lnSpc>
+              <a:buNone/>
+            </a:pPr>
+            <a:r>
+              <a:rPr lang="en-US" sz="1100" dirty="0">
+                <a:solidFill>
+                  <a:srgbClr val="9EABBA"/>
+                </a:solidFill>
+                <a:latin typeface="Calibri" pitchFamily="34" charset="0"/>
+                <a:ea typeface="Calibri" pitchFamily="34" charset="-122"/>
+                <a:cs typeface="Calibri" pitchFamily="34" charset="-120"/>
+              </a:rPr>
+              <a:t>measured on the bill</a:t>
+            </a:r>
+            <a:endParaRPr lang="en-US" sz="1100" dirty="0"/>
+          </a:p>
+        </p:txBody>
+      </p:sp>
+      <p:sp>
+        <p:nvSpPr>
+          <p:cNvPr id="28" name="Text 26"/>
+          <p:cNvSpPr/>
+          <p:nvPr/>
+        </p:nvSpPr>
+        <p:spPr>
+          <a:xfrm>
+            <a:off x="548640" y="3364992"/>
+            <a:ext cx="11091672" cy="310896"/>
+          </a:xfrm>
+          <a:prstGeom prst="rect">
+            <a:avLst/>
+          </a:prstGeom>
+          <a:noFill/>
+          <a:ln/>
+        </p:spPr>
+        <p:txBody>
+          <a:bodyPr wrap="square" lIns="0" tIns="0" rIns="0" bIns="0" rtlCol="0" anchor="ctr"/>
+          <a:lstStyle/>
+          <a:p>
+            <a:pPr indent="0" marL="0">
+              <a:buNone/>
+            </a:pPr>
+            <a:r>
+              <a:rPr lang="en-US" sz="1250" dirty="0">
+                <a:solidFill>
+                  <a:srgbClr val="5C6675"/>
+                </a:solidFill>
+                <a:latin typeface="Calibri" pitchFamily="34" charset="0"/>
+                <a:ea typeface="Calibri" pitchFamily="34" charset="-122"/>
+                <a:cs typeface="Calibri" pitchFamily="34" charset="-120"/>
+              </a:rPr>
+              <a:t>A recommendation without an owner and a date is an opinion.</a:t>
+            </a:r>
+            <a:endParaRPr lang="en-US" sz="1250" dirty="0"/>
+          </a:p>
+        </p:txBody>
+      </p:sp>
+      <p:sp>
+        <p:nvSpPr>
+          <p:cNvPr id="29" name="Shape 27"/>
+          <p:cNvSpPr/>
+          <p:nvPr/>
+        </p:nvSpPr>
+        <p:spPr>
+          <a:xfrm>
+            <a:off x="548640" y="3913632"/>
+            <a:ext cx="5394960" cy="2240280"/>
+          </a:xfrm>
+          <a:prstGeom prst="roundRect">
+            <a:avLst>
+              <a:gd name="adj" fmla="val 3673"/>
+            </a:avLst>
+          </a:prstGeom>
+          <a:solidFill>
+            <a:srgbClr val="F1F3F6"/>
+          </a:solidFill>
+          <a:ln/>
+        </p:spPr>
+      </p:sp>
+      <p:sp>
+        <p:nvSpPr>
+          <p:cNvPr id="30" name="Text 28"/>
+          <p:cNvSpPr/>
+          <p:nvPr/>
+        </p:nvSpPr>
+        <p:spPr>
+          <a:xfrm>
+            <a:off x="859536" y="4078224"/>
+            <a:ext cx="4572000" cy="292608"/>
+          </a:xfrm>
+          <a:prstGeom prst="rect">
+            <a:avLst/>
+          </a:prstGeom>
+          <a:noFill/>
+          <a:ln/>
+        </p:spPr>
+        <p:txBody>
+          <a:bodyPr wrap="square" lIns="0" tIns="0" rIns="0" bIns="0" rtlCol="0" anchor="ctr"/>
+          <a:lstStyle/>
+          <a:p>
+            <a:pPr indent="0" marL="0">
+              <a:buNone/>
+            </a:pPr>
+            <a:r>
+              <a:rPr lang="en-US" sz="1200" b="1" spc="180" kern="0" dirty="0">
+                <a:solidFill>
+                  <a:srgbClr val="5C6675"/>
+                </a:solidFill>
+                <a:latin typeface="Calibri" pitchFamily="34" charset="0"/>
+                <a:ea typeface="Calibri" pitchFamily="34" charset="-122"/>
+                <a:cs typeface="Calibri" pitchFamily="34" charset="-120"/>
+              </a:rPr>
+              <a:t>The difference that matters</a:t>
+            </a:r>
+            <a:endParaRPr lang="en-US" sz="1200" dirty="0"/>
+          </a:p>
+        </p:txBody>
+      </p:sp>
+      <p:sp>
+        <p:nvSpPr>
+          <p:cNvPr id="31" name="Text 29"/>
+          <p:cNvSpPr/>
+          <p:nvPr/>
+        </p:nvSpPr>
+        <p:spPr>
+          <a:xfrm>
+            <a:off x="859536" y="4425696"/>
+            <a:ext cx="4773168" cy="530352"/>
+          </a:xfrm>
+          <a:prstGeom prst="rect">
+            <a:avLst/>
+          </a:prstGeom>
+          <a:noFill/>
+          <a:ln/>
+        </p:spPr>
+        <p:txBody>
+          <a:bodyPr wrap="square" lIns="0" tIns="0" rIns="0" bIns="0" rtlCol="0" anchor="t"/>
+          <a:lstStyle/>
+          <a:p>
+            <a:pPr indent="0" marL="0">
+              <a:lnSpc>
+                <a:spcPts val="1900"/>
+              </a:lnSpc>
+              <a:buNone/>
+            </a:pPr>
+            <a:r>
+              <a:rPr lang="en-US" sz="1400" b="1" dirty="0">
+                <a:solidFill>
+                  <a:srgbClr val="5C6675"/>
+                </a:solidFill>
+                <a:latin typeface="Calibri" pitchFamily="34" charset="0"/>
+                <a:ea typeface="Calibri" pitchFamily="34" charset="-122"/>
+                <a:cs typeface="Calibri" pitchFamily="34" charset="-120"/>
+              </a:rPr>
+              <a:t>A report  </a:t>
+            </a:r>
+            <a:pPr indent="0" marL="0">
+              <a:lnSpc>
+                <a:spcPts val="1900"/>
+              </a:lnSpc>
+              <a:buNone/>
+            </a:pPr>
+            <a:r>
+              <a:rPr lang="en-US" sz="1400" dirty="0">
+                <a:solidFill>
+                  <a:srgbClr val="5C6675"/>
+                </a:solidFill>
+                <a:latin typeface="Calibri" pitchFamily="34" charset="0"/>
+                <a:ea typeface="Calibri" pitchFamily="34" charset="-122"/>
+                <a:cs typeface="Calibri" pitchFamily="34" charset="-120"/>
+              </a:rPr>
+              <a:t>is finished when the number is right.</a:t>
+            </a:r>
+            <a:endParaRPr lang="en-US" sz="1400" dirty="0"/>
+          </a:p>
+        </p:txBody>
+      </p:sp>
+      <p:sp>
+        <p:nvSpPr>
+          <p:cNvPr id="32" name="Text 30"/>
+          <p:cNvSpPr/>
+          <p:nvPr/>
+        </p:nvSpPr>
+        <p:spPr>
+          <a:xfrm>
+            <a:off x="859536" y="4974336"/>
+            <a:ext cx="4773168" cy="530352"/>
+          </a:xfrm>
+          <a:prstGeom prst="rect">
+            <a:avLst/>
+          </a:prstGeom>
+          <a:noFill/>
+          <a:ln/>
+        </p:spPr>
+        <p:txBody>
+          <a:bodyPr wrap="square" lIns="0" tIns="0" rIns="0" bIns="0" rtlCol="0" anchor="t"/>
+          <a:lstStyle/>
+          <a:p>
+            <a:pPr indent="0" marL="0">
+              <a:lnSpc>
+                <a:spcPts val="1900"/>
+              </a:lnSpc>
+              <a:buNone/>
+            </a:pPr>
+            <a:r>
+              <a:rPr lang="en-US" sz="1400" b="1" dirty="0">
+                <a:solidFill>
+                  <a:srgbClr val="1B2430"/>
+                </a:solidFill>
+                <a:latin typeface="Calibri" pitchFamily="34" charset="0"/>
+                <a:ea typeface="Calibri" pitchFamily="34" charset="-122"/>
+                <a:cs typeface="Calibri" pitchFamily="34" charset="-120"/>
+              </a:rPr>
+              <a:t>A product  </a:t>
+            </a:r>
+            <a:pPr indent="0" marL="0">
+              <a:lnSpc>
+                <a:spcPts val="1900"/>
+              </a:lnSpc>
+              <a:buNone/>
+            </a:pPr>
+            <a:r>
+              <a:rPr lang="en-US" sz="1400" dirty="0">
+                <a:solidFill>
+                  <a:srgbClr val="5C6675"/>
+                </a:solidFill>
+                <a:latin typeface="Calibri" pitchFamily="34" charset="0"/>
+                <a:ea typeface="Calibri" pitchFamily="34" charset="-122"/>
+                <a:cs typeface="Calibri" pitchFamily="34" charset="-120"/>
+              </a:rPr>
+              <a:t>is finished when someone behaves differently.</a:t>
+            </a:r>
+            <a:endParaRPr lang="en-US" sz="1400" dirty="0"/>
+          </a:p>
+        </p:txBody>
+      </p:sp>
+      <p:sp>
+        <p:nvSpPr>
+          <p:cNvPr id="33" name="Text 31"/>
+          <p:cNvSpPr/>
+          <p:nvPr/>
+        </p:nvSpPr>
+        <p:spPr>
+          <a:xfrm>
+            <a:off x="859536" y="5522976"/>
+            <a:ext cx="4773168" cy="457200"/>
+          </a:xfrm>
+          <a:prstGeom prst="rect">
+            <a:avLst/>
+          </a:prstGeom>
+          <a:noFill/>
+          <a:ln/>
+        </p:spPr>
+        <p:txBody>
+          <a:bodyPr wrap="square" lIns="0" tIns="0" rIns="0" bIns="0" rtlCol="0" anchor="t"/>
+          <a:lstStyle/>
+          <a:p>
+            <a:pPr indent="0" marL="0">
+              <a:lnSpc>
+                <a:spcPts val="1600"/>
+              </a:lnSpc>
+              <a:buNone/>
+            </a:pPr>
+            <a:r>
+              <a:rPr lang="en-US" sz="1250" dirty="0">
+                <a:solidFill>
+                  <a:srgbClr val="1B2430"/>
+                </a:solidFill>
+                <a:latin typeface="Calibri" pitchFamily="34" charset="0"/>
+                <a:ea typeface="Calibri" pitchFamily="34" charset="-122"/>
+                <a:cs typeface="Calibri" pitchFamily="34" charset="-120"/>
+              </a:rPr>
+              <a:t>Build for the engineer who wants the three things worth fixing this sprint — the finance report improves as a by-product.</a:t>
+            </a:r>
+            <a:endParaRPr lang="en-US" sz="1250" dirty="0"/>
+          </a:p>
+        </p:txBody>
+      </p:sp>
+      <p:sp>
+        <p:nvSpPr>
+          <p:cNvPr id="34" name="Shape 32"/>
+          <p:cNvSpPr/>
+          <p:nvPr/>
+        </p:nvSpPr>
+        <p:spPr>
+          <a:xfrm>
+            <a:off x="6245352" y="3913632"/>
+            <a:ext cx="5394960" cy="2240280"/>
+          </a:xfrm>
+          <a:prstGeom prst="roundRect">
+            <a:avLst>
+              <a:gd name="adj" fmla="val 3673"/>
+            </a:avLst>
+          </a:prstGeom>
+          <a:solidFill>
+            <a:srgbClr val="1F2936"/>
+          </a:solidFill>
+          <a:ln/>
+          <a:effectLst>
+            <a:outerShdw sx="100000" sy="100000" kx="0" ky="0" algn="bl" rotWithShape="0" blurRad="127000" dist="25400" dir="5400000">
+              <a:srgbClr val="8C99A8">
+                <a:alpha val="16000"/>
+              </a:srgbClr>
+            </a:outerShdw>
+          </a:effectLst>
+        </p:spPr>
+      </p:sp>
+      <p:sp>
+        <p:nvSpPr>
+          <p:cNvPr id="35" name="Text 33"/>
+          <p:cNvSpPr/>
+          <p:nvPr/>
+        </p:nvSpPr>
+        <p:spPr>
+          <a:xfrm>
+            <a:off x="6556248" y="4078224"/>
+            <a:ext cx="4572000" cy="292608"/>
+          </a:xfrm>
+          <a:prstGeom prst="rect">
+            <a:avLst/>
+          </a:prstGeom>
+          <a:noFill/>
+          <a:ln/>
+        </p:spPr>
+        <p:txBody>
+          <a:bodyPr wrap="square" lIns="0" tIns="0" rIns="0" bIns="0" rtlCol="0" anchor="ctr"/>
+          <a:lstStyle/>
+          <a:p>
+            <a:pPr indent="0" marL="0">
+              <a:buNone/>
+            </a:pPr>
+            <a:r>
+              <a:rPr lang="en-US" sz="1200" b="1" spc="180" kern="0" dirty="0">
+                <a:solidFill>
+                  <a:srgbClr val="E39B2C"/>
+                </a:solidFill>
+                <a:latin typeface="Calibri" pitchFamily="34" charset="0"/>
+                <a:ea typeface="Calibri" pitchFamily="34" charset="-122"/>
+                <a:cs typeface="Calibri" pitchFamily="34" charset="-120"/>
+              </a:rPr>
+              <a:t>Measure adoption, not accuracy</a:t>
+            </a:r>
+            <a:endParaRPr lang="en-US" sz="1200" dirty="0"/>
+          </a:p>
+        </p:txBody>
+      </p:sp>
+      <p:sp>
+        <p:nvSpPr>
+          <p:cNvPr id="36" name="Shape 34"/>
+          <p:cNvSpPr/>
+          <p:nvPr/>
+        </p:nvSpPr>
+        <p:spPr>
+          <a:xfrm>
+            <a:off x="6574536" y="4590288"/>
+            <a:ext cx="100584" cy="100584"/>
+          </a:xfrm>
+          <a:prstGeom prst="ellipse">
+            <a:avLst/>
+          </a:prstGeom>
+          <a:solidFill>
+            <a:srgbClr val="E39B2C"/>
+          </a:solidFill>
+          <a:ln/>
+        </p:spPr>
+      </p:sp>
+      <p:sp>
+        <p:nvSpPr>
+          <p:cNvPr id="37" name="Text 35"/>
+          <p:cNvSpPr/>
+          <p:nvPr/>
+        </p:nvSpPr>
+        <p:spPr>
+          <a:xfrm>
+            <a:off x="6812280" y="4443984"/>
+            <a:ext cx="4553712" cy="457200"/>
+          </a:xfrm>
+          <a:prstGeom prst="rect">
+            <a:avLst/>
+          </a:prstGeom>
+          <a:noFill/>
+          <a:ln/>
+        </p:spPr>
+        <p:txBody>
+          <a:bodyPr wrap="square" lIns="0" tIns="0" rIns="0" bIns="0" rtlCol="0" anchor="t"/>
+          <a:lstStyle/>
+          <a:p>
+            <a:pPr indent="0" marL="0">
+              <a:lnSpc>
+                <a:spcPts val="1600"/>
+              </a:lnSpc>
+              <a:buNone/>
+            </a:pPr>
+            <a:r>
+              <a:rPr lang="en-US" sz="1250" b="1" dirty="0">
+                <a:solidFill>
+                  <a:srgbClr val="FFFFFF"/>
+                </a:solidFill>
+                <a:latin typeface="Calibri" pitchFamily="34" charset="0"/>
+                <a:ea typeface="Calibri" pitchFamily="34" charset="-122"/>
+                <a:cs typeface="Calibri" pitchFamily="34" charset="-120"/>
+              </a:rPr>
+              <a:t>Findings with an owner and a date</a:t>
+            </a:r>
+            <a:endParaRPr lang="en-US" sz="1250" dirty="0"/>
+          </a:p>
+          <a:p>
+            <a:pPr indent="0" marL="0">
+              <a:lnSpc>
+                <a:spcPts val="1600"/>
+              </a:lnSpc>
+              <a:buNone/>
+            </a:pPr>
+            <a:r>
+              <a:rPr lang="en-US" sz="1250" dirty="0">
+                <a:solidFill>
+                  <a:srgbClr val="9EABBA"/>
+                </a:solidFill>
+                <a:latin typeface="Calibri" pitchFamily="34" charset="0"/>
+                <a:ea typeface="Calibri" pitchFamily="34" charset="-122"/>
+                <a:cs typeface="Calibri" pitchFamily="34" charset="-120"/>
+              </a:rPr>
+              <a:t>The share that became work.</a:t>
+            </a:r>
+            <a:endParaRPr lang="en-US" sz="1250" dirty="0"/>
+          </a:p>
+        </p:txBody>
+      </p:sp>
+      <p:sp>
+        <p:nvSpPr>
+          <p:cNvPr id="38" name="Shape 36"/>
+          <p:cNvSpPr/>
+          <p:nvPr/>
+        </p:nvSpPr>
+        <p:spPr>
+          <a:xfrm>
+            <a:off x="6574536" y="5102352"/>
+            <a:ext cx="100584" cy="100584"/>
+          </a:xfrm>
+          <a:prstGeom prst="ellipse">
+            <a:avLst/>
+          </a:prstGeom>
+          <a:solidFill>
+            <a:srgbClr val="E39B2C"/>
+          </a:solidFill>
+          <a:ln/>
+        </p:spPr>
+      </p:sp>
+      <p:sp>
+        <p:nvSpPr>
+          <p:cNvPr id="39" name="Text 37"/>
+          <p:cNvSpPr/>
+          <p:nvPr/>
+        </p:nvSpPr>
+        <p:spPr>
+          <a:xfrm>
+            <a:off x="6812280" y="4956048"/>
+            <a:ext cx="4553712" cy="457200"/>
+          </a:xfrm>
+          <a:prstGeom prst="rect">
+            <a:avLst/>
+          </a:prstGeom>
+          <a:noFill/>
+          <a:ln/>
+        </p:spPr>
+        <p:txBody>
+          <a:bodyPr wrap="square" lIns="0" tIns="0" rIns="0" bIns="0" rtlCol="0" anchor="t"/>
+          <a:lstStyle/>
+          <a:p>
+            <a:pPr indent="0" marL="0">
+              <a:lnSpc>
+                <a:spcPts val="1600"/>
+              </a:lnSpc>
+              <a:buNone/>
+            </a:pPr>
+            <a:r>
+              <a:rPr lang="en-US" sz="1250" b="1" dirty="0">
+                <a:solidFill>
+                  <a:srgbClr val="FFFFFF"/>
+                </a:solidFill>
+                <a:latin typeface="Calibri" pitchFamily="34" charset="0"/>
+                <a:ea typeface="Calibri" pitchFamily="34" charset="-122"/>
+                <a:cs typeface="Calibri" pitchFamily="34" charset="-120"/>
+              </a:rPr>
+              <a:t>Realized against identified saving</a:t>
+            </a:r>
+            <a:endParaRPr lang="en-US" sz="1250" dirty="0"/>
+          </a:p>
+          <a:p>
+            <a:pPr indent="0" marL="0">
+              <a:lnSpc>
+                <a:spcPts val="1600"/>
+              </a:lnSpc>
+              <a:buNone/>
+            </a:pPr>
+            <a:r>
+              <a:rPr lang="en-US" sz="1250" dirty="0">
+                <a:solidFill>
+                  <a:srgbClr val="9EABBA"/>
+                </a:solidFill>
+                <a:latin typeface="Calibri" pitchFamily="34" charset="0"/>
+                <a:ea typeface="Calibri" pitchFamily="34" charset="-122"/>
+                <a:cs typeface="Calibri" pitchFamily="34" charset="-120"/>
+              </a:rPr>
+              <a:t>Only the first reaches an invoice.</a:t>
+            </a:r>
+            <a:endParaRPr lang="en-US" sz="1250" dirty="0"/>
+          </a:p>
+        </p:txBody>
+      </p:sp>
+      <p:sp>
+        <p:nvSpPr>
+          <p:cNvPr id="40" name="Shape 38"/>
+          <p:cNvSpPr/>
+          <p:nvPr/>
+        </p:nvSpPr>
+        <p:spPr>
+          <a:xfrm>
+            <a:off x="6574536" y="5614416"/>
+            <a:ext cx="100584" cy="100584"/>
+          </a:xfrm>
+          <a:prstGeom prst="ellipse">
+            <a:avLst/>
+          </a:prstGeom>
+          <a:solidFill>
+            <a:srgbClr val="E39B2C"/>
+          </a:solidFill>
+          <a:ln/>
+        </p:spPr>
+      </p:sp>
+      <p:sp>
+        <p:nvSpPr>
+          <p:cNvPr id="41" name="Text 39"/>
+          <p:cNvSpPr/>
+          <p:nvPr/>
+        </p:nvSpPr>
+        <p:spPr>
+          <a:xfrm>
+            <a:off x="6812280" y="5468112"/>
+            <a:ext cx="4553712" cy="457200"/>
+          </a:xfrm>
+          <a:prstGeom prst="rect">
+            <a:avLst/>
+          </a:prstGeom>
+          <a:noFill/>
+          <a:ln/>
+        </p:spPr>
+        <p:txBody>
+          <a:bodyPr wrap="square" lIns="0" tIns="0" rIns="0" bIns="0" rtlCol="0" anchor="t"/>
+          <a:lstStyle/>
+          <a:p>
+            <a:pPr indent="0" marL="0">
+              <a:lnSpc>
+                <a:spcPts val="1600"/>
+              </a:lnSpc>
+              <a:buNone/>
+            </a:pPr>
+            <a:r>
+              <a:rPr lang="en-US" sz="1250" b="1" dirty="0">
+                <a:solidFill>
+                  <a:srgbClr val="FFFFFF"/>
+                </a:solidFill>
+                <a:latin typeface="Calibri" pitchFamily="34" charset="0"/>
+                <a:ea typeface="Calibri" pitchFamily="34" charset="-122"/>
+                <a:cs typeface="Calibri" pitchFamily="34" charset="-120"/>
+              </a:rPr>
+              <a:t>Time from finding to owner</a:t>
+            </a:r>
+            <a:endParaRPr lang="en-US" sz="1250" dirty="0"/>
+          </a:p>
+          <a:p>
+            <a:pPr indent="0" marL="0">
+              <a:lnSpc>
+                <a:spcPts val="1600"/>
+              </a:lnSpc>
+              <a:buNone/>
+            </a:pPr>
+            <a:r>
+              <a:rPr lang="en-US" sz="1250" dirty="0">
+                <a:solidFill>
+                  <a:srgbClr val="9EABBA"/>
+                </a:solidFill>
+                <a:latin typeface="Calibri" pitchFamily="34" charset="0"/>
+                <a:ea typeface="Calibri" pitchFamily="34" charset="-122"/>
+                <a:cs typeface="Calibri" pitchFamily="34" charset="-120"/>
+              </a:rPr>
+              <a:t>Days, not weeks — and trending down.</a:t>
+            </a:r>
+            <a:endParaRPr lang="en-US" sz="1250" dirty="0"/>
+          </a:p>
+        </p:txBody>
+      </p:sp>
+      <p:sp>
+        <p:nvSpPr>
+          <p:cNvPr id="42" name="Text 40"/>
+          <p:cNvSpPr/>
+          <p:nvPr/>
+        </p:nvSpPr>
+        <p:spPr>
+          <a:xfrm>
+            <a:off x="548640" y="6272784"/>
+            <a:ext cx="11091672" cy="402336"/>
+          </a:xfrm>
+          <a:prstGeom prst="rect">
+            <a:avLst/>
+          </a:prstGeom>
+          <a:noFill/>
+          <a:ln/>
+        </p:spPr>
+        <p:txBody>
+          <a:bodyPr wrap="square" lIns="0" tIns="0" rIns="0" bIns="0" rtlCol="0" anchor="ctr"/>
+          <a:lstStyle/>
+          <a:p>
+            <a:pPr indent="0" marL="0">
+              <a:buNone/>
+            </a:pPr>
+            <a:r>
+              <a:rPr lang="en-US" sz="1400" i="1" dirty="0">
+                <a:solidFill>
+                  <a:srgbClr val="5C6675"/>
                 </a:solidFill>
                 <a:latin typeface="Cambria" pitchFamily="34" charset="0"/>
                 <a:ea typeface="Cambria" pitchFamily="34" charset="-122"/>
                 <a:cs typeface="Cambria" pitchFamily="34" charset="-120"/>
               </a:rPr>
-              <a:t>01</a:t>
-            </a:r>
-            <a:endParaRPr lang="en-US" sz="2800" dirty="0"/>
-          </a:p>
-        </p:txBody>
-      </p:sp>
-      <p:sp>
-        <p:nvSpPr>
-          <p:cNvPr id="6" name="Text 4"/>
-          <p:cNvSpPr/>
-          <p:nvPr/>
-        </p:nvSpPr>
-        <p:spPr>
-          <a:xfrm>
-            <a:off x="786384" y="2523744"/>
-            <a:ext cx="2139696" cy="786384"/>
-          </a:xfrm>
-          <a:prstGeom prst="rect">
-            <a:avLst/>
-          </a:prstGeom>
-          <a:noFill/>
-          <a:ln/>
-        </p:spPr>
-        <p:txBody>
-          <a:bodyPr wrap="square" lIns="0" tIns="0" rIns="0" bIns="0" rtlCol="0" anchor="t"/>
-          <a:lstStyle/>
-          <a:p>
-            <a:pPr indent="0" marL="0">
-              <a:lnSpc>
-                <a:spcPts val="2000"/>
-              </a:lnSpc>
-              <a:buNone/>
-            </a:pPr>
-            <a:r>
-              <a:rPr lang="en-US" sz="1500" b="1" dirty="0">
-                <a:solidFill>
-                  <a:srgbClr val="FFFFFF"/>
-                </a:solidFill>
-                <a:latin typeface="Cambria" pitchFamily="34" charset="0"/>
-                <a:ea typeface="Cambria" pitchFamily="34" charset="-122"/>
-                <a:cs typeface="Cambria" pitchFamily="34" charset="-120"/>
-              </a:rPr>
-              <a:t>Set the tagging standard</a:t>
-            </a:r>
-            <a:endParaRPr lang="en-US" sz="1500" dirty="0"/>
-          </a:p>
-        </p:txBody>
-      </p:sp>
-      <p:sp>
-        <p:nvSpPr>
-          <p:cNvPr id="7" name="Text 5"/>
-          <p:cNvSpPr/>
-          <p:nvPr/>
-        </p:nvSpPr>
-        <p:spPr>
-          <a:xfrm>
-            <a:off x="786384" y="3346704"/>
-            <a:ext cx="2139696" cy="749808"/>
-          </a:xfrm>
-          <a:prstGeom prst="rect">
-            <a:avLst/>
-          </a:prstGeom>
-          <a:noFill/>
-          <a:ln/>
-        </p:spPr>
-        <p:txBody>
-          <a:bodyPr wrap="square" lIns="0" tIns="0" rIns="0" bIns="0" rtlCol="0" anchor="t"/>
-          <a:lstStyle/>
-          <a:p>
-            <a:pPr indent="0" marL="0">
-              <a:lnSpc>
-                <a:spcPts val="1500"/>
-              </a:lnSpc>
-              <a:buNone/>
-            </a:pPr>
-            <a:r>
-              <a:rPr lang="en-US" sz="1200" dirty="0">
-                <a:solidFill>
-                  <a:srgbClr val="9EABBA"/>
-                </a:solidFill>
-                <a:latin typeface="Calibri" pitchFamily="34" charset="0"/>
-                <a:ea typeface="Calibri" pitchFamily="34" charset="-122"/>
-                <a:cs typeface="Calibri" pitchFamily="34" charset="-120"/>
-              </a:rPr>
-              <a:t>Agree a consistent taxonomy before investing in dashboards.</a:t>
-            </a:r>
-            <a:endParaRPr lang="en-US" sz="1200" dirty="0"/>
-          </a:p>
-        </p:txBody>
-      </p:sp>
-      <p:sp>
-        <p:nvSpPr>
-          <p:cNvPr id="8" name="Shape 6"/>
-          <p:cNvSpPr/>
-          <p:nvPr/>
-        </p:nvSpPr>
-        <p:spPr>
-          <a:xfrm>
-            <a:off x="3383280" y="1783080"/>
-            <a:ext cx="2587752" cy="2423160"/>
-          </a:xfrm>
-          <a:prstGeom prst="roundRect">
-            <a:avLst>
-              <a:gd name="adj" fmla="val 3396"/>
-            </a:avLst>
-          </a:prstGeom>
-          <a:solidFill>
-            <a:srgbClr val="F1F3F6"/>
-          </a:solidFill>
-          <a:ln/>
-        </p:spPr>
-      </p:sp>
-      <p:sp>
-        <p:nvSpPr>
-          <p:cNvPr id="9" name="Text 7"/>
-          <p:cNvSpPr/>
-          <p:nvPr/>
-        </p:nvSpPr>
-        <p:spPr>
-          <a:xfrm>
-            <a:off x="3639312" y="1965960"/>
-            <a:ext cx="1097280" cy="502920"/>
-          </a:xfrm>
-          <a:prstGeom prst="rect">
-            <a:avLst/>
-          </a:prstGeom>
-          <a:noFill/>
-          <a:ln/>
-        </p:spPr>
-        <p:txBody>
-          <a:bodyPr wrap="square" lIns="0" tIns="0" rIns="0" bIns="0" rtlCol="0" anchor="ctr"/>
-          <a:lstStyle/>
-          <a:p>
-            <a:pPr indent="0" marL="0">
-              <a:buNone/>
-            </a:pPr>
-            <a:r>
-              <a:rPr lang="en-US" sz="2800" b="1" dirty="0">
-                <a:solidFill>
-                  <a:srgbClr val="B9C2CD"/>
-                </a:solidFill>
-                <a:latin typeface="Cambria" pitchFamily="34" charset="0"/>
-                <a:ea typeface="Cambria" pitchFamily="34" charset="-122"/>
-                <a:cs typeface="Cambria" pitchFamily="34" charset="-120"/>
-              </a:rPr>
-              <a:t>02</a:t>
-            </a:r>
-            <a:endParaRPr lang="en-US" sz="2800" dirty="0"/>
-          </a:p>
-        </p:txBody>
-      </p:sp>
-      <p:sp>
-        <p:nvSpPr>
-          <p:cNvPr id="10" name="Text 8"/>
-          <p:cNvSpPr/>
-          <p:nvPr/>
-        </p:nvSpPr>
-        <p:spPr>
-          <a:xfrm>
-            <a:off x="3621024" y="2523744"/>
-            <a:ext cx="2139696" cy="786384"/>
-          </a:xfrm>
-          <a:prstGeom prst="rect">
-            <a:avLst/>
-          </a:prstGeom>
-          <a:noFill/>
-          <a:ln/>
-        </p:spPr>
-        <p:txBody>
-          <a:bodyPr wrap="square" lIns="0" tIns="0" rIns="0" bIns="0" rtlCol="0" anchor="t"/>
-          <a:lstStyle/>
-          <a:p>
-            <a:pPr indent="0" marL="0">
-              <a:lnSpc>
-                <a:spcPts val="2000"/>
-              </a:lnSpc>
-              <a:buNone/>
-            </a:pPr>
-            <a:r>
-              <a:rPr lang="en-US" sz="1500" b="1" dirty="0">
-                <a:solidFill>
-                  <a:srgbClr val="1B2430"/>
-                </a:solidFill>
-                <a:latin typeface="Cambria" pitchFamily="34" charset="0"/>
-                <a:ea typeface="Cambria" pitchFamily="34" charset="-122"/>
-                <a:cs typeface="Cambria" pitchFamily="34" charset="-120"/>
-              </a:rPr>
-              <a:t>Start with the biggest spend</a:t>
-            </a:r>
-            <a:endParaRPr lang="en-US" sz="1500" dirty="0"/>
-          </a:p>
-        </p:txBody>
-      </p:sp>
-      <p:sp>
-        <p:nvSpPr>
-          <p:cNvPr id="11" name="Text 9"/>
-          <p:cNvSpPr/>
-          <p:nvPr/>
-        </p:nvSpPr>
-        <p:spPr>
-          <a:xfrm>
-            <a:off x="3621024" y="3346704"/>
-            <a:ext cx="2139696" cy="749808"/>
-          </a:xfrm>
-          <a:prstGeom prst="rect">
-            <a:avLst/>
-          </a:prstGeom>
-          <a:noFill/>
-          <a:ln/>
-        </p:spPr>
-        <p:txBody>
-          <a:bodyPr wrap="square" lIns="0" tIns="0" rIns="0" bIns="0" rtlCol="0" anchor="t"/>
-          <a:lstStyle/>
-          <a:p>
-            <a:pPr indent="0" marL="0">
-              <a:lnSpc>
-                <a:spcPts val="1500"/>
-              </a:lnSpc>
-              <a:buNone/>
-            </a:pPr>
-            <a:r>
-              <a:rPr lang="en-US" sz="1200" dirty="0">
-                <a:solidFill>
-                  <a:srgbClr val="5C6675"/>
-                </a:solidFill>
-                <a:latin typeface="Calibri" pitchFamily="34" charset="0"/>
-                <a:ea typeface="Calibri" pitchFamily="34" charset="-122"/>
-                <a:cs typeface="Calibri" pitchFamily="34" charset="-120"/>
-              </a:rPr>
-              <a:t>Attack the largest categories first. Don't chase perfect granularity everywhere.</a:t>
-            </a:r>
-            <a:endParaRPr lang="en-US" sz="1200" dirty="0"/>
-          </a:p>
-        </p:txBody>
-      </p:sp>
-      <p:sp>
-        <p:nvSpPr>
-          <p:cNvPr id="12" name="Shape 10"/>
-          <p:cNvSpPr/>
-          <p:nvPr/>
-        </p:nvSpPr>
-        <p:spPr>
-          <a:xfrm>
-            <a:off x="6217920" y="1783080"/>
-            <a:ext cx="2587752" cy="2423160"/>
-          </a:xfrm>
-          <a:prstGeom prst="roundRect">
-            <a:avLst>
-              <a:gd name="adj" fmla="val 3396"/>
-            </a:avLst>
-          </a:prstGeom>
-          <a:solidFill>
-            <a:srgbClr val="F1F3F6"/>
-          </a:solidFill>
-          <a:ln/>
-        </p:spPr>
-      </p:sp>
-      <p:sp>
-        <p:nvSpPr>
-          <p:cNvPr id="13" name="Text 11"/>
-          <p:cNvSpPr/>
-          <p:nvPr/>
-        </p:nvSpPr>
-        <p:spPr>
-          <a:xfrm>
-            <a:off x="6473952" y="1965960"/>
-            <a:ext cx="1097280" cy="502920"/>
-          </a:xfrm>
-          <a:prstGeom prst="rect">
-            <a:avLst/>
-          </a:prstGeom>
-          <a:noFill/>
-          <a:ln/>
-        </p:spPr>
-        <p:txBody>
-          <a:bodyPr wrap="square" lIns="0" tIns="0" rIns="0" bIns="0" rtlCol="0" anchor="ctr"/>
-          <a:lstStyle/>
-          <a:p>
-            <a:pPr indent="0" marL="0">
-              <a:buNone/>
-            </a:pPr>
-            <a:r>
-              <a:rPr lang="en-US" sz="2800" b="1" dirty="0">
-                <a:solidFill>
-                  <a:srgbClr val="B9C2CD"/>
-                </a:solidFill>
-                <a:latin typeface="Cambria" pitchFamily="34" charset="0"/>
-                <a:ea typeface="Cambria" pitchFamily="34" charset="-122"/>
-                <a:cs typeface="Cambria" pitchFamily="34" charset="-120"/>
-              </a:rPr>
-              <a:t>03</a:t>
-            </a:r>
-            <a:endParaRPr lang="en-US" sz="2800" dirty="0"/>
-          </a:p>
-        </p:txBody>
-      </p:sp>
-      <p:sp>
-        <p:nvSpPr>
-          <p:cNvPr id="14" name="Text 12"/>
-          <p:cNvSpPr/>
-          <p:nvPr/>
-        </p:nvSpPr>
-        <p:spPr>
-          <a:xfrm>
-            <a:off x="6455664" y="2523744"/>
-            <a:ext cx="2139696" cy="786384"/>
-          </a:xfrm>
-          <a:prstGeom prst="rect">
-            <a:avLst/>
-          </a:prstGeom>
-          <a:noFill/>
-          <a:ln/>
-        </p:spPr>
-        <p:txBody>
-          <a:bodyPr wrap="square" lIns="0" tIns="0" rIns="0" bIns="0" rtlCol="0" anchor="t"/>
-          <a:lstStyle/>
-          <a:p>
-            <a:pPr indent="0" marL="0">
-              <a:lnSpc>
-                <a:spcPts val="2000"/>
-              </a:lnSpc>
-              <a:buNone/>
-            </a:pPr>
-            <a:r>
-              <a:rPr lang="en-US" sz="1500" b="1" dirty="0">
-                <a:solidFill>
-                  <a:srgbClr val="1B2430"/>
-                </a:solidFill>
-                <a:latin typeface="Cambria" pitchFamily="34" charset="0"/>
-                <a:ea typeface="Cambria" pitchFamily="34" charset="-122"/>
-                <a:cs typeface="Cambria" pitchFamily="34" charset="-120"/>
-              </a:rPr>
-              <a:t>Get finance and engineering talking</a:t>
-            </a:r>
-            <a:endParaRPr lang="en-US" sz="1500" dirty="0"/>
-          </a:p>
-        </p:txBody>
-      </p:sp>
-      <p:sp>
-        <p:nvSpPr>
-          <p:cNvPr id="15" name="Text 13"/>
-          <p:cNvSpPr/>
-          <p:nvPr/>
-        </p:nvSpPr>
-        <p:spPr>
-          <a:xfrm>
-            <a:off x="6455664" y="3346704"/>
-            <a:ext cx="2139696" cy="749808"/>
-          </a:xfrm>
-          <a:prstGeom prst="rect">
-            <a:avLst/>
-          </a:prstGeom>
-          <a:noFill/>
-          <a:ln/>
-        </p:spPr>
-        <p:txBody>
-          <a:bodyPr wrap="square" lIns="0" tIns="0" rIns="0" bIns="0" rtlCol="0" anchor="t"/>
-          <a:lstStyle/>
-          <a:p>
-            <a:pPr indent="0" marL="0">
-              <a:lnSpc>
-                <a:spcPts val="1500"/>
-              </a:lnSpc>
-              <a:buNone/>
-            </a:pPr>
-            <a:r>
-              <a:rPr lang="en-US" sz="1200" dirty="0">
-                <a:solidFill>
-                  <a:srgbClr val="5C6675"/>
-                </a:solidFill>
-                <a:latin typeface="Calibri" pitchFamily="34" charset="0"/>
-                <a:ea typeface="Calibri" pitchFamily="34" charset="-122"/>
-                <a:cs typeface="Calibri" pitchFamily="34" charset="-120"/>
-              </a:rPr>
-              <a:t>Bring both into the conversation early, not as an afterthought.</a:t>
-            </a:r>
-            <a:endParaRPr lang="en-US" sz="1200" dirty="0"/>
-          </a:p>
-        </p:txBody>
-      </p:sp>
-      <p:sp>
-        <p:nvSpPr>
-          <p:cNvPr id="16" name="Shape 14"/>
-          <p:cNvSpPr/>
-          <p:nvPr/>
-        </p:nvSpPr>
-        <p:spPr>
-          <a:xfrm>
-            <a:off x="9052560" y="1783080"/>
-            <a:ext cx="2587752" cy="2423160"/>
-          </a:xfrm>
-          <a:prstGeom prst="roundRect">
-            <a:avLst>
-              <a:gd name="adj" fmla="val 3396"/>
-            </a:avLst>
-          </a:prstGeom>
-          <a:solidFill>
-            <a:srgbClr val="F1F3F6"/>
-          </a:solidFill>
-          <a:ln/>
-        </p:spPr>
-      </p:sp>
-      <p:sp>
-        <p:nvSpPr>
-          <p:cNvPr id="17" name="Text 15"/>
-          <p:cNvSpPr/>
-          <p:nvPr/>
-        </p:nvSpPr>
-        <p:spPr>
-          <a:xfrm>
-            <a:off x="9308592" y="1965960"/>
-            <a:ext cx="1097280" cy="502920"/>
-          </a:xfrm>
-          <a:prstGeom prst="rect">
-            <a:avLst/>
-          </a:prstGeom>
-          <a:noFill/>
-          <a:ln/>
-        </p:spPr>
-        <p:txBody>
-          <a:bodyPr wrap="square" lIns="0" tIns="0" rIns="0" bIns="0" rtlCol="0" anchor="ctr"/>
-          <a:lstStyle/>
-          <a:p>
-            <a:pPr indent="0" marL="0">
-              <a:buNone/>
-            </a:pPr>
-            <a:r>
-              <a:rPr lang="en-US" sz="2800" b="1" dirty="0">
-                <a:solidFill>
-                  <a:srgbClr val="B9C2CD"/>
-                </a:solidFill>
-                <a:latin typeface="Cambria" pitchFamily="34" charset="0"/>
-                <a:ea typeface="Cambria" pitchFamily="34" charset="-122"/>
-                <a:cs typeface="Cambria" pitchFamily="34" charset="-120"/>
-              </a:rPr>
-              <a:t>04</a:t>
-            </a:r>
-            <a:endParaRPr lang="en-US" sz="2800" dirty="0"/>
-          </a:p>
-        </p:txBody>
-      </p:sp>
-      <p:sp>
-        <p:nvSpPr>
-          <p:cNvPr id="18" name="Text 16"/>
-          <p:cNvSpPr/>
-          <p:nvPr/>
-        </p:nvSpPr>
-        <p:spPr>
-          <a:xfrm>
-            <a:off x="9290304" y="2523744"/>
-            <a:ext cx="2139696" cy="786384"/>
-          </a:xfrm>
-          <a:prstGeom prst="rect">
-            <a:avLst/>
-          </a:prstGeom>
-          <a:noFill/>
-          <a:ln/>
-        </p:spPr>
-        <p:txBody>
-          <a:bodyPr wrap="square" lIns="0" tIns="0" rIns="0" bIns="0" rtlCol="0" anchor="t"/>
-          <a:lstStyle/>
-          <a:p>
-            <a:pPr indent="0" marL="0">
-              <a:lnSpc>
-                <a:spcPts val="2000"/>
-              </a:lnSpc>
-              <a:buNone/>
-            </a:pPr>
-            <a:r>
-              <a:rPr lang="en-US" sz="1500" b="1" dirty="0">
-                <a:solidFill>
-                  <a:srgbClr val="1B2430"/>
-                </a:solidFill>
-                <a:latin typeface="Cambria" pitchFamily="34" charset="0"/>
-                <a:ea typeface="Cambria" pitchFamily="34" charset="-122"/>
-                <a:cs typeface="Cambria" pitchFamily="34" charset="-120"/>
-              </a:rPr>
-              <a:t>Set guardrails early</a:t>
-            </a:r>
-            <a:endParaRPr lang="en-US" sz="1500" dirty="0"/>
-          </a:p>
-        </p:txBody>
-      </p:sp>
-      <p:sp>
-        <p:nvSpPr>
-          <p:cNvPr id="19" name="Text 17"/>
-          <p:cNvSpPr/>
-          <p:nvPr/>
-        </p:nvSpPr>
-        <p:spPr>
-          <a:xfrm>
-            <a:off x="9290304" y="3346704"/>
-            <a:ext cx="2139696" cy="749808"/>
-          </a:xfrm>
-          <a:prstGeom prst="rect">
-            <a:avLst/>
-          </a:prstGeom>
-          <a:noFill/>
-          <a:ln/>
-        </p:spPr>
-        <p:txBody>
-          <a:bodyPr wrap="square" lIns="0" tIns="0" rIns="0" bIns="0" rtlCol="0" anchor="t"/>
-          <a:lstStyle/>
-          <a:p>
-            <a:pPr indent="0" marL="0">
-              <a:lnSpc>
-                <a:spcPts val="1500"/>
-              </a:lnSpc>
-              <a:buNone/>
-            </a:pPr>
-            <a:r>
-              <a:rPr lang="en-US" sz="1200" dirty="0">
-                <a:solidFill>
-                  <a:srgbClr val="5C6675"/>
-                </a:solidFill>
-                <a:latin typeface="Calibri" pitchFamily="34" charset="0"/>
-                <a:ea typeface="Calibri" pitchFamily="34" charset="-122"/>
-                <a:cs typeface="Calibri" pitchFamily="34" charset="-120"/>
-              </a:rPr>
-              <a:t>Owners, budget thresholds and quotas cost little to add — and stop the expensive surprises.</a:t>
-            </a:r>
-            <a:endParaRPr lang="en-US" sz="1200" dirty="0"/>
-          </a:p>
-        </p:txBody>
-      </p:sp>
-      <p:sp>
-        <p:nvSpPr>
-          <p:cNvPr id="20" name="Shape 18"/>
-          <p:cNvSpPr/>
-          <p:nvPr/>
-        </p:nvSpPr>
-        <p:spPr>
-          <a:xfrm>
-            <a:off x="548640" y="4434840"/>
-            <a:ext cx="11091672" cy="1874520"/>
-          </a:xfrm>
-          <a:prstGeom prst="roundRect">
-            <a:avLst>
-              <a:gd name="adj" fmla="val 4390"/>
-            </a:avLst>
-          </a:prstGeom>
-          <a:solidFill>
-            <a:srgbClr val="F1F3F6"/>
-          </a:solidFill>
-          <a:ln/>
-        </p:spPr>
-      </p:sp>
-      <p:sp>
-        <p:nvSpPr>
-          <p:cNvPr id="21" name="Text 19"/>
-          <p:cNvSpPr/>
-          <p:nvPr/>
-        </p:nvSpPr>
-        <p:spPr>
-          <a:xfrm>
-            <a:off x="877824" y="4572000"/>
-            <a:ext cx="6035040" cy="292608"/>
-          </a:xfrm>
-          <a:prstGeom prst="rect">
-            <a:avLst/>
-          </a:prstGeom>
-          <a:noFill/>
-          <a:ln/>
-        </p:spPr>
-        <p:txBody>
-          <a:bodyPr wrap="square" lIns="0" tIns="0" rIns="0" bIns="0" rtlCol="0" anchor="ctr"/>
-          <a:lstStyle/>
-          <a:p>
-            <a:pPr indent="0" marL="0">
-              <a:buNone/>
-            </a:pPr>
-            <a:r>
-              <a:rPr lang="en-US" sz="1200" b="1" spc="180" kern="0" dirty="0">
-                <a:solidFill>
-                  <a:srgbClr val="5C6675"/>
-                </a:solidFill>
-                <a:latin typeface="Calibri" pitchFamily="34" charset="0"/>
-                <a:ea typeface="Calibri" pitchFamily="34" charset="-122"/>
-                <a:cs typeface="Calibri" pitchFamily="34" charset="-120"/>
-              </a:rPr>
-              <a:t>Tooling — match the footprint, not the ambition</a:t>
-            </a:r>
-            <a:endParaRPr lang="en-US" sz="1200" dirty="0"/>
-          </a:p>
-        </p:txBody>
-      </p:sp>
-      <p:sp>
-        <p:nvSpPr>
-          <p:cNvPr id="22" name="Text 20"/>
-          <p:cNvSpPr/>
-          <p:nvPr/>
-        </p:nvSpPr>
-        <p:spPr>
-          <a:xfrm>
-            <a:off x="877824" y="4937760"/>
-            <a:ext cx="1737360" cy="384048"/>
-          </a:xfrm>
-          <a:prstGeom prst="rect">
-            <a:avLst/>
-          </a:prstGeom>
-          <a:noFill/>
-          <a:ln/>
-        </p:spPr>
-        <p:txBody>
-          <a:bodyPr wrap="square" lIns="0" tIns="0" rIns="0" bIns="0" rtlCol="0" anchor="ctr"/>
-          <a:lstStyle/>
-          <a:p>
-            <a:pPr indent="0" marL="0">
-              <a:buNone/>
-            </a:pPr>
-            <a:r>
-              <a:rPr lang="en-US" sz="1350" b="1" dirty="0">
-                <a:solidFill>
-                  <a:srgbClr val="2E8B7A"/>
-                </a:solidFill>
-                <a:latin typeface="Calibri" pitchFamily="34" charset="0"/>
-                <a:ea typeface="Calibri" pitchFamily="34" charset="-122"/>
-                <a:cs typeface="Calibri" pitchFamily="34" charset="-120"/>
-              </a:rPr>
-              <a:t>Native</a:t>
-            </a:r>
-            <a:endParaRPr lang="en-US" sz="1350" dirty="0"/>
-          </a:p>
-        </p:txBody>
-      </p:sp>
-      <p:sp>
-        <p:nvSpPr>
-          <p:cNvPr id="23" name="Text 21"/>
-          <p:cNvSpPr/>
-          <p:nvPr/>
-        </p:nvSpPr>
-        <p:spPr>
-          <a:xfrm>
-            <a:off x="2651760" y="4937760"/>
-            <a:ext cx="8595360" cy="384048"/>
-          </a:xfrm>
-          <a:prstGeom prst="rect">
-            <a:avLst/>
-          </a:prstGeom>
-          <a:noFill/>
-          <a:ln/>
-        </p:spPr>
-        <p:txBody>
-          <a:bodyPr wrap="square" lIns="0" tIns="0" rIns="0" bIns="0" rtlCol="0" anchor="ctr"/>
-          <a:lstStyle/>
-          <a:p>
-            <a:pPr indent="0" marL="0">
-              <a:buNone/>
-            </a:pPr>
-            <a:r>
-              <a:rPr lang="en-US" sz="1350" dirty="0">
-                <a:solidFill>
-                  <a:srgbClr val="5C6675"/>
-                </a:solidFill>
-                <a:latin typeface="Calibri" pitchFamily="34" charset="0"/>
-                <a:ea typeface="Calibri" pitchFamily="34" charset="-122"/>
-                <a:cs typeface="Calibri" pitchFamily="34" charset="-120"/>
-              </a:rPr>
-              <a:t>AWS Cost Explorer  ·  Azure Cost Management  ·  GCP Billing</a:t>
-            </a:r>
-            <a:endParaRPr lang="en-US" sz="1350" dirty="0"/>
-          </a:p>
-        </p:txBody>
-      </p:sp>
-      <p:sp>
-        <p:nvSpPr>
-          <p:cNvPr id="24" name="Text 22"/>
-          <p:cNvSpPr/>
-          <p:nvPr/>
-        </p:nvSpPr>
-        <p:spPr>
-          <a:xfrm>
-            <a:off x="877824" y="5349240"/>
-            <a:ext cx="1737360" cy="384048"/>
-          </a:xfrm>
-          <a:prstGeom prst="rect">
-            <a:avLst/>
-          </a:prstGeom>
-          <a:noFill/>
-          <a:ln/>
-        </p:spPr>
-        <p:txBody>
-          <a:bodyPr wrap="square" lIns="0" tIns="0" rIns="0" bIns="0" rtlCol="0" anchor="ctr"/>
-          <a:lstStyle/>
-          <a:p>
-            <a:pPr indent="0" marL="0">
-              <a:buNone/>
-            </a:pPr>
-            <a:r>
-              <a:rPr lang="en-US" sz="1350" b="1" dirty="0">
-                <a:solidFill>
-                  <a:srgbClr val="B87B18"/>
-                </a:solidFill>
-                <a:latin typeface="Calibri" pitchFamily="34" charset="0"/>
-                <a:ea typeface="Calibri" pitchFamily="34" charset="-122"/>
-                <a:cs typeface="Calibri" pitchFamily="34" charset="-120"/>
-              </a:rPr>
-              <a:t>Third-party</a:t>
-            </a:r>
-            <a:endParaRPr lang="en-US" sz="1350" dirty="0"/>
-          </a:p>
-        </p:txBody>
-      </p:sp>
-      <p:sp>
-        <p:nvSpPr>
-          <p:cNvPr id="25" name="Text 23"/>
-          <p:cNvSpPr/>
-          <p:nvPr/>
-        </p:nvSpPr>
-        <p:spPr>
-          <a:xfrm>
-            <a:off x="2651760" y="5349240"/>
-            <a:ext cx="8595360" cy="384048"/>
-          </a:xfrm>
-          <a:prstGeom prst="rect">
-            <a:avLst/>
-          </a:prstGeom>
-          <a:noFill/>
-          <a:ln/>
-        </p:spPr>
-        <p:txBody>
-          <a:bodyPr wrap="square" lIns="0" tIns="0" rIns="0" bIns="0" rtlCol="0" anchor="ctr"/>
-          <a:lstStyle/>
-          <a:p>
-            <a:pPr indent="0" marL="0">
-              <a:buNone/>
-            </a:pPr>
-            <a:r>
-              <a:rPr lang="en-US" sz="1350" dirty="0">
-                <a:solidFill>
-                  <a:srgbClr val="5C6675"/>
-                </a:solidFill>
-                <a:latin typeface="Calibri" pitchFamily="34" charset="0"/>
-                <a:ea typeface="Calibri" pitchFamily="34" charset="-122"/>
-                <a:cs typeface="Calibri" pitchFamily="34" charset="-120"/>
-              </a:rPr>
-              <a:t>CloudHealth  ·  Apptio  ·  Vantage  ·  nOps  ·  Finout  ·  CoreStack</a:t>
-            </a:r>
-            <a:endParaRPr lang="en-US" sz="1350" dirty="0"/>
-          </a:p>
-        </p:txBody>
-      </p:sp>
-      <p:sp>
-        <p:nvSpPr>
-          <p:cNvPr id="26" name="Text 24"/>
-          <p:cNvSpPr/>
-          <p:nvPr/>
-        </p:nvSpPr>
-        <p:spPr>
-          <a:xfrm>
-            <a:off x="877824" y="5760720"/>
-            <a:ext cx="1737360" cy="384048"/>
-          </a:xfrm>
-          <a:prstGeom prst="rect">
-            <a:avLst/>
-          </a:prstGeom>
-          <a:noFill/>
-          <a:ln/>
-        </p:spPr>
-        <p:txBody>
-          <a:bodyPr wrap="square" lIns="0" tIns="0" rIns="0" bIns="0" rtlCol="0" anchor="ctr"/>
-          <a:lstStyle/>
-          <a:p>
-            <a:pPr indent="0" marL="0">
-              <a:buNone/>
-            </a:pPr>
-            <a:r>
-              <a:rPr lang="en-US" sz="1350" b="1" dirty="0">
-                <a:solidFill>
-                  <a:srgbClr val="1B2430"/>
-                </a:solidFill>
-                <a:latin typeface="Calibri" pitchFamily="34" charset="0"/>
-                <a:ea typeface="Calibri" pitchFamily="34" charset="-122"/>
-                <a:cs typeface="Calibri" pitchFamily="34" charset="-120"/>
-              </a:rPr>
-              <a:t>Standard</a:t>
-            </a:r>
-            <a:endParaRPr lang="en-US" sz="1350" dirty="0"/>
-          </a:p>
-        </p:txBody>
-      </p:sp>
-      <p:sp>
-        <p:nvSpPr>
-          <p:cNvPr id="27" name="Text 25"/>
-          <p:cNvSpPr/>
-          <p:nvPr/>
-        </p:nvSpPr>
-        <p:spPr>
-          <a:xfrm>
-            <a:off x="2651760" y="5760720"/>
-            <a:ext cx="8595360" cy="384048"/>
-          </a:xfrm>
-          <a:prstGeom prst="rect">
-            <a:avLst/>
-          </a:prstGeom>
-          <a:noFill/>
-          <a:ln/>
-        </p:spPr>
-        <p:txBody>
-          <a:bodyPr wrap="square" lIns="0" tIns="0" rIns="0" bIns="0" rtlCol="0" anchor="ctr"/>
-          <a:lstStyle/>
-          <a:p>
-            <a:pPr indent="0" marL="0">
-              <a:buNone/>
-            </a:pPr>
-            <a:r>
-              <a:rPr lang="en-US" sz="1350" dirty="0">
-                <a:solidFill>
-                  <a:srgbClr val="5C6675"/>
-                </a:solidFill>
-                <a:latin typeface="Calibri" pitchFamily="34" charset="0"/>
-                <a:ea typeface="Calibri" pitchFamily="34" charset="-122"/>
-                <a:cs typeface="Calibri" pitchFamily="34" charset="-120"/>
-              </a:rPr>
-              <a:t>FOCUS-compliant platforms for multi-cloud reporting</a:t>
-            </a:r>
-            <a:endParaRPr lang="en-US" sz="1350" dirty="0"/>
+              <a:t>The goal is a better decision, not a lower bill — the lower bill is what a better decision looks like a quarter later.</a:t>
+            </a:r>
+            <a:endParaRPr lang="en-US" sz="1400" dirty="0"/>
           </a:p>
         </p:txBody>
       </p:sp>
@@ -17662,6 +18246,991 @@
 <file path=ppt/slides/slide23.xml><?xml version="1.0" encoding="utf-8"?>
 <p:sld xmlns:a="http://schemas.openxmlformats.org/drawingml/2006/main" xmlns:r="http://schemas.openxmlformats.org/officeDocument/2006/relationships" xmlns:p="http://schemas.openxmlformats.org/presentationml/2006/main">
   <p:cSld name="Slide 23">
+    <p:bg>
+      <p:bgPr>
+        <a:solidFill>
+          <a:srgbClr val="FFFFFF"/>
+        </a:solidFill>
+      </p:bgPr>
+    </p:bg>
+    <p:spTree>
+      <p:nvGrpSpPr>
+        <p:cNvPr id="1" name=""/>
+        <p:cNvGrpSpPr/>
+        <p:nvPr/>
+      </p:nvGrpSpPr>
+      <p:grpSpPr>
+        <a:xfrm>
+          <a:off x="0" y="0"/>
+          <a:ext cx="0" cy="0"/>
+          <a:chOff x="0" y="0"/>
+          <a:chExt cx="0" cy="0"/>
+        </a:xfrm>
+      </p:grpSpPr>
+      <p:sp>
+        <p:nvSpPr>
+          <p:cNvPr id="2" name="Text 0"/>
+          <p:cNvSpPr/>
+          <p:nvPr/>
+        </p:nvSpPr>
+        <p:spPr>
+          <a:xfrm>
+            <a:off x="548640" y="475488"/>
+            <a:ext cx="7315200" cy="256032"/>
+          </a:xfrm>
+          <a:prstGeom prst="rect">
+            <a:avLst/>
+          </a:prstGeom>
+          <a:noFill/>
+          <a:ln/>
+        </p:spPr>
+        <p:txBody>
+          <a:bodyPr wrap="square" lIns="0" tIns="0" rIns="0" bIns="0" rtlCol="0" anchor="ctr"/>
+          <a:lstStyle/>
+          <a:p>
+            <a:pPr indent="0" marL="0">
+              <a:buNone/>
+            </a:pPr>
+            <a:r>
+              <a:rPr lang="en-US" sz="1100" b="1" spc="220" kern="0" dirty="0">
+                <a:solidFill>
+                  <a:srgbClr val="E39B2C"/>
+                </a:solidFill>
+                <a:latin typeface="Calibri" pitchFamily="34" charset="0"/>
+                <a:ea typeface="Calibri" pitchFamily="34" charset="-122"/>
+                <a:cs typeface="Calibri" pitchFamily="34" charset="-120"/>
+              </a:rPr>
+              <a:t>THE PATH FORWARD</a:t>
+            </a:r>
+            <a:endParaRPr lang="en-US" sz="1100" dirty="0"/>
+          </a:p>
+        </p:txBody>
+      </p:sp>
+      <p:sp>
+        <p:nvSpPr>
+          <p:cNvPr id="3" name="Text 1"/>
+          <p:cNvSpPr/>
+          <p:nvPr/>
+        </p:nvSpPr>
+        <p:spPr>
+          <a:xfrm>
+            <a:off x="548640" y="768096"/>
+            <a:ext cx="11091672" cy="804672"/>
+          </a:xfrm>
+          <a:prstGeom prst="rect">
+            <a:avLst/>
+          </a:prstGeom>
+          <a:noFill/>
+          <a:ln/>
+        </p:spPr>
+        <p:txBody>
+          <a:bodyPr wrap="square" lIns="0" tIns="0" rIns="0" bIns="0" rtlCol="0" anchor="ctr"/>
+          <a:lstStyle/>
+          <a:p>
+            <a:pPr indent="0" marL="0">
+              <a:buNone/>
+            </a:pPr>
+            <a:r>
+              <a:rPr lang="en-US" sz="3100" b="1" dirty="0">
+                <a:solidFill>
+                  <a:srgbClr val="1B2430"/>
+                </a:solidFill>
+                <a:latin typeface="Cambria" pitchFamily="34" charset="0"/>
+                <a:ea typeface="Cambria" pitchFamily="34" charset="-122"/>
+                <a:cs typeface="Cambria" pitchFamily="34" charset="-120"/>
+              </a:rPr>
+              <a:t>Where to start</a:t>
+            </a:r>
+            <a:endParaRPr lang="en-US" sz="3100" dirty="0"/>
+          </a:p>
+        </p:txBody>
+      </p:sp>
+      <p:sp>
+        <p:nvSpPr>
+          <p:cNvPr id="4" name="Shape 2"/>
+          <p:cNvSpPr/>
+          <p:nvPr/>
+        </p:nvSpPr>
+        <p:spPr>
+          <a:xfrm>
+            <a:off x="548640" y="1783080"/>
+            <a:ext cx="2587752" cy="2423160"/>
+          </a:xfrm>
+          <a:prstGeom prst="roundRect">
+            <a:avLst>
+              <a:gd name="adj" fmla="val 3396"/>
+            </a:avLst>
+          </a:prstGeom>
+          <a:solidFill>
+            <a:srgbClr val="1F2936"/>
+          </a:solidFill>
+          <a:ln/>
+        </p:spPr>
+      </p:sp>
+      <p:sp>
+        <p:nvSpPr>
+          <p:cNvPr id="5" name="Text 3"/>
+          <p:cNvSpPr/>
+          <p:nvPr/>
+        </p:nvSpPr>
+        <p:spPr>
+          <a:xfrm>
+            <a:off x="804672" y="1965960"/>
+            <a:ext cx="1097280" cy="502920"/>
+          </a:xfrm>
+          <a:prstGeom prst="rect">
+            <a:avLst/>
+          </a:prstGeom>
+          <a:noFill/>
+          <a:ln/>
+        </p:spPr>
+        <p:txBody>
+          <a:bodyPr wrap="square" lIns="0" tIns="0" rIns="0" bIns="0" rtlCol="0" anchor="ctr"/>
+          <a:lstStyle/>
+          <a:p>
+            <a:pPr indent="0" marL="0">
+              <a:buNone/>
+            </a:pPr>
+            <a:r>
+              <a:rPr lang="en-US" sz="2800" b="1" dirty="0">
+                <a:solidFill>
+                  <a:srgbClr val="E39B2C"/>
+                </a:solidFill>
+                <a:latin typeface="Cambria" pitchFamily="34" charset="0"/>
+                <a:ea typeface="Cambria" pitchFamily="34" charset="-122"/>
+                <a:cs typeface="Cambria" pitchFamily="34" charset="-120"/>
+              </a:rPr>
+              <a:t>01</a:t>
+            </a:r>
+            <a:endParaRPr lang="en-US" sz="2800" dirty="0"/>
+          </a:p>
+        </p:txBody>
+      </p:sp>
+      <p:sp>
+        <p:nvSpPr>
+          <p:cNvPr id="6" name="Text 4"/>
+          <p:cNvSpPr/>
+          <p:nvPr/>
+        </p:nvSpPr>
+        <p:spPr>
+          <a:xfrm>
+            <a:off x="786384" y="2523744"/>
+            <a:ext cx="2139696" cy="786384"/>
+          </a:xfrm>
+          <a:prstGeom prst="rect">
+            <a:avLst/>
+          </a:prstGeom>
+          <a:noFill/>
+          <a:ln/>
+        </p:spPr>
+        <p:txBody>
+          <a:bodyPr wrap="square" lIns="0" tIns="0" rIns="0" bIns="0" rtlCol="0" anchor="t"/>
+          <a:lstStyle/>
+          <a:p>
+            <a:pPr indent="0" marL="0">
+              <a:lnSpc>
+                <a:spcPts val="2000"/>
+              </a:lnSpc>
+              <a:buNone/>
+            </a:pPr>
+            <a:r>
+              <a:rPr lang="en-US" sz="1500" b="1" dirty="0">
+                <a:solidFill>
+                  <a:srgbClr val="FFFFFF"/>
+                </a:solidFill>
+                <a:latin typeface="Cambria" pitchFamily="34" charset="0"/>
+                <a:ea typeface="Cambria" pitchFamily="34" charset="-122"/>
+                <a:cs typeface="Cambria" pitchFamily="34" charset="-120"/>
+              </a:rPr>
+              <a:t>Set the tagging standard</a:t>
+            </a:r>
+            <a:endParaRPr lang="en-US" sz="1500" dirty="0"/>
+          </a:p>
+        </p:txBody>
+      </p:sp>
+      <p:sp>
+        <p:nvSpPr>
+          <p:cNvPr id="7" name="Text 5"/>
+          <p:cNvSpPr/>
+          <p:nvPr/>
+        </p:nvSpPr>
+        <p:spPr>
+          <a:xfrm>
+            <a:off x="786384" y="3346704"/>
+            <a:ext cx="2139696" cy="749808"/>
+          </a:xfrm>
+          <a:prstGeom prst="rect">
+            <a:avLst/>
+          </a:prstGeom>
+          <a:noFill/>
+          <a:ln/>
+        </p:spPr>
+        <p:txBody>
+          <a:bodyPr wrap="square" lIns="0" tIns="0" rIns="0" bIns="0" rtlCol="0" anchor="t"/>
+          <a:lstStyle/>
+          <a:p>
+            <a:pPr indent="0" marL="0">
+              <a:lnSpc>
+                <a:spcPts val="1500"/>
+              </a:lnSpc>
+              <a:buNone/>
+            </a:pPr>
+            <a:r>
+              <a:rPr lang="en-US" sz="1200" dirty="0">
+                <a:solidFill>
+                  <a:srgbClr val="9EABBA"/>
+                </a:solidFill>
+                <a:latin typeface="Calibri" pitchFamily="34" charset="0"/>
+                <a:ea typeface="Calibri" pitchFamily="34" charset="-122"/>
+                <a:cs typeface="Calibri" pitchFamily="34" charset="-120"/>
+              </a:rPr>
+              <a:t>Agree a consistent taxonomy before investing in dashboards.</a:t>
+            </a:r>
+            <a:endParaRPr lang="en-US" sz="1200" dirty="0"/>
+          </a:p>
+        </p:txBody>
+      </p:sp>
+      <p:sp>
+        <p:nvSpPr>
+          <p:cNvPr id="8" name="Shape 6"/>
+          <p:cNvSpPr/>
+          <p:nvPr/>
+        </p:nvSpPr>
+        <p:spPr>
+          <a:xfrm>
+            <a:off x="3383280" y="1783080"/>
+            <a:ext cx="2587752" cy="2423160"/>
+          </a:xfrm>
+          <a:prstGeom prst="roundRect">
+            <a:avLst>
+              <a:gd name="adj" fmla="val 3396"/>
+            </a:avLst>
+          </a:prstGeom>
+          <a:solidFill>
+            <a:srgbClr val="F1F3F6"/>
+          </a:solidFill>
+          <a:ln/>
+        </p:spPr>
+      </p:sp>
+      <p:sp>
+        <p:nvSpPr>
+          <p:cNvPr id="9" name="Text 7"/>
+          <p:cNvSpPr/>
+          <p:nvPr/>
+        </p:nvSpPr>
+        <p:spPr>
+          <a:xfrm>
+            <a:off x="3639312" y="1965960"/>
+            <a:ext cx="1097280" cy="502920"/>
+          </a:xfrm>
+          <a:prstGeom prst="rect">
+            <a:avLst/>
+          </a:prstGeom>
+          <a:noFill/>
+          <a:ln/>
+        </p:spPr>
+        <p:txBody>
+          <a:bodyPr wrap="square" lIns="0" tIns="0" rIns="0" bIns="0" rtlCol="0" anchor="ctr"/>
+          <a:lstStyle/>
+          <a:p>
+            <a:pPr indent="0" marL="0">
+              <a:buNone/>
+            </a:pPr>
+            <a:r>
+              <a:rPr lang="en-US" sz="2800" b="1" dirty="0">
+                <a:solidFill>
+                  <a:srgbClr val="B9C2CD"/>
+                </a:solidFill>
+                <a:latin typeface="Cambria" pitchFamily="34" charset="0"/>
+                <a:ea typeface="Cambria" pitchFamily="34" charset="-122"/>
+                <a:cs typeface="Cambria" pitchFamily="34" charset="-120"/>
+              </a:rPr>
+              <a:t>02</a:t>
+            </a:r>
+            <a:endParaRPr lang="en-US" sz="2800" dirty="0"/>
+          </a:p>
+        </p:txBody>
+      </p:sp>
+      <p:sp>
+        <p:nvSpPr>
+          <p:cNvPr id="10" name="Text 8"/>
+          <p:cNvSpPr/>
+          <p:nvPr/>
+        </p:nvSpPr>
+        <p:spPr>
+          <a:xfrm>
+            <a:off x="3621024" y="2523744"/>
+            <a:ext cx="2139696" cy="786384"/>
+          </a:xfrm>
+          <a:prstGeom prst="rect">
+            <a:avLst/>
+          </a:prstGeom>
+          <a:noFill/>
+          <a:ln/>
+        </p:spPr>
+        <p:txBody>
+          <a:bodyPr wrap="square" lIns="0" tIns="0" rIns="0" bIns="0" rtlCol="0" anchor="t"/>
+          <a:lstStyle/>
+          <a:p>
+            <a:pPr indent="0" marL="0">
+              <a:lnSpc>
+                <a:spcPts val="2000"/>
+              </a:lnSpc>
+              <a:buNone/>
+            </a:pPr>
+            <a:r>
+              <a:rPr lang="en-US" sz="1500" b="1" dirty="0">
+                <a:solidFill>
+                  <a:srgbClr val="1B2430"/>
+                </a:solidFill>
+                <a:latin typeface="Cambria" pitchFamily="34" charset="0"/>
+                <a:ea typeface="Cambria" pitchFamily="34" charset="-122"/>
+                <a:cs typeface="Cambria" pitchFamily="34" charset="-120"/>
+              </a:rPr>
+              <a:t>Start with the biggest spend</a:t>
+            </a:r>
+            <a:endParaRPr lang="en-US" sz="1500" dirty="0"/>
+          </a:p>
+        </p:txBody>
+      </p:sp>
+      <p:sp>
+        <p:nvSpPr>
+          <p:cNvPr id="11" name="Text 9"/>
+          <p:cNvSpPr/>
+          <p:nvPr/>
+        </p:nvSpPr>
+        <p:spPr>
+          <a:xfrm>
+            <a:off x="3621024" y="3346704"/>
+            <a:ext cx="2139696" cy="749808"/>
+          </a:xfrm>
+          <a:prstGeom prst="rect">
+            <a:avLst/>
+          </a:prstGeom>
+          <a:noFill/>
+          <a:ln/>
+        </p:spPr>
+        <p:txBody>
+          <a:bodyPr wrap="square" lIns="0" tIns="0" rIns="0" bIns="0" rtlCol="0" anchor="t"/>
+          <a:lstStyle/>
+          <a:p>
+            <a:pPr indent="0" marL="0">
+              <a:lnSpc>
+                <a:spcPts val="1500"/>
+              </a:lnSpc>
+              <a:buNone/>
+            </a:pPr>
+            <a:r>
+              <a:rPr lang="en-US" sz="1200" dirty="0">
+                <a:solidFill>
+                  <a:srgbClr val="5C6675"/>
+                </a:solidFill>
+                <a:latin typeface="Calibri" pitchFamily="34" charset="0"/>
+                <a:ea typeface="Calibri" pitchFamily="34" charset="-122"/>
+                <a:cs typeface="Calibri" pitchFamily="34" charset="-120"/>
+              </a:rPr>
+              <a:t>Attack the largest categories first. Don't chase perfect granularity everywhere.</a:t>
+            </a:r>
+            <a:endParaRPr lang="en-US" sz="1200" dirty="0"/>
+          </a:p>
+        </p:txBody>
+      </p:sp>
+      <p:sp>
+        <p:nvSpPr>
+          <p:cNvPr id="12" name="Shape 10"/>
+          <p:cNvSpPr/>
+          <p:nvPr/>
+        </p:nvSpPr>
+        <p:spPr>
+          <a:xfrm>
+            <a:off x="6217920" y="1783080"/>
+            <a:ext cx="2587752" cy="2423160"/>
+          </a:xfrm>
+          <a:prstGeom prst="roundRect">
+            <a:avLst>
+              <a:gd name="adj" fmla="val 3396"/>
+            </a:avLst>
+          </a:prstGeom>
+          <a:solidFill>
+            <a:srgbClr val="F1F3F6"/>
+          </a:solidFill>
+          <a:ln/>
+        </p:spPr>
+      </p:sp>
+      <p:sp>
+        <p:nvSpPr>
+          <p:cNvPr id="13" name="Text 11"/>
+          <p:cNvSpPr/>
+          <p:nvPr/>
+        </p:nvSpPr>
+        <p:spPr>
+          <a:xfrm>
+            <a:off x="6473952" y="1965960"/>
+            <a:ext cx="1097280" cy="502920"/>
+          </a:xfrm>
+          <a:prstGeom prst="rect">
+            <a:avLst/>
+          </a:prstGeom>
+          <a:noFill/>
+          <a:ln/>
+        </p:spPr>
+        <p:txBody>
+          <a:bodyPr wrap="square" lIns="0" tIns="0" rIns="0" bIns="0" rtlCol="0" anchor="ctr"/>
+          <a:lstStyle/>
+          <a:p>
+            <a:pPr indent="0" marL="0">
+              <a:buNone/>
+            </a:pPr>
+            <a:r>
+              <a:rPr lang="en-US" sz="2800" b="1" dirty="0">
+                <a:solidFill>
+                  <a:srgbClr val="B9C2CD"/>
+                </a:solidFill>
+                <a:latin typeface="Cambria" pitchFamily="34" charset="0"/>
+                <a:ea typeface="Cambria" pitchFamily="34" charset="-122"/>
+                <a:cs typeface="Cambria" pitchFamily="34" charset="-120"/>
+              </a:rPr>
+              <a:t>03</a:t>
+            </a:r>
+            <a:endParaRPr lang="en-US" sz="2800" dirty="0"/>
+          </a:p>
+        </p:txBody>
+      </p:sp>
+      <p:sp>
+        <p:nvSpPr>
+          <p:cNvPr id="14" name="Text 12"/>
+          <p:cNvSpPr/>
+          <p:nvPr/>
+        </p:nvSpPr>
+        <p:spPr>
+          <a:xfrm>
+            <a:off x="6455664" y="2523744"/>
+            <a:ext cx="2139696" cy="786384"/>
+          </a:xfrm>
+          <a:prstGeom prst="rect">
+            <a:avLst/>
+          </a:prstGeom>
+          <a:noFill/>
+          <a:ln/>
+        </p:spPr>
+        <p:txBody>
+          <a:bodyPr wrap="square" lIns="0" tIns="0" rIns="0" bIns="0" rtlCol="0" anchor="t"/>
+          <a:lstStyle/>
+          <a:p>
+            <a:pPr indent="0" marL="0">
+              <a:lnSpc>
+                <a:spcPts val="2000"/>
+              </a:lnSpc>
+              <a:buNone/>
+            </a:pPr>
+            <a:r>
+              <a:rPr lang="en-US" sz="1500" b="1" dirty="0">
+                <a:solidFill>
+                  <a:srgbClr val="1B2430"/>
+                </a:solidFill>
+                <a:latin typeface="Cambria" pitchFamily="34" charset="0"/>
+                <a:ea typeface="Cambria" pitchFamily="34" charset="-122"/>
+                <a:cs typeface="Cambria" pitchFamily="34" charset="-120"/>
+              </a:rPr>
+              <a:t>Get finance and engineering talking</a:t>
+            </a:r>
+            <a:endParaRPr lang="en-US" sz="1500" dirty="0"/>
+          </a:p>
+        </p:txBody>
+      </p:sp>
+      <p:sp>
+        <p:nvSpPr>
+          <p:cNvPr id="15" name="Text 13"/>
+          <p:cNvSpPr/>
+          <p:nvPr/>
+        </p:nvSpPr>
+        <p:spPr>
+          <a:xfrm>
+            <a:off x="6455664" y="3346704"/>
+            <a:ext cx="2139696" cy="749808"/>
+          </a:xfrm>
+          <a:prstGeom prst="rect">
+            <a:avLst/>
+          </a:prstGeom>
+          <a:noFill/>
+          <a:ln/>
+        </p:spPr>
+        <p:txBody>
+          <a:bodyPr wrap="square" lIns="0" tIns="0" rIns="0" bIns="0" rtlCol="0" anchor="t"/>
+          <a:lstStyle/>
+          <a:p>
+            <a:pPr indent="0" marL="0">
+              <a:lnSpc>
+                <a:spcPts val="1500"/>
+              </a:lnSpc>
+              <a:buNone/>
+            </a:pPr>
+            <a:r>
+              <a:rPr lang="en-US" sz="1200" dirty="0">
+                <a:solidFill>
+                  <a:srgbClr val="5C6675"/>
+                </a:solidFill>
+                <a:latin typeface="Calibri" pitchFamily="34" charset="0"/>
+                <a:ea typeface="Calibri" pitchFamily="34" charset="-122"/>
+                <a:cs typeface="Calibri" pitchFamily="34" charset="-120"/>
+              </a:rPr>
+              <a:t>Bring both into the conversation early, not as an afterthought.</a:t>
+            </a:r>
+            <a:endParaRPr lang="en-US" sz="1200" dirty="0"/>
+          </a:p>
+        </p:txBody>
+      </p:sp>
+      <p:sp>
+        <p:nvSpPr>
+          <p:cNvPr id="16" name="Shape 14"/>
+          <p:cNvSpPr/>
+          <p:nvPr/>
+        </p:nvSpPr>
+        <p:spPr>
+          <a:xfrm>
+            <a:off x="9052560" y="1783080"/>
+            <a:ext cx="2587752" cy="2423160"/>
+          </a:xfrm>
+          <a:prstGeom prst="roundRect">
+            <a:avLst>
+              <a:gd name="adj" fmla="val 3396"/>
+            </a:avLst>
+          </a:prstGeom>
+          <a:solidFill>
+            <a:srgbClr val="F1F3F6"/>
+          </a:solidFill>
+          <a:ln/>
+        </p:spPr>
+      </p:sp>
+      <p:sp>
+        <p:nvSpPr>
+          <p:cNvPr id="17" name="Text 15"/>
+          <p:cNvSpPr/>
+          <p:nvPr/>
+        </p:nvSpPr>
+        <p:spPr>
+          <a:xfrm>
+            <a:off x="9308592" y="1965960"/>
+            <a:ext cx="1097280" cy="502920"/>
+          </a:xfrm>
+          <a:prstGeom prst="rect">
+            <a:avLst/>
+          </a:prstGeom>
+          <a:noFill/>
+          <a:ln/>
+        </p:spPr>
+        <p:txBody>
+          <a:bodyPr wrap="square" lIns="0" tIns="0" rIns="0" bIns="0" rtlCol="0" anchor="ctr"/>
+          <a:lstStyle/>
+          <a:p>
+            <a:pPr indent="0" marL="0">
+              <a:buNone/>
+            </a:pPr>
+            <a:r>
+              <a:rPr lang="en-US" sz="2800" b="1" dirty="0">
+                <a:solidFill>
+                  <a:srgbClr val="B9C2CD"/>
+                </a:solidFill>
+                <a:latin typeface="Cambria" pitchFamily="34" charset="0"/>
+                <a:ea typeface="Cambria" pitchFamily="34" charset="-122"/>
+                <a:cs typeface="Cambria" pitchFamily="34" charset="-120"/>
+              </a:rPr>
+              <a:t>04</a:t>
+            </a:r>
+            <a:endParaRPr lang="en-US" sz="2800" dirty="0"/>
+          </a:p>
+        </p:txBody>
+      </p:sp>
+      <p:sp>
+        <p:nvSpPr>
+          <p:cNvPr id="18" name="Text 16"/>
+          <p:cNvSpPr/>
+          <p:nvPr/>
+        </p:nvSpPr>
+        <p:spPr>
+          <a:xfrm>
+            <a:off x="9290304" y="2523744"/>
+            <a:ext cx="2139696" cy="786384"/>
+          </a:xfrm>
+          <a:prstGeom prst="rect">
+            <a:avLst/>
+          </a:prstGeom>
+          <a:noFill/>
+          <a:ln/>
+        </p:spPr>
+        <p:txBody>
+          <a:bodyPr wrap="square" lIns="0" tIns="0" rIns="0" bIns="0" rtlCol="0" anchor="t"/>
+          <a:lstStyle/>
+          <a:p>
+            <a:pPr indent="0" marL="0">
+              <a:lnSpc>
+                <a:spcPts val="2000"/>
+              </a:lnSpc>
+              <a:buNone/>
+            </a:pPr>
+            <a:r>
+              <a:rPr lang="en-US" sz="1500" b="1" dirty="0">
+                <a:solidFill>
+                  <a:srgbClr val="1B2430"/>
+                </a:solidFill>
+                <a:latin typeface="Cambria" pitchFamily="34" charset="0"/>
+                <a:ea typeface="Cambria" pitchFamily="34" charset="-122"/>
+                <a:cs typeface="Cambria" pitchFamily="34" charset="-120"/>
+              </a:rPr>
+              <a:t>Set guardrails early</a:t>
+            </a:r>
+            <a:endParaRPr lang="en-US" sz="1500" dirty="0"/>
+          </a:p>
+        </p:txBody>
+      </p:sp>
+      <p:sp>
+        <p:nvSpPr>
+          <p:cNvPr id="19" name="Text 17"/>
+          <p:cNvSpPr/>
+          <p:nvPr/>
+        </p:nvSpPr>
+        <p:spPr>
+          <a:xfrm>
+            <a:off x="9290304" y="3346704"/>
+            <a:ext cx="2139696" cy="749808"/>
+          </a:xfrm>
+          <a:prstGeom prst="rect">
+            <a:avLst/>
+          </a:prstGeom>
+          <a:noFill/>
+          <a:ln/>
+        </p:spPr>
+        <p:txBody>
+          <a:bodyPr wrap="square" lIns="0" tIns="0" rIns="0" bIns="0" rtlCol="0" anchor="t"/>
+          <a:lstStyle/>
+          <a:p>
+            <a:pPr indent="0" marL="0">
+              <a:lnSpc>
+                <a:spcPts val="1500"/>
+              </a:lnSpc>
+              <a:buNone/>
+            </a:pPr>
+            <a:r>
+              <a:rPr lang="en-US" sz="1200" dirty="0">
+                <a:solidFill>
+                  <a:srgbClr val="5C6675"/>
+                </a:solidFill>
+                <a:latin typeface="Calibri" pitchFamily="34" charset="0"/>
+                <a:ea typeface="Calibri" pitchFamily="34" charset="-122"/>
+                <a:cs typeface="Calibri" pitchFamily="34" charset="-120"/>
+              </a:rPr>
+              <a:t>Owners, budget thresholds and quotas cost little to add — and stop the expensive surprises.</a:t>
+            </a:r>
+            <a:endParaRPr lang="en-US" sz="1200" dirty="0"/>
+          </a:p>
+        </p:txBody>
+      </p:sp>
+      <p:sp>
+        <p:nvSpPr>
+          <p:cNvPr id="20" name="Shape 18"/>
+          <p:cNvSpPr/>
+          <p:nvPr/>
+        </p:nvSpPr>
+        <p:spPr>
+          <a:xfrm>
+            <a:off x="548640" y="4434840"/>
+            <a:ext cx="11091672" cy="1874520"/>
+          </a:xfrm>
+          <a:prstGeom prst="roundRect">
+            <a:avLst>
+              <a:gd name="adj" fmla="val 4390"/>
+            </a:avLst>
+          </a:prstGeom>
+          <a:solidFill>
+            <a:srgbClr val="F1F3F6"/>
+          </a:solidFill>
+          <a:ln/>
+        </p:spPr>
+      </p:sp>
+      <p:sp>
+        <p:nvSpPr>
+          <p:cNvPr id="21" name="Text 19"/>
+          <p:cNvSpPr/>
+          <p:nvPr/>
+        </p:nvSpPr>
+        <p:spPr>
+          <a:xfrm>
+            <a:off x="877824" y="4572000"/>
+            <a:ext cx="6035040" cy="292608"/>
+          </a:xfrm>
+          <a:prstGeom prst="rect">
+            <a:avLst/>
+          </a:prstGeom>
+          <a:noFill/>
+          <a:ln/>
+        </p:spPr>
+        <p:txBody>
+          <a:bodyPr wrap="square" lIns="0" tIns="0" rIns="0" bIns="0" rtlCol="0" anchor="ctr"/>
+          <a:lstStyle/>
+          <a:p>
+            <a:pPr indent="0" marL="0">
+              <a:buNone/>
+            </a:pPr>
+            <a:r>
+              <a:rPr lang="en-US" sz="1200" b="1" spc="180" kern="0" dirty="0">
+                <a:solidFill>
+                  <a:srgbClr val="5C6675"/>
+                </a:solidFill>
+                <a:latin typeface="Calibri" pitchFamily="34" charset="0"/>
+                <a:ea typeface="Calibri" pitchFamily="34" charset="-122"/>
+                <a:cs typeface="Calibri" pitchFamily="34" charset="-120"/>
+              </a:rPr>
+              <a:t>Tooling — match the footprint, not the ambition</a:t>
+            </a:r>
+            <a:endParaRPr lang="en-US" sz="1200" dirty="0"/>
+          </a:p>
+        </p:txBody>
+      </p:sp>
+      <p:sp>
+        <p:nvSpPr>
+          <p:cNvPr id="22" name="Text 20"/>
+          <p:cNvSpPr/>
+          <p:nvPr/>
+        </p:nvSpPr>
+        <p:spPr>
+          <a:xfrm>
+            <a:off x="877824" y="4937760"/>
+            <a:ext cx="1737360" cy="384048"/>
+          </a:xfrm>
+          <a:prstGeom prst="rect">
+            <a:avLst/>
+          </a:prstGeom>
+          <a:noFill/>
+          <a:ln/>
+        </p:spPr>
+        <p:txBody>
+          <a:bodyPr wrap="square" lIns="0" tIns="0" rIns="0" bIns="0" rtlCol="0" anchor="ctr"/>
+          <a:lstStyle/>
+          <a:p>
+            <a:pPr indent="0" marL="0">
+              <a:buNone/>
+            </a:pPr>
+            <a:r>
+              <a:rPr lang="en-US" sz="1350" b="1" dirty="0">
+                <a:solidFill>
+                  <a:srgbClr val="2E8B7A"/>
+                </a:solidFill>
+                <a:latin typeface="Calibri" pitchFamily="34" charset="0"/>
+                <a:ea typeface="Calibri" pitchFamily="34" charset="-122"/>
+                <a:cs typeface="Calibri" pitchFamily="34" charset="-120"/>
+              </a:rPr>
+              <a:t>Native</a:t>
+            </a:r>
+            <a:endParaRPr lang="en-US" sz="1350" dirty="0"/>
+          </a:p>
+        </p:txBody>
+      </p:sp>
+      <p:sp>
+        <p:nvSpPr>
+          <p:cNvPr id="23" name="Text 21"/>
+          <p:cNvSpPr/>
+          <p:nvPr/>
+        </p:nvSpPr>
+        <p:spPr>
+          <a:xfrm>
+            <a:off x="2651760" y="4937760"/>
+            <a:ext cx="8595360" cy="384048"/>
+          </a:xfrm>
+          <a:prstGeom prst="rect">
+            <a:avLst/>
+          </a:prstGeom>
+          <a:noFill/>
+          <a:ln/>
+        </p:spPr>
+        <p:txBody>
+          <a:bodyPr wrap="square" lIns="0" tIns="0" rIns="0" bIns="0" rtlCol="0" anchor="ctr"/>
+          <a:lstStyle/>
+          <a:p>
+            <a:pPr indent="0" marL="0">
+              <a:buNone/>
+            </a:pPr>
+            <a:r>
+              <a:rPr lang="en-US" sz="1350" dirty="0">
+                <a:solidFill>
+                  <a:srgbClr val="5C6675"/>
+                </a:solidFill>
+                <a:latin typeface="Calibri" pitchFamily="34" charset="0"/>
+                <a:ea typeface="Calibri" pitchFamily="34" charset="-122"/>
+                <a:cs typeface="Calibri" pitchFamily="34" charset="-120"/>
+              </a:rPr>
+              <a:t>AWS Cost Explorer  ·  Azure Cost Management  ·  GCP Billing</a:t>
+            </a:r>
+            <a:endParaRPr lang="en-US" sz="1350" dirty="0"/>
+          </a:p>
+        </p:txBody>
+      </p:sp>
+      <p:sp>
+        <p:nvSpPr>
+          <p:cNvPr id="24" name="Text 22"/>
+          <p:cNvSpPr/>
+          <p:nvPr/>
+        </p:nvSpPr>
+        <p:spPr>
+          <a:xfrm>
+            <a:off x="877824" y="5349240"/>
+            <a:ext cx="1737360" cy="384048"/>
+          </a:xfrm>
+          <a:prstGeom prst="rect">
+            <a:avLst/>
+          </a:prstGeom>
+          <a:noFill/>
+          <a:ln/>
+        </p:spPr>
+        <p:txBody>
+          <a:bodyPr wrap="square" lIns="0" tIns="0" rIns="0" bIns="0" rtlCol="0" anchor="ctr"/>
+          <a:lstStyle/>
+          <a:p>
+            <a:pPr indent="0" marL="0">
+              <a:buNone/>
+            </a:pPr>
+            <a:r>
+              <a:rPr lang="en-US" sz="1350" b="1" dirty="0">
+                <a:solidFill>
+                  <a:srgbClr val="B87B18"/>
+                </a:solidFill>
+                <a:latin typeface="Calibri" pitchFamily="34" charset="0"/>
+                <a:ea typeface="Calibri" pitchFamily="34" charset="-122"/>
+                <a:cs typeface="Calibri" pitchFamily="34" charset="-120"/>
+              </a:rPr>
+              <a:t>Third-party</a:t>
+            </a:r>
+            <a:endParaRPr lang="en-US" sz="1350" dirty="0"/>
+          </a:p>
+        </p:txBody>
+      </p:sp>
+      <p:sp>
+        <p:nvSpPr>
+          <p:cNvPr id="25" name="Text 23"/>
+          <p:cNvSpPr/>
+          <p:nvPr/>
+        </p:nvSpPr>
+        <p:spPr>
+          <a:xfrm>
+            <a:off x="2651760" y="5349240"/>
+            <a:ext cx="8595360" cy="384048"/>
+          </a:xfrm>
+          <a:prstGeom prst="rect">
+            <a:avLst/>
+          </a:prstGeom>
+          <a:noFill/>
+          <a:ln/>
+        </p:spPr>
+        <p:txBody>
+          <a:bodyPr wrap="square" lIns="0" tIns="0" rIns="0" bIns="0" rtlCol="0" anchor="ctr"/>
+          <a:lstStyle/>
+          <a:p>
+            <a:pPr indent="0" marL="0">
+              <a:buNone/>
+            </a:pPr>
+            <a:r>
+              <a:rPr lang="en-US" sz="1350" dirty="0">
+                <a:solidFill>
+                  <a:srgbClr val="5C6675"/>
+                </a:solidFill>
+                <a:latin typeface="Calibri" pitchFamily="34" charset="0"/>
+                <a:ea typeface="Calibri" pitchFamily="34" charset="-122"/>
+                <a:cs typeface="Calibri" pitchFamily="34" charset="-120"/>
+              </a:rPr>
+              <a:t>CloudHealth  ·  Apptio  ·  Vantage  ·  nOps  ·  Finout  ·  CoreStack</a:t>
+            </a:r>
+            <a:endParaRPr lang="en-US" sz="1350" dirty="0"/>
+          </a:p>
+        </p:txBody>
+      </p:sp>
+      <p:sp>
+        <p:nvSpPr>
+          <p:cNvPr id="26" name="Text 24"/>
+          <p:cNvSpPr/>
+          <p:nvPr/>
+        </p:nvSpPr>
+        <p:spPr>
+          <a:xfrm>
+            <a:off x="877824" y="5760720"/>
+            <a:ext cx="1737360" cy="384048"/>
+          </a:xfrm>
+          <a:prstGeom prst="rect">
+            <a:avLst/>
+          </a:prstGeom>
+          <a:noFill/>
+          <a:ln/>
+        </p:spPr>
+        <p:txBody>
+          <a:bodyPr wrap="square" lIns="0" tIns="0" rIns="0" bIns="0" rtlCol="0" anchor="ctr"/>
+          <a:lstStyle/>
+          <a:p>
+            <a:pPr indent="0" marL="0">
+              <a:buNone/>
+            </a:pPr>
+            <a:r>
+              <a:rPr lang="en-US" sz="1350" b="1" dirty="0">
+                <a:solidFill>
+                  <a:srgbClr val="1B2430"/>
+                </a:solidFill>
+                <a:latin typeface="Calibri" pitchFamily="34" charset="0"/>
+                <a:ea typeface="Calibri" pitchFamily="34" charset="-122"/>
+                <a:cs typeface="Calibri" pitchFamily="34" charset="-120"/>
+              </a:rPr>
+              <a:t>Standard</a:t>
+            </a:r>
+            <a:endParaRPr lang="en-US" sz="1350" dirty="0"/>
+          </a:p>
+        </p:txBody>
+      </p:sp>
+      <p:sp>
+        <p:nvSpPr>
+          <p:cNvPr id="27" name="Text 25"/>
+          <p:cNvSpPr/>
+          <p:nvPr/>
+        </p:nvSpPr>
+        <p:spPr>
+          <a:xfrm>
+            <a:off x="2651760" y="5760720"/>
+            <a:ext cx="8595360" cy="384048"/>
+          </a:xfrm>
+          <a:prstGeom prst="rect">
+            <a:avLst/>
+          </a:prstGeom>
+          <a:noFill/>
+          <a:ln/>
+        </p:spPr>
+        <p:txBody>
+          <a:bodyPr wrap="square" lIns="0" tIns="0" rIns="0" bIns="0" rtlCol="0" anchor="ctr"/>
+          <a:lstStyle/>
+          <a:p>
+            <a:pPr indent="0" marL="0">
+              <a:buNone/>
+            </a:pPr>
+            <a:r>
+              <a:rPr lang="en-US" sz="1350" dirty="0">
+                <a:solidFill>
+                  <a:srgbClr val="5C6675"/>
+                </a:solidFill>
+                <a:latin typeface="Calibri" pitchFamily="34" charset="0"/>
+                <a:ea typeface="Calibri" pitchFamily="34" charset="-122"/>
+                <a:cs typeface="Calibri" pitchFamily="34" charset="-120"/>
+              </a:rPr>
+              <a:t>FOCUS-compliant platforms for multi-cloud reporting</a:t>
+            </a:r>
+            <a:endParaRPr lang="en-US" sz="1350" dirty="0"/>
+          </a:p>
+        </p:txBody>
+      </p:sp>
+    </p:spTree>
+  </p:cSld>
+  <p:clrMapOvr>
+    <a:masterClrMapping/>
+  </p:clrMapOvr>
+</p:sld>
+</file>
+
+<file path=ppt/slides/slide24.xml><?xml version="1.0" encoding="utf-8"?>
+<p:sld xmlns:a="http://schemas.openxmlformats.org/drawingml/2006/main" xmlns:r="http://schemas.openxmlformats.org/officeDocument/2006/relationships" xmlns:p="http://schemas.openxmlformats.org/presentationml/2006/main">
+  <p:cSld name="Slide 24">
     <p:bg>
       <p:bgPr>
         <a:solidFill>
@@ -18461,9 +20030,9 @@
 </p:sld>
 </file>
 
-<file path=ppt/slides/slide24.xml><?xml version="1.0" encoding="utf-8"?>
+<file path=ppt/slides/slide25.xml><?xml version="1.0" encoding="utf-8"?>
 <p:sld xmlns:a="http://schemas.openxmlformats.org/drawingml/2006/main" xmlns:r="http://schemas.openxmlformats.org/officeDocument/2006/relationships" xmlns:p="http://schemas.openxmlformats.org/presentationml/2006/main">
-  <p:cSld name="Slide 24">
+  <p:cSld name="Slide 25">
     <p:bg>
       <p:bgPr>
         <a:solidFill>

--- a/presentations/finops-gaining-visibility.pptx
+++ b/presentations/finops-gaining-visibility.pptx
@@ -30,9 +30,10 @@
     <p:sldId id="278" r:id="rId24"/>
     <p:sldId id="279" r:id="rId25"/>
     <p:sldId id="280" r:id="rId26"/>
+    <p:sldId id="281" r:id="rId27"/>
   </p:sldIdLst>
   <p:notesMasterIdLst>
-    <p:notesMasterId r:id="rId27"/>
+    <p:notesMasterId r:id="rId28"/>
   </p:notesMasterIdLst>
   <p:sldSz cx="12192000" cy="6858000"/>
   <p:notesSz cx="6858000" cy="12192000"/>
@@ -1758,7 +1759,7 @@
           <a:p>
             <a:r>
               <a:rPr lang="en-US" dirty="0"/>
-              <a:t>The operating-model slide, and the honest self-check for whoever runs this practice. Everything earlier in the deck produces findings; this is about whether findings become changes. Walk the chain and stop on the second box. A finding with no named owner and no date does not fail loudly — it simply sits in a dashboard being accurate, which is the most common way a cost programme dies. Sizing and dating each item is what turns a report into a queue of work someone can be asked about. The measures on the right are the ones to report upward, and they are deliberately not savings numbers. Adoption — the share of findings that acquired an owner and a date — predicts savings; accuracy does not. Realized against identified is the pair that keeps everyone honest, because identified savings are a forecast and only realized savings appear on an invoice. The build-for-engineers point is worth saying plainly: an engineer wants the three things worth fixing this sprint, not a complete and beautiful cost model. Serve that, and the finance-grade report improves anyway, because the underlying data gets used and therefore gets corrected.</a:t>
+              <a:t>The slide that makes the whole deck concrete for anyone running AI workloads, because AI is where these failures are arriving fastest. Same three gaps as cloud a decade ago — no owner, no attribution, no ceiling — compressed into about eighteen months. Lead with the third tile, not the waste figure. Four in five organizations need a day or more to trace an AI spike to its source, and roughly one in five manage it within hours. That converts an abstract governance ask into a measurable operational problem — time to attribute — which is a number an engineering leader can be held to and can move. Be straight about the source when asked, and say it before someone else does: this is vendor-sponsored research from a company selling AI cost tooling, and the waste figure is what respondents estimated rather than anything measured. The ownership, surprise-bill and diagnosis-time findings are the durable ones; the 26% is illustrative. Using it honestly is more persuasive than over-claiming it. The right-hand card is the technical consequence and the reason a generic cost platform is not enough here: AI waste lives in prompt design, model selection and retry behaviour, none of which appears in a resource-level bill. Naming the caller needs per-consumer token attribution — gateway subscription keys or application-level attributes.</a:t>
             </a:r>
             <a:endParaRPr lang="en-US" dirty="0"/>
           </a:p>
@@ -1846,7 +1847,7 @@
           <a:p>
             <a:r>
               <a:rPr lang="en-US" dirty="0"/>
-              <a:t>This is the ask. Step 1 is highlighted because it is the only one that cannot be parallelized — everything downstream degrades if the taxonomy is still in flux. Steps 2 and 4 are both arguments against over-engineering: pick the top spend categories and the tooling that matches the estate we actually have, not the one we might have in three years.</a:t>
+              <a:t>The operating-model slide, and the honest self-check for whoever runs this practice. Everything earlier in the deck produces findings; this is about whether findings become changes. Walk the chain and stop on the second box. A finding with no named owner and no date does not fail loudly — it simply sits in a dashboard being accurate, which is the most common way a cost programme dies. Sizing and dating each item is what turns a report into a queue of work someone can be asked about. The measures on the right are the ones to report upward, and they are deliberately not savings numbers. Adoption — the share of findings that acquired an owner and a date — predicts savings; accuracy does not. Realized against identified is the pair that keeps everyone honest, because identified savings are a forecast and only realized savings appear on an invoice. The build-for-engineers point is worth saying plainly: an engineer wants the three things worth fixing this sprint, not a complete and beautiful cost model. Serve that, and the finance-grade report improves anyway, because the underlying data gets used and therefore gets corrected.</a:t>
             </a:r>
             <a:endParaRPr lang="en-US" dirty="0"/>
           </a:p>
@@ -1934,7 +1935,7 @@
           <a:p>
             <a:r>
               <a:rPr lang="en-US" dirty="0"/>
-              <a:t>Close on the causal chain rather than a summary of slides. Each link is a separate management commitment: allocation data, published ownership, cost surfaced in the engineering workflow, and a review cadence that keeps it alive. Ask for the first two today; the rest follow from them.</a:t>
+              <a:t>This is the ask. Step 1 is highlighted because it is the only one that cannot be parallelized — everything downstream degrades if the taxonomy is still in flux. Steps 2 and 4 are both arguments against over-engineering: pick the top spend categories and the tooling that matches the estate we actually have, not the one we might have in three years.</a:t>
             </a:r>
             <a:endParaRPr lang="en-US" dirty="0"/>
           </a:p>
@@ -2022,7 +2023,7 @@
           <a:p>
             <a:r>
               <a:rPr lang="en-US" dirty="0"/>
-              <a:t>Anticipate three questions. What will this cost — mostly effort, not licences, if we stay on native tooling. How long until we see savings — allocation coverage improves in weeks, targeted savings follow the first full month of clean data. Who owns it — name the tagging owner and the review cadence before leaving the room, or nothing on the previous slides happens.</a:t>
+              <a:t>Close on the causal chain rather than a summary of slides. Each link is a separate management commitment: allocation data, published ownership, cost surfaced in the engineering workflow, and a review cadence that keeps it alive. Ask for the first two today; the rest follow from them.</a:t>
             </a:r>
             <a:endParaRPr lang="en-US" dirty="0"/>
           </a:p>
@@ -2046,6 +2047,94 @@
             <a:fld id="{F7021451-1387-4CA6-816F-3879F97B5CBC}" type="slidenum">
               <a:rPr lang="en-US"/>
               <a:t>25</a:t>
+            </a:fld>
+            <a:endParaRPr lang="en-US"/>
+          </a:p>
+        </p:txBody>
+      </p:sp>
+    </p:spTree>
+    <p:extLst>
+      <p:ext uri="{BB962C8B-B14F-4D97-AF65-F5344CB8AC3E}">
+        <p14:creationId xmlns:p14="http://schemas.microsoft.com/office/powerpoint/2010/main" val="1024086991"/>
+      </p:ext>
+    </p:extLst>
+  </p:cSld>
+  <p:clrMapOvr>
+    <a:masterClrMapping/>
+  </p:clrMapOvr>
+</p:notes>
+</file>
+
+<file path=ppt/notesSlides/notesSlide26.xml><?xml version="1.0" encoding="utf-8"?>
+<p:notes xmlns:a="http://schemas.openxmlformats.org/drawingml/2006/main" xmlns:r="http://schemas.openxmlformats.org/officeDocument/2006/relationships" xmlns:p="http://schemas.openxmlformats.org/presentationml/2006/main">
+  <p:cSld>
+    <p:spTree>
+      <p:nvGrpSpPr>
+        <p:cNvPr id="1" name=""/>
+        <p:cNvGrpSpPr/>
+        <p:nvPr/>
+      </p:nvGrpSpPr>
+      <p:grpSpPr>
+        <a:xfrm>
+          <a:off x="0" y="0"/>
+          <a:ext cx="0" cy="0"/>
+          <a:chOff x="0" y="0"/>
+          <a:chExt cx="0" cy="0"/>
+        </a:xfrm>
+      </p:grpSpPr>
+      <p:sp>
+        <p:nvSpPr>
+          <p:cNvPr id="2" name="Slide Image Placeholder 1"/>
+          <p:cNvSpPr>
+            <a:spLocks noGrp="1" noRot="1" noChangeAspect="1"/>
+          </p:cNvSpPr>
+          <p:nvPr>
+            <p:ph type="sldImg"/>
+          </p:nvPr>
+        </p:nvSpPr>
+        <p:spPr/>
+      </p:sp>
+      <p:sp>
+        <p:nvSpPr>
+          <p:cNvPr id="3" name="Notes Placeholder 2"/>
+          <p:cNvSpPr>
+            <a:spLocks noGrp="1"/>
+          </p:cNvSpPr>
+          <p:nvPr>
+            <p:ph type="body" idx="1"/>
+          </p:nvPr>
+        </p:nvSpPr>
+        <p:spPr/>
+        <p:txBody>
+          <a:bodyPr/>
+          <a:lstStyle/>
+          <a:p>
+            <a:r>
+              <a:rPr lang="en-US" dirty="0"/>
+              <a:t>Anticipate three questions. What will this cost — mostly effort, not licences, if we stay on native tooling. How long until we see savings — allocation coverage improves in weeks, targeted savings follow the first full month of clean data. Who owns it — name the tagging owner and the review cadence before leaving the room, or nothing on the previous slides happens.</a:t>
+            </a:r>
+            <a:endParaRPr lang="en-US" dirty="0"/>
+          </a:p>
+        </p:txBody>
+      </p:sp>
+      <p:sp>
+        <p:nvSpPr>
+          <p:cNvPr id="4" name="Slide Number Placeholder 3"/>
+          <p:cNvSpPr>
+            <a:spLocks noGrp="1"/>
+          </p:cNvSpPr>
+          <p:nvPr>
+            <p:ph type="sldNum" sz="quarter" idx="10"/>
+          </p:nvPr>
+        </p:nvSpPr>
+        <p:spPr/>
+        <p:txBody>
+          <a:bodyPr/>
+          <a:lstStyle/>
+          <a:p>
+            <a:fld id="{F7021451-1387-4CA6-816F-3879F97B5CBC}" type="slidenum">
+              <a:rPr lang="en-US"/>
+              <a:t>26</a:t>
             </a:fld>
             <a:endParaRPr lang="en-US"/>
           </a:p>
@@ -16820,7 +16909,7 @@
                 <a:ea typeface="Calibri" pitchFamily="34" charset="-122"/>
                 <a:cs typeface="Calibri" pitchFamily="34" charset="-120"/>
               </a:rPr>
-              <a:t>OPERATE — RUNNING THE PRACTICE</a:t>
+              <a:t>GOVERNANCE — THE AI LINE</a:t>
             </a:r>
             <a:endParaRPr lang="en-US" sz="1100" dirty="0"/>
           </a:p>
@@ -16859,7 +16948,7 @@
                 <a:ea typeface="Cambria" pitchFamily="34" charset="-122"/>
                 <a:cs typeface="Cambria" pitchFamily="34" charset="-120"/>
               </a:rPr>
-              <a:t>Ship the insight, don't just publish it</a:t>
+              <a:t>AI is repeating the cloud journey, at speed</a:t>
             </a:r>
             <a:endParaRPr lang="en-US" sz="3100" dirty="0"/>
           </a:p>
@@ -16898,7 +16987,7 @@
                 <a:ea typeface="Calibri" pitchFamily="34" charset="-122"/>
                 <a:cs typeface="Calibri" pitchFamily="34" charset="-120"/>
               </a:rPr>
-              <a:t>A report tells someone a number. Only a change in what they do next reaches the bill.</a:t>
+              <a:t>The same three failures — no owner, no attribution, no ceiling — arriving on a much shorter clock.</a:t>
             </a:r>
             <a:endParaRPr lang="en-US" sz="1500" dirty="0"/>
           </a:p>
@@ -16912,12 +17001,12 @@
         </p:nvSpPr>
         <p:spPr>
           <a:xfrm>
-            <a:off x="548640" y="2286000"/>
-            <a:ext cx="1700784" cy="960120"/>
+            <a:off x="548640" y="2121408"/>
+            <a:ext cx="2587752" cy="2194560"/>
           </a:xfrm>
           <a:prstGeom prst="roundRect">
             <a:avLst>
-              <a:gd name="adj" fmla="val 8571"/>
+              <a:gd name="adj" fmla="val 3750"/>
             </a:avLst>
           </a:prstGeom>
           <a:solidFill>
@@ -16934,24 +17023,66 @@
         </p:nvSpPr>
         <p:spPr>
           <a:xfrm>
-            <a:off x="548640" y="2395728"/>
-            <a:ext cx="1700784" cy="329184"/>
-          </a:xfrm>
-          <a:prstGeom prst="rect">
-            <a:avLst/>
-          </a:prstGeom>
-          <a:noFill/>
-          <a:ln/>
-        </p:spPr>
-        <p:txBody>
-          <a:bodyPr wrap="square" lIns="0" tIns="0" rIns="0" bIns="0" rtlCol="0" anchor="ctr"/>
-          <a:lstStyle/>
-          <a:p>
-            <a:pPr algn="ctr" indent="0" marL="0">
-              <a:buNone/>
-            </a:pPr>
-            <a:r>
-              <a:rPr lang="en-US" sz="1350" b="1" dirty="0">
+            <a:off x="804672" y="2286000"/>
+            <a:ext cx="2103120" cy="640080"/>
+          </a:xfrm>
+          <a:prstGeom prst="rect">
+            <a:avLst/>
+          </a:prstGeom>
+          <a:noFill/>
+          <a:ln/>
+        </p:spPr>
+        <p:txBody>
+          <a:bodyPr wrap="square" lIns="0" tIns="0" rIns="0" bIns="0" rtlCol="0" anchor="ctr"/>
+          <a:lstStyle/>
+          <a:p>
+            <a:pPr indent="0" marL="0">
+              <a:buNone/>
+            </a:pPr>
+            <a:r>
+              <a:rPr lang="en-US" sz="3200" b="1" dirty="0">
+                <a:solidFill>
+                  <a:srgbClr val="A6432F"/>
+                </a:solidFill>
+                <a:latin typeface="Cambria" pitchFamily="34" charset="0"/>
+                <a:ea typeface="Cambria" pitchFamily="34" charset="-122"/>
+                <a:cs typeface="Cambria" pitchFamily="34" charset="-120"/>
+              </a:rPr>
+              <a:t>72%</a:t>
+            </a:r>
+            <a:endParaRPr lang="en-US" sz="3200" dirty="0"/>
+          </a:p>
+        </p:txBody>
+      </p:sp>
+      <p:sp>
+        <p:nvSpPr>
+          <p:cNvPr id="7" name="Text 5"/>
+          <p:cNvSpPr/>
+          <p:nvPr/>
+        </p:nvSpPr>
+        <p:spPr>
+          <a:xfrm>
+            <a:off x="804672" y="2962656"/>
+            <a:ext cx="2103120" cy="777240"/>
+          </a:xfrm>
+          <a:prstGeom prst="rect">
+            <a:avLst/>
+          </a:prstGeom>
+          <a:noFill/>
+          <a:ln/>
+        </p:spPr>
+        <p:txBody>
+          <a:bodyPr wrap="square" lIns="0" tIns="0" rIns="0" bIns="0" rtlCol="0" anchor="t"/>
+          <a:lstStyle/>
+          <a:p>
+            <a:pPr indent="0" marL="0">
+              <a:lnSpc>
+                <a:spcPts val="1700"/>
+              </a:lnSpc>
+              <a:buNone/>
+            </a:pPr>
+            <a:r>
+              <a:rPr lang="en-US" sz="1300" dirty="0">
                 <a:solidFill>
                   <a:srgbClr val="1B2430"/>
                 </a:solidFill>
@@ -16959,22 +17090,22 @@
                 <a:ea typeface="Calibri" pitchFamily="34" charset="-122"/>
                 <a:cs typeface="Calibri" pitchFamily="34" charset="-120"/>
               </a:rPr>
-              <a:t>Finding</a:t>
-            </a:r>
-            <a:endParaRPr lang="en-US" sz="1350" dirty="0"/>
-          </a:p>
-        </p:txBody>
-      </p:sp>
-      <p:sp>
-        <p:nvSpPr>
-          <p:cNvPr id="7" name="Text 5"/>
-          <p:cNvSpPr/>
-          <p:nvPr/>
-        </p:nvSpPr>
-        <p:spPr>
-          <a:xfrm>
-            <a:off x="640080" y="2724912"/>
-            <a:ext cx="1517904" cy="402336"/>
+              <a:t>hit an unexpected AI bill in the past year</a:t>
+            </a:r>
+            <a:endParaRPr lang="en-US" sz="1300" dirty="0"/>
+          </a:p>
+        </p:txBody>
+      </p:sp>
+      <p:sp>
+        <p:nvSpPr>
+          <p:cNvPr id="8" name="Text 6"/>
+          <p:cNvSpPr/>
+          <p:nvPr/>
+        </p:nvSpPr>
+        <p:spPr>
+          <a:xfrm>
+            <a:off x="804672" y="3712464"/>
+            <a:ext cx="2103120" cy="512064"/>
           </a:xfrm>
           <a:prstGeom prst="rect">
             <a:avLst/>
@@ -16986,7 +17117,7 @@
           <a:bodyPr wrap="square" lIns="0" tIns="0" rIns="0" bIns="0" rtlCol="0" anchor="t"/>
           <a:lstStyle/>
           <a:p>
-            <a:pPr algn="ctr" indent="0" marL="0">
+            <a:pPr indent="0" marL="0">
               <a:lnSpc>
                 <a:spcPts val="1400"/>
               </a:lnSpc>
@@ -17001,7 +17132,7 @@
                 <a:ea typeface="Calibri" pitchFamily="34" charset="-122"/>
                 <a:cs typeface="Calibri" pitchFamily="34" charset="-120"/>
               </a:rPr>
-              <a:t>the dashboard flags it</a:t>
+              <a:t>One in three, more than once.</a:t>
             </a:r>
             <a:endParaRPr lang="en-US" sz="1100" dirty="0"/>
           </a:p>
@@ -17009,38 +17140,18 @@
       </p:sp>
       <p:sp>
         <p:nvSpPr>
-          <p:cNvPr id="8" name="Shape 6"/>
-          <p:cNvSpPr/>
-          <p:nvPr/>
-        </p:nvSpPr>
-        <p:spPr>
-          <a:xfrm>
-            <a:off x="2267712" y="2688336"/>
-            <a:ext cx="137160" cy="146304"/>
-          </a:xfrm>
-          <a:prstGeom prst="rightArrow">
-            <a:avLst/>
-          </a:prstGeom>
-          <a:solidFill>
-            <a:srgbClr val="C3CBD5"/>
-          </a:solidFill>
-          <a:ln/>
-        </p:spPr>
-      </p:sp>
-      <p:sp>
-        <p:nvSpPr>
           <p:cNvPr id="9" name="Shape 7"/>
           <p:cNvSpPr/>
           <p:nvPr/>
         </p:nvSpPr>
         <p:spPr>
           <a:xfrm>
-            <a:off x="2423160" y="2286000"/>
-            <a:ext cx="1700784" cy="960120"/>
+            <a:off x="3383280" y="2121408"/>
+            <a:ext cx="2587752" cy="2194560"/>
           </a:xfrm>
           <a:prstGeom prst="roundRect">
             <a:avLst>
-              <a:gd name="adj" fmla="val 8571"/>
+              <a:gd name="adj" fmla="val 3750"/>
             </a:avLst>
           </a:prstGeom>
           <a:solidFill>
@@ -17057,24 +17168,66 @@
         </p:nvSpPr>
         <p:spPr>
           <a:xfrm>
-            <a:off x="2423160" y="2395728"/>
-            <a:ext cx="1700784" cy="329184"/>
-          </a:xfrm>
-          <a:prstGeom prst="rect">
-            <a:avLst/>
-          </a:prstGeom>
-          <a:noFill/>
-          <a:ln/>
-        </p:spPr>
-        <p:txBody>
-          <a:bodyPr wrap="square" lIns="0" tIns="0" rIns="0" bIns="0" rtlCol="0" anchor="ctr"/>
-          <a:lstStyle/>
-          <a:p>
-            <a:pPr algn="ctr" indent="0" marL="0">
-              <a:buNone/>
-            </a:pPr>
-            <a:r>
-              <a:rPr lang="en-US" sz="1350" b="1" dirty="0">
+            <a:off x="3639312" y="2286000"/>
+            <a:ext cx="2103120" cy="640080"/>
+          </a:xfrm>
+          <a:prstGeom prst="rect">
+            <a:avLst/>
+          </a:prstGeom>
+          <a:noFill/>
+          <a:ln/>
+        </p:spPr>
+        <p:txBody>
+          <a:bodyPr wrap="square" lIns="0" tIns="0" rIns="0" bIns="0" rtlCol="0" anchor="ctr"/>
+          <a:lstStyle/>
+          <a:p>
+            <a:pPr indent="0" marL="0">
+              <a:buNone/>
+            </a:pPr>
+            <a:r>
+              <a:rPr lang="en-US" sz="3200" b="1" dirty="0">
+                <a:solidFill>
+                  <a:srgbClr val="E39B2C"/>
+                </a:solidFill>
+                <a:latin typeface="Cambria" pitchFamily="34" charset="0"/>
+                <a:ea typeface="Cambria" pitchFamily="34" charset="-122"/>
+                <a:cs typeface="Cambria" pitchFamily="34" charset="-120"/>
+              </a:rPr>
+              <a:t>52%</a:t>
+            </a:r>
+            <a:endParaRPr lang="en-US" sz="3200" dirty="0"/>
+          </a:p>
+        </p:txBody>
+      </p:sp>
+      <p:sp>
+        <p:nvSpPr>
+          <p:cNvPr id="11" name="Text 9"/>
+          <p:cNvSpPr/>
+          <p:nvPr/>
+        </p:nvSpPr>
+        <p:spPr>
+          <a:xfrm>
+            <a:off x="3639312" y="2962656"/>
+            <a:ext cx="2103120" cy="777240"/>
+          </a:xfrm>
+          <a:prstGeom prst="rect">
+            <a:avLst/>
+          </a:prstGeom>
+          <a:noFill/>
+          <a:ln/>
+        </p:spPr>
+        <p:txBody>
+          <a:bodyPr wrap="square" lIns="0" tIns="0" rIns="0" bIns="0" rtlCol="0" anchor="t"/>
+          <a:lstStyle/>
+          <a:p>
+            <a:pPr indent="0" marL="0">
+              <a:lnSpc>
+                <a:spcPts val="1700"/>
+              </a:lnSpc>
+              <a:buNone/>
+            </a:pPr>
+            <a:r>
+              <a:rPr lang="en-US" sz="1300" dirty="0">
                 <a:solidFill>
                   <a:srgbClr val="1B2430"/>
                 </a:solidFill>
@@ -17082,22 +17235,22 @@
                 <a:ea typeface="Calibri" pitchFamily="34" charset="-122"/>
                 <a:cs typeface="Calibri" pitchFamily="34" charset="-120"/>
               </a:rPr>
-              <a:t>Named owner</a:t>
-            </a:r>
-            <a:endParaRPr lang="en-US" sz="1350" dirty="0"/>
-          </a:p>
-        </p:txBody>
-      </p:sp>
-      <p:sp>
-        <p:nvSpPr>
-          <p:cNvPr id="11" name="Text 9"/>
-          <p:cNvSpPr/>
-          <p:nvPr/>
-        </p:nvSpPr>
-        <p:spPr>
-          <a:xfrm>
-            <a:off x="2514600" y="2724912"/>
-            <a:ext cx="1517904" cy="402336"/>
+              <a:t>have no clear owner for AI cost</a:t>
+            </a:r>
+            <a:endParaRPr lang="en-US" sz="1300" dirty="0"/>
+          </a:p>
+        </p:txBody>
+      </p:sp>
+      <p:sp>
+        <p:nvSpPr>
+          <p:cNvPr id="12" name="Text 10"/>
+          <p:cNvSpPr/>
+          <p:nvPr/>
+        </p:nvSpPr>
+        <p:spPr>
+          <a:xfrm>
+            <a:off x="3639312" y="3712464"/>
+            <a:ext cx="2103120" cy="512064"/>
           </a:xfrm>
           <a:prstGeom prst="rect">
             <a:avLst/>
@@ -17109,7 +17262,7 @@
           <a:bodyPr wrap="square" lIns="0" tIns="0" rIns="0" bIns="0" rtlCol="0" anchor="t"/>
           <a:lstStyle/>
           <a:p>
-            <a:pPr algn="ctr" indent="0" marL="0">
+            <a:pPr indent="0" marL="0">
               <a:lnSpc>
                 <a:spcPts val="1400"/>
               </a:lnSpc>
@@ -17124,7 +17277,7 @@
                 <a:ea typeface="Calibri" pitchFamily="34" charset="-122"/>
                 <a:cs typeface="Calibri" pitchFamily="34" charset="-120"/>
               </a:rPr>
-              <a:t>one person, not a team</a:t>
+              <a:t>Split across engineering, FinOps, finance and IT.</a:t>
             </a:r>
             <a:endParaRPr lang="en-US" sz="1100" dirty="0"/>
           </a:p>
@@ -17132,38 +17285,18 @@
       </p:sp>
       <p:sp>
         <p:nvSpPr>
-          <p:cNvPr id="12" name="Shape 10"/>
-          <p:cNvSpPr/>
-          <p:nvPr/>
-        </p:nvSpPr>
-        <p:spPr>
-          <a:xfrm>
-            <a:off x="4142232" y="2688336"/>
-            <a:ext cx="137160" cy="146304"/>
-          </a:xfrm>
-          <a:prstGeom prst="rightArrow">
-            <a:avLst/>
-          </a:prstGeom>
-          <a:solidFill>
-            <a:srgbClr val="C3CBD5"/>
-          </a:solidFill>
-          <a:ln/>
-        </p:spPr>
-      </p:sp>
-      <p:sp>
-        <p:nvSpPr>
           <p:cNvPr id="13" name="Shape 11"/>
           <p:cNvSpPr/>
           <p:nvPr/>
         </p:nvSpPr>
         <p:spPr>
           <a:xfrm>
-            <a:off x="4297680" y="2286000"/>
-            <a:ext cx="1700784" cy="960120"/>
+            <a:off x="6217920" y="2121408"/>
+            <a:ext cx="2587752" cy="2194560"/>
           </a:xfrm>
           <a:prstGeom prst="roundRect">
             <a:avLst>
-              <a:gd name="adj" fmla="val 8571"/>
+              <a:gd name="adj" fmla="val 3750"/>
             </a:avLst>
           </a:prstGeom>
           <a:solidFill>
@@ -17180,24 +17313,66 @@
         </p:nvSpPr>
         <p:spPr>
           <a:xfrm>
-            <a:off x="4297680" y="2395728"/>
-            <a:ext cx="1700784" cy="329184"/>
-          </a:xfrm>
-          <a:prstGeom prst="rect">
-            <a:avLst/>
-          </a:prstGeom>
-          <a:noFill/>
-          <a:ln/>
-        </p:spPr>
-        <p:txBody>
-          <a:bodyPr wrap="square" lIns="0" tIns="0" rIns="0" bIns="0" rtlCol="0" anchor="ctr"/>
-          <a:lstStyle/>
-          <a:p>
-            <a:pPr algn="ctr" indent="0" marL="0">
-              <a:buNone/>
-            </a:pPr>
-            <a:r>
-              <a:rPr lang="en-US" sz="1350" b="1" dirty="0">
+            <a:off x="6473952" y="2286000"/>
+            <a:ext cx="2103120" cy="640080"/>
+          </a:xfrm>
+          <a:prstGeom prst="rect">
+            <a:avLst/>
+          </a:prstGeom>
+          <a:noFill/>
+          <a:ln/>
+        </p:spPr>
+        <p:txBody>
+          <a:bodyPr wrap="square" lIns="0" tIns="0" rIns="0" bIns="0" rtlCol="0" anchor="ctr"/>
+          <a:lstStyle/>
+          <a:p>
+            <a:pPr indent="0" marL="0">
+              <a:buNone/>
+            </a:pPr>
+            <a:r>
+              <a:rPr lang="en-US" sz="3200" b="1" dirty="0">
+                <a:solidFill>
+                  <a:srgbClr val="E39B2C"/>
+                </a:solidFill>
+                <a:latin typeface="Cambria" pitchFamily="34" charset="0"/>
+                <a:ea typeface="Cambria" pitchFamily="34" charset="-122"/>
+                <a:cs typeface="Cambria" pitchFamily="34" charset="-120"/>
+              </a:rPr>
+              <a:t>4 in 5</a:t>
+            </a:r>
+            <a:endParaRPr lang="en-US" sz="3200" dirty="0"/>
+          </a:p>
+        </p:txBody>
+      </p:sp>
+      <p:sp>
+        <p:nvSpPr>
+          <p:cNvPr id="15" name="Text 13"/>
+          <p:cNvSpPr/>
+          <p:nvPr/>
+        </p:nvSpPr>
+        <p:spPr>
+          <a:xfrm>
+            <a:off x="6473952" y="2962656"/>
+            <a:ext cx="2103120" cy="777240"/>
+          </a:xfrm>
+          <a:prstGeom prst="rect">
+            <a:avLst/>
+          </a:prstGeom>
+          <a:noFill/>
+          <a:ln/>
+        </p:spPr>
+        <p:txBody>
+          <a:bodyPr wrap="square" lIns="0" tIns="0" rIns="0" bIns="0" rtlCol="0" anchor="t"/>
+          <a:lstStyle/>
+          <a:p>
+            <a:pPr indent="0" marL="0">
+              <a:lnSpc>
+                <a:spcPts val="1700"/>
+              </a:lnSpc>
+              <a:buNone/>
+            </a:pPr>
+            <a:r>
+              <a:rPr lang="en-US" sz="1300" dirty="0">
                 <a:solidFill>
                   <a:srgbClr val="1B2430"/>
                 </a:solidFill>
@@ -17205,22 +17380,22 @@
                 <a:ea typeface="Calibri" pitchFamily="34" charset="-122"/>
                 <a:cs typeface="Calibri" pitchFamily="34" charset="-120"/>
               </a:rPr>
-              <a:t>Sized</a:t>
-            </a:r>
-            <a:endParaRPr lang="en-US" sz="1350" dirty="0"/>
-          </a:p>
-        </p:txBody>
-      </p:sp>
-      <p:sp>
-        <p:nvSpPr>
-          <p:cNvPr id="15" name="Text 13"/>
-          <p:cNvSpPr/>
-          <p:nvPr/>
-        </p:nvSpPr>
-        <p:spPr>
-          <a:xfrm>
-            <a:off x="4389120" y="2724912"/>
-            <a:ext cx="1517904" cy="402336"/>
+              <a:t>need a day or more to trace a spike to its source</a:t>
+            </a:r>
+            <a:endParaRPr lang="en-US" sz="1300" dirty="0"/>
+          </a:p>
+        </p:txBody>
+      </p:sp>
+      <p:sp>
+        <p:nvSpPr>
+          <p:cNvPr id="16" name="Text 14"/>
+          <p:cNvSpPr/>
+          <p:nvPr/>
+        </p:nvSpPr>
+        <p:spPr>
+          <a:xfrm>
+            <a:off x="6473952" y="3712464"/>
+            <a:ext cx="2103120" cy="512064"/>
           </a:xfrm>
           <a:prstGeom prst="rect">
             <a:avLst/>
@@ -17232,7 +17407,7 @@
           <a:bodyPr wrap="square" lIns="0" tIns="0" rIns="0" bIns="0" rtlCol="0" anchor="t"/>
           <a:lstStyle/>
           <a:p>
-            <a:pPr algn="ctr" indent="0" marL="0">
+            <a:pPr indent="0" marL="0">
               <a:lnSpc>
                 <a:spcPts val="1400"/>
               </a:lnSpc>
@@ -17247,7 +17422,7 @@
                 <a:ea typeface="Calibri" pitchFamily="34" charset="-122"/>
                 <a:cs typeface="Calibri" pitchFamily="34" charset="-120"/>
               </a:rPr>
-              <a:t>what it is worth</a:t>
+              <a:t>Only about one in five manage it within hours.</a:t>
             </a:r>
             <a:endParaRPr lang="en-US" sz="1100" dirty="0"/>
           </a:p>
@@ -17255,38 +17430,18 @@
       </p:sp>
       <p:sp>
         <p:nvSpPr>
-          <p:cNvPr id="16" name="Shape 14"/>
-          <p:cNvSpPr/>
-          <p:nvPr/>
-        </p:nvSpPr>
-        <p:spPr>
-          <a:xfrm>
-            <a:off x="6016752" y="2688336"/>
-            <a:ext cx="137160" cy="146304"/>
-          </a:xfrm>
-          <a:prstGeom prst="rightArrow">
-            <a:avLst/>
-          </a:prstGeom>
-          <a:solidFill>
-            <a:srgbClr val="C3CBD5"/>
-          </a:solidFill>
-          <a:ln/>
-        </p:spPr>
-      </p:sp>
-      <p:sp>
-        <p:nvSpPr>
           <p:cNvPr id="17" name="Shape 15"/>
           <p:cNvSpPr/>
           <p:nvPr/>
         </p:nvSpPr>
         <p:spPr>
           <a:xfrm>
-            <a:off x="6172200" y="2286000"/>
-            <a:ext cx="1700784" cy="960120"/>
+            <a:off x="9052560" y="2121408"/>
+            <a:ext cx="2587752" cy="2194560"/>
           </a:xfrm>
           <a:prstGeom prst="roundRect">
             <a:avLst>
-              <a:gd name="adj" fmla="val 8571"/>
+              <a:gd name="adj" fmla="val 3750"/>
             </a:avLst>
           </a:prstGeom>
           <a:solidFill>
@@ -17303,24 +17458,66 @@
         </p:nvSpPr>
         <p:spPr>
           <a:xfrm>
-            <a:off x="6172200" y="2395728"/>
-            <a:ext cx="1700784" cy="329184"/>
-          </a:xfrm>
-          <a:prstGeom prst="rect">
-            <a:avLst/>
-          </a:prstGeom>
-          <a:noFill/>
-          <a:ln/>
-        </p:spPr>
-        <p:txBody>
-          <a:bodyPr wrap="square" lIns="0" tIns="0" rIns="0" bIns="0" rtlCol="0" anchor="ctr"/>
-          <a:lstStyle/>
-          <a:p>
-            <a:pPr algn="ctr" indent="0" marL="0">
-              <a:buNone/>
-            </a:pPr>
-            <a:r>
-              <a:rPr lang="en-US" sz="1350" b="1" dirty="0">
+            <a:off x="9308592" y="2286000"/>
+            <a:ext cx="2103120" cy="640080"/>
+          </a:xfrm>
+          <a:prstGeom prst="rect">
+            <a:avLst/>
+          </a:prstGeom>
+          <a:noFill/>
+          <a:ln/>
+        </p:spPr>
+        <p:txBody>
+          <a:bodyPr wrap="square" lIns="0" tIns="0" rIns="0" bIns="0" rtlCol="0" anchor="ctr"/>
+          <a:lstStyle/>
+          <a:p>
+            <a:pPr indent="0" marL="0">
+              <a:buNone/>
+            </a:pPr>
+            <a:r>
+              <a:rPr lang="en-US" sz="3200" b="1" dirty="0">
+                <a:solidFill>
+                  <a:srgbClr val="5C6675"/>
+                </a:solidFill>
+                <a:latin typeface="Cambria" pitchFamily="34" charset="0"/>
+                <a:ea typeface="Cambria" pitchFamily="34" charset="-122"/>
+                <a:cs typeface="Cambria" pitchFamily="34" charset="-120"/>
+              </a:rPr>
+              <a:t>26%</a:t>
+            </a:r>
+            <a:endParaRPr lang="en-US" sz="3200" dirty="0"/>
+          </a:p>
+        </p:txBody>
+      </p:sp>
+      <p:sp>
+        <p:nvSpPr>
+          <p:cNvPr id="19" name="Text 17"/>
+          <p:cNvSpPr/>
+          <p:nvPr/>
+        </p:nvSpPr>
+        <p:spPr>
+          <a:xfrm>
+            <a:off x="9308592" y="2962656"/>
+            <a:ext cx="2103120" cy="777240"/>
+          </a:xfrm>
+          <a:prstGeom prst="rect">
+            <a:avLst/>
+          </a:prstGeom>
+          <a:noFill/>
+          <a:ln/>
+        </p:spPr>
+        <p:txBody>
+          <a:bodyPr wrap="square" lIns="0" tIns="0" rIns="0" bIns="0" rtlCol="0" anchor="t"/>
+          <a:lstStyle/>
+          <a:p>
+            <a:pPr indent="0" marL="0">
+              <a:lnSpc>
+                <a:spcPts val="1700"/>
+              </a:lnSpc>
+              <a:buNone/>
+            </a:pPr>
+            <a:r>
+              <a:rPr lang="en-US" sz="1300" dirty="0">
                 <a:solidFill>
                   <a:srgbClr val="1B2430"/>
                 </a:solidFill>
@@ -17328,22 +17525,22 @@
                 <a:ea typeface="Calibri" pitchFamily="34" charset="-122"/>
                 <a:cs typeface="Calibri" pitchFamily="34" charset="-120"/>
               </a:rPr>
-              <a:t>Target date</a:t>
-            </a:r>
-            <a:endParaRPr lang="en-US" sz="1350" dirty="0"/>
-          </a:p>
-        </p:txBody>
-      </p:sp>
-      <p:sp>
-        <p:nvSpPr>
-          <p:cNvPr id="19" name="Text 17"/>
-          <p:cNvSpPr/>
-          <p:nvPr/>
-        </p:nvSpPr>
-        <p:spPr>
-          <a:xfrm>
-            <a:off x="6263640" y="2724912"/>
-            <a:ext cx="1517904" cy="402336"/>
+              <a:t>of AI spend estimated wasted</a:t>
+            </a:r>
+            <a:endParaRPr lang="en-US" sz="1300" dirty="0"/>
+          </a:p>
+        </p:txBody>
+      </p:sp>
+      <p:sp>
+        <p:nvSpPr>
+          <p:cNvPr id="20" name="Text 18"/>
+          <p:cNvSpPr/>
+          <p:nvPr/>
+        </p:nvSpPr>
+        <p:spPr>
+          <a:xfrm>
+            <a:off x="9308592" y="3712464"/>
+            <a:ext cx="2103120" cy="512064"/>
           </a:xfrm>
           <a:prstGeom prst="rect">
             <a:avLst/>
@@ -17355,7 +17552,7 @@
           <a:bodyPr wrap="square" lIns="0" tIns="0" rIns="0" bIns="0" rtlCol="0" anchor="t"/>
           <a:lstStyle/>
           <a:p>
-            <a:pPr algn="ctr" indent="0" marL="0">
+            <a:pPr indent="0" marL="0">
               <a:lnSpc>
                 <a:spcPts val="1400"/>
               </a:lnSpc>
@@ -17370,7 +17567,7 @@
                 <a:ea typeface="Calibri" pitchFamily="34" charset="-122"/>
                 <a:cs typeface="Calibri" pitchFamily="34" charset="-120"/>
               </a:rPr>
-              <a:t>when, not someday</a:t>
+              <a:t>Respondents' own estimate, not a measurement.</a:t>
             </a:r>
             <a:endParaRPr lang="en-US" sz="1100" dirty="0"/>
           </a:p>
@@ -17378,524 +17575,18 @@
       </p:sp>
       <p:sp>
         <p:nvSpPr>
-          <p:cNvPr id="20" name="Shape 18"/>
-          <p:cNvSpPr/>
-          <p:nvPr/>
-        </p:nvSpPr>
-        <p:spPr>
-          <a:xfrm>
-            <a:off x="7891272" y="2688336"/>
-            <a:ext cx="137160" cy="146304"/>
-          </a:xfrm>
-          <a:prstGeom prst="rightArrow">
-            <a:avLst/>
-          </a:prstGeom>
-          <a:solidFill>
-            <a:srgbClr val="C3CBD5"/>
-          </a:solidFill>
-          <a:ln/>
-        </p:spPr>
-      </p:sp>
-      <p:sp>
-        <p:nvSpPr>
           <p:cNvPr id="21" name="Shape 19"/>
           <p:cNvSpPr/>
           <p:nvPr/>
         </p:nvSpPr>
         <p:spPr>
           <a:xfrm>
-            <a:off x="8046720" y="2286000"/>
-            <a:ext cx="1700784" cy="960120"/>
+            <a:off x="548640" y="4572000"/>
+            <a:ext cx="6675120" cy="1481328"/>
           </a:xfrm>
           <a:prstGeom prst="roundRect">
             <a:avLst>
-              <a:gd name="adj" fmla="val 8571"/>
-            </a:avLst>
-          </a:prstGeom>
-          <a:solidFill>
-            <a:srgbClr val="F1F3F6"/>
-          </a:solidFill>
-          <a:ln/>
-        </p:spPr>
-      </p:sp>
-      <p:sp>
-        <p:nvSpPr>
-          <p:cNvPr id="22" name="Text 20"/>
-          <p:cNvSpPr/>
-          <p:nvPr/>
-        </p:nvSpPr>
-        <p:spPr>
-          <a:xfrm>
-            <a:off x="8046720" y="2395728"/>
-            <a:ext cx="1700784" cy="329184"/>
-          </a:xfrm>
-          <a:prstGeom prst="rect">
-            <a:avLst/>
-          </a:prstGeom>
-          <a:noFill/>
-          <a:ln/>
-        </p:spPr>
-        <p:txBody>
-          <a:bodyPr wrap="square" lIns="0" tIns="0" rIns="0" bIns="0" rtlCol="0" anchor="ctr"/>
-          <a:lstStyle/>
-          <a:p>
-            <a:pPr algn="ctr" indent="0" marL="0">
-              <a:buNone/>
-            </a:pPr>
-            <a:r>
-              <a:rPr lang="en-US" sz="1350" b="1" dirty="0">
-                <a:solidFill>
-                  <a:srgbClr val="1B2430"/>
-                </a:solidFill>
-                <a:latin typeface="Calibri" pitchFamily="34" charset="0"/>
-                <a:ea typeface="Calibri" pitchFamily="34" charset="-122"/>
-                <a:cs typeface="Calibri" pitchFamily="34" charset="-120"/>
-              </a:rPr>
-              <a:t>Reviewed</a:t>
-            </a:r>
-            <a:endParaRPr lang="en-US" sz="1350" dirty="0"/>
-          </a:p>
-        </p:txBody>
-      </p:sp>
-      <p:sp>
-        <p:nvSpPr>
-          <p:cNvPr id="23" name="Text 21"/>
-          <p:cNvSpPr/>
-          <p:nvPr/>
-        </p:nvSpPr>
-        <p:spPr>
-          <a:xfrm>
-            <a:off x="8138160" y="2724912"/>
-            <a:ext cx="1517904" cy="402336"/>
-          </a:xfrm>
-          <a:prstGeom prst="rect">
-            <a:avLst/>
-          </a:prstGeom>
-          <a:noFill/>
-          <a:ln/>
-        </p:spPr>
-        <p:txBody>
-          <a:bodyPr wrap="square" lIns="0" tIns="0" rIns="0" bIns="0" rtlCol="0" anchor="t"/>
-          <a:lstStyle/>
-          <a:p>
-            <a:pPr algn="ctr" indent="0" marL="0">
-              <a:lnSpc>
-                <a:spcPts val="1400"/>
-              </a:lnSpc>
-              <a:buNone/>
-            </a:pPr>
-            <a:r>
-              <a:rPr lang="en-US" sz="1100" dirty="0">
-                <a:solidFill>
-                  <a:srgbClr val="5C6675"/>
-                </a:solidFill>
-                <a:latin typeface="Calibri" pitchFamily="34" charset="0"/>
-                <a:ea typeface="Calibri" pitchFamily="34" charset="-122"/>
-                <a:cs typeface="Calibri" pitchFamily="34" charset="-120"/>
-              </a:rPr>
-              <a:t>did it happen</a:t>
-            </a:r>
-            <a:endParaRPr lang="en-US" sz="1100" dirty="0"/>
-          </a:p>
-        </p:txBody>
-      </p:sp>
-      <p:sp>
-        <p:nvSpPr>
-          <p:cNvPr id="24" name="Shape 22"/>
-          <p:cNvSpPr/>
-          <p:nvPr/>
-        </p:nvSpPr>
-        <p:spPr>
-          <a:xfrm>
-            <a:off x="9765792" y="2688336"/>
-            <a:ext cx="137160" cy="146304"/>
-          </a:xfrm>
-          <a:prstGeom prst="rightArrow">
-            <a:avLst/>
-          </a:prstGeom>
-          <a:solidFill>
-            <a:srgbClr val="C3CBD5"/>
-          </a:solidFill>
-          <a:ln/>
-        </p:spPr>
-      </p:sp>
-      <p:sp>
-        <p:nvSpPr>
-          <p:cNvPr id="25" name="Shape 23"/>
-          <p:cNvSpPr/>
-          <p:nvPr/>
-        </p:nvSpPr>
-        <p:spPr>
-          <a:xfrm>
-            <a:off x="9921240" y="2286000"/>
-            <a:ext cx="1700784" cy="960120"/>
-          </a:xfrm>
-          <a:prstGeom prst="roundRect">
-            <a:avLst>
-              <a:gd name="adj" fmla="val 8571"/>
-            </a:avLst>
-          </a:prstGeom>
-          <a:solidFill>
-            <a:srgbClr val="1F2936"/>
-          </a:solidFill>
-          <a:ln/>
-        </p:spPr>
-      </p:sp>
-      <p:sp>
-        <p:nvSpPr>
-          <p:cNvPr id="26" name="Text 24"/>
-          <p:cNvSpPr/>
-          <p:nvPr/>
-        </p:nvSpPr>
-        <p:spPr>
-          <a:xfrm>
-            <a:off x="9921240" y="2395728"/>
-            <a:ext cx="1700784" cy="329184"/>
-          </a:xfrm>
-          <a:prstGeom prst="rect">
-            <a:avLst/>
-          </a:prstGeom>
-          <a:noFill/>
-          <a:ln/>
-        </p:spPr>
-        <p:txBody>
-          <a:bodyPr wrap="square" lIns="0" tIns="0" rIns="0" bIns="0" rtlCol="0" anchor="ctr"/>
-          <a:lstStyle/>
-          <a:p>
-            <a:pPr algn="ctr" indent="0" marL="0">
-              <a:buNone/>
-            </a:pPr>
-            <a:r>
-              <a:rPr lang="en-US" sz="1350" b="1" dirty="0">
-                <a:solidFill>
-                  <a:srgbClr val="E39B2C"/>
-                </a:solidFill>
-                <a:latin typeface="Calibri" pitchFamily="34" charset="0"/>
-                <a:ea typeface="Calibri" pitchFamily="34" charset="-122"/>
-                <a:cs typeface="Calibri" pitchFamily="34" charset="-120"/>
-              </a:rPr>
-              <a:t>Realized</a:t>
-            </a:r>
-            <a:endParaRPr lang="en-US" sz="1350" dirty="0"/>
-          </a:p>
-        </p:txBody>
-      </p:sp>
-      <p:sp>
-        <p:nvSpPr>
-          <p:cNvPr id="27" name="Text 25"/>
-          <p:cNvSpPr/>
-          <p:nvPr/>
-        </p:nvSpPr>
-        <p:spPr>
-          <a:xfrm>
-            <a:off x="10012680" y="2724912"/>
-            <a:ext cx="1517904" cy="402336"/>
-          </a:xfrm>
-          <a:prstGeom prst="rect">
-            <a:avLst/>
-          </a:prstGeom>
-          <a:noFill/>
-          <a:ln/>
-        </p:spPr>
-        <p:txBody>
-          <a:bodyPr wrap="square" lIns="0" tIns="0" rIns="0" bIns="0" rtlCol="0" anchor="t"/>
-          <a:lstStyle/>
-          <a:p>
-            <a:pPr algn="ctr" indent="0" marL="0">
-              <a:lnSpc>
-                <a:spcPts val="1400"/>
-              </a:lnSpc>
-              <a:buNone/>
-            </a:pPr>
-            <a:r>
-              <a:rPr lang="en-US" sz="1100" dirty="0">
-                <a:solidFill>
-                  <a:srgbClr val="9EABBA"/>
-                </a:solidFill>
-                <a:latin typeface="Calibri" pitchFamily="34" charset="0"/>
-                <a:ea typeface="Calibri" pitchFamily="34" charset="-122"/>
-                <a:cs typeface="Calibri" pitchFamily="34" charset="-120"/>
-              </a:rPr>
-              <a:t>measured on the bill</a:t>
-            </a:r>
-            <a:endParaRPr lang="en-US" sz="1100" dirty="0"/>
-          </a:p>
-        </p:txBody>
-      </p:sp>
-      <p:sp>
-        <p:nvSpPr>
-          <p:cNvPr id="28" name="Text 26"/>
-          <p:cNvSpPr/>
-          <p:nvPr/>
-        </p:nvSpPr>
-        <p:spPr>
-          <a:xfrm>
-            <a:off x="548640" y="3364992"/>
-            <a:ext cx="11091672" cy="310896"/>
-          </a:xfrm>
-          <a:prstGeom prst="rect">
-            <a:avLst/>
-          </a:prstGeom>
-          <a:noFill/>
-          <a:ln/>
-        </p:spPr>
-        <p:txBody>
-          <a:bodyPr wrap="square" lIns="0" tIns="0" rIns="0" bIns="0" rtlCol="0" anchor="ctr"/>
-          <a:lstStyle/>
-          <a:p>
-            <a:pPr indent="0" marL="0">
-              <a:buNone/>
-            </a:pPr>
-            <a:r>
-              <a:rPr lang="en-US" sz="1250" dirty="0">
-                <a:solidFill>
-                  <a:srgbClr val="5C6675"/>
-                </a:solidFill>
-                <a:latin typeface="Calibri" pitchFamily="34" charset="0"/>
-                <a:ea typeface="Calibri" pitchFamily="34" charset="-122"/>
-                <a:cs typeface="Calibri" pitchFamily="34" charset="-120"/>
-              </a:rPr>
-              <a:t>A recommendation without an owner and a date is an opinion.</a:t>
-            </a:r>
-            <a:endParaRPr lang="en-US" sz="1250" dirty="0"/>
-          </a:p>
-        </p:txBody>
-      </p:sp>
-      <p:sp>
-        <p:nvSpPr>
-          <p:cNvPr id="29" name="Shape 27"/>
-          <p:cNvSpPr/>
-          <p:nvPr/>
-        </p:nvSpPr>
-        <p:spPr>
-          <a:xfrm>
-            <a:off x="548640" y="3913632"/>
-            <a:ext cx="5394960" cy="2240280"/>
-          </a:xfrm>
-          <a:prstGeom prst="roundRect">
-            <a:avLst>
-              <a:gd name="adj" fmla="val 3673"/>
-            </a:avLst>
-          </a:prstGeom>
-          <a:solidFill>
-            <a:srgbClr val="F1F3F6"/>
-          </a:solidFill>
-          <a:ln/>
-        </p:spPr>
-      </p:sp>
-      <p:sp>
-        <p:nvSpPr>
-          <p:cNvPr id="30" name="Text 28"/>
-          <p:cNvSpPr/>
-          <p:nvPr/>
-        </p:nvSpPr>
-        <p:spPr>
-          <a:xfrm>
-            <a:off x="859536" y="4078224"/>
-            <a:ext cx="4572000" cy="292608"/>
-          </a:xfrm>
-          <a:prstGeom prst="rect">
-            <a:avLst/>
-          </a:prstGeom>
-          <a:noFill/>
-          <a:ln/>
-        </p:spPr>
-        <p:txBody>
-          <a:bodyPr wrap="square" lIns="0" tIns="0" rIns="0" bIns="0" rtlCol="0" anchor="ctr"/>
-          <a:lstStyle/>
-          <a:p>
-            <a:pPr indent="0" marL="0">
-              <a:buNone/>
-            </a:pPr>
-            <a:r>
-              <a:rPr lang="en-US" sz="1200" b="1" spc="180" kern="0" dirty="0">
-                <a:solidFill>
-                  <a:srgbClr val="5C6675"/>
-                </a:solidFill>
-                <a:latin typeface="Calibri" pitchFamily="34" charset="0"/>
-                <a:ea typeface="Calibri" pitchFamily="34" charset="-122"/>
-                <a:cs typeface="Calibri" pitchFamily="34" charset="-120"/>
-              </a:rPr>
-              <a:t>The difference that matters</a:t>
-            </a:r>
-            <a:endParaRPr lang="en-US" sz="1200" dirty="0"/>
-          </a:p>
-        </p:txBody>
-      </p:sp>
-      <p:sp>
-        <p:nvSpPr>
-          <p:cNvPr id="31" name="Text 29"/>
-          <p:cNvSpPr/>
-          <p:nvPr/>
-        </p:nvSpPr>
-        <p:spPr>
-          <a:xfrm>
-            <a:off x="859536" y="4425696"/>
-            <a:ext cx="4773168" cy="530352"/>
-          </a:xfrm>
-          <a:prstGeom prst="rect">
-            <a:avLst/>
-          </a:prstGeom>
-          <a:noFill/>
-          <a:ln/>
-        </p:spPr>
-        <p:txBody>
-          <a:bodyPr wrap="square" lIns="0" tIns="0" rIns="0" bIns="0" rtlCol="0" anchor="t"/>
-          <a:lstStyle/>
-          <a:p>
-            <a:pPr indent="0" marL="0">
-              <a:lnSpc>
-                <a:spcPts val="1900"/>
-              </a:lnSpc>
-              <a:buNone/>
-            </a:pPr>
-            <a:r>
-              <a:rPr lang="en-US" sz="1400" b="1" dirty="0">
-                <a:solidFill>
-                  <a:srgbClr val="5C6675"/>
-                </a:solidFill>
-                <a:latin typeface="Calibri" pitchFamily="34" charset="0"/>
-                <a:ea typeface="Calibri" pitchFamily="34" charset="-122"/>
-                <a:cs typeface="Calibri" pitchFamily="34" charset="-120"/>
-              </a:rPr>
-              <a:t>A report  </a:t>
-            </a:r>
-            <a:pPr indent="0" marL="0">
-              <a:lnSpc>
-                <a:spcPts val="1900"/>
-              </a:lnSpc>
-              <a:buNone/>
-            </a:pPr>
-            <a:r>
-              <a:rPr lang="en-US" sz="1400" dirty="0">
-                <a:solidFill>
-                  <a:srgbClr val="5C6675"/>
-                </a:solidFill>
-                <a:latin typeface="Calibri" pitchFamily="34" charset="0"/>
-                <a:ea typeface="Calibri" pitchFamily="34" charset="-122"/>
-                <a:cs typeface="Calibri" pitchFamily="34" charset="-120"/>
-              </a:rPr>
-              <a:t>is finished when the number is right.</a:t>
-            </a:r>
-            <a:endParaRPr lang="en-US" sz="1400" dirty="0"/>
-          </a:p>
-        </p:txBody>
-      </p:sp>
-      <p:sp>
-        <p:nvSpPr>
-          <p:cNvPr id="32" name="Text 30"/>
-          <p:cNvSpPr/>
-          <p:nvPr/>
-        </p:nvSpPr>
-        <p:spPr>
-          <a:xfrm>
-            <a:off x="859536" y="4974336"/>
-            <a:ext cx="4773168" cy="530352"/>
-          </a:xfrm>
-          <a:prstGeom prst="rect">
-            <a:avLst/>
-          </a:prstGeom>
-          <a:noFill/>
-          <a:ln/>
-        </p:spPr>
-        <p:txBody>
-          <a:bodyPr wrap="square" lIns="0" tIns="0" rIns="0" bIns="0" rtlCol="0" anchor="t"/>
-          <a:lstStyle/>
-          <a:p>
-            <a:pPr indent="0" marL="0">
-              <a:lnSpc>
-                <a:spcPts val="1900"/>
-              </a:lnSpc>
-              <a:buNone/>
-            </a:pPr>
-            <a:r>
-              <a:rPr lang="en-US" sz="1400" b="1" dirty="0">
-                <a:solidFill>
-                  <a:srgbClr val="1B2430"/>
-                </a:solidFill>
-                <a:latin typeface="Calibri" pitchFamily="34" charset="0"/>
-                <a:ea typeface="Calibri" pitchFamily="34" charset="-122"/>
-                <a:cs typeface="Calibri" pitchFamily="34" charset="-120"/>
-              </a:rPr>
-              <a:t>A product  </a:t>
-            </a:r>
-            <a:pPr indent="0" marL="0">
-              <a:lnSpc>
-                <a:spcPts val="1900"/>
-              </a:lnSpc>
-              <a:buNone/>
-            </a:pPr>
-            <a:r>
-              <a:rPr lang="en-US" sz="1400" dirty="0">
-                <a:solidFill>
-                  <a:srgbClr val="5C6675"/>
-                </a:solidFill>
-                <a:latin typeface="Calibri" pitchFamily="34" charset="0"/>
-                <a:ea typeface="Calibri" pitchFamily="34" charset="-122"/>
-                <a:cs typeface="Calibri" pitchFamily="34" charset="-120"/>
-              </a:rPr>
-              <a:t>is finished when someone behaves differently.</a:t>
-            </a:r>
-            <a:endParaRPr lang="en-US" sz="1400" dirty="0"/>
-          </a:p>
-        </p:txBody>
-      </p:sp>
-      <p:sp>
-        <p:nvSpPr>
-          <p:cNvPr id="33" name="Text 31"/>
-          <p:cNvSpPr/>
-          <p:nvPr/>
-        </p:nvSpPr>
-        <p:spPr>
-          <a:xfrm>
-            <a:off x="859536" y="5522976"/>
-            <a:ext cx="4773168" cy="457200"/>
-          </a:xfrm>
-          <a:prstGeom prst="rect">
-            <a:avLst/>
-          </a:prstGeom>
-          <a:noFill/>
-          <a:ln/>
-        </p:spPr>
-        <p:txBody>
-          <a:bodyPr wrap="square" lIns="0" tIns="0" rIns="0" bIns="0" rtlCol="0" anchor="t"/>
-          <a:lstStyle/>
-          <a:p>
-            <a:pPr indent="0" marL="0">
-              <a:lnSpc>
-                <a:spcPts val="1600"/>
-              </a:lnSpc>
-              <a:buNone/>
-            </a:pPr>
-            <a:r>
-              <a:rPr lang="en-US" sz="1250" dirty="0">
-                <a:solidFill>
-                  <a:srgbClr val="1B2430"/>
-                </a:solidFill>
-                <a:latin typeface="Calibri" pitchFamily="34" charset="0"/>
-                <a:ea typeface="Calibri" pitchFamily="34" charset="-122"/>
-                <a:cs typeface="Calibri" pitchFamily="34" charset="-120"/>
-              </a:rPr>
-              <a:t>Build for the engineer who wants the three things worth fixing this sprint — the finance report improves as a by-product.</a:t>
-            </a:r>
-            <a:endParaRPr lang="en-US" sz="1250" dirty="0"/>
-          </a:p>
-        </p:txBody>
-      </p:sp>
-      <p:sp>
-        <p:nvSpPr>
-          <p:cNvPr id="34" name="Shape 32"/>
-          <p:cNvSpPr/>
-          <p:nvPr/>
-        </p:nvSpPr>
-        <p:spPr>
-          <a:xfrm>
-            <a:off x="6245352" y="3913632"/>
-            <a:ext cx="5394960" cy="2240280"/>
-          </a:xfrm>
-          <a:prstGeom prst="roundRect">
-            <a:avLst>
-              <a:gd name="adj" fmla="val 3673"/>
+              <a:gd name="adj" fmla="val 5556"/>
             </a:avLst>
           </a:prstGeom>
           <a:solidFill>
@@ -17913,13 +17604,13 @@
       </p:sp>
       <p:sp>
         <p:nvSpPr>
-          <p:cNvPr id="35" name="Text 33"/>
-          <p:cNvSpPr/>
-          <p:nvPr/>
-        </p:nvSpPr>
-        <p:spPr>
-          <a:xfrm>
-            <a:off x="6556248" y="4078224"/>
+          <p:cNvPr id="22" name="Text 20"/>
+          <p:cNvSpPr/>
+          <p:nvPr/>
+        </p:nvSpPr>
+        <p:spPr>
+          <a:xfrm>
+            <a:off x="859536" y="4736592"/>
             <a:ext cx="4572000" cy="292608"/>
           </a:xfrm>
           <a:prstGeom prst="rect">
@@ -17944,7 +17635,7 @@
                 <a:ea typeface="Calibri" pitchFamily="34" charset="-122"/>
                 <a:cs typeface="Calibri" pitchFamily="34" charset="-120"/>
               </a:rPr>
-              <a:t>Measure adoption, not accuracy</a:t>
+              <a:t>The number to manage</a:t>
             </a:r>
             <a:endParaRPr lang="en-US" sz="1200" dirty="0"/>
           </a:p>
@@ -17952,34 +17643,14 @@
       </p:sp>
       <p:sp>
         <p:nvSpPr>
-          <p:cNvPr id="36" name="Shape 34"/>
-          <p:cNvSpPr/>
-          <p:nvPr/>
-        </p:nvSpPr>
-        <p:spPr>
-          <a:xfrm>
-            <a:off x="6574536" y="4590288"/>
-            <a:ext cx="100584" cy="100584"/>
-          </a:xfrm>
-          <a:prstGeom prst="ellipse">
-            <a:avLst/>
-          </a:prstGeom>
-          <a:solidFill>
-            <a:srgbClr val="E39B2C"/>
-          </a:solidFill>
-          <a:ln/>
-        </p:spPr>
-      </p:sp>
-      <p:sp>
-        <p:nvSpPr>
-          <p:cNvPr id="37" name="Text 35"/>
-          <p:cNvSpPr/>
-          <p:nvPr/>
-        </p:nvSpPr>
-        <p:spPr>
-          <a:xfrm>
-            <a:off x="6812280" y="4443984"/>
-            <a:ext cx="4553712" cy="457200"/>
+          <p:cNvPr id="23" name="Text 21"/>
+          <p:cNvSpPr/>
+          <p:nvPr/>
+        </p:nvSpPr>
+        <p:spPr>
+          <a:xfrm>
+            <a:off x="859536" y="5065776"/>
+            <a:ext cx="6053328" cy="877824"/>
           </a:xfrm>
           <a:prstGeom prst="rect">
             <a:avLst/>
@@ -17993,12 +17664,12 @@
           <a:p>
             <a:pPr indent="0" marL="0">
               <a:lnSpc>
-                <a:spcPts val="1600"/>
+                <a:spcPts val="1900"/>
               </a:lnSpc>
               <a:buNone/>
             </a:pPr>
             <a:r>
-              <a:rPr lang="en-US" sz="1250" b="1" dirty="0">
+              <a:rPr lang="en-US" sz="1350" b="1" dirty="0">
                 <a:solidFill>
                   <a:srgbClr val="FFFFFF"/>
                 </a:solidFill>
@@ -18006,232 +17677,168 @@
                 <a:ea typeface="Calibri" pitchFamily="34" charset="-122"/>
                 <a:cs typeface="Calibri" pitchFamily="34" charset="-120"/>
               </a:rPr>
-              <a:t>Findings with an owner and a date</a:t>
+              <a:t>Time to attribute a spike. </a:t>
+            </a:r>
+            <a:pPr indent="0" marL="0">
+              <a:lnSpc>
+                <a:spcPts val="1900"/>
+              </a:lnSpc>
+              <a:buNone/>
+            </a:pPr>
+            <a:r>
+              <a:rPr lang="en-US" sz="1350" dirty="0">
+                <a:solidFill>
+                  <a:srgbClr val="9EABBA"/>
+                </a:solidFill>
+                <a:latin typeface="Calibri" pitchFamily="34" charset="0"/>
+                <a:ea typeface="Calibri" pitchFamily="34" charset="-122"/>
+                <a:cs typeface="Calibri" pitchFamily="34" charset="-120"/>
+              </a:rPr>
+              <a:t>It turns an argument about governance into a number we can move — days today, hours as the target — and it is the one metric a runaway AI workload is measured against.</a:t>
+            </a:r>
+            <a:endParaRPr lang="en-US" sz="1350" dirty="0"/>
+          </a:p>
+        </p:txBody>
+      </p:sp>
+      <p:sp>
+        <p:nvSpPr>
+          <p:cNvPr id="24" name="Shape 22"/>
+          <p:cNvSpPr/>
+          <p:nvPr/>
+        </p:nvSpPr>
+        <p:spPr>
+          <a:xfrm>
+            <a:off x="7525512" y="4572000"/>
+            <a:ext cx="4114800" cy="1481328"/>
+          </a:xfrm>
+          <a:prstGeom prst="roundRect">
+            <a:avLst>
+              <a:gd name="adj" fmla="val 5556"/>
+            </a:avLst>
+          </a:prstGeom>
+          <a:solidFill>
+            <a:srgbClr val="FBEFD8"/>
+          </a:solidFill>
+          <a:ln/>
+        </p:spPr>
+      </p:sp>
+      <p:sp>
+        <p:nvSpPr>
+          <p:cNvPr id="25" name="Text 23"/>
+          <p:cNvSpPr/>
+          <p:nvPr/>
+        </p:nvSpPr>
+        <p:spPr>
+          <a:xfrm>
+            <a:off x="7836408" y="4736592"/>
+            <a:ext cx="3657600" cy="292608"/>
+          </a:xfrm>
+          <a:prstGeom prst="rect">
+            <a:avLst/>
+          </a:prstGeom>
+          <a:noFill/>
+          <a:ln/>
+        </p:spPr>
+        <p:txBody>
+          <a:bodyPr wrap="square" lIns="0" tIns="0" rIns="0" bIns="0" rtlCol="0" anchor="ctr"/>
+          <a:lstStyle/>
+          <a:p>
+            <a:pPr indent="0" marL="0">
+              <a:buNone/>
+            </a:pPr>
+            <a:r>
+              <a:rPr lang="en-US" sz="1200" b="1" spc="180" kern="0" dirty="0">
+                <a:solidFill>
+                  <a:srgbClr val="6B4A0E"/>
+                </a:solidFill>
+                <a:latin typeface="Calibri" pitchFamily="34" charset="0"/>
+                <a:ea typeface="Calibri" pitchFamily="34" charset="-122"/>
+                <a:cs typeface="Calibri" pitchFamily="34" charset="-120"/>
+              </a:rPr>
+              <a:t>Why a rollup will not do it</a:t>
+            </a:r>
+            <a:endParaRPr lang="en-US" sz="1200" dirty="0"/>
+          </a:p>
+        </p:txBody>
+      </p:sp>
+      <p:sp>
+        <p:nvSpPr>
+          <p:cNvPr id="26" name="Text 24"/>
+          <p:cNvSpPr/>
+          <p:nvPr/>
+        </p:nvSpPr>
+        <p:spPr>
+          <a:xfrm>
+            <a:off x="7836408" y="5065776"/>
+            <a:ext cx="3529584" cy="877824"/>
+          </a:xfrm>
+          <a:prstGeom prst="rect">
+            <a:avLst/>
+          </a:prstGeom>
+          <a:noFill/>
+          <a:ln/>
+        </p:spPr>
+        <p:txBody>
+          <a:bodyPr wrap="square" lIns="0" tIns="0" rIns="0" bIns="0" rtlCol="0" anchor="t"/>
+          <a:lstStyle/>
+          <a:p>
+            <a:pPr indent="0" marL="0">
+              <a:lnSpc>
+                <a:spcPts val="1700"/>
+              </a:lnSpc>
+              <a:buNone/>
+            </a:pPr>
+            <a:r>
+              <a:rPr lang="en-US" sz="1250" dirty="0">
+                <a:solidFill>
+                  <a:srgbClr val="6B4A0E"/>
+                </a:solidFill>
+                <a:latin typeface="Calibri" pitchFamily="34" charset="0"/>
+                <a:ea typeface="Calibri" pitchFamily="34" charset="-122"/>
+                <a:cs typeface="Calibri" pitchFamily="34" charset="-120"/>
+              </a:rPr>
+              <a:t>AI waste hides in prompt design, model choice and retry logic. A monthly bill by resource cannot name the caller — that needs per-consumer token attribution.</a:t>
             </a:r>
             <a:endParaRPr lang="en-US" sz="1250" dirty="0"/>
           </a:p>
-          <a:p>
-            <a:pPr indent="0" marL="0">
-              <a:lnSpc>
-                <a:spcPts val="1600"/>
-              </a:lnSpc>
-              <a:buNone/>
-            </a:pPr>
-            <a:r>
-              <a:rPr lang="en-US" sz="1250" dirty="0">
-                <a:solidFill>
-                  <a:srgbClr val="9EABBA"/>
-                </a:solidFill>
-                <a:latin typeface="Calibri" pitchFamily="34" charset="0"/>
-                <a:ea typeface="Calibri" pitchFamily="34" charset="-122"/>
-                <a:cs typeface="Calibri" pitchFamily="34" charset="-120"/>
-              </a:rPr>
-              <a:t>The share that became work.</a:t>
-            </a:r>
-            <a:endParaRPr lang="en-US" sz="1250" dirty="0"/>
-          </a:p>
-        </p:txBody>
-      </p:sp>
-      <p:sp>
-        <p:nvSpPr>
-          <p:cNvPr id="38" name="Shape 36"/>
-          <p:cNvSpPr/>
-          <p:nvPr/>
-        </p:nvSpPr>
-        <p:spPr>
-          <a:xfrm>
-            <a:off x="6574536" y="5102352"/>
-            <a:ext cx="100584" cy="100584"/>
-          </a:xfrm>
-          <a:prstGeom prst="ellipse">
-            <a:avLst/>
-          </a:prstGeom>
-          <a:solidFill>
-            <a:srgbClr val="E39B2C"/>
-          </a:solidFill>
-          <a:ln/>
-        </p:spPr>
-      </p:sp>
-      <p:sp>
-        <p:nvSpPr>
-          <p:cNvPr id="39" name="Text 37"/>
-          <p:cNvSpPr/>
-          <p:nvPr/>
-        </p:nvSpPr>
-        <p:spPr>
-          <a:xfrm>
-            <a:off x="6812280" y="4956048"/>
-            <a:ext cx="4553712" cy="457200"/>
-          </a:xfrm>
-          <a:prstGeom prst="rect">
-            <a:avLst/>
-          </a:prstGeom>
-          <a:noFill/>
-          <a:ln/>
-        </p:spPr>
-        <p:txBody>
-          <a:bodyPr wrap="square" lIns="0" tIns="0" rIns="0" bIns="0" rtlCol="0" anchor="t"/>
-          <a:lstStyle/>
-          <a:p>
-            <a:pPr indent="0" marL="0">
-              <a:lnSpc>
-                <a:spcPts val="1600"/>
-              </a:lnSpc>
-              <a:buNone/>
-            </a:pPr>
-            <a:r>
-              <a:rPr lang="en-US" sz="1250" b="1" dirty="0">
-                <a:solidFill>
-                  <a:srgbClr val="FFFFFF"/>
-                </a:solidFill>
-                <a:latin typeface="Calibri" pitchFamily="34" charset="0"/>
-                <a:ea typeface="Calibri" pitchFamily="34" charset="-122"/>
-                <a:cs typeface="Calibri" pitchFamily="34" charset="-120"/>
-              </a:rPr>
-              <a:t>Realized against identified saving</a:t>
-            </a:r>
-            <a:endParaRPr lang="en-US" sz="1250" dirty="0"/>
-          </a:p>
-          <a:p>
-            <a:pPr indent="0" marL="0">
-              <a:lnSpc>
-                <a:spcPts val="1600"/>
-              </a:lnSpc>
-              <a:buNone/>
-            </a:pPr>
-            <a:r>
-              <a:rPr lang="en-US" sz="1250" dirty="0">
-                <a:solidFill>
-                  <a:srgbClr val="9EABBA"/>
-                </a:solidFill>
-                <a:latin typeface="Calibri" pitchFamily="34" charset="0"/>
-                <a:ea typeface="Calibri" pitchFamily="34" charset="-122"/>
-                <a:cs typeface="Calibri" pitchFamily="34" charset="-120"/>
-              </a:rPr>
-              <a:t>Only the first reaches an invoice.</a:t>
-            </a:r>
-            <a:endParaRPr lang="en-US" sz="1250" dirty="0"/>
-          </a:p>
-        </p:txBody>
-      </p:sp>
-      <p:sp>
-        <p:nvSpPr>
-          <p:cNvPr id="40" name="Shape 38"/>
-          <p:cNvSpPr/>
-          <p:nvPr/>
-        </p:nvSpPr>
-        <p:spPr>
-          <a:xfrm>
-            <a:off x="6574536" y="5614416"/>
-            <a:ext cx="100584" cy="100584"/>
-          </a:xfrm>
-          <a:prstGeom prst="ellipse">
-            <a:avLst/>
-          </a:prstGeom>
-          <a:solidFill>
-            <a:srgbClr val="E39B2C"/>
-          </a:solidFill>
-          <a:ln/>
-        </p:spPr>
-      </p:sp>
-      <p:sp>
-        <p:nvSpPr>
-          <p:cNvPr id="41" name="Text 39"/>
-          <p:cNvSpPr/>
-          <p:nvPr/>
-        </p:nvSpPr>
-        <p:spPr>
-          <a:xfrm>
-            <a:off x="6812280" y="5468112"/>
-            <a:ext cx="4553712" cy="457200"/>
-          </a:xfrm>
-          <a:prstGeom prst="rect">
-            <a:avLst/>
-          </a:prstGeom>
-          <a:noFill/>
-          <a:ln/>
-        </p:spPr>
-        <p:txBody>
-          <a:bodyPr wrap="square" lIns="0" tIns="0" rIns="0" bIns="0" rtlCol="0" anchor="t"/>
-          <a:lstStyle/>
-          <a:p>
-            <a:pPr indent="0" marL="0">
-              <a:lnSpc>
-                <a:spcPts val="1600"/>
-              </a:lnSpc>
-              <a:buNone/>
-            </a:pPr>
-            <a:r>
-              <a:rPr lang="en-US" sz="1250" b="1" dirty="0">
-                <a:solidFill>
-                  <a:srgbClr val="FFFFFF"/>
-                </a:solidFill>
-                <a:latin typeface="Calibri" pitchFamily="34" charset="0"/>
-                <a:ea typeface="Calibri" pitchFamily="34" charset="-122"/>
-                <a:cs typeface="Calibri" pitchFamily="34" charset="-120"/>
-              </a:rPr>
-              <a:t>Time from finding to owner</a:t>
-            </a:r>
-            <a:endParaRPr lang="en-US" sz="1250" dirty="0"/>
-          </a:p>
-          <a:p>
-            <a:pPr indent="0" marL="0">
-              <a:lnSpc>
-                <a:spcPts val="1600"/>
-              </a:lnSpc>
-              <a:buNone/>
-            </a:pPr>
-            <a:r>
-              <a:rPr lang="en-US" sz="1250" dirty="0">
-                <a:solidFill>
-                  <a:srgbClr val="9EABBA"/>
-                </a:solidFill>
-                <a:latin typeface="Calibri" pitchFamily="34" charset="0"/>
-                <a:ea typeface="Calibri" pitchFamily="34" charset="-122"/>
-                <a:cs typeface="Calibri" pitchFamily="34" charset="-120"/>
-              </a:rPr>
-              <a:t>Days, not weeks — and trending down.</a:t>
-            </a:r>
-            <a:endParaRPr lang="en-US" sz="1250" dirty="0"/>
-          </a:p>
-        </p:txBody>
-      </p:sp>
-      <p:sp>
-        <p:nvSpPr>
-          <p:cNvPr id="42" name="Text 40"/>
-          <p:cNvSpPr/>
-          <p:nvPr/>
-        </p:nvSpPr>
-        <p:spPr>
-          <a:xfrm>
-            <a:off x="548640" y="6272784"/>
-            <a:ext cx="11091672" cy="402336"/>
-          </a:xfrm>
-          <a:prstGeom prst="rect">
-            <a:avLst/>
-          </a:prstGeom>
-          <a:noFill/>
-          <a:ln/>
-        </p:spPr>
-        <p:txBody>
-          <a:bodyPr wrap="square" lIns="0" tIns="0" rIns="0" bIns="0" rtlCol="0" anchor="ctr"/>
-          <a:lstStyle/>
-          <a:p>
-            <a:pPr indent="0" marL="0">
-              <a:buNone/>
-            </a:pPr>
-            <a:r>
-              <a:rPr lang="en-US" sz="1400" i="1" dirty="0">
+        </p:txBody>
+      </p:sp>
+      <p:sp>
+        <p:nvSpPr>
+          <p:cNvPr id="27" name="Text 25"/>
+          <p:cNvSpPr/>
+          <p:nvPr/>
+        </p:nvSpPr>
+        <p:spPr>
+          <a:xfrm>
+            <a:off x="548640" y="6199632"/>
+            <a:ext cx="11091672" cy="457200"/>
+          </a:xfrm>
+          <a:prstGeom prst="rect">
+            <a:avLst/>
+          </a:prstGeom>
+          <a:noFill/>
+          <a:ln/>
+        </p:spPr>
+        <p:txBody>
+          <a:bodyPr wrap="square" lIns="0" tIns="0" rIns="0" bIns="0" rtlCol="0" anchor="ctr"/>
+          <a:lstStyle/>
+          <a:p>
+            <a:pPr indent="0" marL="0">
+              <a:buNone/>
+            </a:pPr>
+            <a:r>
+              <a:rPr lang="en-US" sz="1050" dirty="0">
                 <a:solidFill>
                   <a:srgbClr val="5C6675"/>
                 </a:solidFill>
-                <a:latin typeface="Cambria" pitchFamily="34" charset="0"/>
-                <a:ea typeface="Cambria" pitchFamily="34" charset="-122"/>
-                <a:cs typeface="Cambria" pitchFamily="34" charset="-120"/>
-              </a:rPr>
-              <a:t>The goal is a better decision, not a lower bill — the lower bill is what a better decision looks like a quarter later.</a:t>
-            </a:r>
-            <a:endParaRPr lang="en-US" sz="1400" dirty="0"/>
+                <a:latin typeface="Calibri" pitchFamily="34" charset="0"/>
+                <a:ea typeface="Calibri" pitchFamily="34" charset="-122"/>
+                <a:cs typeface="Calibri" pitchFamily="34" charset="-120"/>
+              </a:rPr>
+              <a:t>Harness / Sapio Research, 2026 State of AI in FinOps — 700 engineering leaders and practitioners, May–June 2026. Vendor-sponsored research; the waste and maturity figures are self-reported estimates.</a:t>
+            </a:r>
+            <a:endParaRPr lang="en-US" sz="1050" dirty="0"/>
           </a:p>
         </p:txBody>
       </p:sp>
@@ -18300,7 +17907,7 @@
                 <a:ea typeface="Calibri" pitchFamily="34" charset="-122"/>
                 <a:cs typeface="Calibri" pitchFamily="34" charset="-120"/>
               </a:rPr>
-              <a:t>THE PATH FORWARD</a:t>
+              <a:t>OPERATE — RUNNING THE PRACTICE</a:t>
             </a:r>
             <a:endParaRPr lang="en-US" sz="1100" dirty="0"/>
           </a:p>
@@ -18339,7 +17946,7 @@
                 <a:ea typeface="Cambria" pitchFamily="34" charset="-122"/>
                 <a:cs typeface="Cambria" pitchFamily="34" charset="-120"/>
               </a:rPr>
-              <a:t>Where to start</a:t>
+              <a:t>Ship the insight, don't just publish it</a:t>
             </a:r>
             <a:endParaRPr lang="en-US" sz="3100" dirty="0"/>
           </a:p>
@@ -18347,21 +17954,675 @@
       </p:sp>
       <p:sp>
         <p:nvSpPr>
-          <p:cNvPr id="4" name="Shape 2"/>
-          <p:cNvSpPr/>
-          <p:nvPr/>
-        </p:nvSpPr>
-        <p:spPr>
-          <a:xfrm>
-            <a:off x="548640" y="1783080"/>
-            <a:ext cx="2587752" cy="2423160"/>
+          <p:cNvPr id="4" name="Text 2"/>
+          <p:cNvSpPr/>
+          <p:nvPr/>
+        </p:nvSpPr>
+        <p:spPr>
+          <a:xfrm>
+            <a:off x="548640" y="1536192"/>
+            <a:ext cx="10607040" cy="365760"/>
+          </a:xfrm>
+          <a:prstGeom prst="rect">
+            <a:avLst/>
+          </a:prstGeom>
+          <a:noFill/>
+          <a:ln/>
+        </p:spPr>
+        <p:txBody>
+          <a:bodyPr wrap="square" lIns="0" tIns="0" rIns="0" bIns="0" rtlCol="0" anchor="ctr"/>
+          <a:lstStyle/>
+          <a:p>
+            <a:pPr indent="0" marL="0">
+              <a:buNone/>
+            </a:pPr>
+            <a:r>
+              <a:rPr lang="en-US" sz="1500" dirty="0">
+                <a:solidFill>
+                  <a:srgbClr val="5C6675"/>
+                </a:solidFill>
+                <a:latin typeface="Calibri" pitchFamily="34" charset="0"/>
+                <a:ea typeface="Calibri" pitchFamily="34" charset="-122"/>
+                <a:cs typeface="Calibri" pitchFamily="34" charset="-120"/>
+              </a:rPr>
+              <a:t>A report tells someone a number. Only a change in what they do next reaches the bill.</a:t>
+            </a:r>
+            <a:endParaRPr lang="en-US" sz="1500" dirty="0"/>
+          </a:p>
+        </p:txBody>
+      </p:sp>
+      <p:sp>
+        <p:nvSpPr>
+          <p:cNvPr id="5" name="Shape 3"/>
+          <p:cNvSpPr/>
+          <p:nvPr/>
+        </p:nvSpPr>
+        <p:spPr>
+          <a:xfrm>
+            <a:off x="548640" y="2286000"/>
+            <a:ext cx="1700784" cy="960120"/>
           </a:xfrm>
           <a:prstGeom prst="roundRect">
             <a:avLst>
-              <a:gd name="adj" fmla="val 3396"/>
+              <a:gd name="adj" fmla="val 8571"/>
             </a:avLst>
           </a:prstGeom>
           <a:solidFill>
+            <a:srgbClr val="F1F3F6"/>
+          </a:solidFill>
+          <a:ln/>
+        </p:spPr>
+      </p:sp>
+      <p:sp>
+        <p:nvSpPr>
+          <p:cNvPr id="6" name="Text 4"/>
+          <p:cNvSpPr/>
+          <p:nvPr/>
+        </p:nvSpPr>
+        <p:spPr>
+          <a:xfrm>
+            <a:off x="548640" y="2395728"/>
+            <a:ext cx="1700784" cy="329184"/>
+          </a:xfrm>
+          <a:prstGeom prst="rect">
+            <a:avLst/>
+          </a:prstGeom>
+          <a:noFill/>
+          <a:ln/>
+        </p:spPr>
+        <p:txBody>
+          <a:bodyPr wrap="square" lIns="0" tIns="0" rIns="0" bIns="0" rtlCol="0" anchor="ctr"/>
+          <a:lstStyle/>
+          <a:p>
+            <a:pPr algn="ctr" indent="0" marL="0">
+              <a:buNone/>
+            </a:pPr>
+            <a:r>
+              <a:rPr lang="en-US" sz="1350" b="1" dirty="0">
+                <a:solidFill>
+                  <a:srgbClr val="1B2430"/>
+                </a:solidFill>
+                <a:latin typeface="Calibri" pitchFamily="34" charset="0"/>
+                <a:ea typeface="Calibri" pitchFamily="34" charset="-122"/>
+                <a:cs typeface="Calibri" pitchFamily="34" charset="-120"/>
+              </a:rPr>
+              <a:t>Finding</a:t>
+            </a:r>
+            <a:endParaRPr lang="en-US" sz="1350" dirty="0"/>
+          </a:p>
+        </p:txBody>
+      </p:sp>
+      <p:sp>
+        <p:nvSpPr>
+          <p:cNvPr id="7" name="Text 5"/>
+          <p:cNvSpPr/>
+          <p:nvPr/>
+        </p:nvSpPr>
+        <p:spPr>
+          <a:xfrm>
+            <a:off x="640080" y="2724912"/>
+            <a:ext cx="1517904" cy="402336"/>
+          </a:xfrm>
+          <a:prstGeom prst="rect">
+            <a:avLst/>
+          </a:prstGeom>
+          <a:noFill/>
+          <a:ln/>
+        </p:spPr>
+        <p:txBody>
+          <a:bodyPr wrap="square" lIns="0" tIns="0" rIns="0" bIns="0" rtlCol="0" anchor="t"/>
+          <a:lstStyle/>
+          <a:p>
+            <a:pPr algn="ctr" indent="0" marL="0">
+              <a:lnSpc>
+                <a:spcPts val="1400"/>
+              </a:lnSpc>
+              <a:buNone/>
+            </a:pPr>
+            <a:r>
+              <a:rPr lang="en-US" sz="1100" dirty="0">
+                <a:solidFill>
+                  <a:srgbClr val="5C6675"/>
+                </a:solidFill>
+                <a:latin typeface="Calibri" pitchFamily="34" charset="0"/>
+                <a:ea typeface="Calibri" pitchFamily="34" charset="-122"/>
+                <a:cs typeface="Calibri" pitchFamily="34" charset="-120"/>
+              </a:rPr>
+              <a:t>the dashboard flags it</a:t>
+            </a:r>
+            <a:endParaRPr lang="en-US" sz="1100" dirty="0"/>
+          </a:p>
+        </p:txBody>
+      </p:sp>
+      <p:sp>
+        <p:nvSpPr>
+          <p:cNvPr id="8" name="Shape 6"/>
+          <p:cNvSpPr/>
+          <p:nvPr/>
+        </p:nvSpPr>
+        <p:spPr>
+          <a:xfrm>
+            <a:off x="2267712" y="2688336"/>
+            <a:ext cx="137160" cy="146304"/>
+          </a:xfrm>
+          <a:prstGeom prst="rightArrow">
+            <a:avLst/>
+          </a:prstGeom>
+          <a:solidFill>
+            <a:srgbClr val="C3CBD5"/>
+          </a:solidFill>
+          <a:ln/>
+        </p:spPr>
+      </p:sp>
+      <p:sp>
+        <p:nvSpPr>
+          <p:cNvPr id="9" name="Shape 7"/>
+          <p:cNvSpPr/>
+          <p:nvPr/>
+        </p:nvSpPr>
+        <p:spPr>
+          <a:xfrm>
+            <a:off x="2423160" y="2286000"/>
+            <a:ext cx="1700784" cy="960120"/>
+          </a:xfrm>
+          <a:prstGeom prst="roundRect">
+            <a:avLst>
+              <a:gd name="adj" fmla="val 8571"/>
+            </a:avLst>
+          </a:prstGeom>
+          <a:solidFill>
+            <a:srgbClr val="F1F3F6"/>
+          </a:solidFill>
+          <a:ln/>
+        </p:spPr>
+      </p:sp>
+      <p:sp>
+        <p:nvSpPr>
+          <p:cNvPr id="10" name="Text 8"/>
+          <p:cNvSpPr/>
+          <p:nvPr/>
+        </p:nvSpPr>
+        <p:spPr>
+          <a:xfrm>
+            <a:off x="2423160" y="2395728"/>
+            <a:ext cx="1700784" cy="329184"/>
+          </a:xfrm>
+          <a:prstGeom prst="rect">
+            <a:avLst/>
+          </a:prstGeom>
+          <a:noFill/>
+          <a:ln/>
+        </p:spPr>
+        <p:txBody>
+          <a:bodyPr wrap="square" lIns="0" tIns="0" rIns="0" bIns="0" rtlCol="0" anchor="ctr"/>
+          <a:lstStyle/>
+          <a:p>
+            <a:pPr algn="ctr" indent="0" marL="0">
+              <a:buNone/>
+            </a:pPr>
+            <a:r>
+              <a:rPr lang="en-US" sz="1350" b="1" dirty="0">
+                <a:solidFill>
+                  <a:srgbClr val="1B2430"/>
+                </a:solidFill>
+                <a:latin typeface="Calibri" pitchFamily="34" charset="0"/>
+                <a:ea typeface="Calibri" pitchFamily="34" charset="-122"/>
+                <a:cs typeface="Calibri" pitchFamily="34" charset="-120"/>
+              </a:rPr>
+              <a:t>Named owner</a:t>
+            </a:r>
+            <a:endParaRPr lang="en-US" sz="1350" dirty="0"/>
+          </a:p>
+        </p:txBody>
+      </p:sp>
+      <p:sp>
+        <p:nvSpPr>
+          <p:cNvPr id="11" name="Text 9"/>
+          <p:cNvSpPr/>
+          <p:nvPr/>
+        </p:nvSpPr>
+        <p:spPr>
+          <a:xfrm>
+            <a:off x="2514600" y="2724912"/>
+            <a:ext cx="1517904" cy="402336"/>
+          </a:xfrm>
+          <a:prstGeom prst="rect">
+            <a:avLst/>
+          </a:prstGeom>
+          <a:noFill/>
+          <a:ln/>
+        </p:spPr>
+        <p:txBody>
+          <a:bodyPr wrap="square" lIns="0" tIns="0" rIns="0" bIns="0" rtlCol="0" anchor="t"/>
+          <a:lstStyle/>
+          <a:p>
+            <a:pPr algn="ctr" indent="0" marL="0">
+              <a:lnSpc>
+                <a:spcPts val="1400"/>
+              </a:lnSpc>
+              <a:buNone/>
+            </a:pPr>
+            <a:r>
+              <a:rPr lang="en-US" sz="1100" dirty="0">
+                <a:solidFill>
+                  <a:srgbClr val="5C6675"/>
+                </a:solidFill>
+                <a:latin typeface="Calibri" pitchFamily="34" charset="0"/>
+                <a:ea typeface="Calibri" pitchFamily="34" charset="-122"/>
+                <a:cs typeface="Calibri" pitchFamily="34" charset="-120"/>
+              </a:rPr>
+              <a:t>one person, not a team</a:t>
+            </a:r>
+            <a:endParaRPr lang="en-US" sz="1100" dirty="0"/>
+          </a:p>
+        </p:txBody>
+      </p:sp>
+      <p:sp>
+        <p:nvSpPr>
+          <p:cNvPr id="12" name="Shape 10"/>
+          <p:cNvSpPr/>
+          <p:nvPr/>
+        </p:nvSpPr>
+        <p:spPr>
+          <a:xfrm>
+            <a:off x="4142232" y="2688336"/>
+            <a:ext cx="137160" cy="146304"/>
+          </a:xfrm>
+          <a:prstGeom prst="rightArrow">
+            <a:avLst/>
+          </a:prstGeom>
+          <a:solidFill>
+            <a:srgbClr val="C3CBD5"/>
+          </a:solidFill>
+          <a:ln/>
+        </p:spPr>
+      </p:sp>
+      <p:sp>
+        <p:nvSpPr>
+          <p:cNvPr id="13" name="Shape 11"/>
+          <p:cNvSpPr/>
+          <p:nvPr/>
+        </p:nvSpPr>
+        <p:spPr>
+          <a:xfrm>
+            <a:off x="4297680" y="2286000"/>
+            <a:ext cx="1700784" cy="960120"/>
+          </a:xfrm>
+          <a:prstGeom prst="roundRect">
+            <a:avLst>
+              <a:gd name="adj" fmla="val 8571"/>
+            </a:avLst>
+          </a:prstGeom>
+          <a:solidFill>
+            <a:srgbClr val="F1F3F6"/>
+          </a:solidFill>
+          <a:ln/>
+        </p:spPr>
+      </p:sp>
+      <p:sp>
+        <p:nvSpPr>
+          <p:cNvPr id="14" name="Text 12"/>
+          <p:cNvSpPr/>
+          <p:nvPr/>
+        </p:nvSpPr>
+        <p:spPr>
+          <a:xfrm>
+            <a:off x="4297680" y="2395728"/>
+            <a:ext cx="1700784" cy="329184"/>
+          </a:xfrm>
+          <a:prstGeom prst="rect">
+            <a:avLst/>
+          </a:prstGeom>
+          <a:noFill/>
+          <a:ln/>
+        </p:spPr>
+        <p:txBody>
+          <a:bodyPr wrap="square" lIns="0" tIns="0" rIns="0" bIns="0" rtlCol="0" anchor="ctr"/>
+          <a:lstStyle/>
+          <a:p>
+            <a:pPr algn="ctr" indent="0" marL="0">
+              <a:buNone/>
+            </a:pPr>
+            <a:r>
+              <a:rPr lang="en-US" sz="1350" b="1" dirty="0">
+                <a:solidFill>
+                  <a:srgbClr val="1B2430"/>
+                </a:solidFill>
+                <a:latin typeface="Calibri" pitchFamily="34" charset="0"/>
+                <a:ea typeface="Calibri" pitchFamily="34" charset="-122"/>
+                <a:cs typeface="Calibri" pitchFamily="34" charset="-120"/>
+              </a:rPr>
+              <a:t>Sized</a:t>
+            </a:r>
+            <a:endParaRPr lang="en-US" sz="1350" dirty="0"/>
+          </a:p>
+        </p:txBody>
+      </p:sp>
+      <p:sp>
+        <p:nvSpPr>
+          <p:cNvPr id="15" name="Text 13"/>
+          <p:cNvSpPr/>
+          <p:nvPr/>
+        </p:nvSpPr>
+        <p:spPr>
+          <a:xfrm>
+            <a:off x="4389120" y="2724912"/>
+            <a:ext cx="1517904" cy="402336"/>
+          </a:xfrm>
+          <a:prstGeom prst="rect">
+            <a:avLst/>
+          </a:prstGeom>
+          <a:noFill/>
+          <a:ln/>
+        </p:spPr>
+        <p:txBody>
+          <a:bodyPr wrap="square" lIns="0" tIns="0" rIns="0" bIns="0" rtlCol="0" anchor="t"/>
+          <a:lstStyle/>
+          <a:p>
+            <a:pPr algn="ctr" indent="0" marL="0">
+              <a:lnSpc>
+                <a:spcPts val="1400"/>
+              </a:lnSpc>
+              <a:buNone/>
+            </a:pPr>
+            <a:r>
+              <a:rPr lang="en-US" sz="1100" dirty="0">
+                <a:solidFill>
+                  <a:srgbClr val="5C6675"/>
+                </a:solidFill>
+                <a:latin typeface="Calibri" pitchFamily="34" charset="0"/>
+                <a:ea typeface="Calibri" pitchFamily="34" charset="-122"/>
+                <a:cs typeface="Calibri" pitchFamily="34" charset="-120"/>
+              </a:rPr>
+              <a:t>what it is worth</a:t>
+            </a:r>
+            <a:endParaRPr lang="en-US" sz="1100" dirty="0"/>
+          </a:p>
+        </p:txBody>
+      </p:sp>
+      <p:sp>
+        <p:nvSpPr>
+          <p:cNvPr id="16" name="Shape 14"/>
+          <p:cNvSpPr/>
+          <p:nvPr/>
+        </p:nvSpPr>
+        <p:spPr>
+          <a:xfrm>
+            <a:off x="6016752" y="2688336"/>
+            <a:ext cx="137160" cy="146304"/>
+          </a:xfrm>
+          <a:prstGeom prst="rightArrow">
+            <a:avLst/>
+          </a:prstGeom>
+          <a:solidFill>
+            <a:srgbClr val="C3CBD5"/>
+          </a:solidFill>
+          <a:ln/>
+        </p:spPr>
+      </p:sp>
+      <p:sp>
+        <p:nvSpPr>
+          <p:cNvPr id="17" name="Shape 15"/>
+          <p:cNvSpPr/>
+          <p:nvPr/>
+        </p:nvSpPr>
+        <p:spPr>
+          <a:xfrm>
+            <a:off x="6172200" y="2286000"/>
+            <a:ext cx="1700784" cy="960120"/>
+          </a:xfrm>
+          <a:prstGeom prst="roundRect">
+            <a:avLst>
+              <a:gd name="adj" fmla="val 8571"/>
+            </a:avLst>
+          </a:prstGeom>
+          <a:solidFill>
+            <a:srgbClr val="F1F3F6"/>
+          </a:solidFill>
+          <a:ln/>
+        </p:spPr>
+      </p:sp>
+      <p:sp>
+        <p:nvSpPr>
+          <p:cNvPr id="18" name="Text 16"/>
+          <p:cNvSpPr/>
+          <p:nvPr/>
+        </p:nvSpPr>
+        <p:spPr>
+          <a:xfrm>
+            <a:off x="6172200" y="2395728"/>
+            <a:ext cx="1700784" cy="329184"/>
+          </a:xfrm>
+          <a:prstGeom prst="rect">
+            <a:avLst/>
+          </a:prstGeom>
+          <a:noFill/>
+          <a:ln/>
+        </p:spPr>
+        <p:txBody>
+          <a:bodyPr wrap="square" lIns="0" tIns="0" rIns="0" bIns="0" rtlCol="0" anchor="ctr"/>
+          <a:lstStyle/>
+          <a:p>
+            <a:pPr algn="ctr" indent="0" marL="0">
+              <a:buNone/>
+            </a:pPr>
+            <a:r>
+              <a:rPr lang="en-US" sz="1350" b="1" dirty="0">
+                <a:solidFill>
+                  <a:srgbClr val="1B2430"/>
+                </a:solidFill>
+                <a:latin typeface="Calibri" pitchFamily="34" charset="0"/>
+                <a:ea typeface="Calibri" pitchFamily="34" charset="-122"/>
+                <a:cs typeface="Calibri" pitchFamily="34" charset="-120"/>
+              </a:rPr>
+              <a:t>Target date</a:t>
+            </a:r>
+            <a:endParaRPr lang="en-US" sz="1350" dirty="0"/>
+          </a:p>
+        </p:txBody>
+      </p:sp>
+      <p:sp>
+        <p:nvSpPr>
+          <p:cNvPr id="19" name="Text 17"/>
+          <p:cNvSpPr/>
+          <p:nvPr/>
+        </p:nvSpPr>
+        <p:spPr>
+          <a:xfrm>
+            <a:off x="6263640" y="2724912"/>
+            <a:ext cx="1517904" cy="402336"/>
+          </a:xfrm>
+          <a:prstGeom prst="rect">
+            <a:avLst/>
+          </a:prstGeom>
+          <a:noFill/>
+          <a:ln/>
+        </p:spPr>
+        <p:txBody>
+          <a:bodyPr wrap="square" lIns="0" tIns="0" rIns="0" bIns="0" rtlCol="0" anchor="t"/>
+          <a:lstStyle/>
+          <a:p>
+            <a:pPr algn="ctr" indent="0" marL="0">
+              <a:lnSpc>
+                <a:spcPts val="1400"/>
+              </a:lnSpc>
+              <a:buNone/>
+            </a:pPr>
+            <a:r>
+              <a:rPr lang="en-US" sz="1100" dirty="0">
+                <a:solidFill>
+                  <a:srgbClr val="5C6675"/>
+                </a:solidFill>
+                <a:latin typeface="Calibri" pitchFamily="34" charset="0"/>
+                <a:ea typeface="Calibri" pitchFamily="34" charset="-122"/>
+                <a:cs typeface="Calibri" pitchFamily="34" charset="-120"/>
+              </a:rPr>
+              <a:t>when, not someday</a:t>
+            </a:r>
+            <a:endParaRPr lang="en-US" sz="1100" dirty="0"/>
+          </a:p>
+        </p:txBody>
+      </p:sp>
+      <p:sp>
+        <p:nvSpPr>
+          <p:cNvPr id="20" name="Shape 18"/>
+          <p:cNvSpPr/>
+          <p:nvPr/>
+        </p:nvSpPr>
+        <p:spPr>
+          <a:xfrm>
+            <a:off x="7891272" y="2688336"/>
+            <a:ext cx="137160" cy="146304"/>
+          </a:xfrm>
+          <a:prstGeom prst="rightArrow">
+            <a:avLst/>
+          </a:prstGeom>
+          <a:solidFill>
+            <a:srgbClr val="C3CBD5"/>
+          </a:solidFill>
+          <a:ln/>
+        </p:spPr>
+      </p:sp>
+      <p:sp>
+        <p:nvSpPr>
+          <p:cNvPr id="21" name="Shape 19"/>
+          <p:cNvSpPr/>
+          <p:nvPr/>
+        </p:nvSpPr>
+        <p:spPr>
+          <a:xfrm>
+            <a:off x="8046720" y="2286000"/>
+            <a:ext cx="1700784" cy="960120"/>
+          </a:xfrm>
+          <a:prstGeom prst="roundRect">
+            <a:avLst>
+              <a:gd name="adj" fmla="val 8571"/>
+            </a:avLst>
+          </a:prstGeom>
+          <a:solidFill>
+            <a:srgbClr val="F1F3F6"/>
+          </a:solidFill>
+          <a:ln/>
+        </p:spPr>
+      </p:sp>
+      <p:sp>
+        <p:nvSpPr>
+          <p:cNvPr id="22" name="Text 20"/>
+          <p:cNvSpPr/>
+          <p:nvPr/>
+        </p:nvSpPr>
+        <p:spPr>
+          <a:xfrm>
+            <a:off x="8046720" y="2395728"/>
+            <a:ext cx="1700784" cy="329184"/>
+          </a:xfrm>
+          <a:prstGeom prst="rect">
+            <a:avLst/>
+          </a:prstGeom>
+          <a:noFill/>
+          <a:ln/>
+        </p:spPr>
+        <p:txBody>
+          <a:bodyPr wrap="square" lIns="0" tIns="0" rIns="0" bIns="0" rtlCol="0" anchor="ctr"/>
+          <a:lstStyle/>
+          <a:p>
+            <a:pPr algn="ctr" indent="0" marL="0">
+              <a:buNone/>
+            </a:pPr>
+            <a:r>
+              <a:rPr lang="en-US" sz="1350" b="1" dirty="0">
+                <a:solidFill>
+                  <a:srgbClr val="1B2430"/>
+                </a:solidFill>
+                <a:latin typeface="Calibri" pitchFamily="34" charset="0"/>
+                <a:ea typeface="Calibri" pitchFamily="34" charset="-122"/>
+                <a:cs typeface="Calibri" pitchFamily="34" charset="-120"/>
+              </a:rPr>
+              <a:t>Reviewed</a:t>
+            </a:r>
+            <a:endParaRPr lang="en-US" sz="1350" dirty="0"/>
+          </a:p>
+        </p:txBody>
+      </p:sp>
+      <p:sp>
+        <p:nvSpPr>
+          <p:cNvPr id="23" name="Text 21"/>
+          <p:cNvSpPr/>
+          <p:nvPr/>
+        </p:nvSpPr>
+        <p:spPr>
+          <a:xfrm>
+            <a:off x="8138160" y="2724912"/>
+            <a:ext cx="1517904" cy="402336"/>
+          </a:xfrm>
+          <a:prstGeom prst="rect">
+            <a:avLst/>
+          </a:prstGeom>
+          <a:noFill/>
+          <a:ln/>
+        </p:spPr>
+        <p:txBody>
+          <a:bodyPr wrap="square" lIns="0" tIns="0" rIns="0" bIns="0" rtlCol="0" anchor="t"/>
+          <a:lstStyle/>
+          <a:p>
+            <a:pPr algn="ctr" indent="0" marL="0">
+              <a:lnSpc>
+                <a:spcPts val="1400"/>
+              </a:lnSpc>
+              <a:buNone/>
+            </a:pPr>
+            <a:r>
+              <a:rPr lang="en-US" sz="1100" dirty="0">
+                <a:solidFill>
+                  <a:srgbClr val="5C6675"/>
+                </a:solidFill>
+                <a:latin typeface="Calibri" pitchFamily="34" charset="0"/>
+                <a:ea typeface="Calibri" pitchFamily="34" charset="-122"/>
+                <a:cs typeface="Calibri" pitchFamily="34" charset="-120"/>
+              </a:rPr>
+              <a:t>did it happen</a:t>
+            </a:r>
+            <a:endParaRPr lang="en-US" sz="1100" dirty="0"/>
+          </a:p>
+        </p:txBody>
+      </p:sp>
+      <p:sp>
+        <p:nvSpPr>
+          <p:cNvPr id="24" name="Shape 22"/>
+          <p:cNvSpPr/>
+          <p:nvPr/>
+        </p:nvSpPr>
+        <p:spPr>
+          <a:xfrm>
+            <a:off x="9765792" y="2688336"/>
+            <a:ext cx="137160" cy="146304"/>
+          </a:xfrm>
+          <a:prstGeom prst="rightArrow">
+            <a:avLst/>
+          </a:prstGeom>
+          <a:solidFill>
+            <a:srgbClr val="C3CBD5"/>
+          </a:solidFill>
+          <a:ln/>
+        </p:spPr>
+      </p:sp>
+      <p:sp>
+        <p:nvSpPr>
+          <p:cNvPr id="25" name="Shape 23"/>
+          <p:cNvSpPr/>
+          <p:nvPr/>
+        </p:nvSpPr>
+        <p:spPr>
+          <a:xfrm>
+            <a:off x="9921240" y="2286000"/>
+            <a:ext cx="1700784" cy="960120"/>
+          </a:xfrm>
+          <a:prstGeom prst="roundRect">
+            <a:avLst>
+              <a:gd name="adj" fmla="val 8571"/>
+            </a:avLst>
+          </a:prstGeom>
+          <a:solidFill>
             <a:srgbClr val="1F2936"/>
           </a:solidFill>
           <a:ln/>
@@ -18369,854 +18630,695 @@
       </p:sp>
       <p:sp>
         <p:nvSpPr>
-          <p:cNvPr id="5" name="Text 3"/>
-          <p:cNvSpPr/>
-          <p:nvPr/>
-        </p:nvSpPr>
-        <p:spPr>
-          <a:xfrm>
-            <a:off x="804672" y="1965960"/>
-            <a:ext cx="1097280" cy="502920"/>
-          </a:xfrm>
-          <a:prstGeom prst="rect">
-            <a:avLst/>
-          </a:prstGeom>
-          <a:noFill/>
-          <a:ln/>
-        </p:spPr>
-        <p:txBody>
-          <a:bodyPr wrap="square" lIns="0" tIns="0" rIns="0" bIns="0" rtlCol="0" anchor="ctr"/>
-          <a:lstStyle/>
-          <a:p>
-            <a:pPr indent="0" marL="0">
-              <a:buNone/>
-            </a:pPr>
-            <a:r>
-              <a:rPr lang="en-US" sz="2800" b="1" dirty="0">
+          <p:cNvPr id="26" name="Text 24"/>
+          <p:cNvSpPr/>
+          <p:nvPr/>
+        </p:nvSpPr>
+        <p:spPr>
+          <a:xfrm>
+            <a:off x="9921240" y="2395728"/>
+            <a:ext cx="1700784" cy="329184"/>
+          </a:xfrm>
+          <a:prstGeom prst="rect">
+            <a:avLst/>
+          </a:prstGeom>
+          <a:noFill/>
+          <a:ln/>
+        </p:spPr>
+        <p:txBody>
+          <a:bodyPr wrap="square" lIns="0" tIns="0" rIns="0" bIns="0" rtlCol="0" anchor="ctr"/>
+          <a:lstStyle/>
+          <a:p>
+            <a:pPr algn="ctr" indent="0" marL="0">
+              <a:buNone/>
+            </a:pPr>
+            <a:r>
+              <a:rPr lang="en-US" sz="1350" b="1" dirty="0">
                 <a:solidFill>
                   <a:srgbClr val="E39B2C"/>
+                </a:solidFill>
+                <a:latin typeface="Calibri" pitchFamily="34" charset="0"/>
+                <a:ea typeface="Calibri" pitchFamily="34" charset="-122"/>
+                <a:cs typeface="Calibri" pitchFamily="34" charset="-120"/>
+              </a:rPr>
+              <a:t>Realized</a:t>
+            </a:r>
+            <a:endParaRPr lang="en-US" sz="1350" dirty="0"/>
+          </a:p>
+        </p:txBody>
+      </p:sp>
+      <p:sp>
+        <p:nvSpPr>
+          <p:cNvPr id="27" name="Text 25"/>
+          <p:cNvSpPr/>
+          <p:nvPr/>
+        </p:nvSpPr>
+        <p:spPr>
+          <a:xfrm>
+            <a:off x="10012680" y="2724912"/>
+            <a:ext cx="1517904" cy="402336"/>
+          </a:xfrm>
+          <a:prstGeom prst="rect">
+            <a:avLst/>
+          </a:prstGeom>
+          <a:noFill/>
+          <a:ln/>
+        </p:spPr>
+        <p:txBody>
+          <a:bodyPr wrap="square" lIns="0" tIns="0" rIns="0" bIns="0" rtlCol="0" anchor="t"/>
+          <a:lstStyle/>
+          <a:p>
+            <a:pPr algn="ctr" indent="0" marL="0">
+              <a:lnSpc>
+                <a:spcPts val="1400"/>
+              </a:lnSpc>
+              <a:buNone/>
+            </a:pPr>
+            <a:r>
+              <a:rPr lang="en-US" sz="1100" dirty="0">
+                <a:solidFill>
+                  <a:srgbClr val="9EABBA"/>
+                </a:solidFill>
+                <a:latin typeface="Calibri" pitchFamily="34" charset="0"/>
+                <a:ea typeface="Calibri" pitchFamily="34" charset="-122"/>
+                <a:cs typeface="Calibri" pitchFamily="34" charset="-120"/>
+              </a:rPr>
+              <a:t>measured on the bill</a:t>
+            </a:r>
+            <a:endParaRPr lang="en-US" sz="1100" dirty="0"/>
+          </a:p>
+        </p:txBody>
+      </p:sp>
+      <p:sp>
+        <p:nvSpPr>
+          <p:cNvPr id="28" name="Text 26"/>
+          <p:cNvSpPr/>
+          <p:nvPr/>
+        </p:nvSpPr>
+        <p:spPr>
+          <a:xfrm>
+            <a:off x="548640" y="3364992"/>
+            <a:ext cx="11091672" cy="310896"/>
+          </a:xfrm>
+          <a:prstGeom prst="rect">
+            <a:avLst/>
+          </a:prstGeom>
+          <a:noFill/>
+          <a:ln/>
+        </p:spPr>
+        <p:txBody>
+          <a:bodyPr wrap="square" lIns="0" tIns="0" rIns="0" bIns="0" rtlCol="0" anchor="ctr"/>
+          <a:lstStyle/>
+          <a:p>
+            <a:pPr indent="0" marL="0">
+              <a:buNone/>
+            </a:pPr>
+            <a:r>
+              <a:rPr lang="en-US" sz="1250" dirty="0">
+                <a:solidFill>
+                  <a:srgbClr val="5C6675"/>
+                </a:solidFill>
+                <a:latin typeface="Calibri" pitchFamily="34" charset="0"/>
+                <a:ea typeface="Calibri" pitchFamily="34" charset="-122"/>
+                <a:cs typeface="Calibri" pitchFamily="34" charset="-120"/>
+              </a:rPr>
+              <a:t>A recommendation without an owner and a date is an opinion.</a:t>
+            </a:r>
+            <a:endParaRPr lang="en-US" sz="1250" dirty="0"/>
+          </a:p>
+        </p:txBody>
+      </p:sp>
+      <p:sp>
+        <p:nvSpPr>
+          <p:cNvPr id="29" name="Shape 27"/>
+          <p:cNvSpPr/>
+          <p:nvPr/>
+        </p:nvSpPr>
+        <p:spPr>
+          <a:xfrm>
+            <a:off x="548640" y="3913632"/>
+            <a:ext cx="5394960" cy="2240280"/>
+          </a:xfrm>
+          <a:prstGeom prst="roundRect">
+            <a:avLst>
+              <a:gd name="adj" fmla="val 3673"/>
+            </a:avLst>
+          </a:prstGeom>
+          <a:solidFill>
+            <a:srgbClr val="F1F3F6"/>
+          </a:solidFill>
+          <a:ln/>
+        </p:spPr>
+      </p:sp>
+      <p:sp>
+        <p:nvSpPr>
+          <p:cNvPr id="30" name="Text 28"/>
+          <p:cNvSpPr/>
+          <p:nvPr/>
+        </p:nvSpPr>
+        <p:spPr>
+          <a:xfrm>
+            <a:off x="859536" y="4078224"/>
+            <a:ext cx="4572000" cy="292608"/>
+          </a:xfrm>
+          <a:prstGeom prst="rect">
+            <a:avLst/>
+          </a:prstGeom>
+          <a:noFill/>
+          <a:ln/>
+        </p:spPr>
+        <p:txBody>
+          <a:bodyPr wrap="square" lIns="0" tIns="0" rIns="0" bIns="0" rtlCol="0" anchor="ctr"/>
+          <a:lstStyle/>
+          <a:p>
+            <a:pPr indent="0" marL="0">
+              <a:buNone/>
+            </a:pPr>
+            <a:r>
+              <a:rPr lang="en-US" sz="1200" b="1" spc="180" kern="0" dirty="0">
+                <a:solidFill>
+                  <a:srgbClr val="5C6675"/>
+                </a:solidFill>
+                <a:latin typeface="Calibri" pitchFamily="34" charset="0"/>
+                <a:ea typeface="Calibri" pitchFamily="34" charset="-122"/>
+                <a:cs typeface="Calibri" pitchFamily="34" charset="-120"/>
+              </a:rPr>
+              <a:t>The difference that matters</a:t>
+            </a:r>
+            <a:endParaRPr lang="en-US" sz="1200" dirty="0"/>
+          </a:p>
+        </p:txBody>
+      </p:sp>
+      <p:sp>
+        <p:nvSpPr>
+          <p:cNvPr id="31" name="Text 29"/>
+          <p:cNvSpPr/>
+          <p:nvPr/>
+        </p:nvSpPr>
+        <p:spPr>
+          <a:xfrm>
+            <a:off x="859536" y="4425696"/>
+            <a:ext cx="4773168" cy="530352"/>
+          </a:xfrm>
+          <a:prstGeom prst="rect">
+            <a:avLst/>
+          </a:prstGeom>
+          <a:noFill/>
+          <a:ln/>
+        </p:spPr>
+        <p:txBody>
+          <a:bodyPr wrap="square" lIns="0" tIns="0" rIns="0" bIns="0" rtlCol="0" anchor="t"/>
+          <a:lstStyle/>
+          <a:p>
+            <a:pPr indent="0" marL="0">
+              <a:lnSpc>
+                <a:spcPts val="1900"/>
+              </a:lnSpc>
+              <a:buNone/>
+            </a:pPr>
+            <a:r>
+              <a:rPr lang="en-US" sz="1400" b="1" dirty="0">
+                <a:solidFill>
+                  <a:srgbClr val="5C6675"/>
+                </a:solidFill>
+                <a:latin typeface="Calibri" pitchFamily="34" charset="0"/>
+                <a:ea typeface="Calibri" pitchFamily="34" charset="-122"/>
+                <a:cs typeface="Calibri" pitchFamily="34" charset="-120"/>
+              </a:rPr>
+              <a:t>A report  </a:t>
+            </a:r>
+            <a:pPr indent="0" marL="0">
+              <a:lnSpc>
+                <a:spcPts val="1900"/>
+              </a:lnSpc>
+              <a:buNone/>
+            </a:pPr>
+            <a:r>
+              <a:rPr lang="en-US" sz="1400" dirty="0">
+                <a:solidFill>
+                  <a:srgbClr val="5C6675"/>
+                </a:solidFill>
+                <a:latin typeface="Calibri" pitchFamily="34" charset="0"/>
+                <a:ea typeface="Calibri" pitchFamily="34" charset="-122"/>
+                <a:cs typeface="Calibri" pitchFamily="34" charset="-120"/>
+              </a:rPr>
+              <a:t>is finished when the number is right.</a:t>
+            </a:r>
+            <a:endParaRPr lang="en-US" sz="1400" dirty="0"/>
+          </a:p>
+        </p:txBody>
+      </p:sp>
+      <p:sp>
+        <p:nvSpPr>
+          <p:cNvPr id="32" name="Text 30"/>
+          <p:cNvSpPr/>
+          <p:nvPr/>
+        </p:nvSpPr>
+        <p:spPr>
+          <a:xfrm>
+            <a:off x="859536" y="4974336"/>
+            <a:ext cx="4773168" cy="530352"/>
+          </a:xfrm>
+          <a:prstGeom prst="rect">
+            <a:avLst/>
+          </a:prstGeom>
+          <a:noFill/>
+          <a:ln/>
+        </p:spPr>
+        <p:txBody>
+          <a:bodyPr wrap="square" lIns="0" tIns="0" rIns="0" bIns="0" rtlCol="0" anchor="t"/>
+          <a:lstStyle/>
+          <a:p>
+            <a:pPr indent="0" marL="0">
+              <a:lnSpc>
+                <a:spcPts val="1900"/>
+              </a:lnSpc>
+              <a:buNone/>
+            </a:pPr>
+            <a:r>
+              <a:rPr lang="en-US" sz="1400" b="1" dirty="0">
+                <a:solidFill>
+                  <a:srgbClr val="1B2430"/>
+                </a:solidFill>
+                <a:latin typeface="Calibri" pitchFamily="34" charset="0"/>
+                <a:ea typeface="Calibri" pitchFamily="34" charset="-122"/>
+                <a:cs typeface="Calibri" pitchFamily="34" charset="-120"/>
+              </a:rPr>
+              <a:t>A product  </a:t>
+            </a:r>
+            <a:pPr indent="0" marL="0">
+              <a:lnSpc>
+                <a:spcPts val="1900"/>
+              </a:lnSpc>
+              <a:buNone/>
+            </a:pPr>
+            <a:r>
+              <a:rPr lang="en-US" sz="1400" dirty="0">
+                <a:solidFill>
+                  <a:srgbClr val="5C6675"/>
+                </a:solidFill>
+                <a:latin typeface="Calibri" pitchFamily="34" charset="0"/>
+                <a:ea typeface="Calibri" pitchFamily="34" charset="-122"/>
+                <a:cs typeface="Calibri" pitchFamily="34" charset="-120"/>
+              </a:rPr>
+              <a:t>is finished when someone behaves differently.</a:t>
+            </a:r>
+            <a:endParaRPr lang="en-US" sz="1400" dirty="0"/>
+          </a:p>
+        </p:txBody>
+      </p:sp>
+      <p:sp>
+        <p:nvSpPr>
+          <p:cNvPr id="33" name="Text 31"/>
+          <p:cNvSpPr/>
+          <p:nvPr/>
+        </p:nvSpPr>
+        <p:spPr>
+          <a:xfrm>
+            <a:off x="859536" y="5522976"/>
+            <a:ext cx="4773168" cy="457200"/>
+          </a:xfrm>
+          <a:prstGeom prst="rect">
+            <a:avLst/>
+          </a:prstGeom>
+          <a:noFill/>
+          <a:ln/>
+        </p:spPr>
+        <p:txBody>
+          <a:bodyPr wrap="square" lIns="0" tIns="0" rIns="0" bIns="0" rtlCol="0" anchor="t"/>
+          <a:lstStyle/>
+          <a:p>
+            <a:pPr indent="0" marL="0">
+              <a:lnSpc>
+                <a:spcPts val="1600"/>
+              </a:lnSpc>
+              <a:buNone/>
+            </a:pPr>
+            <a:r>
+              <a:rPr lang="en-US" sz="1250" dirty="0">
+                <a:solidFill>
+                  <a:srgbClr val="1B2430"/>
+                </a:solidFill>
+                <a:latin typeface="Calibri" pitchFamily="34" charset="0"/>
+                <a:ea typeface="Calibri" pitchFamily="34" charset="-122"/>
+                <a:cs typeface="Calibri" pitchFamily="34" charset="-120"/>
+              </a:rPr>
+              <a:t>Build for the engineer who wants the three things worth fixing this sprint — the finance report improves as a by-product.</a:t>
+            </a:r>
+            <a:endParaRPr lang="en-US" sz="1250" dirty="0"/>
+          </a:p>
+        </p:txBody>
+      </p:sp>
+      <p:sp>
+        <p:nvSpPr>
+          <p:cNvPr id="34" name="Shape 32"/>
+          <p:cNvSpPr/>
+          <p:nvPr/>
+        </p:nvSpPr>
+        <p:spPr>
+          <a:xfrm>
+            <a:off x="6245352" y="3913632"/>
+            <a:ext cx="5394960" cy="2240280"/>
+          </a:xfrm>
+          <a:prstGeom prst="roundRect">
+            <a:avLst>
+              <a:gd name="adj" fmla="val 3673"/>
+            </a:avLst>
+          </a:prstGeom>
+          <a:solidFill>
+            <a:srgbClr val="1F2936"/>
+          </a:solidFill>
+          <a:ln/>
+          <a:effectLst>
+            <a:outerShdw sx="100000" sy="100000" kx="0" ky="0" algn="bl" rotWithShape="0" blurRad="127000" dist="25400" dir="5400000">
+              <a:srgbClr val="8C99A8">
+                <a:alpha val="16000"/>
+              </a:srgbClr>
+            </a:outerShdw>
+          </a:effectLst>
+        </p:spPr>
+      </p:sp>
+      <p:sp>
+        <p:nvSpPr>
+          <p:cNvPr id="35" name="Text 33"/>
+          <p:cNvSpPr/>
+          <p:nvPr/>
+        </p:nvSpPr>
+        <p:spPr>
+          <a:xfrm>
+            <a:off x="6556248" y="4078224"/>
+            <a:ext cx="4572000" cy="292608"/>
+          </a:xfrm>
+          <a:prstGeom prst="rect">
+            <a:avLst/>
+          </a:prstGeom>
+          <a:noFill/>
+          <a:ln/>
+        </p:spPr>
+        <p:txBody>
+          <a:bodyPr wrap="square" lIns="0" tIns="0" rIns="0" bIns="0" rtlCol="0" anchor="ctr"/>
+          <a:lstStyle/>
+          <a:p>
+            <a:pPr indent="0" marL="0">
+              <a:buNone/>
+            </a:pPr>
+            <a:r>
+              <a:rPr lang="en-US" sz="1200" b="1" spc="180" kern="0" dirty="0">
+                <a:solidFill>
+                  <a:srgbClr val="E39B2C"/>
+                </a:solidFill>
+                <a:latin typeface="Calibri" pitchFamily="34" charset="0"/>
+                <a:ea typeface="Calibri" pitchFamily="34" charset="-122"/>
+                <a:cs typeface="Calibri" pitchFamily="34" charset="-120"/>
+              </a:rPr>
+              <a:t>Measure adoption, not accuracy</a:t>
+            </a:r>
+            <a:endParaRPr lang="en-US" sz="1200" dirty="0"/>
+          </a:p>
+        </p:txBody>
+      </p:sp>
+      <p:sp>
+        <p:nvSpPr>
+          <p:cNvPr id="36" name="Shape 34"/>
+          <p:cNvSpPr/>
+          <p:nvPr/>
+        </p:nvSpPr>
+        <p:spPr>
+          <a:xfrm>
+            <a:off x="6574536" y="4590288"/>
+            <a:ext cx="100584" cy="100584"/>
+          </a:xfrm>
+          <a:prstGeom prst="ellipse">
+            <a:avLst/>
+          </a:prstGeom>
+          <a:solidFill>
+            <a:srgbClr val="E39B2C"/>
+          </a:solidFill>
+          <a:ln/>
+        </p:spPr>
+      </p:sp>
+      <p:sp>
+        <p:nvSpPr>
+          <p:cNvPr id="37" name="Text 35"/>
+          <p:cNvSpPr/>
+          <p:nvPr/>
+        </p:nvSpPr>
+        <p:spPr>
+          <a:xfrm>
+            <a:off x="6812280" y="4443984"/>
+            <a:ext cx="4553712" cy="457200"/>
+          </a:xfrm>
+          <a:prstGeom prst="rect">
+            <a:avLst/>
+          </a:prstGeom>
+          <a:noFill/>
+          <a:ln/>
+        </p:spPr>
+        <p:txBody>
+          <a:bodyPr wrap="square" lIns="0" tIns="0" rIns="0" bIns="0" rtlCol="0" anchor="t"/>
+          <a:lstStyle/>
+          <a:p>
+            <a:pPr indent="0" marL="0">
+              <a:lnSpc>
+                <a:spcPts val="1600"/>
+              </a:lnSpc>
+              <a:buNone/>
+            </a:pPr>
+            <a:r>
+              <a:rPr lang="en-US" sz="1250" b="1" dirty="0">
+                <a:solidFill>
+                  <a:srgbClr val="FFFFFF"/>
+                </a:solidFill>
+                <a:latin typeface="Calibri" pitchFamily="34" charset="0"/>
+                <a:ea typeface="Calibri" pitchFamily="34" charset="-122"/>
+                <a:cs typeface="Calibri" pitchFamily="34" charset="-120"/>
+              </a:rPr>
+              <a:t>Findings with an owner and a date</a:t>
+            </a:r>
+            <a:endParaRPr lang="en-US" sz="1250" dirty="0"/>
+          </a:p>
+          <a:p>
+            <a:pPr indent="0" marL="0">
+              <a:lnSpc>
+                <a:spcPts val="1600"/>
+              </a:lnSpc>
+              <a:buNone/>
+            </a:pPr>
+            <a:r>
+              <a:rPr lang="en-US" sz="1250" dirty="0">
+                <a:solidFill>
+                  <a:srgbClr val="9EABBA"/>
+                </a:solidFill>
+                <a:latin typeface="Calibri" pitchFamily="34" charset="0"/>
+                <a:ea typeface="Calibri" pitchFamily="34" charset="-122"/>
+                <a:cs typeface="Calibri" pitchFamily="34" charset="-120"/>
+              </a:rPr>
+              <a:t>The share that became work.</a:t>
+            </a:r>
+            <a:endParaRPr lang="en-US" sz="1250" dirty="0"/>
+          </a:p>
+        </p:txBody>
+      </p:sp>
+      <p:sp>
+        <p:nvSpPr>
+          <p:cNvPr id="38" name="Shape 36"/>
+          <p:cNvSpPr/>
+          <p:nvPr/>
+        </p:nvSpPr>
+        <p:spPr>
+          <a:xfrm>
+            <a:off x="6574536" y="5102352"/>
+            <a:ext cx="100584" cy="100584"/>
+          </a:xfrm>
+          <a:prstGeom prst="ellipse">
+            <a:avLst/>
+          </a:prstGeom>
+          <a:solidFill>
+            <a:srgbClr val="E39B2C"/>
+          </a:solidFill>
+          <a:ln/>
+        </p:spPr>
+      </p:sp>
+      <p:sp>
+        <p:nvSpPr>
+          <p:cNvPr id="39" name="Text 37"/>
+          <p:cNvSpPr/>
+          <p:nvPr/>
+        </p:nvSpPr>
+        <p:spPr>
+          <a:xfrm>
+            <a:off x="6812280" y="4956048"/>
+            <a:ext cx="4553712" cy="457200"/>
+          </a:xfrm>
+          <a:prstGeom prst="rect">
+            <a:avLst/>
+          </a:prstGeom>
+          <a:noFill/>
+          <a:ln/>
+        </p:spPr>
+        <p:txBody>
+          <a:bodyPr wrap="square" lIns="0" tIns="0" rIns="0" bIns="0" rtlCol="0" anchor="t"/>
+          <a:lstStyle/>
+          <a:p>
+            <a:pPr indent="0" marL="0">
+              <a:lnSpc>
+                <a:spcPts val="1600"/>
+              </a:lnSpc>
+              <a:buNone/>
+            </a:pPr>
+            <a:r>
+              <a:rPr lang="en-US" sz="1250" b="1" dirty="0">
+                <a:solidFill>
+                  <a:srgbClr val="FFFFFF"/>
+                </a:solidFill>
+                <a:latin typeface="Calibri" pitchFamily="34" charset="0"/>
+                <a:ea typeface="Calibri" pitchFamily="34" charset="-122"/>
+                <a:cs typeface="Calibri" pitchFamily="34" charset="-120"/>
+              </a:rPr>
+              <a:t>Realized against identified saving</a:t>
+            </a:r>
+            <a:endParaRPr lang="en-US" sz="1250" dirty="0"/>
+          </a:p>
+          <a:p>
+            <a:pPr indent="0" marL="0">
+              <a:lnSpc>
+                <a:spcPts val="1600"/>
+              </a:lnSpc>
+              <a:buNone/>
+            </a:pPr>
+            <a:r>
+              <a:rPr lang="en-US" sz="1250" dirty="0">
+                <a:solidFill>
+                  <a:srgbClr val="9EABBA"/>
+                </a:solidFill>
+                <a:latin typeface="Calibri" pitchFamily="34" charset="0"/>
+                <a:ea typeface="Calibri" pitchFamily="34" charset="-122"/>
+                <a:cs typeface="Calibri" pitchFamily="34" charset="-120"/>
+              </a:rPr>
+              <a:t>Only the first reaches an invoice.</a:t>
+            </a:r>
+            <a:endParaRPr lang="en-US" sz="1250" dirty="0"/>
+          </a:p>
+        </p:txBody>
+      </p:sp>
+      <p:sp>
+        <p:nvSpPr>
+          <p:cNvPr id="40" name="Shape 38"/>
+          <p:cNvSpPr/>
+          <p:nvPr/>
+        </p:nvSpPr>
+        <p:spPr>
+          <a:xfrm>
+            <a:off x="6574536" y="5614416"/>
+            <a:ext cx="100584" cy="100584"/>
+          </a:xfrm>
+          <a:prstGeom prst="ellipse">
+            <a:avLst/>
+          </a:prstGeom>
+          <a:solidFill>
+            <a:srgbClr val="E39B2C"/>
+          </a:solidFill>
+          <a:ln/>
+        </p:spPr>
+      </p:sp>
+      <p:sp>
+        <p:nvSpPr>
+          <p:cNvPr id="41" name="Text 39"/>
+          <p:cNvSpPr/>
+          <p:nvPr/>
+        </p:nvSpPr>
+        <p:spPr>
+          <a:xfrm>
+            <a:off x="6812280" y="5468112"/>
+            <a:ext cx="4553712" cy="457200"/>
+          </a:xfrm>
+          <a:prstGeom prst="rect">
+            <a:avLst/>
+          </a:prstGeom>
+          <a:noFill/>
+          <a:ln/>
+        </p:spPr>
+        <p:txBody>
+          <a:bodyPr wrap="square" lIns="0" tIns="0" rIns="0" bIns="0" rtlCol="0" anchor="t"/>
+          <a:lstStyle/>
+          <a:p>
+            <a:pPr indent="0" marL="0">
+              <a:lnSpc>
+                <a:spcPts val="1600"/>
+              </a:lnSpc>
+              <a:buNone/>
+            </a:pPr>
+            <a:r>
+              <a:rPr lang="en-US" sz="1250" b="1" dirty="0">
+                <a:solidFill>
+                  <a:srgbClr val="FFFFFF"/>
+                </a:solidFill>
+                <a:latin typeface="Calibri" pitchFamily="34" charset="0"/>
+                <a:ea typeface="Calibri" pitchFamily="34" charset="-122"/>
+                <a:cs typeface="Calibri" pitchFamily="34" charset="-120"/>
+              </a:rPr>
+              <a:t>Time from finding to owner</a:t>
+            </a:r>
+            <a:endParaRPr lang="en-US" sz="1250" dirty="0"/>
+          </a:p>
+          <a:p>
+            <a:pPr indent="0" marL="0">
+              <a:lnSpc>
+                <a:spcPts val="1600"/>
+              </a:lnSpc>
+              <a:buNone/>
+            </a:pPr>
+            <a:r>
+              <a:rPr lang="en-US" sz="1250" dirty="0">
+                <a:solidFill>
+                  <a:srgbClr val="9EABBA"/>
+                </a:solidFill>
+                <a:latin typeface="Calibri" pitchFamily="34" charset="0"/>
+                <a:ea typeface="Calibri" pitchFamily="34" charset="-122"/>
+                <a:cs typeface="Calibri" pitchFamily="34" charset="-120"/>
+              </a:rPr>
+              <a:t>Days, not weeks — and trending down.</a:t>
+            </a:r>
+            <a:endParaRPr lang="en-US" sz="1250" dirty="0"/>
+          </a:p>
+        </p:txBody>
+      </p:sp>
+      <p:sp>
+        <p:nvSpPr>
+          <p:cNvPr id="42" name="Text 40"/>
+          <p:cNvSpPr/>
+          <p:nvPr/>
+        </p:nvSpPr>
+        <p:spPr>
+          <a:xfrm>
+            <a:off x="548640" y="6272784"/>
+            <a:ext cx="11091672" cy="402336"/>
+          </a:xfrm>
+          <a:prstGeom prst="rect">
+            <a:avLst/>
+          </a:prstGeom>
+          <a:noFill/>
+          <a:ln/>
+        </p:spPr>
+        <p:txBody>
+          <a:bodyPr wrap="square" lIns="0" tIns="0" rIns="0" bIns="0" rtlCol="0" anchor="ctr"/>
+          <a:lstStyle/>
+          <a:p>
+            <a:pPr indent="0" marL="0">
+              <a:buNone/>
+            </a:pPr>
+            <a:r>
+              <a:rPr lang="en-US" sz="1400" i="1" dirty="0">
+                <a:solidFill>
+                  <a:srgbClr val="5C6675"/>
                 </a:solidFill>
                 <a:latin typeface="Cambria" pitchFamily="34" charset="0"/>
                 <a:ea typeface="Cambria" pitchFamily="34" charset="-122"/>
                 <a:cs typeface="Cambria" pitchFamily="34" charset="-120"/>
               </a:rPr>
-              <a:t>01</a:t>
-            </a:r>
-            <a:endParaRPr lang="en-US" sz="2800" dirty="0"/>
-          </a:p>
-        </p:txBody>
-      </p:sp>
-      <p:sp>
-        <p:nvSpPr>
-          <p:cNvPr id="6" name="Text 4"/>
-          <p:cNvSpPr/>
-          <p:nvPr/>
-        </p:nvSpPr>
-        <p:spPr>
-          <a:xfrm>
-            <a:off x="786384" y="2523744"/>
-            <a:ext cx="2139696" cy="786384"/>
-          </a:xfrm>
-          <a:prstGeom prst="rect">
-            <a:avLst/>
-          </a:prstGeom>
-          <a:noFill/>
-          <a:ln/>
-        </p:spPr>
-        <p:txBody>
-          <a:bodyPr wrap="square" lIns="0" tIns="0" rIns="0" bIns="0" rtlCol="0" anchor="t"/>
-          <a:lstStyle/>
-          <a:p>
-            <a:pPr indent="0" marL="0">
-              <a:lnSpc>
-                <a:spcPts val="2000"/>
-              </a:lnSpc>
-              <a:buNone/>
-            </a:pPr>
-            <a:r>
-              <a:rPr lang="en-US" sz="1500" b="1" dirty="0">
-                <a:solidFill>
-                  <a:srgbClr val="FFFFFF"/>
-                </a:solidFill>
-                <a:latin typeface="Cambria" pitchFamily="34" charset="0"/>
-                <a:ea typeface="Cambria" pitchFamily="34" charset="-122"/>
-                <a:cs typeface="Cambria" pitchFamily="34" charset="-120"/>
-              </a:rPr>
-              <a:t>Set the tagging standard</a:t>
-            </a:r>
-            <a:endParaRPr lang="en-US" sz="1500" dirty="0"/>
-          </a:p>
-        </p:txBody>
-      </p:sp>
-      <p:sp>
-        <p:nvSpPr>
-          <p:cNvPr id="7" name="Text 5"/>
-          <p:cNvSpPr/>
-          <p:nvPr/>
-        </p:nvSpPr>
-        <p:spPr>
-          <a:xfrm>
-            <a:off x="786384" y="3346704"/>
-            <a:ext cx="2139696" cy="749808"/>
-          </a:xfrm>
-          <a:prstGeom prst="rect">
-            <a:avLst/>
-          </a:prstGeom>
-          <a:noFill/>
-          <a:ln/>
-        </p:spPr>
-        <p:txBody>
-          <a:bodyPr wrap="square" lIns="0" tIns="0" rIns="0" bIns="0" rtlCol="0" anchor="t"/>
-          <a:lstStyle/>
-          <a:p>
-            <a:pPr indent="0" marL="0">
-              <a:lnSpc>
-                <a:spcPts val="1500"/>
-              </a:lnSpc>
-              <a:buNone/>
-            </a:pPr>
-            <a:r>
-              <a:rPr lang="en-US" sz="1200" dirty="0">
-                <a:solidFill>
-                  <a:srgbClr val="9EABBA"/>
-                </a:solidFill>
-                <a:latin typeface="Calibri" pitchFamily="34" charset="0"/>
-                <a:ea typeface="Calibri" pitchFamily="34" charset="-122"/>
-                <a:cs typeface="Calibri" pitchFamily="34" charset="-120"/>
-              </a:rPr>
-              <a:t>Agree a consistent taxonomy before investing in dashboards.</a:t>
-            </a:r>
-            <a:endParaRPr lang="en-US" sz="1200" dirty="0"/>
-          </a:p>
-        </p:txBody>
-      </p:sp>
-      <p:sp>
-        <p:nvSpPr>
-          <p:cNvPr id="8" name="Shape 6"/>
-          <p:cNvSpPr/>
-          <p:nvPr/>
-        </p:nvSpPr>
-        <p:spPr>
-          <a:xfrm>
-            <a:off x="3383280" y="1783080"/>
-            <a:ext cx="2587752" cy="2423160"/>
-          </a:xfrm>
-          <a:prstGeom prst="roundRect">
-            <a:avLst>
-              <a:gd name="adj" fmla="val 3396"/>
-            </a:avLst>
-          </a:prstGeom>
-          <a:solidFill>
-            <a:srgbClr val="F1F3F6"/>
-          </a:solidFill>
-          <a:ln/>
-        </p:spPr>
-      </p:sp>
-      <p:sp>
-        <p:nvSpPr>
-          <p:cNvPr id="9" name="Text 7"/>
-          <p:cNvSpPr/>
-          <p:nvPr/>
-        </p:nvSpPr>
-        <p:spPr>
-          <a:xfrm>
-            <a:off x="3639312" y="1965960"/>
-            <a:ext cx="1097280" cy="502920"/>
-          </a:xfrm>
-          <a:prstGeom prst="rect">
-            <a:avLst/>
-          </a:prstGeom>
-          <a:noFill/>
-          <a:ln/>
-        </p:spPr>
-        <p:txBody>
-          <a:bodyPr wrap="square" lIns="0" tIns="0" rIns="0" bIns="0" rtlCol="0" anchor="ctr"/>
-          <a:lstStyle/>
-          <a:p>
-            <a:pPr indent="0" marL="0">
-              <a:buNone/>
-            </a:pPr>
-            <a:r>
-              <a:rPr lang="en-US" sz="2800" b="1" dirty="0">
-                <a:solidFill>
-                  <a:srgbClr val="B9C2CD"/>
-                </a:solidFill>
-                <a:latin typeface="Cambria" pitchFamily="34" charset="0"/>
-                <a:ea typeface="Cambria" pitchFamily="34" charset="-122"/>
-                <a:cs typeface="Cambria" pitchFamily="34" charset="-120"/>
-              </a:rPr>
-              <a:t>02</a:t>
-            </a:r>
-            <a:endParaRPr lang="en-US" sz="2800" dirty="0"/>
-          </a:p>
-        </p:txBody>
-      </p:sp>
-      <p:sp>
-        <p:nvSpPr>
-          <p:cNvPr id="10" name="Text 8"/>
-          <p:cNvSpPr/>
-          <p:nvPr/>
-        </p:nvSpPr>
-        <p:spPr>
-          <a:xfrm>
-            <a:off x="3621024" y="2523744"/>
-            <a:ext cx="2139696" cy="786384"/>
-          </a:xfrm>
-          <a:prstGeom prst="rect">
-            <a:avLst/>
-          </a:prstGeom>
-          <a:noFill/>
-          <a:ln/>
-        </p:spPr>
-        <p:txBody>
-          <a:bodyPr wrap="square" lIns="0" tIns="0" rIns="0" bIns="0" rtlCol="0" anchor="t"/>
-          <a:lstStyle/>
-          <a:p>
-            <a:pPr indent="0" marL="0">
-              <a:lnSpc>
-                <a:spcPts val="2000"/>
-              </a:lnSpc>
-              <a:buNone/>
-            </a:pPr>
-            <a:r>
-              <a:rPr lang="en-US" sz="1500" b="1" dirty="0">
-                <a:solidFill>
-                  <a:srgbClr val="1B2430"/>
-                </a:solidFill>
-                <a:latin typeface="Cambria" pitchFamily="34" charset="0"/>
-                <a:ea typeface="Cambria" pitchFamily="34" charset="-122"/>
-                <a:cs typeface="Cambria" pitchFamily="34" charset="-120"/>
-              </a:rPr>
-              <a:t>Start with the biggest spend</a:t>
-            </a:r>
-            <a:endParaRPr lang="en-US" sz="1500" dirty="0"/>
-          </a:p>
-        </p:txBody>
-      </p:sp>
-      <p:sp>
-        <p:nvSpPr>
-          <p:cNvPr id="11" name="Text 9"/>
-          <p:cNvSpPr/>
-          <p:nvPr/>
-        </p:nvSpPr>
-        <p:spPr>
-          <a:xfrm>
-            <a:off x="3621024" y="3346704"/>
-            <a:ext cx="2139696" cy="749808"/>
-          </a:xfrm>
-          <a:prstGeom prst="rect">
-            <a:avLst/>
-          </a:prstGeom>
-          <a:noFill/>
-          <a:ln/>
-        </p:spPr>
-        <p:txBody>
-          <a:bodyPr wrap="square" lIns="0" tIns="0" rIns="0" bIns="0" rtlCol="0" anchor="t"/>
-          <a:lstStyle/>
-          <a:p>
-            <a:pPr indent="0" marL="0">
-              <a:lnSpc>
-                <a:spcPts val="1500"/>
-              </a:lnSpc>
-              <a:buNone/>
-            </a:pPr>
-            <a:r>
-              <a:rPr lang="en-US" sz="1200" dirty="0">
-                <a:solidFill>
-                  <a:srgbClr val="5C6675"/>
-                </a:solidFill>
-                <a:latin typeface="Calibri" pitchFamily="34" charset="0"/>
-                <a:ea typeface="Calibri" pitchFamily="34" charset="-122"/>
-                <a:cs typeface="Calibri" pitchFamily="34" charset="-120"/>
-              </a:rPr>
-              <a:t>Attack the largest categories first. Don't chase perfect granularity everywhere.</a:t>
-            </a:r>
-            <a:endParaRPr lang="en-US" sz="1200" dirty="0"/>
-          </a:p>
-        </p:txBody>
-      </p:sp>
-      <p:sp>
-        <p:nvSpPr>
-          <p:cNvPr id="12" name="Shape 10"/>
-          <p:cNvSpPr/>
-          <p:nvPr/>
-        </p:nvSpPr>
-        <p:spPr>
-          <a:xfrm>
-            <a:off x="6217920" y="1783080"/>
-            <a:ext cx="2587752" cy="2423160"/>
-          </a:xfrm>
-          <a:prstGeom prst="roundRect">
-            <a:avLst>
-              <a:gd name="adj" fmla="val 3396"/>
-            </a:avLst>
-          </a:prstGeom>
-          <a:solidFill>
-            <a:srgbClr val="F1F3F6"/>
-          </a:solidFill>
-          <a:ln/>
-        </p:spPr>
-      </p:sp>
-      <p:sp>
-        <p:nvSpPr>
-          <p:cNvPr id="13" name="Text 11"/>
-          <p:cNvSpPr/>
-          <p:nvPr/>
-        </p:nvSpPr>
-        <p:spPr>
-          <a:xfrm>
-            <a:off x="6473952" y="1965960"/>
-            <a:ext cx="1097280" cy="502920"/>
-          </a:xfrm>
-          <a:prstGeom prst="rect">
-            <a:avLst/>
-          </a:prstGeom>
-          <a:noFill/>
-          <a:ln/>
-        </p:spPr>
-        <p:txBody>
-          <a:bodyPr wrap="square" lIns="0" tIns="0" rIns="0" bIns="0" rtlCol="0" anchor="ctr"/>
-          <a:lstStyle/>
-          <a:p>
-            <a:pPr indent="0" marL="0">
-              <a:buNone/>
-            </a:pPr>
-            <a:r>
-              <a:rPr lang="en-US" sz="2800" b="1" dirty="0">
-                <a:solidFill>
-                  <a:srgbClr val="B9C2CD"/>
-                </a:solidFill>
-                <a:latin typeface="Cambria" pitchFamily="34" charset="0"/>
-                <a:ea typeface="Cambria" pitchFamily="34" charset="-122"/>
-                <a:cs typeface="Cambria" pitchFamily="34" charset="-120"/>
-              </a:rPr>
-              <a:t>03</a:t>
-            </a:r>
-            <a:endParaRPr lang="en-US" sz="2800" dirty="0"/>
-          </a:p>
-        </p:txBody>
-      </p:sp>
-      <p:sp>
-        <p:nvSpPr>
-          <p:cNvPr id="14" name="Text 12"/>
-          <p:cNvSpPr/>
-          <p:nvPr/>
-        </p:nvSpPr>
-        <p:spPr>
-          <a:xfrm>
-            <a:off x="6455664" y="2523744"/>
-            <a:ext cx="2139696" cy="786384"/>
-          </a:xfrm>
-          <a:prstGeom prst="rect">
-            <a:avLst/>
-          </a:prstGeom>
-          <a:noFill/>
-          <a:ln/>
-        </p:spPr>
-        <p:txBody>
-          <a:bodyPr wrap="square" lIns="0" tIns="0" rIns="0" bIns="0" rtlCol="0" anchor="t"/>
-          <a:lstStyle/>
-          <a:p>
-            <a:pPr indent="0" marL="0">
-              <a:lnSpc>
-                <a:spcPts val="2000"/>
-              </a:lnSpc>
-              <a:buNone/>
-            </a:pPr>
-            <a:r>
-              <a:rPr lang="en-US" sz="1500" b="1" dirty="0">
-                <a:solidFill>
-                  <a:srgbClr val="1B2430"/>
-                </a:solidFill>
-                <a:latin typeface="Cambria" pitchFamily="34" charset="0"/>
-                <a:ea typeface="Cambria" pitchFamily="34" charset="-122"/>
-                <a:cs typeface="Cambria" pitchFamily="34" charset="-120"/>
-              </a:rPr>
-              <a:t>Get finance and engineering talking</a:t>
-            </a:r>
-            <a:endParaRPr lang="en-US" sz="1500" dirty="0"/>
-          </a:p>
-        </p:txBody>
-      </p:sp>
-      <p:sp>
-        <p:nvSpPr>
-          <p:cNvPr id="15" name="Text 13"/>
-          <p:cNvSpPr/>
-          <p:nvPr/>
-        </p:nvSpPr>
-        <p:spPr>
-          <a:xfrm>
-            <a:off x="6455664" y="3346704"/>
-            <a:ext cx="2139696" cy="749808"/>
-          </a:xfrm>
-          <a:prstGeom prst="rect">
-            <a:avLst/>
-          </a:prstGeom>
-          <a:noFill/>
-          <a:ln/>
-        </p:spPr>
-        <p:txBody>
-          <a:bodyPr wrap="square" lIns="0" tIns="0" rIns="0" bIns="0" rtlCol="0" anchor="t"/>
-          <a:lstStyle/>
-          <a:p>
-            <a:pPr indent="0" marL="0">
-              <a:lnSpc>
-                <a:spcPts val="1500"/>
-              </a:lnSpc>
-              <a:buNone/>
-            </a:pPr>
-            <a:r>
-              <a:rPr lang="en-US" sz="1200" dirty="0">
-                <a:solidFill>
-                  <a:srgbClr val="5C6675"/>
-                </a:solidFill>
-                <a:latin typeface="Calibri" pitchFamily="34" charset="0"/>
-                <a:ea typeface="Calibri" pitchFamily="34" charset="-122"/>
-                <a:cs typeface="Calibri" pitchFamily="34" charset="-120"/>
-              </a:rPr>
-              <a:t>Bring both into the conversation early, not as an afterthought.</a:t>
-            </a:r>
-            <a:endParaRPr lang="en-US" sz="1200" dirty="0"/>
-          </a:p>
-        </p:txBody>
-      </p:sp>
-      <p:sp>
-        <p:nvSpPr>
-          <p:cNvPr id="16" name="Shape 14"/>
-          <p:cNvSpPr/>
-          <p:nvPr/>
-        </p:nvSpPr>
-        <p:spPr>
-          <a:xfrm>
-            <a:off x="9052560" y="1783080"/>
-            <a:ext cx="2587752" cy="2423160"/>
-          </a:xfrm>
-          <a:prstGeom prst="roundRect">
-            <a:avLst>
-              <a:gd name="adj" fmla="val 3396"/>
-            </a:avLst>
-          </a:prstGeom>
-          <a:solidFill>
-            <a:srgbClr val="F1F3F6"/>
-          </a:solidFill>
-          <a:ln/>
-        </p:spPr>
-      </p:sp>
-      <p:sp>
-        <p:nvSpPr>
-          <p:cNvPr id="17" name="Text 15"/>
-          <p:cNvSpPr/>
-          <p:nvPr/>
-        </p:nvSpPr>
-        <p:spPr>
-          <a:xfrm>
-            <a:off x="9308592" y="1965960"/>
-            <a:ext cx="1097280" cy="502920"/>
-          </a:xfrm>
-          <a:prstGeom prst="rect">
-            <a:avLst/>
-          </a:prstGeom>
-          <a:noFill/>
-          <a:ln/>
-        </p:spPr>
-        <p:txBody>
-          <a:bodyPr wrap="square" lIns="0" tIns="0" rIns="0" bIns="0" rtlCol="0" anchor="ctr"/>
-          <a:lstStyle/>
-          <a:p>
-            <a:pPr indent="0" marL="0">
-              <a:buNone/>
-            </a:pPr>
-            <a:r>
-              <a:rPr lang="en-US" sz="2800" b="1" dirty="0">
-                <a:solidFill>
-                  <a:srgbClr val="B9C2CD"/>
-                </a:solidFill>
-                <a:latin typeface="Cambria" pitchFamily="34" charset="0"/>
-                <a:ea typeface="Cambria" pitchFamily="34" charset="-122"/>
-                <a:cs typeface="Cambria" pitchFamily="34" charset="-120"/>
-              </a:rPr>
-              <a:t>04</a:t>
-            </a:r>
-            <a:endParaRPr lang="en-US" sz="2800" dirty="0"/>
-          </a:p>
-        </p:txBody>
-      </p:sp>
-      <p:sp>
-        <p:nvSpPr>
-          <p:cNvPr id="18" name="Text 16"/>
-          <p:cNvSpPr/>
-          <p:nvPr/>
-        </p:nvSpPr>
-        <p:spPr>
-          <a:xfrm>
-            <a:off x="9290304" y="2523744"/>
-            <a:ext cx="2139696" cy="786384"/>
-          </a:xfrm>
-          <a:prstGeom prst="rect">
-            <a:avLst/>
-          </a:prstGeom>
-          <a:noFill/>
-          <a:ln/>
-        </p:spPr>
-        <p:txBody>
-          <a:bodyPr wrap="square" lIns="0" tIns="0" rIns="0" bIns="0" rtlCol="0" anchor="t"/>
-          <a:lstStyle/>
-          <a:p>
-            <a:pPr indent="0" marL="0">
-              <a:lnSpc>
-                <a:spcPts val="2000"/>
-              </a:lnSpc>
-              <a:buNone/>
-            </a:pPr>
-            <a:r>
-              <a:rPr lang="en-US" sz="1500" b="1" dirty="0">
-                <a:solidFill>
-                  <a:srgbClr val="1B2430"/>
-                </a:solidFill>
-                <a:latin typeface="Cambria" pitchFamily="34" charset="0"/>
-                <a:ea typeface="Cambria" pitchFamily="34" charset="-122"/>
-                <a:cs typeface="Cambria" pitchFamily="34" charset="-120"/>
-              </a:rPr>
-              <a:t>Set guardrails early</a:t>
-            </a:r>
-            <a:endParaRPr lang="en-US" sz="1500" dirty="0"/>
-          </a:p>
-        </p:txBody>
-      </p:sp>
-      <p:sp>
-        <p:nvSpPr>
-          <p:cNvPr id="19" name="Text 17"/>
-          <p:cNvSpPr/>
-          <p:nvPr/>
-        </p:nvSpPr>
-        <p:spPr>
-          <a:xfrm>
-            <a:off x="9290304" y="3346704"/>
-            <a:ext cx="2139696" cy="749808"/>
-          </a:xfrm>
-          <a:prstGeom prst="rect">
-            <a:avLst/>
-          </a:prstGeom>
-          <a:noFill/>
-          <a:ln/>
-        </p:spPr>
-        <p:txBody>
-          <a:bodyPr wrap="square" lIns="0" tIns="0" rIns="0" bIns="0" rtlCol="0" anchor="t"/>
-          <a:lstStyle/>
-          <a:p>
-            <a:pPr indent="0" marL="0">
-              <a:lnSpc>
-                <a:spcPts val="1500"/>
-              </a:lnSpc>
-              <a:buNone/>
-            </a:pPr>
-            <a:r>
-              <a:rPr lang="en-US" sz="1200" dirty="0">
-                <a:solidFill>
-                  <a:srgbClr val="5C6675"/>
-                </a:solidFill>
-                <a:latin typeface="Calibri" pitchFamily="34" charset="0"/>
-                <a:ea typeface="Calibri" pitchFamily="34" charset="-122"/>
-                <a:cs typeface="Calibri" pitchFamily="34" charset="-120"/>
-              </a:rPr>
-              <a:t>Owners, budget thresholds and quotas cost little to add — and stop the expensive surprises.</a:t>
-            </a:r>
-            <a:endParaRPr lang="en-US" sz="1200" dirty="0"/>
-          </a:p>
-        </p:txBody>
-      </p:sp>
-      <p:sp>
-        <p:nvSpPr>
-          <p:cNvPr id="20" name="Shape 18"/>
-          <p:cNvSpPr/>
-          <p:nvPr/>
-        </p:nvSpPr>
-        <p:spPr>
-          <a:xfrm>
-            <a:off x="548640" y="4434840"/>
-            <a:ext cx="11091672" cy="1874520"/>
-          </a:xfrm>
-          <a:prstGeom prst="roundRect">
-            <a:avLst>
-              <a:gd name="adj" fmla="val 4390"/>
-            </a:avLst>
-          </a:prstGeom>
-          <a:solidFill>
-            <a:srgbClr val="F1F3F6"/>
-          </a:solidFill>
-          <a:ln/>
-        </p:spPr>
-      </p:sp>
-      <p:sp>
-        <p:nvSpPr>
-          <p:cNvPr id="21" name="Text 19"/>
-          <p:cNvSpPr/>
-          <p:nvPr/>
-        </p:nvSpPr>
-        <p:spPr>
-          <a:xfrm>
-            <a:off x="877824" y="4572000"/>
-            <a:ext cx="6035040" cy="292608"/>
-          </a:xfrm>
-          <a:prstGeom prst="rect">
-            <a:avLst/>
-          </a:prstGeom>
-          <a:noFill/>
-          <a:ln/>
-        </p:spPr>
-        <p:txBody>
-          <a:bodyPr wrap="square" lIns="0" tIns="0" rIns="0" bIns="0" rtlCol="0" anchor="ctr"/>
-          <a:lstStyle/>
-          <a:p>
-            <a:pPr indent="0" marL="0">
-              <a:buNone/>
-            </a:pPr>
-            <a:r>
-              <a:rPr lang="en-US" sz="1200" b="1" spc="180" kern="0" dirty="0">
-                <a:solidFill>
-                  <a:srgbClr val="5C6675"/>
-                </a:solidFill>
-                <a:latin typeface="Calibri" pitchFamily="34" charset="0"/>
-                <a:ea typeface="Calibri" pitchFamily="34" charset="-122"/>
-                <a:cs typeface="Calibri" pitchFamily="34" charset="-120"/>
-              </a:rPr>
-              <a:t>Tooling — match the footprint, not the ambition</a:t>
-            </a:r>
-            <a:endParaRPr lang="en-US" sz="1200" dirty="0"/>
-          </a:p>
-        </p:txBody>
-      </p:sp>
-      <p:sp>
-        <p:nvSpPr>
-          <p:cNvPr id="22" name="Text 20"/>
-          <p:cNvSpPr/>
-          <p:nvPr/>
-        </p:nvSpPr>
-        <p:spPr>
-          <a:xfrm>
-            <a:off x="877824" y="4937760"/>
-            <a:ext cx="1737360" cy="384048"/>
-          </a:xfrm>
-          <a:prstGeom prst="rect">
-            <a:avLst/>
-          </a:prstGeom>
-          <a:noFill/>
-          <a:ln/>
-        </p:spPr>
-        <p:txBody>
-          <a:bodyPr wrap="square" lIns="0" tIns="0" rIns="0" bIns="0" rtlCol="0" anchor="ctr"/>
-          <a:lstStyle/>
-          <a:p>
-            <a:pPr indent="0" marL="0">
-              <a:buNone/>
-            </a:pPr>
-            <a:r>
-              <a:rPr lang="en-US" sz="1350" b="1" dirty="0">
-                <a:solidFill>
-                  <a:srgbClr val="2E8B7A"/>
-                </a:solidFill>
-                <a:latin typeface="Calibri" pitchFamily="34" charset="0"/>
-                <a:ea typeface="Calibri" pitchFamily="34" charset="-122"/>
-                <a:cs typeface="Calibri" pitchFamily="34" charset="-120"/>
-              </a:rPr>
-              <a:t>Native</a:t>
-            </a:r>
-            <a:endParaRPr lang="en-US" sz="1350" dirty="0"/>
-          </a:p>
-        </p:txBody>
-      </p:sp>
-      <p:sp>
-        <p:nvSpPr>
-          <p:cNvPr id="23" name="Text 21"/>
-          <p:cNvSpPr/>
-          <p:nvPr/>
-        </p:nvSpPr>
-        <p:spPr>
-          <a:xfrm>
-            <a:off x="2651760" y="4937760"/>
-            <a:ext cx="8595360" cy="384048"/>
-          </a:xfrm>
-          <a:prstGeom prst="rect">
-            <a:avLst/>
-          </a:prstGeom>
-          <a:noFill/>
-          <a:ln/>
-        </p:spPr>
-        <p:txBody>
-          <a:bodyPr wrap="square" lIns="0" tIns="0" rIns="0" bIns="0" rtlCol="0" anchor="ctr"/>
-          <a:lstStyle/>
-          <a:p>
-            <a:pPr indent="0" marL="0">
-              <a:buNone/>
-            </a:pPr>
-            <a:r>
-              <a:rPr lang="en-US" sz="1350" dirty="0">
-                <a:solidFill>
-                  <a:srgbClr val="5C6675"/>
-                </a:solidFill>
-                <a:latin typeface="Calibri" pitchFamily="34" charset="0"/>
-                <a:ea typeface="Calibri" pitchFamily="34" charset="-122"/>
-                <a:cs typeface="Calibri" pitchFamily="34" charset="-120"/>
-              </a:rPr>
-              <a:t>AWS Cost Explorer  ·  Azure Cost Management  ·  GCP Billing</a:t>
-            </a:r>
-            <a:endParaRPr lang="en-US" sz="1350" dirty="0"/>
-          </a:p>
-        </p:txBody>
-      </p:sp>
-      <p:sp>
-        <p:nvSpPr>
-          <p:cNvPr id="24" name="Text 22"/>
-          <p:cNvSpPr/>
-          <p:nvPr/>
-        </p:nvSpPr>
-        <p:spPr>
-          <a:xfrm>
-            <a:off x="877824" y="5349240"/>
-            <a:ext cx="1737360" cy="384048"/>
-          </a:xfrm>
-          <a:prstGeom prst="rect">
-            <a:avLst/>
-          </a:prstGeom>
-          <a:noFill/>
-          <a:ln/>
-        </p:spPr>
-        <p:txBody>
-          <a:bodyPr wrap="square" lIns="0" tIns="0" rIns="0" bIns="0" rtlCol="0" anchor="ctr"/>
-          <a:lstStyle/>
-          <a:p>
-            <a:pPr indent="0" marL="0">
-              <a:buNone/>
-            </a:pPr>
-            <a:r>
-              <a:rPr lang="en-US" sz="1350" b="1" dirty="0">
-                <a:solidFill>
-                  <a:srgbClr val="B87B18"/>
-                </a:solidFill>
-                <a:latin typeface="Calibri" pitchFamily="34" charset="0"/>
-                <a:ea typeface="Calibri" pitchFamily="34" charset="-122"/>
-                <a:cs typeface="Calibri" pitchFamily="34" charset="-120"/>
-              </a:rPr>
-              <a:t>Third-party</a:t>
-            </a:r>
-            <a:endParaRPr lang="en-US" sz="1350" dirty="0"/>
-          </a:p>
-        </p:txBody>
-      </p:sp>
-      <p:sp>
-        <p:nvSpPr>
-          <p:cNvPr id="25" name="Text 23"/>
-          <p:cNvSpPr/>
-          <p:nvPr/>
-        </p:nvSpPr>
-        <p:spPr>
-          <a:xfrm>
-            <a:off x="2651760" y="5349240"/>
-            <a:ext cx="8595360" cy="384048"/>
-          </a:xfrm>
-          <a:prstGeom prst="rect">
-            <a:avLst/>
-          </a:prstGeom>
-          <a:noFill/>
-          <a:ln/>
-        </p:spPr>
-        <p:txBody>
-          <a:bodyPr wrap="square" lIns="0" tIns="0" rIns="0" bIns="0" rtlCol="0" anchor="ctr"/>
-          <a:lstStyle/>
-          <a:p>
-            <a:pPr indent="0" marL="0">
-              <a:buNone/>
-            </a:pPr>
-            <a:r>
-              <a:rPr lang="en-US" sz="1350" dirty="0">
-                <a:solidFill>
-                  <a:srgbClr val="5C6675"/>
-                </a:solidFill>
-                <a:latin typeface="Calibri" pitchFamily="34" charset="0"/>
-                <a:ea typeface="Calibri" pitchFamily="34" charset="-122"/>
-                <a:cs typeface="Calibri" pitchFamily="34" charset="-120"/>
-              </a:rPr>
-              <a:t>CloudHealth  ·  Apptio  ·  Vantage  ·  nOps  ·  Finout  ·  CoreStack</a:t>
-            </a:r>
-            <a:endParaRPr lang="en-US" sz="1350" dirty="0"/>
-          </a:p>
-        </p:txBody>
-      </p:sp>
-      <p:sp>
-        <p:nvSpPr>
-          <p:cNvPr id="26" name="Text 24"/>
-          <p:cNvSpPr/>
-          <p:nvPr/>
-        </p:nvSpPr>
-        <p:spPr>
-          <a:xfrm>
-            <a:off x="877824" y="5760720"/>
-            <a:ext cx="1737360" cy="384048"/>
-          </a:xfrm>
-          <a:prstGeom prst="rect">
-            <a:avLst/>
-          </a:prstGeom>
-          <a:noFill/>
-          <a:ln/>
-        </p:spPr>
-        <p:txBody>
-          <a:bodyPr wrap="square" lIns="0" tIns="0" rIns="0" bIns="0" rtlCol="0" anchor="ctr"/>
-          <a:lstStyle/>
-          <a:p>
-            <a:pPr indent="0" marL="0">
-              <a:buNone/>
-            </a:pPr>
-            <a:r>
-              <a:rPr lang="en-US" sz="1350" b="1" dirty="0">
-                <a:solidFill>
-                  <a:srgbClr val="1B2430"/>
-                </a:solidFill>
-                <a:latin typeface="Calibri" pitchFamily="34" charset="0"/>
-                <a:ea typeface="Calibri" pitchFamily="34" charset="-122"/>
-                <a:cs typeface="Calibri" pitchFamily="34" charset="-120"/>
-              </a:rPr>
-              <a:t>Standard</a:t>
-            </a:r>
-            <a:endParaRPr lang="en-US" sz="1350" dirty="0"/>
-          </a:p>
-        </p:txBody>
-      </p:sp>
-      <p:sp>
-        <p:nvSpPr>
-          <p:cNvPr id="27" name="Text 25"/>
-          <p:cNvSpPr/>
-          <p:nvPr/>
-        </p:nvSpPr>
-        <p:spPr>
-          <a:xfrm>
-            <a:off x="2651760" y="5760720"/>
-            <a:ext cx="8595360" cy="384048"/>
-          </a:xfrm>
-          <a:prstGeom prst="rect">
-            <a:avLst/>
-          </a:prstGeom>
-          <a:noFill/>
-          <a:ln/>
-        </p:spPr>
-        <p:txBody>
-          <a:bodyPr wrap="square" lIns="0" tIns="0" rIns="0" bIns="0" rtlCol="0" anchor="ctr"/>
-          <a:lstStyle/>
-          <a:p>
-            <a:pPr indent="0" marL="0">
-              <a:buNone/>
-            </a:pPr>
-            <a:r>
-              <a:rPr lang="en-US" sz="1350" dirty="0">
-                <a:solidFill>
-                  <a:srgbClr val="5C6675"/>
-                </a:solidFill>
-                <a:latin typeface="Calibri" pitchFamily="34" charset="0"/>
-                <a:ea typeface="Calibri" pitchFamily="34" charset="-122"/>
-                <a:cs typeface="Calibri" pitchFamily="34" charset="-120"/>
-              </a:rPr>
-              <a:t>FOCUS-compliant platforms for multi-cloud reporting</a:t>
-            </a:r>
-            <a:endParaRPr lang="en-US" sz="1350" dirty="0"/>
+              <a:t>The goal is a better decision, not a lower bill — the lower bill is what a better decision looks like a quarter later.</a:t>
+            </a:r>
+            <a:endParaRPr lang="en-US" sz="1400" dirty="0"/>
           </a:p>
         </p:txBody>
       </p:sp>
@@ -19231,6 +19333,991 @@
 <file path=ppt/slides/slide24.xml><?xml version="1.0" encoding="utf-8"?>
 <p:sld xmlns:a="http://schemas.openxmlformats.org/drawingml/2006/main" xmlns:r="http://schemas.openxmlformats.org/officeDocument/2006/relationships" xmlns:p="http://schemas.openxmlformats.org/presentationml/2006/main">
   <p:cSld name="Slide 24">
+    <p:bg>
+      <p:bgPr>
+        <a:solidFill>
+          <a:srgbClr val="FFFFFF"/>
+        </a:solidFill>
+      </p:bgPr>
+    </p:bg>
+    <p:spTree>
+      <p:nvGrpSpPr>
+        <p:cNvPr id="1" name=""/>
+        <p:cNvGrpSpPr/>
+        <p:nvPr/>
+      </p:nvGrpSpPr>
+      <p:grpSpPr>
+        <a:xfrm>
+          <a:off x="0" y="0"/>
+          <a:ext cx="0" cy="0"/>
+          <a:chOff x="0" y="0"/>
+          <a:chExt cx="0" cy="0"/>
+        </a:xfrm>
+      </p:grpSpPr>
+      <p:sp>
+        <p:nvSpPr>
+          <p:cNvPr id="2" name="Text 0"/>
+          <p:cNvSpPr/>
+          <p:nvPr/>
+        </p:nvSpPr>
+        <p:spPr>
+          <a:xfrm>
+            <a:off x="548640" y="475488"/>
+            <a:ext cx="7315200" cy="256032"/>
+          </a:xfrm>
+          <a:prstGeom prst="rect">
+            <a:avLst/>
+          </a:prstGeom>
+          <a:noFill/>
+          <a:ln/>
+        </p:spPr>
+        <p:txBody>
+          <a:bodyPr wrap="square" lIns="0" tIns="0" rIns="0" bIns="0" rtlCol="0" anchor="ctr"/>
+          <a:lstStyle/>
+          <a:p>
+            <a:pPr indent="0" marL="0">
+              <a:buNone/>
+            </a:pPr>
+            <a:r>
+              <a:rPr lang="en-US" sz="1100" b="1" spc="220" kern="0" dirty="0">
+                <a:solidFill>
+                  <a:srgbClr val="E39B2C"/>
+                </a:solidFill>
+                <a:latin typeface="Calibri" pitchFamily="34" charset="0"/>
+                <a:ea typeface="Calibri" pitchFamily="34" charset="-122"/>
+                <a:cs typeface="Calibri" pitchFamily="34" charset="-120"/>
+              </a:rPr>
+              <a:t>THE PATH FORWARD</a:t>
+            </a:r>
+            <a:endParaRPr lang="en-US" sz="1100" dirty="0"/>
+          </a:p>
+        </p:txBody>
+      </p:sp>
+      <p:sp>
+        <p:nvSpPr>
+          <p:cNvPr id="3" name="Text 1"/>
+          <p:cNvSpPr/>
+          <p:nvPr/>
+        </p:nvSpPr>
+        <p:spPr>
+          <a:xfrm>
+            <a:off x="548640" y="768096"/>
+            <a:ext cx="11091672" cy="804672"/>
+          </a:xfrm>
+          <a:prstGeom prst="rect">
+            <a:avLst/>
+          </a:prstGeom>
+          <a:noFill/>
+          <a:ln/>
+        </p:spPr>
+        <p:txBody>
+          <a:bodyPr wrap="square" lIns="0" tIns="0" rIns="0" bIns="0" rtlCol="0" anchor="ctr"/>
+          <a:lstStyle/>
+          <a:p>
+            <a:pPr indent="0" marL="0">
+              <a:buNone/>
+            </a:pPr>
+            <a:r>
+              <a:rPr lang="en-US" sz="3100" b="1" dirty="0">
+                <a:solidFill>
+                  <a:srgbClr val="1B2430"/>
+                </a:solidFill>
+                <a:latin typeface="Cambria" pitchFamily="34" charset="0"/>
+                <a:ea typeface="Cambria" pitchFamily="34" charset="-122"/>
+                <a:cs typeface="Cambria" pitchFamily="34" charset="-120"/>
+              </a:rPr>
+              <a:t>Where to start</a:t>
+            </a:r>
+            <a:endParaRPr lang="en-US" sz="3100" dirty="0"/>
+          </a:p>
+        </p:txBody>
+      </p:sp>
+      <p:sp>
+        <p:nvSpPr>
+          <p:cNvPr id="4" name="Shape 2"/>
+          <p:cNvSpPr/>
+          <p:nvPr/>
+        </p:nvSpPr>
+        <p:spPr>
+          <a:xfrm>
+            <a:off x="548640" y="1783080"/>
+            <a:ext cx="2587752" cy="2423160"/>
+          </a:xfrm>
+          <a:prstGeom prst="roundRect">
+            <a:avLst>
+              <a:gd name="adj" fmla="val 3396"/>
+            </a:avLst>
+          </a:prstGeom>
+          <a:solidFill>
+            <a:srgbClr val="1F2936"/>
+          </a:solidFill>
+          <a:ln/>
+        </p:spPr>
+      </p:sp>
+      <p:sp>
+        <p:nvSpPr>
+          <p:cNvPr id="5" name="Text 3"/>
+          <p:cNvSpPr/>
+          <p:nvPr/>
+        </p:nvSpPr>
+        <p:spPr>
+          <a:xfrm>
+            <a:off x="804672" y="1965960"/>
+            <a:ext cx="1097280" cy="502920"/>
+          </a:xfrm>
+          <a:prstGeom prst="rect">
+            <a:avLst/>
+          </a:prstGeom>
+          <a:noFill/>
+          <a:ln/>
+        </p:spPr>
+        <p:txBody>
+          <a:bodyPr wrap="square" lIns="0" tIns="0" rIns="0" bIns="0" rtlCol="0" anchor="ctr"/>
+          <a:lstStyle/>
+          <a:p>
+            <a:pPr indent="0" marL="0">
+              <a:buNone/>
+            </a:pPr>
+            <a:r>
+              <a:rPr lang="en-US" sz="2800" b="1" dirty="0">
+                <a:solidFill>
+                  <a:srgbClr val="E39B2C"/>
+                </a:solidFill>
+                <a:latin typeface="Cambria" pitchFamily="34" charset="0"/>
+                <a:ea typeface="Cambria" pitchFamily="34" charset="-122"/>
+                <a:cs typeface="Cambria" pitchFamily="34" charset="-120"/>
+              </a:rPr>
+              <a:t>01</a:t>
+            </a:r>
+            <a:endParaRPr lang="en-US" sz="2800" dirty="0"/>
+          </a:p>
+        </p:txBody>
+      </p:sp>
+      <p:sp>
+        <p:nvSpPr>
+          <p:cNvPr id="6" name="Text 4"/>
+          <p:cNvSpPr/>
+          <p:nvPr/>
+        </p:nvSpPr>
+        <p:spPr>
+          <a:xfrm>
+            <a:off x="786384" y="2523744"/>
+            <a:ext cx="2139696" cy="786384"/>
+          </a:xfrm>
+          <a:prstGeom prst="rect">
+            <a:avLst/>
+          </a:prstGeom>
+          <a:noFill/>
+          <a:ln/>
+        </p:spPr>
+        <p:txBody>
+          <a:bodyPr wrap="square" lIns="0" tIns="0" rIns="0" bIns="0" rtlCol="0" anchor="t"/>
+          <a:lstStyle/>
+          <a:p>
+            <a:pPr indent="0" marL="0">
+              <a:lnSpc>
+                <a:spcPts val="2000"/>
+              </a:lnSpc>
+              <a:buNone/>
+            </a:pPr>
+            <a:r>
+              <a:rPr lang="en-US" sz="1500" b="1" dirty="0">
+                <a:solidFill>
+                  <a:srgbClr val="FFFFFF"/>
+                </a:solidFill>
+                <a:latin typeface="Cambria" pitchFamily="34" charset="0"/>
+                <a:ea typeface="Cambria" pitchFamily="34" charset="-122"/>
+                <a:cs typeface="Cambria" pitchFamily="34" charset="-120"/>
+              </a:rPr>
+              <a:t>Set the tagging standard</a:t>
+            </a:r>
+            <a:endParaRPr lang="en-US" sz="1500" dirty="0"/>
+          </a:p>
+        </p:txBody>
+      </p:sp>
+      <p:sp>
+        <p:nvSpPr>
+          <p:cNvPr id="7" name="Text 5"/>
+          <p:cNvSpPr/>
+          <p:nvPr/>
+        </p:nvSpPr>
+        <p:spPr>
+          <a:xfrm>
+            <a:off x="786384" y="3346704"/>
+            <a:ext cx="2139696" cy="749808"/>
+          </a:xfrm>
+          <a:prstGeom prst="rect">
+            <a:avLst/>
+          </a:prstGeom>
+          <a:noFill/>
+          <a:ln/>
+        </p:spPr>
+        <p:txBody>
+          <a:bodyPr wrap="square" lIns="0" tIns="0" rIns="0" bIns="0" rtlCol="0" anchor="t"/>
+          <a:lstStyle/>
+          <a:p>
+            <a:pPr indent="0" marL="0">
+              <a:lnSpc>
+                <a:spcPts val="1500"/>
+              </a:lnSpc>
+              <a:buNone/>
+            </a:pPr>
+            <a:r>
+              <a:rPr lang="en-US" sz="1200" dirty="0">
+                <a:solidFill>
+                  <a:srgbClr val="9EABBA"/>
+                </a:solidFill>
+                <a:latin typeface="Calibri" pitchFamily="34" charset="0"/>
+                <a:ea typeface="Calibri" pitchFamily="34" charset="-122"/>
+                <a:cs typeface="Calibri" pitchFamily="34" charset="-120"/>
+              </a:rPr>
+              <a:t>Agree a consistent taxonomy before investing in dashboards.</a:t>
+            </a:r>
+            <a:endParaRPr lang="en-US" sz="1200" dirty="0"/>
+          </a:p>
+        </p:txBody>
+      </p:sp>
+      <p:sp>
+        <p:nvSpPr>
+          <p:cNvPr id="8" name="Shape 6"/>
+          <p:cNvSpPr/>
+          <p:nvPr/>
+        </p:nvSpPr>
+        <p:spPr>
+          <a:xfrm>
+            <a:off x="3383280" y="1783080"/>
+            <a:ext cx="2587752" cy="2423160"/>
+          </a:xfrm>
+          <a:prstGeom prst="roundRect">
+            <a:avLst>
+              <a:gd name="adj" fmla="val 3396"/>
+            </a:avLst>
+          </a:prstGeom>
+          <a:solidFill>
+            <a:srgbClr val="F1F3F6"/>
+          </a:solidFill>
+          <a:ln/>
+        </p:spPr>
+      </p:sp>
+      <p:sp>
+        <p:nvSpPr>
+          <p:cNvPr id="9" name="Text 7"/>
+          <p:cNvSpPr/>
+          <p:nvPr/>
+        </p:nvSpPr>
+        <p:spPr>
+          <a:xfrm>
+            <a:off x="3639312" y="1965960"/>
+            <a:ext cx="1097280" cy="502920"/>
+          </a:xfrm>
+          <a:prstGeom prst="rect">
+            <a:avLst/>
+          </a:prstGeom>
+          <a:noFill/>
+          <a:ln/>
+        </p:spPr>
+        <p:txBody>
+          <a:bodyPr wrap="square" lIns="0" tIns="0" rIns="0" bIns="0" rtlCol="0" anchor="ctr"/>
+          <a:lstStyle/>
+          <a:p>
+            <a:pPr indent="0" marL="0">
+              <a:buNone/>
+            </a:pPr>
+            <a:r>
+              <a:rPr lang="en-US" sz="2800" b="1" dirty="0">
+                <a:solidFill>
+                  <a:srgbClr val="B9C2CD"/>
+                </a:solidFill>
+                <a:latin typeface="Cambria" pitchFamily="34" charset="0"/>
+                <a:ea typeface="Cambria" pitchFamily="34" charset="-122"/>
+                <a:cs typeface="Cambria" pitchFamily="34" charset="-120"/>
+              </a:rPr>
+              <a:t>02</a:t>
+            </a:r>
+            <a:endParaRPr lang="en-US" sz="2800" dirty="0"/>
+          </a:p>
+        </p:txBody>
+      </p:sp>
+      <p:sp>
+        <p:nvSpPr>
+          <p:cNvPr id="10" name="Text 8"/>
+          <p:cNvSpPr/>
+          <p:nvPr/>
+        </p:nvSpPr>
+        <p:spPr>
+          <a:xfrm>
+            <a:off x="3621024" y="2523744"/>
+            <a:ext cx="2139696" cy="786384"/>
+          </a:xfrm>
+          <a:prstGeom prst="rect">
+            <a:avLst/>
+          </a:prstGeom>
+          <a:noFill/>
+          <a:ln/>
+        </p:spPr>
+        <p:txBody>
+          <a:bodyPr wrap="square" lIns="0" tIns="0" rIns="0" bIns="0" rtlCol="0" anchor="t"/>
+          <a:lstStyle/>
+          <a:p>
+            <a:pPr indent="0" marL="0">
+              <a:lnSpc>
+                <a:spcPts val="2000"/>
+              </a:lnSpc>
+              <a:buNone/>
+            </a:pPr>
+            <a:r>
+              <a:rPr lang="en-US" sz="1500" b="1" dirty="0">
+                <a:solidFill>
+                  <a:srgbClr val="1B2430"/>
+                </a:solidFill>
+                <a:latin typeface="Cambria" pitchFamily="34" charset="0"/>
+                <a:ea typeface="Cambria" pitchFamily="34" charset="-122"/>
+                <a:cs typeface="Cambria" pitchFamily="34" charset="-120"/>
+              </a:rPr>
+              <a:t>Start with the biggest spend</a:t>
+            </a:r>
+            <a:endParaRPr lang="en-US" sz="1500" dirty="0"/>
+          </a:p>
+        </p:txBody>
+      </p:sp>
+      <p:sp>
+        <p:nvSpPr>
+          <p:cNvPr id="11" name="Text 9"/>
+          <p:cNvSpPr/>
+          <p:nvPr/>
+        </p:nvSpPr>
+        <p:spPr>
+          <a:xfrm>
+            <a:off x="3621024" y="3346704"/>
+            <a:ext cx="2139696" cy="749808"/>
+          </a:xfrm>
+          <a:prstGeom prst="rect">
+            <a:avLst/>
+          </a:prstGeom>
+          <a:noFill/>
+          <a:ln/>
+        </p:spPr>
+        <p:txBody>
+          <a:bodyPr wrap="square" lIns="0" tIns="0" rIns="0" bIns="0" rtlCol="0" anchor="t"/>
+          <a:lstStyle/>
+          <a:p>
+            <a:pPr indent="0" marL="0">
+              <a:lnSpc>
+                <a:spcPts val="1500"/>
+              </a:lnSpc>
+              <a:buNone/>
+            </a:pPr>
+            <a:r>
+              <a:rPr lang="en-US" sz="1200" dirty="0">
+                <a:solidFill>
+                  <a:srgbClr val="5C6675"/>
+                </a:solidFill>
+                <a:latin typeface="Calibri" pitchFamily="34" charset="0"/>
+                <a:ea typeface="Calibri" pitchFamily="34" charset="-122"/>
+                <a:cs typeface="Calibri" pitchFamily="34" charset="-120"/>
+              </a:rPr>
+              <a:t>Attack the largest categories first. Don't chase perfect granularity everywhere.</a:t>
+            </a:r>
+            <a:endParaRPr lang="en-US" sz="1200" dirty="0"/>
+          </a:p>
+        </p:txBody>
+      </p:sp>
+      <p:sp>
+        <p:nvSpPr>
+          <p:cNvPr id="12" name="Shape 10"/>
+          <p:cNvSpPr/>
+          <p:nvPr/>
+        </p:nvSpPr>
+        <p:spPr>
+          <a:xfrm>
+            <a:off x="6217920" y="1783080"/>
+            <a:ext cx="2587752" cy="2423160"/>
+          </a:xfrm>
+          <a:prstGeom prst="roundRect">
+            <a:avLst>
+              <a:gd name="adj" fmla="val 3396"/>
+            </a:avLst>
+          </a:prstGeom>
+          <a:solidFill>
+            <a:srgbClr val="F1F3F6"/>
+          </a:solidFill>
+          <a:ln/>
+        </p:spPr>
+      </p:sp>
+      <p:sp>
+        <p:nvSpPr>
+          <p:cNvPr id="13" name="Text 11"/>
+          <p:cNvSpPr/>
+          <p:nvPr/>
+        </p:nvSpPr>
+        <p:spPr>
+          <a:xfrm>
+            <a:off x="6473952" y="1965960"/>
+            <a:ext cx="1097280" cy="502920"/>
+          </a:xfrm>
+          <a:prstGeom prst="rect">
+            <a:avLst/>
+          </a:prstGeom>
+          <a:noFill/>
+          <a:ln/>
+        </p:spPr>
+        <p:txBody>
+          <a:bodyPr wrap="square" lIns="0" tIns="0" rIns="0" bIns="0" rtlCol="0" anchor="ctr"/>
+          <a:lstStyle/>
+          <a:p>
+            <a:pPr indent="0" marL="0">
+              <a:buNone/>
+            </a:pPr>
+            <a:r>
+              <a:rPr lang="en-US" sz="2800" b="1" dirty="0">
+                <a:solidFill>
+                  <a:srgbClr val="B9C2CD"/>
+                </a:solidFill>
+                <a:latin typeface="Cambria" pitchFamily="34" charset="0"/>
+                <a:ea typeface="Cambria" pitchFamily="34" charset="-122"/>
+                <a:cs typeface="Cambria" pitchFamily="34" charset="-120"/>
+              </a:rPr>
+              <a:t>03</a:t>
+            </a:r>
+            <a:endParaRPr lang="en-US" sz="2800" dirty="0"/>
+          </a:p>
+        </p:txBody>
+      </p:sp>
+      <p:sp>
+        <p:nvSpPr>
+          <p:cNvPr id="14" name="Text 12"/>
+          <p:cNvSpPr/>
+          <p:nvPr/>
+        </p:nvSpPr>
+        <p:spPr>
+          <a:xfrm>
+            <a:off x="6455664" y="2523744"/>
+            <a:ext cx="2139696" cy="786384"/>
+          </a:xfrm>
+          <a:prstGeom prst="rect">
+            <a:avLst/>
+          </a:prstGeom>
+          <a:noFill/>
+          <a:ln/>
+        </p:spPr>
+        <p:txBody>
+          <a:bodyPr wrap="square" lIns="0" tIns="0" rIns="0" bIns="0" rtlCol="0" anchor="t"/>
+          <a:lstStyle/>
+          <a:p>
+            <a:pPr indent="0" marL="0">
+              <a:lnSpc>
+                <a:spcPts val="2000"/>
+              </a:lnSpc>
+              <a:buNone/>
+            </a:pPr>
+            <a:r>
+              <a:rPr lang="en-US" sz="1500" b="1" dirty="0">
+                <a:solidFill>
+                  <a:srgbClr val="1B2430"/>
+                </a:solidFill>
+                <a:latin typeface="Cambria" pitchFamily="34" charset="0"/>
+                <a:ea typeface="Cambria" pitchFamily="34" charset="-122"/>
+                <a:cs typeface="Cambria" pitchFamily="34" charset="-120"/>
+              </a:rPr>
+              <a:t>Get finance and engineering talking</a:t>
+            </a:r>
+            <a:endParaRPr lang="en-US" sz="1500" dirty="0"/>
+          </a:p>
+        </p:txBody>
+      </p:sp>
+      <p:sp>
+        <p:nvSpPr>
+          <p:cNvPr id="15" name="Text 13"/>
+          <p:cNvSpPr/>
+          <p:nvPr/>
+        </p:nvSpPr>
+        <p:spPr>
+          <a:xfrm>
+            <a:off x="6455664" y="3346704"/>
+            <a:ext cx="2139696" cy="749808"/>
+          </a:xfrm>
+          <a:prstGeom prst="rect">
+            <a:avLst/>
+          </a:prstGeom>
+          <a:noFill/>
+          <a:ln/>
+        </p:spPr>
+        <p:txBody>
+          <a:bodyPr wrap="square" lIns="0" tIns="0" rIns="0" bIns="0" rtlCol="0" anchor="t"/>
+          <a:lstStyle/>
+          <a:p>
+            <a:pPr indent="0" marL="0">
+              <a:lnSpc>
+                <a:spcPts val="1500"/>
+              </a:lnSpc>
+              <a:buNone/>
+            </a:pPr>
+            <a:r>
+              <a:rPr lang="en-US" sz="1200" dirty="0">
+                <a:solidFill>
+                  <a:srgbClr val="5C6675"/>
+                </a:solidFill>
+                <a:latin typeface="Calibri" pitchFamily="34" charset="0"/>
+                <a:ea typeface="Calibri" pitchFamily="34" charset="-122"/>
+                <a:cs typeface="Calibri" pitchFamily="34" charset="-120"/>
+              </a:rPr>
+              <a:t>Bring both into the conversation early, not as an afterthought.</a:t>
+            </a:r>
+            <a:endParaRPr lang="en-US" sz="1200" dirty="0"/>
+          </a:p>
+        </p:txBody>
+      </p:sp>
+      <p:sp>
+        <p:nvSpPr>
+          <p:cNvPr id="16" name="Shape 14"/>
+          <p:cNvSpPr/>
+          <p:nvPr/>
+        </p:nvSpPr>
+        <p:spPr>
+          <a:xfrm>
+            <a:off x="9052560" y="1783080"/>
+            <a:ext cx="2587752" cy="2423160"/>
+          </a:xfrm>
+          <a:prstGeom prst="roundRect">
+            <a:avLst>
+              <a:gd name="adj" fmla="val 3396"/>
+            </a:avLst>
+          </a:prstGeom>
+          <a:solidFill>
+            <a:srgbClr val="F1F3F6"/>
+          </a:solidFill>
+          <a:ln/>
+        </p:spPr>
+      </p:sp>
+      <p:sp>
+        <p:nvSpPr>
+          <p:cNvPr id="17" name="Text 15"/>
+          <p:cNvSpPr/>
+          <p:nvPr/>
+        </p:nvSpPr>
+        <p:spPr>
+          <a:xfrm>
+            <a:off x="9308592" y="1965960"/>
+            <a:ext cx="1097280" cy="502920"/>
+          </a:xfrm>
+          <a:prstGeom prst="rect">
+            <a:avLst/>
+          </a:prstGeom>
+          <a:noFill/>
+          <a:ln/>
+        </p:spPr>
+        <p:txBody>
+          <a:bodyPr wrap="square" lIns="0" tIns="0" rIns="0" bIns="0" rtlCol="0" anchor="ctr"/>
+          <a:lstStyle/>
+          <a:p>
+            <a:pPr indent="0" marL="0">
+              <a:buNone/>
+            </a:pPr>
+            <a:r>
+              <a:rPr lang="en-US" sz="2800" b="1" dirty="0">
+                <a:solidFill>
+                  <a:srgbClr val="B9C2CD"/>
+                </a:solidFill>
+                <a:latin typeface="Cambria" pitchFamily="34" charset="0"/>
+                <a:ea typeface="Cambria" pitchFamily="34" charset="-122"/>
+                <a:cs typeface="Cambria" pitchFamily="34" charset="-120"/>
+              </a:rPr>
+              <a:t>04</a:t>
+            </a:r>
+            <a:endParaRPr lang="en-US" sz="2800" dirty="0"/>
+          </a:p>
+        </p:txBody>
+      </p:sp>
+      <p:sp>
+        <p:nvSpPr>
+          <p:cNvPr id="18" name="Text 16"/>
+          <p:cNvSpPr/>
+          <p:nvPr/>
+        </p:nvSpPr>
+        <p:spPr>
+          <a:xfrm>
+            <a:off x="9290304" y="2523744"/>
+            <a:ext cx="2139696" cy="786384"/>
+          </a:xfrm>
+          <a:prstGeom prst="rect">
+            <a:avLst/>
+          </a:prstGeom>
+          <a:noFill/>
+          <a:ln/>
+        </p:spPr>
+        <p:txBody>
+          <a:bodyPr wrap="square" lIns="0" tIns="0" rIns="0" bIns="0" rtlCol="0" anchor="t"/>
+          <a:lstStyle/>
+          <a:p>
+            <a:pPr indent="0" marL="0">
+              <a:lnSpc>
+                <a:spcPts val="2000"/>
+              </a:lnSpc>
+              <a:buNone/>
+            </a:pPr>
+            <a:r>
+              <a:rPr lang="en-US" sz="1500" b="1" dirty="0">
+                <a:solidFill>
+                  <a:srgbClr val="1B2430"/>
+                </a:solidFill>
+                <a:latin typeface="Cambria" pitchFamily="34" charset="0"/>
+                <a:ea typeface="Cambria" pitchFamily="34" charset="-122"/>
+                <a:cs typeface="Cambria" pitchFamily="34" charset="-120"/>
+              </a:rPr>
+              <a:t>Set guardrails early</a:t>
+            </a:r>
+            <a:endParaRPr lang="en-US" sz="1500" dirty="0"/>
+          </a:p>
+        </p:txBody>
+      </p:sp>
+      <p:sp>
+        <p:nvSpPr>
+          <p:cNvPr id="19" name="Text 17"/>
+          <p:cNvSpPr/>
+          <p:nvPr/>
+        </p:nvSpPr>
+        <p:spPr>
+          <a:xfrm>
+            <a:off x="9290304" y="3346704"/>
+            <a:ext cx="2139696" cy="749808"/>
+          </a:xfrm>
+          <a:prstGeom prst="rect">
+            <a:avLst/>
+          </a:prstGeom>
+          <a:noFill/>
+          <a:ln/>
+        </p:spPr>
+        <p:txBody>
+          <a:bodyPr wrap="square" lIns="0" tIns="0" rIns="0" bIns="0" rtlCol="0" anchor="t"/>
+          <a:lstStyle/>
+          <a:p>
+            <a:pPr indent="0" marL="0">
+              <a:lnSpc>
+                <a:spcPts val="1500"/>
+              </a:lnSpc>
+              <a:buNone/>
+            </a:pPr>
+            <a:r>
+              <a:rPr lang="en-US" sz="1200" dirty="0">
+                <a:solidFill>
+                  <a:srgbClr val="5C6675"/>
+                </a:solidFill>
+                <a:latin typeface="Calibri" pitchFamily="34" charset="0"/>
+                <a:ea typeface="Calibri" pitchFamily="34" charset="-122"/>
+                <a:cs typeface="Calibri" pitchFamily="34" charset="-120"/>
+              </a:rPr>
+              <a:t>Owners, budget thresholds and quotas cost little to add — and stop the expensive surprises.</a:t>
+            </a:r>
+            <a:endParaRPr lang="en-US" sz="1200" dirty="0"/>
+          </a:p>
+        </p:txBody>
+      </p:sp>
+      <p:sp>
+        <p:nvSpPr>
+          <p:cNvPr id="20" name="Shape 18"/>
+          <p:cNvSpPr/>
+          <p:nvPr/>
+        </p:nvSpPr>
+        <p:spPr>
+          <a:xfrm>
+            <a:off x="548640" y="4434840"/>
+            <a:ext cx="11091672" cy="1874520"/>
+          </a:xfrm>
+          <a:prstGeom prst="roundRect">
+            <a:avLst>
+              <a:gd name="adj" fmla="val 4390"/>
+            </a:avLst>
+          </a:prstGeom>
+          <a:solidFill>
+            <a:srgbClr val="F1F3F6"/>
+          </a:solidFill>
+          <a:ln/>
+        </p:spPr>
+      </p:sp>
+      <p:sp>
+        <p:nvSpPr>
+          <p:cNvPr id="21" name="Text 19"/>
+          <p:cNvSpPr/>
+          <p:nvPr/>
+        </p:nvSpPr>
+        <p:spPr>
+          <a:xfrm>
+            <a:off x="877824" y="4572000"/>
+            <a:ext cx="6035040" cy="292608"/>
+          </a:xfrm>
+          <a:prstGeom prst="rect">
+            <a:avLst/>
+          </a:prstGeom>
+          <a:noFill/>
+          <a:ln/>
+        </p:spPr>
+        <p:txBody>
+          <a:bodyPr wrap="square" lIns="0" tIns="0" rIns="0" bIns="0" rtlCol="0" anchor="ctr"/>
+          <a:lstStyle/>
+          <a:p>
+            <a:pPr indent="0" marL="0">
+              <a:buNone/>
+            </a:pPr>
+            <a:r>
+              <a:rPr lang="en-US" sz="1200" b="1" spc="180" kern="0" dirty="0">
+                <a:solidFill>
+                  <a:srgbClr val="5C6675"/>
+                </a:solidFill>
+                <a:latin typeface="Calibri" pitchFamily="34" charset="0"/>
+                <a:ea typeface="Calibri" pitchFamily="34" charset="-122"/>
+                <a:cs typeface="Calibri" pitchFamily="34" charset="-120"/>
+              </a:rPr>
+              <a:t>Tooling — match the footprint, not the ambition</a:t>
+            </a:r>
+            <a:endParaRPr lang="en-US" sz="1200" dirty="0"/>
+          </a:p>
+        </p:txBody>
+      </p:sp>
+      <p:sp>
+        <p:nvSpPr>
+          <p:cNvPr id="22" name="Text 20"/>
+          <p:cNvSpPr/>
+          <p:nvPr/>
+        </p:nvSpPr>
+        <p:spPr>
+          <a:xfrm>
+            <a:off x="877824" y="4937760"/>
+            <a:ext cx="1737360" cy="384048"/>
+          </a:xfrm>
+          <a:prstGeom prst="rect">
+            <a:avLst/>
+          </a:prstGeom>
+          <a:noFill/>
+          <a:ln/>
+        </p:spPr>
+        <p:txBody>
+          <a:bodyPr wrap="square" lIns="0" tIns="0" rIns="0" bIns="0" rtlCol="0" anchor="ctr"/>
+          <a:lstStyle/>
+          <a:p>
+            <a:pPr indent="0" marL="0">
+              <a:buNone/>
+            </a:pPr>
+            <a:r>
+              <a:rPr lang="en-US" sz="1350" b="1" dirty="0">
+                <a:solidFill>
+                  <a:srgbClr val="2E8B7A"/>
+                </a:solidFill>
+                <a:latin typeface="Calibri" pitchFamily="34" charset="0"/>
+                <a:ea typeface="Calibri" pitchFamily="34" charset="-122"/>
+                <a:cs typeface="Calibri" pitchFamily="34" charset="-120"/>
+              </a:rPr>
+              <a:t>Native</a:t>
+            </a:r>
+            <a:endParaRPr lang="en-US" sz="1350" dirty="0"/>
+          </a:p>
+        </p:txBody>
+      </p:sp>
+      <p:sp>
+        <p:nvSpPr>
+          <p:cNvPr id="23" name="Text 21"/>
+          <p:cNvSpPr/>
+          <p:nvPr/>
+        </p:nvSpPr>
+        <p:spPr>
+          <a:xfrm>
+            <a:off x="2651760" y="4937760"/>
+            <a:ext cx="8595360" cy="384048"/>
+          </a:xfrm>
+          <a:prstGeom prst="rect">
+            <a:avLst/>
+          </a:prstGeom>
+          <a:noFill/>
+          <a:ln/>
+        </p:spPr>
+        <p:txBody>
+          <a:bodyPr wrap="square" lIns="0" tIns="0" rIns="0" bIns="0" rtlCol="0" anchor="ctr"/>
+          <a:lstStyle/>
+          <a:p>
+            <a:pPr indent="0" marL="0">
+              <a:buNone/>
+            </a:pPr>
+            <a:r>
+              <a:rPr lang="en-US" sz="1350" dirty="0">
+                <a:solidFill>
+                  <a:srgbClr val="5C6675"/>
+                </a:solidFill>
+                <a:latin typeface="Calibri" pitchFamily="34" charset="0"/>
+                <a:ea typeface="Calibri" pitchFamily="34" charset="-122"/>
+                <a:cs typeface="Calibri" pitchFamily="34" charset="-120"/>
+              </a:rPr>
+              <a:t>AWS Cost Explorer  ·  Azure Cost Management  ·  GCP Billing</a:t>
+            </a:r>
+            <a:endParaRPr lang="en-US" sz="1350" dirty="0"/>
+          </a:p>
+        </p:txBody>
+      </p:sp>
+      <p:sp>
+        <p:nvSpPr>
+          <p:cNvPr id="24" name="Text 22"/>
+          <p:cNvSpPr/>
+          <p:nvPr/>
+        </p:nvSpPr>
+        <p:spPr>
+          <a:xfrm>
+            <a:off x="877824" y="5349240"/>
+            <a:ext cx="1737360" cy="384048"/>
+          </a:xfrm>
+          <a:prstGeom prst="rect">
+            <a:avLst/>
+          </a:prstGeom>
+          <a:noFill/>
+          <a:ln/>
+        </p:spPr>
+        <p:txBody>
+          <a:bodyPr wrap="square" lIns="0" tIns="0" rIns="0" bIns="0" rtlCol="0" anchor="ctr"/>
+          <a:lstStyle/>
+          <a:p>
+            <a:pPr indent="0" marL="0">
+              <a:buNone/>
+            </a:pPr>
+            <a:r>
+              <a:rPr lang="en-US" sz="1350" b="1" dirty="0">
+                <a:solidFill>
+                  <a:srgbClr val="B87B18"/>
+                </a:solidFill>
+                <a:latin typeface="Calibri" pitchFamily="34" charset="0"/>
+                <a:ea typeface="Calibri" pitchFamily="34" charset="-122"/>
+                <a:cs typeface="Calibri" pitchFamily="34" charset="-120"/>
+              </a:rPr>
+              <a:t>Third-party</a:t>
+            </a:r>
+            <a:endParaRPr lang="en-US" sz="1350" dirty="0"/>
+          </a:p>
+        </p:txBody>
+      </p:sp>
+      <p:sp>
+        <p:nvSpPr>
+          <p:cNvPr id="25" name="Text 23"/>
+          <p:cNvSpPr/>
+          <p:nvPr/>
+        </p:nvSpPr>
+        <p:spPr>
+          <a:xfrm>
+            <a:off x="2651760" y="5349240"/>
+            <a:ext cx="8595360" cy="384048"/>
+          </a:xfrm>
+          <a:prstGeom prst="rect">
+            <a:avLst/>
+          </a:prstGeom>
+          <a:noFill/>
+          <a:ln/>
+        </p:spPr>
+        <p:txBody>
+          <a:bodyPr wrap="square" lIns="0" tIns="0" rIns="0" bIns="0" rtlCol="0" anchor="ctr"/>
+          <a:lstStyle/>
+          <a:p>
+            <a:pPr indent="0" marL="0">
+              <a:buNone/>
+            </a:pPr>
+            <a:r>
+              <a:rPr lang="en-US" sz="1350" dirty="0">
+                <a:solidFill>
+                  <a:srgbClr val="5C6675"/>
+                </a:solidFill>
+                <a:latin typeface="Calibri" pitchFamily="34" charset="0"/>
+                <a:ea typeface="Calibri" pitchFamily="34" charset="-122"/>
+                <a:cs typeface="Calibri" pitchFamily="34" charset="-120"/>
+              </a:rPr>
+              <a:t>CloudHealth  ·  Apptio  ·  Vantage  ·  nOps  ·  Finout  ·  CoreStack</a:t>
+            </a:r>
+            <a:endParaRPr lang="en-US" sz="1350" dirty="0"/>
+          </a:p>
+        </p:txBody>
+      </p:sp>
+      <p:sp>
+        <p:nvSpPr>
+          <p:cNvPr id="26" name="Text 24"/>
+          <p:cNvSpPr/>
+          <p:nvPr/>
+        </p:nvSpPr>
+        <p:spPr>
+          <a:xfrm>
+            <a:off x="877824" y="5760720"/>
+            <a:ext cx="1737360" cy="384048"/>
+          </a:xfrm>
+          <a:prstGeom prst="rect">
+            <a:avLst/>
+          </a:prstGeom>
+          <a:noFill/>
+          <a:ln/>
+        </p:spPr>
+        <p:txBody>
+          <a:bodyPr wrap="square" lIns="0" tIns="0" rIns="0" bIns="0" rtlCol="0" anchor="ctr"/>
+          <a:lstStyle/>
+          <a:p>
+            <a:pPr indent="0" marL="0">
+              <a:buNone/>
+            </a:pPr>
+            <a:r>
+              <a:rPr lang="en-US" sz="1350" b="1" dirty="0">
+                <a:solidFill>
+                  <a:srgbClr val="1B2430"/>
+                </a:solidFill>
+                <a:latin typeface="Calibri" pitchFamily="34" charset="0"/>
+                <a:ea typeface="Calibri" pitchFamily="34" charset="-122"/>
+                <a:cs typeface="Calibri" pitchFamily="34" charset="-120"/>
+              </a:rPr>
+              <a:t>Standard</a:t>
+            </a:r>
+            <a:endParaRPr lang="en-US" sz="1350" dirty="0"/>
+          </a:p>
+        </p:txBody>
+      </p:sp>
+      <p:sp>
+        <p:nvSpPr>
+          <p:cNvPr id="27" name="Text 25"/>
+          <p:cNvSpPr/>
+          <p:nvPr/>
+        </p:nvSpPr>
+        <p:spPr>
+          <a:xfrm>
+            <a:off x="2651760" y="5760720"/>
+            <a:ext cx="8595360" cy="384048"/>
+          </a:xfrm>
+          <a:prstGeom prst="rect">
+            <a:avLst/>
+          </a:prstGeom>
+          <a:noFill/>
+          <a:ln/>
+        </p:spPr>
+        <p:txBody>
+          <a:bodyPr wrap="square" lIns="0" tIns="0" rIns="0" bIns="0" rtlCol="0" anchor="ctr"/>
+          <a:lstStyle/>
+          <a:p>
+            <a:pPr indent="0" marL="0">
+              <a:buNone/>
+            </a:pPr>
+            <a:r>
+              <a:rPr lang="en-US" sz="1350" dirty="0">
+                <a:solidFill>
+                  <a:srgbClr val="5C6675"/>
+                </a:solidFill>
+                <a:latin typeface="Calibri" pitchFamily="34" charset="0"/>
+                <a:ea typeface="Calibri" pitchFamily="34" charset="-122"/>
+                <a:cs typeface="Calibri" pitchFamily="34" charset="-120"/>
+              </a:rPr>
+              <a:t>FOCUS-compliant platforms for multi-cloud reporting</a:t>
+            </a:r>
+            <a:endParaRPr lang="en-US" sz="1350" dirty="0"/>
+          </a:p>
+        </p:txBody>
+      </p:sp>
+    </p:spTree>
+  </p:cSld>
+  <p:clrMapOvr>
+    <a:masterClrMapping/>
+  </p:clrMapOvr>
+</p:sld>
+</file>
+
+<file path=ppt/slides/slide25.xml><?xml version="1.0" encoding="utf-8"?>
+<p:sld xmlns:a="http://schemas.openxmlformats.org/drawingml/2006/main" xmlns:r="http://schemas.openxmlformats.org/officeDocument/2006/relationships" xmlns:p="http://schemas.openxmlformats.org/presentationml/2006/main">
+  <p:cSld name="Slide 25">
     <p:bg>
       <p:bgPr>
         <a:solidFill>
@@ -20030,9 +21117,9 @@
 </p:sld>
 </file>
 
-<file path=ppt/slides/slide25.xml><?xml version="1.0" encoding="utf-8"?>
+<file path=ppt/slides/slide26.xml><?xml version="1.0" encoding="utf-8"?>
 <p:sld xmlns:a="http://schemas.openxmlformats.org/drawingml/2006/main" xmlns:r="http://schemas.openxmlformats.org/officeDocument/2006/relationships" xmlns:p="http://schemas.openxmlformats.org/presentationml/2006/main">
-  <p:cSld name="Slide 25">
+  <p:cSld name="Slide 26">
     <p:bg>
       <p:bgPr>
         <a:solidFill>

--- a/presentations/finops-gaining-visibility.pptx
+++ b/presentations/finops-gaining-visibility.pptx
@@ -31,9 +31,10 @@
     <p:sldId id="279" r:id="rId25"/>
     <p:sldId id="280" r:id="rId26"/>
     <p:sldId id="281" r:id="rId27"/>
+    <p:sldId id="282" r:id="rId28"/>
   </p:sldIdLst>
   <p:notesMasterIdLst>
-    <p:notesMasterId r:id="rId28"/>
+    <p:notesMasterId r:id="rId29"/>
   </p:notesMasterIdLst>
   <p:sldSz cx="12192000" cy="6858000"/>
   <p:notesSz cx="6858000" cy="12192000"/>
@@ -1935,7 +1936,7 @@
           <a:p>
             <a:r>
               <a:rPr lang="en-US" dirty="0"/>
-              <a:t>This is the ask. Step 1 is highlighted because it is the only one that cannot be parallelized — everything downstream degrades if the taxonomy is still in flux. Steps 2 and 4 are both arguments against over-engineering: pick the top spend categories and the tooling that matches the estate we actually have, not the one we might have in three years.</a:t>
+              <a:t>Use this slide to answer 'what would we actually buy', with a named example rather than an abstract category. Everything in the six cards is a capability the vendor publishes; the shape is representative of the enterprise platforms in this space rather than unique to one. The two cards that matter most for us are virtual tags and Kubernetes allocation, because they attack the two problems earlier in this deck that tagging discipline alone does not solve — the spend that is already untagged, and shared platforms that carry one set of tags for many consumers. Keep the deck's own advice in view when you present this. Slide 10 says native tooling is sufficient for a single-cloud estate, and that has not changed: a platform earns its licence when there are several billing sources to normalize, or when allocation cannot be fixed at source. Say so, or the deck contradicts itself. The bottom bar is the part to read aloud. Three proofs on our own data before any purchase, and an explicit flag that the published outcome numbers are marketing claims. Quoting a vendor's savings percentage as though it were our forecast is the fastest way to lose the room's trust in everything else on these slides.</a:t>
             </a:r>
             <a:endParaRPr lang="en-US" dirty="0"/>
           </a:p>
@@ -2023,7 +2024,7 @@
           <a:p>
             <a:r>
               <a:rPr lang="en-US" dirty="0"/>
-              <a:t>Close on the causal chain rather than a summary of slides. Each link is a separate management commitment: allocation data, published ownership, cost surfaced in the engineering workflow, and a review cadence that keeps it alive. Ask for the first two today; the rest follow from them.</a:t>
+              <a:t>This is the ask. Step 1 is highlighted because it is the only one that cannot be parallelized — everything downstream degrades if the taxonomy is still in flux. Steps 2 and 4 are both arguments against over-engineering: pick the top spend categories and the tooling that matches the estate we actually have, not the one we might have in three years.</a:t>
             </a:r>
             <a:endParaRPr lang="en-US" dirty="0"/>
           </a:p>
@@ -2111,7 +2112,7 @@
           <a:p>
             <a:r>
               <a:rPr lang="en-US" dirty="0"/>
-              <a:t>Anticipate three questions. What will this cost — mostly effort, not licences, if we stay on native tooling. How long until we see savings — allocation coverage improves in weeks, targeted savings follow the first full month of clean data. Who owns it — name the tagging owner and the review cadence before leaving the room, or nothing on the previous slides happens.</a:t>
+              <a:t>Close on the causal chain rather than a summary of slides. Each link is a separate management commitment: allocation data, published ownership, cost surfaced in the engineering workflow, and a review cadence that keeps it alive. Ask for the first two today; the rest follow from them.</a:t>
             </a:r>
             <a:endParaRPr lang="en-US" dirty="0"/>
           </a:p>
@@ -2135,6 +2136,94 @@
             <a:fld id="{F7021451-1387-4CA6-816F-3879F97B5CBC}" type="slidenum">
               <a:rPr lang="en-US"/>
               <a:t>26</a:t>
+            </a:fld>
+            <a:endParaRPr lang="en-US"/>
+          </a:p>
+        </p:txBody>
+      </p:sp>
+    </p:spTree>
+    <p:extLst>
+      <p:ext uri="{BB962C8B-B14F-4D97-AF65-F5344CB8AC3E}">
+        <p14:creationId xmlns:p14="http://schemas.microsoft.com/office/powerpoint/2010/main" val="1024086991"/>
+      </p:ext>
+    </p:extLst>
+  </p:cSld>
+  <p:clrMapOvr>
+    <a:masterClrMapping/>
+  </p:clrMapOvr>
+</p:notes>
+</file>
+
+<file path=ppt/notesSlides/notesSlide27.xml><?xml version="1.0" encoding="utf-8"?>
+<p:notes xmlns:a="http://schemas.openxmlformats.org/drawingml/2006/main" xmlns:r="http://schemas.openxmlformats.org/officeDocument/2006/relationships" xmlns:p="http://schemas.openxmlformats.org/presentationml/2006/main">
+  <p:cSld>
+    <p:spTree>
+      <p:nvGrpSpPr>
+        <p:cNvPr id="1" name=""/>
+        <p:cNvGrpSpPr/>
+        <p:nvPr/>
+      </p:nvGrpSpPr>
+      <p:grpSpPr>
+        <a:xfrm>
+          <a:off x="0" y="0"/>
+          <a:ext cx="0" cy="0"/>
+          <a:chOff x="0" y="0"/>
+          <a:chExt cx="0" cy="0"/>
+        </a:xfrm>
+      </p:grpSpPr>
+      <p:sp>
+        <p:nvSpPr>
+          <p:cNvPr id="2" name="Slide Image Placeholder 1"/>
+          <p:cNvSpPr>
+            <a:spLocks noGrp="1" noRot="1" noChangeAspect="1"/>
+          </p:cNvSpPr>
+          <p:nvPr>
+            <p:ph type="sldImg"/>
+          </p:nvPr>
+        </p:nvSpPr>
+        <p:spPr/>
+      </p:sp>
+      <p:sp>
+        <p:nvSpPr>
+          <p:cNvPr id="3" name="Notes Placeholder 2"/>
+          <p:cNvSpPr>
+            <a:spLocks noGrp="1"/>
+          </p:cNvSpPr>
+          <p:nvPr>
+            <p:ph type="body" idx="1"/>
+          </p:nvPr>
+        </p:nvSpPr>
+        <p:spPr/>
+        <p:txBody>
+          <a:bodyPr/>
+          <a:lstStyle/>
+          <a:p>
+            <a:r>
+              <a:rPr lang="en-US" dirty="0"/>
+              <a:t>Anticipate three questions. What will this cost — mostly effort, not licences, if we stay on native tooling. How long until we see savings — allocation coverage improves in weeks, targeted savings follow the first full month of clean data. Who owns it — name the tagging owner and the review cadence before leaving the room, or nothing on the previous slides happens.</a:t>
+            </a:r>
+            <a:endParaRPr lang="en-US" dirty="0"/>
+          </a:p>
+        </p:txBody>
+      </p:sp>
+      <p:sp>
+        <p:nvSpPr>
+          <p:cNvPr id="4" name="Slide Number Placeholder 3"/>
+          <p:cNvSpPr>
+            <a:spLocks noGrp="1"/>
+          </p:cNvSpPr>
+          <p:nvPr>
+            <p:ph type="sldNum" sz="quarter" idx="10"/>
+          </p:nvPr>
+        </p:nvSpPr>
+        <p:spPr/>
+        <p:txBody>
+          <a:bodyPr/>
+          <a:lstStyle/>
+          <a:p>
+            <a:fld id="{F7021451-1387-4CA6-816F-3879F97B5CBC}" type="slidenum">
+              <a:rPr lang="en-US"/>
+              <a:t>27</a:t>
             </a:fld>
             <a:endParaRPr lang="en-US"/>
           </a:p>
@@ -19387,7 +19476,7 @@
                 <a:ea typeface="Calibri" pitchFamily="34" charset="-122"/>
                 <a:cs typeface="Calibri" pitchFamily="34" charset="-120"/>
               </a:rPr>
-              <a:t>THE PATH FORWARD</a:t>
+              <a:t>TOOLING — A WORKED EXAMPLE</a:t>
             </a:r>
             <a:endParaRPr lang="en-US" sz="1100" dirty="0"/>
           </a:p>
@@ -19426,7 +19515,7 @@
                 <a:ea typeface="Cambria" pitchFamily="34" charset="-122"/>
                 <a:cs typeface="Cambria" pitchFamily="34" charset="-120"/>
               </a:rPr>
-              <a:t>Where to start</a:t>
+              <a:t>What a FinOps platform adds: Finout</a:t>
             </a:r>
             <a:endParaRPr lang="en-US" sz="3100" dirty="0"/>
           </a:p>
@@ -19434,36 +19523,119 @@
       </p:sp>
       <p:sp>
         <p:nvSpPr>
-          <p:cNvPr id="4" name="Shape 2"/>
-          <p:cNvSpPr/>
-          <p:nvPr/>
-        </p:nvSpPr>
-        <p:spPr>
-          <a:xfrm>
-            <a:off x="548640" y="1783080"/>
-            <a:ext cx="2587752" cy="2423160"/>
+          <p:cNvPr id="4" name="Text 2"/>
+          <p:cNvSpPr/>
+          <p:nvPr/>
+        </p:nvSpPr>
+        <p:spPr>
+          <a:xfrm>
+            <a:off x="548640" y="1536192"/>
+            <a:ext cx="10607040" cy="365760"/>
+          </a:xfrm>
+          <a:prstGeom prst="rect">
+            <a:avLst/>
+          </a:prstGeom>
+          <a:noFill/>
+          <a:ln/>
+        </p:spPr>
+        <p:txBody>
+          <a:bodyPr wrap="square" lIns="0" tIns="0" rIns="0" bIns="0" rtlCol="0" anchor="ctr"/>
+          <a:lstStyle/>
+          <a:p>
+            <a:pPr indent="0" marL="0">
+              <a:buNone/>
+            </a:pPr>
+            <a:r>
+              <a:rPr lang="en-US" sz="1500" dirty="0">
+                <a:solidFill>
+                  <a:srgbClr val="5C6675"/>
+                </a:solidFill>
+                <a:latin typeface="Calibri" pitchFamily="34" charset="0"/>
+                <a:ea typeface="Calibri" pitchFamily="34" charset="-122"/>
+                <a:cs typeface="Calibri" pitchFamily="34" charset="-120"/>
+              </a:rPr>
+              <a:t>The capabilities a dedicated platform brings over native billing consoles, and what to test before buying one.</a:t>
+            </a:r>
+            <a:endParaRPr lang="en-US" sz="1500" dirty="0"/>
+          </a:p>
+        </p:txBody>
+      </p:sp>
+      <p:sp>
+        <p:nvSpPr>
+          <p:cNvPr id="5" name="Shape 3"/>
+          <p:cNvSpPr/>
+          <p:nvPr/>
+        </p:nvSpPr>
+        <p:spPr>
+          <a:xfrm>
+            <a:off x="548640" y="2121408"/>
+            <a:ext cx="3511296" cy="1719072"/>
           </a:xfrm>
           <a:prstGeom prst="roundRect">
             <a:avLst>
-              <a:gd name="adj" fmla="val 3396"/>
+              <a:gd name="adj" fmla="val 4787"/>
             </a:avLst>
           </a:prstGeom>
           <a:solidFill>
-            <a:srgbClr val="1F2936"/>
-          </a:solidFill>
-          <a:ln/>
-        </p:spPr>
-      </p:sp>
-      <p:sp>
-        <p:nvSpPr>
-          <p:cNvPr id="5" name="Text 3"/>
-          <p:cNvSpPr/>
-          <p:nvPr/>
-        </p:nvSpPr>
-        <p:spPr>
-          <a:xfrm>
-            <a:off x="804672" y="1965960"/>
-            <a:ext cx="1097280" cy="502920"/>
+            <a:srgbClr val="F1F3F6"/>
+          </a:solidFill>
+          <a:ln/>
+        </p:spPr>
+      </p:sp>
+      <p:sp>
+        <p:nvSpPr>
+          <p:cNvPr id="6" name="Shape 4"/>
+          <p:cNvSpPr/>
+          <p:nvPr/>
+        </p:nvSpPr>
+        <p:spPr>
+          <a:xfrm>
+            <a:off x="841248" y="2359152"/>
+            <a:ext cx="457200" cy="457200"/>
+          </a:xfrm>
+          <a:prstGeom prst="ellipse">
+            <a:avLst/>
+          </a:prstGeom>
+          <a:solidFill>
+            <a:srgbClr val="FFFFFF"/>
+          </a:solidFill>
+          <a:ln/>
+        </p:spPr>
+      </p:sp>
+      <p:pic>
+        <p:nvPicPr>
+          <p:cNvPr id="7" name="Image 0" descr="preencoded.png">    </p:cNvPr>
+          <p:cNvPicPr>
+            <a:picLocks noChangeAspect="1"/>
+          </p:cNvPicPr>
+          <p:nvPr/>
+        </p:nvPicPr>
+        <p:blipFill>
+          <a:blip r:embed="rId1"/>
+          <a:stretch>
+            <a:fillRect/>
+          </a:stretch>
+        </p:blipFill>
+        <p:spPr>
+          <a:xfrm>
+            <a:off x="955548" y="2473452"/>
+            <a:ext cx="228600" cy="228600"/>
+          </a:xfrm>
+          <a:prstGeom prst="rect">
+            <a:avLst/>
+          </a:prstGeom>
+        </p:spPr>
+      </p:pic>
+      <p:sp>
+        <p:nvSpPr>
+          <p:cNvPr id="8" name="Text 5"/>
+          <p:cNvSpPr/>
+          <p:nvPr/>
+        </p:nvSpPr>
+        <p:spPr>
+          <a:xfrm>
+            <a:off x="1426464" y="2340864"/>
+            <a:ext cx="2468880" cy="493776"/>
           </a:xfrm>
           <a:prstGeom prst="rect">
             <a:avLst/>
@@ -19479,30 +19651,30 @@
               <a:buNone/>
             </a:pPr>
             <a:r>
-              <a:rPr lang="en-US" sz="2800" b="1" dirty="0">
-                <a:solidFill>
-                  <a:srgbClr val="E39B2C"/>
+              <a:rPr lang="en-US" sz="1500" b="1" dirty="0">
+                <a:solidFill>
+                  <a:srgbClr val="1B2430"/>
                 </a:solidFill>
                 <a:latin typeface="Cambria" pitchFamily="34" charset="0"/>
                 <a:ea typeface="Cambria" pitchFamily="34" charset="-122"/>
                 <a:cs typeface="Cambria" pitchFamily="34" charset="-120"/>
               </a:rPr>
-              <a:t>01</a:t>
-            </a:r>
-            <a:endParaRPr lang="en-US" sz="2800" dirty="0"/>
-          </a:p>
-        </p:txBody>
-      </p:sp>
-      <p:sp>
-        <p:nvSpPr>
-          <p:cNvPr id="6" name="Text 4"/>
-          <p:cNvSpPr/>
-          <p:nvPr/>
-        </p:nvSpPr>
-        <p:spPr>
-          <a:xfrm>
-            <a:off x="786384" y="2523744"/>
-            <a:ext cx="2139696" cy="786384"/>
+              <a:t>One normalized bill</a:t>
+            </a:r>
+            <a:endParaRPr lang="en-US" sz="1500" dirty="0"/>
+          </a:p>
+        </p:txBody>
+      </p:sp>
+      <p:sp>
+        <p:nvSpPr>
+          <p:cNvPr id="9" name="Text 6"/>
+          <p:cNvSpPr/>
+          <p:nvPr/>
+        </p:nvSpPr>
+        <p:spPr>
+          <a:xfrm>
+            <a:off x="841248" y="2907792"/>
+            <a:ext cx="2926080" cy="859536"/>
           </a:xfrm>
           <a:prstGeom prst="rect">
             <a:avLst/>
@@ -19516,20 +19688,125 @@
           <a:p>
             <a:pPr indent="0" marL="0">
               <a:lnSpc>
-                <a:spcPts val="2000"/>
+                <a:spcPts val="1500"/>
               </a:lnSpc>
               <a:buNone/>
             </a:pPr>
             <a:r>
+              <a:rPr lang="en-US" sz="1150" dirty="0">
+                <a:solidFill>
+                  <a:srgbClr val="5C6675"/>
+                </a:solidFill>
+                <a:latin typeface="Calibri" pitchFamily="34" charset="0"/>
+                <a:ea typeface="Calibri" pitchFamily="34" charset="-122"/>
+                <a:cs typeface="Calibri" pitchFamily="34" charset="-120"/>
+              </a:rPr>
+              <a:t>Cloud, SaaS and AI in one view — AWS, Azure, GCP, OCI, Kubernetes, Snowflake, Databricks, OpenAI, Anthropic. FOCUS supported.</a:t>
+            </a:r>
+            <a:endParaRPr lang="en-US" sz="1150" dirty="0"/>
+          </a:p>
+        </p:txBody>
+      </p:sp>
+      <p:sp>
+        <p:nvSpPr>
+          <p:cNvPr id="10" name="Shape 7"/>
+          <p:cNvSpPr/>
+          <p:nvPr/>
+        </p:nvSpPr>
+        <p:spPr>
+          <a:xfrm>
+            <a:off x="4334256" y="2121408"/>
+            <a:ext cx="3511296" cy="1719072"/>
+          </a:xfrm>
+          <a:prstGeom prst="roundRect">
+            <a:avLst>
+              <a:gd name="adj" fmla="val 4787"/>
+            </a:avLst>
+          </a:prstGeom>
+          <a:solidFill>
+            <a:srgbClr val="F1F3F6"/>
+          </a:solidFill>
+          <a:ln/>
+        </p:spPr>
+      </p:sp>
+      <p:sp>
+        <p:nvSpPr>
+          <p:cNvPr id="11" name="Shape 8"/>
+          <p:cNvSpPr/>
+          <p:nvPr/>
+        </p:nvSpPr>
+        <p:spPr>
+          <a:xfrm>
+            <a:off x="4626864" y="2359152"/>
+            <a:ext cx="457200" cy="457200"/>
+          </a:xfrm>
+          <a:prstGeom prst="ellipse">
+            <a:avLst/>
+          </a:prstGeom>
+          <a:solidFill>
+            <a:srgbClr val="FFFFFF"/>
+          </a:solidFill>
+          <a:ln/>
+        </p:spPr>
+      </p:sp>
+      <p:pic>
+        <p:nvPicPr>
+          <p:cNvPr id="12" name="Image 1" descr="preencoded.png">    </p:cNvPr>
+          <p:cNvPicPr>
+            <a:picLocks noChangeAspect="1"/>
+          </p:cNvPicPr>
+          <p:nvPr/>
+        </p:nvPicPr>
+        <p:blipFill>
+          <a:blip r:embed="rId2"/>
+          <a:stretch>
+            <a:fillRect/>
+          </a:stretch>
+        </p:blipFill>
+        <p:spPr>
+          <a:xfrm>
+            <a:off x="4741164" y="2473452"/>
+            <a:ext cx="228600" cy="228600"/>
+          </a:xfrm>
+          <a:prstGeom prst="rect">
+            <a:avLst/>
+          </a:prstGeom>
+        </p:spPr>
+      </p:pic>
+      <p:sp>
+        <p:nvSpPr>
+          <p:cNvPr id="13" name="Text 9"/>
+          <p:cNvSpPr/>
+          <p:nvPr/>
+        </p:nvSpPr>
+        <p:spPr>
+          <a:xfrm>
+            <a:off x="5212080" y="2340864"/>
+            <a:ext cx="2468880" cy="493776"/>
+          </a:xfrm>
+          <a:prstGeom prst="rect">
+            <a:avLst/>
+          </a:prstGeom>
+          <a:noFill/>
+          <a:ln/>
+        </p:spPr>
+        <p:txBody>
+          <a:bodyPr wrap="square" lIns="0" tIns="0" rIns="0" bIns="0" rtlCol="0" anchor="ctr"/>
+          <a:lstStyle/>
+          <a:p>
+            <a:pPr indent="0" marL="0">
+              <a:buNone/>
+            </a:pPr>
+            <a:r>
               <a:rPr lang="en-US" sz="1500" b="1" dirty="0">
                 <a:solidFill>
-                  <a:srgbClr val="FFFFFF"/>
+                  <a:srgbClr val="1B2430"/>
                 </a:solidFill>
                 <a:latin typeface="Cambria" pitchFamily="34" charset="0"/>
                 <a:ea typeface="Cambria" pitchFamily="34" charset="-122"/>
                 <a:cs typeface="Cambria" pitchFamily="34" charset="-120"/>
               </a:rPr>
-              <a:t>Set the tagging standard</a:t>
+              <a:t>Virtual tags</a:t>
             </a:r>
             <a:endParaRPr lang="en-US" sz="1500" dirty="0"/>
           </a:p>
@@ -19537,14 +19814,14 @@
       </p:sp>
       <p:sp>
         <p:nvSpPr>
-          <p:cNvPr id="7" name="Text 5"/>
-          <p:cNvSpPr/>
-          <p:nvPr/>
-        </p:nvSpPr>
-        <p:spPr>
-          <a:xfrm>
-            <a:off x="786384" y="3346704"/>
-            <a:ext cx="2139696" cy="749808"/>
+          <p:cNvPr id="14" name="Text 10"/>
+          <p:cNvSpPr/>
+          <p:nvPr/>
+        </p:nvSpPr>
+        <p:spPr>
+          <a:xfrm>
+            <a:off x="4626864" y="2907792"/>
+            <a:ext cx="2926080" cy="859536"/>
           </a:xfrm>
           <a:prstGeom prst="rect">
             <a:avLst/>
@@ -19563,34 +19840,34 @@
               <a:buNone/>
             </a:pPr>
             <a:r>
-              <a:rPr lang="en-US" sz="1200" dirty="0">
-                <a:solidFill>
-                  <a:srgbClr val="9EABBA"/>
-                </a:solidFill>
-                <a:latin typeface="Calibri" pitchFamily="34" charset="0"/>
-                <a:ea typeface="Calibri" pitchFamily="34" charset="-122"/>
-                <a:cs typeface="Calibri" pitchFamily="34" charset="-120"/>
-              </a:rPr>
-              <a:t>Agree a consistent taxonomy before investing in dashboards.</a:t>
-            </a:r>
-            <a:endParaRPr lang="en-US" sz="1200" dirty="0"/>
-          </a:p>
-        </p:txBody>
-      </p:sp>
-      <p:sp>
-        <p:nvSpPr>
-          <p:cNvPr id="8" name="Shape 6"/>
-          <p:cNvSpPr/>
-          <p:nvPr/>
-        </p:nvSpPr>
-        <p:spPr>
-          <a:xfrm>
-            <a:off x="3383280" y="1783080"/>
-            <a:ext cx="2587752" cy="2423160"/>
+              <a:rPr lang="en-US" sz="1150" dirty="0">
+                <a:solidFill>
+                  <a:srgbClr val="5C6675"/>
+                </a:solidFill>
+                <a:latin typeface="Calibri" pitchFamily="34" charset="0"/>
+                <a:ea typeface="Calibri" pitchFamily="34" charset="-122"/>
+                <a:cs typeface="Calibri" pitchFamily="34" charset="-120"/>
+              </a:rPr>
+              <a:t>Allocates untagged and shared cost by rule, without touching infrastructure tags — showback without a retagging project.</a:t>
+            </a:r>
+            <a:endParaRPr lang="en-US" sz="1150" dirty="0"/>
+          </a:p>
+        </p:txBody>
+      </p:sp>
+      <p:sp>
+        <p:nvSpPr>
+          <p:cNvPr id="15" name="Shape 11"/>
+          <p:cNvSpPr/>
+          <p:nvPr/>
+        </p:nvSpPr>
+        <p:spPr>
+          <a:xfrm>
+            <a:off x="8119872" y="2121408"/>
+            <a:ext cx="3511296" cy="1719072"/>
           </a:xfrm>
           <a:prstGeom prst="roundRect">
             <a:avLst>
-              <a:gd name="adj" fmla="val 3396"/>
+              <a:gd name="adj" fmla="val 4787"/>
             </a:avLst>
           </a:prstGeom>
           <a:solidFill>
@@ -19601,14 +19878,58 @@
       </p:sp>
       <p:sp>
         <p:nvSpPr>
-          <p:cNvPr id="9" name="Text 7"/>
-          <p:cNvSpPr/>
-          <p:nvPr/>
-        </p:nvSpPr>
-        <p:spPr>
-          <a:xfrm>
-            <a:off x="3639312" y="1965960"/>
-            <a:ext cx="1097280" cy="502920"/>
+          <p:cNvPr id="16" name="Shape 12"/>
+          <p:cNvSpPr/>
+          <p:nvPr/>
+        </p:nvSpPr>
+        <p:spPr>
+          <a:xfrm>
+            <a:off x="8412480" y="2359152"/>
+            <a:ext cx="457200" cy="457200"/>
+          </a:xfrm>
+          <a:prstGeom prst="ellipse">
+            <a:avLst/>
+          </a:prstGeom>
+          <a:solidFill>
+            <a:srgbClr val="FFFFFF"/>
+          </a:solidFill>
+          <a:ln/>
+        </p:spPr>
+      </p:sp>
+      <p:pic>
+        <p:nvPicPr>
+          <p:cNvPr id="17" name="Image 2" descr="preencoded.png">    </p:cNvPr>
+          <p:cNvPicPr>
+            <a:picLocks noChangeAspect="1"/>
+          </p:cNvPicPr>
+          <p:nvPr/>
+        </p:nvPicPr>
+        <p:blipFill>
+          <a:blip r:embed="rId3"/>
+          <a:stretch>
+            <a:fillRect/>
+          </a:stretch>
+        </p:blipFill>
+        <p:spPr>
+          <a:xfrm>
+            <a:off x="8526780" y="2473452"/>
+            <a:ext cx="228600" cy="228600"/>
+          </a:xfrm>
+          <a:prstGeom prst="rect">
+            <a:avLst/>
+          </a:prstGeom>
+        </p:spPr>
+      </p:pic>
+      <p:sp>
+        <p:nvSpPr>
+          <p:cNvPr id="18" name="Text 13"/>
+          <p:cNvSpPr/>
+          <p:nvPr/>
+        </p:nvSpPr>
+        <p:spPr>
+          <a:xfrm>
+            <a:off x="8997696" y="2340864"/>
+            <a:ext cx="2468880" cy="493776"/>
           </a:xfrm>
           <a:prstGeom prst="rect">
             <a:avLst/>
@@ -19624,30 +19945,30 @@
               <a:buNone/>
             </a:pPr>
             <a:r>
-              <a:rPr lang="en-US" sz="2800" b="1" dirty="0">
-                <a:solidFill>
-                  <a:srgbClr val="B9C2CD"/>
+              <a:rPr lang="en-US" sz="1500" b="1" dirty="0">
+                <a:solidFill>
+                  <a:srgbClr val="1B2430"/>
                 </a:solidFill>
                 <a:latin typeface="Cambria" pitchFamily="34" charset="0"/>
                 <a:ea typeface="Cambria" pitchFamily="34" charset="-122"/>
                 <a:cs typeface="Cambria" pitchFamily="34" charset="-120"/>
               </a:rPr>
-              <a:t>02</a:t>
-            </a:r>
-            <a:endParaRPr lang="en-US" sz="2800" dirty="0"/>
-          </a:p>
-        </p:txBody>
-      </p:sp>
-      <p:sp>
-        <p:nvSpPr>
-          <p:cNvPr id="10" name="Text 8"/>
-          <p:cNvSpPr/>
-          <p:nvPr/>
-        </p:nvSpPr>
-        <p:spPr>
-          <a:xfrm>
-            <a:off x="3621024" y="2523744"/>
-            <a:ext cx="2139696" cy="786384"/>
+              <a:t>Kubernetes to pod level</a:t>
+            </a:r>
+            <a:endParaRPr lang="en-US" sz="1500" dirty="0"/>
+          </a:p>
+        </p:txBody>
+      </p:sp>
+      <p:sp>
+        <p:nvSpPr>
+          <p:cNvPr id="19" name="Text 14"/>
+          <p:cNvSpPr/>
+          <p:nvPr/>
+        </p:nvSpPr>
+        <p:spPr>
+          <a:xfrm>
+            <a:off x="8412480" y="2907792"/>
+            <a:ext cx="2926080" cy="859536"/>
           </a:xfrm>
           <a:prstGeom prst="rect">
             <a:avLst/>
@@ -19661,8 +19982,113 @@
           <a:p>
             <a:pPr indent="0" marL="0">
               <a:lnSpc>
-                <a:spcPts val="2000"/>
+                <a:spcPts val="1500"/>
               </a:lnSpc>
+              <a:buNone/>
+            </a:pPr>
+            <a:r>
+              <a:rPr lang="en-US" sz="1150" dirty="0">
+                <a:solidFill>
+                  <a:srgbClr val="5C6675"/>
+                </a:solidFill>
+                <a:latin typeface="Calibri" pitchFamily="34" charset="0"/>
+                <a:ea typeface="Calibri" pitchFamily="34" charset="-122"/>
+                <a:cs typeface="Calibri" pitchFamily="34" charset="-120"/>
+              </a:rPr>
+              <a:t>Cluster, namespace and pod allocation without an agent, which is the shared-cost problem most tools leave unsolved.</a:t>
+            </a:r>
+            <a:endParaRPr lang="en-US" sz="1150" dirty="0"/>
+          </a:p>
+        </p:txBody>
+      </p:sp>
+      <p:sp>
+        <p:nvSpPr>
+          <p:cNvPr id="20" name="Shape 15"/>
+          <p:cNvSpPr/>
+          <p:nvPr/>
+        </p:nvSpPr>
+        <p:spPr>
+          <a:xfrm>
+            <a:off x="548640" y="3986784"/>
+            <a:ext cx="3511296" cy="1719072"/>
+          </a:xfrm>
+          <a:prstGeom prst="roundRect">
+            <a:avLst>
+              <a:gd name="adj" fmla="val 4787"/>
+            </a:avLst>
+          </a:prstGeom>
+          <a:solidFill>
+            <a:srgbClr val="F1F3F6"/>
+          </a:solidFill>
+          <a:ln/>
+        </p:spPr>
+      </p:sp>
+      <p:sp>
+        <p:nvSpPr>
+          <p:cNvPr id="21" name="Shape 16"/>
+          <p:cNvSpPr/>
+          <p:nvPr/>
+        </p:nvSpPr>
+        <p:spPr>
+          <a:xfrm>
+            <a:off x="841248" y="4224528"/>
+            <a:ext cx="457200" cy="457200"/>
+          </a:xfrm>
+          <a:prstGeom prst="ellipse">
+            <a:avLst/>
+          </a:prstGeom>
+          <a:solidFill>
+            <a:srgbClr val="FFFFFF"/>
+          </a:solidFill>
+          <a:ln/>
+        </p:spPr>
+      </p:sp>
+      <p:pic>
+        <p:nvPicPr>
+          <p:cNvPr id="22" name="Image 3" descr="preencoded.png">    </p:cNvPr>
+          <p:cNvPicPr>
+            <a:picLocks noChangeAspect="1"/>
+          </p:cNvPicPr>
+          <p:nvPr/>
+        </p:nvPicPr>
+        <p:blipFill>
+          <a:blip r:embed="rId4"/>
+          <a:stretch>
+            <a:fillRect/>
+          </a:stretch>
+        </p:blipFill>
+        <p:spPr>
+          <a:xfrm>
+            <a:off x="955548" y="4338828"/>
+            <a:ext cx="228600" cy="228600"/>
+          </a:xfrm>
+          <a:prstGeom prst="rect">
+            <a:avLst/>
+          </a:prstGeom>
+        </p:spPr>
+      </p:pic>
+      <p:sp>
+        <p:nvSpPr>
+          <p:cNvPr id="23" name="Text 17"/>
+          <p:cNvSpPr/>
+          <p:nvPr/>
+        </p:nvSpPr>
+        <p:spPr>
+          <a:xfrm>
+            <a:off x="1426464" y="4206240"/>
+            <a:ext cx="2468880" cy="493776"/>
+          </a:xfrm>
+          <a:prstGeom prst="rect">
+            <a:avLst/>
+          </a:prstGeom>
+          <a:noFill/>
+          <a:ln/>
+        </p:spPr>
+        <p:txBody>
+          <a:bodyPr wrap="square" lIns="0" tIns="0" rIns="0" bIns="0" rtlCol="0" anchor="ctr"/>
+          <a:lstStyle/>
+          <a:p>
+            <a:pPr indent="0" marL="0">
               <a:buNone/>
             </a:pPr>
             <a:r>
@@ -19674,7 +20100,7 @@
                 <a:ea typeface="Cambria" pitchFamily="34" charset="-122"/>
                 <a:cs typeface="Cambria" pitchFamily="34" charset="-120"/>
               </a:rPr>
-              <a:t>Start with the biggest spend</a:t>
+              <a:t>Dashboards and unit economics</a:t>
             </a:r>
             <a:endParaRPr lang="en-US" sz="1500" dirty="0"/>
           </a:p>
@@ -19682,14 +20108,14 @@
       </p:sp>
       <p:sp>
         <p:nvSpPr>
-          <p:cNvPr id="11" name="Text 9"/>
-          <p:cNvSpPr/>
-          <p:nvPr/>
-        </p:nvSpPr>
-        <p:spPr>
-          <a:xfrm>
-            <a:off x="3621024" y="3346704"/>
-            <a:ext cx="2139696" cy="749808"/>
+          <p:cNvPr id="24" name="Text 18"/>
+          <p:cNvSpPr/>
+          <p:nvPr/>
+        </p:nvSpPr>
+        <p:spPr>
+          <a:xfrm>
+            <a:off x="841248" y="4773168"/>
+            <a:ext cx="2926080" cy="859536"/>
           </a:xfrm>
           <a:prstGeom prst="rect">
             <a:avLst/>
@@ -19708,7 +20134,7 @@
               <a:buNone/>
             </a:pPr>
             <a:r>
-              <a:rPr lang="en-US" sz="1200" dirty="0">
+              <a:rPr lang="en-US" sz="1150" dirty="0">
                 <a:solidFill>
                   <a:srgbClr val="5C6675"/>
                 </a:solidFill>
@@ -19716,26 +20142,26 @@
                 <a:ea typeface="Calibri" pitchFamily="34" charset="-122"/>
                 <a:cs typeface="Calibri" pitchFamily="34" charset="-120"/>
               </a:rPr>
-              <a:t>Attack the largest categories first. Don't chase perfect granularity everywhere.</a:t>
-            </a:r>
-            <a:endParaRPr lang="en-US" sz="1200" dirty="0"/>
-          </a:p>
-        </p:txBody>
-      </p:sp>
-      <p:sp>
-        <p:nvSpPr>
-          <p:cNvPr id="12" name="Shape 10"/>
-          <p:cNvSpPr/>
-          <p:nvPr/>
-        </p:nvSpPr>
-        <p:spPr>
-          <a:xfrm>
-            <a:off x="6217920" y="1783080"/>
-            <a:ext cx="2587752" cy="2423160"/>
+              <a:t>Widgets for cost, usage, waste, budget and unit cost; business metrics from Datadog, Salesforce or Looker to divide by.</a:t>
+            </a:r>
+            <a:endParaRPr lang="en-US" sz="1150" dirty="0"/>
+          </a:p>
+        </p:txBody>
+      </p:sp>
+      <p:sp>
+        <p:nvSpPr>
+          <p:cNvPr id="25" name="Shape 19"/>
+          <p:cNvSpPr/>
+          <p:nvPr/>
+        </p:nvSpPr>
+        <p:spPr>
+          <a:xfrm>
+            <a:off x="4334256" y="3986784"/>
+            <a:ext cx="3511296" cy="1719072"/>
           </a:xfrm>
           <a:prstGeom prst="roundRect">
             <a:avLst>
-              <a:gd name="adj" fmla="val 3396"/>
+              <a:gd name="adj" fmla="val 4787"/>
             </a:avLst>
           </a:prstGeom>
           <a:solidFill>
@@ -19746,14 +20172,58 @@
       </p:sp>
       <p:sp>
         <p:nvSpPr>
-          <p:cNvPr id="13" name="Text 11"/>
-          <p:cNvSpPr/>
-          <p:nvPr/>
-        </p:nvSpPr>
-        <p:spPr>
-          <a:xfrm>
-            <a:off x="6473952" y="1965960"/>
-            <a:ext cx="1097280" cy="502920"/>
+          <p:cNvPr id="26" name="Shape 20"/>
+          <p:cNvSpPr/>
+          <p:nvPr/>
+        </p:nvSpPr>
+        <p:spPr>
+          <a:xfrm>
+            <a:off x="4626864" y="4224528"/>
+            <a:ext cx="457200" cy="457200"/>
+          </a:xfrm>
+          <a:prstGeom prst="ellipse">
+            <a:avLst/>
+          </a:prstGeom>
+          <a:solidFill>
+            <a:srgbClr val="FFFFFF"/>
+          </a:solidFill>
+          <a:ln/>
+        </p:spPr>
+      </p:sp>
+      <p:pic>
+        <p:nvPicPr>
+          <p:cNvPr id="27" name="Image 4" descr="preencoded.png">    </p:cNvPr>
+          <p:cNvPicPr>
+            <a:picLocks noChangeAspect="1"/>
+          </p:cNvPicPr>
+          <p:nvPr/>
+        </p:nvPicPr>
+        <p:blipFill>
+          <a:blip r:embed="rId5"/>
+          <a:stretch>
+            <a:fillRect/>
+          </a:stretch>
+        </p:blipFill>
+        <p:spPr>
+          <a:xfrm>
+            <a:off x="4741164" y="4338828"/>
+            <a:ext cx="228600" cy="228600"/>
+          </a:xfrm>
+          <a:prstGeom prst="rect">
+            <a:avLst/>
+          </a:prstGeom>
+        </p:spPr>
+      </p:pic>
+      <p:sp>
+        <p:nvSpPr>
+          <p:cNvPr id="28" name="Text 21"/>
+          <p:cNvSpPr/>
+          <p:nvPr/>
+        </p:nvSpPr>
+        <p:spPr>
+          <a:xfrm>
+            <a:off x="5212080" y="4206240"/>
+            <a:ext cx="2468880" cy="493776"/>
           </a:xfrm>
           <a:prstGeom prst="rect">
             <a:avLst/>
@@ -19769,30 +20239,30 @@
               <a:buNone/>
             </a:pPr>
             <a:r>
-              <a:rPr lang="en-US" sz="2800" b="1" dirty="0">
-                <a:solidFill>
-                  <a:srgbClr val="B9C2CD"/>
+              <a:rPr lang="en-US" sz="1500" b="1" dirty="0">
+                <a:solidFill>
+                  <a:srgbClr val="1B2430"/>
                 </a:solidFill>
                 <a:latin typeface="Cambria" pitchFamily="34" charset="0"/>
                 <a:ea typeface="Cambria" pitchFamily="34" charset="-122"/>
                 <a:cs typeface="Cambria" pitchFamily="34" charset="-120"/>
               </a:rPr>
-              <a:t>03</a:t>
-            </a:r>
-            <a:endParaRPr lang="en-US" sz="2800" dirty="0"/>
-          </a:p>
-        </p:txBody>
-      </p:sp>
-      <p:sp>
-        <p:nvSpPr>
-          <p:cNvPr id="14" name="Text 12"/>
-          <p:cNvSpPr/>
-          <p:nvPr/>
-        </p:nvSpPr>
-        <p:spPr>
-          <a:xfrm>
-            <a:off x="6455664" y="2523744"/>
-            <a:ext cx="2139696" cy="786384"/>
+              <a:t>Budgets, forecast, anomalies</a:t>
+            </a:r>
+            <a:endParaRPr lang="en-US" sz="1500" dirty="0"/>
+          </a:p>
+        </p:txBody>
+      </p:sp>
+      <p:sp>
+        <p:nvSpPr>
+          <p:cNvPr id="29" name="Text 22"/>
+          <p:cNvSpPr/>
+          <p:nvPr/>
+        </p:nvSpPr>
+        <p:spPr>
+          <a:xfrm>
+            <a:off x="4626864" y="4773168"/>
+            <a:ext cx="2926080" cy="859536"/>
           </a:xfrm>
           <a:prstGeom prst="rect">
             <a:avLst/>
@@ -19806,8 +20276,113 @@
           <a:p>
             <a:pPr indent="0" marL="0">
               <a:lnSpc>
-                <a:spcPts val="2000"/>
+                <a:spcPts val="1500"/>
               </a:lnSpc>
+              <a:buNone/>
+            </a:pPr>
+            <a:r>
+              <a:rPr lang="en-US" sz="1150" dirty="0">
+                <a:solidFill>
+                  <a:srgbClr val="5C6675"/>
+                </a:solidFill>
+                <a:latin typeface="Calibri" pitchFamily="34" charset="0"/>
+                <a:ea typeface="Calibri" pitchFamily="34" charset="-122"/>
+                <a:cs typeface="Calibri" pitchFamily="34" charset="-120"/>
+              </a:rPr>
+              <a:t>Budget structures, forecasting on any unit cost, and anomaly alerts on unexpected movement.</a:t>
+            </a:r>
+            <a:endParaRPr lang="en-US" sz="1150" dirty="0"/>
+          </a:p>
+        </p:txBody>
+      </p:sp>
+      <p:sp>
+        <p:nvSpPr>
+          <p:cNvPr id="30" name="Shape 23"/>
+          <p:cNvSpPr/>
+          <p:nvPr/>
+        </p:nvSpPr>
+        <p:spPr>
+          <a:xfrm>
+            <a:off x="8119872" y="3986784"/>
+            <a:ext cx="3511296" cy="1719072"/>
+          </a:xfrm>
+          <a:prstGeom prst="roundRect">
+            <a:avLst>
+              <a:gd name="adj" fmla="val 4787"/>
+            </a:avLst>
+          </a:prstGeom>
+          <a:solidFill>
+            <a:srgbClr val="F1F3F6"/>
+          </a:solidFill>
+          <a:ln/>
+        </p:spPr>
+      </p:sp>
+      <p:sp>
+        <p:nvSpPr>
+          <p:cNvPr id="31" name="Shape 24"/>
+          <p:cNvSpPr/>
+          <p:nvPr/>
+        </p:nvSpPr>
+        <p:spPr>
+          <a:xfrm>
+            <a:off x="8412480" y="4224528"/>
+            <a:ext cx="457200" cy="457200"/>
+          </a:xfrm>
+          <a:prstGeom prst="ellipse">
+            <a:avLst/>
+          </a:prstGeom>
+          <a:solidFill>
+            <a:srgbClr val="FFFFFF"/>
+          </a:solidFill>
+          <a:ln/>
+        </p:spPr>
+      </p:sp>
+      <p:pic>
+        <p:nvPicPr>
+          <p:cNvPr id="32" name="Image 5" descr="preencoded.png">    </p:cNvPr>
+          <p:cNvPicPr>
+            <a:picLocks noChangeAspect="1"/>
+          </p:cNvPicPr>
+          <p:nvPr/>
+        </p:nvPicPr>
+        <p:blipFill>
+          <a:blip r:embed="rId6"/>
+          <a:stretch>
+            <a:fillRect/>
+          </a:stretch>
+        </p:blipFill>
+        <p:spPr>
+          <a:xfrm>
+            <a:off x="8526780" y="4338828"/>
+            <a:ext cx="228600" cy="228600"/>
+          </a:xfrm>
+          <a:prstGeom prst="rect">
+            <a:avLst/>
+          </a:prstGeom>
+        </p:spPr>
+      </p:pic>
+      <p:sp>
+        <p:nvSpPr>
+          <p:cNvPr id="33" name="Text 25"/>
+          <p:cNvSpPr/>
+          <p:nvPr/>
+        </p:nvSpPr>
+        <p:spPr>
+          <a:xfrm>
+            <a:off x="8997696" y="4206240"/>
+            <a:ext cx="2468880" cy="493776"/>
+          </a:xfrm>
+          <a:prstGeom prst="rect">
+            <a:avLst/>
+          </a:prstGeom>
+          <a:noFill/>
+          <a:ln/>
+        </p:spPr>
+        <p:txBody>
+          <a:bodyPr wrap="square" lIns="0" tIns="0" rIns="0" bIns="0" rtlCol="0" anchor="ctr"/>
+          <a:lstStyle/>
+          <a:p>
+            <a:pPr indent="0" marL="0">
               <a:buNone/>
             </a:pPr>
             <a:r>
@@ -19819,7 +20394,7 @@
                 <a:ea typeface="Cambria" pitchFamily="34" charset="-122"/>
                 <a:cs typeface="Cambria" pitchFamily="34" charset="-120"/>
               </a:rPr>
-              <a:t>Get finance and engineering talking</a:t>
+              <a:t>Waste detection with an owner</a:t>
             </a:r>
             <a:endParaRPr lang="en-US" sz="1500" dirty="0"/>
           </a:p>
@@ -19827,14 +20402,14 @@
       </p:sp>
       <p:sp>
         <p:nvSpPr>
-          <p:cNvPr id="15" name="Text 13"/>
-          <p:cNvSpPr/>
-          <p:nvPr/>
-        </p:nvSpPr>
-        <p:spPr>
-          <a:xfrm>
-            <a:off x="6455664" y="3346704"/>
-            <a:ext cx="2139696" cy="749808"/>
+          <p:cNvPr id="34" name="Text 26"/>
+          <p:cNvSpPr/>
+          <p:nvPr/>
+        </p:nvSpPr>
+        <p:spPr>
+          <a:xfrm>
+            <a:off x="8412480" y="4773168"/>
+            <a:ext cx="2926080" cy="859536"/>
           </a:xfrm>
           <a:prstGeom prst="rect">
             <a:avLst/>
@@ -19853,7 +20428,7 @@
               <a:buNone/>
             </a:pPr>
             <a:r>
-              <a:rPr lang="en-US" sz="1200" dirty="0">
+              <a:rPr lang="en-US" sz="1150" dirty="0">
                 <a:solidFill>
                   <a:srgbClr val="5C6675"/>
                 </a:solidFill>
@@ -19861,44 +20436,51 @@
                 <a:ea typeface="Calibri" pitchFamily="34" charset="-122"/>
                 <a:cs typeface="Calibri" pitchFamily="34" charset="-120"/>
               </a:rPr>
-              <a:t>Bring both into the conversation early, not as an afterthought.</a:t>
-            </a:r>
-            <a:endParaRPr lang="en-US" sz="1200" dirty="0"/>
-          </a:p>
-        </p:txBody>
-      </p:sp>
-      <p:sp>
-        <p:nvSpPr>
-          <p:cNvPr id="16" name="Shape 14"/>
-          <p:cNvSpPr/>
-          <p:nvPr/>
-        </p:nvSpPr>
-        <p:spPr>
-          <a:xfrm>
-            <a:off x="9052560" y="1783080"/>
-            <a:ext cx="2587752" cy="2423160"/>
+              <a:t>CostGuard consolidates recommendations across providers, assigns an owner and tracks the saving — into Jira, Slack or ServiceNow.</a:t>
+            </a:r>
+            <a:endParaRPr lang="en-US" sz="1150" dirty="0"/>
+          </a:p>
+        </p:txBody>
+      </p:sp>
+      <p:sp>
+        <p:nvSpPr>
+          <p:cNvPr id="35" name="Shape 27"/>
+          <p:cNvSpPr/>
+          <p:nvPr/>
+        </p:nvSpPr>
+        <p:spPr>
+          <a:xfrm>
+            <a:off x="548640" y="5852160"/>
+            <a:ext cx="11091672" cy="786384"/>
           </a:xfrm>
           <a:prstGeom prst="roundRect">
             <a:avLst>
-              <a:gd name="adj" fmla="val 3396"/>
+              <a:gd name="adj" fmla="val 10465"/>
             </a:avLst>
           </a:prstGeom>
           <a:solidFill>
-            <a:srgbClr val="F1F3F6"/>
-          </a:solidFill>
-          <a:ln/>
-        </p:spPr>
-      </p:sp>
-      <p:sp>
-        <p:nvSpPr>
-          <p:cNvPr id="17" name="Text 15"/>
-          <p:cNvSpPr/>
-          <p:nvPr/>
-        </p:nvSpPr>
-        <p:spPr>
-          <a:xfrm>
-            <a:off x="9308592" y="1965960"/>
-            <a:ext cx="1097280" cy="502920"/>
+            <a:srgbClr val="1F2936"/>
+          </a:solidFill>
+          <a:ln/>
+          <a:effectLst>
+            <a:outerShdw sx="100000" sy="100000" kx="0" ky="0" algn="bl" rotWithShape="0" blurRad="127000" dist="25400" dir="5400000">
+              <a:srgbClr val="8C99A8">
+                <a:alpha val="16000"/>
+              </a:srgbClr>
+            </a:outerShdw>
+          </a:effectLst>
+        </p:spPr>
+      </p:sp>
+      <p:sp>
+        <p:nvSpPr>
+          <p:cNvPr id="36" name="Text 28"/>
+          <p:cNvSpPr/>
+          <p:nvPr/>
+        </p:nvSpPr>
+        <p:spPr>
+          <a:xfrm>
+            <a:off x="877824" y="5852160"/>
+            <a:ext cx="10424160" cy="786384"/>
           </a:xfrm>
           <a:prstGeom prst="rect">
             <a:avLst/>
@@ -19911,399 +20493,40 @@
           <a:lstStyle/>
           <a:p>
             <a:pPr indent="0" marL="0">
-              <a:buNone/>
-            </a:pPr>
-            <a:r>
-              <a:rPr lang="en-US" sz="2800" b="1" dirty="0">
-                <a:solidFill>
-                  <a:srgbClr val="B9C2CD"/>
-                </a:solidFill>
-                <a:latin typeface="Cambria" pitchFamily="34" charset="0"/>
-                <a:ea typeface="Cambria" pitchFamily="34" charset="-122"/>
-                <a:cs typeface="Cambria" pitchFamily="34" charset="-120"/>
-              </a:rPr>
-              <a:t>04</a:t>
-            </a:r>
-            <a:endParaRPr lang="en-US" sz="2800" dirty="0"/>
-          </a:p>
-        </p:txBody>
-      </p:sp>
-      <p:sp>
-        <p:nvSpPr>
-          <p:cNvPr id="18" name="Text 16"/>
-          <p:cNvSpPr/>
-          <p:nvPr/>
-        </p:nvSpPr>
-        <p:spPr>
-          <a:xfrm>
-            <a:off x="9290304" y="2523744"/>
-            <a:ext cx="2139696" cy="786384"/>
-          </a:xfrm>
-          <a:prstGeom prst="rect">
-            <a:avLst/>
-          </a:prstGeom>
-          <a:noFill/>
-          <a:ln/>
-        </p:spPr>
-        <p:txBody>
-          <a:bodyPr wrap="square" lIns="0" tIns="0" rIns="0" bIns="0" rtlCol="0" anchor="t"/>
-          <a:lstStyle/>
-          <a:p>
-            <a:pPr indent="0" marL="0">
               <a:lnSpc>
-                <a:spcPts val="2000"/>
+                <a:spcPts val="1600"/>
               </a:lnSpc>
               <a:buNone/>
             </a:pPr>
             <a:r>
-              <a:rPr lang="en-US" sz="1500" b="1" dirty="0">
-                <a:solidFill>
-                  <a:srgbClr val="1B2430"/>
-                </a:solidFill>
-                <a:latin typeface="Cambria" pitchFamily="34" charset="0"/>
-                <a:ea typeface="Cambria" pitchFamily="34" charset="-122"/>
-                <a:cs typeface="Cambria" pitchFamily="34" charset="-120"/>
-              </a:rPr>
-              <a:t>Set guardrails early</a:t>
-            </a:r>
-            <a:endParaRPr lang="en-US" sz="1500" dirty="0"/>
-          </a:p>
-        </p:txBody>
-      </p:sp>
-      <p:sp>
-        <p:nvSpPr>
-          <p:cNvPr id="19" name="Text 17"/>
-          <p:cNvSpPr/>
-          <p:nvPr/>
-        </p:nvSpPr>
-        <p:spPr>
-          <a:xfrm>
-            <a:off x="9290304" y="3346704"/>
-            <a:ext cx="2139696" cy="749808"/>
-          </a:xfrm>
-          <a:prstGeom prst="rect">
-            <a:avLst/>
-          </a:prstGeom>
-          <a:noFill/>
-          <a:ln/>
-        </p:spPr>
-        <p:txBody>
-          <a:bodyPr wrap="square" lIns="0" tIns="0" rIns="0" bIns="0" rtlCol="0" anchor="t"/>
-          <a:lstStyle/>
-          <a:p>
+              <a:rPr lang="en-US" sz="1200" b="1" dirty="0">
+                <a:solidFill>
+                  <a:srgbClr val="E39B2C"/>
+                </a:solidFill>
+                <a:latin typeface="Calibri" pitchFamily="34" charset="0"/>
+                <a:ea typeface="Calibri" pitchFamily="34" charset="-122"/>
+                <a:cs typeface="Calibri" pitchFamily="34" charset="-120"/>
+              </a:rPr>
+              <a:t>Before buying, prove three things on our own data:  </a:t>
+            </a:r>
             <a:pPr indent="0" marL="0">
               <a:lnSpc>
-                <a:spcPts val="1500"/>
+                <a:spcPts val="1600"/>
               </a:lnSpc>
               <a:buNone/>
             </a:pPr>
             <a:r>
               <a:rPr lang="en-US" sz="1200" dirty="0">
                 <a:solidFill>
-                  <a:srgbClr val="5C6675"/>
-                </a:solidFill>
-                <a:latin typeface="Calibri" pitchFamily="34" charset="0"/>
-                <a:ea typeface="Calibri" pitchFamily="34" charset="-122"/>
-                <a:cs typeface="Calibri" pitchFamily="34" charset="-120"/>
-              </a:rPr>
-              <a:t>Owners, budget thresholds and quotas cost little to add — and stop the expensive surprises.</a:t>
+                  <a:srgbClr val="9EABBA"/>
+                </a:solidFill>
+                <a:latin typeface="Calibri" pitchFamily="34" charset="0"/>
+                <a:ea typeface="Calibri" pitchFamily="34" charset="-122"/>
+                <a:cs typeface="Calibri" pitchFamily="34" charset="-120"/>
+              </a:rPr>
+              <a:t>that it allocates the spend we cannot allocate today, that it attributes Azure OpenAI cost per calling application rather than per resource, and that it exports FOCUS so we are not locked in. Vendor-published outcomes — around 30% cost reduction and 50% engineer time saved — are marketing claims, not a forecast for us.</a:t>
             </a:r>
             <a:endParaRPr lang="en-US" sz="1200" dirty="0"/>
-          </a:p>
-        </p:txBody>
-      </p:sp>
-      <p:sp>
-        <p:nvSpPr>
-          <p:cNvPr id="20" name="Shape 18"/>
-          <p:cNvSpPr/>
-          <p:nvPr/>
-        </p:nvSpPr>
-        <p:spPr>
-          <a:xfrm>
-            <a:off x="548640" y="4434840"/>
-            <a:ext cx="11091672" cy="1874520"/>
-          </a:xfrm>
-          <a:prstGeom prst="roundRect">
-            <a:avLst>
-              <a:gd name="adj" fmla="val 4390"/>
-            </a:avLst>
-          </a:prstGeom>
-          <a:solidFill>
-            <a:srgbClr val="F1F3F6"/>
-          </a:solidFill>
-          <a:ln/>
-        </p:spPr>
-      </p:sp>
-      <p:sp>
-        <p:nvSpPr>
-          <p:cNvPr id="21" name="Text 19"/>
-          <p:cNvSpPr/>
-          <p:nvPr/>
-        </p:nvSpPr>
-        <p:spPr>
-          <a:xfrm>
-            <a:off x="877824" y="4572000"/>
-            <a:ext cx="6035040" cy="292608"/>
-          </a:xfrm>
-          <a:prstGeom prst="rect">
-            <a:avLst/>
-          </a:prstGeom>
-          <a:noFill/>
-          <a:ln/>
-        </p:spPr>
-        <p:txBody>
-          <a:bodyPr wrap="square" lIns="0" tIns="0" rIns="0" bIns="0" rtlCol="0" anchor="ctr"/>
-          <a:lstStyle/>
-          <a:p>
-            <a:pPr indent="0" marL="0">
-              <a:buNone/>
-            </a:pPr>
-            <a:r>
-              <a:rPr lang="en-US" sz="1200" b="1" spc="180" kern="0" dirty="0">
-                <a:solidFill>
-                  <a:srgbClr val="5C6675"/>
-                </a:solidFill>
-                <a:latin typeface="Calibri" pitchFamily="34" charset="0"/>
-                <a:ea typeface="Calibri" pitchFamily="34" charset="-122"/>
-                <a:cs typeface="Calibri" pitchFamily="34" charset="-120"/>
-              </a:rPr>
-              <a:t>Tooling — match the footprint, not the ambition</a:t>
-            </a:r>
-            <a:endParaRPr lang="en-US" sz="1200" dirty="0"/>
-          </a:p>
-        </p:txBody>
-      </p:sp>
-      <p:sp>
-        <p:nvSpPr>
-          <p:cNvPr id="22" name="Text 20"/>
-          <p:cNvSpPr/>
-          <p:nvPr/>
-        </p:nvSpPr>
-        <p:spPr>
-          <a:xfrm>
-            <a:off x="877824" y="4937760"/>
-            <a:ext cx="1737360" cy="384048"/>
-          </a:xfrm>
-          <a:prstGeom prst="rect">
-            <a:avLst/>
-          </a:prstGeom>
-          <a:noFill/>
-          <a:ln/>
-        </p:spPr>
-        <p:txBody>
-          <a:bodyPr wrap="square" lIns="0" tIns="0" rIns="0" bIns="0" rtlCol="0" anchor="ctr"/>
-          <a:lstStyle/>
-          <a:p>
-            <a:pPr indent="0" marL="0">
-              <a:buNone/>
-            </a:pPr>
-            <a:r>
-              <a:rPr lang="en-US" sz="1350" b="1" dirty="0">
-                <a:solidFill>
-                  <a:srgbClr val="2E8B7A"/>
-                </a:solidFill>
-                <a:latin typeface="Calibri" pitchFamily="34" charset="0"/>
-                <a:ea typeface="Calibri" pitchFamily="34" charset="-122"/>
-                <a:cs typeface="Calibri" pitchFamily="34" charset="-120"/>
-              </a:rPr>
-              <a:t>Native</a:t>
-            </a:r>
-            <a:endParaRPr lang="en-US" sz="1350" dirty="0"/>
-          </a:p>
-        </p:txBody>
-      </p:sp>
-      <p:sp>
-        <p:nvSpPr>
-          <p:cNvPr id="23" name="Text 21"/>
-          <p:cNvSpPr/>
-          <p:nvPr/>
-        </p:nvSpPr>
-        <p:spPr>
-          <a:xfrm>
-            <a:off x="2651760" y="4937760"/>
-            <a:ext cx="8595360" cy="384048"/>
-          </a:xfrm>
-          <a:prstGeom prst="rect">
-            <a:avLst/>
-          </a:prstGeom>
-          <a:noFill/>
-          <a:ln/>
-        </p:spPr>
-        <p:txBody>
-          <a:bodyPr wrap="square" lIns="0" tIns="0" rIns="0" bIns="0" rtlCol="0" anchor="ctr"/>
-          <a:lstStyle/>
-          <a:p>
-            <a:pPr indent="0" marL="0">
-              <a:buNone/>
-            </a:pPr>
-            <a:r>
-              <a:rPr lang="en-US" sz="1350" dirty="0">
-                <a:solidFill>
-                  <a:srgbClr val="5C6675"/>
-                </a:solidFill>
-                <a:latin typeface="Calibri" pitchFamily="34" charset="0"/>
-                <a:ea typeface="Calibri" pitchFamily="34" charset="-122"/>
-                <a:cs typeface="Calibri" pitchFamily="34" charset="-120"/>
-              </a:rPr>
-              <a:t>AWS Cost Explorer  ·  Azure Cost Management  ·  GCP Billing</a:t>
-            </a:r>
-            <a:endParaRPr lang="en-US" sz="1350" dirty="0"/>
-          </a:p>
-        </p:txBody>
-      </p:sp>
-      <p:sp>
-        <p:nvSpPr>
-          <p:cNvPr id="24" name="Text 22"/>
-          <p:cNvSpPr/>
-          <p:nvPr/>
-        </p:nvSpPr>
-        <p:spPr>
-          <a:xfrm>
-            <a:off x="877824" y="5349240"/>
-            <a:ext cx="1737360" cy="384048"/>
-          </a:xfrm>
-          <a:prstGeom prst="rect">
-            <a:avLst/>
-          </a:prstGeom>
-          <a:noFill/>
-          <a:ln/>
-        </p:spPr>
-        <p:txBody>
-          <a:bodyPr wrap="square" lIns="0" tIns="0" rIns="0" bIns="0" rtlCol="0" anchor="ctr"/>
-          <a:lstStyle/>
-          <a:p>
-            <a:pPr indent="0" marL="0">
-              <a:buNone/>
-            </a:pPr>
-            <a:r>
-              <a:rPr lang="en-US" sz="1350" b="1" dirty="0">
-                <a:solidFill>
-                  <a:srgbClr val="B87B18"/>
-                </a:solidFill>
-                <a:latin typeface="Calibri" pitchFamily="34" charset="0"/>
-                <a:ea typeface="Calibri" pitchFamily="34" charset="-122"/>
-                <a:cs typeface="Calibri" pitchFamily="34" charset="-120"/>
-              </a:rPr>
-              <a:t>Third-party</a:t>
-            </a:r>
-            <a:endParaRPr lang="en-US" sz="1350" dirty="0"/>
-          </a:p>
-        </p:txBody>
-      </p:sp>
-      <p:sp>
-        <p:nvSpPr>
-          <p:cNvPr id="25" name="Text 23"/>
-          <p:cNvSpPr/>
-          <p:nvPr/>
-        </p:nvSpPr>
-        <p:spPr>
-          <a:xfrm>
-            <a:off x="2651760" y="5349240"/>
-            <a:ext cx="8595360" cy="384048"/>
-          </a:xfrm>
-          <a:prstGeom prst="rect">
-            <a:avLst/>
-          </a:prstGeom>
-          <a:noFill/>
-          <a:ln/>
-        </p:spPr>
-        <p:txBody>
-          <a:bodyPr wrap="square" lIns="0" tIns="0" rIns="0" bIns="0" rtlCol="0" anchor="ctr"/>
-          <a:lstStyle/>
-          <a:p>
-            <a:pPr indent="0" marL="0">
-              <a:buNone/>
-            </a:pPr>
-            <a:r>
-              <a:rPr lang="en-US" sz="1350" dirty="0">
-                <a:solidFill>
-                  <a:srgbClr val="5C6675"/>
-                </a:solidFill>
-                <a:latin typeface="Calibri" pitchFamily="34" charset="0"/>
-                <a:ea typeface="Calibri" pitchFamily="34" charset="-122"/>
-                <a:cs typeface="Calibri" pitchFamily="34" charset="-120"/>
-              </a:rPr>
-              <a:t>CloudHealth  ·  Apptio  ·  Vantage  ·  nOps  ·  Finout  ·  CoreStack</a:t>
-            </a:r>
-            <a:endParaRPr lang="en-US" sz="1350" dirty="0"/>
-          </a:p>
-        </p:txBody>
-      </p:sp>
-      <p:sp>
-        <p:nvSpPr>
-          <p:cNvPr id="26" name="Text 24"/>
-          <p:cNvSpPr/>
-          <p:nvPr/>
-        </p:nvSpPr>
-        <p:spPr>
-          <a:xfrm>
-            <a:off x="877824" y="5760720"/>
-            <a:ext cx="1737360" cy="384048"/>
-          </a:xfrm>
-          <a:prstGeom prst="rect">
-            <a:avLst/>
-          </a:prstGeom>
-          <a:noFill/>
-          <a:ln/>
-        </p:spPr>
-        <p:txBody>
-          <a:bodyPr wrap="square" lIns="0" tIns="0" rIns="0" bIns="0" rtlCol="0" anchor="ctr"/>
-          <a:lstStyle/>
-          <a:p>
-            <a:pPr indent="0" marL="0">
-              <a:buNone/>
-            </a:pPr>
-            <a:r>
-              <a:rPr lang="en-US" sz="1350" b="1" dirty="0">
-                <a:solidFill>
-                  <a:srgbClr val="1B2430"/>
-                </a:solidFill>
-                <a:latin typeface="Calibri" pitchFamily="34" charset="0"/>
-                <a:ea typeface="Calibri" pitchFamily="34" charset="-122"/>
-                <a:cs typeface="Calibri" pitchFamily="34" charset="-120"/>
-              </a:rPr>
-              <a:t>Standard</a:t>
-            </a:r>
-            <a:endParaRPr lang="en-US" sz="1350" dirty="0"/>
-          </a:p>
-        </p:txBody>
-      </p:sp>
-      <p:sp>
-        <p:nvSpPr>
-          <p:cNvPr id="27" name="Text 25"/>
-          <p:cNvSpPr/>
-          <p:nvPr/>
-        </p:nvSpPr>
-        <p:spPr>
-          <a:xfrm>
-            <a:off x="2651760" y="5760720"/>
-            <a:ext cx="8595360" cy="384048"/>
-          </a:xfrm>
-          <a:prstGeom prst="rect">
-            <a:avLst/>
-          </a:prstGeom>
-          <a:noFill/>
-          <a:ln/>
-        </p:spPr>
-        <p:txBody>
-          <a:bodyPr wrap="square" lIns="0" tIns="0" rIns="0" bIns="0" rtlCol="0" anchor="ctr"/>
-          <a:lstStyle/>
-          <a:p>
-            <a:pPr indent="0" marL="0">
-              <a:buNone/>
-            </a:pPr>
-            <a:r>
-              <a:rPr lang="en-US" sz="1350" dirty="0">
-                <a:solidFill>
-                  <a:srgbClr val="5C6675"/>
-                </a:solidFill>
-                <a:latin typeface="Calibri" pitchFamily="34" charset="0"/>
-                <a:ea typeface="Calibri" pitchFamily="34" charset="-122"/>
-                <a:cs typeface="Calibri" pitchFamily="34" charset="-120"/>
-              </a:rPr>
-              <a:t>FOCUS-compliant platforms for multi-cloud reporting</a:t>
-            </a:r>
-            <a:endParaRPr lang="en-US" sz="1350" dirty="0"/>
           </a:p>
         </p:txBody>
       </p:sp>
@@ -20318,6 +20541,991 @@
 <file path=ppt/slides/slide25.xml><?xml version="1.0" encoding="utf-8"?>
 <p:sld xmlns:a="http://schemas.openxmlformats.org/drawingml/2006/main" xmlns:r="http://schemas.openxmlformats.org/officeDocument/2006/relationships" xmlns:p="http://schemas.openxmlformats.org/presentationml/2006/main">
   <p:cSld name="Slide 25">
+    <p:bg>
+      <p:bgPr>
+        <a:solidFill>
+          <a:srgbClr val="FFFFFF"/>
+        </a:solidFill>
+      </p:bgPr>
+    </p:bg>
+    <p:spTree>
+      <p:nvGrpSpPr>
+        <p:cNvPr id="1" name=""/>
+        <p:cNvGrpSpPr/>
+        <p:nvPr/>
+      </p:nvGrpSpPr>
+      <p:grpSpPr>
+        <a:xfrm>
+          <a:off x="0" y="0"/>
+          <a:ext cx="0" cy="0"/>
+          <a:chOff x="0" y="0"/>
+          <a:chExt cx="0" cy="0"/>
+        </a:xfrm>
+      </p:grpSpPr>
+      <p:sp>
+        <p:nvSpPr>
+          <p:cNvPr id="2" name="Text 0"/>
+          <p:cNvSpPr/>
+          <p:nvPr/>
+        </p:nvSpPr>
+        <p:spPr>
+          <a:xfrm>
+            <a:off x="548640" y="475488"/>
+            <a:ext cx="7315200" cy="256032"/>
+          </a:xfrm>
+          <a:prstGeom prst="rect">
+            <a:avLst/>
+          </a:prstGeom>
+          <a:noFill/>
+          <a:ln/>
+        </p:spPr>
+        <p:txBody>
+          <a:bodyPr wrap="square" lIns="0" tIns="0" rIns="0" bIns="0" rtlCol="0" anchor="ctr"/>
+          <a:lstStyle/>
+          <a:p>
+            <a:pPr indent="0" marL="0">
+              <a:buNone/>
+            </a:pPr>
+            <a:r>
+              <a:rPr lang="en-US" sz="1100" b="1" spc="220" kern="0" dirty="0">
+                <a:solidFill>
+                  <a:srgbClr val="E39B2C"/>
+                </a:solidFill>
+                <a:latin typeface="Calibri" pitchFamily="34" charset="0"/>
+                <a:ea typeface="Calibri" pitchFamily="34" charset="-122"/>
+                <a:cs typeface="Calibri" pitchFamily="34" charset="-120"/>
+              </a:rPr>
+              <a:t>THE PATH FORWARD</a:t>
+            </a:r>
+            <a:endParaRPr lang="en-US" sz="1100" dirty="0"/>
+          </a:p>
+        </p:txBody>
+      </p:sp>
+      <p:sp>
+        <p:nvSpPr>
+          <p:cNvPr id="3" name="Text 1"/>
+          <p:cNvSpPr/>
+          <p:nvPr/>
+        </p:nvSpPr>
+        <p:spPr>
+          <a:xfrm>
+            <a:off x="548640" y="768096"/>
+            <a:ext cx="11091672" cy="804672"/>
+          </a:xfrm>
+          <a:prstGeom prst="rect">
+            <a:avLst/>
+          </a:prstGeom>
+          <a:noFill/>
+          <a:ln/>
+        </p:spPr>
+        <p:txBody>
+          <a:bodyPr wrap="square" lIns="0" tIns="0" rIns="0" bIns="0" rtlCol="0" anchor="ctr"/>
+          <a:lstStyle/>
+          <a:p>
+            <a:pPr indent="0" marL="0">
+              <a:buNone/>
+            </a:pPr>
+            <a:r>
+              <a:rPr lang="en-US" sz="3100" b="1" dirty="0">
+                <a:solidFill>
+                  <a:srgbClr val="1B2430"/>
+                </a:solidFill>
+                <a:latin typeface="Cambria" pitchFamily="34" charset="0"/>
+                <a:ea typeface="Cambria" pitchFamily="34" charset="-122"/>
+                <a:cs typeface="Cambria" pitchFamily="34" charset="-120"/>
+              </a:rPr>
+              <a:t>Where to start</a:t>
+            </a:r>
+            <a:endParaRPr lang="en-US" sz="3100" dirty="0"/>
+          </a:p>
+        </p:txBody>
+      </p:sp>
+      <p:sp>
+        <p:nvSpPr>
+          <p:cNvPr id="4" name="Shape 2"/>
+          <p:cNvSpPr/>
+          <p:nvPr/>
+        </p:nvSpPr>
+        <p:spPr>
+          <a:xfrm>
+            <a:off x="548640" y="1783080"/>
+            <a:ext cx="2587752" cy="2423160"/>
+          </a:xfrm>
+          <a:prstGeom prst="roundRect">
+            <a:avLst>
+              <a:gd name="adj" fmla="val 3396"/>
+            </a:avLst>
+          </a:prstGeom>
+          <a:solidFill>
+            <a:srgbClr val="1F2936"/>
+          </a:solidFill>
+          <a:ln/>
+        </p:spPr>
+      </p:sp>
+      <p:sp>
+        <p:nvSpPr>
+          <p:cNvPr id="5" name="Text 3"/>
+          <p:cNvSpPr/>
+          <p:nvPr/>
+        </p:nvSpPr>
+        <p:spPr>
+          <a:xfrm>
+            <a:off x="804672" y="1965960"/>
+            <a:ext cx="1097280" cy="502920"/>
+          </a:xfrm>
+          <a:prstGeom prst="rect">
+            <a:avLst/>
+          </a:prstGeom>
+          <a:noFill/>
+          <a:ln/>
+        </p:spPr>
+        <p:txBody>
+          <a:bodyPr wrap="square" lIns="0" tIns="0" rIns="0" bIns="0" rtlCol="0" anchor="ctr"/>
+          <a:lstStyle/>
+          <a:p>
+            <a:pPr indent="0" marL="0">
+              <a:buNone/>
+            </a:pPr>
+            <a:r>
+              <a:rPr lang="en-US" sz="2800" b="1" dirty="0">
+                <a:solidFill>
+                  <a:srgbClr val="E39B2C"/>
+                </a:solidFill>
+                <a:latin typeface="Cambria" pitchFamily="34" charset="0"/>
+                <a:ea typeface="Cambria" pitchFamily="34" charset="-122"/>
+                <a:cs typeface="Cambria" pitchFamily="34" charset="-120"/>
+              </a:rPr>
+              <a:t>01</a:t>
+            </a:r>
+            <a:endParaRPr lang="en-US" sz="2800" dirty="0"/>
+          </a:p>
+        </p:txBody>
+      </p:sp>
+      <p:sp>
+        <p:nvSpPr>
+          <p:cNvPr id="6" name="Text 4"/>
+          <p:cNvSpPr/>
+          <p:nvPr/>
+        </p:nvSpPr>
+        <p:spPr>
+          <a:xfrm>
+            <a:off x="786384" y="2523744"/>
+            <a:ext cx="2139696" cy="786384"/>
+          </a:xfrm>
+          <a:prstGeom prst="rect">
+            <a:avLst/>
+          </a:prstGeom>
+          <a:noFill/>
+          <a:ln/>
+        </p:spPr>
+        <p:txBody>
+          <a:bodyPr wrap="square" lIns="0" tIns="0" rIns="0" bIns="0" rtlCol="0" anchor="t"/>
+          <a:lstStyle/>
+          <a:p>
+            <a:pPr indent="0" marL="0">
+              <a:lnSpc>
+                <a:spcPts val="2000"/>
+              </a:lnSpc>
+              <a:buNone/>
+            </a:pPr>
+            <a:r>
+              <a:rPr lang="en-US" sz="1500" b="1" dirty="0">
+                <a:solidFill>
+                  <a:srgbClr val="FFFFFF"/>
+                </a:solidFill>
+                <a:latin typeface="Cambria" pitchFamily="34" charset="0"/>
+                <a:ea typeface="Cambria" pitchFamily="34" charset="-122"/>
+                <a:cs typeface="Cambria" pitchFamily="34" charset="-120"/>
+              </a:rPr>
+              <a:t>Set the tagging standard</a:t>
+            </a:r>
+            <a:endParaRPr lang="en-US" sz="1500" dirty="0"/>
+          </a:p>
+        </p:txBody>
+      </p:sp>
+      <p:sp>
+        <p:nvSpPr>
+          <p:cNvPr id="7" name="Text 5"/>
+          <p:cNvSpPr/>
+          <p:nvPr/>
+        </p:nvSpPr>
+        <p:spPr>
+          <a:xfrm>
+            <a:off x="786384" y="3346704"/>
+            <a:ext cx="2139696" cy="749808"/>
+          </a:xfrm>
+          <a:prstGeom prst="rect">
+            <a:avLst/>
+          </a:prstGeom>
+          <a:noFill/>
+          <a:ln/>
+        </p:spPr>
+        <p:txBody>
+          <a:bodyPr wrap="square" lIns="0" tIns="0" rIns="0" bIns="0" rtlCol="0" anchor="t"/>
+          <a:lstStyle/>
+          <a:p>
+            <a:pPr indent="0" marL="0">
+              <a:lnSpc>
+                <a:spcPts val="1500"/>
+              </a:lnSpc>
+              <a:buNone/>
+            </a:pPr>
+            <a:r>
+              <a:rPr lang="en-US" sz="1200" dirty="0">
+                <a:solidFill>
+                  <a:srgbClr val="9EABBA"/>
+                </a:solidFill>
+                <a:latin typeface="Calibri" pitchFamily="34" charset="0"/>
+                <a:ea typeface="Calibri" pitchFamily="34" charset="-122"/>
+                <a:cs typeface="Calibri" pitchFamily="34" charset="-120"/>
+              </a:rPr>
+              <a:t>Agree a consistent taxonomy before investing in dashboards.</a:t>
+            </a:r>
+            <a:endParaRPr lang="en-US" sz="1200" dirty="0"/>
+          </a:p>
+        </p:txBody>
+      </p:sp>
+      <p:sp>
+        <p:nvSpPr>
+          <p:cNvPr id="8" name="Shape 6"/>
+          <p:cNvSpPr/>
+          <p:nvPr/>
+        </p:nvSpPr>
+        <p:spPr>
+          <a:xfrm>
+            <a:off x="3383280" y="1783080"/>
+            <a:ext cx="2587752" cy="2423160"/>
+          </a:xfrm>
+          <a:prstGeom prst="roundRect">
+            <a:avLst>
+              <a:gd name="adj" fmla="val 3396"/>
+            </a:avLst>
+          </a:prstGeom>
+          <a:solidFill>
+            <a:srgbClr val="F1F3F6"/>
+          </a:solidFill>
+          <a:ln/>
+        </p:spPr>
+      </p:sp>
+      <p:sp>
+        <p:nvSpPr>
+          <p:cNvPr id="9" name="Text 7"/>
+          <p:cNvSpPr/>
+          <p:nvPr/>
+        </p:nvSpPr>
+        <p:spPr>
+          <a:xfrm>
+            <a:off x="3639312" y="1965960"/>
+            <a:ext cx="1097280" cy="502920"/>
+          </a:xfrm>
+          <a:prstGeom prst="rect">
+            <a:avLst/>
+          </a:prstGeom>
+          <a:noFill/>
+          <a:ln/>
+        </p:spPr>
+        <p:txBody>
+          <a:bodyPr wrap="square" lIns="0" tIns="0" rIns="0" bIns="0" rtlCol="0" anchor="ctr"/>
+          <a:lstStyle/>
+          <a:p>
+            <a:pPr indent="0" marL="0">
+              <a:buNone/>
+            </a:pPr>
+            <a:r>
+              <a:rPr lang="en-US" sz="2800" b="1" dirty="0">
+                <a:solidFill>
+                  <a:srgbClr val="B9C2CD"/>
+                </a:solidFill>
+                <a:latin typeface="Cambria" pitchFamily="34" charset="0"/>
+                <a:ea typeface="Cambria" pitchFamily="34" charset="-122"/>
+                <a:cs typeface="Cambria" pitchFamily="34" charset="-120"/>
+              </a:rPr>
+              <a:t>02</a:t>
+            </a:r>
+            <a:endParaRPr lang="en-US" sz="2800" dirty="0"/>
+          </a:p>
+        </p:txBody>
+      </p:sp>
+      <p:sp>
+        <p:nvSpPr>
+          <p:cNvPr id="10" name="Text 8"/>
+          <p:cNvSpPr/>
+          <p:nvPr/>
+        </p:nvSpPr>
+        <p:spPr>
+          <a:xfrm>
+            <a:off x="3621024" y="2523744"/>
+            <a:ext cx="2139696" cy="786384"/>
+          </a:xfrm>
+          <a:prstGeom prst="rect">
+            <a:avLst/>
+          </a:prstGeom>
+          <a:noFill/>
+          <a:ln/>
+        </p:spPr>
+        <p:txBody>
+          <a:bodyPr wrap="square" lIns="0" tIns="0" rIns="0" bIns="0" rtlCol="0" anchor="t"/>
+          <a:lstStyle/>
+          <a:p>
+            <a:pPr indent="0" marL="0">
+              <a:lnSpc>
+                <a:spcPts val="2000"/>
+              </a:lnSpc>
+              <a:buNone/>
+            </a:pPr>
+            <a:r>
+              <a:rPr lang="en-US" sz="1500" b="1" dirty="0">
+                <a:solidFill>
+                  <a:srgbClr val="1B2430"/>
+                </a:solidFill>
+                <a:latin typeface="Cambria" pitchFamily="34" charset="0"/>
+                <a:ea typeface="Cambria" pitchFamily="34" charset="-122"/>
+                <a:cs typeface="Cambria" pitchFamily="34" charset="-120"/>
+              </a:rPr>
+              <a:t>Start with the biggest spend</a:t>
+            </a:r>
+            <a:endParaRPr lang="en-US" sz="1500" dirty="0"/>
+          </a:p>
+        </p:txBody>
+      </p:sp>
+      <p:sp>
+        <p:nvSpPr>
+          <p:cNvPr id="11" name="Text 9"/>
+          <p:cNvSpPr/>
+          <p:nvPr/>
+        </p:nvSpPr>
+        <p:spPr>
+          <a:xfrm>
+            <a:off x="3621024" y="3346704"/>
+            <a:ext cx="2139696" cy="749808"/>
+          </a:xfrm>
+          <a:prstGeom prst="rect">
+            <a:avLst/>
+          </a:prstGeom>
+          <a:noFill/>
+          <a:ln/>
+        </p:spPr>
+        <p:txBody>
+          <a:bodyPr wrap="square" lIns="0" tIns="0" rIns="0" bIns="0" rtlCol="0" anchor="t"/>
+          <a:lstStyle/>
+          <a:p>
+            <a:pPr indent="0" marL="0">
+              <a:lnSpc>
+                <a:spcPts val="1500"/>
+              </a:lnSpc>
+              <a:buNone/>
+            </a:pPr>
+            <a:r>
+              <a:rPr lang="en-US" sz="1200" dirty="0">
+                <a:solidFill>
+                  <a:srgbClr val="5C6675"/>
+                </a:solidFill>
+                <a:latin typeface="Calibri" pitchFamily="34" charset="0"/>
+                <a:ea typeface="Calibri" pitchFamily="34" charset="-122"/>
+                <a:cs typeface="Calibri" pitchFamily="34" charset="-120"/>
+              </a:rPr>
+              <a:t>Attack the largest categories first. Don't chase perfect granularity everywhere.</a:t>
+            </a:r>
+            <a:endParaRPr lang="en-US" sz="1200" dirty="0"/>
+          </a:p>
+        </p:txBody>
+      </p:sp>
+      <p:sp>
+        <p:nvSpPr>
+          <p:cNvPr id="12" name="Shape 10"/>
+          <p:cNvSpPr/>
+          <p:nvPr/>
+        </p:nvSpPr>
+        <p:spPr>
+          <a:xfrm>
+            <a:off x="6217920" y="1783080"/>
+            <a:ext cx="2587752" cy="2423160"/>
+          </a:xfrm>
+          <a:prstGeom prst="roundRect">
+            <a:avLst>
+              <a:gd name="adj" fmla="val 3396"/>
+            </a:avLst>
+          </a:prstGeom>
+          <a:solidFill>
+            <a:srgbClr val="F1F3F6"/>
+          </a:solidFill>
+          <a:ln/>
+        </p:spPr>
+      </p:sp>
+      <p:sp>
+        <p:nvSpPr>
+          <p:cNvPr id="13" name="Text 11"/>
+          <p:cNvSpPr/>
+          <p:nvPr/>
+        </p:nvSpPr>
+        <p:spPr>
+          <a:xfrm>
+            <a:off x="6473952" y="1965960"/>
+            <a:ext cx="1097280" cy="502920"/>
+          </a:xfrm>
+          <a:prstGeom prst="rect">
+            <a:avLst/>
+          </a:prstGeom>
+          <a:noFill/>
+          <a:ln/>
+        </p:spPr>
+        <p:txBody>
+          <a:bodyPr wrap="square" lIns="0" tIns="0" rIns="0" bIns="0" rtlCol="0" anchor="ctr"/>
+          <a:lstStyle/>
+          <a:p>
+            <a:pPr indent="0" marL="0">
+              <a:buNone/>
+            </a:pPr>
+            <a:r>
+              <a:rPr lang="en-US" sz="2800" b="1" dirty="0">
+                <a:solidFill>
+                  <a:srgbClr val="B9C2CD"/>
+                </a:solidFill>
+                <a:latin typeface="Cambria" pitchFamily="34" charset="0"/>
+                <a:ea typeface="Cambria" pitchFamily="34" charset="-122"/>
+                <a:cs typeface="Cambria" pitchFamily="34" charset="-120"/>
+              </a:rPr>
+              <a:t>03</a:t>
+            </a:r>
+            <a:endParaRPr lang="en-US" sz="2800" dirty="0"/>
+          </a:p>
+        </p:txBody>
+      </p:sp>
+      <p:sp>
+        <p:nvSpPr>
+          <p:cNvPr id="14" name="Text 12"/>
+          <p:cNvSpPr/>
+          <p:nvPr/>
+        </p:nvSpPr>
+        <p:spPr>
+          <a:xfrm>
+            <a:off x="6455664" y="2523744"/>
+            <a:ext cx="2139696" cy="786384"/>
+          </a:xfrm>
+          <a:prstGeom prst="rect">
+            <a:avLst/>
+          </a:prstGeom>
+          <a:noFill/>
+          <a:ln/>
+        </p:spPr>
+        <p:txBody>
+          <a:bodyPr wrap="square" lIns="0" tIns="0" rIns="0" bIns="0" rtlCol="0" anchor="t"/>
+          <a:lstStyle/>
+          <a:p>
+            <a:pPr indent="0" marL="0">
+              <a:lnSpc>
+                <a:spcPts val="2000"/>
+              </a:lnSpc>
+              <a:buNone/>
+            </a:pPr>
+            <a:r>
+              <a:rPr lang="en-US" sz="1500" b="1" dirty="0">
+                <a:solidFill>
+                  <a:srgbClr val="1B2430"/>
+                </a:solidFill>
+                <a:latin typeface="Cambria" pitchFamily="34" charset="0"/>
+                <a:ea typeface="Cambria" pitchFamily="34" charset="-122"/>
+                <a:cs typeface="Cambria" pitchFamily="34" charset="-120"/>
+              </a:rPr>
+              <a:t>Get finance and engineering talking</a:t>
+            </a:r>
+            <a:endParaRPr lang="en-US" sz="1500" dirty="0"/>
+          </a:p>
+        </p:txBody>
+      </p:sp>
+      <p:sp>
+        <p:nvSpPr>
+          <p:cNvPr id="15" name="Text 13"/>
+          <p:cNvSpPr/>
+          <p:nvPr/>
+        </p:nvSpPr>
+        <p:spPr>
+          <a:xfrm>
+            <a:off x="6455664" y="3346704"/>
+            <a:ext cx="2139696" cy="749808"/>
+          </a:xfrm>
+          <a:prstGeom prst="rect">
+            <a:avLst/>
+          </a:prstGeom>
+          <a:noFill/>
+          <a:ln/>
+        </p:spPr>
+        <p:txBody>
+          <a:bodyPr wrap="square" lIns="0" tIns="0" rIns="0" bIns="0" rtlCol="0" anchor="t"/>
+          <a:lstStyle/>
+          <a:p>
+            <a:pPr indent="0" marL="0">
+              <a:lnSpc>
+                <a:spcPts val="1500"/>
+              </a:lnSpc>
+              <a:buNone/>
+            </a:pPr>
+            <a:r>
+              <a:rPr lang="en-US" sz="1200" dirty="0">
+                <a:solidFill>
+                  <a:srgbClr val="5C6675"/>
+                </a:solidFill>
+                <a:latin typeface="Calibri" pitchFamily="34" charset="0"/>
+                <a:ea typeface="Calibri" pitchFamily="34" charset="-122"/>
+                <a:cs typeface="Calibri" pitchFamily="34" charset="-120"/>
+              </a:rPr>
+              <a:t>Bring both into the conversation early, not as an afterthought.</a:t>
+            </a:r>
+            <a:endParaRPr lang="en-US" sz="1200" dirty="0"/>
+          </a:p>
+        </p:txBody>
+      </p:sp>
+      <p:sp>
+        <p:nvSpPr>
+          <p:cNvPr id="16" name="Shape 14"/>
+          <p:cNvSpPr/>
+          <p:nvPr/>
+        </p:nvSpPr>
+        <p:spPr>
+          <a:xfrm>
+            <a:off x="9052560" y="1783080"/>
+            <a:ext cx="2587752" cy="2423160"/>
+          </a:xfrm>
+          <a:prstGeom prst="roundRect">
+            <a:avLst>
+              <a:gd name="adj" fmla="val 3396"/>
+            </a:avLst>
+          </a:prstGeom>
+          <a:solidFill>
+            <a:srgbClr val="F1F3F6"/>
+          </a:solidFill>
+          <a:ln/>
+        </p:spPr>
+      </p:sp>
+      <p:sp>
+        <p:nvSpPr>
+          <p:cNvPr id="17" name="Text 15"/>
+          <p:cNvSpPr/>
+          <p:nvPr/>
+        </p:nvSpPr>
+        <p:spPr>
+          <a:xfrm>
+            <a:off x="9308592" y="1965960"/>
+            <a:ext cx="1097280" cy="502920"/>
+          </a:xfrm>
+          <a:prstGeom prst="rect">
+            <a:avLst/>
+          </a:prstGeom>
+          <a:noFill/>
+          <a:ln/>
+        </p:spPr>
+        <p:txBody>
+          <a:bodyPr wrap="square" lIns="0" tIns="0" rIns="0" bIns="0" rtlCol="0" anchor="ctr"/>
+          <a:lstStyle/>
+          <a:p>
+            <a:pPr indent="0" marL="0">
+              <a:buNone/>
+            </a:pPr>
+            <a:r>
+              <a:rPr lang="en-US" sz="2800" b="1" dirty="0">
+                <a:solidFill>
+                  <a:srgbClr val="B9C2CD"/>
+                </a:solidFill>
+                <a:latin typeface="Cambria" pitchFamily="34" charset="0"/>
+                <a:ea typeface="Cambria" pitchFamily="34" charset="-122"/>
+                <a:cs typeface="Cambria" pitchFamily="34" charset="-120"/>
+              </a:rPr>
+              <a:t>04</a:t>
+            </a:r>
+            <a:endParaRPr lang="en-US" sz="2800" dirty="0"/>
+          </a:p>
+        </p:txBody>
+      </p:sp>
+      <p:sp>
+        <p:nvSpPr>
+          <p:cNvPr id="18" name="Text 16"/>
+          <p:cNvSpPr/>
+          <p:nvPr/>
+        </p:nvSpPr>
+        <p:spPr>
+          <a:xfrm>
+            <a:off x="9290304" y="2523744"/>
+            <a:ext cx="2139696" cy="786384"/>
+          </a:xfrm>
+          <a:prstGeom prst="rect">
+            <a:avLst/>
+          </a:prstGeom>
+          <a:noFill/>
+          <a:ln/>
+        </p:spPr>
+        <p:txBody>
+          <a:bodyPr wrap="square" lIns="0" tIns="0" rIns="0" bIns="0" rtlCol="0" anchor="t"/>
+          <a:lstStyle/>
+          <a:p>
+            <a:pPr indent="0" marL="0">
+              <a:lnSpc>
+                <a:spcPts val="2000"/>
+              </a:lnSpc>
+              <a:buNone/>
+            </a:pPr>
+            <a:r>
+              <a:rPr lang="en-US" sz="1500" b="1" dirty="0">
+                <a:solidFill>
+                  <a:srgbClr val="1B2430"/>
+                </a:solidFill>
+                <a:latin typeface="Cambria" pitchFamily="34" charset="0"/>
+                <a:ea typeface="Cambria" pitchFamily="34" charset="-122"/>
+                <a:cs typeface="Cambria" pitchFamily="34" charset="-120"/>
+              </a:rPr>
+              <a:t>Set guardrails early</a:t>
+            </a:r>
+            <a:endParaRPr lang="en-US" sz="1500" dirty="0"/>
+          </a:p>
+        </p:txBody>
+      </p:sp>
+      <p:sp>
+        <p:nvSpPr>
+          <p:cNvPr id="19" name="Text 17"/>
+          <p:cNvSpPr/>
+          <p:nvPr/>
+        </p:nvSpPr>
+        <p:spPr>
+          <a:xfrm>
+            <a:off x="9290304" y="3346704"/>
+            <a:ext cx="2139696" cy="749808"/>
+          </a:xfrm>
+          <a:prstGeom prst="rect">
+            <a:avLst/>
+          </a:prstGeom>
+          <a:noFill/>
+          <a:ln/>
+        </p:spPr>
+        <p:txBody>
+          <a:bodyPr wrap="square" lIns="0" tIns="0" rIns="0" bIns="0" rtlCol="0" anchor="t"/>
+          <a:lstStyle/>
+          <a:p>
+            <a:pPr indent="0" marL="0">
+              <a:lnSpc>
+                <a:spcPts val="1500"/>
+              </a:lnSpc>
+              <a:buNone/>
+            </a:pPr>
+            <a:r>
+              <a:rPr lang="en-US" sz="1200" dirty="0">
+                <a:solidFill>
+                  <a:srgbClr val="5C6675"/>
+                </a:solidFill>
+                <a:latin typeface="Calibri" pitchFamily="34" charset="0"/>
+                <a:ea typeface="Calibri" pitchFamily="34" charset="-122"/>
+                <a:cs typeface="Calibri" pitchFamily="34" charset="-120"/>
+              </a:rPr>
+              <a:t>Owners, budget thresholds and quotas cost little to add — and stop the expensive surprises.</a:t>
+            </a:r>
+            <a:endParaRPr lang="en-US" sz="1200" dirty="0"/>
+          </a:p>
+        </p:txBody>
+      </p:sp>
+      <p:sp>
+        <p:nvSpPr>
+          <p:cNvPr id="20" name="Shape 18"/>
+          <p:cNvSpPr/>
+          <p:nvPr/>
+        </p:nvSpPr>
+        <p:spPr>
+          <a:xfrm>
+            <a:off x="548640" y="4434840"/>
+            <a:ext cx="11091672" cy="1874520"/>
+          </a:xfrm>
+          <a:prstGeom prst="roundRect">
+            <a:avLst>
+              <a:gd name="adj" fmla="val 4390"/>
+            </a:avLst>
+          </a:prstGeom>
+          <a:solidFill>
+            <a:srgbClr val="F1F3F6"/>
+          </a:solidFill>
+          <a:ln/>
+        </p:spPr>
+      </p:sp>
+      <p:sp>
+        <p:nvSpPr>
+          <p:cNvPr id="21" name="Text 19"/>
+          <p:cNvSpPr/>
+          <p:nvPr/>
+        </p:nvSpPr>
+        <p:spPr>
+          <a:xfrm>
+            <a:off x="877824" y="4572000"/>
+            <a:ext cx="6035040" cy="292608"/>
+          </a:xfrm>
+          <a:prstGeom prst="rect">
+            <a:avLst/>
+          </a:prstGeom>
+          <a:noFill/>
+          <a:ln/>
+        </p:spPr>
+        <p:txBody>
+          <a:bodyPr wrap="square" lIns="0" tIns="0" rIns="0" bIns="0" rtlCol="0" anchor="ctr"/>
+          <a:lstStyle/>
+          <a:p>
+            <a:pPr indent="0" marL="0">
+              <a:buNone/>
+            </a:pPr>
+            <a:r>
+              <a:rPr lang="en-US" sz="1200" b="1" spc="180" kern="0" dirty="0">
+                <a:solidFill>
+                  <a:srgbClr val="5C6675"/>
+                </a:solidFill>
+                <a:latin typeface="Calibri" pitchFamily="34" charset="0"/>
+                <a:ea typeface="Calibri" pitchFamily="34" charset="-122"/>
+                <a:cs typeface="Calibri" pitchFamily="34" charset="-120"/>
+              </a:rPr>
+              <a:t>Tooling — match the footprint, not the ambition</a:t>
+            </a:r>
+            <a:endParaRPr lang="en-US" sz="1200" dirty="0"/>
+          </a:p>
+        </p:txBody>
+      </p:sp>
+      <p:sp>
+        <p:nvSpPr>
+          <p:cNvPr id="22" name="Text 20"/>
+          <p:cNvSpPr/>
+          <p:nvPr/>
+        </p:nvSpPr>
+        <p:spPr>
+          <a:xfrm>
+            <a:off x="877824" y="4937760"/>
+            <a:ext cx="1737360" cy="384048"/>
+          </a:xfrm>
+          <a:prstGeom prst="rect">
+            <a:avLst/>
+          </a:prstGeom>
+          <a:noFill/>
+          <a:ln/>
+        </p:spPr>
+        <p:txBody>
+          <a:bodyPr wrap="square" lIns="0" tIns="0" rIns="0" bIns="0" rtlCol="0" anchor="ctr"/>
+          <a:lstStyle/>
+          <a:p>
+            <a:pPr indent="0" marL="0">
+              <a:buNone/>
+            </a:pPr>
+            <a:r>
+              <a:rPr lang="en-US" sz="1350" b="1" dirty="0">
+                <a:solidFill>
+                  <a:srgbClr val="2E8B7A"/>
+                </a:solidFill>
+                <a:latin typeface="Calibri" pitchFamily="34" charset="0"/>
+                <a:ea typeface="Calibri" pitchFamily="34" charset="-122"/>
+                <a:cs typeface="Calibri" pitchFamily="34" charset="-120"/>
+              </a:rPr>
+              <a:t>Native</a:t>
+            </a:r>
+            <a:endParaRPr lang="en-US" sz="1350" dirty="0"/>
+          </a:p>
+        </p:txBody>
+      </p:sp>
+      <p:sp>
+        <p:nvSpPr>
+          <p:cNvPr id="23" name="Text 21"/>
+          <p:cNvSpPr/>
+          <p:nvPr/>
+        </p:nvSpPr>
+        <p:spPr>
+          <a:xfrm>
+            <a:off x="2651760" y="4937760"/>
+            <a:ext cx="8595360" cy="384048"/>
+          </a:xfrm>
+          <a:prstGeom prst="rect">
+            <a:avLst/>
+          </a:prstGeom>
+          <a:noFill/>
+          <a:ln/>
+        </p:spPr>
+        <p:txBody>
+          <a:bodyPr wrap="square" lIns="0" tIns="0" rIns="0" bIns="0" rtlCol="0" anchor="ctr"/>
+          <a:lstStyle/>
+          <a:p>
+            <a:pPr indent="0" marL="0">
+              <a:buNone/>
+            </a:pPr>
+            <a:r>
+              <a:rPr lang="en-US" sz="1350" dirty="0">
+                <a:solidFill>
+                  <a:srgbClr val="5C6675"/>
+                </a:solidFill>
+                <a:latin typeface="Calibri" pitchFamily="34" charset="0"/>
+                <a:ea typeface="Calibri" pitchFamily="34" charset="-122"/>
+                <a:cs typeface="Calibri" pitchFamily="34" charset="-120"/>
+              </a:rPr>
+              <a:t>AWS Cost Explorer  ·  Azure Cost Management  ·  GCP Billing</a:t>
+            </a:r>
+            <a:endParaRPr lang="en-US" sz="1350" dirty="0"/>
+          </a:p>
+        </p:txBody>
+      </p:sp>
+      <p:sp>
+        <p:nvSpPr>
+          <p:cNvPr id="24" name="Text 22"/>
+          <p:cNvSpPr/>
+          <p:nvPr/>
+        </p:nvSpPr>
+        <p:spPr>
+          <a:xfrm>
+            <a:off x="877824" y="5349240"/>
+            <a:ext cx="1737360" cy="384048"/>
+          </a:xfrm>
+          <a:prstGeom prst="rect">
+            <a:avLst/>
+          </a:prstGeom>
+          <a:noFill/>
+          <a:ln/>
+        </p:spPr>
+        <p:txBody>
+          <a:bodyPr wrap="square" lIns="0" tIns="0" rIns="0" bIns="0" rtlCol="0" anchor="ctr"/>
+          <a:lstStyle/>
+          <a:p>
+            <a:pPr indent="0" marL="0">
+              <a:buNone/>
+            </a:pPr>
+            <a:r>
+              <a:rPr lang="en-US" sz="1350" b="1" dirty="0">
+                <a:solidFill>
+                  <a:srgbClr val="B87B18"/>
+                </a:solidFill>
+                <a:latin typeface="Calibri" pitchFamily="34" charset="0"/>
+                <a:ea typeface="Calibri" pitchFamily="34" charset="-122"/>
+                <a:cs typeface="Calibri" pitchFamily="34" charset="-120"/>
+              </a:rPr>
+              <a:t>Third-party</a:t>
+            </a:r>
+            <a:endParaRPr lang="en-US" sz="1350" dirty="0"/>
+          </a:p>
+        </p:txBody>
+      </p:sp>
+      <p:sp>
+        <p:nvSpPr>
+          <p:cNvPr id="25" name="Text 23"/>
+          <p:cNvSpPr/>
+          <p:nvPr/>
+        </p:nvSpPr>
+        <p:spPr>
+          <a:xfrm>
+            <a:off x="2651760" y="5349240"/>
+            <a:ext cx="8595360" cy="384048"/>
+          </a:xfrm>
+          <a:prstGeom prst="rect">
+            <a:avLst/>
+          </a:prstGeom>
+          <a:noFill/>
+          <a:ln/>
+        </p:spPr>
+        <p:txBody>
+          <a:bodyPr wrap="square" lIns="0" tIns="0" rIns="0" bIns="0" rtlCol="0" anchor="ctr"/>
+          <a:lstStyle/>
+          <a:p>
+            <a:pPr indent="0" marL="0">
+              <a:buNone/>
+            </a:pPr>
+            <a:r>
+              <a:rPr lang="en-US" sz="1350" dirty="0">
+                <a:solidFill>
+                  <a:srgbClr val="5C6675"/>
+                </a:solidFill>
+                <a:latin typeface="Calibri" pitchFamily="34" charset="0"/>
+                <a:ea typeface="Calibri" pitchFamily="34" charset="-122"/>
+                <a:cs typeface="Calibri" pitchFamily="34" charset="-120"/>
+              </a:rPr>
+              <a:t>CloudHealth  ·  Apptio  ·  Vantage  ·  nOps  ·  Finout  ·  CoreStack</a:t>
+            </a:r>
+            <a:endParaRPr lang="en-US" sz="1350" dirty="0"/>
+          </a:p>
+        </p:txBody>
+      </p:sp>
+      <p:sp>
+        <p:nvSpPr>
+          <p:cNvPr id="26" name="Text 24"/>
+          <p:cNvSpPr/>
+          <p:nvPr/>
+        </p:nvSpPr>
+        <p:spPr>
+          <a:xfrm>
+            <a:off x="877824" y="5760720"/>
+            <a:ext cx="1737360" cy="384048"/>
+          </a:xfrm>
+          <a:prstGeom prst="rect">
+            <a:avLst/>
+          </a:prstGeom>
+          <a:noFill/>
+          <a:ln/>
+        </p:spPr>
+        <p:txBody>
+          <a:bodyPr wrap="square" lIns="0" tIns="0" rIns="0" bIns="0" rtlCol="0" anchor="ctr"/>
+          <a:lstStyle/>
+          <a:p>
+            <a:pPr indent="0" marL="0">
+              <a:buNone/>
+            </a:pPr>
+            <a:r>
+              <a:rPr lang="en-US" sz="1350" b="1" dirty="0">
+                <a:solidFill>
+                  <a:srgbClr val="1B2430"/>
+                </a:solidFill>
+                <a:latin typeface="Calibri" pitchFamily="34" charset="0"/>
+                <a:ea typeface="Calibri" pitchFamily="34" charset="-122"/>
+                <a:cs typeface="Calibri" pitchFamily="34" charset="-120"/>
+              </a:rPr>
+              <a:t>Standard</a:t>
+            </a:r>
+            <a:endParaRPr lang="en-US" sz="1350" dirty="0"/>
+          </a:p>
+        </p:txBody>
+      </p:sp>
+      <p:sp>
+        <p:nvSpPr>
+          <p:cNvPr id="27" name="Text 25"/>
+          <p:cNvSpPr/>
+          <p:nvPr/>
+        </p:nvSpPr>
+        <p:spPr>
+          <a:xfrm>
+            <a:off x="2651760" y="5760720"/>
+            <a:ext cx="8595360" cy="384048"/>
+          </a:xfrm>
+          <a:prstGeom prst="rect">
+            <a:avLst/>
+          </a:prstGeom>
+          <a:noFill/>
+          <a:ln/>
+        </p:spPr>
+        <p:txBody>
+          <a:bodyPr wrap="square" lIns="0" tIns="0" rIns="0" bIns="0" rtlCol="0" anchor="ctr"/>
+          <a:lstStyle/>
+          <a:p>
+            <a:pPr indent="0" marL="0">
+              <a:buNone/>
+            </a:pPr>
+            <a:r>
+              <a:rPr lang="en-US" sz="1350" dirty="0">
+                <a:solidFill>
+                  <a:srgbClr val="5C6675"/>
+                </a:solidFill>
+                <a:latin typeface="Calibri" pitchFamily="34" charset="0"/>
+                <a:ea typeface="Calibri" pitchFamily="34" charset="-122"/>
+                <a:cs typeface="Calibri" pitchFamily="34" charset="-120"/>
+              </a:rPr>
+              <a:t>FOCUS-compliant platforms for multi-cloud reporting</a:t>
+            </a:r>
+            <a:endParaRPr lang="en-US" sz="1350" dirty="0"/>
+          </a:p>
+        </p:txBody>
+      </p:sp>
+    </p:spTree>
+  </p:cSld>
+  <p:clrMapOvr>
+    <a:masterClrMapping/>
+  </p:clrMapOvr>
+</p:sld>
+</file>
+
+<file path=ppt/slides/slide26.xml><?xml version="1.0" encoding="utf-8"?>
+<p:sld xmlns:a="http://schemas.openxmlformats.org/drawingml/2006/main" xmlns:r="http://schemas.openxmlformats.org/officeDocument/2006/relationships" xmlns:p="http://schemas.openxmlformats.org/presentationml/2006/main">
+  <p:cSld name="Slide 26">
     <p:bg>
       <p:bgPr>
         <a:solidFill>
@@ -21117,9 +22325,9 @@
 </p:sld>
 </file>
 
-<file path=ppt/slides/slide26.xml><?xml version="1.0" encoding="utf-8"?>
+<file path=ppt/slides/slide27.xml><?xml version="1.0" encoding="utf-8"?>
 <p:sld xmlns:a="http://schemas.openxmlformats.org/drawingml/2006/main" xmlns:r="http://schemas.openxmlformats.org/officeDocument/2006/relationships" xmlns:p="http://schemas.openxmlformats.org/presentationml/2006/main">
-  <p:cSld name="Slide 26">
+  <p:cSld name="Slide 27">
     <p:bg>
       <p:bgPr>
         <a:solidFill>
